--- a/Auditix-slides.pptx
+++ b/Auditix-slides.pptx
@@ -15,9 +15,11 @@
     <p:sldId id="263" r:id="rId9"/>
     <p:sldId id="264" r:id="rId10"/>
     <p:sldId id="265" r:id="rId11"/>
+    <p:sldId id="266" r:id="rId12"/>
+    <p:sldId id="267" r:id="rId13"/>
   </p:sldIdLst>
   <p:notesMasterIdLst>
-    <p:notesMasterId r:id="rId12"/>
+    <p:notesMasterId r:id="rId14"/>
   </p:notesMasterIdLst>
   <p:sldSz cx="12192000" cy="6858000"/>
   <p:notesSz cx="6858000" cy="12192000"/>
@@ -599,7 +601,7 @@
           <a:p>
             <a:r>
               <a:rPr lang="en-US" dirty="0"/>
-              <a:t/>
+              <a:t>Se perguntarem tamanho de mercado: dizer que o dado vem do Censo Escolar do INEP e que o preço praticado sai de conversa com escolas, e que nenhum dos dois foi estimado por nós.</a:t>
             </a:r>
             <a:endParaRPr lang="en-US" dirty="0"/>
           </a:p>
@@ -623,6 +625,182 @@
             <a:fld id="{F7021451-1387-4CA6-816F-3879F97B5CBC}" type="slidenum">
               <a:rPr lang="en-US"/>
               <a:t>10</a:t>
+            </a:fld>
+            <a:endParaRPr lang="en-US"/>
+          </a:p>
+        </p:txBody>
+      </p:sp>
+    </p:spTree>
+    <p:extLst>
+      <p:ext uri="{BB962C8B-B14F-4D97-AF65-F5344CB8AC3E}">
+        <p14:creationId xmlns:p14="http://schemas.microsoft.com/office/powerpoint/2010/main" val="1024086991"/>
+      </p:ext>
+    </p:extLst>
+  </p:cSld>
+  <p:clrMapOvr>
+    <a:masterClrMapping/>
+  </p:clrMapOvr>
+</p:notes>
+</file>
+
+<file path=ppt/notesSlides/notesSlide11.xml><?xml version="1.0" encoding="utf-8"?>
+<p:notes xmlns:a="http://schemas.openxmlformats.org/drawingml/2006/main" xmlns:r="http://schemas.openxmlformats.org/officeDocument/2006/relationships" xmlns:p="http://schemas.openxmlformats.org/presentationml/2006/main">
+  <p:cSld>
+    <p:spTree>
+      <p:nvGrpSpPr>
+        <p:cNvPr id="1" name=""/>
+        <p:cNvGrpSpPr/>
+        <p:nvPr/>
+      </p:nvGrpSpPr>
+      <p:grpSpPr>
+        <a:xfrm>
+          <a:off x="0" y="0"/>
+          <a:ext cx="0" cy="0"/>
+          <a:chOff x="0" y="0"/>
+          <a:chExt cx="0" cy="0"/>
+        </a:xfrm>
+      </p:grpSpPr>
+      <p:sp>
+        <p:nvSpPr>
+          <p:cNvPr id="2" name="Slide Image Placeholder 1"/>
+          <p:cNvSpPr>
+            <a:spLocks noGrp="1" noRot="1" noChangeAspect="1"/>
+          </p:cNvSpPr>
+          <p:nvPr>
+            <p:ph type="sldImg"/>
+          </p:nvPr>
+        </p:nvSpPr>
+        <p:spPr/>
+      </p:sp>
+      <p:sp>
+        <p:nvSpPr>
+          <p:cNvPr id="3" name="Notes Placeholder 2"/>
+          <p:cNvSpPr>
+            <a:spLocks noGrp="1"/>
+          </p:cNvSpPr>
+          <p:nvPr>
+            <p:ph type="body" idx="1"/>
+          </p:nvPr>
+        </p:nvSpPr>
+        <p:spPr/>
+        <p:txBody>
+          <a:bodyPr/>
+          <a:lstStyle/>
+          <a:p>
+            <a:r>
+              <a:rPr lang="en-US" dirty="0"/>
+              <a:t/>
+            </a:r>
+            <a:endParaRPr lang="en-US" dirty="0"/>
+          </a:p>
+        </p:txBody>
+      </p:sp>
+      <p:sp>
+        <p:nvSpPr>
+          <p:cNvPr id="4" name="Slide Number Placeholder 3"/>
+          <p:cNvSpPr>
+            <a:spLocks noGrp="1"/>
+          </p:cNvSpPr>
+          <p:nvPr>
+            <p:ph type="sldNum" sz="quarter" idx="10"/>
+          </p:nvPr>
+        </p:nvSpPr>
+        <p:spPr/>
+        <p:txBody>
+          <a:bodyPr/>
+          <a:lstStyle/>
+          <a:p>
+            <a:fld id="{F7021451-1387-4CA6-816F-3879F97B5CBC}" type="slidenum">
+              <a:rPr lang="en-US"/>
+              <a:t>11</a:t>
+            </a:fld>
+            <a:endParaRPr lang="en-US"/>
+          </a:p>
+        </p:txBody>
+      </p:sp>
+    </p:spTree>
+    <p:extLst>
+      <p:ext uri="{BB962C8B-B14F-4D97-AF65-F5344CB8AC3E}">
+        <p14:creationId xmlns:p14="http://schemas.microsoft.com/office/powerpoint/2010/main" val="1024086991"/>
+      </p:ext>
+    </p:extLst>
+  </p:cSld>
+  <p:clrMapOvr>
+    <a:masterClrMapping/>
+  </p:clrMapOvr>
+</p:notes>
+</file>
+
+<file path=ppt/notesSlides/notesSlide12.xml><?xml version="1.0" encoding="utf-8"?>
+<p:notes xmlns:a="http://schemas.openxmlformats.org/drawingml/2006/main" xmlns:r="http://schemas.openxmlformats.org/officeDocument/2006/relationships" xmlns:p="http://schemas.openxmlformats.org/presentationml/2006/main">
+  <p:cSld>
+    <p:spTree>
+      <p:nvGrpSpPr>
+        <p:cNvPr id="1" name=""/>
+        <p:cNvGrpSpPr/>
+        <p:nvPr/>
+      </p:nvGrpSpPr>
+      <p:grpSpPr>
+        <a:xfrm>
+          <a:off x="0" y="0"/>
+          <a:ext cx="0" cy="0"/>
+          <a:chOff x="0" y="0"/>
+          <a:chExt cx="0" cy="0"/>
+        </a:xfrm>
+      </p:grpSpPr>
+      <p:sp>
+        <p:nvSpPr>
+          <p:cNvPr id="2" name="Slide Image Placeholder 1"/>
+          <p:cNvSpPr>
+            <a:spLocks noGrp="1" noRot="1" noChangeAspect="1"/>
+          </p:cNvSpPr>
+          <p:nvPr>
+            <p:ph type="sldImg"/>
+          </p:nvPr>
+        </p:nvSpPr>
+        <p:spPr/>
+      </p:sp>
+      <p:sp>
+        <p:nvSpPr>
+          <p:cNvPr id="3" name="Notes Placeholder 2"/>
+          <p:cNvSpPr>
+            <a:spLocks noGrp="1"/>
+          </p:cNvSpPr>
+          <p:nvPr>
+            <p:ph type="body" idx="1"/>
+          </p:nvPr>
+        </p:nvSpPr>
+        <p:spPr/>
+        <p:txBody>
+          <a:bodyPr/>
+          <a:lstStyle/>
+          <a:p>
+            <a:r>
+              <a:rPr lang="en-US" dirty="0"/>
+              <a:t/>
+            </a:r>
+            <a:endParaRPr lang="en-US" dirty="0"/>
+          </a:p>
+        </p:txBody>
+      </p:sp>
+      <p:sp>
+        <p:nvSpPr>
+          <p:cNvPr id="4" name="Slide Number Placeholder 3"/>
+          <p:cNvSpPr>
+            <a:spLocks noGrp="1"/>
+          </p:cNvSpPr>
+          <p:nvPr>
+            <p:ph type="sldNum" sz="quarter" idx="10"/>
+          </p:nvPr>
+        </p:nvSpPr>
+        <p:spPr/>
+        <p:txBody>
+          <a:bodyPr/>
+          <a:lstStyle/>
+          <a:p>
+            <a:fld id="{F7021451-1387-4CA6-816F-3879F97B5CBC}" type="slidenum">
+              <a:rPr lang="en-US"/>
+              <a:t>12</a:t>
             </a:fld>
             <a:endParaRPr lang="en-US"/>
           </a:p>
@@ -1953,7 +2131,7 @@
       </p:sp>
       <p:pic>
         <p:nvPicPr>
-          <p:cNvPr id="8" name="Image 0" descr="/tmp/claude-0/-home-user-Next/c399b536-4832-57fc-9401-b6d5540e41f3/scratchpad/ppt/queda-corte.png">    </p:cNvPr>
+          <p:cNvPr id="8" name="Image 0" descr="./ppt/queda-corte.png">    </p:cNvPr>
           <p:cNvPicPr>
             <a:picLocks noChangeAspect="1"/>
           </p:cNvPicPr>
@@ -2157,6 +2335,2025 @@
                 <a:ea typeface="Courier New" pitchFamily="34" charset="-122"/>
                 <a:cs typeface="Courier New" pitchFamily="34" charset="-120"/>
               </a:rPr>
+              <a:t>VALOR ECONÔMICO E ENTRADA NO MERCADO</a:t>
+            </a:r>
+            <a:endParaRPr lang="en-US" sz="1100" dirty="0"/>
+          </a:p>
+        </p:txBody>
+      </p:sp>
+      <p:sp>
+        <p:nvSpPr>
+          <p:cNvPr id="3" name="Text 1"/>
+          <p:cNvSpPr txBox="1"/>
+          <p:nvPr/>
+        </p:nvSpPr>
+        <p:spPr>
+          <a:xfrm>
+            <a:off x="685800" y="749808"/>
+            <a:ext cx="10820095" cy="1417320"/>
+          </a:xfrm>
+          <a:prstGeom prst="rect">
+            <a:avLst/>
+          </a:prstGeom>
+          <a:noFill/>
+          <a:ln/>
+        </p:spPr>
+        <p:txBody>
+          <a:bodyPr wrap="square" lIns="0" tIns="0" rIns="0" bIns="0" rtlCol="0" anchor="ctr"/>
+          <a:lstStyle/>
+          <a:p>
+            <a:pPr indent="0" marL="0">
+              <a:lnSpc>
+                <a:spcPts val="3800"/>
+              </a:lnSpc>
+              <a:buNone/>
+            </a:pPr>
+            <a:r>
+              <a:rPr lang="en-US" sz="3600" b="1" dirty="0">
+                <a:solidFill>
+                  <a:srgbClr val="EDF3EF"/>
+                </a:solidFill>
+                <a:latin typeface="Arial" pitchFamily="34" charset="0"/>
+                <a:ea typeface="Arial" pitchFamily="34" charset="-122"/>
+                <a:cs typeface="Arial" pitchFamily="34" charset="-120"/>
+              </a:rPr>
+              <a:t>O custo de cobrir mais</a:t>
+            </a:r>
+            <a:endParaRPr lang="en-US" sz="3600" dirty="0"/>
+          </a:p>
+          <a:p>
+            <a:pPr indent="0" marL="0">
+              <a:lnSpc>
+                <a:spcPts val="3800"/>
+              </a:lnSpc>
+              <a:buNone/>
+            </a:pPr>
+            <a:r>
+              <a:rPr lang="en-US" sz="3600" b="1" dirty="0">
+                <a:solidFill>
+                  <a:srgbClr val="EDF3EF"/>
+                </a:solidFill>
+                <a:latin typeface="Arial" pitchFamily="34" charset="0"/>
+                <a:ea typeface="Arial" pitchFamily="34" charset="-122"/>
+                <a:cs typeface="Arial" pitchFamily="34" charset="-120"/>
+              </a:rPr>
+              <a:t>uma sala é uma câmera.</a:t>
+            </a:r>
+            <a:endParaRPr lang="en-US" sz="3600" dirty="0"/>
+          </a:p>
+        </p:txBody>
+      </p:sp>
+      <p:sp>
+        <p:nvSpPr>
+          <p:cNvPr id="4" name="Text 2"/>
+          <p:cNvSpPr txBox="1"/>
+          <p:nvPr/>
+        </p:nvSpPr>
+        <p:spPr>
+          <a:xfrm>
+            <a:off x="685800" y="2514600"/>
+            <a:ext cx="10515600" cy="731520"/>
+          </a:xfrm>
+          <a:prstGeom prst="rect">
+            <a:avLst/>
+          </a:prstGeom>
+          <a:noFill/>
+          <a:ln/>
+        </p:spPr>
+        <p:txBody>
+          <a:bodyPr wrap="square" lIns="0" tIns="0" rIns="0" bIns="0" rtlCol="0" anchor="ctr"/>
+          <a:lstStyle/>
+          <a:p>
+            <a:pPr indent="0" marL="0">
+              <a:lnSpc>
+                <a:spcPts val="2200"/>
+              </a:lnSpc>
+              <a:buNone/>
+            </a:pPr>
+            <a:r>
+              <a:rPr lang="en-US" sz="1500" dirty="0">
+                <a:solidFill>
+                  <a:srgbClr val="9DB0A6"/>
+                </a:solidFill>
+                <a:latin typeface="Calibri" pitchFamily="34" charset="0"/>
+                <a:ea typeface="Calibri" pitchFamily="34" charset="-122"/>
+                <a:cs typeface="Calibri" pitchFamily="34" charset="-120"/>
+              </a:rPr>
+              <a:t>O concorrente cobra licença mensal POR CÂMERA, porque o vídeo dele roda na nuvem dele. O nosso roda na borda, e o que sobe para a nuvem é uma linha de texto.</a:t>
+            </a:r>
+            <a:endParaRPr lang="en-US" sz="1500" dirty="0"/>
+          </a:p>
+        </p:txBody>
+      </p:sp>
+      <p:sp>
+        <p:nvSpPr>
+          <p:cNvPr id="5" name="Text 3"/>
+          <p:cNvSpPr txBox="1"/>
+          <p:nvPr/>
+        </p:nvSpPr>
+        <p:spPr>
+          <a:xfrm>
+            <a:off x="685800" y="3246120"/>
+            <a:ext cx="5120640" cy="320040"/>
+          </a:xfrm>
+          <a:prstGeom prst="rect">
+            <a:avLst/>
+          </a:prstGeom>
+          <a:noFill/>
+          <a:ln/>
+        </p:spPr>
+        <p:txBody>
+          <a:bodyPr wrap="square" lIns="0" tIns="0" rIns="0" bIns="0" rtlCol="0" anchor="ctr"/>
+          <a:lstStyle/>
+          <a:p>
+            <a:pPr indent="0" marL="0">
+              <a:buNone/>
+            </a:pPr>
+            <a:r>
+              <a:rPr lang="en-US" sz="1800" b="1" dirty="0">
+                <a:solidFill>
+                  <a:srgbClr val="EDF3EF"/>
+                </a:solidFill>
+                <a:latin typeface="Arial" pitchFamily="34" charset="0"/>
+                <a:ea typeface="Arial" pitchFamily="34" charset="-122"/>
+                <a:cs typeface="Arial" pitchFamily="34" charset="-120"/>
+              </a:rPr>
+              <a:t>O que custa</a:t>
+            </a:r>
+            <a:endParaRPr lang="en-US" sz="1800" dirty="0"/>
+          </a:p>
+        </p:txBody>
+      </p:sp>
+      <p:sp>
+        <p:nvSpPr>
+          <p:cNvPr id="6" name="Shape 4"/>
+          <p:cNvSpPr/>
+          <p:nvPr/>
+        </p:nvSpPr>
+        <p:spPr>
+          <a:xfrm>
+            <a:off x="685800" y="3703320"/>
+            <a:ext cx="5120640" cy="0"/>
+          </a:xfrm>
+          <a:prstGeom prst="line">
+            <a:avLst/>
+          </a:prstGeom>
+          <a:noFill/>
+          <a:ln w="12700">
+            <a:solidFill>
+              <a:srgbClr val="24322B"/>
+            </a:solidFill>
+            <a:prstDash val="solid"/>
+          </a:ln>
+        </p:spPr>
+      </p:sp>
+      <p:sp>
+        <p:nvSpPr>
+          <p:cNvPr id="7" name="Text 5"/>
+          <p:cNvSpPr txBox="1"/>
+          <p:nvPr/>
+        </p:nvSpPr>
+        <p:spPr>
+          <a:xfrm>
+            <a:off x="685800" y="3785616"/>
+            <a:ext cx="3017520" cy="320040"/>
+          </a:xfrm>
+          <a:prstGeom prst="rect">
+            <a:avLst/>
+          </a:prstGeom>
+          <a:noFill/>
+          <a:ln/>
+        </p:spPr>
+        <p:txBody>
+          <a:bodyPr wrap="square" lIns="0" tIns="0" rIns="0" bIns="0" rtlCol="0" anchor="ctr"/>
+          <a:lstStyle/>
+          <a:p>
+            <a:pPr indent="0" marL="0">
+              <a:buNone/>
+            </a:pPr>
+            <a:r>
+              <a:rPr lang="en-US" sz="1300" b="1" dirty="0">
+                <a:solidFill>
+                  <a:srgbClr val="EDF3EF"/>
+                </a:solidFill>
+                <a:latin typeface="Arial" pitchFamily="34" charset="0"/>
+                <a:ea typeface="Arial" pitchFamily="34" charset="-122"/>
+                <a:cs typeface="Arial" pitchFamily="34" charset="-120"/>
+              </a:rPr>
+              <a:t>Câmera IP, por sala</a:t>
+            </a:r>
+            <a:endParaRPr lang="en-US" sz="1300" dirty="0"/>
+          </a:p>
+        </p:txBody>
+      </p:sp>
+      <p:sp>
+        <p:nvSpPr>
+          <p:cNvPr id="8" name="Text 6"/>
+          <p:cNvSpPr txBox="1"/>
+          <p:nvPr/>
+        </p:nvSpPr>
+        <p:spPr>
+          <a:xfrm>
+            <a:off x="3703320" y="3803904"/>
+            <a:ext cx="2103120" cy="292608"/>
+          </a:xfrm>
+          <a:prstGeom prst="rect">
+            <a:avLst/>
+          </a:prstGeom>
+          <a:noFill/>
+          <a:ln/>
+        </p:spPr>
+        <p:txBody>
+          <a:bodyPr wrap="square" lIns="0" tIns="0" rIns="0" bIns="0" rtlCol="0" anchor="ctr"/>
+          <a:lstStyle/>
+          <a:p>
+            <a:pPr algn="r" indent="0" marL="0">
+              <a:buNone/>
+            </a:pPr>
+            <a:r>
+              <a:rPr lang="en-US" sz="1100" dirty="0">
+                <a:solidFill>
+                  <a:srgbClr val="9DB0A6"/>
+                </a:solidFill>
+                <a:latin typeface="Courier New" pitchFamily="34" charset="0"/>
+                <a:ea typeface="Courier New" pitchFamily="34" charset="-122"/>
+                <a:cs typeface="Courier New" pitchFamily="34" charset="-120"/>
+              </a:rPr>
+              <a:t>R$ 200 a R$ 680</a:t>
+            </a:r>
+            <a:endParaRPr lang="en-US" sz="1100" dirty="0"/>
+          </a:p>
+        </p:txBody>
+      </p:sp>
+      <p:sp>
+        <p:nvSpPr>
+          <p:cNvPr id="9" name="Shape 7"/>
+          <p:cNvSpPr/>
+          <p:nvPr/>
+        </p:nvSpPr>
+        <p:spPr>
+          <a:xfrm>
+            <a:off x="685800" y="4178808"/>
+            <a:ext cx="5120640" cy="0"/>
+          </a:xfrm>
+          <a:prstGeom prst="line">
+            <a:avLst/>
+          </a:prstGeom>
+          <a:noFill/>
+          <a:ln w="12700">
+            <a:solidFill>
+              <a:srgbClr val="24322B"/>
+            </a:solidFill>
+            <a:prstDash val="solid"/>
+          </a:ln>
+        </p:spPr>
+      </p:sp>
+      <p:sp>
+        <p:nvSpPr>
+          <p:cNvPr id="10" name="Text 8"/>
+          <p:cNvSpPr txBox="1"/>
+          <p:nvPr/>
+        </p:nvSpPr>
+        <p:spPr>
+          <a:xfrm>
+            <a:off x="685800" y="4261104"/>
+            <a:ext cx="3017520" cy="320040"/>
+          </a:xfrm>
+          <a:prstGeom prst="rect">
+            <a:avLst/>
+          </a:prstGeom>
+          <a:noFill/>
+          <a:ln/>
+        </p:spPr>
+        <p:txBody>
+          <a:bodyPr wrap="square" lIns="0" tIns="0" rIns="0" bIns="0" rtlCol="0" anchor="ctr"/>
+          <a:lstStyle/>
+          <a:p>
+            <a:pPr indent="0" marL="0">
+              <a:buNone/>
+            </a:pPr>
+            <a:r>
+              <a:rPr lang="en-US" sz="1300" b="1" dirty="0">
+                <a:solidFill>
+                  <a:srgbClr val="EDF3EF"/>
+                </a:solidFill>
+                <a:latin typeface="Arial" pitchFamily="34" charset="0"/>
+                <a:ea typeface="Arial" pitchFamily="34" charset="-122"/>
+                <a:cs typeface="Arial" pitchFamily="34" charset="-120"/>
+              </a:rPr>
+              <a:t>Servidor</a:t>
+            </a:r>
+            <a:endParaRPr lang="en-US" sz="1300" dirty="0"/>
+          </a:p>
+        </p:txBody>
+      </p:sp>
+      <p:sp>
+        <p:nvSpPr>
+          <p:cNvPr id="11" name="Text 9"/>
+          <p:cNvSpPr txBox="1"/>
+          <p:nvPr/>
+        </p:nvSpPr>
+        <p:spPr>
+          <a:xfrm>
+            <a:off x="3703320" y="4279392"/>
+            <a:ext cx="2103120" cy="292608"/>
+          </a:xfrm>
+          <a:prstGeom prst="rect">
+            <a:avLst/>
+          </a:prstGeom>
+          <a:noFill/>
+          <a:ln/>
+        </p:spPr>
+        <p:txBody>
+          <a:bodyPr wrap="square" lIns="0" tIns="0" rIns="0" bIns="0" rtlCol="0" anchor="ctr"/>
+          <a:lstStyle/>
+          <a:p>
+            <a:pPr algn="r" indent="0" marL="0">
+              <a:buNone/>
+            </a:pPr>
+            <a:r>
+              <a:rPr lang="en-US" sz="1100" dirty="0">
+                <a:solidFill>
+                  <a:srgbClr val="9DB0A6"/>
+                </a:solidFill>
+                <a:latin typeface="Courier New" pitchFamily="34" charset="0"/>
+                <a:ea typeface="Courier New" pitchFamily="34" charset="-122"/>
+                <a:cs typeface="Courier New" pitchFamily="34" charset="-120"/>
+              </a:rPr>
+              <a:t>1 PC comum por escola</a:t>
+            </a:r>
+            <a:endParaRPr lang="en-US" sz="1100" dirty="0"/>
+          </a:p>
+        </p:txBody>
+      </p:sp>
+      <p:sp>
+        <p:nvSpPr>
+          <p:cNvPr id="12" name="Shape 10"/>
+          <p:cNvSpPr/>
+          <p:nvPr/>
+        </p:nvSpPr>
+        <p:spPr>
+          <a:xfrm>
+            <a:off x="685800" y="4654296"/>
+            <a:ext cx="5120640" cy="0"/>
+          </a:xfrm>
+          <a:prstGeom prst="line">
+            <a:avLst/>
+          </a:prstGeom>
+          <a:noFill/>
+          <a:ln w="12700">
+            <a:solidFill>
+              <a:srgbClr val="24322B"/>
+            </a:solidFill>
+            <a:prstDash val="solid"/>
+          </a:ln>
+        </p:spPr>
+      </p:sp>
+      <p:sp>
+        <p:nvSpPr>
+          <p:cNvPr id="13" name="Text 11"/>
+          <p:cNvSpPr txBox="1"/>
+          <p:nvPr/>
+        </p:nvSpPr>
+        <p:spPr>
+          <a:xfrm>
+            <a:off x="685800" y="4736592"/>
+            <a:ext cx="3017520" cy="320040"/>
+          </a:xfrm>
+          <a:prstGeom prst="rect">
+            <a:avLst/>
+          </a:prstGeom>
+          <a:noFill/>
+          <a:ln/>
+        </p:spPr>
+        <p:txBody>
+          <a:bodyPr wrap="square" lIns="0" tIns="0" rIns="0" bIns="0" rtlCol="0" anchor="ctr"/>
+          <a:lstStyle/>
+          <a:p>
+            <a:pPr indent="0" marL="0">
+              <a:buNone/>
+            </a:pPr>
+            <a:r>
+              <a:rPr lang="en-US" sz="1300" b="1" dirty="0">
+                <a:solidFill>
+                  <a:srgbClr val="EDF3EF"/>
+                </a:solidFill>
+                <a:latin typeface="Arial" pitchFamily="34" charset="0"/>
+                <a:ea typeface="Arial" pitchFamily="34" charset="-122"/>
+                <a:cs typeface="Arial" pitchFamily="34" charset="-120"/>
+              </a:rPr>
+              <a:t>Licença de software</a:t>
+            </a:r>
+            <a:endParaRPr lang="en-US" sz="1300" dirty="0"/>
+          </a:p>
+        </p:txBody>
+      </p:sp>
+      <p:sp>
+        <p:nvSpPr>
+          <p:cNvPr id="14" name="Text 12"/>
+          <p:cNvSpPr txBox="1"/>
+          <p:nvPr/>
+        </p:nvSpPr>
+        <p:spPr>
+          <a:xfrm>
+            <a:off x="3703320" y="4754880"/>
+            <a:ext cx="2103120" cy="292608"/>
+          </a:xfrm>
+          <a:prstGeom prst="rect">
+            <a:avLst/>
+          </a:prstGeom>
+          <a:noFill/>
+          <a:ln/>
+        </p:spPr>
+        <p:txBody>
+          <a:bodyPr wrap="square" lIns="0" tIns="0" rIns="0" bIns="0" rtlCol="0" anchor="ctr"/>
+          <a:lstStyle/>
+          <a:p>
+            <a:pPr algn="r" indent="0" marL="0">
+              <a:buNone/>
+            </a:pPr>
+            <a:r>
+              <a:rPr lang="en-US" sz="1100" dirty="0">
+                <a:solidFill>
+                  <a:srgbClr val="3FBF5A"/>
+                </a:solidFill>
+                <a:latin typeface="Courier New" pitchFamily="34" charset="0"/>
+                <a:ea typeface="Courier New" pitchFamily="34" charset="-122"/>
+                <a:cs typeface="Courier New" pitchFamily="34" charset="-120"/>
+              </a:rPr>
+              <a:t>R$ 0 por câmera</a:t>
+            </a:r>
+            <a:endParaRPr lang="en-US" sz="1100" dirty="0"/>
+          </a:p>
+        </p:txBody>
+      </p:sp>
+      <p:sp>
+        <p:nvSpPr>
+          <p:cNvPr id="15" name="Shape 13"/>
+          <p:cNvSpPr/>
+          <p:nvPr/>
+        </p:nvSpPr>
+        <p:spPr>
+          <a:xfrm>
+            <a:off x="685800" y="5129784"/>
+            <a:ext cx="5120640" cy="0"/>
+          </a:xfrm>
+          <a:prstGeom prst="line">
+            <a:avLst/>
+          </a:prstGeom>
+          <a:noFill/>
+          <a:ln w="12700">
+            <a:solidFill>
+              <a:srgbClr val="24322B"/>
+            </a:solidFill>
+            <a:prstDash val="solid"/>
+          </a:ln>
+        </p:spPr>
+      </p:sp>
+      <p:sp>
+        <p:nvSpPr>
+          <p:cNvPr id="16" name="Text 14"/>
+          <p:cNvSpPr txBox="1"/>
+          <p:nvPr/>
+        </p:nvSpPr>
+        <p:spPr>
+          <a:xfrm>
+            <a:off x="685800" y="5212080"/>
+            <a:ext cx="3017520" cy="320040"/>
+          </a:xfrm>
+          <a:prstGeom prst="rect">
+            <a:avLst/>
+          </a:prstGeom>
+          <a:noFill/>
+          <a:ln/>
+        </p:spPr>
+        <p:txBody>
+          <a:bodyPr wrap="square" lIns="0" tIns="0" rIns="0" bIns="0" rtlCol="0" anchor="ctr"/>
+          <a:lstStyle/>
+          <a:p>
+            <a:pPr indent="0" marL="0">
+              <a:buNone/>
+            </a:pPr>
+            <a:r>
+              <a:rPr lang="en-US" sz="1300" b="1" dirty="0">
+                <a:solidFill>
+                  <a:srgbClr val="EDF3EF"/>
+                </a:solidFill>
+                <a:latin typeface="Arial" pitchFamily="34" charset="0"/>
+                <a:ea typeface="Arial" pitchFamily="34" charset="-122"/>
+                <a:cs typeface="Arial" pitchFamily="34" charset="-120"/>
+              </a:rPr>
+              <a:t>Nuvem do alerta</a:t>
+            </a:r>
+            <a:endParaRPr lang="en-US" sz="1300" dirty="0"/>
+          </a:p>
+        </p:txBody>
+      </p:sp>
+      <p:sp>
+        <p:nvSpPr>
+          <p:cNvPr id="17" name="Text 15"/>
+          <p:cNvSpPr txBox="1"/>
+          <p:nvPr/>
+        </p:nvSpPr>
+        <p:spPr>
+          <a:xfrm>
+            <a:off x="3703320" y="5230368"/>
+            <a:ext cx="2103120" cy="292608"/>
+          </a:xfrm>
+          <a:prstGeom prst="rect">
+            <a:avLst/>
+          </a:prstGeom>
+          <a:noFill/>
+          <a:ln/>
+        </p:spPr>
+        <p:txBody>
+          <a:bodyPr wrap="square" lIns="0" tIns="0" rIns="0" bIns="0" rtlCol="0" anchor="ctr"/>
+          <a:lstStyle/>
+          <a:p>
+            <a:pPr algn="r" indent="0" marL="0">
+              <a:buNone/>
+            </a:pPr>
+            <a:r>
+              <a:rPr lang="en-US" sz="1100" dirty="0">
+                <a:solidFill>
+                  <a:srgbClr val="3FBF5A"/>
+                </a:solidFill>
+                <a:latin typeface="Courier New" pitchFamily="34" charset="0"/>
+                <a:ea typeface="Courier New" pitchFamily="34" charset="-122"/>
+                <a:cs typeface="Courier New" pitchFamily="34" charset="-120"/>
+              </a:rPr>
+              <a:t>centavos por mês</a:t>
+            </a:r>
+            <a:endParaRPr lang="en-US" sz="1100" dirty="0"/>
+          </a:p>
+        </p:txBody>
+      </p:sp>
+      <p:sp>
+        <p:nvSpPr>
+          <p:cNvPr id="18" name="Shape 16"/>
+          <p:cNvSpPr/>
+          <p:nvPr/>
+        </p:nvSpPr>
+        <p:spPr>
+          <a:xfrm>
+            <a:off x="685800" y="5605272"/>
+            <a:ext cx="5120640" cy="0"/>
+          </a:xfrm>
+          <a:prstGeom prst="line">
+            <a:avLst/>
+          </a:prstGeom>
+          <a:noFill/>
+          <a:ln w="12700">
+            <a:solidFill>
+              <a:srgbClr val="24322B"/>
+            </a:solidFill>
+            <a:prstDash val="solid"/>
+          </a:ln>
+        </p:spPr>
+      </p:sp>
+      <p:sp>
+        <p:nvSpPr>
+          <p:cNvPr id="19" name="Text 17"/>
+          <p:cNvSpPr txBox="1"/>
+          <p:nvPr/>
+        </p:nvSpPr>
+        <p:spPr>
+          <a:xfrm>
+            <a:off x="685800" y="5687568"/>
+            <a:ext cx="5120640" cy="365760"/>
+          </a:xfrm>
+          <a:prstGeom prst="rect">
+            <a:avLst/>
+          </a:prstGeom>
+          <a:noFill/>
+          <a:ln/>
+        </p:spPr>
+        <p:txBody>
+          <a:bodyPr wrap="square" lIns="0" tIns="0" rIns="0" bIns="0" rtlCol="0" anchor="ctr"/>
+          <a:lstStyle/>
+          <a:p>
+            <a:pPr indent="0" marL="0">
+              <a:lnSpc>
+                <a:spcPts val="1300"/>
+              </a:lnSpc>
+              <a:buNone/>
+            </a:pPr>
+            <a:r>
+              <a:rPr lang="en-US" sz="900" dirty="0">
+                <a:solidFill>
+                  <a:srgbClr val="6A7D74"/>
+                </a:solidFill>
+                <a:latin typeface="Courier New" pitchFamily="34" charset="0"/>
+                <a:ea typeface="Courier New" pitchFamily="34" charset="-122"/>
+                <a:cs typeface="Courier New" pitchFamily="34" charset="-120"/>
+              </a:rPr>
+              <a:t>sem placa de vídeo, sem custo por fluxo, sem mensalidade que cresce com a escola</a:t>
+            </a:r>
+            <a:endParaRPr lang="en-US" sz="900" dirty="0"/>
+          </a:p>
+        </p:txBody>
+      </p:sp>
+      <p:sp>
+        <p:nvSpPr>
+          <p:cNvPr id="20" name="Text 18"/>
+          <p:cNvSpPr txBox="1"/>
+          <p:nvPr/>
+        </p:nvSpPr>
+        <p:spPr>
+          <a:xfrm>
+            <a:off x="6492240" y="3246120"/>
+            <a:ext cx="5029200" cy="320040"/>
+          </a:xfrm>
+          <a:prstGeom prst="rect">
+            <a:avLst/>
+          </a:prstGeom>
+          <a:noFill/>
+          <a:ln/>
+        </p:spPr>
+        <p:txBody>
+          <a:bodyPr wrap="square" lIns="0" tIns="0" rIns="0" bIns="0" rtlCol="0" anchor="ctr"/>
+          <a:lstStyle/>
+          <a:p>
+            <a:pPr indent="0" marL="0">
+              <a:buNone/>
+            </a:pPr>
+            <a:r>
+              <a:rPr lang="en-US" sz="1800" b="1" dirty="0">
+                <a:solidFill>
+                  <a:srgbClr val="EDF3EF"/>
+                </a:solidFill>
+                <a:latin typeface="Arial" pitchFamily="34" charset="0"/>
+                <a:ea typeface="Arial" pitchFamily="34" charset="-122"/>
+                <a:cs typeface="Arial" pitchFamily="34" charset="-120"/>
+              </a:rPr>
+              <a:t>Como entra no mercado</a:t>
+            </a:r>
+            <a:endParaRPr lang="en-US" sz="1800" dirty="0"/>
+          </a:p>
+        </p:txBody>
+      </p:sp>
+      <p:sp>
+        <p:nvSpPr>
+          <p:cNvPr id="21" name="Shape 19"/>
+          <p:cNvSpPr/>
+          <p:nvPr/>
+        </p:nvSpPr>
+        <p:spPr>
+          <a:xfrm>
+            <a:off x="6492240" y="3721608"/>
+            <a:ext cx="292608" cy="292608"/>
+          </a:xfrm>
+          <a:prstGeom prst="ellipse">
+            <a:avLst/>
+          </a:prstGeom>
+          <a:solidFill>
+            <a:srgbClr val="0B100E"/>
+          </a:solidFill>
+          <a:ln w="12700">
+            <a:solidFill>
+              <a:srgbClr val="24322B"/>
+            </a:solidFill>
+            <a:prstDash val="solid"/>
+          </a:ln>
+        </p:spPr>
+      </p:sp>
+      <p:sp>
+        <p:nvSpPr>
+          <p:cNvPr id="22" name="Text 20"/>
+          <p:cNvSpPr txBox="1"/>
+          <p:nvPr/>
+        </p:nvSpPr>
+        <p:spPr>
+          <a:xfrm>
+            <a:off x="6492240" y="3749040"/>
+            <a:ext cx="292608" cy="237744"/>
+          </a:xfrm>
+          <a:prstGeom prst="rect">
+            <a:avLst/>
+          </a:prstGeom>
+          <a:noFill/>
+          <a:ln/>
+        </p:spPr>
+        <p:txBody>
+          <a:bodyPr wrap="square" lIns="0" tIns="0" rIns="0" bIns="0" rtlCol="0" anchor="ctr"/>
+          <a:lstStyle/>
+          <a:p>
+            <a:pPr algn="ctr" indent="0" marL="0">
+              <a:buNone/>
+            </a:pPr>
+            <a:r>
+              <a:rPr lang="en-US" sz="1000" dirty="0">
+                <a:solidFill>
+                  <a:srgbClr val="3FBF5A"/>
+                </a:solidFill>
+                <a:latin typeface="Courier New" pitchFamily="34" charset="0"/>
+                <a:ea typeface="Courier New" pitchFamily="34" charset="-122"/>
+                <a:cs typeface="Courier New" pitchFamily="34" charset="-120"/>
+              </a:rPr>
+              <a:t>1</a:t>
+            </a:r>
+            <a:endParaRPr lang="en-US" sz="1000" dirty="0"/>
+          </a:p>
+        </p:txBody>
+      </p:sp>
+      <p:sp>
+        <p:nvSpPr>
+          <p:cNvPr id="23" name="Text 21"/>
+          <p:cNvSpPr txBox="1"/>
+          <p:nvPr/>
+        </p:nvSpPr>
+        <p:spPr>
+          <a:xfrm>
+            <a:off x="6949440" y="3703320"/>
+            <a:ext cx="4572000" cy="274320"/>
+          </a:xfrm>
+          <a:prstGeom prst="rect">
+            <a:avLst/>
+          </a:prstGeom>
+          <a:noFill/>
+          <a:ln/>
+        </p:spPr>
+        <p:txBody>
+          <a:bodyPr wrap="square" lIns="0" tIns="0" rIns="0" bIns="0" rtlCol="0" anchor="ctr"/>
+          <a:lstStyle/>
+          <a:p>
+            <a:pPr indent="0" marL="0">
+              <a:buNone/>
+            </a:pPr>
+            <a:r>
+              <a:rPr lang="en-US" sz="1400" b="1" dirty="0">
+                <a:solidFill>
+                  <a:srgbClr val="EDF3EF"/>
+                </a:solidFill>
+                <a:latin typeface="Arial" pitchFamily="34" charset="0"/>
+                <a:ea typeface="Arial" pitchFamily="34" charset="-122"/>
+                <a:cs typeface="Arial" pitchFamily="34" charset="-120"/>
+              </a:rPr>
+              <a:t>Uma escola, de graça</a:t>
+            </a:r>
+            <a:endParaRPr lang="en-US" sz="1400" dirty="0"/>
+          </a:p>
+        </p:txBody>
+      </p:sp>
+      <p:sp>
+        <p:nvSpPr>
+          <p:cNvPr id="24" name="Text 22"/>
+          <p:cNvSpPr txBox="1"/>
+          <p:nvPr/>
+        </p:nvSpPr>
+        <p:spPr>
+          <a:xfrm>
+            <a:off x="6949440" y="3977640"/>
+            <a:ext cx="4572000" cy="502920"/>
+          </a:xfrm>
+          <a:prstGeom prst="rect">
+            <a:avLst/>
+          </a:prstGeom>
+          <a:noFill/>
+          <a:ln/>
+        </p:spPr>
+        <p:txBody>
+          <a:bodyPr wrap="square" lIns="0" tIns="0" rIns="0" bIns="0" rtlCol="0" anchor="ctr"/>
+          <a:lstStyle/>
+          <a:p>
+            <a:pPr indent="0" marL="0">
+              <a:lnSpc>
+                <a:spcPts val="1400"/>
+              </a:lnSpc>
+              <a:buNone/>
+            </a:pPr>
+            <a:r>
+              <a:rPr lang="en-US" sz="1150" dirty="0">
+                <a:solidFill>
+                  <a:srgbClr val="9DB0A6"/>
+                </a:solidFill>
+                <a:latin typeface="Calibri" pitchFamily="34" charset="0"/>
+                <a:ea typeface="Calibri" pitchFamily="34" charset="-122"/>
+                <a:cs typeface="Calibri" pitchFamily="34" charset="-120"/>
+              </a:rPr>
+              <a:t>Em troca do dado que falta: quantos alertas por dia a coordenação aguenta, e quantos foram engano.</a:t>
+            </a:r>
+            <a:endParaRPr lang="en-US" sz="1150" dirty="0"/>
+          </a:p>
+        </p:txBody>
+      </p:sp>
+      <p:sp>
+        <p:nvSpPr>
+          <p:cNvPr id="25" name="Shape 23"/>
+          <p:cNvSpPr/>
+          <p:nvPr/>
+        </p:nvSpPr>
+        <p:spPr>
+          <a:xfrm>
+            <a:off x="6492240" y="4498848"/>
+            <a:ext cx="292608" cy="292608"/>
+          </a:xfrm>
+          <a:prstGeom prst="ellipse">
+            <a:avLst/>
+          </a:prstGeom>
+          <a:solidFill>
+            <a:srgbClr val="0B100E"/>
+          </a:solidFill>
+          <a:ln w="12700">
+            <a:solidFill>
+              <a:srgbClr val="24322B"/>
+            </a:solidFill>
+            <a:prstDash val="solid"/>
+          </a:ln>
+        </p:spPr>
+      </p:sp>
+      <p:sp>
+        <p:nvSpPr>
+          <p:cNvPr id="26" name="Text 24"/>
+          <p:cNvSpPr txBox="1"/>
+          <p:nvPr/>
+        </p:nvSpPr>
+        <p:spPr>
+          <a:xfrm>
+            <a:off x="6492240" y="4526280"/>
+            <a:ext cx="292608" cy="237744"/>
+          </a:xfrm>
+          <a:prstGeom prst="rect">
+            <a:avLst/>
+          </a:prstGeom>
+          <a:noFill/>
+          <a:ln/>
+        </p:spPr>
+        <p:txBody>
+          <a:bodyPr wrap="square" lIns="0" tIns="0" rIns="0" bIns="0" rtlCol="0" anchor="ctr"/>
+          <a:lstStyle/>
+          <a:p>
+            <a:pPr algn="ctr" indent="0" marL="0">
+              <a:buNone/>
+            </a:pPr>
+            <a:r>
+              <a:rPr lang="en-US" sz="1000" dirty="0">
+                <a:solidFill>
+                  <a:srgbClr val="3FBF5A"/>
+                </a:solidFill>
+                <a:latin typeface="Courier New" pitchFamily="34" charset="0"/>
+                <a:ea typeface="Courier New" pitchFamily="34" charset="-122"/>
+                <a:cs typeface="Courier New" pitchFamily="34" charset="-120"/>
+              </a:rPr>
+              <a:t>2</a:t>
+            </a:r>
+            <a:endParaRPr lang="en-US" sz="1000" dirty="0"/>
+          </a:p>
+        </p:txBody>
+      </p:sp>
+      <p:sp>
+        <p:nvSpPr>
+          <p:cNvPr id="27" name="Text 25"/>
+          <p:cNvSpPr txBox="1"/>
+          <p:nvPr/>
+        </p:nvSpPr>
+        <p:spPr>
+          <a:xfrm>
+            <a:off x="6949440" y="4480560"/>
+            <a:ext cx="4572000" cy="274320"/>
+          </a:xfrm>
+          <a:prstGeom prst="rect">
+            <a:avLst/>
+          </a:prstGeom>
+          <a:noFill/>
+          <a:ln/>
+        </p:spPr>
+        <p:txBody>
+          <a:bodyPr wrap="square" lIns="0" tIns="0" rIns="0" bIns="0" rtlCol="0" anchor="ctr"/>
+          <a:lstStyle/>
+          <a:p>
+            <a:pPr indent="0" marL="0">
+              <a:buNone/>
+            </a:pPr>
+            <a:r>
+              <a:rPr lang="en-US" sz="1400" b="1" dirty="0">
+                <a:solidFill>
+                  <a:srgbClr val="EDF3EF"/>
+                </a:solidFill>
+                <a:latin typeface="Arial" pitchFamily="34" charset="0"/>
+                <a:ea typeface="Arial" pitchFamily="34" charset="-122"/>
+                <a:cs typeface="Arial" pitchFamily="34" charset="-120"/>
+              </a:rPr>
+              <a:t>O piloto vira carta</a:t>
+            </a:r>
+            <a:endParaRPr lang="en-US" sz="1400" dirty="0"/>
+          </a:p>
+        </p:txBody>
+      </p:sp>
+      <p:sp>
+        <p:nvSpPr>
+          <p:cNvPr id="28" name="Text 26"/>
+          <p:cNvSpPr txBox="1"/>
+          <p:nvPr/>
+        </p:nvSpPr>
+        <p:spPr>
+          <a:xfrm>
+            <a:off x="6949440" y="4754880"/>
+            <a:ext cx="4572000" cy="502920"/>
+          </a:xfrm>
+          <a:prstGeom prst="rect">
+            <a:avLst/>
+          </a:prstGeom>
+          <a:noFill/>
+          <a:ln/>
+        </p:spPr>
+        <p:txBody>
+          <a:bodyPr wrap="square" lIns="0" tIns="0" rIns="0" bIns="0" rtlCol="0" anchor="ctr"/>
+          <a:lstStyle/>
+          <a:p>
+            <a:pPr indent="0" marL="0">
+              <a:lnSpc>
+                <a:spcPts val="1400"/>
+              </a:lnSpc>
+              <a:buNone/>
+            </a:pPr>
+            <a:r>
+              <a:rPr lang="en-US" sz="1150" dirty="0">
+                <a:solidFill>
+                  <a:srgbClr val="9DB0A6"/>
+                </a:solidFill>
+                <a:latin typeface="Calibri" pitchFamily="34" charset="0"/>
+                <a:ea typeface="Calibri" pitchFamily="34" charset="-122"/>
+                <a:cs typeface="Calibri" pitchFamily="34" charset="-120"/>
+              </a:rPr>
+              <a:t>Um depoimento da coordenação abre a porta da segunda escola melhor que qualquer slide.</a:t>
+            </a:r>
+            <a:endParaRPr lang="en-US" sz="1150" dirty="0"/>
+          </a:p>
+        </p:txBody>
+      </p:sp>
+      <p:sp>
+        <p:nvSpPr>
+          <p:cNvPr id="29" name="Shape 27"/>
+          <p:cNvSpPr/>
+          <p:nvPr/>
+        </p:nvSpPr>
+        <p:spPr>
+          <a:xfrm>
+            <a:off x="6492240" y="5276088"/>
+            <a:ext cx="292608" cy="292608"/>
+          </a:xfrm>
+          <a:prstGeom prst="ellipse">
+            <a:avLst/>
+          </a:prstGeom>
+          <a:solidFill>
+            <a:srgbClr val="0B100E"/>
+          </a:solidFill>
+          <a:ln w="12700">
+            <a:solidFill>
+              <a:srgbClr val="24322B"/>
+            </a:solidFill>
+            <a:prstDash val="solid"/>
+          </a:ln>
+        </p:spPr>
+      </p:sp>
+      <p:sp>
+        <p:nvSpPr>
+          <p:cNvPr id="30" name="Text 28"/>
+          <p:cNvSpPr txBox="1"/>
+          <p:nvPr/>
+        </p:nvSpPr>
+        <p:spPr>
+          <a:xfrm>
+            <a:off x="6492240" y="5303520"/>
+            <a:ext cx="292608" cy="237744"/>
+          </a:xfrm>
+          <a:prstGeom prst="rect">
+            <a:avLst/>
+          </a:prstGeom>
+          <a:noFill/>
+          <a:ln/>
+        </p:spPr>
+        <p:txBody>
+          <a:bodyPr wrap="square" lIns="0" tIns="0" rIns="0" bIns="0" rtlCol="0" anchor="ctr"/>
+          <a:lstStyle/>
+          <a:p>
+            <a:pPr algn="ctr" indent="0" marL="0">
+              <a:buNone/>
+            </a:pPr>
+            <a:r>
+              <a:rPr lang="en-US" sz="1000" dirty="0">
+                <a:solidFill>
+                  <a:srgbClr val="3FBF5A"/>
+                </a:solidFill>
+                <a:latin typeface="Courier New" pitchFamily="34" charset="0"/>
+                <a:ea typeface="Courier New" pitchFamily="34" charset="-122"/>
+                <a:cs typeface="Courier New" pitchFamily="34" charset="-120"/>
+              </a:rPr>
+              <a:t>3</a:t>
+            </a:r>
+            <a:endParaRPr lang="en-US" sz="1000" dirty="0"/>
+          </a:p>
+        </p:txBody>
+      </p:sp>
+      <p:sp>
+        <p:nvSpPr>
+          <p:cNvPr id="31" name="Text 29"/>
+          <p:cNvSpPr txBox="1"/>
+          <p:nvPr/>
+        </p:nvSpPr>
+        <p:spPr>
+          <a:xfrm>
+            <a:off x="6949440" y="5257800"/>
+            <a:ext cx="4572000" cy="274320"/>
+          </a:xfrm>
+          <a:prstGeom prst="rect">
+            <a:avLst/>
+          </a:prstGeom>
+          <a:noFill/>
+          <a:ln/>
+        </p:spPr>
+        <p:txBody>
+          <a:bodyPr wrap="square" lIns="0" tIns="0" rIns="0" bIns="0" rtlCol="0" anchor="ctr"/>
+          <a:lstStyle/>
+          <a:p>
+            <a:pPr indent="0" marL="0">
+              <a:buNone/>
+            </a:pPr>
+            <a:r>
+              <a:rPr lang="en-US" sz="1400" b="1" dirty="0">
+                <a:solidFill>
+                  <a:srgbClr val="EDF3EF"/>
+                </a:solidFill>
+                <a:latin typeface="Arial" pitchFamily="34" charset="0"/>
+                <a:ea typeface="Arial" pitchFamily="34" charset="-122"/>
+                <a:cs typeface="Arial" pitchFamily="34" charset="-120"/>
+              </a:rPr>
+              <a:t>Vender para a rede</a:t>
+            </a:r>
+            <a:endParaRPr lang="en-US" sz="1400" dirty="0"/>
+          </a:p>
+        </p:txBody>
+      </p:sp>
+      <p:sp>
+        <p:nvSpPr>
+          <p:cNvPr id="32" name="Text 30"/>
+          <p:cNvSpPr txBox="1"/>
+          <p:nvPr/>
+        </p:nvSpPr>
+        <p:spPr>
+          <a:xfrm>
+            <a:off x="6949440" y="5532120"/>
+            <a:ext cx="4572000" cy="502920"/>
+          </a:xfrm>
+          <a:prstGeom prst="rect">
+            <a:avLst/>
+          </a:prstGeom>
+          <a:noFill/>
+          <a:ln/>
+        </p:spPr>
+        <p:txBody>
+          <a:bodyPr wrap="square" lIns="0" tIns="0" rIns="0" bIns="0" rtlCol="0" anchor="ctr"/>
+          <a:lstStyle/>
+          <a:p>
+            <a:pPr indent="0" marL="0">
+              <a:lnSpc>
+                <a:spcPts val="1400"/>
+              </a:lnSpc>
+              <a:buNone/>
+            </a:pPr>
+            <a:r>
+              <a:rPr lang="en-US" sz="1150" dirty="0">
+                <a:solidFill>
+                  <a:srgbClr val="9DB0A6"/>
+                </a:solidFill>
+                <a:latin typeface="Calibri" pitchFamily="34" charset="0"/>
+                <a:ea typeface="Calibri" pitchFamily="34" charset="-122"/>
+                <a:cs typeface="Calibri" pitchFamily="34" charset="-120"/>
+              </a:rPr>
+              <a:t>Grupo educacional tem dezenas de unidades e um decisor só. É para ele que custo marginal quase zero é irresistível.</a:t>
+            </a:r>
+            <a:endParaRPr lang="en-US" sz="1150" dirty="0"/>
+          </a:p>
+        </p:txBody>
+      </p:sp>
+      <p:sp>
+        <p:nvSpPr>
+          <p:cNvPr id="33" name="Text 31"/>
+          <p:cNvSpPr txBox="1"/>
+          <p:nvPr/>
+        </p:nvSpPr>
+        <p:spPr>
+          <a:xfrm>
+            <a:off x="6492240" y="5687568"/>
+            <a:ext cx="5029200" cy="365760"/>
+          </a:xfrm>
+          <a:prstGeom prst="rect">
+            <a:avLst/>
+          </a:prstGeom>
+          <a:noFill/>
+          <a:ln/>
+        </p:spPr>
+        <p:txBody>
+          <a:bodyPr wrap="square" lIns="0" tIns="0" rIns="0" bIns="0" rtlCol="0" anchor="ctr"/>
+          <a:lstStyle/>
+          <a:p>
+            <a:pPr indent="0" marL="0">
+              <a:lnSpc>
+                <a:spcPts val="1300"/>
+              </a:lnSpc>
+              <a:buNone/>
+            </a:pPr>
+            <a:r>
+              <a:rPr lang="en-US" sz="900" dirty="0">
+                <a:solidFill>
+                  <a:srgbClr val="6A7D74"/>
+                </a:solidFill>
+                <a:latin typeface="Courier New" pitchFamily="34" charset="0"/>
+                <a:ea typeface="Courier New" pitchFamily="34" charset="-122"/>
+                <a:cs typeface="Courier New" pitchFamily="34" charset="-120"/>
+              </a:rPr>
+              <a:t>Modelo: assinatura por escola, não por câmera. Expandir deixa de ser uma nova decisão de compra.</a:t>
+            </a:r>
+            <a:endParaRPr lang="en-US" sz="900" dirty="0"/>
+          </a:p>
+        </p:txBody>
+      </p:sp>
+      <p:sp>
+        <p:nvSpPr>
+          <p:cNvPr id="35" name="Text 32"/>
+          <p:cNvSpPr txBox="1"/>
+          <p:nvPr/>
+        </p:nvSpPr>
+        <p:spPr>
+          <a:xfrm>
+            <a:off x="685800" y="6291072"/>
+            <a:ext cx="5486400" cy="274320"/>
+          </a:xfrm>
+          <a:prstGeom prst="rect">
+            <a:avLst/>
+          </a:prstGeom>
+          <a:noFill/>
+          <a:ln/>
+        </p:spPr>
+        <p:txBody>
+          <a:bodyPr wrap="square" lIns="0" tIns="0" rIns="0" bIns="0" rtlCol="0" anchor="ctr"/>
+          <a:lstStyle/>
+          <a:p>
+            <a:pPr indent="0" marL="0">
+              <a:buNone/>
+            </a:pPr>
+            <a:r>
+              <a:rPr lang="en-US" sz="900" dirty="0">
+                <a:solidFill>
+                  <a:srgbClr val="6A7D74"/>
+                </a:solidFill>
+                <a:latin typeface="Courier New" pitchFamily="34" charset="0"/>
+                <a:ea typeface="Courier New" pitchFamily="34" charset="-122"/>
+                <a:cs typeface="Courier New" pitchFamily="34" charset="-120"/>
+              </a:rPr>
+              <a:t>Auditix AI  ·  SVATech  ·  grupo 11</a:t>
+            </a:r>
+            <a:endParaRPr lang="en-US" sz="900" dirty="0"/>
+          </a:p>
+        </p:txBody>
+      </p:sp>
+      <p:sp>
+        <p:nvSpPr>
+          <p:cNvPr id="36" name="Text 33"/>
+          <p:cNvSpPr txBox="1"/>
+          <p:nvPr/>
+        </p:nvSpPr>
+        <p:spPr>
+          <a:xfrm>
+            <a:off x="10591495" y="6291072"/>
+            <a:ext cx="914400" cy="274320"/>
+          </a:xfrm>
+          <a:prstGeom prst="rect">
+            <a:avLst/>
+          </a:prstGeom>
+          <a:noFill/>
+          <a:ln/>
+        </p:spPr>
+        <p:txBody>
+          <a:bodyPr wrap="square" lIns="0" tIns="0" rIns="0" bIns="0" rtlCol="0" anchor="ctr"/>
+          <a:lstStyle/>
+          <a:p>
+            <a:pPr algn="r" indent="0" marL="0">
+              <a:buNone/>
+            </a:pPr>
+            <a:r>
+              <a:rPr lang="en-US" sz="900" dirty="0">
+                <a:solidFill>
+                  <a:srgbClr val="6A7D74"/>
+                </a:solidFill>
+                <a:latin typeface="Courier New" pitchFamily="34" charset="0"/>
+                <a:ea typeface="Courier New" pitchFamily="34" charset="-122"/>
+                <a:cs typeface="Courier New" pitchFamily="34" charset="-120"/>
+              </a:rPr>
+              <a:t>10</a:t>
+            </a:r>
+            <a:endParaRPr lang="en-US" sz="900" dirty="0"/>
+          </a:p>
+        </p:txBody>
+      </p:sp>
+    </p:spTree>
+  </p:cSld>
+  <p:clrMapOvr>
+    <a:masterClrMapping/>
+  </p:clrMapOvr>
+</p:sld>
+</file>
+
+<file path=ppt/slides/slide11.xml><?xml version="1.0" encoding="utf-8"?>
+<p:sld xmlns:a="http://schemas.openxmlformats.org/drawingml/2006/main" xmlns:r="http://schemas.openxmlformats.org/officeDocument/2006/relationships" xmlns:p="http://schemas.openxmlformats.org/presentationml/2006/main">
+  <p:cSld name="Slide 11">
+    <p:bg>
+      <p:bgPr>
+        <a:solidFill>
+          <a:srgbClr val="0B100E"/>
+        </a:solidFill>
+      </p:bgPr>
+    </p:bg>
+    <p:spTree>
+      <p:nvGrpSpPr>
+        <p:cNvPr id="1" name=""/>
+        <p:cNvGrpSpPr/>
+        <p:nvPr/>
+      </p:nvGrpSpPr>
+      <p:grpSpPr>
+        <a:xfrm>
+          <a:off x="0" y="0"/>
+          <a:ext cx="0" cy="0"/>
+          <a:chOff x="0" y="0"/>
+          <a:chExt cx="0" cy="0"/>
+        </a:xfrm>
+      </p:grpSpPr>
+      <p:sp>
+        <p:nvSpPr>
+          <p:cNvPr id="2" name="Text 0"/>
+          <p:cNvSpPr txBox="1"/>
+          <p:nvPr/>
+        </p:nvSpPr>
+        <p:spPr>
+          <a:xfrm>
+            <a:off x="685800" y="384048"/>
+            <a:ext cx="10820095" cy="274320"/>
+          </a:xfrm>
+          <a:prstGeom prst="rect">
+            <a:avLst/>
+          </a:prstGeom>
+          <a:noFill/>
+          <a:ln/>
+        </p:spPr>
+        <p:txBody>
+          <a:bodyPr wrap="square" lIns="0" tIns="0" rIns="0" bIns="0" rtlCol="0" anchor="ctr"/>
+          <a:lstStyle/>
+          <a:p>
+            <a:pPr indent="0" marL="0">
+              <a:buNone/>
+            </a:pPr>
+            <a:r>
+              <a:rPr lang="en-US" sz="1100" spc="200" kern="0" dirty="0">
+                <a:solidFill>
+                  <a:srgbClr val="E4572E"/>
+                </a:solidFill>
+                <a:latin typeface="Courier New" pitchFamily="34" charset="0"/>
+                <a:ea typeface="Courier New" pitchFamily="34" charset="-122"/>
+                <a:cs typeface="Courier New" pitchFamily="34" charset="-120"/>
+              </a:rPr>
+              <a:t>HONESTIDADE INTELECTUAL</a:t>
+            </a:r>
+            <a:endParaRPr lang="en-US" sz="1100" dirty="0"/>
+          </a:p>
+        </p:txBody>
+      </p:sp>
+      <p:sp>
+        <p:nvSpPr>
+          <p:cNvPr id="3" name="Text 1"/>
+          <p:cNvSpPr txBox="1"/>
+          <p:nvPr/>
+        </p:nvSpPr>
+        <p:spPr>
+          <a:xfrm>
+            <a:off x="685800" y="749808"/>
+            <a:ext cx="10820095" cy="1417320"/>
+          </a:xfrm>
+          <a:prstGeom prst="rect">
+            <a:avLst/>
+          </a:prstGeom>
+          <a:noFill/>
+          <a:ln/>
+        </p:spPr>
+        <p:txBody>
+          <a:bodyPr wrap="square" lIns="0" tIns="0" rIns="0" bIns="0" rtlCol="0" anchor="ctr"/>
+          <a:lstStyle/>
+          <a:p>
+            <a:pPr indent="0" marL="0">
+              <a:lnSpc>
+                <a:spcPts val="3800"/>
+              </a:lnSpc>
+              <a:buNone/>
+            </a:pPr>
+            <a:r>
+              <a:rPr lang="en-US" sz="3600" b="1" dirty="0">
+                <a:solidFill>
+                  <a:srgbClr val="EDF3EF"/>
+                </a:solidFill>
+                <a:latin typeface="Arial" pitchFamily="34" charset="0"/>
+                <a:ea typeface="Arial" pitchFamily="34" charset="-122"/>
+                <a:cs typeface="Arial" pitchFamily="34" charset="-120"/>
+              </a:rPr>
+              <a:t>O que ainda não medimos,</a:t>
+            </a:r>
+            <a:endParaRPr lang="en-US" sz="3600" dirty="0"/>
+          </a:p>
+          <a:p>
+            <a:pPr indent="0" marL="0">
+              <a:lnSpc>
+                <a:spcPts val="3800"/>
+              </a:lnSpc>
+              <a:buNone/>
+            </a:pPr>
+            <a:r>
+              <a:rPr lang="en-US" sz="3600" b="1" dirty="0">
+                <a:solidFill>
+                  <a:srgbClr val="EDF3EF"/>
+                </a:solidFill>
+                <a:latin typeface="Arial" pitchFamily="34" charset="0"/>
+                <a:ea typeface="Arial" pitchFamily="34" charset="-122"/>
+                <a:cs typeface="Arial" pitchFamily="34" charset="-120"/>
+              </a:rPr>
+              <a:t>e não vamos inventar.</a:t>
+            </a:r>
+            <a:endParaRPr lang="en-US" sz="3600" dirty="0"/>
+          </a:p>
+        </p:txBody>
+      </p:sp>
+      <p:sp>
+        <p:nvSpPr>
+          <p:cNvPr id="4" name="Text 2"/>
+          <p:cNvSpPr txBox="1"/>
+          <p:nvPr/>
+        </p:nvSpPr>
+        <p:spPr>
+          <a:xfrm>
+            <a:off x="685800" y="2560320"/>
+            <a:ext cx="10515600" cy="731520"/>
+          </a:xfrm>
+          <a:prstGeom prst="rect">
+            <a:avLst/>
+          </a:prstGeom>
+          <a:noFill/>
+          <a:ln/>
+        </p:spPr>
+        <p:txBody>
+          <a:bodyPr wrap="square" lIns="0" tIns="0" rIns="0" bIns="0" rtlCol="0" anchor="ctr"/>
+          <a:lstStyle/>
+          <a:p>
+            <a:pPr indent="0" marL="0">
+              <a:lnSpc>
+                <a:spcPts val="2200"/>
+              </a:lnSpc>
+              <a:buNone/>
+            </a:pPr>
+            <a:r>
+              <a:rPr lang="en-US" sz="1500" dirty="0">
+                <a:solidFill>
+                  <a:srgbClr val="9DB0A6"/>
+                </a:solidFill>
+                <a:latin typeface="Calibri" pitchFamily="34" charset="0"/>
+                <a:ea typeface="Calibri" pitchFamily="34" charset="-122"/>
+                <a:cs typeface="Calibri" pitchFamily="34" charset="-120"/>
+              </a:rPr>
+              <a:t>Três números que decidem se isto é negócio, e que nenhuma planilha nossa pode responder.</a:t>
+            </a:r>
+            <a:endParaRPr lang="en-US" sz="1500" dirty="0"/>
+          </a:p>
+        </p:txBody>
+      </p:sp>
+      <p:sp>
+        <p:nvSpPr>
+          <p:cNvPr id="5" name="Shape 3"/>
+          <p:cNvSpPr/>
+          <p:nvPr/>
+        </p:nvSpPr>
+        <p:spPr>
+          <a:xfrm>
+            <a:off x="685800" y="3200400"/>
+            <a:ext cx="3410712" cy="1920240"/>
+          </a:xfrm>
+          <a:prstGeom prst="roundRect">
+            <a:avLst>
+              <a:gd name="adj" fmla="val 4762"/>
+            </a:avLst>
+          </a:prstGeom>
+          <a:solidFill>
+            <a:srgbClr val="0B100E"/>
+          </a:solidFill>
+          <a:ln w="12700">
+            <a:solidFill>
+              <a:srgbClr val="24322B"/>
+            </a:solidFill>
+            <a:prstDash val="dash"/>
+          </a:ln>
+        </p:spPr>
+      </p:sp>
+      <p:sp>
+        <p:nvSpPr>
+          <p:cNvPr id="6" name="Text 4"/>
+          <p:cNvSpPr txBox="1"/>
+          <p:nvPr/>
+        </p:nvSpPr>
+        <p:spPr>
+          <a:xfrm>
+            <a:off x="960120" y="3456432"/>
+            <a:ext cx="2880360" cy="548640"/>
+          </a:xfrm>
+          <a:prstGeom prst="rect">
+            <a:avLst/>
+          </a:prstGeom>
+          <a:noFill/>
+          <a:ln/>
+        </p:spPr>
+        <p:txBody>
+          <a:bodyPr wrap="square" lIns="0" tIns="0" rIns="0" bIns="0" rtlCol="0" anchor="ctr"/>
+          <a:lstStyle/>
+          <a:p>
+            <a:pPr indent="0" marL="0">
+              <a:lnSpc>
+                <a:spcPts val="1900"/>
+              </a:lnSpc>
+              <a:buNone/>
+            </a:pPr>
+            <a:r>
+              <a:rPr lang="en-US" sz="1500" b="1" dirty="0">
+                <a:solidFill>
+                  <a:srgbClr val="EDF3EF"/>
+                </a:solidFill>
+                <a:latin typeface="Arial" pitchFamily="34" charset="0"/>
+                <a:ea typeface="Arial" pitchFamily="34" charset="-122"/>
+                <a:cs typeface="Arial" pitchFamily="34" charset="-120"/>
+              </a:rPr>
+              <a:t>Quanto uma escola paga hoje</a:t>
+            </a:r>
+            <a:endParaRPr lang="en-US" sz="1500" dirty="0"/>
+          </a:p>
+        </p:txBody>
+      </p:sp>
+      <p:sp>
+        <p:nvSpPr>
+          <p:cNvPr id="7" name="Text 5"/>
+          <p:cNvSpPr txBox="1"/>
+          <p:nvPr/>
+        </p:nvSpPr>
+        <p:spPr>
+          <a:xfrm>
+            <a:off x="960120" y="4069080"/>
+            <a:ext cx="2880360" cy="320040"/>
+          </a:xfrm>
+          <a:prstGeom prst="rect">
+            <a:avLst/>
+          </a:prstGeom>
+          <a:noFill/>
+          <a:ln/>
+        </p:spPr>
+        <p:txBody>
+          <a:bodyPr wrap="square" lIns="0" tIns="0" rIns="0" bIns="0" rtlCol="0" anchor="ctr"/>
+          <a:lstStyle/>
+          <a:p>
+            <a:pPr indent="0" marL="0">
+              <a:buNone/>
+            </a:pPr>
+            <a:r>
+              <a:rPr lang="en-US" sz="1200" dirty="0">
+                <a:solidFill>
+                  <a:srgbClr val="9DB0A6"/>
+                </a:solidFill>
+                <a:latin typeface="Calibri" pitchFamily="34" charset="0"/>
+                <a:ea typeface="Calibri" pitchFamily="34" charset="-122"/>
+                <a:cs typeface="Calibri" pitchFamily="34" charset="-120"/>
+              </a:rPr>
+              <a:t>por monitoramento eletrônico</a:t>
+            </a:r>
+            <a:endParaRPr lang="en-US" sz="1200" dirty="0"/>
+          </a:p>
+        </p:txBody>
+      </p:sp>
+      <p:sp>
+        <p:nvSpPr>
+          <p:cNvPr id="8" name="Text 6"/>
+          <p:cNvSpPr txBox="1"/>
+          <p:nvPr/>
+        </p:nvSpPr>
+        <p:spPr>
+          <a:xfrm>
+            <a:off x="960120" y="4526280"/>
+            <a:ext cx="2880360" cy="411480"/>
+          </a:xfrm>
+          <a:prstGeom prst="rect">
+            <a:avLst/>
+          </a:prstGeom>
+          <a:noFill/>
+          <a:ln/>
+        </p:spPr>
+        <p:txBody>
+          <a:bodyPr wrap="square" lIns="0" tIns="0" rIns="0" bIns="0" rtlCol="0" anchor="ctr"/>
+          <a:lstStyle/>
+          <a:p>
+            <a:pPr indent="0" marL="0">
+              <a:lnSpc>
+                <a:spcPts val="1200"/>
+              </a:lnSpc>
+              <a:buNone/>
+            </a:pPr>
+            <a:r>
+              <a:rPr lang="en-US" sz="900" dirty="0">
+                <a:solidFill>
+                  <a:srgbClr val="E4572E"/>
+                </a:solidFill>
+                <a:latin typeface="Courier New" pitchFamily="34" charset="0"/>
+                <a:ea typeface="Courier New" pitchFamily="34" charset="-122"/>
+                <a:cs typeface="Courier New" pitchFamily="34" charset="-120"/>
+              </a:rPr>
+              <a:t>fonte: ligar para três escolas</a:t>
+            </a:r>
+            <a:endParaRPr lang="en-US" sz="900" dirty="0"/>
+          </a:p>
+        </p:txBody>
+      </p:sp>
+      <p:sp>
+        <p:nvSpPr>
+          <p:cNvPr id="9" name="Shape 7"/>
+          <p:cNvSpPr/>
+          <p:nvPr/>
+        </p:nvSpPr>
+        <p:spPr>
+          <a:xfrm>
+            <a:off x="4370832" y="3200400"/>
+            <a:ext cx="3410712" cy="1920240"/>
+          </a:xfrm>
+          <a:prstGeom prst="roundRect">
+            <a:avLst>
+              <a:gd name="adj" fmla="val 4762"/>
+            </a:avLst>
+          </a:prstGeom>
+          <a:solidFill>
+            <a:srgbClr val="0B100E"/>
+          </a:solidFill>
+          <a:ln w="12700">
+            <a:solidFill>
+              <a:srgbClr val="24322B"/>
+            </a:solidFill>
+            <a:prstDash val="dash"/>
+          </a:ln>
+        </p:spPr>
+      </p:sp>
+      <p:sp>
+        <p:nvSpPr>
+          <p:cNvPr id="10" name="Text 8"/>
+          <p:cNvSpPr txBox="1"/>
+          <p:nvPr/>
+        </p:nvSpPr>
+        <p:spPr>
+          <a:xfrm>
+            <a:off x="4645152" y="3456432"/>
+            <a:ext cx="2880360" cy="548640"/>
+          </a:xfrm>
+          <a:prstGeom prst="rect">
+            <a:avLst/>
+          </a:prstGeom>
+          <a:noFill/>
+          <a:ln/>
+        </p:spPr>
+        <p:txBody>
+          <a:bodyPr wrap="square" lIns="0" tIns="0" rIns="0" bIns="0" rtlCol="0" anchor="ctr"/>
+          <a:lstStyle/>
+          <a:p>
+            <a:pPr indent="0" marL="0">
+              <a:lnSpc>
+                <a:spcPts val="1900"/>
+              </a:lnSpc>
+              <a:buNone/>
+            </a:pPr>
+            <a:r>
+              <a:rPr lang="en-US" sz="1500" b="1" dirty="0">
+                <a:solidFill>
+                  <a:srgbClr val="EDF3EF"/>
+                </a:solidFill>
+                <a:latin typeface="Arial" pitchFamily="34" charset="0"/>
+                <a:ea typeface="Arial" pitchFamily="34" charset="-122"/>
+                <a:cs typeface="Arial" pitchFamily="34" charset="-120"/>
+              </a:rPr>
+              <a:t>Quantas escolas no recorte</a:t>
+            </a:r>
+            <a:endParaRPr lang="en-US" sz="1500" dirty="0"/>
+          </a:p>
+        </p:txBody>
+      </p:sp>
+      <p:sp>
+        <p:nvSpPr>
+          <p:cNvPr id="11" name="Text 9"/>
+          <p:cNvSpPr txBox="1"/>
+          <p:nvPr/>
+        </p:nvSpPr>
+        <p:spPr>
+          <a:xfrm>
+            <a:off x="4645152" y="4069080"/>
+            <a:ext cx="2880360" cy="320040"/>
+          </a:xfrm>
+          <a:prstGeom prst="rect">
+            <a:avLst/>
+          </a:prstGeom>
+          <a:noFill/>
+          <a:ln/>
+        </p:spPr>
+        <p:txBody>
+          <a:bodyPr wrap="square" lIns="0" tIns="0" rIns="0" bIns="0" rtlCol="0" anchor="ctr"/>
+          <a:lstStyle/>
+          <a:p>
+            <a:pPr indent="0" marL="0">
+              <a:buNone/>
+            </a:pPr>
+            <a:r>
+              <a:rPr lang="en-US" sz="1200" dirty="0">
+                <a:solidFill>
+                  <a:srgbClr val="9DB0A6"/>
+                </a:solidFill>
+                <a:latin typeface="Calibri" pitchFamily="34" charset="0"/>
+                <a:ea typeface="Calibri" pitchFamily="34" charset="-122"/>
+                <a:cs typeface="Calibri" pitchFamily="34" charset="-120"/>
+              </a:rPr>
+              <a:t>rede, município ou grupo</a:t>
+            </a:r>
+            <a:endParaRPr lang="en-US" sz="1200" dirty="0"/>
+          </a:p>
+        </p:txBody>
+      </p:sp>
+      <p:sp>
+        <p:nvSpPr>
+          <p:cNvPr id="12" name="Text 10"/>
+          <p:cNvSpPr txBox="1"/>
+          <p:nvPr/>
+        </p:nvSpPr>
+        <p:spPr>
+          <a:xfrm>
+            <a:off x="4645152" y="4526280"/>
+            <a:ext cx="2880360" cy="411480"/>
+          </a:xfrm>
+          <a:prstGeom prst="rect">
+            <a:avLst/>
+          </a:prstGeom>
+          <a:noFill/>
+          <a:ln/>
+        </p:spPr>
+        <p:txBody>
+          <a:bodyPr wrap="square" lIns="0" tIns="0" rIns="0" bIns="0" rtlCol="0" anchor="ctr"/>
+          <a:lstStyle/>
+          <a:p>
+            <a:pPr indent="0" marL="0">
+              <a:lnSpc>
+                <a:spcPts val="1200"/>
+              </a:lnSpc>
+              <a:buNone/>
+            </a:pPr>
+            <a:r>
+              <a:rPr lang="en-US" sz="900" dirty="0">
+                <a:solidFill>
+                  <a:srgbClr val="E4572E"/>
+                </a:solidFill>
+                <a:latin typeface="Courier New" pitchFamily="34" charset="0"/>
+                <a:ea typeface="Courier New" pitchFamily="34" charset="-122"/>
+                <a:cs typeface="Courier New" pitchFamily="34" charset="-120"/>
+              </a:rPr>
+              <a:t>fonte: Censo Escolar, INEP</a:t>
+            </a:r>
+            <a:endParaRPr lang="en-US" sz="900" dirty="0"/>
+          </a:p>
+        </p:txBody>
+      </p:sp>
+      <p:sp>
+        <p:nvSpPr>
+          <p:cNvPr id="13" name="Shape 11"/>
+          <p:cNvSpPr/>
+          <p:nvPr/>
+        </p:nvSpPr>
+        <p:spPr>
+          <a:xfrm>
+            <a:off x="8055864" y="3200400"/>
+            <a:ext cx="3410712" cy="1920240"/>
+          </a:xfrm>
+          <a:prstGeom prst="roundRect">
+            <a:avLst>
+              <a:gd name="adj" fmla="val 4762"/>
+            </a:avLst>
+          </a:prstGeom>
+          <a:solidFill>
+            <a:srgbClr val="0B100E"/>
+          </a:solidFill>
+          <a:ln w="12700">
+            <a:solidFill>
+              <a:srgbClr val="24322B"/>
+            </a:solidFill>
+            <a:prstDash val="dash"/>
+          </a:ln>
+        </p:spPr>
+      </p:sp>
+      <p:sp>
+        <p:nvSpPr>
+          <p:cNvPr id="14" name="Text 12"/>
+          <p:cNvSpPr txBox="1"/>
+          <p:nvPr/>
+        </p:nvSpPr>
+        <p:spPr>
+          <a:xfrm>
+            <a:off x="8330184" y="3456432"/>
+            <a:ext cx="2880360" cy="548640"/>
+          </a:xfrm>
+          <a:prstGeom prst="rect">
+            <a:avLst/>
+          </a:prstGeom>
+          <a:noFill/>
+          <a:ln/>
+        </p:spPr>
+        <p:txBody>
+          <a:bodyPr wrap="square" lIns="0" tIns="0" rIns="0" bIns="0" rtlCol="0" anchor="ctr"/>
+          <a:lstStyle/>
+          <a:p>
+            <a:pPr indent="0" marL="0">
+              <a:lnSpc>
+                <a:spcPts val="1900"/>
+              </a:lnSpc>
+              <a:buNone/>
+            </a:pPr>
+            <a:r>
+              <a:rPr lang="en-US" sz="1500" b="1" dirty="0">
+                <a:solidFill>
+                  <a:srgbClr val="EDF3EF"/>
+                </a:solidFill>
+                <a:latin typeface="Arial" pitchFamily="34" charset="0"/>
+                <a:ea typeface="Arial" pitchFamily="34" charset="-122"/>
+                <a:cs typeface="Arial" pitchFamily="34" charset="-120"/>
+              </a:rPr>
+              <a:t>Alertas por dia que se aguenta</a:t>
+            </a:r>
+            <a:endParaRPr lang="en-US" sz="1500" dirty="0"/>
+          </a:p>
+        </p:txBody>
+      </p:sp>
+      <p:sp>
+        <p:nvSpPr>
+          <p:cNvPr id="15" name="Text 13"/>
+          <p:cNvSpPr txBox="1"/>
+          <p:nvPr/>
+        </p:nvSpPr>
+        <p:spPr>
+          <a:xfrm>
+            <a:off x="8330184" y="4069080"/>
+            <a:ext cx="2880360" cy="320040"/>
+          </a:xfrm>
+          <a:prstGeom prst="rect">
+            <a:avLst/>
+          </a:prstGeom>
+          <a:noFill/>
+          <a:ln/>
+        </p:spPr>
+        <p:txBody>
+          <a:bodyPr wrap="square" lIns="0" tIns="0" rIns="0" bIns="0" rtlCol="0" anchor="ctr"/>
+          <a:lstStyle/>
+          <a:p>
+            <a:pPr indent="0" marL="0">
+              <a:buNone/>
+            </a:pPr>
+            <a:r>
+              <a:rPr lang="en-US" sz="1200" dirty="0">
+                <a:solidFill>
+                  <a:srgbClr val="9DB0A6"/>
+                </a:solidFill>
+                <a:latin typeface="Calibri" pitchFamily="34" charset="0"/>
+                <a:ea typeface="Calibri" pitchFamily="34" charset="-122"/>
+                <a:cs typeface="Calibri" pitchFamily="34" charset="-120"/>
+              </a:rPr>
+              <a:t>e quantos foram engano</a:t>
+            </a:r>
+            <a:endParaRPr lang="en-US" sz="1200" dirty="0"/>
+          </a:p>
+        </p:txBody>
+      </p:sp>
+      <p:sp>
+        <p:nvSpPr>
+          <p:cNvPr id="16" name="Text 14"/>
+          <p:cNvSpPr txBox="1"/>
+          <p:nvPr/>
+        </p:nvSpPr>
+        <p:spPr>
+          <a:xfrm>
+            <a:off x="8330184" y="4526280"/>
+            <a:ext cx="2880360" cy="411480"/>
+          </a:xfrm>
+          <a:prstGeom prst="rect">
+            <a:avLst/>
+          </a:prstGeom>
+          <a:noFill/>
+          <a:ln/>
+        </p:spPr>
+        <p:txBody>
+          <a:bodyPr wrap="square" lIns="0" tIns="0" rIns="0" bIns="0" rtlCol="0" anchor="ctr"/>
+          <a:lstStyle/>
+          <a:p>
+            <a:pPr indent="0" marL="0">
+              <a:lnSpc>
+                <a:spcPts val="1200"/>
+              </a:lnSpc>
+              <a:buNone/>
+            </a:pPr>
+            <a:r>
+              <a:rPr lang="en-US" sz="900" dirty="0">
+                <a:solidFill>
+                  <a:srgbClr val="E4572E"/>
+                </a:solidFill>
+                <a:latin typeface="Courier New" pitchFamily="34" charset="0"/>
+                <a:ea typeface="Courier New" pitchFamily="34" charset="-122"/>
+                <a:cs typeface="Courier New" pitchFamily="34" charset="-120"/>
+              </a:rPr>
+              <a:t>fonte: o piloto, e só ele</a:t>
+            </a:r>
+            <a:endParaRPr lang="en-US" sz="900" dirty="0"/>
+          </a:p>
+        </p:txBody>
+      </p:sp>
+      <p:sp>
+        <p:nvSpPr>
+          <p:cNvPr id="17" name="Text 15"/>
+          <p:cNvSpPr txBox="1"/>
+          <p:nvPr/>
+        </p:nvSpPr>
+        <p:spPr>
+          <a:xfrm>
+            <a:off x="685800" y="5577840"/>
+            <a:ext cx="10515600" cy="411480"/>
+          </a:xfrm>
+          <a:prstGeom prst="rect">
+            <a:avLst/>
+          </a:prstGeom>
+          <a:noFill/>
+          <a:ln/>
+        </p:spPr>
+        <p:txBody>
+          <a:bodyPr wrap="square" lIns="0" tIns="0" rIns="0" bIns="0" rtlCol="0" anchor="ctr"/>
+          <a:lstStyle/>
+          <a:p>
+            <a:pPr indent="0" marL="0">
+              <a:buNone/>
+            </a:pPr>
+            <a:r>
+              <a:rPr lang="en-US" sz="1400" i="1" dirty="0">
+                <a:solidFill>
+                  <a:srgbClr val="9DB0A6"/>
+                </a:solidFill>
+                <a:latin typeface="Calibri" pitchFamily="34" charset="0"/>
+                <a:ea typeface="Calibri" pitchFamily="34" charset="-122"/>
+                <a:cs typeface="Calibri" pitchFamily="34" charset="-120"/>
+              </a:rPr>
+              <a:t>Uma banca pergunta a fonte. “Estimativa nossa” derruba o slide, e com ele o resto da apresentação.</a:t>
+            </a:r>
+            <a:endParaRPr lang="en-US" sz="1400" dirty="0"/>
+          </a:p>
+        </p:txBody>
+      </p:sp>
+      <p:sp>
+        <p:nvSpPr>
+          <p:cNvPr id="18" name="Text 16"/>
+          <p:cNvSpPr txBox="1"/>
+          <p:nvPr/>
+        </p:nvSpPr>
+        <p:spPr>
+          <a:xfrm>
+            <a:off x="685800" y="6291072"/>
+            <a:ext cx="5486400" cy="274320"/>
+          </a:xfrm>
+          <a:prstGeom prst="rect">
+            <a:avLst/>
+          </a:prstGeom>
+          <a:noFill/>
+          <a:ln/>
+        </p:spPr>
+        <p:txBody>
+          <a:bodyPr wrap="square" lIns="0" tIns="0" rIns="0" bIns="0" rtlCol="0" anchor="ctr"/>
+          <a:lstStyle/>
+          <a:p>
+            <a:pPr indent="0" marL="0">
+              <a:buNone/>
+            </a:pPr>
+            <a:r>
+              <a:rPr lang="en-US" sz="900" dirty="0">
+                <a:solidFill>
+                  <a:srgbClr val="6A7D74"/>
+                </a:solidFill>
+                <a:latin typeface="Courier New" pitchFamily="34" charset="0"/>
+                <a:ea typeface="Courier New" pitchFamily="34" charset="-122"/>
+                <a:cs typeface="Courier New" pitchFamily="34" charset="-120"/>
+              </a:rPr>
+              <a:t>Auditix AI  ·  SVATech  ·  grupo 11</a:t>
+            </a:r>
+            <a:endParaRPr lang="en-US" sz="900" dirty="0"/>
+          </a:p>
+        </p:txBody>
+      </p:sp>
+      <p:sp>
+        <p:nvSpPr>
+          <p:cNvPr id="19" name="Text 17"/>
+          <p:cNvSpPr txBox="1"/>
+          <p:nvPr/>
+        </p:nvSpPr>
+        <p:spPr>
+          <a:xfrm>
+            <a:off x="10591495" y="6291072"/>
+            <a:ext cx="914400" cy="274320"/>
+          </a:xfrm>
+          <a:prstGeom prst="rect">
+            <a:avLst/>
+          </a:prstGeom>
+          <a:noFill/>
+          <a:ln/>
+        </p:spPr>
+        <p:txBody>
+          <a:bodyPr wrap="square" lIns="0" tIns="0" rIns="0" bIns="0" rtlCol="0" anchor="ctr"/>
+          <a:lstStyle/>
+          <a:p>
+            <a:pPr algn="r" indent="0" marL="0">
+              <a:buNone/>
+            </a:pPr>
+            <a:r>
+              <a:rPr lang="en-US" sz="900" dirty="0">
+                <a:solidFill>
+                  <a:srgbClr val="6A7D74"/>
+                </a:solidFill>
+                <a:latin typeface="Courier New" pitchFamily="34" charset="0"/>
+                <a:ea typeface="Courier New" pitchFamily="34" charset="-122"/>
+                <a:cs typeface="Courier New" pitchFamily="34" charset="-120"/>
+              </a:rPr>
+              <a:t>11</a:t>
+            </a:r>
+            <a:endParaRPr lang="en-US" sz="900" dirty="0"/>
+          </a:p>
+        </p:txBody>
+      </p:sp>
+    </p:spTree>
+  </p:cSld>
+  <p:clrMapOvr>
+    <a:masterClrMapping/>
+  </p:clrMapOvr>
+</p:sld>
+</file>
+
+<file path=ppt/slides/slide12.xml><?xml version="1.0" encoding="utf-8"?>
+<p:sld xmlns:a="http://schemas.openxmlformats.org/drawingml/2006/main" xmlns:r="http://schemas.openxmlformats.org/officeDocument/2006/relationships" xmlns:p="http://schemas.openxmlformats.org/presentationml/2006/main">
+  <p:cSld name="Slide 12">
+    <p:bg>
+      <p:bgPr>
+        <a:solidFill>
+          <a:srgbClr val="0B100E"/>
+        </a:solidFill>
+      </p:bgPr>
+    </p:bg>
+    <p:spTree>
+      <p:nvGrpSpPr>
+        <p:cNvPr id="1" name=""/>
+        <p:cNvGrpSpPr/>
+        <p:nvPr/>
+      </p:nvGrpSpPr>
+      <p:grpSpPr>
+        <a:xfrm>
+          <a:off x="0" y="0"/>
+          <a:ext cx="0" cy="0"/>
+          <a:chOff x="0" y="0"/>
+          <a:chExt cx="0" cy="0"/>
+        </a:xfrm>
+      </p:grpSpPr>
+      <p:sp>
+        <p:nvSpPr>
+          <p:cNvPr id="2" name="Text 0"/>
+          <p:cNvSpPr txBox="1"/>
+          <p:nvPr/>
+        </p:nvSpPr>
+        <p:spPr>
+          <a:xfrm>
+            <a:off x="685800" y="384048"/>
+            <a:ext cx="10820095" cy="274320"/>
+          </a:xfrm>
+          <a:prstGeom prst="rect">
+            <a:avLst/>
+          </a:prstGeom>
+          <a:noFill/>
+          <a:ln/>
+        </p:spPr>
+        <p:txBody>
+          <a:bodyPr wrap="square" lIns="0" tIns="0" rIns="0" bIns="0" rtlCol="0" anchor="ctr"/>
+          <a:lstStyle/>
+          <a:p>
+            <a:pPr indent="0" marL="0">
+              <a:buNone/>
+            </a:pPr>
+            <a:r>
+              <a:rPr lang="en-US" sz="1100" spc="200" kern="0" dirty="0">
+                <a:solidFill>
+                  <a:srgbClr val="3FBF5A"/>
+                </a:solidFill>
+                <a:latin typeface="Courier New" pitchFamily="34" charset="0"/>
+                <a:ea typeface="Courier New" pitchFamily="34" charset="-122"/>
+                <a:cs typeface="Courier New" pitchFamily="34" charset="-120"/>
+              </a:rPr>
               <a:t>PARA FECHAR</a:t>
             </a:r>
             <a:endParaRPr lang="en-US" sz="1100" dirty="0"/>
@@ -5531,7 +7728,7 @@
       </p:sp>
       <p:pic>
         <p:nvPicPr>
-          <p:cNvPr id="5" name="Image 0" descr="/tmp/claude-0/-home-user-Next/c399b536-4832-57fc-9401-b6d5540e41f3/scratchpad/ppt/cadeia.png">    </p:cNvPr>
+          <p:cNvPr id="5" name="Image 0" descr="./ppt/cadeia.png">    </p:cNvPr>
           <p:cNvPicPr>
             <a:picLocks noChangeAspect="1"/>
           </p:cNvPicPr>
@@ -7758,7 +9955,7 @@
       </p:sp>
       <p:pic>
         <p:nvPicPr>
-          <p:cNvPr id="5" name="Image 0" descr="/tmp/claude-0/-home-user-Next/c399b536-4832-57fc-9401-b6d5540e41f3/scratchpad/ppt/calor.png">    </p:cNvPr>
+          <p:cNvPr id="5" name="Image 0" descr="./ppt/calor.png">    </p:cNvPr>
           <p:cNvPicPr>
             <a:picLocks noChangeAspect="1"/>
           </p:cNvPicPr>

--- a/Auditix-slides.pptx
+++ b/Auditix-slides.pptx
@@ -17,9 +17,10 @@
     <p:sldId id="265" r:id="rId11"/>
     <p:sldId id="266" r:id="rId12"/>
     <p:sldId id="267" r:id="rId13"/>
+    <p:sldId id="268" r:id="rId14"/>
   </p:sldIdLst>
   <p:notesMasterIdLst>
-    <p:notesMasterId r:id="rId14"/>
+    <p:notesMasterId r:id="rId15"/>
   </p:notesMasterIdLst>
   <p:sldSz cx="12192000" cy="6858000"/>
   <p:notesSz cx="6858000" cy="12192000"/>
@@ -601,7 +602,7 @@
           <a:p>
             <a:r>
               <a:rPr lang="en-US" dirty="0"/>
-              <a:t>Se perguntarem tamanho de mercado: dizer que o dado vem do Censo Escolar do INEP e que o preço praticado sai de conversa com escolas, e que nenhum dos dois foi estimado por nós.</a:t>
+              <a:t>A primeira é a que fecha a venda. Segurança comove; risco jurídico faz a diretoria assinar.</a:t>
             </a:r>
             <a:endParaRPr lang="en-US" dirty="0"/>
           </a:p>
@@ -689,7 +690,7 @@
           <a:p>
             <a:r>
               <a:rPr lang="en-US" dirty="0"/>
-              <a:t/>
+              <a:t>Se perguntarem tamanho de mercado: dizer que o dado vem do Censo Escolar do INEP e que o preço praticado sai de conversa com escolas, e que nenhum dos dois foi estimado por nós.</a:t>
             </a:r>
             <a:endParaRPr lang="en-US" dirty="0"/>
           </a:p>
@@ -801,6 +802,94 @@
             <a:fld id="{F7021451-1387-4CA6-816F-3879F97B5CBC}" type="slidenum">
               <a:rPr lang="en-US"/>
               <a:t>12</a:t>
+            </a:fld>
+            <a:endParaRPr lang="en-US"/>
+          </a:p>
+        </p:txBody>
+      </p:sp>
+    </p:spTree>
+    <p:extLst>
+      <p:ext uri="{BB962C8B-B14F-4D97-AF65-F5344CB8AC3E}">
+        <p14:creationId xmlns:p14="http://schemas.microsoft.com/office/powerpoint/2010/main" val="1024086991"/>
+      </p:ext>
+    </p:extLst>
+  </p:cSld>
+  <p:clrMapOvr>
+    <a:masterClrMapping/>
+  </p:clrMapOvr>
+</p:notes>
+</file>
+
+<file path=ppt/notesSlides/notesSlide13.xml><?xml version="1.0" encoding="utf-8"?>
+<p:notes xmlns:a="http://schemas.openxmlformats.org/drawingml/2006/main" xmlns:r="http://schemas.openxmlformats.org/officeDocument/2006/relationships" xmlns:p="http://schemas.openxmlformats.org/presentationml/2006/main">
+  <p:cSld>
+    <p:spTree>
+      <p:nvGrpSpPr>
+        <p:cNvPr id="1" name=""/>
+        <p:cNvGrpSpPr/>
+        <p:nvPr/>
+      </p:nvGrpSpPr>
+      <p:grpSpPr>
+        <a:xfrm>
+          <a:off x="0" y="0"/>
+          <a:ext cx="0" cy="0"/>
+          <a:chOff x="0" y="0"/>
+          <a:chExt cx="0" cy="0"/>
+        </a:xfrm>
+      </p:grpSpPr>
+      <p:sp>
+        <p:nvSpPr>
+          <p:cNvPr id="2" name="Slide Image Placeholder 1"/>
+          <p:cNvSpPr>
+            <a:spLocks noGrp="1" noRot="1" noChangeAspect="1"/>
+          </p:cNvSpPr>
+          <p:nvPr>
+            <p:ph type="sldImg"/>
+          </p:nvPr>
+        </p:nvSpPr>
+        <p:spPr/>
+      </p:sp>
+      <p:sp>
+        <p:nvSpPr>
+          <p:cNvPr id="3" name="Notes Placeholder 2"/>
+          <p:cNvSpPr>
+            <a:spLocks noGrp="1"/>
+          </p:cNvSpPr>
+          <p:nvPr>
+            <p:ph type="body" idx="1"/>
+          </p:nvPr>
+        </p:nvSpPr>
+        <p:spPr/>
+        <p:txBody>
+          <a:bodyPr/>
+          <a:lstStyle/>
+          <a:p>
+            <a:r>
+              <a:rPr lang="en-US" dirty="0"/>
+              <a:t/>
+            </a:r>
+            <a:endParaRPr lang="en-US" dirty="0"/>
+          </a:p>
+        </p:txBody>
+      </p:sp>
+      <p:sp>
+        <p:nvSpPr>
+          <p:cNvPr id="4" name="Slide Number Placeholder 3"/>
+          <p:cNvSpPr>
+            <a:spLocks noGrp="1"/>
+          </p:cNvSpPr>
+          <p:nvPr>
+            <p:ph type="sldNum" sz="quarter" idx="10"/>
+          </p:nvPr>
+        </p:nvSpPr>
+        <p:spPr/>
+        <p:txBody>
+          <a:bodyPr/>
+          <a:lstStyle/>
+          <a:p>
+            <a:fld id="{F7021451-1387-4CA6-816F-3879F97B5CBC}" type="slidenum">
+              <a:rPr lang="en-US"/>
+              <a:t>13</a:t>
             </a:fld>
             <a:endParaRPr lang="en-US"/>
           </a:p>
@@ -2335,7 +2424,7 @@
                 <a:ea typeface="Courier New" pitchFamily="34" charset="-122"/>
                 <a:cs typeface="Courier New" pitchFamily="34" charset="-120"/>
               </a:rPr>
-              <a:t>VALOR ECONÔMICO E ENTRADA NO MERCADO</a:t>
+              <a:t>ONDE ESTÁ O VALOR PARA QUEM COMPRA</a:t>
             </a:r>
             <a:endParaRPr lang="en-US" sz="1100" dirty="0"/>
           </a:p>
@@ -2377,7 +2466,7 @@
                 <a:ea typeface="Arial" pitchFamily="34" charset="-122"/>
                 <a:cs typeface="Arial" pitchFamily="34" charset="-120"/>
               </a:rPr>
-              <a:t>O custo de cobrir mais</a:t>
+              <a:t>Três frentes, em ordem de</a:t>
             </a:r>
             <a:endParaRPr lang="en-US" sz="3600" dirty="0"/>
           </a:p>
@@ -2397,7 +2486,7 @@
                 <a:ea typeface="Arial" pitchFamily="34" charset="-122"/>
                 <a:cs typeface="Arial" pitchFamily="34" charset="-120"/>
               </a:rPr>
-              <a:t>uma sala é uma câmera.</a:t>
+              <a:t>força para uma escola.</a:t>
             </a:r>
             <a:endParaRPr lang="en-US" sz="3600" dirty="0"/>
           </a:p>
@@ -2405,609 +2494,22 @@
       </p:sp>
       <p:sp>
         <p:nvSpPr>
-          <p:cNvPr id="4" name="Text 2"/>
-          <p:cNvSpPr txBox="1"/>
-          <p:nvPr/>
-        </p:nvSpPr>
-        <p:spPr>
-          <a:xfrm>
-            <a:off x="685800" y="2514600"/>
-            <a:ext cx="10515600" cy="731520"/>
-          </a:xfrm>
-          <a:prstGeom prst="rect">
-            <a:avLst/>
-          </a:prstGeom>
-          <a:noFill/>
-          <a:ln/>
-        </p:spPr>
-        <p:txBody>
-          <a:bodyPr wrap="square" lIns="0" tIns="0" rIns="0" bIns="0" rtlCol="0" anchor="ctr"/>
-          <a:lstStyle/>
-          <a:p>
-            <a:pPr indent="0" marL="0">
-              <a:lnSpc>
-                <a:spcPts val="2200"/>
-              </a:lnSpc>
-              <a:buNone/>
-            </a:pPr>
-            <a:r>
-              <a:rPr lang="en-US" sz="1500" dirty="0">
-                <a:solidFill>
-                  <a:srgbClr val="9DB0A6"/>
-                </a:solidFill>
-                <a:latin typeface="Calibri" pitchFamily="34" charset="0"/>
-                <a:ea typeface="Calibri" pitchFamily="34" charset="-122"/>
-                <a:cs typeface="Calibri" pitchFamily="34" charset="-120"/>
-              </a:rPr>
-              <a:t>O concorrente cobra licença mensal POR CÂMERA, porque o vídeo dele roda na nuvem dele. O nosso roda na borda, e o que sobe para a nuvem é uma linha de texto.</a:t>
-            </a:r>
-            <a:endParaRPr lang="en-US" sz="1500" dirty="0"/>
-          </a:p>
-        </p:txBody>
-      </p:sp>
-      <p:sp>
-        <p:nvSpPr>
-          <p:cNvPr id="5" name="Text 3"/>
-          <p:cNvSpPr txBox="1"/>
-          <p:nvPr/>
-        </p:nvSpPr>
-        <p:spPr>
-          <a:xfrm>
-            <a:off x="685800" y="3246120"/>
-            <a:ext cx="5120640" cy="320040"/>
-          </a:xfrm>
-          <a:prstGeom prst="rect">
-            <a:avLst/>
-          </a:prstGeom>
-          <a:noFill/>
-          <a:ln/>
-        </p:spPr>
-        <p:txBody>
-          <a:bodyPr wrap="square" lIns="0" tIns="0" rIns="0" bIns="0" rtlCol="0" anchor="ctr"/>
-          <a:lstStyle/>
-          <a:p>
-            <a:pPr indent="0" marL="0">
-              <a:buNone/>
-            </a:pPr>
-            <a:r>
-              <a:rPr lang="en-US" sz="1800" b="1" dirty="0">
-                <a:solidFill>
-                  <a:srgbClr val="EDF3EF"/>
-                </a:solidFill>
-                <a:latin typeface="Arial" pitchFamily="34" charset="0"/>
-                <a:ea typeface="Arial" pitchFamily="34" charset="-122"/>
-                <a:cs typeface="Arial" pitchFamily="34" charset="-120"/>
-              </a:rPr>
-              <a:t>O que custa</a:t>
-            </a:r>
-            <a:endParaRPr lang="en-US" sz="1800" dirty="0"/>
-          </a:p>
-        </p:txBody>
-      </p:sp>
-      <p:sp>
-        <p:nvSpPr>
-          <p:cNvPr id="6" name="Shape 4"/>
+          <p:cNvPr id="4" name="Shape 2"/>
           <p:cNvSpPr/>
           <p:nvPr/>
         </p:nvSpPr>
         <p:spPr>
           <a:xfrm>
-            <a:off x="685800" y="3703320"/>
-            <a:ext cx="5120640" cy="0"/>
-          </a:xfrm>
-          <a:prstGeom prst="line">
-            <a:avLst/>
-          </a:prstGeom>
-          <a:noFill/>
-          <a:ln w="12700">
-            <a:solidFill>
-              <a:srgbClr val="24322B"/>
-            </a:solidFill>
-            <a:prstDash val="solid"/>
-          </a:ln>
-        </p:spPr>
-      </p:sp>
-      <p:sp>
-        <p:nvSpPr>
-          <p:cNvPr id="7" name="Text 5"/>
-          <p:cNvSpPr txBox="1"/>
-          <p:nvPr/>
-        </p:nvSpPr>
-        <p:spPr>
-          <a:xfrm>
-            <a:off x="685800" y="3785616"/>
-            <a:ext cx="3017520" cy="320040"/>
-          </a:xfrm>
-          <a:prstGeom prst="rect">
-            <a:avLst/>
-          </a:prstGeom>
-          <a:noFill/>
-          <a:ln/>
-        </p:spPr>
-        <p:txBody>
-          <a:bodyPr wrap="square" lIns="0" tIns="0" rIns="0" bIns="0" rtlCol="0" anchor="ctr"/>
-          <a:lstStyle/>
-          <a:p>
-            <a:pPr indent="0" marL="0">
-              <a:buNone/>
-            </a:pPr>
-            <a:r>
-              <a:rPr lang="en-US" sz="1300" b="1" dirty="0">
-                <a:solidFill>
-                  <a:srgbClr val="EDF3EF"/>
-                </a:solidFill>
-                <a:latin typeface="Arial" pitchFamily="34" charset="0"/>
-                <a:ea typeface="Arial" pitchFamily="34" charset="-122"/>
-                <a:cs typeface="Arial" pitchFamily="34" charset="-120"/>
-              </a:rPr>
-              <a:t>Câmera IP, por sala</a:t>
-            </a:r>
-            <a:endParaRPr lang="en-US" sz="1300" dirty="0"/>
-          </a:p>
-        </p:txBody>
-      </p:sp>
-      <p:sp>
-        <p:nvSpPr>
-          <p:cNvPr id="8" name="Text 6"/>
-          <p:cNvSpPr txBox="1"/>
-          <p:nvPr/>
-        </p:nvSpPr>
-        <p:spPr>
-          <a:xfrm>
-            <a:off x="3703320" y="3803904"/>
-            <a:ext cx="2103120" cy="292608"/>
-          </a:xfrm>
-          <a:prstGeom prst="rect">
-            <a:avLst/>
-          </a:prstGeom>
-          <a:noFill/>
-          <a:ln/>
-        </p:spPr>
-        <p:txBody>
-          <a:bodyPr wrap="square" lIns="0" tIns="0" rIns="0" bIns="0" rtlCol="0" anchor="ctr"/>
-          <a:lstStyle/>
-          <a:p>
-            <a:pPr algn="r" indent="0" marL="0">
-              <a:buNone/>
-            </a:pPr>
-            <a:r>
-              <a:rPr lang="en-US" sz="1100" dirty="0">
-                <a:solidFill>
-                  <a:srgbClr val="9DB0A6"/>
-                </a:solidFill>
-                <a:latin typeface="Courier New" pitchFamily="34" charset="0"/>
-                <a:ea typeface="Courier New" pitchFamily="34" charset="-122"/>
-                <a:cs typeface="Courier New" pitchFamily="34" charset="-120"/>
-              </a:rPr>
-              <a:t>R$ 200 a R$ 680</a:t>
-            </a:r>
-            <a:endParaRPr lang="en-US" sz="1100" dirty="0"/>
-          </a:p>
-        </p:txBody>
-      </p:sp>
-      <p:sp>
-        <p:nvSpPr>
-          <p:cNvPr id="9" name="Shape 7"/>
-          <p:cNvSpPr/>
-          <p:nvPr/>
-        </p:nvSpPr>
-        <p:spPr>
-          <a:xfrm>
-            <a:off x="685800" y="4178808"/>
-            <a:ext cx="5120640" cy="0"/>
-          </a:xfrm>
-          <a:prstGeom prst="line">
-            <a:avLst/>
-          </a:prstGeom>
-          <a:noFill/>
-          <a:ln w="12700">
-            <a:solidFill>
-              <a:srgbClr val="24322B"/>
-            </a:solidFill>
-            <a:prstDash val="solid"/>
-          </a:ln>
-        </p:spPr>
-      </p:sp>
-      <p:sp>
-        <p:nvSpPr>
-          <p:cNvPr id="10" name="Text 8"/>
-          <p:cNvSpPr txBox="1"/>
-          <p:nvPr/>
-        </p:nvSpPr>
-        <p:spPr>
-          <a:xfrm>
-            <a:off x="685800" y="4261104"/>
-            <a:ext cx="3017520" cy="320040"/>
-          </a:xfrm>
-          <a:prstGeom prst="rect">
-            <a:avLst/>
-          </a:prstGeom>
-          <a:noFill/>
-          <a:ln/>
-        </p:spPr>
-        <p:txBody>
-          <a:bodyPr wrap="square" lIns="0" tIns="0" rIns="0" bIns="0" rtlCol="0" anchor="ctr"/>
-          <a:lstStyle/>
-          <a:p>
-            <a:pPr indent="0" marL="0">
-              <a:buNone/>
-            </a:pPr>
-            <a:r>
-              <a:rPr lang="en-US" sz="1300" b="1" dirty="0">
-                <a:solidFill>
-                  <a:srgbClr val="EDF3EF"/>
-                </a:solidFill>
-                <a:latin typeface="Arial" pitchFamily="34" charset="0"/>
-                <a:ea typeface="Arial" pitchFamily="34" charset="-122"/>
-                <a:cs typeface="Arial" pitchFamily="34" charset="-120"/>
-              </a:rPr>
-              <a:t>Servidor</a:t>
-            </a:r>
-            <a:endParaRPr lang="en-US" sz="1300" dirty="0"/>
-          </a:p>
-        </p:txBody>
-      </p:sp>
-      <p:sp>
-        <p:nvSpPr>
-          <p:cNvPr id="11" name="Text 9"/>
-          <p:cNvSpPr txBox="1"/>
-          <p:nvPr/>
-        </p:nvSpPr>
-        <p:spPr>
-          <a:xfrm>
-            <a:off x="3703320" y="4279392"/>
-            <a:ext cx="2103120" cy="292608"/>
-          </a:xfrm>
-          <a:prstGeom prst="rect">
-            <a:avLst/>
-          </a:prstGeom>
-          <a:noFill/>
-          <a:ln/>
-        </p:spPr>
-        <p:txBody>
-          <a:bodyPr wrap="square" lIns="0" tIns="0" rIns="0" bIns="0" rtlCol="0" anchor="ctr"/>
-          <a:lstStyle/>
-          <a:p>
-            <a:pPr algn="r" indent="0" marL="0">
-              <a:buNone/>
-            </a:pPr>
-            <a:r>
-              <a:rPr lang="en-US" sz="1100" dirty="0">
-                <a:solidFill>
-                  <a:srgbClr val="9DB0A6"/>
-                </a:solidFill>
-                <a:latin typeface="Courier New" pitchFamily="34" charset="0"/>
-                <a:ea typeface="Courier New" pitchFamily="34" charset="-122"/>
-                <a:cs typeface="Courier New" pitchFamily="34" charset="-120"/>
-              </a:rPr>
-              <a:t>1 PC comum por escola</a:t>
-            </a:r>
-            <a:endParaRPr lang="en-US" sz="1100" dirty="0"/>
-          </a:p>
-        </p:txBody>
-      </p:sp>
-      <p:sp>
-        <p:nvSpPr>
-          <p:cNvPr id="12" name="Shape 10"/>
-          <p:cNvSpPr/>
-          <p:nvPr/>
-        </p:nvSpPr>
-        <p:spPr>
-          <a:xfrm>
-            <a:off x="685800" y="4654296"/>
-            <a:ext cx="5120640" cy="0"/>
-          </a:xfrm>
-          <a:prstGeom prst="line">
-            <a:avLst/>
-          </a:prstGeom>
-          <a:noFill/>
-          <a:ln w="12700">
-            <a:solidFill>
-              <a:srgbClr val="24322B"/>
-            </a:solidFill>
-            <a:prstDash val="solid"/>
-          </a:ln>
-        </p:spPr>
-      </p:sp>
-      <p:sp>
-        <p:nvSpPr>
-          <p:cNvPr id="13" name="Text 11"/>
-          <p:cNvSpPr txBox="1"/>
-          <p:nvPr/>
-        </p:nvSpPr>
-        <p:spPr>
-          <a:xfrm>
-            <a:off x="685800" y="4736592"/>
-            <a:ext cx="3017520" cy="320040"/>
-          </a:xfrm>
-          <a:prstGeom prst="rect">
-            <a:avLst/>
-          </a:prstGeom>
-          <a:noFill/>
-          <a:ln/>
-        </p:spPr>
-        <p:txBody>
-          <a:bodyPr wrap="square" lIns="0" tIns="0" rIns="0" bIns="0" rtlCol="0" anchor="ctr"/>
-          <a:lstStyle/>
-          <a:p>
-            <a:pPr indent="0" marL="0">
-              <a:buNone/>
-            </a:pPr>
-            <a:r>
-              <a:rPr lang="en-US" sz="1300" b="1" dirty="0">
-                <a:solidFill>
-                  <a:srgbClr val="EDF3EF"/>
-                </a:solidFill>
-                <a:latin typeface="Arial" pitchFamily="34" charset="0"/>
-                <a:ea typeface="Arial" pitchFamily="34" charset="-122"/>
-                <a:cs typeface="Arial" pitchFamily="34" charset="-120"/>
-              </a:rPr>
-              <a:t>Licença de software</a:t>
-            </a:r>
-            <a:endParaRPr lang="en-US" sz="1300" dirty="0"/>
-          </a:p>
-        </p:txBody>
-      </p:sp>
-      <p:sp>
-        <p:nvSpPr>
-          <p:cNvPr id="14" name="Text 12"/>
-          <p:cNvSpPr txBox="1"/>
-          <p:nvPr/>
-        </p:nvSpPr>
-        <p:spPr>
-          <a:xfrm>
-            <a:off x="3703320" y="4754880"/>
-            <a:ext cx="2103120" cy="292608"/>
-          </a:xfrm>
-          <a:prstGeom prst="rect">
-            <a:avLst/>
-          </a:prstGeom>
-          <a:noFill/>
-          <a:ln/>
-        </p:spPr>
-        <p:txBody>
-          <a:bodyPr wrap="square" lIns="0" tIns="0" rIns="0" bIns="0" rtlCol="0" anchor="ctr"/>
-          <a:lstStyle/>
-          <a:p>
-            <a:pPr algn="r" indent="0" marL="0">
-              <a:buNone/>
-            </a:pPr>
-            <a:r>
-              <a:rPr lang="en-US" sz="1100" dirty="0">
-                <a:solidFill>
-                  <a:srgbClr val="3FBF5A"/>
-                </a:solidFill>
-                <a:latin typeface="Courier New" pitchFamily="34" charset="0"/>
-                <a:ea typeface="Courier New" pitchFamily="34" charset="-122"/>
-                <a:cs typeface="Courier New" pitchFamily="34" charset="-120"/>
-              </a:rPr>
-              <a:t>R$ 0 por câmera</a:t>
-            </a:r>
-            <a:endParaRPr lang="en-US" sz="1100" dirty="0"/>
-          </a:p>
-        </p:txBody>
-      </p:sp>
-      <p:sp>
-        <p:nvSpPr>
-          <p:cNvPr id="15" name="Shape 13"/>
-          <p:cNvSpPr/>
-          <p:nvPr/>
-        </p:nvSpPr>
-        <p:spPr>
-          <a:xfrm>
-            <a:off x="685800" y="5129784"/>
-            <a:ext cx="5120640" cy="0"/>
-          </a:xfrm>
-          <a:prstGeom prst="line">
-            <a:avLst/>
-          </a:prstGeom>
-          <a:noFill/>
-          <a:ln w="12700">
-            <a:solidFill>
-              <a:srgbClr val="24322B"/>
-            </a:solidFill>
-            <a:prstDash val="solid"/>
-          </a:ln>
-        </p:spPr>
-      </p:sp>
-      <p:sp>
-        <p:nvSpPr>
-          <p:cNvPr id="16" name="Text 14"/>
-          <p:cNvSpPr txBox="1"/>
-          <p:nvPr/>
-        </p:nvSpPr>
-        <p:spPr>
-          <a:xfrm>
-            <a:off x="685800" y="5212080"/>
-            <a:ext cx="3017520" cy="320040"/>
-          </a:xfrm>
-          <a:prstGeom prst="rect">
-            <a:avLst/>
-          </a:prstGeom>
-          <a:noFill/>
-          <a:ln/>
-        </p:spPr>
-        <p:txBody>
-          <a:bodyPr wrap="square" lIns="0" tIns="0" rIns="0" bIns="0" rtlCol="0" anchor="ctr"/>
-          <a:lstStyle/>
-          <a:p>
-            <a:pPr indent="0" marL="0">
-              <a:buNone/>
-            </a:pPr>
-            <a:r>
-              <a:rPr lang="en-US" sz="1300" b="1" dirty="0">
-                <a:solidFill>
-                  <a:srgbClr val="EDF3EF"/>
-                </a:solidFill>
-                <a:latin typeface="Arial" pitchFamily="34" charset="0"/>
-                <a:ea typeface="Arial" pitchFamily="34" charset="-122"/>
-                <a:cs typeface="Arial" pitchFamily="34" charset="-120"/>
-              </a:rPr>
-              <a:t>Nuvem do alerta</a:t>
-            </a:r>
-            <a:endParaRPr lang="en-US" sz="1300" dirty="0"/>
-          </a:p>
-        </p:txBody>
-      </p:sp>
-      <p:sp>
-        <p:nvSpPr>
-          <p:cNvPr id="17" name="Text 15"/>
-          <p:cNvSpPr txBox="1"/>
-          <p:nvPr/>
-        </p:nvSpPr>
-        <p:spPr>
-          <a:xfrm>
-            <a:off x="3703320" y="5230368"/>
-            <a:ext cx="2103120" cy="292608"/>
-          </a:xfrm>
-          <a:prstGeom prst="rect">
-            <a:avLst/>
-          </a:prstGeom>
-          <a:noFill/>
-          <a:ln/>
-        </p:spPr>
-        <p:txBody>
-          <a:bodyPr wrap="square" lIns="0" tIns="0" rIns="0" bIns="0" rtlCol="0" anchor="ctr"/>
-          <a:lstStyle/>
-          <a:p>
-            <a:pPr algn="r" indent="0" marL="0">
-              <a:buNone/>
-            </a:pPr>
-            <a:r>
-              <a:rPr lang="en-US" sz="1100" dirty="0">
-                <a:solidFill>
-                  <a:srgbClr val="3FBF5A"/>
-                </a:solidFill>
-                <a:latin typeface="Courier New" pitchFamily="34" charset="0"/>
-                <a:ea typeface="Courier New" pitchFamily="34" charset="-122"/>
-                <a:cs typeface="Courier New" pitchFamily="34" charset="-120"/>
-              </a:rPr>
-              <a:t>centavos por mês</a:t>
-            </a:r>
-            <a:endParaRPr lang="en-US" sz="1100" dirty="0"/>
-          </a:p>
-        </p:txBody>
-      </p:sp>
-      <p:sp>
-        <p:nvSpPr>
-          <p:cNvPr id="18" name="Shape 16"/>
-          <p:cNvSpPr/>
-          <p:nvPr/>
-        </p:nvSpPr>
-        <p:spPr>
-          <a:xfrm>
-            <a:off x="685800" y="5605272"/>
-            <a:ext cx="5120640" cy="0"/>
-          </a:xfrm>
-          <a:prstGeom prst="line">
-            <a:avLst/>
-          </a:prstGeom>
-          <a:noFill/>
-          <a:ln w="12700">
-            <a:solidFill>
-              <a:srgbClr val="24322B"/>
-            </a:solidFill>
-            <a:prstDash val="solid"/>
-          </a:ln>
-        </p:spPr>
-      </p:sp>
-      <p:sp>
-        <p:nvSpPr>
-          <p:cNvPr id="19" name="Text 17"/>
-          <p:cNvSpPr txBox="1"/>
-          <p:nvPr/>
-        </p:nvSpPr>
-        <p:spPr>
-          <a:xfrm>
-            <a:off x="685800" y="5687568"/>
-            <a:ext cx="5120640" cy="365760"/>
-          </a:xfrm>
-          <a:prstGeom prst="rect">
-            <a:avLst/>
-          </a:prstGeom>
-          <a:noFill/>
-          <a:ln/>
-        </p:spPr>
-        <p:txBody>
-          <a:bodyPr wrap="square" lIns="0" tIns="0" rIns="0" bIns="0" rtlCol="0" anchor="ctr"/>
-          <a:lstStyle/>
-          <a:p>
-            <a:pPr indent="0" marL="0">
-              <a:lnSpc>
-                <a:spcPts val="1300"/>
-              </a:lnSpc>
-              <a:buNone/>
-            </a:pPr>
-            <a:r>
-              <a:rPr lang="en-US" sz="900" dirty="0">
-                <a:solidFill>
-                  <a:srgbClr val="6A7D74"/>
-                </a:solidFill>
-                <a:latin typeface="Courier New" pitchFamily="34" charset="0"/>
-                <a:ea typeface="Courier New" pitchFamily="34" charset="-122"/>
-                <a:cs typeface="Courier New" pitchFamily="34" charset="-120"/>
-              </a:rPr>
-              <a:t>sem placa de vídeo, sem custo por fluxo, sem mensalidade que cresce com a escola</a:t>
-            </a:r>
-            <a:endParaRPr lang="en-US" sz="900" dirty="0"/>
-          </a:p>
-        </p:txBody>
-      </p:sp>
-      <p:sp>
-        <p:nvSpPr>
-          <p:cNvPr id="20" name="Text 18"/>
-          <p:cNvSpPr txBox="1"/>
-          <p:nvPr/>
-        </p:nvSpPr>
-        <p:spPr>
-          <a:xfrm>
-            <a:off x="6492240" y="3246120"/>
-            <a:ext cx="5029200" cy="320040"/>
-          </a:xfrm>
-          <a:prstGeom prst="rect">
-            <a:avLst/>
-          </a:prstGeom>
-          <a:noFill/>
-          <a:ln/>
-        </p:spPr>
-        <p:txBody>
-          <a:bodyPr wrap="square" lIns="0" tIns="0" rIns="0" bIns="0" rtlCol="0" anchor="ctr"/>
-          <a:lstStyle/>
-          <a:p>
-            <a:pPr indent="0" marL="0">
-              <a:buNone/>
-            </a:pPr>
-            <a:r>
-              <a:rPr lang="en-US" sz="1800" b="1" dirty="0">
-                <a:solidFill>
-                  <a:srgbClr val="EDF3EF"/>
-                </a:solidFill>
-                <a:latin typeface="Arial" pitchFamily="34" charset="0"/>
-                <a:ea typeface="Arial" pitchFamily="34" charset="-122"/>
-                <a:cs typeface="Arial" pitchFamily="34" charset="-120"/>
-              </a:rPr>
-              <a:t>Como entra no mercado</a:t>
-            </a:r>
-            <a:endParaRPr lang="en-US" sz="1800" dirty="0"/>
-          </a:p>
-        </p:txBody>
-      </p:sp>
-      <p:sp>
-        <p:nvSpPr>
-          <p:cNvPr id="21" name="Shape 19"/>
-          <p:cNvSpPr/>
-          <p:nvPr/>
-        </p:nvSpPr>
-        <p:spPr>
-          <a:xfrm>
-            <a:off x="6492240" y="3721608"/>
-            <a:ext cx="292608" cy="292608"/>
-          </a:xfrm>
-          <a:prstGeom prst="ellipse">
-            <a:avLst/>
+            <a:off x="685800" y="3017520"/>
+            <a:ext cx="3410712" cy="2788920"/>
+          </a:xfrm>
+          <a:prstGeom prst="roundRect">
+            <a:avLst>
+              <a:gd name="adj" fmla="val 3279"/>
+            </a:avLst>
           </a:prstGeom>
           <a:solidFill>
-            <a:srgbClr val="0B100E"/>
+            <a:srgbClr val="17211C"/>
           </a:solidFill>
           <a:ln w="12700">
             <a:solidFill>
@@ -3019,30 +2521,30 @@
       </p:sp>
       <p:sp>
         <p:nvSpPr>
-          <p:cNvPr id="22" name="Text 20"/>
-          <p:cNvSpPr txBox="1"/>
-          <p:nvPr/>
-        </p:nvSpPr>
-        <p:spPr>
-          <a:xfrm>
-            <a:off x="6492240" y="3749040"/>
-            <a:ext cx="292608" cy="237744"/>
-          </a:xfrm>
-          <a:prstGeom prst="rect">
-            <a:avLst/>
-          </a:prstGeom>
-          <a:noFill/>
-          <a:ln/>
-        </p:spPr>
-        <p:txBody>
-          <a:bodyPr wrap="square" lIns="0" tIns="0" rIns="0" bIns="0" rtlCol="0" anchor="ctr"/>
-          <a:lstStyle/>
-          <a:p>
-            <a:pPr algn="ctr" indent="0" marL="0">
-              <a:buNone/>
-            </a:pPr>
-            <a:r>
-              <a:rPr lang="en-US" sz="1000" dirty="0">
+          <p:cNvPr id="5" name="Text 3"/>
+          <p:cNvSpPr txBox="1"/>
+          <p:nvPr/>
+        </p:nvSpPr>
+        <p:spPr>
+          <a:xfrm>
+            <a:off x="941832" y="3246120"/>
+            <a:ext cx="2926080" cy="228600"/>
+          </a:xfrm>
+          <a:prstGeom prst="rect">
+            <a:avLst/>
+          </a:prstGeom>
+          <a:noFill/>
+          <a:ln/>
+        </p:spPr>
+        <p:txBody>
+          <a:bodyPr wrap="square" lIns="0" tIns="0" rIns="0" bIns="0" rtlCol="0" anchor="ctr"/>
+          <a:lstStyle/>
+          <a:p>
+            <a:pPr indent="0" marL="0">
+              <a:buNone/>
+            </a:pPr>
+            <a:r>
+              <a:rPr lang="en-US" sz="950" spc="150" kern="0" dirty="0">
                 <a:solidFill>
                   <a:srgbClr val="3FBF5A"/>
                 </a:solidFill>
@@ -3050,38 +2552,41 @@
                 <a:ea typeface="Courier New" pitchFamily="34" charset="-122"/>
                 <a:cs typeface="Courier New" pitchFamily="34" charset="-120"/>
               </a:rPr>
-              <a:t>1</a:t>
-            </a:r>
-            <a:endParaRPr lang="en-US" sz="1000" dirty="0"/>
-          </a:p>
-        </p:txBody>
-      </p:sp>
-      <p:sp>
-        <p:nvSpPr>
-          <p:cNvPr id="23" name="Text 21"/>
-          <p:cNvSpPr txBox="1"/>
-          <p:nvPr/>
-        </p:nvSpPr>
-        <p:spPr>
-          <a:xfrm>
-            <a:off x="6949440" y="3703320"/>
-            <a:ext cx="4572000" cy="274320"/>
-          </a:xfrm>
-          <a:prstGeom prst="rect">
-            <a:avLst/>
-          </a:prstGeom>
-          <a:noFill/>
-          <a:ln/>
-        </p:spPr>
-        <p:txBody>
-          <a:bodyPr wrap="square" lIns="0" tIns="0" rIns="0" bIns="0" rtlCol="0" anchor="ctr"/>
-          <a:lstStyle/>
-          <a:p>
-            <a:pPr indent="0" marL="0">
-              <a:buNone/>
-            </a:pPr>
-            <a:r>
-              <a:rPr lang="en-US" sz="1400" b="1" dirty="0">
+              <a:t>O QUE FAZ ASSINAR</a:t>
+            </a:r>
+            <a:endParaRPr lang="en-US" sz="950" dirty="0"/>
+          </a:p>
+        </p:txBody>
+      </p:sp>
+      <p:sp>
+        <p:nvSpPr>
+          <p:cNvPr id="6" name="Text 4"/>
+          <p:cNvSpPr txBox="1"/>
+          <p:nvPr/>
+        </p:nvSpPr>
+        <p:spPr>
+          <a:xfrm>
+            <a:off x="941832" y="3520440"/>
+            <a:ext cx="2926080" cy="685800"/>
+          </a:xfrm>
+          <a:prstGeom prst="rect">
+            <a:avLst/>
+          </a:prstGeom>
+          <a:noFill/>
+          <a:ln/>
+        </p:spPr>
+        <p:txBody>
+          <a:bodyPr wrap="square" lIns="0" tIns="0" rIns="0" bIns="0" rtlCol="0" anchor="ctr"/>
+          <a:lstStyle/>
+          <a:p>
+            <a:pPr indent="0" marL="0">
+              <a:lnSpc>
+                <a:spcPts val="2100"/>
+              </a:lnSpc>
+              <a:buNone/>
+            </a:pPr>
+            <a:r>
+              <a:rPr lang="en-US" sz="1700" b="1" dirty="0">
                 <a:solidFill>
                   <a:srgbClr val="EDF3EF"/>
                 </a:solidFill>
@@ -3089,41 +2594,61 @@
                 <a:ea typeface="Arial" pitchFamily="34" charset="-122"/>
                 <a:cs typeface="Arial" pitchFamily="34" charset="-120"/>
               </a:rPr>
-              <a:t>Uma escola, de graça</a:t>
-            </a:r>
-            <a:endParaRPr lang="en-US" sz="1400" dirty="0"/>
-          </a:p>
-        </p:txBody>
-      </p:sp>
-      <p:sp>
-        <p:nvSpPr>
-          <p:cNvPr id="24" name="Text 22"/>
-          <p:cNvSpPr txBox="1"/>
-          <p:nvPr/>
-        </p:nvSpPr>
-        <p:spPr>
-          <a:xfrm>
-            <a:off x="6949440" y="3977640"/>
-            <a:ext cx="4572000" cy="502920"/>
-          </a:xfrm>
-          <a:prstGeom prst="rect">
-            <a:avLst/>
-          </a:prstGeom>
-          <a:noFill/>
-          <a:ln/>
-        </p:spPr>
-        <p:txBody>
-          <a:bodyPr wrap="square" lIns="0" tIns="0" rIns="0" bIns="0" rtlCol="0" anchor="ctr"/>
-          <a:lstStyle/>
+              <a:t>Risco jurídico,</a:t>
+            </a:r>
+            <a:endParaRPr lang="en-US" sz="1700" dirty="0"/>
+          </a:p>
           <a:p>
             <a:pPr indent="0" marL="0">
               <a:lnSpc>
-                <a:spcPts val="1400"/>
+                <a:spcPts val="2100"/>
               </a:lnSpc>
               <a:buNone/>
             </a:pPr>
             <a:r>
-              <a:rPr lang="en-US" sz="1150" dirty="0">
+              <a:rPr lang="en-US" sz="1700" b="1" dirty="0">
+                <a:solidFill>
+                  <a:srgbClr val="EDF3EF"/>
+                </a:solidFill>
+                <a:latin typeface="Arial" pitchFamily="34" charset="0"/>
+                <a:ea typeface="Arial" pitchFamily="34" charset="-122"/>
+                <a:cs typeface="Arial" pitchFamily="34" charset="-120"/>
+              </a:rPr>
+              <a:t>não segurança</a:t>
+            </a:r>
+            <a:endParaRPr lang="en-US" sz="1700" dirty="0"/>
+          </a:p>
+        </p:txBody>
+      </p:sp>
+      <p:sp>
+        <p:nvSpPr>
+          <p:cNvPr id="7" name="Text 5"/>
+          <p:cNvSpPr txBox="1"/>
+          <p:nvPr/>
+        </p:nvSpPr>
+        <p:spPr>
+          <a:xfrm>
+            <a:off x="941832" y="4279392"/>
+            <a:ext cx="2926080" cy="1234440"/>
+          </a:xfrm>
+          <a:prstGeom prst="rect">
+            <a:avLst/>
+          </a:prstGeom>
+          <a:noFill/>
+          <a:ln/>
+        </p:spPr>
+        <p:txBody>
+          <a:bodyPr wrap="square" lIns="0" tIns="0" rIns="0" bIns="0" rtlCol="0" anchor="ctr"/>
+          <a:lstStyle/>
+          <a:p>
+            <a:pPr indent="0" marL="0">
+              <a:lnSpc>
+                <a:spcPts val="1600"/>
+              </a:lnSpc>
+              <a:buNone/>
+            </a:pPr>
+            <a:r>
+              <a:rPr lang="en-US" sz="1200" dirty="0">
                 <a:solidFill>
                   <a:srgbClr val="9DB0A6"/>
                 </a:solidFill>
@@ -3131,28 +2656,69 @@
                 <a:ea typeface="Calibri" pitchFamily="34" charset="-122"/>
                 <a:cs typeface="Calibri" pitchFamily="34" charset="-120"/>
               </a:rPr>
-              <a:t>Em troca do dado que falta: quantos alertas por dia a coordenação aguenta, e quantos foram engano.</a:t>
-            </a:r>
-            <a:endParaRPr lang="en-US" sz="1150" dirty="0"/>
-          </a:p>
-        </p:txBody>
-      </p:sp>
-      <p:sp>
-        <p:nvSpPr>
-          <p:cNvPr id="25" name="Shape 23"/>
+              <a:t>O medo real de uma mantenedora não é perder uma queda. É o processo depois. Registro que denuncia adulteração, imagem com prazo, acesso rastreado e biometria com vencimento reduzem exposição.</a:t>
+            </a:r>
+            <a:endParaRPr lang="en-US" sz="1200" dirty="0"/>
+          </a:p>
+        </p:txBody>
+      </p:sp>
+      <p:sp>
+        <p:nvSpPr>
+          <p:cNvPr id="8" name="Text 6"/>
+          <p:cNvSpPr txBox="1"/>
+          <p:nvPr/>
+        </p:nvSpPr>
+        <p:spPr>
+          <a:xfrm>
+            <a:off x="941832" y="5440680"/>
+            <a:ext cx="2926080" cy="320040"/>
+          </a:xfrm>
+          <a:prstGeom prst="rect">
+            <a:avLst/>
+          </a:prstGeom>
+          <a:noFill/>
+          <a:ln/>
+        </p:spPr>
+        <p:txBody>
+          <a:bodyPr wrap="square" lIns="0" tIns="0" rIns="0" bIns="0" rtlCol="0" anchor="ctr"/>
+          <a:lstStyle/>
+          <a:p>
+            <a:pPr indent="0" marL="0">
+              <a:buNone/>
+            </a:pPr>
+            <a:r>
+              <a:rPr lang="en-US" sz="850" dirty="0">
+                <a:solidFill>
+                  <a:srgbClr val="6A7D74"/>
+                </a:solidFill>
+                <a:latin typeface="Courier New" pitchFamily="34" charset="0"/>
+                <a:ea typeface="Courier New" pitchFamily="34" charset="-122"/>
+                <a:cs typeface="Courier New" pitchFamily="34" charset="-120"/>
+              </a:rPr>
+              <a:t>LGPD, e a disputa judicial que vem depois</a:t>
+            </a:r>
+            <a:endParaRPr lang="en-US" sz="850" dirty="0"/>
+          </a:p>
+        </p:txBody>
+      </p:sp>
+      <p:sp>
+        <p:nvSpPr>
+          <p:cNvPr id="9" name="Shape 7"/>
           <p:cNvSpPr/>
           <p:nvPr/>
         </p:nvSpPr>
         <p:spPr>
           <a:xfrm>
-            <a:off x="6492240" y="4498848"/>
-            <a:ext cx="292608" cy="292608"/>
-          </a:xfrm>
-          <a:prstGeom prst="ellipse">
-            <a:avLst/>
+            <a:off x="4370832" y="3017520"/>
+            <a:ext cx="3410712" cy="2788920"/>
+          </a:xfrm>
+          <a:prstGeom prst="roundRect">
+            <a:avLst>
+              <a:gd name="adj" fmla="val 3279"/>
+            </a:avLst>
           </a:prstGeom>
           <a:solidFill>
-            <a:srgbClr val="0B100E"/>
+            <a:srgbClr val="17211C"/>
           </a:solidFill>
           <a:ln w="12700">
             <a:solidFill>
@@ -3164,30 +2730,30 @@
       </p:sp>
       <p:sp>
         <p:nvSpPr>
-          <p:cNvPr id="26" name="Text 24"/>
-          <p:cNvSpPr txBox="1"/>
-          <p:nvPr/>
-        </p:nvSpPr>
-        <p:spPr>
-          <a:xfrm>
-            <a:off x="6492240" y="4526280"/>
-            <a:ext cx="292608" cy="237744"/>
-          </a:xfrm>
-          <a:prstGeom prst="rect">
-            <a:avLst/>
-          </a:prstGeom>
-          <a:noFill/>
-          <a:ln/>
-        </p:spPr>
-        <p:txBody>
-          <a:bodyPr wrap="square" lIns="0" tIns="0" rIns="0" bIns="0" rtlCol="0" anchor="ctr"/>
-          <a:lstStyle/>
-          <a:p>
-            <a:pPr algn="ctr" indent="0" marL="0">
-              <a:buNone/>
-            </a:pPr>
-            <a:r>
-              <a:rPr lang="en-US" sz="1000" dirty="0">
+          <p:cNvPr id="10" name="Text 8"/>
+          <p:cNvSpPr txBox="1"/>
+          <p:nvPr/>
+        </p:nvSpPr>
+        <p:spPr>
+          <a:xfrm>
+            <a:off x="4626864" y="3246120"/>
+            <a:ext cx="2926080" cy="228600"/>
+          </a:xfrm>
+          <a:prstGeom prst="rect">
+            <a:avLst/>
+          </a:prstGeom>
+          <a:noFill/>
+          <a:ln/>
+        </p:spPr>
+        <p:txBody>
+          <a:bodyPr wrap="square" lIns="0" tIns="0" rIns="0" bIns="0" rtlCol="0" anchor="ctr"/>
+          <a:lstStyle/>
+          <a:p>
+            <a:pPr indent="0" marL="0">
+              <a:buNone/>
+            </a:pPr>
+            <a:r>
+              <a:rPr lang="en-US" sz="950" spc="150" kern="0" dirty="0">
                 <a:solidFill>
                   <a:srgbClr val="3FBF5A"/>
                 </a:solidFill>
@@ -3195,38 +2761,41 @@
                 <a:ea typeface="Courier New" pitchFamily="34" charset="-122"/>
                 <a:cs typeface="Courier New" pitchFamily="34" charset="-120"/>
               </a:rPr>
-              <a:t>2</a:t>
-            </a:r>
-            <a:endParaRPr lang="en-US" sz="1000" dirty="0"/>
-          </a:p>
-        </p:txBody>
-      </p:sp>
-      <p:sp>
-        <p:nvSpPr>
-          <p:cNvPr id="27" name="Text 25"/>
-          <p:cNvSpPr txBox="1"/>
-          <p:nvPr/>
-        </p:nvSpPr>
-        <p:spPr>
-          <a:xfrm>
-            <a:off x="6949440" y="4480560"/>
-            <a:ext cx="4572000" cy="274320"/>
-          </a:xfrm>
-          <a:prstGeom prst="rect">
-            <a:avLst/>
-          </a:prstGeom>
-          <a:noFill/>
-          <a:ln/>
-        </p:spPr>
-        <p:txBody>
-          <a:bodyPr wrap="square" lIns="0" tIns="0" rIns="0" bIns="0" rtlCol="0" anchor="ctr"/>
-          <a:lstStyle/>
-          <a:p>
-            <a:pPr indent="0" marL="0">
-              <a:buNone/>
-            </a:pPr>
-            <a:r>
-              <a:rPr lang="en-US" sz="1400" b="1" dirty="0">
+              <a:t>O QUE SALVA</a:t>
+            </a:r>
+            <a:endParaRPr lang="en-US" sz="950" dirty="0"/>
+          </a:p>
+        </p:txBody>
+      </p:sp>
+      <p:sp>
+        <p:nvSpPr>
+          <p:cNvPr id="11" name="Text 9"/>
+          <p:cNvSpPr txBox="1"/>
+          <p:nvPr/>
+        </p:nvSpPr>
+        <p:spPr>
+          <a:xfrm>
+            <a:off x="4626864" y="3520440"/>
+            <a:ext cx="2926080" cy="685800"/>
+          </a:xfrm>
+          <a:prstGeom prst="rect">
+            <a:avLst/>
+          </a:prstGeom>
+          <a:noFill/>
+          <a:ln/>
+        </p:spPr>
+        <p:txBody>
+          <a:bodyPr wrap="square" lIns="0" tIns="0" rIns="0" bIns="0" rtlCol="0" anchor="ctr"/>
+          <a:lstStyle/>
+          <a:p>
+            <a:pPr indent="0" marL="0">
+              <a:lnSpc>
+                <a:spcPts val="2100"/>
+              </a:lnSpc>
+              <a:buNone/>
+            </a:pPr>
+            <a:r>
+              <a:rPr lang="en-US" sz="1700" b="1" dirty="0">
                 <a:solidFill>
                   <a:srgbClr val="EDF3EF"/>
                 </a:solidFill>
@@ -3234,22 +2803,22 @@
                 <a:ea typeface="Arial" pitchFamily="34" charset="-122"/>
                 <a:cs typeface="Arial" pitchFamily="34" charset="-120"/>
               </a:rPr>
-              <a:t>O piloto vira carta</a:t>
-            </a:r>
-            <a:endParaRPr lang="en-US" sz="1400" dirty="0"/>
-          </a:p>
-        </p:txBody>
-      </p:sp>
-      <p:sp>
-        <p:nvSpPr>
-          <p:cNvPr id="28" name="Text 26"/>
-          <p:cNvSpPr txBox="1"/>
-          <p:nvPr/>
-        </p:nvSpPr>
-        <p:spPr>
-          <a:xfrm>
-            <a:off x="6949440" y="4754880"/>
-            <a:ext cx="4572000" cy="502920"/>
+              <a:t>Custo evitado</a:t>
+            </a:r>
+            <a:endParaRPr lang="en-US" sz="1700" dirty="0"/>
+          </a:p>
+        </p:txBody>
+      </p:sp>
+      <p:sp>
+        <p:nvSpPr>
+          <p:cNvPr id="12" name="Text 10"/>
+          <p:cNvSpPr txBox="1"/>
+          <p:nvPr/>
+        </p:nvSpPr>
+        <p:spPr>
+          <a:xfrm>
+            <a:off x="4626864" y="4279392"/>
+            <a:ext cx="2926080" cy="1234440"/>
           </a:xfrm>
           <a:prstGeom prst="rect">
             <a:avLst/>
@@ -3263,12 +2832,12 @@
           <a:p>
             <a:pPr indent="0" marL="0">
               <a:lnSpc>
-                <a:spcPts val="1400"/>
+                <a:spcPts val="1600"/>
               </a:lnSpc>
               <a:buNone/>
             </a:pPr>
             <a:r>
-              <a:rPr lang="en-US" sz="1150" dirty="0">
+              <a:rPr lang="en-US" sz="1200" dirty="0">
                 <a:solidFill>
                   <a:srgbClr val="9DB0A6"/>
                 </a:solidFill>
@@ -3276,28 +2845,69 @@
                 <a:ea typeface="Calibri" pitchFamily="34" charset="-122"/>
                 <a:cs typeface="Calibri" pitchFamily="34" charset="-120"/>
               </a:rPr>
-              <a:t>Um depoimento da coordenação abre a porta da segunda escola melhor que qualquer slide.</a:t>
-            </a:r>
-            <a:endParaRPr lang="en-US" sz="1150" dirty="0"/>
-          </a:p>
-        </p:txBody>
-      </p:sp>
-      <p:sp>
-        <p:nvSpPr>
-          <p:cNvPr id="29" name="Shape 27"/>
+              <a:t>Uma câmera comum só serve depois do fato. O valor está em chegar antes: socorro em segundos em vez de minutos, e uma queda vista no instante em que acontece.</a:t>
+            </a:r>
+            <a:endParaRPr lang="en-US" sz="1200" dirty="0"/>
+          </a:p>
+        </p:txBody>
+      </p:sp>
+      <p:sp>
+        <p:nvSpPr>
+          <p:cNvPr id="13" name="Text 11"/>
+          <p:cNvSpPr txBox="1"/>
+          <p:nvPr/>
+        </p:nvSpPr>
+        <p:spPr>
+          <a:xfrm>
+            <a:off x="4626864" y="5440680"/>
+            <a:ext cx="2926080" cy="320040"/>
+          </a:xfrm>
+          <a:prstGeom prst="rect">
+            <a:avLst/>
+          </a:prstGeom>
+          <a:noFill/>
+          <a:ln/>
+        </p:spPr>
+        <p:txBody>
+          <a:bodyPr wrap="square" lIns="0" tIns="0" rIns="0" bIns="0" rtlCol="0" anchor="ctr"/>
+          <a:lstStyle/>
+          <a:p>
+            <a:pPr indent="0" marL="0">
+              <a:buNone/>
+            </a:pPr>
+            <a:r>
+              <a:rPr lang="en-US" sz="850" dirty="0">
+                <a:solidFill>
+                  <a:srgbClr val="6A7D74"/>
+                </a:solidFill>
+                <a:latin typeface="Courier New" pitchFamily="34" charset="0"/>
+                <a:ea typeface="Courier New" pitchFamily="34" charset="-122"/>
+                <a:cs typeface="Courier New" pitchFamily="34" charset="-120"/>
+              </a:rPr>
+              <a:t>o alerta sai antes de alguém reclamar</a:t>
+            </a:r>
+            <a:endParaRPr lang="en-US" sz="850" dirty="0"/>
+          </a:p>
+        </p:txBody>
+      </p:sp>
+      <p:sp>
+        <p:nvSpPr>
+          <p:cNvPr id="14" name="Shape 12"/>
           <p:cNvSpPr/>
           <p:nvPr/>
         </p:nvSpPr>
         <p:spPr>
           <a:xfrm>
-            <a:off x="6492240" y="5276088"/>
-            <a:ext cx="292608" cy="292608"/>
-          </a:xfrm>
-          <a:prstGeom prst="ellipse">
-            <a:avLst/>
+            <a:off x="8055864" y="3017520"/>
+            <a:ext cx="3410712" cy="2788920"/>
+          </a:xfrm>
+          <a:prstGeom prst="roundRect">
+            <a:avLst>
+              <a:gd name="adj" fmla="val 3279"/>
+            </a:avLst>
           </a:prstGeom>
           <a:solidFill>
-            <a:srgbClr val="0B100E"/>
+            <a:srgbClr val="17211C"/>
           </a:solidFill>
           <a:ln w="12700">
             <a:solidFill>
@@ -3309,30 +2919,30 @@
       </p:sp>
       <p:sp>
         <p:nvSpPr>
-          <p:cNvPr id="30" name="Text 28"/>
-          <p:cNvSpPr txBox="1"/>
-          <p:nvPr/>
-        </p:nvSpPr>
-        <p:spPr>
-          <a:xfrm>
-            <a:off x="6492240" y="5303520"/>
-            <a:ext cx="292608" cy="237744"/>
-          </a:xfrm>
-          <a:prstGeom prst="rect">
-            <a:avLst/>
-          </a:prstGeom>
-          <a:noFill/>
-          <a:ln/>
-        </p:spPr>
-        <p:txBody>
-          <a:bodyPr wrap="square" lIns="0" tIns="0" rIns="0" bIns="0" rtlCol="0" anchor="ctr"/>
-          <a:lstStyle/>
-          <a:p>
-            <a:pPr algn="ctr" indent="0" marL="0">
-              <a:buNone/>
-            </a:pPr>
-            <a:r>
-              <a:rPr lang="en-US" sz="1000" dirty="0">
+          <p:cNvPr id="15" name="Text 13"/>
+          <p:cNvSpPr txBox="1"/>
+          <p:nvPr/>
+        </p:nvSpPr>
+        <p:spPr>
+          <a:xfrm>
+            <a:off x="8311896" y="3246120"/>
+            <a:ext cx="2926080" cy="228600"/>
+          </a:xfrm>
+          <a:prstGeom prst="rect">
+            <a:avLst/>
+          </a:prstGeom>
+          <a:noFill/>
+          <a:ln/>
+        </p:spPr>
+        <p:txBody>
+          <a:bodyPr wrap="square" lIns="0" tIns="0" rIns="0" bIns="0" rtlCol="0" anchor="ctr"/>
+          <a:lstStyle/>
+          <a:p>
+            <a:pPr indent="0" marL="0">
+              <a:buNone/>
+            </a:pPr>
+            <a:r>
+              <a:rPr lang="en-US" sz="950" spc="150" kern="0" dirty="0">
                 <a:solidFill>
                   <a:srgbClr val="3FBF5A"/>
                 </a:solidFill>
@@ -3340,38 +2950,41 @@
                 <a:ea typeface="Courier New" pitchFamily="34" charset="-122"/>
                 <a:cs typeface="Courier New" pitchFamily="34" charset="-120"/>
               </a:rPr>
-              <a:t>3</a:t>
-            </a:r>
-            <a:endParaRPr lang="en-US" sz="1000" dirty="0"/>
-          </a:p>
-        </p:txBody>
-      </p:sp>
-      <p:sp>
-        <p:nvSpPr>
-          <p:cNvPr id="31" name="Text 29"/>
-          <p:cNvSpPr txBox="1"/>
-          <p:nvPr/>
-        </p:nvSpPr>
-        <p:spPr>
-          <a:xfrm>
-            <a:off x="6949440" y="5257800"/>
-            <a:ext cx="4572000" cy="274320"/>
-          </a:xfrm>
-          <a:prstGeom prst="rect">
-            <a:avLst/>
-          </a:prstGeom>
-          <a:noFill/>
-          <a:ln/>
-        </p:spPr>
-        <p:txBody>
-          <a:bodyPr wrap="square" lIns="0" tIns="0" rIns="0" bIns="0" rtlCol="0" anchor="ctr"/>
-          <a:lstStyle/>
-          <a:p>
-            <a:pPr indent="0" marL="0">
-              <a:buNone/>
-            </a:pPr>
-            <a:r>
-              <a:rPr lang="en-US" sz="1400" b="1" dirty="0">
+              <a:t>O QUE SUBSTITUI</a:t>
+            </a:r>
+            <a:endParaRPr lang="en-US" sz="950" dirty="0"/>
+          </a:p>
+        </p:txBody>
+      </p:sp>
+      <p:sp>
+        <p:nvSpPr>
+          <p:cNvPr id="16" name="Text 14"/>
+          <p:cNvSpPr txBox="1"/>
+          <p:nvPr/>
+        </p:nvSpPr>
+        <p:spPr>
+          <a:xfrm>
+            <a:off x="8311896" y="3520440"/>
+            <a:ext cx="2926080" cy="685800"/>
+          </a:xfrm>
+          <a:prstGeom prst="rect">
+            <a:avLst/>
+          </a:prstGeom>
+          <a:noFill/>
+          <a:ln/>
+        </p:spPr>
+        <p:txBody>
+          <a:bodyPr wrap="square" lIns="0" tIns="0" rIns="0" bIns="0" rtlCol="0" anchor="ctr"/>
+          <a:lstStyle/>
+          <a:p>
+            <a:pPr indent="0" marL="0">
+              <a:lnSpc>
+                <a:spcPts val="2100"/>
+              </a:lnSpc>
+              <a:buNone/>
+            </a:pPr>
+            <a:r>
+              <a:rPr lang="en-US" sz="1700" b="1" dirty="0">
                 <a:solidFill>
                   <a:srgbClr val="EDF3EF"/>
                 </a:solidFill>
@@ -3379,22 +2992,22 @@
                 <a:ea typeface="Arial" pitchFamily="34" charset="-122"/>
                 <a:cs typeface="Arial" pitchFamily="34" charset="-120"/>
               </a:rPr>
-              <a:t>Vender para a rede</a:t>
-            </a:r>
-            <a:endParaRPr lang="en-US" sz="1400" dirty="0"/>
-          </a:p>
-        </p:txBody>
-      </p:sp>
-      <p:sp>
-        <p:nvSpPr>
-          <p:cNvPr id="32" name="Text 30"/>
-          <p:cNvSpPr txBox="1"/>
-          <p:nvPr/>
-        </p:nvSpPr>
-        <p:spPr>
-          <a:xfrm>
-            <a:off x="6949440" y="5532120"/>
-            <a:ext cx="4572000" cy="502920"/>
+              <a:t>Licença de nuvem</a:t>
+            </a:r>
+            <a:endParaRPr lang="en-US" sz="1700" dirty="0"/>
+          </a:p>
+        </p:txBody>
+      </p:sp>
+      <p:sp>
+        <p:nvSpPr>
+          <p:cNvPr id="17" name="Text 15"/>
+          <p:cNvSpPr txBox="1"/>
+          <p:nvPr/>
+        </p:nvSpPr>
+        <p:spPr>
+          <a:xfrm>
+            <a:off x="8311896" y="4279392"/>
+            <a:ext cx="2926080" cy="1234440"/>
           </a:xfrm>
           <a:prstGeom prst="rect">
             <a:avLst/>
@@ -3408,12 +3021,12 @@
           <a:p>
             <a:pPr indent="0" marL="0">
               <a:lnSpc>
-                <a:spcPts val="1400"/>
+                <a:spcPts val="1600"/>
               </a:lnSpc>
               <a:buNone/>
             </a:pPr>
             <a:r>
-              <a:rPr lang="en-US" sz="1150" dirty="0">
+              <a:rPr lang="en-US" sz="1200" dirty="0">
                 <a:solidFill>
                   <a:srgbClr val="9DB0A6"/>
                 </a:solidFill>
@@ -3421,41 +3034,38 @@
                 <a:ea typeface="Calibri" pitchFamily="34" charset="-122"/>
                 <a:cs typeface="Calibri" pitchFamily="34" charset="-120"/>
               </a:rPr>
-              <a:t>Grupo educacional tem dezenas de unidades e um decisor só. É para ele que custo marginal quase zero é irresistível.</a:t>
-            </a:r>
-            <a:endParaRPr lang="en-US" sz="1150" dirty="0"/>
-          </a:p>
-        </p:txBody>
-      </p:sp>
-      <p:sp>
-        <p:nvSpPr>
-          <p:cNvPr id="33" name="Text 31"/>
-          <p:cNvSpPr txBox="1"/>
-          <p:nvPr/>
-        </p:nvSpPr>
-        <p:spPr>
-          <a:xfrm>
-            <a:off x="6492240" y="5687568"/>
-            <a:ext cx="5029200" cy="365760"/>
-          </a:xfrm>
-          <a:prstGeom prst="rect">
-            <a:avLst/>
-          </a:prstGeom>
-          <a:noFill/>
-          <a:ln/>
-        </p:spPr>
-        <p:txBody>
-          <a:bodyPr wrap="square" lIns="0" tIns="0" rIns="0" bIns="0" rtlCol="0" anchor="ctr"/>
-          <a:lstStyle/>
-          <a:p>
-            <a:pPr indent="0" marL="0">
-              <a:lnSpc>
-                <a:spcPts val="1300"/>
-              </a:lnSpc>
-              <a:buNone/>
-            </a:pPr>
-            <a:r>
-              <a:rPr lang="en-US" sz="900" dirty="0">
+              <a:t>Se a escola já paga mensalidade por câmera para algum sistema de nuvem, o nosso número entra no lugar dele. E, ao contrário do dele, dá para conferir de onde sai.</a:t>
+            </a:r>
+            <a:endParaRPr lang="en-US" sz="1200" dirty="0"/>
+          </a:p>
+        </p:txBody>
+      </p:sp>
+      <p:sp>
+        <p:nvSpPr>
+          <p:cNvPr id="18" name="Text 16"/>
+          <p:cNvSpPr txBox="1"/>
+          <p:nvPr/>
+        </p:nvSpPr>
+        <p:spPr>
+          <a:xfrm>
+            <a:off x="8311896" y="5440680"/>
+            <a:ext cx="2926080" cy="320040"/>
+          </a:xfrm>
+          <a:prstGeom prst="rect">
+            <a:avLst/>
+          </a:prstGeom>
+          <a:noFill/>
+          <a:ln/>
+        </p:spPr>
+        <p:txBody>
+          <a:bodyPr wrap="square" lIns="0" tIns="0" rIns="0" bIns="0" rtlCol="0" anchor="ctr"/>
+          <a:lstStyle/>
+          <a:p>
+            <a:pPr indent="0" marL="0">
+              <a:buNone/>
+            </a:pPr>
+            <a:r>
+              <a:rPr lang="en-US" sz="850" dirty="0">
                 <a:solidFill>
                   <a:srgbClr val="6A7D74"/>
                 </a:solidFill>
@@ -3463,15 +3073,15 @@
                 <a:ea typeface="Courier New" pitchFamily="34" charset="-122"/>
                 <a:cs typeface="Courier New" pitchFamily="34" charset="-120"/>
               </a:rPr>
-              <a:t>Modelo: assinatura por escola, não por câmera. Expandir deixa de ser uma nova decisão de compra.</a:t>
-            </a:r>
-            <a:endParaRPr lang="en-US" sz="900" dirty="0"/>
-          </a:p>
-        </p:txBody>
-      </p:sp>
-      <p:sp>
-        <p:nvSpPr>
-          <p:cNvPr id="35" name="Text 32"/>
+              <a:t>comparável, e verificável linha a linha</a:t>
+            </a:r>
+            <a:endParaRPr lang="en-US" sz="850" dirty="0"/>
+          </a:p>
+        </p:txBody>
+      </p:sp>
+      <p:sp>
+        <p:nvSpPr>
+          <p:cNvPr id="20" name="Text 17"/>
           <p:cNvSpPr txBox="1"/>
           <p:nvPr/>
         </p:nvSpPr>
@@ -3510,7 +3120,7 @@
       </p:sp>
       <p:sp>
         <p:nvSpPr>
-          <p:cNvPr id="36" name="Text 33"/>
+          <p:cNvPr id="21" name="Text 18"/>
           <p:cNvSpPr txBox="1"/>
           <p:nvPr/>
         </p:nvSpPr>
@@ -3606,13 +3216,13 @@
             <a:r>
               <a:rPr lang="en-US" sz="1100" spc="200" kern="0" dirty="0">
                 <a:solidFill>
-                  <a:srgbClr val="E4572E"/>
+                  <a:srgbClr val="3FBF5A"/>
                 </a:solidFill>
                 <a:latin typeface="Courier New" pitchFamily="34" charset="0"/>
                 <a:ea typeface="Courier New" pitchFamily="34" charset="-122"/>
                 <a:cs typeface="Courier New" pitchFamily="34" charset="-120"/>
               </a:rPr>
-              <a:t>HONESTIDADE INTELECTUAL</a:t>
+              <a:t>VALOR ECONÔMICO E ENTRADA NO MERCADO</a:t>
             </a:r>
             <a:endParaRPr lang="en-US" sz="1100" dirty="0"/>
           </a:p>
@@ -3654,7 +3264,7 @@
                 <a:ea typeface="Arial" pitchFamily="34" charset="-122"/>
                 <a:cs typeface="Arial" pitchFamily="34" charset="-120"/>
               </a:rPr>
-              <a:t>O que ainda não medimos,</a:t>
+              <a:t>O custo de cobrir mais</a:t>
             </a:r>
             <a:endParaRPr lang="en-US" sz="3600" dirty="0"/>
           </a:p>
@@ -3674,7 +3284,7 @@
                 <a:ea typeface="Arial" pitchFamily="34" charset="-122"/>
                 <a:cs typeface="Arial" pitchFamily="34" charset="-120"/>
               </a:rPr>
-              <a:t>e não vamos inventar.</a:t>
+              <a:t>uma sala é uma câmera.</a:t>
             </a:r>
             <a:endParaRPr lang="en-US" sz="3600" dirty="0"/>
           </a:p>
@@ -3688,7 +3298,7 @@
         </p:nvSpPr>
         <p:spPr>
           <a:xfrm>
-            <a:off x="685800" y="2560320"/>
+            <a:off x="685800" y="2514600"/>
             <a:ext cx="10515600" cy="731520"/>
           </a:xfrm>
           <a:prstGeom prst="rect">
@@ -3716,7 +3326,7 @@
                 <a:ea typeface="Calibri" pitchFamily="34" charset="-122"/>
                 <a:cs typeface="Calibri" pitchFamily="34" charset="-120"/>
               </a:rPr>
-              <a:t>Três números que decidem se isto é negócio, e que nenhuma planilha nossa pode responder.</a:t>
+              <a:t>O concorrente cobra licença mensal POR CÂMERA, porque o vídeo dele roda na nuvem dele. O nosso roda na borda, e o que sobe para a nuvem é uma linha de texto.</a:t>
             </a:r>
             <a:endParaRPr lang="en-US" sz="1500" dirty="0"/>
           </a:p>
@@ -3724,19 +3334,564 @@
       </p:sp>
       <p:sp>
         <p:nvSpPr>
-          <p:cNvPr id="5" name="Shape 3"/>
+          <p:cNvPr id="5" name="Text 3"/>
+          <p:cNvSpPr txBox="1"/>
+          <p:nvPr/>
+        </p:nvSpPr>
+        <p:spPr>
+          <a:xfrm>
+            <a:off x="685800" y="3246120"/>
+            <a:ext cx="5120640" cy="320040"/>
+          </a:xfrm>
+          <a:prstGeom prst="rect">
+            <a:avLst/>
+          </a:prstGeom>
+          <a:noFill/>
+          <a:ln/>
+        </p:spPr>
+        <p:txBody>
+          <a:bodyPr wrap="square" lIns="0" tIns="0" rIns="0" bIns="0" rtlCol="0" anchor="ctr"/>
+          <a:lstStyle/>
+          <a:p>
+            <a:pPr indent="0" marL="0">
+              <a:buNone/>
+            </a:pPr>
+            <a:r>
+              <a:rPr lang="en-US" sz="1800" b="1" dirty="0">
+                <a:solidFill>
+                  <a:srgbClr val="EDF3EF"/>
+                </a:solidFill>
+                <a:latin typeface="Arial" pitchFamily="34" charset="0"/>
+                <a:ea typeface="Arial" pitchFamily="34" charset="-122"/>
+                <a:cs typeface="Arial" pitchFamily="34" charset="-120"/>
+              </a:rPr>
+              <a:t>O que custa</a:t>
+            </a:r>
+            <a:endParaRPr lang="en-US" sz="1800" dirty="0"/>
+          </a:p>
+        </p:txBody>
+      </p:sp>
+      <p:sp>
+        <p:nvSpPr>
+          <p:cNvPr id="6" name="Shape 4"/>
           <p:cNvSpPr/>
           <p:nvPr/>
         </p:nvSpPr>
         <p:spPr>
           <a:xfrm>
-            <a:off x="685800" y="3200400"/>
-            <a:ext cx="3410712" cy="1920240"/>
-          </a:xfrm>
-          <a:prstGeom prst="roundRect">
-            <a:avLst>
-              <a:gd name="adj" fmla="val 4762"/>
-            </a:avLst>
+            <a:off x="685800" y="3703320"/>
+            <a:ext cx="5120640" cy="0"/>
+          </a:xfrm>
+          <a:prstGeom prst="line">
+            <a:avLst/>
+          </a:prstGeom>
+          <a:noFill/>
+          <a:ln w="12700">
+            <a:solidFill>
+              <a:srgbClr val="24322B"/>
+            </a:solidFill>
+            <a:prstDash val="solid"/>
+          </a:ln>
+        </p:spPr>
+      </p:sp>
+      <p:sp>
+        <p:nvSpPr>
+          <p:cNvPr id="7" name="Text 5"/>
+          <p:cNvSpPr txBox="1"/>
+          <p:nvPr/>
+        </p:nvSpPr>
+        <p:spPr>
+          <a:xfrm>
+            <a:off x="685800" y="3785616"/>
+            <a:ext cx="3017520" cy="320040"/>
+          </a:xfrm>
+          <a:prstGeom prst="rect">
+            <a:avLst/>
+          </a:prstGeom>
+          <a:noFill/>
+          <a:ln/>
+        </p:spPr>
+        <p:txBody>
+          <a:bodyPr wrap="square" lIns="0" tIns="0" rIns="0" bIns="0" rtlCol="0" anchor="ctr"/>
+          <a:lstStyle/>
+          <a:p>
+            <a:pPr indent="0" marL="0">
+              <a:buNone/>
+            </a:pPr>
+            <a:r>
+              <a:rPr lang="en-US" sz="1300" b="1" dirty="0">
+                <a:solidFill>
+                  <a:srgbClr val="EDF3EF"/>
+                </a:solidFill>
+                <a:latin typeface="Arial" pitchFamily="34" charset="0"/>
+                <a:ea typeface="Arial" pitchFamily="34" charset="-122"/>
+                <a:cs typeface="Arial" pitchFamily="34" charset="-120"/>
+              </a:rPr>
+              <a:t>Câmera IP, por sala</a:t>
+            </a:r>
+            <a:endParaRPr lang="en-US" sz="1300" dirty="0"/>
+          </a:p>
+        </p:txBody>
+      </p:sp>
+      <p:sp>
+        <p:nvSpPr>
+          <p:cNvPr id="8" name="Text 6"/>
+          <p:cNvSpPr txBox="1"/>
+          <p:nvPr/>
+        </p:nvSpPr>
+        <p:spPr>
+          <a:xfrm>
+            <a:off x="3703320" y="3803904"/>
+            <a:ext cx="2103120" cy="292608"/>
+          </a:xfrm>
+          <a:prstGeom prst="rect">
+            <a:avLst/>
+          </a:prstGeom>
+          <a:noFill/>
+          <a:ln/>
+        </p:spPr>
+        <p:txBody>
+          <a:bodyPr wrap="square" lIns="0" tIns="0" rIns="0" bIns="0" rtlCol="0" anchor="ctr"/>
+          <a:lstStyle/>
+          <a:p>
+            <a:pPr algn="r" indent="0" marL="0">
+              <a:buNone/>
+            </a:pPr>
+            <a:r>
+              <a:rPr lang="en-US" sz="1100" dirty="0">
+                <a:solidFill>
+                  <a:srgbClr val="9DB0A6"/>
+                </a:solidFill>
+                <a:latin typeface="Courier New" pitchFamily="34" charset="0"/>
+                <a:ea typeface="Courier New" pitchFamily="34" charset="-122"/>
+                <a:cs typeface="Courier New" pitchFamily="34" charset="-120"/>
+              </a:rPr>
+              <a:t>R$ 200 a R$ 680</a:t>
+            </a:r>
+            <a:endParaRPr lang="en-US" sz="1100" dirty="0"/>
+          </a:p>
+        </p:txBody>
+      </p:sp>
+      <p:sp>
+        <p:nvSpPr>
+          <p:cNvPr id="9" name="Shape 7"/>
+          <p:cNvSpPr/>
+          <p:nvPr/>
+        </p:nvSpPr>
+        <p:spPr>
+          <a:xfrm>
+            <a:off x="685800" y="4178808"/>
+            <a:ext cx="5120640" cy="0"/>
+          </a:xfrm>
+          <a:prstGeom prst="line">
+            <a:avLst/>
+          </a:prstGeom>
+          <a:noFill/>
+          <a:ln w="12700">
+            <a:solidFill>
+              <a:srgbClr val="24322B"/>
+            </a:solidFill>
+            <a:prstDash val="solid"/>
+          </a:ln>
+        </p:spPr>
+      </p:sp>
+      <p:sp>
+        <p:nvSpPr>
+          <p:cNvPr id="10" name="Text 8"/>
+          <p:cNvSpPr txBox="1"/>
+          <p:nvPr/>
+        </p:nvSpPr>
+        <p:spPr>
+          <a:xfrm>
+            <a:off x="685800" y="4261104"/>
+            <a:ext cx="3017520" cy="320040"/>
+          </a:xfrm>
+          <a:prstGeom prst="rect">
+            <a:avLst/>
+          </a:prstGeom>
+          <a:noFill/>
+          <a:ln/>
+        </p:spPr>
+        <p:txBody>
+          <a:bodyPr wrap="square" lIns="0" tIns="0" rIns="0" bIns="0" rtlCol="0" anchor="ctr"/>
+          <a:lstStyle/>
+          <a:p>
+            <a:pPr indent="0" marL="0">
+              <a:buNone/>
+            </a:pPr>
+            <a:r>
+              <a:rPr lang="en-US" sz="1300" b="1" dirty="0">
+                <a:solidFill>
+                  <a:srgbClr val="EDF3EF"/>
+                </a:solidFill>
+                <a:latin typeface="Arial" pitchFamily="34" charset="0"/>
+                <a:ea typeface="Arial" pitchFamily="34" charset="-122"/>
+                <a:cs typeface="Arial" pitchFamily="34" charset="-120"/>
+              </a:rPr>
+              <a:t>Servidor</a:t>
+            </a:r>
+            <a:endParaRPr lang="en-US" sz="1300" dirty="0"/>
+          </a:p>
+        </p:txBody>
+      </p:sp>
+      <p:sp>
+        <p:nvSpPr>
+          <p:cNvPr id="11" name="Text 9"/>
+          <p:cNvSpPr txBox="1"/>
+          <p:nvPr/>
+        </p:nvSpPr>
+        <p:spPr>
+          <a:xfrm>
+            <a:off x="3703320" y="4279392"/>
+            <a:ext cx="2103120" cy="292608"/>
+          </a:xfrm>
+          <a:prstGeom prst="rect">
+            <a:avLst/>
+          </a:prstGeom>
+          <a:noFill/>
+          <a:ln/>
+        </p:spPr>
+        <p:txBody>
+          <a:bodyPr wrap="square" lIns="0" tIns="0" rIns="0" bIns="0" rtlCol="0" anchor="ctr"/>
+          <a:lstStyle/>
+          <a:p>
+            <a:pPr algn="r" indent="0" marL="0">
+              <a:buNone/>
+            </a:pPr>
+            <a:r>
+              <a:rPr lang="en-US" sz="1100" dirty="0">
+                <a:solidFill>
+                  <a:srgbClr val="9DB0A6"/>
+                </a:solidFill>
+                <a:latin typeface="Courier New" pitchFamily="34" charset="0"/>
+                <a:ea typeface="Courier New" pitchFamily="34" charset="-122"/>
+                <a:cs typeface="Courier New" pitchFamily="34" charset="-120"/>
+              </a:rPr>
+              <a:t>1 PC comum por escola</a:t>
+            </a:r>
+            <a:endParaRPr lang="en-US" sz="1100" dirty="0"/>
+          </a:p>
+        </p:txBody>
+      </p:sp>
+      <p:sp>
+        <p:nvSpPr>
+          <p:cNvPr id="12" name="Shape 10"/>
+          <p:cNvSpPr/>
+          <p:nvPr/>
+        </p:nvSpPr>
+        <p:spPr>
+          <a:xfrm>
+            <a:off x="685800" y="4654296"/>
+            <a:ext cx="5120640" cy="0"/>
+          </a:xfrm>
+          <a:prstGeom prst="line">
+            <a:avLst/>
+          </a:prstGeom>
+          <a:noFill/>
+          <a:ln w="12700">
+            <a:solidFill>
+              <a:srgbClr val="24322B"/>
+            </a:solidFill>
+            <a:prstDash val="solid"/>
+          </a:ln>
+        </p:spPr>
+      </p:sp>
+      <p:sp>
+        <p:nvSpPr>
+          <p:cNvPr id="13" name="Text 11"/>
+          <p:cNvSpPr txBox="1"/>
+          <p:nvPr/>
+        </p:nvSpPr>
+        <p:spPr>
+          <a:xfrm>
+            <a:off x="685800" y="4736592"/>
+            <a:ext cx="3017520" cy="320040"/>
+          </a:xfrm>
+          <a:prstGeom prst="rect">
+            <a:avLst/>
+          </a:prstGeom>
+          <a:noFill/>
+          <a:ln/>
+        </p:spPr>
+        <p:txBody>
+          <a:bodyPr wrap="square" lIns="0" tIns="0" rIns="0" bIns="0" rtlCol="0" anchor="ctr"/>
+          <a:lstStyle/>
+          <a:p>
+            <a:pPr indent="0" marL="0">
+              <a:buNone/>
+            </a:pPr>
+            <a:r>
+              <a:rPr lang="en-US" sz="1300" b="1" dirty="0">
+                <a:solidFill>
+                  <a:srgbClr val="EDF3EF"/>
+                </a:solidFill>
+                <a:latin typeface="Arial" pitchFamily="34" charset="0"/>
+                <a:ea typeface="Arial" pitchFamily="34" charset="-122"/>
+                <a:cs typeface="Arial" pitchFamily="34" charset="-120"/>
+              </a:rPr>
+              <a:t>Licença de software</a:t>
+            </a:r>
+            <a:endParaRPr lang="en-US" sz="1300" dirty="0"/>
+          </a:p>
+        </p:txBody>
+      </p:sp>
+      <p:sp>
+        <p:nvSpPr>
+          <p:cNvPr id="14" name="Text 12"/>
+          <p:cNvSpPr txBox="1"/>
+          <p:nvPr/>
+        </p:nvSpPr>
+        <p:spPr>
+          <a:xfrm>
+            <a:off x="3703320" y="4754880"/>
+            <a:ext cx="2103120" cy="292608"/>
+          </a:xfrm>
+          <a:prstGeom prst="rect">
+            <a:avLst/>
+          </a:prstGeom>
+          <a:noFill/>
+          <a:ln/>
+        </p:spPr>
+        <p:txBody>
+          <a:bodyPr wrap="square" lIns="0" tIns="0" rIns="0" bIns="0" rtlCol="0" anchor="ctr"/>
+          <a:lstStyle/>
+          <a:p>
+            <a:pPr algn="r" indent="0" marL="0">
+              <a:buNone/>
+            </a:pPr>
+            <a:r>
+              <a:rPr lang="en-US" sz="1100" dirty="0">
+                <a:solidFill>
+                  <a:srgbClr val="3FBF5A"/>
+                </a:solidFill>
+                <a:latin typeface="Courier New" pitchFamily="34" charset="0"/>
+                <a:ea typeface="Courier New" pitchFamily="34" charset="-122"/>
+                <a:cs typeface="Courier New" pitchFamily="34" charset="-120"/>
+              </a:rPr>
+              <a:t>R$ 0 por câmera</a:t>
+            </a:r>
+            <a:endParaRPr lang="en-US" sz="1100" dirty="0"/>
+          </a:p>
+        </p:txBody>
+      </p:sp>
+      <p:sp>
+        <p:nvSpPr>
+          <p:cNvPr id="15" name="Shape 13"/>
+          <p:cNvSpPr/>
+          <p:nvPr/>
+        </p:nvSpPr>
+        <p:spPr>
+          <a:xfrm>
+            <a:off x="685800" y="5129784"/>
+            <a:ext cx="5120640" cy="0"/>
+          </a:xfrm>
+          <a:prstGeom prst="line">
+            <a:avLst/>
+          </a:prstGeom>
+          <a:noFill/>
+          <a:ln w="12700">
+            <a:solidFill>
+              <a:srgbClr val="24322B"/>
+            </a:solidFill>
+            <a:prstDash val="solid"/>
+          </a:ln>
+        </p:spPr>
+      </p:sp>
+      <p:sp>
+        <p:nvSpPr>
+          <p:cNvPr id="16" name="Text 14"/>
+          <p:cNvSpPr txBox="1"/>
+          <p:nvPr/>
+        </p:nvSpPr>
+        <p:spPr>
+          <a:xfrm>
+            <a:off x="685800" y="5212080"/>
+            <a:ext cx="3017520" cy="320040"/>
+          </a:xfrm>
+          <a:prstGeom prst="rect">
+            <a:avLst/>
+          </a:prstGeom>
+          <a:noFill/>
+          <a:ln/>
+        </p:spPr>
+        <p:txBody>
+          <a:bodyPr wrap="square" lIns="0" tIns="0" rIns="0" bIns="0" rtlCol="0" anchor="ctr"/>
+          <a:lstStyle/>
+          <a:p>
+            <a:pPr indent="0" marL="0">
+              <a:buNone/>
+            </a:pPr>
+            <a:r>
+              <a:rPr lang="en-US" sz="1300" b="1" dirty="0">
+                <a:solidFill>
+                  <a:srgbClr val="EDF3EF"/>
+                </a:solidFill>
+                <a:latin typeface="Arial" pitchFamily="34" charset="0"/>
+                <a:ea typeface="Arial" pitchFamily="34" charset="-122"/>
+                <a:cs typeface="Arial" pitchFamily="34" charset="-120"/>
+              </a:rPr>
+              <a:t>Nuvem do alerta</a:t>
+            </a:r>
+            <a:endParaRPr lang="en-US" sz="1300" dirty="0"/>
+          </a:p>
+        </p:txBody>
+      </p:sp>
+      <p:sp>
+        <p:nvSpPr>
+          <p:cNvPr id="17" name="Text 15"/>
+          <p:cNvSpPr txBox="1"/>
+          <p:nvPr/>
+        </p:nvSpPr>
+        <p:spPr>
+          <a:xfrm>
+            <a:off x="3703320" y="5230368"/>
+            <a:ext cx="2103120" cy="292608"/>
+          </a:xfrm>
+          <a:prstGeom prst="rect">
+            <a:avLst/>
+          </a:prstGeom>
+          <a:noFill/>
+          <a:ln/>
+        </p:spPr>
+        <p:txBody>
+          <a:bodyPr wrap="square" lIns="0" tIns="0" rIns="0" bIns="0" rtlCol="0" anchor="ctr"/>
+          <a:lstStyle/>
+          <a:p>
+            <a:pPr algn="r" indent="0" marL="0">
+              <a:buNone/>
+            </a:pPr>
+            <a:r>
+              <a:rPr lang="en-US" sz="1100" dirty="0">
+                <a:solidFill>
+                  <a:srgbClr val="3FBF5A"/>
+                </a:solidFill>
+                <a:latin typeface="Courier New" pitchFamily="34" charset="0"/>
+                <a:ea typeface="Courier New" pitchFamily="34" charset="-122"/>
+                <a:cs typeface="Courier New" pitchFamily="34" charset="-120"/>
+              </a:rPr>
+              <a:t>centavos por mês</a:t>
+            </a:r>
+            <a:endParaRPr lang="en-US" sz="1100" dirty="0"/>
+          </a:p>
+        </p:txBody>
+      </p:sp>
+      <p:sp>
+        <p:nvSpPr>
+          <p:cNvPr id="18" name="Shape 16"/>
+          <p:cNvSpPr/>
+          <p:nvPr/>
+        </p:nvSpPr>
+        <p:spPr>
+          <a:xfrm>
+            <a:off x="685800" y="5605272"/>
+            <a:ext cx="5120640" cy="0"/>
+          </a:xfrm>
+          <a:prstGeom prst="line">
+            <a:avLst/>
+          </a:prstGeom>
+          <a:noFill/>
+          <a:ln w="12700">
+            <a:solidFill>
+              <a:srgbClr val="24322B"/>
+            </a:solidFill>
+            <a:prstDash val="solid"/>
+          </a:ln>
+        </p:spPr>
+      </p:sp>
+      <p:sp>
+        <p:nvSpPr>
+          <p:cNvPr id="19" name="Text 17"/>
+          <p:cNvSpPr txBox="1"/>
+          <p:nvPr/>
+        </p:nvSpPr>
+        <p:spPr>
+          <a:xfrm>
+            <a:off x="685800" y="5687568"/>
+            <a:ext cx="5120640" cy="365760"/>
+          </a:xfrm>
+          <a:prstGeom prst="rect">
+            <a:avLst/>
+          </a:prstGeom>
+          <a:noFill/>
+          <a:ln/>
+        </p:spPr>
+        <p:txBody>
+          <a:bodyPr wrap="square" lIns="0" tIns="0" rIns="0" bIns="0" rtlCol="0" anchor="ctr"/>
+          <a:lstStyle/>
+          <a:p>
+            <a:pPr indent="0" marL="0">
+              <a:lnSpc>
+                <a:spcPts val="1300"/>
+              </a:lnSpc>
+              <a:buNone/>
+            </a:pPr>
+            <a:r>
+              <a:rPr lang="en-US" sz="900" dirty="0">
+                <a:solidFill>
+                  <a:srgbClr val="6A7D74"/>
+                </a:solidFill>
+                <a:latin typeface="Courier New" pitchFamily="34" charset="0"/>
+                <a:ea typeface="Courier New" pitchFamily="34" charset="-122"/>
+                <a:cs typeface="Courier New" pitchFamily="34" charset="-120"/>
+              </a:rPr>
+              <a:t>sem placa de vídeo, sem custo por fluxo, sem mensalidade que cresce com a escola</a:t>
+            </a:r>
+            <a:endParaRPr lang="en-US" sz="900" dirty="0"/>
+          </a:p>
+        </p:txBody>
+      </p:sp>
+      <p:sp>
+        <p:nvSpPr>
+          <p:cNvPr id="20" name="Text 18"/>
+          <p:cNvSpPr txBox="1"/>
+          <p:nvPr/>
+        </p:nvSpPr>
+        <p:spPr>
+          <a:xfrm>
+            <a:off x="6492240" y="3246120"/>
+            <a:ext cx="5029200" cy="320040"/>
+          </a:xfrm>
+          <a:prstGeom prst="rect">
+            <a:avLst/>
+          </a:prstGeom>
+          <a:noFill/>
+          <a:ln/>
+        </p:spPr>
+        <p:txBody>
+          <a:bodyPr wrap="square" lIns="0" tIns="0" rIns="0" bIns="0" rtlCol="0" anchor="ctr"/>
+          <a:lstStyle/>
+          <a:p>
+            <a:pPr indent="0" marL="0">
+              <a:buNone/>
+            </a:pPr>
+            <a:r>
+              <a:rPr lang="en-US" sz="1800" b="1" dirty="0">
+                <a:solidFill>
+                  <a:srgbClr val="EDF3EF"/>
+                </a:solidFill>
+                <a:latin typeface="Arial" pitchFamily="34" charset="0"/>
+                <a:ea typeface="Arial" pitchFamily="34" charset="-122"/>
+                <a:cs typeface="Arial" pitchFamily="34" charset="-120"/>
+              </a:rPr>
+              <a:t>Como entra no mercado</a:t>
+            </a:r>
+            <a:endParaRPr lang="en-US" sz="1800" dirty="0"/>
+          </a:p>
+        </p:txBody>
+      </p:sp>
+      <p:sp>
+        <p:nvSpPr>
+          <p:cNvPr id="21" name="Shape 19"/>
+          <p:cNvSpPr/>
+          <p:nvPr/>
+        </p:nvSpPr>
+        <p:spPr>
+          <a:xfrm>
+            <a:off x="6492240" y="3721608"/>
+            <a:ext cx="292608" cy="292608"/>
+          </a:xfrm>
+          <a:prstGeom prst="ellipse">
+            <a:avLst/>
           </a:prstGeom>
           <a:solidFill>
             <a:srgbClr val="0B100E"/>
@@ -3745,39 +3900,75 @@
             <a:solidFill>
               <a:srgbClr val="24322B"/>
             </a:solidFill>
-            <a:prstDash val="dash"/>
+            <a:prstDash val="solid"/>
           </a:ln>
         </p:spPr>
       </p:sp>
       <p:sp>
         <p:nvSpPr>
-          <p:cNvPr id="6" name="Text 4"/>
-          <p:cNvSpPr txBox="1"/>
-          <p:nvPr/>
-        </p:nvSpPr>
-        <p:spPr>
-          <a:xfrm>
-            <a:off x="960120" y="3456432"/>
-            <a:ext cx="2880360" cy="548640"/>
-          </a:xfrm>
-          <a:prstGeom prst="rect">
-            <a:avLst/>
-          </a:prstGeom>
-          <a:noFill/>
-          <a:ln/>
-        </p:spPr>
-        <p:txBody>
-          <a:bodyPr wrap="square" lIns="0" tIns="0" rIns="0" bIns="0" rtlCol="0" anchor="ctr"/>
-          <a:lstStyle/>
-          <a:p>
-            <a:pPr indent="0" marL="0">
-              <a:lnSpc>
-                <a:spcPts val="1900"/>
-              </a:lnSpc>
-              <a:buNone/>
-            </a:pPr>
-            <a:r>
-              <a:rPr lang="en-US" sz="1500" b="1" dirty="0">
+          <p:cNvPr id="22" name="Text 20"/>
+          <p:cNvSpPr txBox="1"/>
+          <p:nvPr/>
+        </p:nvSpPr>
+        <p:spPr>
+          <a:xfrm>
+            <a:off x="6492240" y="3749040"/>
+            <a:ext cx="292608" cy="237744"/>
+          </a:xfrm>
+          <a:prstGeom prst="rect">
+            <a:avLst/>
+          </a:prstGeom>
+          <a:noFill/>
+          <a:ln/>
+        </p:spPr>
+        <p:txBody>
+          <a:bodyPr wrap="square" lIns="0" tIns="0" rIns="0" bIns="0" rtlCol="0" anchor="ctr"/>
+          <a:lstStyle/>
+          <a:p>
+            <a:pPr algn="ctr" indent="0" marL="0">
+              <a:buNone/>
+            </a:pPr>
+            <a:r>
+              <a:rPr lang="en-US" sz="1000" dirty="0">
+                <a:solidFill>
+                  <a:srgbClr val="3FBF5A"/>
+                </a:solidFill>
+                <a:latin typeface="Courier New" pitchFamily="34" charset="0"/>
+                <a:ea typeface="Courier New" pitchFamily="34" charset="-122"/>
+                <a:cs typeface="Courier New" pitchFamily="34" charset="-120"/>
+              </a:rPr>
+              <a:t>1</a:t>
+            </a:r>
+            <a:endParaRPr lang="en-US" sz="1000" dirty="0"/>
+          </a:p>
+        </p:txBody>
+      </p:sp>
+      <p:sp>
+        <p:nvSpPr>
+          <p:cNvPr id="23" name="Text 21"/>
+          <p:cNvSpPr txBox="1"/>
+          <p:nvPr/>
+        </p:nvSpPr>
+        <p:spPr>
+          <a:xfrm>
+            <a:off x="6949440" y="3703320"/>
+            <a:ext cx="4572000" cy="274320"/>
+          </a:xfrm>
+          <a:prstGeom prst="rect">
+            <a:avLst/>
+          </a:prstGeom>
+          <a:noFill/>
+          <a:ln/>
+        </p:spPr>
+        <p:txBody>
+          <a:bodyPr wrap="square" lIns="0" tIns="0" rIns="0" bIns="0" rtlCol="0" anchor="ctr"/>
+          <a:lstStyle/>
+          <a:p>
+            <a:pPr indent="0" marL="0">
+              <a:buNone/>
+            </a:pPr>
+            <a:r>
+              <a:rPr lang="en-US" sz="1400" b="1" dirty="0">
                 <a:solidFill>
                   <a:srgbClr val="EDF3EF"/>
                 </a:solidFill>
@@ -3785,38 +3976,41 @@
                 <a:ea typeface="Arial" pitchFamily="34" charset="-122"/>
                 <a:cs typeface="Arial" pitchFamily="34" charset="-120"/>
               </a:rPr>
-              <a:t>Quanto uma escola paga hoje</a:t>
-            </a:r>
-            <a:endParaRPr lang="en-US" sz="1500" dirty="0"/>
-          </a:p>
-        </p:txBody>
-      </p:sp>
-      <p:sp>
-        <p:nvSpPr>
-          <p:cNvPr id="7" name="Text 5"/>
-          <p:cNvSpPr txBox="1"/>
-          <p:nvPr/>
-        </p:nvSpPr>
-        <p:spPr>
-          <a:xfrm>
-            <a:off x="960120" y="4069080"/>
-            <a:ext cx="2880360" cy="320040"/>
-          </a:xfrm>
-          <a:prstGeom prst="rect">
-            <a:avLst/>
-          </a:prstGeom>
-          <a:noFill/>
-          <a:ln/>
-        </p:spPr>
-        <p:txBody>
-          <a:bodyPr wrap="square" lIns="0" tIns="0" rIns="0" bIns="0" rtlCol="0" anchor="ctr"/>
-          <a:lstStyle/>
-          <a:p>
-            <a:pPr indent="0" marL="0">
-              <a:buNone/>
-            </a:pPr>
-            <a:r>
-              <a:rPr lang="en-US" sz="1200" dirty="0">
+              <a:t>Uma escola, de graça</a:t>
+            </a:r>
+            <a:endParaRPr lang="en-US" sz="1400" dirty="0"/>
+          </a:p>
+        </p:txBody>
+      </p:sp>
+      <p:sp>
+        <p:nvSpPr>
+          <p:cNvPr id="24" name="Text 22"/>
+          <p:cNvSpPr txBox="1"/>
+          <p:nvPr/>
+        </p:nvSpPr>
+        <p:spPr>
+          <a:xfrm>
+            <a:off x="6949440" y="3977640"/>
+            <a:ext cx="4572000" cy="502920"/>
+          </a:xfrm>
+          <a:prstGeom prst="rect">
+            <a:avLst/>
+          </a:prstGeom>
+          <a:noFill/>
+          <a:ln/>
+        </p:spPr>
+        <p:txBody>
+          <a:bodyPr wrap="square" lIns="0" tIns="0" rIns="0" bIns="0" rtlCol="0" anchor="ctr"/>
+          <a:lstStyle/>
+          <a:p>
+            <a:pPr indent="0" marL="0">
+              <a:lnSpc>
+                <a:spcPts val="1400"/>
+              </a:lnSpc>
+              <a:buNone/>
+            </a:pPr>
+            <a:r>
+              <a:rPr lang="en-US" sz="1150" dirty="0">
                 <a:solidFill>
                   <a:srgbClr val="9DB0A6"/>
                 </a:solidFill>
@@ -3824,69 +4018,25 @@
                 <a:ea typeface="Calibri" pitchFamily="34" charset="-122"/>
                 <a:cs typeface="Calibri" pitchFamily="34" charset="-120"/>
               </a:rPr>
-              <a:t>por monitoramento eletrônico</a:t>
-            </a:r>
-            <a:endParaRPr lang="en-US" sz="1200" dirty="0"/>
-          </a:p>
-        </p:txBody>
-      </p:sp>
-      <p:sp>
-        <p:nvSpPr>
-          <p:cNvPr id="8" name="Text 6"/>
-          <p:cNvSpPr txBox="1"/>
-          <p:nvPr/>
-        </p:nvSpPr>
-        <p:spPr>
-          <a:xfrm>
-            <a:off x="960120" y="4526280"/>
-            <a:ext cx="2880360" cy="411480"/>
-          </a:xfrm>
-          <a:prstGeom prst="rect">
-            <a:avLst/>
-          </a:prstGeom>
-          <a:noFill/>
-          <a:ln/>
-        </p:spPr>
-        <p:txBody>
-          <a:bodyPr wrap="square" lIns="0" tIns="0" rIns="0" bIns="0" rtlCol="0" anchor="ctr"/>
-          <a:lstStyle/>
-          <a:p>
-            <a:pPr indent="0" marL="0">
-              <a:lnSpc>
-                <a:spcPts val="1200"/>
-              </a:lnSpc>
-              <a:buNone/>
-            </a:pPr>
-            <a:r>
-              <a:rPr lang="en-US" sz="900" dirty="0">
-                <a:solidFill>
-                  <a:srgbClr val="E4572E"/>
-                </a:solidFill>
-                <a:latin typeface="Courier New" pitchFamily="34" charset="0"/>
-                <a:ea typeface="Courier New" pitchFamily="34" charset="-122"/>
-                <a:cs typeface="Courier New" pitchFamily="34" charset="-120"/>
-              </a:rPr>
-              <a:t>fonte: ligar para três escolas</a:t>
-            </a:r>
-            <a:endParaRPr lang="en-US" sz="900" dirty="0"/>
-          </a:p>
-        </p:txBody>
-      </p:sp>
-      <p:sp>
-        <p:nvSpPr>
-          <p:cNvPr id="9" name="Shape 7"/>
+              <a:t>Em troca do dado que falta: quantos alertas por dia a coordenação aguenta, e quantos foram engano.</a:t>
+            </a:r>
+            <a:endParaRPr lang="en-US" sz="1150" dirty="0"/>
+          </a:p>
+        </p:txBody>
+      </p:sp>
+      <p:sp>
+        <p:nvSpPr>
+          <p:cNvPr id="25" name="Shape 23"/>
           <p:cNvSpPr/>
           <p:nvPr/>
         </p:nvSpPr>
         <p:spPr>
           <a:xfrm>
-            <a:off x="4370832" y="3200400"/>
-            <a:ext cx="3410712" cy="1920240"/>
-          </a:xfrm>
-          <a:prstGeom prst="roundRect">
-            <a:avLst>
-              <a:gd name="adj" fmla="val 4762"/>
-            </a:avLst>
+            <a:off x="6492240" y="4498848"/>
+            <a:ext cx="292608" cy="292608"/>
+          </a:xfrm>
+          <a:prstGeom prst="ellipse">
+            <a:avLst/>
           </a:prstGeom>
           <a:solidFill>
             <a:srgbClr val="0B100E"/>
@@ -3895,39 +4045,75 @@
             <a:solidFill>
               <a:srgbClr val="24322B"/>
             </a:solidFill>
-            <a:prstDash val="dash"/>
+            <a:prstDash val="solid"/>
           </a:ln>
         </p:spPr>
       </p:sp>
       <p:sp>
         <p:nvSpPr>
-          <p:cNvPr id="10" name="Text 8"/>
-          <p:cNvSpPr txBox="1"/>
-          <p:nvPr/>
-        </p:nvSpPr>
-        <p:spPr>
-          <a:xfrm>
-            <a:off x="4645152" y="3456432"/>
-            <a:ext cx="2880360" cy="548640"/>
-          </a:xfrm>
-          <a:prstGeom prst="rect">
-            <a:avLst/>
-          </a:prstGeom>
-          <a:noFill/>
-          <a:ln/>
-        </p:spPr>
-        <p:txBody>
-          <a:bodyPr wrap="square" lIns="0" tIns="0" rIns="0" bIns="0" rtlCol="0" anchor="ctr"/>
-          <a:lstStyle/>
-          <a:p>
-            <a:pPr indent="0" marL="0">
-              <a:lnSpc>
-                <a:spcPts val="1900"/>
-              </a:lnSpc>
-              <a:buNone/>
-            </a:pPr>
-            <a:r>
-              <a:rPr lang="en-US" sz="1500" b="1" dirty="0">
+          <p:cNvPr id="26" name="Text 24"/>
+          <p:cNvSpPr txBox="1"/>
+          <p:nvPr/>
+        </p:nvSpPr>
+        <p:spPr>
+          <a:xfrm>
+            <a:off x="6492240" y="4526280"/>
+            <a:ext cx="292608" cy="237744"/>
+          </a:xfrm>
+          <a:prstGeom prst="rect">
+            <a:avLst/>
+          </a:prstGeom>
+          <a:noFill/>
+          <a:ln/>
+        </p:spPr>
+        <p:txBody>
+          <a:bodyPr wrap="square" lIns="0" tIns="0" rIns="0" bIns="0" rtlCol="0" anchor="ctr"/>
+          <a:lstStyle/>
+          <a:p>
+            <a:pPr algn="ctr" indent="0" marL="0">
+              <a:buNone/>
+            </a:pPr>
+            <a:r>
+              <a:rPr lang="en-US" sz="1000" dirty="0">
+                <a:solidFill>
+                  <a:srgbClr val="3FBF5A"/>
+                </a:solidFill>
+                <a:latin typeface="Courier New" pitchFamily="34" charset="0"/>
+                <a:ea typeface="Courier New" pitchFamily="34" charset="-122"/>
+                <a:cs typeface="Courier New" pitchFamily="34" charset="-120"/>
+              </a:rPr>
+              <a:t>2</a:t>
+            </a:r>
+            <a:endParaRPr lang="en-US" sz="1000" dirty="0"/>
+          </a:p>
+        </p:txBody>
+      </p:sp>
+      <p:sp>
+        <p:nvSpPr>
+          <p:cNvPr id="27" name="Text 25"/>
+          <p:cNvSpPr txBox="1"/>
+          <p:nvPr/>
+        </p:nvSpPr>
+        <p:spPr>
+          <a:xfrm>
+            <a:off x="6949440" y="4480560"/>
+            <a:ext cx="4572000" cy="274320"/>
+          </a:xfrm>
+          <a:prstGeom prst="rect">
+            <a:avLst/>
+          </a:prstGeom>
+          <a:noFill/>
+          <a:ln/>
+        </p:spPr>
+        <p:txBody>
+          <a:bodyPr wrap="square" lIns="0" tIns="0" rIns="0" bIns="0" rtlCol="0" anchor="ctr"/>
+          <a:lstStyle/>
+          <a:p>
+            <a:pPr indent="0" marL="0">
+              <a:buNone/>
+            </a:pPr>
+            <a:r>
+              <a:rPr lang="en-US" sz="1400" b="1" dirty="0">
                 <a:solidFill>
                   <a:srgbClr val="EDF3EF"/>
                 </a:solidFill>
@@ -3935,38 +4121,41 @@
                 <a:ea typeface="Arial" pitchFamily="34" charset="-122"/>
                 <a:cs typeface="Arial" pitchFamily="34" charset="-120"/>
               </a:rPr>
-              <a:t>Quantas escolas no recorte</a:t>
-            </a:r>
-            <a:endParaRPr lang="en-US" sz="1500" dirty="0"/>
-          </a:p>
-        </p:txBody>
-      </p:sp>
-      <p:sp>
-        <p:nvSpPr>
-          <p:cNvPr id="11" name="Text 9"/>
-          <p:cNvSpPr txBox="1"/>
-          <p:nvPr/>
-        </p:nvSpPr>
-        <p:spPr>
-          <a:xfrm>
-            <a:off x="4645152" y="4069080"/>
-            <a:ext cx="2880360" cy="320040"/>
-          </a:xfrm>
-          <a:prstGeom prst="rect">
-            <a:avLst/>
-          </a:prstGeom>
-          <a:noFill/>
-          <a:ln/>
-        </p:spPr>
-        <p:txBody>
-          <a:bodyPr wrap="square" lIns="0" tIns="0" rIns="0" bIns="0" rtlCol="0" anchor="ctr"/>
-          <a:lstStyle/>
-          <a:p>
-            <a:pPr indent="0" marL="0">
-              <a:buNone/>
-            </a:pPr>
-            <a:r>
-              <a:rPr lang="en-US" sz="1200" dirty="0">
+              <a:t>O piloto vira carta</a:t>
+            </a:r>
+            <a:endParaRPr lang="en-US" sz="1400" dirty="0"/>
+          </a:p>
+        </p:txBody>
+      </p:sp>
+      <p:sp>
+        <p:nvSpPr>
+          <p:cNvPr id="28" name="Text 26"/>
+          <p:cNvSpPr txBox="1"/>
+          <p:nvPr/>
+        </p:nvSpPr>
+        <p:spPr>
+          <a:xfrm>
+            <a:off x="6949440" y="4754880"/>
+            <a:ext cx="4572000" cy="502920"/>
+          </a:xfrm>
+          <a:prstGeom prst="rect">
+            <a:avLst/>
+          </a:prstGeom>
+          <a:noFill/>
+          <a:ln/>
+        </p:spPr>
+        <p:txBody>
+          <a:bodyPr wrap="square" lIns="0" tIns="0" rIns="0" bIns="0" rtlCol="0" anchor="ctr"/>
+          <a:lstStyle/>
+          <a:p>
+            <a:pPr indent="0" marL="0">
+              <a:lnSpc>
+                <a:spcPts val="1400"/>
+              </a:lnSpc>
+              <a:buNone/>
+            </a:pPr>
+            <a:r>
+              <a:rPr lang="en-US" sz="1150" dirty="0">
                 <a:solidFill>
                   <a:srgbClr val="9DB0A6"/>
                 </a:solidFill>
@@ -3974,69 +4163,25 @@
                 <a:ea typeface="Calibri" pitchFamily="34" charset="-122"/>
                 <a:cs typeface="Calibri" pitchFamily="34" charset="-120"/>
               </a:rPr>
-              <a:t>rede, município ou grupo</a:t>
-            </a:r>
-            <a:endParaRPr lang="en-US" sz="1200" dirty="0"/>
-          </a:p>
-        </p:txBody>
-      </p:sp>
-      <p:sp>
-        <p:nvSpPr>
-          <p:cNvPr id="12" name="Text 10"/>
-          <p:cNvSpPr txBox="1"/>
-          <p:nvPr/>
-        </p:nvSpPr>
-        <p:spPr>
-          <a:xfrm>
-            <a:off x="4645152" y="4526280"/>
-            <a:ext cx="2880360" cy="411480"/>
-          </a:xfrm>
-          <a:prstGeom prst="rect">
-            <a:avLst/>
-          </a:prstGeom>
-          <a:noFill/>
-          <a:ln/>
-        </p:spPr>
-        <p:txBody>
-          <a:bodyPr wrap="square" lIns="0" tIns="0" rIns="0" bIns="0" rtlCol="0" anchor="ctr"/>
-          <a:lstStyle/>
-          <a:p>
-            <a:pPr indent="0" marL="0">
-              <a:lnSpc>
-                <a:spcPts val="1200"/>
-              </a:lnSpc>
-              <a:buNone/>
-            </a:pPr>
-            <a:r>
-              <a:rPr lang="en-US" sz="900" dirty="0">
-                <a:solidFill>
-                  <a:srgbClr val="E4572E"/>
-                </a:solidFill>
-                <a:latin typeface="Courier New" pitchFamily="34" charset="0"/>
-                <a:ea typeface="Courier New" pitchFamily="34" charset="-122"/>
-                <a:cs typeface="Courier New" pitchFamily="34" charset="-120"/>
-              </a:rPr>
-              <a:t>fonte: Censo Escolar, INEP</a:t>
-            </a:r>
-            <a:endParaRPr lang="en-US" sz="900" dirty="0"/>
-          </a:p>
-        </p:txBody>
-      </p:sp>
-      <p:sp>
-        <p:nvSpPr>
-          <p:cNvPr id="13" name="Shape 11"/>
+              <a:t>Um depoimento da coordenação abre a porta da segunda escola melhor que qualquer slide.</a:t>
+            </a:r>
+            <a:endParaRPr lang="en-US" sz="1150" dirty="0"/>
+          </a:p>
+        </p:txBody>
+      </p:sp>
+      <p:sp>
+        <p:nvSpPr>
+          <p:cNvPr id="29" name="Shape 27"/>
           <p:cNvSpPr/>
           <p:nvPr/>
         </p:nvSpPr>
         <p:spPr>
           <a:xfrm>
-            <a:off x="8055864" y="3200400"/>
-            <a:ext cx="3410712" cy="1920240"/>
-          </a:xfrm>
-          <a:prstGeom prst="roundRect">
-            <a:avLst>
-              <a:gd name="adj" fmla="val 4762"/>
-            </a:avLst>
+            <a:off x="6492240" y="5276088"/>
+            <a:ext cx="292608" cy="292608"/>
+          </a:xfrm>
+          <a:prstGeom prst="ellipse">
+            <a:avLst/>
           </a:prstGeom>
           <a:solidFill>
             <a:srgbClr val="0B100E"/>
@@ -4045,39 +4190,75 @@
             <a:solidFill>
               <a:srgbClr val="24322B"/>
             </a:solidFill>
-            <a:prstDash val="dash"/>
+            <a:prstDash val="solid"/>
           </a:ln>
         </p:spPr>
       </p:sp>
       <p:sp>
         <p:nvSpPr>
-          <p:cNvPr id="14" name="Text 12"/>
-          <p:cNvSpPr txBox="1"/>
-          <p:nvPr/>
-        </p:nvSpPr>
-        <p:spPr>
-          <a:xfrm>
-            <a:off x="8330184" y="3456432"/>
-            <a:ext cx="2880360" cy="548640"/>
-          </a:xfrm>
-          <a:prstGeom prst="rect">
-            <a:avLst/>
-          </a:prstGeom>
-          <a:noFill/>
-          <a:ln/>
-        </p:spPr>
-        <p:txBody>
-          <a:bodyPr wrap="square" lIns="0" tIns="0" rIns="0" bIns="0" rtlCol="0" anchor="ctr"/>
-          <a:lstStyle/>
-          <a:p>
-            <a:pPr indent="0" marL="0">
-              <a:lnSpc>
-                <a:spcPts val="1900"/>
-              </a:lnSpc>
-              <a:buNone/>
-            </a:pPr>
-            <a:r>
-              <a:rPr lang="en-US" sz="1500" b="1" dirty="0">
+          <p:cNvPr id="30" name="Text 28"/>
+          <p:cNvSpPr txBox="1"/>
+          <p:nvPr/>
+        </p:nvSpPr>
+        <p:spPr>
+          <a:xfrm>
+            <a:off x="6492240" y="5303520"/>
+            <a:ext cx="292608" cy="237744"/>
+          </a:xfrm>
+          <a:prstGeom prst="rect">
+            <a:avLst/>
+          </a:prstGeom>
+          <a:noFill/>
+          <a:ln/>
+        </p:spPr>
+        <p:txBody>
+          <a:bodyPr wrap="square" lIns="0" tIns="0" rIns="0" bIns="0" rtlCol="0" anchor="ctr"/>
+          <a:lstStyle/>
+          <a:p>
+            <a:pPr algn="ctr" indent="0" marL="0">
+              <a:buNone/>
+            </a:pPr>
+            <a:r>
+              <a:rPr lang="en-US" sz="1000" dirty="0">
+                <a:solidFill>
+                  <a:srgbClr val="3FBF5A"/>
+                </a:solidFill>
+                <a:latin typeface="Courier New" pitchFamily="34" charset="0"/>
+                <a:ea typeface="Courier New" pitchFamily="34" charset="-122"/>
+                <a:cs typeface="Courier New" pitchFamily="34" charset="-120"/>
+              </a:rPr>
+              <a:t>3</a:t>
+            </a:r>
+            <a:endParaRPr lang="en-US" sz="1000" dirty="0"/>
+          </a:p>
+        </p:txBody>
+      </p:sp>
+      <p:sp>
+        <p:nvSpPr>
+          <p:cNvPr id="31" name="Text 29"/>
+          <p:cNvSpPr txBox="1"/>
+          <p:nvPr/>
+        </p:nvSpPr>
+        <p:spPr>
+          <a:xfrm>
+            <a:off x="6949440" y="5257800"/>
+            <a:ext cx="4572000" cy="274320"/>
+          </a:xfrm>
+          <a:prstGeom prst="rect">
+            <a:avLst/>
+          </a:prstGeom>
+          <a:noFill/>
+          <a:ln/>
+        </p:spPr>
+        <p:txBody>
+          <a:bodyPr wrap="square" lIns="0" tIns="0" rIns="0" bIns="0" rtlCol="0" anchor="ctr"/>
+          <a:lstStyle/>
+          <a:p>
+            <a:pPr indent="0" marL="0">
+              <a:buNone/>
+            </a:pPr>
+            <a:r>
+              <a:rPr lang="en-US" sz="1400" b="1" dirty="0">
                 <a:solidFill>
                   <a:srgbClr val="EDF3EF"/>
                 </a:solidFill>
@@ -4085,38 +4266,41 @@
                 <a:ea typeface="Arial" pitchFamily="34" charset="-122"/>
                 <a:cs typeface="Arial" pitchFamily="34" charset="-120"/>
               </a:rPr>
-              <a:t>Alertas por dia que se aguenta</a:t>
-            </a:r>
-            <a:endParaRPr lang="en-US" sz="1500" dirty="0"/>
-          </a:p>
-        </p:txBody>
-      </p:sp>
-      <p:sp>
-        <p:nvSpPr>
-          <p:cNvPr id="15" name="Text 13"/>
-          <p:cNvSpPr txBox="1"/>
-          <p:nvPr/>
-        </p:nvSpPr>
-        <p:spPr>
-          <a:xfrm>
-            <a:off x="8330184" y="4069080"/>
-            <a:ext cx="2880360" cy="320040"/>
-          </a:xfrm>
-          <a:prstGeom prst="rect">
-            <a:avLst/>
-          </a:prstGeom>
-          <a:noFill/>
-          <a:ln/>
-        </p:spPr>
-        <p:txBody>
-          <a:bodyPr wrap="square" lIns="0" tIns="0" rIns="0" bIns="0" rtlCol="0" anchor="ctr"/>
-          <a:lstStyle/>
-          <a:p>
-            <a:pPr indent="0" marL="0">
-              <a:buNone/>
-            </a:pPr>
-            <a:r>
-              <a:rPr lang="en-US" sz="1200" dirty="0">
+              <a:t>Vender para a rede</a:t>
+            </a:r>
+            <a:endParaRPr lang="en-US" sz="1400" dirty="0"/>
+          </a:p>
+        </p:txBody>
+      </p:sp>
+      <p:sp>
+        <p:nvSpPr>
+          <p:cNvPr id="32" name="Text 30"/>
+          <p:cNvSpPr txBox="1"/>
+          <p:nvPr/>
+        </p:nvSpPr>
+        <p:spPr>
+          <a:xfrm>
+            <a:off x="6949440" y="5532120"/>
+            <a:ext cx="4572000" cy="502920"/>
+          </a:xfrm>
+          <a:prstGeom prst="rect">
+            <a:avLst/>
+          </a:prstGeom>
+          <a:noFill/>
+          <a:ln/>
+        </p:spPr>
+        <p:txBody>
+          <a:bodyPr wrap="square" lIns="0" tIns="0" rIns="0" bIns="0" rtlCol="0" anchor="ctr"/>
+          <a:lstStyle/>
+          <a:p>
+            <a:pPr indent="0" marL="0">
+              <a:lnSpc>
+                <a:spcPts val="1400"/>
+              </a:lnSpc>
+              <a:buNone/>
+            </a:pPr>
+            <a:r>
+              <a:rPr lang="en-US" sz="1150" dirty="0">
                 <a:solidFill>
                   <a:srgbClr val="9DB0A6"/>
                 </a:solidFill>
@@ -4124,22 +4308,22 @@
                 <a:ea typeface="Calibri" pitchFamily="34" charset="-122"/>
                 <a:cs typeface="Calibri" pitchFamily="34" charset="-120"/>
               </a:rPr>
-              <a:t>e quantos foram engano</a:t>
-            </a:r>
-            <a:endParaRPr lang="en-US" sz="1200" dirty="0"/>
-          </a:p>
-        </p:txBody>
-      </p:sp>
-      <p:sp>
-        <p:nvSpPr>
-          <p:cNvPr id="16" name="Text 14"/>
-          <p:cNvSpPr txBox="1"/>
-          <p:nvPr/>
-        </p:nvSpPr>
-        <p:spPr>
-          <a:xfrm>
-            <a:off x="8330184" y="4526280"/>
-            <a:ext cx="2880360" cy="411480"/>
+              <a:t>Grupo educacional tem dezenas de unidades e um decisor só. É para ele que custo marginal quase zero é irresistível.</a:t>
+            </a:r>
+            <a:endParaRPr lang="en-US" sz="1150" dirty="0"/>
+          </a:p>
+        </p:txBody>
+      </p:sp>
+      <p:sp>
+        <p:nvSpPr>
+          <p:cNvPr id="33" name="Text 31"/>
+          <p:cNvSpPr txBox="1"/>
+          <p:nvPr/>
+        </p:nvSpPr>
+        <p:spPr>
+          <a:xfrm>
+            <a:off x="6492240" y="5687568"/>
+            <a:ext cx="5029200" cy="365760"/>
           </a:xfrm>
           <a:prstGeom prst="rect">
             <a:avLst/>
@@ -4153,20 +4337,20 @@
           <a:p>
             <a:pPr indent="0" marL="0">
               <a:lnSpc>
-                <a:spcPts val="1200"/>
+                <a:spcPts val="1300"/>
               </a:lnSpc>
               <a:buNone/>
             </a:pPr>
             <a:r>
               <a:rPr lang="en-US" sz="900" dirty="0">
                 <a:solidFill>
-                  <a:srgbClr val="E4572E"/>
+                  <a:srgbClr val="6A7D74"/>
                 </a:solidFill>
                 <a:latin typeface="Courier New" pitchFamily="34" charset="0"/>
                 <a:ea typeface="Courier New" pitchFamily="34" charset="-122"/>
                 <a:cs typeface="Courier New" pitchFamily="34" charset="-120"/>
               </a:rPr>
-              <a:t>fonte: o piloto, e só ele</a:t>
+              <a:t>Modelo: assinatura por escola, não por câmera. Expandir deixa de ser uma nova decisão de compra.</a:t>
             </a:r>
             <a:endParaRPr lang="en-US" sz="900" dirty="0"/>
           </a:p>
@@ -4174,46 +4358,7 @@
       </p:sp>
       <p:sp>
         <p:nvSpPr>
-          <p:cNvPr id="17" name="Text 15"/>
-          <p:cNvSpPr txBox="1"/>
-          <p:nvPr/>
-        </p:nvSpPr>
-        <p:spPr>
-          <a:xfrm>
-            <a:off x="685800" y="5577840"/>
-            <a:ext cx="10515600" cy="411480"/>
-          </a:xfrm>
-          <a:prstGeom prst="rect">
-            <a:avLst/>
-          </a:prstGeom>
-          <a:noFill/>
-          <a:ln/>
-        </p:spPr>
-        <p:txBody>
-          <a:bodyPr wrap="square" lIns="0" tIns="0" rIns="0" bIns="0" rtlCol="0" anchor="ctr"/>
-          <a:lstStyle/>
-          <a:p>
-            <a:pPr indent="0" marL="0">
-              <a:buNone/>
-            </a:pPr>
-            <a:r>
-              <a:rPr lang="en-US" sz="1400" i="1" dirty="0">
-                <a:solidFill>
-                  <a:srgbClr val="9DB0A6"/>
-                </a:solidFill>
-                <a:latin typeface="Calibri" pitchFamily="34" charset="0"/>
-                <a:ea typeface="Calibri" pitchFamily="34" charset="-122"/>
-                <a:cs typeface="Calibri" pitchFamily="34" charset="-120"/>
-              </a:rPr>
-              <a:t>Uma banca pergunta a fonte. “Estimativa nossa” derruba o slide, e com ele o resto da apresentação.</a:t>
-            </a:r>
-            <a:endParaRPr lang="en-US" sz="1400" dirty="0"/>
-          </a:p>
-        </p:txBody>
-      </p:sp>
-      <p:sp>
-        <p:nvSpPr>
-          <p:cNvPr id="18" name="Text 16"/>
+          <p:cNvPr id="35" name="Text 32"/>
           <p:cNvSpPr txBox="1"/>
           <p:nvPr/>
         </p:nvSpPr>
@@ -4252,7 +4397,7 @@
       </p:sp>
       <p:sp>
         <p:nvSpPr>
-          <p:cNvPr id="19" name="Text 17"/>
+          <p:cNvPr id="36" name="Text 33"/>
           <p:cNvSpPr txBox="1"/>
           <p:nvPr/>
         </p:nvSpPr>
@@ -4300,6 +4445,748 @@
 <file path=ppt/slides/slide12.xml><?xml version="1.0" encoding="utf-8"?>
 <p:sld xmlns:a="http://schemas.openxmlformats.org/drawingml/2006/main" xmlns:r="http://schemas.openxmlformats.org/officeDocument/2006/relationships" xmlns:p="http://schemas.openxmlformats.org/presentationml/2006/main">
   <p:cSld name="Slide 12">
+    <p:bg>
+      <p:bgPr>
+        <a:solidFill>
+          <a:srgbClr val="0B100E"/>
+        </a:solidFill>
+      </p:bgPr>
+    </p:bg>
+    <p:spTree>
+      <p:nvGrpSpPr>
+        <p:cNvPr id="1" name=""/>
+        <p:cNvGrpSpPr/>
+        <p:nvPr/>
+      </p:nvGrpSpPr>
+      <p:grpSpPr>
+        <a:xfrm>
+          <a:off x="0" y="0"/>
+          <a:ext cx="0" cy="0"/>
+          <a:chOff x="0" y="0"/>
+          <a:chExt cx="0" cy="0"/>
+        </a:xfrm>
+      </p:grpSpPr>
+      <p:sp>
+        <p:nvSpPr>
+          <p:cNvPr id="2" name="Text 0"/>
+          <p:cNvSpPr txBox="1"/>
+          <p:nvPr/>
+        </p:nvSpPr>
+        <p:spPr>
+          <a:xfrm>
+            <a:off x="685800" y="384048"/>
+            <a:ext cx="10820095" cy="274320"/>
+          </a:xfrm>
+          <a:prstGeom prst="rect">
+            <a:avLst/>
+          </a:prstGeom>
+          <a:noFill/>
+          <a:ln/>
+        </p:spPr>
+        <p:txBody>
+          <a:bodyPr wrap="square" lIns="0" tIns="0" rIns="0" bIns="0" rtlCol="0" anchor="ctr"/>
+          <a:lstStyle/>
+          <a:p>
+            <a:pPr indent="0" marL="0">
+              <a:buNone/>
+            </a:pPr>
+            <a:r>
+              <a:rPr lang="en-US" sz="1100" spc="200" kern="0" dirty="0">
+                <a:solidFill>
+                  <a:srgbClr val="E4572E"/>
+                </a:solidFill>
+                <a:latin typeface="Courier New" pitchFamily="34" charset="0"/>
+                <a:ea typeface="Courier New" pitchFamily="34" charset="-122"/>
+                <a:cs typeface="Courier New" pitchFamily="34" charset="-120"/>
+              </a:rPr>
+              <a:t>HONESTIDADE INTELECTUAL</a:t>
+            </a:r>
+            <a:endParaRPr lang="en-US" sz="1100" dirty="0"/>
+          </a:p>
+        </p:txBody>
+      </p:sp>
+      <p:sp>
+        <p:nvSpPr>
+          <p:cNvPr id="3" name="Text 1"/>
+          <p:cNvSpPr txBox="1"/>
+          <p:nvPr/>
+        </p:nvSpPr>
+        <p:spPr>
+          <a:xfrm>
+            <a:off x="685800" y="749808"/>
+            <a:ext cx="10820095" cy="1417320"/>
+          </a:xfrm>
+          <a:prstGeom prst="rect">
+            <a:avLst/>
+          </a:prstGeom>
+          <a:noFill/>
+          <a:ln/>
+        </p:spPr>
+        <p:txBody>
+          <a:bodyPr wrap="square" lIns="0" tIns="0" rIns="0" bIns="0" rtlCol="0" anchor="ctr"/>
+          <a:lstStyle/>
+          <a:p>
+            <a:pPr indent="0" marL="0">
+              <a:lnSpc>
+                <a:spcPts val="3800"/>
+              </a:lnSpc>
+              <a:buNone/>
+            </a:pPr>
+            <a:r>
+              <a:rPr lang="en-US" sz="3600" b="1" dirty="0">
+                <a:solidFill>
+                  <a:srgbClr val="EDF3EF"/>
+                </a:solidFill>
+                <a:latin typeface="Arial" pitchFamily="34" charset="0"/>
+                <a:ea typeface="Arial" pitchFamily="34" charset="-122"/>
+                <a:cs typeface="Arial" pitchFamily="34" charset="-120"/>
+              </a:rPr>
+              <a:t>O que ainda não medimos,</a:t>
+            </a:r>
+            <a:endParaRPr lang="en-US" sz="3600" dirty="0"/>
+          </a:p>
+          <a:p>
+            <a:pPr indent="0" marL="0">
+              <a:lnSpc>
+                <a:spcPts val="3800"/>
+              </a:lnSpc>
+              <a:buNone/>
+            </a:pPr>
+            <a:r>
+              <a:rPr lang="en-US" sz="3600" b="1" dirty="0">
+                <a:solidFill>
+                  <a:srgbClr val="EDF3EF"/>
+                </a:solidFill>
+                <a:latin typeface="Arial" pitchFamily="34" charset="0"/>
+                <a:ea typeface="Arial" pitchFamily="34" charset="-122"/>
+                <a:cs typeface="Arial" pitchFamily="34" charset="-120"/>
+              </a:rPr>
+              <a:t>e não vamos inventar.</a:t>
+            </a:r>
+            <a:endParaRPr lang="en-US" sz="3600" dirty="0"/>
+          </a:p>
+        </p:txBody>
+      </p:sp>
+      <p:sp>
+        <p:nvSpPr>
+          <p:cNvPr id="4" name="Text 2"/>
+          <p:cNvSpPr txBox="1"/>
+          <p:nvPr/>
+        </p:nvSpPr>
+        <p:spPr>
+          <a:xfrm>
+            <a:off x="685800" y="2560320"/>
+            <a:ext cx="10515600" cy="731520"/>
+          </a:xfrm>
+          <a:prstGeom prst="rect">
+            <a:avLst/>
+          </a:prstGeom>
+          <a:noFill/>
+          <a:ln/>
+        </p:spPr>
+        <p:txBody>
+          <a:bodyPr wrap="square" lIns="0" tIns="0" rIns="0" bIns="0" rtlCol="0" anchor="ctr"/>
+          <a:lstStyle/>
+          <a:p>
+            <a:pPr indent="0" marL="0">
+              <a:lnSpc>
+                <a:spcPts val="2200"/>
+              </a:lnSpc>
+              <a:buNone/>
+            </a:pPr>
+            <a:r>
+              <a:rPr lang="en-US" sz="1500" dirty="0">
+                <a:solidFill>
+                  <a:srgbClr val="9DB0A6"/>
+                </a:solidFill>
+                <a:latin typeface="Calibri" pitchFamily="34" charset="0"/>
+                <a:ea typeface="Calibri" pitchFamily="34" charset="-122"/>
+                <a:cs typeface="Calibri" pitchFamily="34" charset="-120"/>
+              </a:rPr>
+              <a:t>Três números que decidem se isto é negócio, e que nenhuma planilha nossa pode responder.</a:t>
+            </a:r>
+            <a:endParaRPr lang="en-US" sz="1500" dirty="0"/>
+          </a:p>
+        </p:txBody>
+      </p:sp>
+      <p:sp>
+        <p:nvSpPr>
+          <p:cNvPr id="5" name="Shape 3"/>
+          <p:cNvSpPr/>
+          <p:nvPr/>
+        </p:nvSpPr>
+        <p:spPr>
+          <a:xfrm>
+            <a:off x="685800" y="3200400"/>
+            <a:ext cx="3410712" cy="1920240"/>
+          </a:xfrm>
+          <a:prstGeom prst="roundRect">
+            <a:avLst>
+              <a:gd name="adj" fmla="val 4762"/>
+            </a:avLst>
+          </a:prstGeom>
+          <a:solidFill>
+            <a:srgbClr val="0B100E"/>
+          </a:solidFill>
+          <a:ln w="12700">
+            <a:solidFill>
+              <a:srgbClr val="24322B"/>
+            </a:solidFill>
+            <a:prstDash val="dash"/>
+          </a:ln>
+        </p:spPr>
+      </p:sp>
+      <p:sp>
+        <p:nvSpPr>
+          <p:cNvPr id="6" name="Text 4"/>
+          <p:cNvSpPr txBox="1"/>
+          <p:nvPr/>
+        </p:nvSpPr>
+        <p:spPr>
+          <a:xfrm>
+            <a:off x="960120" y="3456432"/>
+            <a:ext cx="2880360" cy="548640"/>
+          </a:xfrm>
+          <a:prstGeom prst="rect">
+            <a:avLst/>
+          </a:prstGeom>
+          <a:noFill/>
+          <a:ln/>
+        </p:spPr>
+        <p:txBody>
+          <a:bodyPr wrap="square" lIns="0" tIns="0" rIns="0" bIns="0" rtlCol="0" anchor="ctr"/>
+          <a:lstStyle/>
+          <a:p>
+            <a:pPr indent="0" marL="0">
+              <a:lnSpc>
+                <a:spcPts val="1900"/>
+              </a:lnSpc>
+              <a:buNone/>
+            </a:pPr>
+            <a:r>
+              <a:rPr lang="en-US" sz="1500" b="1" dirty="0">
+                <a:solidFill>
+                  <a:srgbClr val="EDF3EF"/>
+                </a:solidFill>
+                <a:latin typeface="Arial" pitchFamily="34" charset="0"/>
+                <a:ea typeface="Arial" pitchFamily="34" charset="-122"/>
+                <a:cs typeface="Arial" pitchFamily="34" charset="-120"/>
+              </a:rPr>
+              <a:t>Quanto uma escola paga hoje</a:t>
+            </a:r>
+            <a:endParaRPr lang="en-US" sz="1500" dirty="0"/>
+          </a:p>
+        </p:txBody>
+      </p:sp>
+      <p:sp>
+        <p:nvSpPr>
+          <p:cNvPr id="7" name="Text 5"/>
+          <p:cNvSpPr txBox="1"/>
+          <p:nvPr/>
+        </p:nvSpPr>
+        <p:spPr>
+          <a:xfrm>
+            <a:off x="960120" y="4069080"/>
+            <a:ext cx="2880360" cy="320040"/>
+          </a:xfrm>
+          <a:prstGeom prst="rect">
+            <a:avLst/>
+          </a:prstGeom>
+          <a:noFill/>
+          <a:ln/>
+        </p:spPr>
+        <p:txBody>
+          <a:bodyPr wrap="square" lIns="0" tIns="0" rIns="0" bIns="0" rtlCol="0" anchor="ctr"/>
+          <a:lstStyle/>
+          <a:p>
+            <a:pPr indent="0" marL="0">
+              <a:buNone/>
+            </a:pPr>
+            <a:r>
+              <a:rPr lang="en-US" sz="1200" dirty="0">
+                <a:solidFill>
+                  <a:srgbClr val="9DB0A6"/>
+                </a:solidFill>
+                <a:latin typeface="Calibri" pitchFamily="34" charset="0"/>
+                <a:ea typeface="Calibri" pitchFamily="34" charset="-122"/>
+                <a:cs typeface="Calibri" pitchFamily="34" charset="-120"/>
+              </a:rPr>
+              <a:t>por monitoramento eletrônico</a:t>
+            </a:r>
+            <a:endParaRPr lang="en-US" sz="1200" dirty="0"/>
+          </a:p>
+        </p:txBody>
+      </p:sp>
+      <p:sp>
+        <p:nvSpPr>
+          <p:cNvPr id="8" name="Text 6"/>
+          <p:cNvSpPr txBox="1"/>
+          <p:nvPr/>
+        </p:nvSpPr>
+        <p:spPr>
+          <a:xfrm>
+            <a:off x="960120" y="4526280"/>
+            <a:ext cx="2880360" cy="411480"/>
+          </a:xfrm>
+          <a:prstGeom prst="rect">
+            <a:avLst/>
+          </a:prstGeom>
+          <a:noFill/>
+          <a:ln/>
+        </p:spPr>
+        <p:txBody>
+          <a:bodyPr wrap="square" lIns="0" tIns="0" rIns="0" bIns="0" rtlCol="0" anchor="ctr"/>
+          <a:lstStyle/>
+          <a:p>
+            <a:pPr indent="0" marL="0">
+              <a:lnSpc>
+                <a:spcPts val="1200"/>
+              </a:lnSpc>
+              <a:buNone/>
+            </a:pPr>
+            <a:r>
+              <a:rPr lang="en-US" sz="900" dirty="0">
+                <a:solidFill>
+                  <a:srgbClr val="E4572E"/>
+                </a:solidFill>
+                <a:latin typeface="Courier New" pitchFamily="34" charset="0"/>
+                <a:ea typeface="Courier New" pitchFamily="34" charset="-122"/>
+                <a:cs typeface="Courier New" pitchFamily="34" charset="-120"/>
+              </a:rPr>
+              <a:t>fonte: ligar para três escolas</a:t>
+            </a:r>
+            <a:endParaRPr lang="en-US" sz="900" dirty="0"/>
+          </a:p>
+        </p:txBody>
+      </p:sp>
+      <p:sp>
+        <p:nvSpPr>
+          <p:cNvPr id="9" name="Shape 7"/>
+          <p:cNvSpPr/>
+          <p:nvPr/>
+        </p:nvSpPr>
+        <p:spPr>
+          <a:xfrm>
+            <a:off x="4370832" y="3200400"/>
+            <a:ext cx="3410712" cy="1920240"/>
+          </a:xfrm>
+          <a:prstGeom prst="roundRect">
+            <a:avLst>
+              <a:gd name="adj" fmla="val 4762"/>
+            </a:avLst>
+          </a:prstGeom>
+          <a:solidFill>
+            <a:srgbClr val="0B100E"/>
+          </a:solidFill>
+          <a:ln w="12700">
+            <a:solidFill>
+              <a:srgbClr val="24322B"/>
+            </a:solidFill>
+            <a:prstDash val="dash"/>
+          </a:ln>
+        </p:spPr>
+      </p:sp>
+      <p:sp>
+        <p:nvSpPr>
+          <p:cNvPr id="10" name="Text 8"/>
+          <p:cNvSpPr txBox="1"/>
+          <p:nvPr/>
+        </p:nvSpPr>
+        <p:spPr>
+          <a:xfrm>
+            <a:off x="4645152" y="3456432"/>
+            <a:ext cx="2880360" cy="548640"/>
+          </a:xfrm>
+          <a:prstGeom prst="rect">
+            <a:avLst/>
+          </a:prstGeom>
+          <a:noFill/>
+          <a:ln/>
+        </p:spPr>
+        <p:txBody>
+          <a:bodyPr wrap="square" lIns="0" tIns="0" rIns="0" bIns="0" rtlCol="0" anchor="ctr"/>
+          <a:lstStyle/>
+          <a:p>
+            <a:pPr indent="0" marL="0">
+              <a:lnSpc>
+                <a:spcPts val="1900"/>
+              </a:lnSpc>
+              <a:buNone/>
+            </a:pPr>
+            <a:r>
+              <a:rPr lang="en-US" sz="1500" b="1" dirty="0">
+                <a:solidFill>
+                  <a:srgbClr val="EDF3EF"/>
+                </a:solidFill>
+                <a:latin typeface="Arial" pitchFamily="34" charset="0"/>
+                <a:ea typeface="Arial" pitchFamily="34" charset="-122"/>
+                <a:cs typeface="Arial" pitchFamily="34" charset="-120"/>
+              </a:rPr>
+              <a:t>Quantas escolas no recorte</a:t>
+            </a:r>
+            <a:endParaRPr lang="en-US" sz="1500" dirty="0"/>
+          </a:p>
+        </p:txBody>
+      </p:sp>
+      <p:sp>
+        <p:nvSpPr>
+          <p:cNvPr id="11" name="Text 9"/>
+          <p:cNvSpPr txBox="1"/>
+          <p:nvPr/>
+        </p:nvSpPr>
+        <p:spPr>
+          <a:xfrm>
+            <a:off x="4645152" y="4069080"/>
+            <a:ext cx="2880360" cy="320040"/>
+          </a:xfrm>
+          <a:prstGeom prst="rect">
+            <a:avLst/>
+          </a:prstGeom>
+          <a:noFill/>
+          <a:ln/>
+        </p:spPr>
+        <p:txBody>
+          <a:bodyPr wrap="square" lIns="0" tIns="0" rIns="0" bIns="0" rtlCol="0" anchor="ctr"/>
+          <a:lstStyle/>
+          <a:p>
+            <a:pPr indent="0" marL="0">
+              <a:buNone/>
+            </a:pPr>
+            <a:r>
+              <a:rPr lang="en-US" sz="1200" dirty="0">
+                <a:solidFill>
+                  <a:srgbClr val="9DB0A6"/>
+                </a:solidFill>
+                <a:latin typeface="Calibri" pitchFamily="34" charset="0"/>
+                <a:ea typeface="Calibri" pitchFamily="34" charset="-122"/>
+                <a:cs typeface="Calibri" pitchFamily="34" charset="-120"/>
+              </a:rPr>
+              <a:t>rede, município ou grupo</a:t>
+            </a:r>
+            <a:endParaRPr lang="en-US" sz="1200" dirty="0"/>
+          </a:p>
+        </p:txBody>
+      </p:sp>
+      <p:sp>
+        <p:nvSpPr>
+          <p:cNvPr id="12" name="Text 10"/>
+          <p:cNvSpPr txBox="1"/>
+          <p:nvPr/>
+        </p:nvSpPr>
+        <p:spPr>
+          <a:xfrm>
+            <a:off x="4645152" y="4526280"/>
+            <a:ext cx="2880360" cy="411480"/>
+          </a:xfrm>
+          <a:prstGeom prst="rect">
+            <a:avLst/>
+          </a:prstGeom>
+          <a:noFill/>
+          <a:ln/>
+        </p:spPr>
+        <p:txBody>
+          <a:bodyPr wrap="square" lIns="0" tIns="0" rIns="0" bIns="0" rtlCol="0" anchor="ctr"/>
+          <a:lstStyle/>
+          <a:p>
+            <a:pPr indent="0" marL="0">
+              <a:lnSpc>
+                <a:spcPts val="1200"/>
+              </a:lnSpc>
+              <a:buNone/>
+            </a:pPr>
+            <a:r>
+              <a:rPr lang="en-US" sz="900" dirty="0">
+                <a:solidFill>
+                  <a:srgbClr val="E4572E"/>
+                </a:solidFill>
+                <a:latin typeface="Courier New" pitchFamily="34" charset="0"/>
+                <a:ea typeface="Courier New" pitchFamily="34" charset="-122"/>
+                <a:cs typeface="Courier New" pitchFamily="34" charset="-120"/>
+              </a:rPr>
+              <a:t>fonte: Censo Escolar, INEP</a:t>
+            </a:r>
+            <a:endParaRPr lang="en-US" sz="900" dirty="0"/>
+          </a:p>
+        </p:txBody>
+      </p:sp>
+      <p:sp>
+        <p:nvSpPr>
+          <p:cNvPr id="13" name="Shape 11"/>
+          <p:cNvSpPr/>
+          <p:nvPr/>
+        </p:nvSpPr>
+        <p:spPr>
+          <a:xfrm>
+            <a:off x="8055864" y="3200400"/>
+            <a:ext cx="3410712" cy="1920240"/>
+          </a:xfrm>
+          <a:prstGeom prst="roundRect">
+            <a:avLst>
+              <a:gd name="adj" fmla="val 4762"/>
+            </a:avLst>
+          </a:prstGeom>
+          <a:solidFill>
+            <a:srgbClr val="0B100E"/>
+          </a:solidFill>
+          <a:ln w="12700">
+            <a:solidFill>
+              <a:srgbClr val="24322B"/>
+            </a:solidFill>
+            <a:prstDash val="dash"/>
+          </a:ln>
+        </p:spPr>
+      </p:sp>
+      <p:sp>
+        <p:nvSpPr>
+          <p:cNvPr id="14" name="Text 12"/>
+          <p:cNvSpPr txBox="1"/>
+          <p:nvPr/>
+        </p:nvSpPr>
+        <p:spPr>
+          <a:xfrm>
+            <a:off x="8330184" y="3456432"/>
+            <a:ext cx="2880360" cy="548640"/>
+          </a:xfrm>
+          <a:prstGeom prst="rect">
+            <a:avLst/>
+          </a:prstGeom>
+          <a:noFill/>
+          <a:ln/>
+        </p:spPr>
+        <p:txBody>
+          <a:bodyPr wrap="square" lIns="0" tIns="0" rIns="0" bIns="0" rtlCol="0" anchor="ctr"/>
+          <a:lstStyle/>
+          <a:p>
+            <a:pPr indent="0" marL="0">
+              <a:lnSpc>
+                <a:spcPts val="1900"/>
+              </a:lnSpc>
+              <a:buNone/>
+            </a:pPr>
+            <a:r>
+              <a:rPr lang="en-US" sz="1500" b="1" dirty="0">
+                <a:solidFill>
+                  <a:srgbClr val="EDF3EF"/>
+                </a:solidFill>
+                <a:latin typeface="Arial" pitchFamily="34" charset="0"/>
+                <a:ea typeface="Arial" pitchFamily="34" charset="-122"/>
+                <a:cs typeface="Arial" pitchFamily="34" charset="-120"/>
+              </a:rPr>
+              <a:t>Alertas por dia que se aguenta</a:t>
+            </a:r>
+            <a:endParaRPr lang="en-US" sz="1500" dirty="0"/>
+          </a:p>
+        </p:txBody>
+      </p:sp>
+      <p:sp>
+        <p:nvSpPr>
+          <p:cNvPr id="15" name="Text 13"/>
+          <p:cNvSpPr txBox="1"/>
+          <p:nvPr/>
+        </p:nvSpPr>
+        <p:spPr>
+          <a:xfrm>
+            <a:off x="8330184" y="4069080"/>
+            <a:ext cx="2880360" cy="320040"/>
+          </a:xfrm>
+          <a:prstGeom prst="rect">
+            <a:avLst/>
+          </a:prstGeom>
+          <a:noFill/>
+          <a:ln/>
+        </p:spPr>
+        <p:txBody>
+          <a:bodyPr wrap="square" lIns="0" tIns="0" rIns="0" bIns="0" rtlCol="0" anchor="ctr"/>
+          <a:lstStyle/>
+          <a:p>
+            <a:pPr indent="0" marL="0">
+              <a:buNone/>
+            </a:pPr>
+            <a:r>
+              <a:rPr lang="en-US" sz="1200" dirty="0">
+                <a:solidFill>
+                  <a:srgbClr val="9DB0A6"/>
+                </a:solidFill>
+                <a:latin typeface="Calibri" pitchFamily="34" charset="0"/>
+                <a:ea typeface="Calibri" pitchFamily="34" charset="-122"/>
+                <a:cs typeface="Calibri" pitchFamily="34" charset="-120"/>
+              </a:rPr>
+              <a:t>e quantos foram engano</a:t>
+            </a:r>
+            <a:endParaRPr lang="en-US" sz="1200" dirty="0"/>
+          </a:p>
+        </p:txBody>
+      </p:sp>
+      <p:sp>
+        <p:nvSpPr>
+          <p:cNvPr id="16" name="Text 14"/>
+          <p:cNvSpPr txBox="1"/>
+          <p:nvPr/>
+        </p:nvSpPr>
+        <p:spPr>
+          <a:xfrm>
+            <a:off x="8330184" y="4526280"/>
+            <a:ext cx="2880360" cy="411480"/>
+          </a:xfrm>
+          <a:prstGeom prst="rect">
+            <a:avLst/>
+          </a:prstGeom>
+          <a:noFill/>
+          <a:ln/>
+        </p:spPr>
+        <p:txBody>
+          <a:bodyPr wrap="square" lIns="0" tIns="0" rIns="0" bIns="0" rtlCol="0" anchor="ctr"/>
+          <a:lstStyle/>
+          <a:p>
+            <a:pPr indent="0" marL="0">
+              <a:lnSpc>
+                <a:spcPts val="1200"/>
+              </a:lnSpc>
+              <a:buNone/>
+            </a:pPr>
+            <a:r>
+              <a:rPr lang="en-US" sz="900" dirty="0">
+                <a:solidFill>
+                  <a:srgbClr val="E4572E"/>
+                </a:solidFill>
+                <a:latin typeface="Courier New" pitchFamily="34" charset="0"/>
+                <a:ea typeface="Courier New" pitchFamily="34" charset="-122"/>
+                <a:cs typeface="Courier New" pitchFamily="34" charset="-120"/>
+              </a:rPr>
+              <a:t>fonte: o piloto, e só ele</a:t>
+            </a:r>
+            <a:endParaRPr lang="en-US" sz="900" dirty="0"/>
+          </a:p>
+        </p:txBody>
+      </p:sp>
+      <p:sp>
+        <p:nvSpPr>
+          <p:cNvPr id="17" name="Text 15"/>
+          <p:cNvSpPr txBox="1"/>
+          <p:nvPr/>
+        </p:nvSpPr>
+        <p:spPr>
+          <a:xfrm>
+            <a:off x="685800" y="5577840"/>
+            <a:ext cx="10515600" cy="411480"/>
+          </a:xfrm>
+          <a:prstGeom prst="rect">
+            <a:avLst/>
+          </a:prstGeom>
+          <a:noFill/>
+          <a:ln/>
+        </p:spPr>
+        <p:txBody>
+          <a:bodyPr wrap="square" lIns="0" tIns="0" rIns="0" bIns="0" rtlCol="0" anchor="ctr"/>
+          <a:lstStyle/>
+          <a:p>
+            <a:pPr indent="0" marL="0">
+              <a:buNone/>
+            </a:pPr>
+            <a:r>
+              <a:rPr lang="en-US" sz="1400" i="1" dirty="0">
+                <a:solidFill>
+                  <a:srgbClr val="9DB0A6"/>
+                </a:solidFill>
+                <a:latin typeface="Calibri" pitchFamily="34" charset="0"/>
+                <a:ea typeface="Calibri" pitchFamily="34" charset="-122"/>
+                <a:cs typeface="Calibri" pitchFamily="34" charset="-120"/>
+              </a:rPr>
+              <a:t>Uma banca pergunta a fonte. “Estimativa nossa” derruba o slide, e com ele o resto da apresentação.</a:t>
+            </a:r>
+            <a:endParaRPr lang="en-US" sz="1400" dirty="0"/>
+          </a:p>
+        </p:txBody>
+      </p:sp>
+      <p:sp>
+        <p:nvSpPr>
+          <p:cNvPr id="18" name="Text 16"/>
+          <p:cNvSpPr txBox="1"/>
+          <p:nvPr/>
+        </p:nvSpPr>
+        <p:spPr>
+          <a:xfrm>
+            <a:off x="685800" y="6291072"/>
+            <a:ext cx="5486400" cy="274320"/>
+          </a:xfrm>
+          <a:prstGeom prst="rect">
+            <a:avLst/>
+          </a:prstGeom>
+          <a:noFill/>
+          <a:ln/>
+        </p:spPr>
+        <p:txBody>
+          <a:bodyPr wrap="square" lIns="0" tIns="0" rIns="0" bIns="0" rtlCol="0" anchor="ctr"/>
+          <a:lstStyle/>
+          <a:p>
+            <a:pPr indent="0" marL="0">
+              <a:buNone/>
+            </a:pPr>
+            <a:r>
+              <a:rPr lang="en-US" sz="900" dirty="0">
+                <a:solidFill>
+                  <a:srgbClr val="6A7D74"/>
+                </a:solidFill>
+                <a:latin typeface="Courier New" pitchFamily="34" charset="0"/>
+                <a:ea typeface="Courier New" pitchFamily="34" charset="-122"/>
+                <a:cs typeface="Courier New" pitchFamily="34" charset="-120"/>
+              </a:rPr>
+              <a:t>Auditix AI  ·  SVATech  ·  grupo 11</a:t>
+            </a:r>
+            <a:endParaRPr lang="en-US" sz="900" dirty="0"/>
+          </a:p>
+        </p:txBody>
+      </p:sp>
+      <p:sp>
+        <p:nvSpPr>
+          <p:cNvPr id="19" name="Text 17"/>
+          <p:cNvSpPr txBox="1"/>
+          <p:nvPr/>
+        </p:nvSpPr>
+        <p:spPr>
+          <a:xfrm>
+            <a:off x="10591495" y="6291072"/>
+            <a:ext cx="914400" cy="274320"/>
+          </a:xfrm>
+          <a:prstGeom prst="rect">
+            <a:avLst/>
+          </a:prstGeom>
+          <a:noFill/>
+          <a:ln/>
+        </p:spPr>
+        <p:txBody>
+          <a:bodyPr wrap="square" lIns="0" tIns="0" rIns="0" bIns="0" rtlCol="0" anchor="ctr"/>
+          <a:lstStyle/>
+          <a:p>
+            <a:pPr algn="r" indent="0" marL="0">
+              <a:buNone/>
+            </a:pPr>
+            <a:r>
+              <a:rPr lang="en-US" sz="900" dirty="0">
+                <a:solidFill>
+                  <a:srgbClr val="6A7D74"/>
+                </a:solidFill>
+                <a:latin typeface="Courier New" pitchFamily="34" charset="0"/>
+                <a:ea typeface="Courier New" pitchFamily="34" charset="-122"/>
+                <a:cs typeface="Courier New" pitchFamily="34" charset="-120"/>
+              </a:rPr>
+              <a:t>12</a:t>
+            </a:r>
+            <a:endParaRPr lang="en-US" sz="900" dirty="0"/>
+          </a:p>
+        </p:txBody>
+      </p:sp>
+    </p:spTree>
+  </p:cSld>
+  <p:clrMapOvr>
+    <a:masterClrMapping/>
+  </p:clrMapOvr>
+</p:sld>
+</file>
+
+<file path=ppt/slides/slide13.xml><?xml version="1.0" encoding="utf-8"?>
+<p:sld xmlns:a="http://schemas.openxmlformats.org/drawingml/2006/main" xmlns:r="http://schemas.openxmlformats.org/officeDocument/2006/relationships" xmlns:p="http://schemas.openxmlformats.org/presentationml/2006/main">
+  <p:cSld name="Slide 13">
     <p:bg>
       <p:bgPr>
         <a:solidFill>

--- a/Auditix-slides.pptx
+++ b/Auditix-slides.pptx
@@ -18,9 +18,10 @@
     <p:sldId id="266" r:id="rId12"/>
     <p:sldId id="267" r:id="rId13"/>
     <p:sldId id="268" r:id="rId14"/>
+    <p:sldId id="269" r:id="rId15"/>
   </p:sldIdLst>
   <p:notesMasterIdLst>
-    <p:notesMasterId r:id="rId15"/>
+    <p:notesMasterId r:id="rId16"/>
   </p:notesMasterIdLst>
   <p:sldSz cx="12192000" cy="6858000"/>
   <p:notesSz cx="6858000" cy="12192000"/>
@@ -602,7 +603,7 @@
           <a:p>
             <a:r>
               <a:rPr lang="en-US" dirty="0"/>
-              <a:t>A primeira é a que fecha a venda. Segurança comove; risco jurídico faz a diretoria assinar.</a:t>
+              <a:t/>
             </a:r>
             <a:endParaRPr lang="en-US" dirty="0"/>
           </a:p>
@@ -690,7 +691,7 @@
           <a:p>
             <a:r>
               <a:rPr lang="en-US" dirty="0"/>
-              <a:t>Se perguntarem tamanho de mercado: dizer que o dado vem do Censo Escolar do INEP e que o preço praticado sai de conversa com escolas, e que nenhum dos dois foi estimado por nós.</a:t>
+              <a:t>A primeira é a que fecha a venda. Segurança comove; risco jurídico faz a diretoria assinar.</a:t>
             </a:r>
             <a:endParaRPr lang="en-US" dirty="0"/>
           </a:p>
@@ -778,7 +779,7 @@
           <a:p>
             <a:r>
               <a:rPr lang="en-US" dirty="0"/>
-              <a:t/>
+              <a:t>Se perguntarem tamanho de mercado: dizer que o dado vem do Censo Escolar do INEP e que o preço praticado sai de conversa com escolas, e que nenhum dos dois foi estimado por nós.</a:t>
             </a:r>
             <a:endParaRPr lang="en-US" dirty="0"/>
           </a:p>
@@ -908,6 +909,94 @@
 </p:notes>
 </file>
 
+<file path=ppt/notesSlides/notesSlide14.xml><?xml version="1.0" encoding="utf-8"?>
+<p:notes xmlns:a="http://schemas.openxmlformats.org/drawingml/2006/main" xmlns:r="http://schemas.openxmlformats.org/officeDocument/2006/relationships" xmlns:p="http://schemas.openxmlformats.org/presentationml/2006/main">
+  <p:cSld>
+    <p:spTree>
+      <p:nvGrpSpPr>
+        <p:cNvPr id="1" name=""/>
+        <p:cNvGrpSpPr/>
+        <p:nvPr/>
+      </p:nvGrpSpPr>
+      <p:grpSpPr>
+        <a:xfrm>
+          <a:off x="0" y="0"/>
+          <a:ext cx="0" cy="0"/>
+          <a:chOff x="0" y="0"/>
+          <a:chExt cx="0" cy="0"/>
+        </a:xfrm>
+      </p:grpSpPr>
+      <p:sp>
+        <p:nvSpPr>
+          <p:cNvPr id="2" name="Slide Image Placeholder 1"/>
+          <p:cNvSpPr>
+            <a:spLocks noGrp="1" noRot="1" noChangeAspect="1"/>
+          </p:cNvSpPr>
+          <p:nvPr>
+            <p:ph type="sldImg"/>
+          </p:nvPr>
+        </p:nvSpPr>
+        <p:spPr/>
+      </p:sp>
+      <p:sp>
+        <p:nvSpPr>
+          <p:cNvPr id="3" name="Notes Placeholder 2"/>
+          <p:cNvSpPr>
+            <a:spLocks noGrp="1"/>
+          </p:cNvSpPr>
+          <p:nvPr>
+            <p:ph type="body" idx="1"/>
+          </p:nvPr>
+        </p:nvSpPr>
+        <p:spPr/>
+        <p:txBody>
+          <a:bodyPr/>
+          <a:lstStyle/>
+          <a:p>
+            <a:r>
+              <a:rPr lang="en-US" dirty="0"/>
+              <a:t/>
+            </a:r>
+            <a:endParaRPr lang="en-US" dirty="0"/>
+          </a:p>
+        </p:txBody>
+      </p:sp>
+      <p:sp>
+        <p:nvSpPr>
+          <p:cNvPr id="4" name="Slide Number Placeholder 3"/>
+          <p:cNvSpPr>
+            <a:spLocks noGrp="1"/>
+          </p:cNvSpPr>
+          <p:nvPr>
+            <p:ph type="sldNum" sz="quarter" idx="10"/>
+          </p:nvPr>
+        </p:nvSpPr>
+        <p:spPr/>
+        <p:txBody>
+          <a:bodyPr/>
+          <a:lstStyle/>
+          <a:p>
+            <a:fld id="{F7021451-1387-4CA6-816F-3879F97B5CBC}" type="slidenum">
+              <a:rPr lang="en-US"/>
+              <a:t>14</a:t>
+            </a:fld>
+            <a:endParaRPr lang="en-US"/>
+          </a:p>
+        </p:txBody>
+      </p:sp>
+    </p:spTree>
+    <p:extLst>
+      <p:ext uri="{BB962C8B-B14F-4D97-AF65-F5344CB8AC3E}">
+        <p14:creationId xmlns:p14="http://schemas.microsoft.com/office/powerpoint/2010/main" val="1024086991"/>
+      </p:ext>
+    </p:extLst>
+  </p:cSld>
+  <p:clrMapOvr>
+    <a:masterClrMapping/>
+  </p:clrMapOvr>
+</p:notes>
+</file>
+
 <file path=ppt/notesSlides/notesSlide2.xml><?xml version="1.0" encoding="utf-8"?>
 <p:notes xmlns:a="http://schemas.openxmlformats.org/drawingml/2006/main" xmlns:r="http://schemas.openxmlformats.org/officeDocument/2006/relationships" xmlns:p="http://schemas.openxmlformats.org/presentationml/2006/main">
   <p:cSld>
@@ -1394,7 +1483,7 @@
           <a:p>
             <a:r>
               <a:rPr lang="en-US" dirty="0"/>
-              <a:t/>
+              <a:t>Esta é a resposta para "por que vocês não reconhecem os alunos?". A resposta não é "não deu tempo": a gente consegue e escolheu não fazer, e um mês atrás a ANPD deu razão a essa escolha. Não afirmar conformidade jurídica: dizer que é a nossa leitura da decisão.</a:t>
             </a:r>
             <a:endParaRPr lang="en-US" dirty="0"/>
           </a:p>
@@ -2424,7 +2513,7 @@
                 <a:ea typeface="Courier New" pitchFamily="34" charset="-122"/>
                 <a:cs typeface="Courier New" pitchFamily="34" charset="-120"/>
               </a:rPr>
-              <a:t>ONDE ESTÁ O VALOR PARA QUEM COMPRA</a:t>
+              <a:t>ONDE ISTO VAI DAR</a:t>
             </a:r>
             <a:endParaRPr lang="en-US" sz="1100" dirty="0"/>
           </a:p>
@@ -2466,19 +2555,100 @@
                 <a:ea typeface="Arial" pitchFamily="34" charset="-122"/>
                 <a:cs typeface="Arial" pitchFamily="34" charset="-120"/>
               </a:rPr>
-              <a:t>Três frentes, em ordem de</a:t>
+              <a:t>De uma sala para a rede inteira.</a:t>
             </a:r>
             <a:endParaRPr lang="en-US" sz="3600" dirty="0"/>
           </a:p>
-          <a:p>
-            <a:pPr indent="0" marL="0">
-              <a:lnSpc>
-                <a:spcPts val="3800"/>
-              </a:lnSpc>
-              <a:buNone/>
-            </a:pPr>
-            <a:r>
-              <a:rPr lang="en-US" sz="3600" b="1" dirty="0">
+        </p:txBody>
+      </p:sp>
+      <p:sp>
+        <p:nvSpPr>
+          <p:cNvPr id="4" name="Shape 2"/>
+          <p:cNvSpPr/>
+          <p:nvPr/>
+        </p:nvSpPr>
+        <p:spPr>
+          <a:xfrm>
+            <a:off x="685800" y="2331720"/>
+            <a:ext cx="10789920" cy="0"/>
+          </a:xfrm>
+          <a:prstGeom prst="line">
+            <a:avLst/>
+          </a:prstGeom>
+          <a:noFill/>
+          <a:ln w="12700">
+            <a:solidFill>
+              <a:srgbClr val="24322B"/>
+            </a:solidFill>
+            <a:prstDash val="solid"/>
+          </a:ln>
+        </p:spPr>
+      </p:sp>
+      <p:sp>
+        <p:nvSpPr>
+          <p:cNvPr id="5" name="Text 3"/>
+          <p:cNvSpPr txBox="1"/>
+          <p:nvPr/>
+        </p:nvSpPr>
+        <p:spPr>
+          <a:xfrm>
+            <a:off x="685800" y="2496312"/>
+            <a:ext cx="1645920" cy="274320"/>
+          </a:xfrm>
+          <a:prstGeom prst="rect">
+            <a:avLst/>
+          </a:prstGeom>
+          <a:noFill/>
+          <a:ln/>
+        </p:spPr>
+        <p:txBody>
+          <a:bodyPr wrap="square" lIns="0" tIns="0" rIns="0" bIns="0" rtlCol="0" anchor="ctr"/>
+          <a:lstStyle/>
+          <a:p>
+            <a:pPr indent="0" marL="0">
+              <a:buNone/>
+            </a:pPr>
+            <a:r>
+              <a:rPr lang="en-US" sz="1000" spc="150" kern="0" dirty="0">
+                <a:solidFill>
+                  <a:srgbClr val="3FBF5A"/>
+                </a:solidFill>
+                <a:latin typeface="Courier New" pitchFamily="34" charset="0"/>
+                <a:ea typeface="Courier New" pitchFamily="34" charset="-122"/>
+                <a:cs typeface="Courier New" pitchFamily="34" charset="-120"/>
+              </a:rPr>
+              <a:t>HOJE</a:t>
+            </a:r>
+            <a:endParaRPr lang="en-US" sz="1000" dirty="0"/>
+          </a:p>
+        </p:txBody>
+      </p:sp>
+      <p:sp>
+        <p:nvSpPr>
+          <p:cNvPr id="6" name="Text 4"/>
+          <p:cNvSpPr txBox="1"/>
+          <p:nvPr/>
+        </p:nvSpPr>
+        <p:spPr>
+          <a:xfrm>
+            <a:off x="2514600" y="2441448"/>
+            <a:ext cx="5669280" cy="347472"/>
+          </a:xfrm>
+          <a:prstGeom prst="rect">
+            <a:avLst/>
+          </a:prstGeom>
+          <a:noFill/>
+          <a:ln/>
+        </p:spPr>
+        <p:txBody>
+          <a:bodyPr wrap="square" lIns="0" tIns="0" rIns="0" bIns="0" rtlCol="0" anchor="ctr"/>
+          <a:lstStyle/>
+          <a:p>
+            <a:pPr indent="0" marL="0">
+              <a:buNone/>
+            </a:pPr>
+            <a:r>
+              <a:rPr lang="en-US" sz="1700" b="1" dirty="0">
                 <a:solidFill>
                   <a:srgbClr val="EDF3EF"/>
                 </a:solidFill>
@@ -2486,30 +2656,239 @@
                 <a:ea typeface="Arial" pitchFamily="34" charset="-122"/>
                 <a:cs typeface="Arial" pitchFamily="34" charset="-120"/>
               </a:rPr>
-              <a:t>força para uma escola.</a:t>
-            </a:r>
-            <a:endParaRPr lang="en-US" sz="3600" dirty="0"/>
-          </a:p>
-        </p:txBody>
-      </p:sp>
-      <p:sp>
-        <p:nvSpPr>
-          <p:cNvPr id="4" name="Shape 2"/>
+              <a:t>Uma sala, uma câmera, um alerta</a:t>
+            </a:r>
+            <a:endParaRPr lang="en-US" sz="1700" dirty="0"/>
+          </a:p>
+        </p:txBody>
+      </p:sp>
+      <p:sp>
+        <p:nvSpPr>
+          <p:cNvPr id="7" name="Shape 5"/>
           <p:cNvSpPr/>
           <p:nvPr/>
         </p:nvSpPr>
         <p:spPr>
           <a:xfrm>
-            <a:off x="685800" y="3017520"/>
-            <a:ext cx="3410712" cy="2788920"/>
+            <a:off x="8321040" y="2468880"/>
+            <a:ext cx="1600200" cy="292608"/>
           </a:xfrm>
           <a:prstGeom prst="roundRect">
             <a:avLst>
-              <a:gd name="adj" fmla="val 3279"/>
+              <a:gd name="adj" fmla="val 50000"/>
             </a:avLst>
           </a:prstGeom>
           <a:solidFill>
-            <a:srgbClr val="17211C"/>
+            <a:srgbClr val="0B100E"/>
+          </a:solidFill>
+          <a:ln w="12700">
+            <a:solidFill>
+              <a:srgbClr val="3FBF5A"/>
+            </a:solidFill>
+            <a:prstDash val="solid"/>
+          </a:ln>
+        </p:spPr>
+      </p:sp>
+      <p:sp>
+        <p:nvSpPr>
+          <p:cNvPr id="8" name="Text 6"/>
+          <p:cNvSpPr txBox="1"/>
+          <p:nvPr/>
+        </p:nvSpPr>
+        <p:spPr>
+          <a:xfrm>
+            <a:off x="8321040" y="2487168"/>
+            <a:ext cx="1600200" cy="256032"/>
+          </a:xfrm>
+          <a:prstGeom prst="rect">
+            <a:avLst/>
+          </a:prstGeom>
+          <a:noFill/>
+          <a:ln/>
+        </p:spPr>
+        <p:txBody>
+          <a:bodyPr wrap="square" lIns="0" tIns="0" rIns="0" bIns="0" rtlCol="0" anchor="ctr"/>
+          <a:lstStyle/>
+          <a:p>
+            <a:pPr algn="ctr" indent="0" marL="0">
+              <a:buNone/>
+            </a:pPr>
+            <a:r>
+              <a:rPr lang="en-US" sz="850" dirty="0">
+                <a:solidFill>
+                  <a:srgbClr val="3FBF5A"/>
+                </a:solidFill>
+                <a:latin typeface="Courier New" pitchFamily="34" charset="0"/>
+                <a:ea typeface="Courier New" pitchFamily="34" charset="-122"/>
+                <a:cs typeface="Courier New" pitchFamily="34" charset="-120"/>
+              </a:rPr>
+              <a:t>DE PÉ</a:t>
+            </a:r>
+            <a:endParaRPr lang="en-US" sz="850" dirty="0"/>
+          </a:p>
+        </p:txBody>
+      </p:sp>
+      <p:sp>
+        <p:nvSpPr>
+          <p:cNvPr id="9" name="Text 7"/>
+          <p:cNvSpPr txBox="1"/>
+          <p:nvPr/>
+        </p:nvSpPr>
+        <p:spPr>
+          <a:xfrm>
+            <a:off x="2514600" y="2834640"/>
+            <a:ext cx="8686800" cy="457200"/>
+          </a:xfrm>
+          <a:prstGeom prst="rect">
+            <a:avLst/>
+          </a:prstGeom>
+          <a:noFill/>
+          <a:ln/>
+        </p:spPr>
+        <p:txBody>
+          <a:bodyPr wrap="square" lIns="0" tIns="0" rIns="0" bIns="0" rtlCol="0" anchor="ctr"/>
+          <a:lstStyle/>
+          <a:p>
+            <a:pPr indent="0" marL="0">
+              <a:lnSpc>
+                <a:spcPts val="1600"/>
+              </a:lnSpc>
+              <a:buNone/>
+            </a:pPr>
+            <a:r>
+              <a:rPr lang="en-US" sz="1200" dirty="0">
+                <a:solidFill>
+                  <a:srgbClr val="9DB0A6"/>
+                </a:solidFill>
+                <a:latin typeface="Calibri" pitchFamily="34" charset="0"/>
+                <a:ea typeface="Calibri" pitchFamily="34" charset="-122"/>
+                <a:cs typeface="Calibri" pitchFamily="34" charset="-120"/>
+              </a:rPr>
+              <a:t>Queda ao vivo, evento na corrente, e-mail na coordenação, imagem com rosto apagado. Roda sem internet, numa máquina comum.</a:t>
+            </a:r>
+            <a:endParaRPr lang="en-US" sz="1200" dirty="0"/>
+          </a:p>
+        </p:txBody>
+      </p:sp>
+      <p:sp>
+        <p:nvSpPr>
+          <p:cNvPr id="10" name="Shape 8"/>
+          <p:cNvSpPr/>
+          <p:nvPr/>
+        </p:nvSpPr>
+        <p:spPr>
+          <a:xfrm>
+            <a:off x="685800" y="3355848"/>
+            <a:ext cx="10789920" cy="0"/>
+          </a:xfrm>
+          <a:prstGeom prst="line">
+            <a:avLst/>
+          </a:prstGeom>
+          <a:noFill/>
+          <a:ln w="12700">
+            <a:solidFill>
+              <a:srgbClr val="24322B"/>
+            </a:solidFill>
+            <a:prstDash val="solid"/>
+          </a:ln>
+        </p:spPr>
+      </p:sp>
+      <p:sp>
+        <p:nvSpPr>
+          <p:cNvPr id="11" name="Text 9"/>
+          <p:cNvSpPr txBox="1"/>
+          <p:nvPr/>
+        </p:nvSpPr>
+        <p:spPr>
+          <a:xfrm>
+            <a:off x="685800" y="3520440"/>
+            <a:ext cx="1645920" cy="274320"/>
+          </a:xfrm>
+          <a:prstGeom prst="rect">
+            <a:avLst/>
+          </a:prstGeom>
+          <a:noFill/>
+          <a:ln/>
+        </p:spPr>
+        <p:txBody>
+          <a:bodyPr wrap="square" lIns="0" tIns="0" rIns="0" bIns="0" rtlCol="0" anchor="ctr"/>
+          <a:lstStyle/>
+          <a:p>
+            <a:pPr indent="0" marL="0">
+              <a:buNone/>
+            </a:pPr>
+            <a:r>
+              <a:rPr lang="en-US" sz="1000" spc="150" kern="0" dirty="0">
+                <a:solidFill>
+                  <a:srgbClr val="6A7D74"/>
+                </a:solidFill>
+                <a:latin typeface="Courier New" pitchFamily="34" charset="0"/>
+                <a:ea typeface="Courier New" pitchFamily="34" charset="-122"/>
+                <a:cs typeface="Courier New" pitchFamily="34" charset="-120"/>
+              </a:rPr>
+              <a:t>PRÓXIMO</a:t>
+            </a:r>
+            <a:endParaRPr lang="en-US" sz="1000" dirty="0"/>
+          </a:p>
+        </p:txBody>
+      </p:sp>
+      <p:sp>
+        <p:nvSpPr>
+          <p:cNvPr id="12" name="Text 10"/>
+          <p:cNvSpPr txBox="1"/>
+          <p:nvPr/>
+        </p:nvSpPr>
+        <p:spPr>
+          <a:xfrm>
+            <a:off x="2514600" y="3465576"/>
+            <a:ext cx="5669280" cy="347472"/>
+          </a:xfrm>
+          <a:prstGeom prst="rect">
+            <a:avLst/>
+          </a:prstGeom>
+          <a:noFill/>
+          <a:ln/>
+        </p:spPr>
+        <p:txBody>
+          <a:bodyPr wrap="square" lIns="0" tIns="0" rIns="0" bIns="0" rtlCol="0" anchor="ctr"/>
+          <a:lstStyle/>
+          <a:p>
+            <a:pPr indent="0" marL="0">
+              <a:buNone/>
+            </a:pPr>
+            <a:r>
+              <a:rPr lang="en-US" sz="1700" b="1" dirty="0">
+                <a:solidFill>
+                  <a:srgbClr val="EDF3EF"/>
+                </a:solidFill>
+                <a:latin typeface="Arial" pitchFamily="34" charset="0"/>
+                <a:ea typeface="Arial" pitchFamily="34" charset="-122"/>
+                <a:cs typeface="Arial" pitchFamily="34" charset="-120"/>
+              </a:rPr>
+              <a:t>Escola-piloto</a:t>
+            </a:r>
+            <a:endParaRPr lang="en-US" sz="1700" dirty="0"/>
+          </a:p>
+        </p:txBody>
+      </p:sp>
+      <p:sp>
+        <p:nvSpPr>
+          <p:cNvPr id="13" name="Shape 11"/>
+          <p:cNvSpPr/>
+          <p:nvPr/>
+        </p:nvSpPr>
+        <p:spPr>
+          <a:xfrm>
+            <a:off x="8321040" y="3493008"/>
+            <a:ext cx="1600200" cy="292608"/>
+          </a:xfrm>
+          <a:prstGeom prst="roundRect">
+            <a:avLst>
+              <a:gd name="adj" fmla="val 50000"/>
+            </a:avLst>
+          </a:prstGeom>
+          <a:solidFill>
+            <a:srgbClr val="0B100E"/>
           </a:solidFill>
           <a:ln w="12700">
             <a:solidFill>
@@ -2521,53 +2900,53 @@
       </p:sp>
       <p:sp>
         <p:nvSpPr>
-          <p:cNvPr id="5" name="Text 3"/>
-          <p:cNvSpPr txBox="1"/>
-          <p:nvPr/>
-        </p:nvSpPr>
-        <p:spPr>
-          <a:xfrm>
-            <a:off x="941832" y="3246120"/>
-            <a:ext cx="2926080" cy="228600"/>
-          </a:xfrm>
-          <a:prstGeom prst="rect">
-            <a:avLst/>
-          </a:prstGeom>
-          <a:noFill/>
-          <a:ln/>
-        </p:spPr>
-        <p:txBody>
-          <a:bodyPr wrap="square" lIns="0" tIns="0" rIns="0" bIns="0" rtlCol="0" anchor="ctr"/>
-          <a:lstStyle/>
-          <a:p>
-            <a:pPr indent="0" marL="0">
-              <a:buNone/>
-            </a:pPr>
-            <a:r>
-              <a:rPr lang="en-US" sz="950" spc="150" kern="0" dirty="0">
-                <a:solidFill>
-                  <a:srgbClr val="3FBF5A"/>
+          <p:cNvPr id="14" name="Text 12"/>
+          <p:cNvSpPr txBox="1"/>
+          <p:nvPr/>
+        </p:nvSpPr>
+        <p:spPr>
+          <a:xfrm>
+            <a:off x="8321040" y="3511296"/>
+            <a:ext cx="1600200" cy="256032"/>
+          </a:xfrm>
+          <a:prstGeom prst="rect">
+            <a:avLst/>
+          </a:prstGeom>
+          <a:noFill/>
+          <a:ln/>
+        </p:spPr>
+        <p:txBody>
+          <a:bodyPr wrap="square" lIns="0" tIns="0" rIns="0" bIns="0" rtlCol="0" anchor="ctr"/>
+          <a:lstStyle/>
+          <a:p>
+            <a:pPr algn="ctr" indent="0" marL="0">
+              <a:buNone/>
+            </a:pPr>
+            <a:r>
+              <a:rPr lang="en-US" sz="850" dirty="0">
+                <a:solidFill>
+                  <a:srgbClr val="6A7D74"/>
                 </a:solidFill>
                 <a:latin typeface="Courier New" pitchFamily="34" charset="0"/>
                 <a:ea typeface="Courier New" pitchFamily="34" charset="-122"/>
                 <a:cs typeface="Courier New" pitchFamily="34" charset="-120"/>
               </a:rPr>
-              <a:t>O QUE FAZ ASSINAR</a:t>
-            </a:r>
-            <a:endParaRPr lang="en-US" sz="950" dirty="0"/>
-          </a:p>
-        </p:txBody>
-      </p:sp>
-      <p:sp>
-        <p:nvSpPr>
-          <p:cNvPr id="6" name="Text 4"/>
-          <p:cNvSpPr txBox="1"/>
-          <p:nvPr/>
-        </p:nvSpPr>
-        <p:spPr>
-          <a:xfrm>
-            <a:off x="941832" y="3520440"/>
-            <a:ext cx="2926080" cy="685800"/>
+              <a:t>A VALIDAR</a:t>
+            </a:r>
+            <a:endParaRPr lang="en-US" sz="850" dirty="0"/>
+          </a:p>
+        </p:txBody>
+      </p:sp>
+      <p:sp>
+        <p:nvSpPr>
+          <p:cNvPr id="15" name="Text 13"/>
+          <p:cNvSpPr txBox="1"/>
+          <p:nvPr/>
+        </p:nvSpPr>
+        <p:spPr>
+          <a:xfrm>
+            <a:off x="2514600" y="3858768"/>
+            <a:ext cx="8686800" cy="457200"/>
           </a:xfrm>
           <a:prstGeom prst="rect">
             <a:avLst/>
@@ -2581,8 +2960,109 @@
           <a:p>
             <a:pPr indent="0" marL="0">
               <a:lnSpc>
-                <a:spcPts val="2100"/>
+                <a:spcPts val="1600"/>
               </a:lnSpc>
+              <a:buNone/>
+            </a:pPr>
+            <a:r>
+              <a:rPr lang="en-US" sz="1200" dirty="0">
+                <a:solidFill>
+                  <a:srgbClr val="9DB0A6"/>
+                </a:solidFill>
+                <a:latin typeface="Calibri" pitchFamily="34" charset="0"/>
+                <a:ea typeface="Calibri" pitchFamily="34" charset="-122"/>
+                <a:cs typeface="Calibri" pitchFamily="34" charset="-120"/>
+              </a:rPr>
+              <a:t>A medida que ainda não temos: quantos alertas por dia a coordenação aguenta. É esse número, e não a revocação, que decide se é usável.</a:t>
+            </a:r>
+            <a:endParaRPr lang="en-US" sz="1200" dirty="0"/>
+          </a:p>
+        </p:txBody>
+      </p:sp>
+      <p:sp>
+        <p:nvSpPr>
+          <p:cNvPr id="16" name="Shape 14"/>
+          <p:cNvSpPr/>
+          <p:nvPr/>
+        </p:nvSpPr>
+        <p:spPr>
+          <a:xfrm>
+            <a:off x="685800" y="4379976"/>
+            <a:ext cx="10789920" cy="0"/>
+          </a:xfrm>
+          <a:prstGeom prst="line">
+            <a:avLst/>
+          </a:prstGeom>
+          <a:noFill/>
+          <a:ln w="12700">
+            <a:solidFill>
+              <a:srgbClr val="24322B"/>
+            </a:solidFill>
+            <a:prstDash val="solid"/>
+          </a:ln>
+        </p:spPr>
+      </p:sp>
+      <p:sp>
+        <p:nvSpPr>
+          <p:cNvPr id="17" name="Text 15"/>
+          <p:cNvSpPr txBox="1"/>
+          <p:nvPr/>
+        </p:nvSpPr>
+        <p:spPr>
+          <a:xfrm>
+            <a:off x="685800" y="4544568"/>
+            <a:ext cx="1645920" cy="274320"/>
+          </a:xfrm>
+          <a:prstGeom prst="rect">
+            <a:avLst/>
+          </a:prstGeom>
+          <a:noFill/>
+          <a:ln/>
+        </p:spPr>
+        <p:txBody>
+          <a:bodyPr wrap="square" lIns="0" tIns="0" rIns="0" bIns="0" rtlCol="0" anchor="ctr"/>
+          <a:lstStyle/>
+          <a:p>
+            <a:pPr indent="0" marL="0">
+              <a:buNone/>
+            </a:pPr>
+            <a:r>
+              <a:rPr lang="en-US" sz="1000" spc="150" kern="0" dirty="0">
+                <a:solidFill>
+                  <a:srgbClr val="6A7D74"/>
+                </a:solidFill>
+                <a:latin typeface="Courier New" pitchFamily="34" charset="0"/>
+                <a:ea typeface="Courier New" pitchFamily="34" charset="-122"/>
+                <a:cs typeface="Courier New" pitchFamily="34" charset="-120"/>
+              </a:rPr>
+              <a:t>DEPOIS</a:t>
+            </a:r>
+            <a:endParaRPr lang="en-US" sz="1000" dirty="0"/>
+          </a:p>
+        </p:txBody>
+      </p:sp>
+      <p:sp>
+        <p:nvSpPr>
+          <p:cNvPr id="18" name="Text 16"/>
+          <p:cNvSpPr txBox="1"/>
+          <p:nvPr/>
+        </p:nvSpPr>
+        <p:spPr>
+          <a:xfrm>
+            <a:off x="2514600" y="4489704"/>
+            <a:ext cx="5669280" cy="347472"/>
+          </a:xfrm>
+          <a:prstGeom prst="rect">
+            <a:avLst/>
+          </a:prstGeom>
+          <a:noFill/>
+          <a:ln/>
+        </p:spPr>
+        <p:txBody>
+          <a:bodyPr wrap="square" lIns="0" tIns="0" rIns="0" bIns="0" rtlCol="0" anchor="ctr"/>
+          <a:lstStyle/>
+          <a:p>
+            <a:pPr indent="0" marL="0">
               <a:buNone/>
             </a:pPr>
             <a:r>
@@ -2594,131 +3074,30 @@
                 <a:ea typeface="Arial" pitchFamily="34" charset="-122"/>
                 <a:cs typeface="Arial" pitchFamily="34" charset="-120"/>
               </a:rPr>
-              <a:t>Risco jurídico,</a:t>
+              <a:t>Várias câmeras, uma corrente só</a:t>
             </a:r>
             <a:endParaRPr lang="en-US" sz="1700" dirty="0"/>
           </a:p>
-          <a:p>
-            <a:pPr indent="0" marL="0">
-              <a:lnSpc>
-                <a:spcPts val="2100"/>
-              </a:lnSpc>
-              <a:buNone/>
-            </a:pPr>
-            <a:r>
-              <a:rPr lang="en-US" sz="1700" b="1" dirty="0">
-                <a:solidFill>
-                  <a:srgbClr val="EDF3EF"/>
-                </a:solidFill>
-                <a:latin typeface="Arial" pitchFamily="34" charset="0"/>
-                <a:ea typeface="Arial" pitchFamily="34" charset="-122"/>
-                <a:cs typeface="Arial" pitchFamily="34" charset="-120"/>
-              </a:rPr>
-              <a:t>não segurança</a:t>
-            </a:r>
-            <a:endParaRPr lang="en-US" sz="1700" dirty="0"/>
-          </a:p>
-        </p:txBody>
-      </p:sp>
-      <p:sp>
-        <p:nvSpPr>
-          <p:cNvPr id="7" name="Text 5"/>
-          <p:cNvSpPr txBox="1"/>
-          <p:nvPr/>
-        </p:nvSpPr>
-        <p:spPr>
-          <a:xfrm>
-            <a:off x="941832" y="4279392"/>
-            <a:ext cx="2926080" cy="1234440"/>
-          </a:xfrm>
-          <a:prstGeom prst="rect">
-            <a:avLst/>
-          </a:prstGeom>
-          <a:noFill/>
-          <a:ln/>
-        </p:spPr>
-        <p:txBody>
-          <a:bodyPr wrap="square" lIns="0" tIns="0" rIns="0" bIns="0" rtlCol="0" anchor="ctr"/>
-          <a:lstStyle/>
-          <a:p>
-            <a:pPr indent="0" marL="0">
-              <a:lnSpc>
-                <a:spcPts val="1600"/>
-              </a:lnSpc>
-              <a:buNone/>
-            </a:pPr>
-            <a:r>
-              <a:rPr lang="en-US" sz="1200" dirty="0">
-                <a:solidFill>
-                  <a:srgbClr val="9DB0A6"/>
-                </a:solidFill>
-                <a:latin typeface="Calibri" pitchFamily="34" charset="0"/>
-                <a:ea typeface="Calibri" pitchFamily="34" charset="-122"/>
-                <a:cs typeface="Calibri" pitchFamily="34" charset="-120"/>
-              </a:rPr>
-              <a:t>O medo real de uma mantenedora não é perder uma queda. É o processo depois. Registro que denuncia adulteração, imagem com prazo, acesso rastreado e biometria com vencimento reduzem exposição.</a:t>
-            </a:r>
-            <a:endParaRPr lang="en-US" sz="1200" dirty="0"/>
-          </a:p>
-        </p:txBody>
-      </p:sp>
-      <p:sp>
-        <p:nvSpPr>
-          <p:cNvPr id="8" name="Text 6"/>
-          <p:cNvSpPr txBox="1"/>
-          <p:nvPr/>
-        </p:nvSpPr>
-        <p:spPr>
-          <a:xfrm>
-            <a:off x="941832" y="5440680"/>
-            <a:ext cx="2926080" cy="320040"/>
-          </a:xfrm>
-          <a:prstGeom prst="rect">
-            <a:avLst/>
-          </a:prstGeom>
-          <a:noFill/>
-          <a:ln/>
-        </p:spPr>
-        <p:txBody>
-          <a:bodyPr wrap="square" lIns="0" tIns="0" rIns="0" bIns="0" rtlCol="0" anchor="ctr"/>
-          <a:lstStyle/>
-          <a:p>
-            <a:pPr indent="0" marL="0">
-              <a:buNone/>
-            </a:pPr>
-            <a:r>
-              <a:rPr lang="en-US" sz="850" dirty="0">
-                <a:solidFill>
-                  <a:srgbClr val="6A7D74"/>
-                </a:solidFill>
-                <a:latin typeface="Courier New" pitchFamily="34" charset="0"/>
-                <a:ea typeface="Courier New" pitchFamily="34" charset="-122"/>
-                <a:cs typeface="Courier New" pitchFamily="34" charset="-120"/>
-              </a:rPr>
-              <a:t>LGPD, e a disputa judicial que vem depois</a:t>
-            </a:r>
-            <a:endParaRPr lang="en-US" sz="850" dirty="0"/>
-          </a:p>
-        </p:txBody>
-      </p:sp>
-      <p:sp>
-        <p:nvSpPr>
-          <p:cNvPr id="9" name="Shape 7"/>
+        </p:txBody>
+      </p:sp>
+      <p:sp>
+        <p:nvSpPr>
+          <p:cNvPr id="19" name="Shape 17"/>
           <p:cNvSpPr/>
           <p:nvPr/>
         </p:nvSpPr>
         <p:spPr>
           <a:xfrm>
-            <a:off x="4370832" y="3017520"/>
-            <a:ext cx="3410712" cy="2788920"/>
+            <a:off x="8321040" y="4517136"/>
+            <a:ext cx="1600200" cy="292608"/>
           </a:xfrm>
           <a:prstGeom prst="roundRect">
             <a:avLst>
-              <a:gd name="adj" fmla="val 3279"/>
+              <a:gd name="adj" fmla="val 50000"/>
             </a:avLst>
           </a:prstGeom>
           <a:solidFill>
-            <a:srgbClr val="17211C"/>
+            <a:srgbClr val="0B100E"/>
           </a:solidFill>
           <a:ln w="12700">
             <a:solidFill>
@@ -2730,53 +3109,53 @@
       </p:sp>
       <p:sp>
         <p:nvSpPr>
-          <p:cNvPr id="10" name="Text 8"/>
-          <p:cNvSpPr txBox="1"/>
-          <p:nvPr/>
-        </p:nvSpPr>
-        <p:spPr>
-          <a:xfrm>
-            <a:off x="4626864" y="3246120"/>
-            <a:ext cx="2926080" cy="228600"/>
-          </a:xfrm>
-          <a:prstGeom prst="rect">
-            <a:avLst/>
-          </a:prstGeom>
-          <a:noFill/>
-          <a:ln/>
-        </p:spPr>
-        <p:txBody>
-          <a:bodyPr wrap="square" lIns="0" tIns="0" rIns="0" bIns="0" rtlCol="0" anchor="ctr"/>
-          <a:lstStyle/>
-          <a:p>
-            <a:pPr indent="0" marL="0">
-              <a:buNone/>
-            </a:pPr>
-            <a:r>
-              <a:rPr lang="en-US" sz="950" spc="150" kern="0" dirty="0">
-                <a:solidFill>
-                  <a:srgbClr val="3FBF5A"/>
+          <p:cNvPr id="20" name="Text 18"/>
+          <p:cNvSpPr txBox="1"/>
+          <p:nvPr/>
+        </p:nvSpPr>
+        <p:spPr>
+          <a:xfrm>
+            <a:off x="8321040" y="4535424"/>
+            <a:ext cx="1600200" cy="256032"/>
+          </a:xfrm>
+          <a:prstGeom prst="rect">
+            <a:avLst/>
+          </a:prstGeom>
+          <a:noFill/>
+          <a:ln/>
+        </p:spPr>
+        <p:txBody>
+          <a:bodyPr wrap="square" lIns="0" tIns="0" rIns="0" bIns="0" rtlCol="0" anchor="ctr"/>
+          <a:lstStyle/>
+          <a:p>
+            <a:pPr algn="ctr" indent="0" marL="0">
+              <a:buNone/>
+            </a:pPr>
+            <a:r>
+              <a:rPr lang="en-US" sz="850" dirty="0">
+                <a:solidFill>
+                  <a:srgbClr val="6A7D74"/>
                 </a:solidFill>
                 <a:latin typeface="Courier New" pitchFamily="34" charset="0"/>
                 <a:ea typeface="Courier New" pitchFamily="34" charset="-122"/>
                 <a:cs typeface="Courier New" pitchFamily="34" charset="-120"/>
               </a:rPr>
-              <a:t>O QUE SALVA</a:t>
-            </a:r>
-            <a:endParaRPr lang="en-US" sz="950" dirty="0"/>
-          </a:p>
-        </p:txBody>
-      </p:sp>
-      <p:sp>
-        <p:nvSpPr>
-          <p:cNvPr id="11" name="Text 9"/>
-          <p:cNvSpPr txBox="1"/>
-          <p:nvPr/>
-        </p:nvSpPr>
-        <p:spPr>
-          <a:xfrm>
-            <a:off x="4626864" y="3520440"/>
-            <a:ext cx="2926080" cy="685800"/>
+              <a:t>A CONSTRUIR</a:t>
+            </a:r>
+            <a:endParaRPr lang="en-US" sz="850" dirty="0"/>
+          </a:p>
+        </p:txBody>
+      </p:sp>
+      <p:sp>
+        <p:nvSpPr>
+          <p:cNvPr id="21" name="Text 19"/>
+          <p:cNvSpPr txBox="1"/>
+          <p:nvPr/>
+        </p:nvSpPr>
+        <p:spPr>
+          <a:xfrm>
+            <a:off x="2514600" y="4882896"/>
+            <a:ext cx="8686800" cy="457200"/>
           </a:xfrm>
           <a:prstGeom prst="rect">
             <a:avLst/>
@@ -2790,8 +3169,109 @@
           <a:p>
             <a:pPr indent="0" marL="0">
               <a:lnSpc>
-                <a:spcPts val="2100"/>
+                <a:spcPts val="1600"/>
               </a:lnSpc>
+              <a:buNone/>
+            </a:pPr>
+            <a:r>
+              <a:rPr lang="en-US" sz="1200" dirty="0">
+                <a:solidFill>
+                  <a:srgbClr val="9DB0A6"/>
+                </a:solidFill>
+                <a:latin typeface="Calibri" pitchFamily="34" charset="0"/>
+                <a:ea typeface="Calibri" pitchFamily="34" charset="-122"/>
+                <a:cs typeface="Calibri" pitchFamily="34" charset="-120"/>
+              </a:rPr>
+              <a:t>Cada sala com seu detector na borda, todas na mesma trilha auditável.</a:t>
+            </a:r>
+            <a:endParaRPr lang="en-US" sz="1200" dirty="0"/>
+          </a:p>
+        </p:txBody>
+      </p:sp>
+      <p:sp>
+        <p:nvSpPr>
+          <p:cNvPr id="22" name="Shape 20"/>
+          <p:cNvSpPr/>
+          <p:nvPr/>
+        </p:nvSpPr>
+        <p:spPr>
+          <a:xfrm>
+            <a:off x="685800" y="5404104"/>
+            <a:ext cx="10789920" cy="0"/>
+          </a:xfrm>
+          <a:prstGeom prst="line">
+            <a:avLst/>
+          </a:prstGeom>
+          <a:noFill/>
+          <a:ln w="12700">
+            <a:solidFill>
+              <a:srgbClr val="24322B"/>
+            </a:solidFill>
+            <a:prstDash val="solid"/>
+          </a:ln>
+        </p:spPr>
+      </p:sp>
+      <p:sp>
+        <p:nvSpPr>
+          <p:cNvPr id="23" name="Text 21"/>
+          <p:cNvSpPr txBox="1"/>
+          <p:nvPr/>
+        </p:nvSpPr>
+        <p:spPr>
+          <a:xfrm>
+            <a:off x="685800" y="5568696"/>
+            <a:ext cx="1645920" cy="274320"/>
+          </a:xfrm>
+          <a:prstGeom prst="rect">
+            <a:avLst/>
+          </a:prstGeom>
+          <a:noFill/>
+          <a:ln/>
+        </p:spPr>
+        <p:txBody>
+          <a:bodyPr wrap="square" lIns="0" tIns="0" rIns="0" bIns="0" rtlCol="0" anchor="ctr"/>
+          <a:lstStyle/>
+          <a:p>
+            <a:pPr indent="0" marL="0">
+              <a:buNone/>
+            </a:pPr>
+            <a:r>
+              <a:rPr lang="en-US" sz="1000" spc="150" kern="0" dirty="0">
+                <a:solidFill>
+                  <a:srgbClr val="6A7D74"/>
+                </a:solidFill>
+                <a:latin typeface="Courier New" pitchFamily="34" charset="0"/>
+                <a:ea typeface="Courier New" pitchFamily="34" charset="-122"/>
+                <a:cs typeface="Courier New" pitchFamily="34" charset="-120"/>
+              </a:rPr>
+              <a:t>A TESE</a:t>
+            </a:r>
+            <a:endParaRPr lang="en-US" sz="1000" dirty="0"/>
+          </a:p>
+        </p:txBody>
+      </p:sp>
+      <p:sp>
+        <p:nvSpPr>
+          <p:cNvPr id="24" name="Text 22"/>
+          <p:cNvSpPr txBox="1"/>
+          <p:nvPr/>
+        </p:nvSpPr>
+        <p:spPr>
+          <a:xfrm>
+            <a:off x="2514600" y="5513832"/>
+            <a:ext cx="5669280" cy="347472"/>
+          </a:xfrm>
+          <a:prstGeom prst="rect">
+            <a:avLst/>
+          </a:prstGeom>
+          <a:noFill/>
+          <a:ln/>
+        </p:spPr>
+        <p:txBody>
+          <a:bodyPr wrap="square" lIns="0" tIns="0" rIns="0" bIns="0" rtlCol="0" anchor="ctr"/>
+          <a:lstStyle/>
+          <a:p>
+            <a:pPr indent="0" marL="0">
               <a:buNone/>
             </a:pPr>
             <a:r>
@@ -2803,7 +3283,7 @@
                 <a:ea typeface="Arial" pitchFamily="34" charset="-122"/>
                 <a:cs typeface="Arial" pitchFamily="34" charset="-120"/>
               </a:rPr>
-              <a:t>Custo evitado</a:t>
+              <a:t>A mesma base, outros lugares</a:t>
             </a:r>
             <a:endParaRPr lang="en-US" sz="1700" dirty="0"/>
           </a:p>
@@ -2811,103 +3291,22 @@
       </p:sp>
       <p:sp>
         <p:nvSpPr>
-          <p:cNvPr id="12" name="Text 10"/>
-          <p:cNvSpPr txBox="1"/>
-          <p:nvPr/>
-        </p:nvSpPr>
-        <p:spPr>
-          <a:xfrm>
-            <a:off x="4626864" y="4279392"/>
-            <a:ext cx="2926080" cy="1234440"/>
-          </a:xfrm>
-          <a:prstGeom prst="rect">
-            <a:avLst/>
-          </a:prstGeom>
-          <a:noFill/>
-          <a:ln/>
-        </p:spPr>
-        <p:txBody>
-          <a:bodyPr wrap="square" lIns="0" tIns="0" rIns="0" bIns="0" rtlCol="0" anchor="ctr"/>
-          <a:lstStyle/>
-          <a:p>
-            <a:pPr indent="0" marL="0">
-              <a:lnSpc>
-                <a:spcPts val="1600"/>
-              </a:lnSpc>
-              <a:buNone/>
-            </a:pPr>
-            <a:r>
-              <a:rPr lang="en-US" sz="1200" dirty="0">
-                <a:solidFill>
-                  <a:srgbClr val="9DB0A6"/>
-                </a:solidFill>
-                <a:latin typeface="Calibri" pitchFamily="34" charset="0"/>
-                <a:ea typeface="Calibri" pitchFamily="34" charset="-122"/>
-                <a:cs typeface="Calibri" pitchFamily="34" charset="-120"/>
-              </a:rPr>
-              <a:t>Uma câmera comum só serve depois do fato. O valor está em chegar antes: socorro em segundos em vez de minutos, e uma queda vista no instante em que acontece.</a:t>
-            </a:r>
-            <a:endParaRPr lang="en-US" sz="1200" dirty="0"/>
-          </a:p>
-        </p:txBody>
-      </p:sp>
-      <p:sp>
-        <p:nvSpPr>
-          <p:cNvPr id="13" name="Text 11"/>
-          <p:cNvSpPr txBox="1"/>
-          <p:nvPr/>
-        </p:nvSpPr>
-        <p:spPr>
-          <a:xfrm>
-            <a:off x="4626864" y="5440680"/>
-            <a:ext cx="2926080" cy="320040"/>
-          </a:xfrm>
-          <a:prstGeom prst="rect">
-            <a:avLst/>
-          </a:prstGeom>
-          <a:noFill/>
-          <a:ln/>
-        </p:spPr>
-        <p:txBody>
-          <a:bodyPr wrap="square" lIns="0" tIns="0" rIns="0" bIns="0" rtlCol="0" anchor="ctr"/>
-          <a:lstStyle/>
-          <a:p>
-            <a:pPr indent="0" marL="0">
-              <a:buNone/>
-            </a:pPr>
-            <a:r>
-              <a:rPr lang="en-US" sz="850" dirty="0">
-                <a:solidFill>
-                  <a:srgbClr val="6A7D74"/>
-                </a:solidFill>
-                <a:latin typeface="Courier New" pitchFamily="34" charset="0"/>
-                <a:ea typeface="Courier New" pitchFamily="34" charset="-122"/>
-                <a:cs typeface="Courier New" pitchFamily="34" charset="-120"/>
-              </a:rPr>
-              <a:t>o alerta sai antes de alguém reclamar</a:t>
-            </a:r>
-            <a:endParaRPr lang="en-US" sz="850" dirty="0"/>
-          </a:p>
-        </p:txBody>
-      </p:sp>
-      <p:sp>
-        <p:nvSpPr>
-          <p:cNvPr id="14" name="Shape 12"/>
+          <p:cNvPr id="25" name="Shape 23"/>
           <p:cNvSpPr/>
           <p:nvPr/>
         </p:nvSpPr>
         <p:spPr>
           <a:xfrm>
-            <a:off x="8055864" y="3017520"/>
-            <a:ext cx="3410712" cy="2788920"/>
+            <a:off x="8321040" y="5541264"/>
+            <a:ext cx="1600200" cy="292608"/>
           </a:xfrm>
           <a:prstGeom prst="roundRect">
             <a:avLst>
-              <a:gd name="adj" fmla="val 3279"/>
+              <a:gd name="adj" fmla="val 50000"/>
             </a:avLst>
           </a:prstGeom>
           <a:solidFill>
-            <a:srgbClr val="17211C"/>
+            <a:srgbClr val="0B100E"/>
           </a:solidFill>
           <a:ln w="12700">
             <a:solidFill>
@@ -2919,95 +3318,53 @@
       </p:sp>
       <p:sp>
         <p:nvSpPr>
-          <p:cNvPr id="15" name="Text 13"/>
-          <p:cNvSpPr txBox="1"/>
-          <p:nvPr/>
-        </p:nvSpPr>
-        <p:spPr>
-          <a:xfrm>
-            <a:off x="8311896" y="3246120"/>
-            <a:ext cx="2926080" cy="228600"/>
-          </a:xfrm>
-          <a:prstGeom prst="rect">
-            <a:avLst/>
-          </a:prstGeom>
-          <a:noFill/>
-          <a:ln/>
-        </p:spPr>
-        <p:txBody>
-          <a:bodyPr wrap="square" lIns="0" tIns="0" rIns="0" bIns="0" rtlCol="0" anchor="ctr"/>
-          <a:lstStyle/>
-          <a:p>
-            <a:pPr indent="0" marL="0">
-              <a:buNone/>
-            </a:pPr>
-            <a:r>
-              <a:rPr lang="en-US" sz="950" spc="150" kern="0" dirty="0">
-                <a:solidFill>
-                  <a:srgbClr val="3FBF5A"/>
+          <p:cNvPr id="26" name="Text 24"/>
+          <p:cNvSpPr txBox="1"/>
+          <p:nvPr/>
+        </p:nvSpPr>
+        <p:spPr>
+          <a:xfrm>
+            <a:off x="8321040" y="5559552"/>
+            <a:ext cx="1600200" cy="256032"/>
+          </a:xfrm>
+          <a:prstGeom prst="rect">
+            <a:avLst/>
+          </a:prstGeom>
+          <a:noFill/>
+          <a:ln/>
+        </p:spPr>
+        <p:txBody>
+          <a:bodyPr wrap="square" lIns="0" tIns="0" rIns="0" bIns="0" rtlCol="0" anchor="ctr"/>
+          <a:lstStyle/>
+          <a:p>
+            <a:pPr algn="ctr" indent="0" marL="0">
+              <a:buNone/>
+            </a:pPr>
+            <a:r>
+              <a:rPr lang="en-US" sz="850" dirty="0">
+                <a:solidFill>
+                  <a:srgbClr val="6A7D74"/>
                 </a:solidFill>
                 <a:latin typeface="Courier New" pitchFamily="34" charset="0"/>
                 <a:ea typeface="Courier New" pitchFamily="34" charset="-122"/>
                 <a:cs typeface="Courier New" pitchFamily="34" charset="-120"/>
               </a:rPr>
-              <a:t>O QUE SUBSTITUI</a:t>
-            </a:r>
-            <a:endParaRPr lang="en-US" sz="950" dirty="0"/>
-          </a:p>
-        </p:txBody>
-      </p:sp>
-      <p:sp>
-        <p:nvSpPr>
-          <p:cNvPr id="16" name="Text 14"/>
-          <p:cNvSpPr txBox="1"/>
-          <p:nvPr/>
-        </p:nvSpPr>
-        <p:spPr>
-          <a:xfrm>
-            <a:off x="8311896" y="3520440"/>
-            <a:ext cx="2926080" cy="685800"/>
-          </a:xfrm>
-          <a:prstGeom prst="rect">
-            <a:avLst/>
-          </a:prstGeom>
-          <a:noFill/>
-          <a:ln/>
-        </p:spPr>
-        <p:txBody>
-          <a:bodyPr wrap="square" lIns="0" tIns="0" rIns="0" bIns="0" rtlCol="0" anchor="ctr"/>
-          <a:lstStyle/>
-          <a:p>
-            <a:pPr indent="0" marL="0">
-              <a:lnSpc>
-                <a:spcPts val="2100"/>
-              </a:lnSpc>
-              <a:buNone/>
-            </a:pPr>
-            <a:r>
-              <a:rPr lang="en-US" sz="1700" b="1" dirty="0">
-                <a:solidFill>
-                  <a:srgbClr val="EDF3EF"/>
-                </a:solidFill>
-                <a:latin typeface="Arial" pitchFamily="34" charset="0"/>
-                <a:ea typeface="Arial" pitchFamily="34" charset="-122"/>
-                <a:cs typeface="Arial" pitchFamily="34" charset="-120"/>
-              </a:rPr>
-              <a:t>Licença de nuvem</a:t>
-            </a:r>
-            <a:endParaRPr lang="en-US" sz="1700" dirty="0"/>
-          </a:p>
-        </p:txBody>
-      </p:sp>
-      <p:sp>
-        <p:nvSpPr>
-          <p:cNvPr id="17" name="Text 15"/>
-          <p:cNvSpPr txBox="1"/>
-          <p:nvPr/>
-        </p:nvSpPr>
-        <p:spPr>
-          <a:xfrm>
-            <a:off x="8311896" y="4279392"/>
-            <a:ext cx="2926080" cy="1234440"/>
+              <a:t>EM ESTUDO</a:t>
+            </a:r>
+            <a:endParaRPr lang="en-US" sz="850" dirty="0"/>
+          </a:p>
+        </p:txBody>
+      </p:sp>
+      <p:sp>
+        <p:nvSpPr>
+          <p:cNvPr id="27" name="Text 25"/>
+          <p:cNvSpPr txBox="1"/>
+          <p:nvPr/>
+        </p:nvSpPr>
+        <p:spPr>
+          <a:xfrm>
+            <a:off x="2514600" y="5907024"/>
+            <a:ext cx="8686800" cy="457200"/>
           </a:xfrm>
           <a:prstGeom prst="rect">
             <a:avLst/>
@@ -3034,7 +3391,7 @@
                 <a:ea typeface="Calibri" pitchFamily="34" charset="-122"/>
                 <a:cs typeface="Calibri" pitchFamily="34" charset="-120"/>
               </a:rPr>
-              <a:t>Se a escola já paga mensalidade por câmera para algum sistema de nuvem, o nosso número entra no lugar dele. E, ao contrário do dele, dá para conferir de onde sai.</a:t>
+              <a:t>Borda que decide mais prova que não se altera: portaria com consentimento, e o SVATech Health.</a:t>
             </a:r>
             <a:endParaRPr lang="en-US" sz="1200" dirty="0"/>
           </a:p>
@@ -3042,30 +3399,30 @@
       </p:sp>
       <p:sp>
         <p:nvSpPr>
-          <p:cNvPr id="18" name="Text 16"/>
-          <p:cNvSpPr txBox="1"/>
-          <p:nvPr/>
-        </p:nvSpPr>
-        <p:spPr>
-          <a:xfrm>
-            <a:off x="8311896" y="5440680"/>
-            <a:ext cx="2926080" cy="320040"/>
-          </a:xfrm>
-          <a:prstGeom prst="rect">
-            <a:avLst/>
-          </a:prstGeom>
-          <a:noFill/>
-          <a:ln/>
-        </p:spPr>
-        <p:txBody>
-          <a:bodyPr wrap="square" lIns="0" tIns="0" rIns="0" bIns="0" rtlCol="0" anchor="ctr"/>
-          <a:lstStyle/>
-          <a:p>
-            <a:pPr indent="0" marL="0">
-              <a:buNone/>
-            </a:pPr>
-            <a:r>
-              <a:rPr lang="en-US" sz="850" dirty="0">
+          <p:cNvPr id="28" name="Text 26"/>
+          <p:cNvSpPr txBox="1"/>
+          <p:nvPr/>
+        </p:nvSpPr>
+        <p:spPr>
+          <a:xfrm>
+            <a:off x="685800" y="6291072"/>
+            <a:ext cx="5486400" cy="274320"/>
+          </a:xfrm>
+          <a:prstGeom prst="rect">
+            <a:avLst/>
+          </a:prstGeom>
+          <a:noFill/>
+          <a:ln/>
+        </p:spPr>
+        <p:txBody>
+          <a:bodyPr wrap="square" lIns="0" tIns="0" rIns="0" bIns="0" rtlCol="0" anchor="ctr"/>
+          <a:lstStyle/>
+          <a:p>
+            <a:pPr indent="0" marL="0">
+              <a:buNone/>
+            </a:pPr>
+            <a:r>
+              <a:rPr lang="en-US" sz="900" dirty="0">
                 <a:solidFill>
                   <a:srgbClr val="6A7D74"/>
                 </a:solidFill>
@@ -3073,45 +3430,6 @@
                 <a:ea typeface="Courier New" pitchFamily="34" charset="-122"/>
                 <a:cs typeface="Courier New" pitchFamily="34" charset="-120"/>
               </a:rPr>
-              <a:t>comparável, e verificável linha a linha</a:t>
-            </a:r>
-            <a:endParaRPr lang="en-US" sz="850" dirty="0"/>
-          </a:p>
-        </p:txBody>
-      </p:sp>
-      <p:sp>
-        <p:nvSpPr>
-          <p:cNvPr id="20" name="Text 17"/>
-          <p:cNvSpPr txBox="1"/>
-          <p:nvPr/>
-        </p:nvSpPr>
-        <p:spPr>
-          <a:xfrm>
-            <a:off x="685800" y="6291072"/>
-            <a:ext cx="5486400" cy="274320"/>
-          </a:xfrm>
-          <a:prstGeom prst="rect">
-            <a:avLst/>
-          </a:prstGeom>
-          <a:noFill/>
-          <a:ln/>
-        </p:spPr>
-        <p:txBody>
-          <a:bodyPr wrap="square" lIns="0" tIns="0" rIns="0" bIns="0" rtlCol="0" anchor="ctr"/>
-          <a:lstStyle/>
-          <a:p>
-            <a:pPr indent="0" marL="0">
-              <a:buNone/>
-            </a:pPr>
-            <a:r>
-              <a:rPr lang="en-US" sz="900" dirty="0">
-                <a:solidFill>
-                  <a:srgbClr val="6A7D74"/>
-                </a:solidFill>
-                <a:latin typeface="Courier New" pitchFamily="34" charset="0"/>
-                <a:ea typeface="Courier New" pitchFamily="34" charset="-122"/>
-                <a:cs typeface="Courier New" pitchFamily="34" charset="-120"/>
-              </a:rPr>
               <a:t>Auditix AI  ·  SVATech  ·  grupo 11</a:t>
             </a:r>
             <a:endParaRPr lang="en-US" sz="900" dirty="0"/>
@@ -3120,7 +3438,7 @@
       </p:sp>
       <p:sp>
         <p:nvSpPr>
-          <p:cNvPr id="21" name="Text 18"/>
+          <p:cNvPr id="29" name="Text 27"/>
           <p:cNvSpPr txBox="1"/>
           <p:nvPr/>
         </p:nvSpPr>
@@ -3222,7 +3540,7 @@
                 <a:ea typeface="Courier New" pitchFamily="34" charset="-122"/>
                 <a:cs typeface="Courier New" pitchFamily="34" charset="-120"/>
               </a:rPr>
-              <a:t>VALOR ECONÔMICO E ENTRADA NO MERCADO</a:t>
+              <a:t>ONDE ESTÁ O VALOR PARA QUEM COMPRA</a:t>
             </a:r>
             <a:endParaRPr lang="en-US" sz="1100" dirty="0"/>
           </a:p>
@@ -3264,7 +3582,7 @@
                 <a:ea typeface="Arial" pitchFamily="34" charset="-122"/>
                 <a:cs typeface="Arial" pitchFamily="34" charset="-120"/>
               </a:rPr>
-              <a:t>O custo de cobrir mais</a:t>
+              <a:t>Três frentes, em ordem de</a:t>
             </a:r>
             <a:endParaRPr lang="en-US" sz="3600" dirty="0"/>
           </a:p>
@@ -3284,7 +3602,7 @@
                 <a:ea typeface="Arial" pitchFamily="34" charset="-122"/>
                 <a:cs typeface="Arial" pitchFamily="34" charset="-120"/>
               </a:rPr>
-              <a:t>uma sala é uma câmera.</a:t>
+              <a:t>força para uma escola.</a:t>
             </a:r>
             <a:endParaRPr lang="en-US" sz="3600" dirty="0"/>
           </a:p>
@@ -3292,609 +3610,22 @@
       </p:sp>
       <p:sp>
         <p:nvSpPr>
-          <p:cNvPr id="4" name="Text 2"/>
-          <p:cNvSpPr txBox="1"/>
-          <p:nvPr/>
-        </p:nvSpPr>
-        <p:spPr>
-          <a:xfrm>
-            <a:off x="685800" y="2514600"/>
-            <a:ext cx="10515600" cy="731520"/>
-          </a:xfrm>
-          <a:prstGeom prst="rect">
-            <a:avLst/>
-          </a:prstGeom>
-          <a:noFill/>
-          <a:ln/>
-        </p:spPr>
-        <p:txBody>
-          <a:bodyPr wrap="square" lIns="0" tIns="0" rIns="0" bIns="0" rtlCol="0" anchor="ctr"/>
-          <a:lstStyle/>
-          <a:p>
-            <a:pPr indent="0" marL="0">
-              <a:lnSpc>
-                <a:spcPts val="2200"/>
-              </a:lnSpc>
-              <a:buNone/>
-            </a:pPr>
-            <a:r>
-              <a:rPr lang="en-US" sz="1500" dirty="0">
-                <a:solidFill>
-                  <a:srgbClr val="9DB0A6"/>
-                </a:solidFill>
-                <a:latin typeface="Calibri" pitchFamily="34" charset="0"/>
-                <a:ea typeface="Calibri" pitchFamily="34" charset="-122"/>
-                <a:cs typeface="Calibri" pitchFamily="34" charset="-120"/>
-              </a:rPr>
-              <a:t>O concorrente cobra licença mensal POR CÂMERA, porque o vídeo dele roda na nuvem dele. O nosso roda na borda, e o que sobe para a nuvem é uma linha de texto.</a:t>
-            </a:r>
-            <a:endParaRPr lang="en-US" sz="1500" dirty="0"/>
-          </a:p>
-        </p:txBody>
-      </p:sp>
-      <p:sp>
-        <p:nvSpPr>
-          <p:cNvPr id="5" name="Text 3"/>
-          <p:cNvSpPr txBox="1"/>
-          <p:nvPr/>
-        </p:nvSpPr>
-        <p:spPr>
-          <a:xfrm>
-            <a:off x="685800" y="3246120"/>
-            <a:ext cx="5120640" cy="320040"/>
-          </a:xfrm>
-          <a:prstGeom prst="rect">
-            <a:avLst/>
-          </a:prstGeom>
-          <a:noFill/>
-          <a:ln/>
-        </p:spPr>
-        <p:txBody>
-          <a:bodyPr wrap="square" lIns="0" tIns="0" rIns="0" bIns="0" rtlCol="0" anchor="ctr"/>
-          <a:lstStyle/>
-          <a:p>
-            <a:pPr indent="0" marL="0">
-              <a:buNone/>
-            </a:pPr>
-            <a:r>
-              <a:rPr lang="en-US" sz="1800" b="1" dirty="0">
-                <a:solidFill>
-                  <a:srgbClr val="EDF3EF"/>
-                </a:solidFill>
-                <a:latin typeface="Arial" pitchFamily="34" charset="0"/>
-                <a:ea typeface="Arial" pitchFamily="34" charset="-122"/>
-                <a:cs typeface="Arial" pitchFamily="34" charset="-120"/>
-              </a:rPr>
-              <a:t>O que custa</a:t>
-            </a:r>
-            <a:endParaRPr lang="en-US" sz="1800" dirty="0"/>
-          </a:p>
-        </p:txBody>
-      </p:sp>
-      <p:sp>
-        <p:nvSpPr>
-          <p:cNvPr id="6" name="Shape 4"/>
+          <p:cNvPr id="4" name="Shape 2"/>
           <p:cNvSpPr/>
           <p:nvPr/>
         </p:nvSpPr>
         <p:spPr>
           <a:xfrm>
-            <a:off x="685800" y="3703320"/>
-            <a:ext cx="5120640" cy="0"/>
-          </a:xfrm>
-          <a:prstGeom prst="line">
-            <a:avLst/>
-          </a:prstGeom>
-          <a:noFill/>
-          <a:ln w="12700">
-            <a:solidFill>
-              <a:srgbClr val="24322B"/>
-            </a:solidFill>
-            <a:prstDash val="solid"/>
-          </a:ln>
-        </p:spPr>
-      </p:sp>
-      <p:sp>
-        <p:nvSpPr>
-          <p:cNvPr id="7" name="Text 5"/>
-          <p:cNvSpPr txBox="1"/>
-          <p:nvPr/>
-        </p:nvSpPr>
-        <p:spPr>
-          <a:xfrm>
-            <a:off x="685800" y="3785616"/>
-            <a:ext cx="3017520" cy="320040"/>
-          </a:xfrm>
-          <a:prstGeom prst="rect">
-            <a:avLst/>
-          </a:prstGeom>
-          <a:noFill/>
-          <a:ln/>
-        </p:spPr>
-        <p:txBody>
-          <a:bodyPr wrap="square" lIns="0" tIns="0" rIns="0" bIns="0" rtlCol="0" anchor="ctr"/>
-          <a:lstStyle/>
-          <a:p>
-            <a:pPr indent="0" marL="0">
-              <a:buNone/>
-            </a:pPr>
-            <a:r>
-              <a:rPr lang="en-US" sz="1300" b="1" dirty="0">
-                <a:solidFill>
-                  <a:srgbClr val="EDF3EF"/>
-                </a:solidFill>
-                <a:latin typeface="Arial" pitchFamily="34" charset="0"/>
-                <a:ea typeface="Arial" pitchFamily="34" charset="-122"/>
-                <a:cs typeface="Arial" pitchFamily="34" charset="-120"/>
-              </a:rPr>
-              <a:t>Câmera IP, por sala</a:t>
-            </a:r>
-            <a:endParaRPr lang="en-US" sz="1300" dirty="0"/>
-          </a:p>
-        </p:txBody>
-      </p:sp>
-      <p:sp>
-        <p:nvSpPr>
-          <p:cNvPr id="8" name="Text 6"/>
-          <p:cNvSpPr txBox="1"/>
-          <p:nvPr/>
-        </p:nvSpPr>
-        <p:spPr>
-          <a:xfrm>
-            <a:off x="3703320" y="3803904"/>
-            <a:ext cx="2103120" cy="292608"/>
-          </a:xfrm>
-          <a:prstGeom prst="rect">
-            <a:avLst/>
-          </a:prstGeom>
-          <a:noFill/>
-          <a:ln/>
-        </p:spPr>
-        <p:txBody>
-          <a:bodyPr wrap="square" lIns="0" tIns="0" rIns="0" bIns="0" rtlCol="0" anchor="ctr"/>
-          <a:lstStyle/>
-          <a:p>
-            <a:pPr algn="r" indent="0" marL="0">
-              <a:buNone/>
-            </a:pPr>
-            <a:r>
-              <a:rPr lang="en-US" sz="1100" dirty="0">
-                <a:solidFill>
-                  <a:srgbClr val="9DB0A6"/>
-                </a:solidFill>
-                <a:latin typeface="Courier New" pitchFamily="34" charset="0"/>
-                <a:ea typeface="Courier New" pitchFamily="34" charset="-122"/>
-                <a:cs typeface="Courier New" pitchFamily="34" charset="-120"/>
-              </a:rPr>
-              <a:t>R$ 200 a R$ 680</a:t>
-            </a:r>
-            <a:endParaRPr lang="en-US" sz="1100" dirty="0"/>
-          </a:p>
-        </p:txBody>
-      </p:sp>
-      <p:sp>
-        <p:nvSpPr>
-          <p:cNvPr id="9" name="Shape 7"/>
-          <p:cNvSpPr/>
-          <p:nvPr/>
-        </p:nvSpPr>
-        <p:spPr>
-          <a:xfrm>
-            <a:off x="685800" y="4178808"/>
-            <a:ext cx="5120640" cy="0"/>
-          </a:xfrm>
-          <a:prstGeom prst="line">
-            <a:avLst/>
-          </a:prstGeom>
-          <a:noFill/>
-          <a:ln w="12700">
-            <a:solidFill>
-              <a:srgbClr val="24322B"/>
-            </a:solidFill>
-            <a:prstDash val="solid"/>
-          </a:ln>
-        </p:spPr>
-      </p:sp>
-      <p:sp>
-        <p:nvSpPr>
-          <p:cNvPr id="10" name="Text 8"/>
-          <p:cNvSpPr txBox="1"/>
-          <p:nvPr/>
-        </p:nvSpPr>
-        <p:spPr>
-          <a:xfrm>
-            <a:off x="685800" y="4261104"/>
-            <a:ext cx="3017520" cy="320040"/>
-          </a:xfrm>
-          <a:prstGeom prst="rect">
-            <a:avLst/>
-          </a:prstGeom>
-          <a:noFill/>
-          <a:ln/>
-        </p:spPr>
-        <p:txBody>
-          <a:bodyPr wrap="square" lIns="0" tIns="0" rIns="0" bIns="0" rtlCol="0" anchor="ctr"/>
-          <a:lstStyle/>
-          <a:p>
-            <a:pPr indent="0" marL="0">
-              <a:buNone/>
-            </a:pPr>
-            <a:r>
-              <a:rPr lang="en-US" sz="1300" b="1" dirty="0">
-                <a:solidFill>
-                  <a:srgbClr val="EDF3EF"/>
-                </a:solidFill>
-                <a:latin typeface="Arial" pitchFamily="34" charset="0"/>
-                <a:ea typeface="Arial" pitchFamily="34" charset="-122"/>
-                <a:cs typeface="Arial" pitchFamily="34" charset="-120"/>
-              </a:rPr>
-              <a:t>Servidor</a:t>
-            </a:r>
-            <a:endParaRPr lang="en-US" sz="1300" dirty="0"/>
-          </a:p>
-        </p:txBody>
-      </p:sp>
-      <p:sp>
-        <p:nvSpPr>
-          <p:cNvPr id="11" name="Text 9"/>
-          <p:cNvSpPr txBox="1"/>
-          <p:nvPr/>
-        </p:nvSpPr>
-        <p:spPr>
-          <a:xfrm>
-            <a:off x="3703320" y="4279392"/>
-            <a:ext cx="2103120" cy="292608"/>
-          </a:xfrm>
-          <a:prstGeom prst="rect">
-            <a:avLst/>
-          </a:prstGeom>
-          <a:noFill/>
-          <a:ln/>
-        </p:spPr>
-        <p:txBody>
-          <a:bodyPr wrap="square" lIns="0" tIns="0" rIns="0" bIns="0" rtlCol="0" anchor="ctr"/>
-          <a:lstStyle/>
-          <a:p>
-            <a:pPr algn="r" indent="0" marL="0">
-              <a:buNone/>
-            </a:pPr>
-            <a:r>
-              <a:rPr lang="en-US" sz="1100" dirty="0">
-                <a:solidFill>
-                  <a:srgbClr val="9DB0A6"/>
-                </a:solidFill>
-                <a:latin typeface="Courier New" pitchFamily="34" charset="0"/>
-                <a:ea typeface="Courier New" pitchFamily="34" charset="-122"/>
-                <a:cs typeface="Courier New" pitchFamily="34" charset="-120"/>
-              </a:rPr>
-              <a:t>1 PC comum por escola</a:t>
-            </a:r>
-            <a:endParaRPr lang="en-US" sz="1100" dirty="0"/>
-          </a:p>
-        </p:txBody>
-      </p:sp>
-      <p:sp>
-        <p:nvSpPr>
-          <p:cNvPr id="12" name="Shape 10"/>
-          <p:cNvSpPr/>
-          <p:nvPr/>
-        </p:nvSpPr>
-        <p:spPr>
-          <a:xfrm>
-            <a:off x="685800" y="4654296"/>
-            <a:ext cx="5120640" cy="0"/>
-          </a:xfrm>
-          <a:prstGeom prst="line">
-            <a:avLst/>
-          </a:prstGeom>
-          <a:noFill/>
-          <a:ln w="12700">
-            <a:solidFill>
-              <a:srgbClr val="24322B"/>
-            </a:solidFill>
-            <a:prstDash val="solid"/>
-          </a:ln>
-        </p:spPr>
-      </p:sp>
-      <p:sp>
-        <p:nvSpPr>
-          <p:cNvPr id="13" name="Text 11"/>
-          <p:cNvSpPr txBox="1"/>
-          <p:nvPr/>
-        </p:nvSpPr>
-        <p:spPr>
-          <a:xfrm>
-            <a:off x="685800" y="4736592"/>
-            <a:ext cx="3017520" cy="320040"/>
-          </a:xfrm>
-          <a:prstGeom prst="rect">
-            <a:avLst/>
-          </a:prstGeom>
-          <a:noFill/>
-          <a:ln/>
-        </p:spPr>
-        <p:txBody>
-          <a:bodyPr wrap="square" lIns="0" tIns="0" rIns="0" bIns="0" rtlCol="0" anchor="ctr"/>
-          <a:lstStyle/>
-          <a:p>
-            <a:pPr indent="0" marL="0">
-              <a:buNone/>
-            </a:pPr>
-            <a:r>
-              <a:rPr lang="en-US" sz="1300" b="1" dirty="0">
-                <a:solidFill>
-                  <a:srgbClr val="EDF3EF"/>
-                </a:solidFill>
-                <a:latin typeface="Arial" pitchFamily="34" charset="0"/>
-                <a:ea typeface="Arial" pitchFamily="34" charset="-122"/>
-                <a:cs typeface="Arial" pitchFamily="34" charset="-120"/>
-              </a:rPr>
-              <a:t>Licença de software</a:t>
-            </a:r>
-            <a:endParaRPr lang="en-US" sz="1300" dirty="0"/>
-          </a:p>
-        </p:txBody>
-      </p:sp>
-      <p:sp>
-        <p:nvSpPr>
-          <p:cNvPr id="14" name="Text 12"/>
-          <p:cNvSpPr txBox="1"/>
-          <p:nvPr/>
-        </p:nvSpPr>
-        <p:spPr>
-          <a:xfrm>
-            <a:off x="3703320" y="4754880"/>
-            <a:ext cx="2103120" cy="292608"/>
-          </a:xfrm>
-          <a:prstGeom prst="rect">
-            <a:avLst/>
-          </a:prstGeom>
-          <a:noFill/>
-          <a:ln/>
-        </p:spPr>
-        <p:txBody>
-          <a:bodyPr wrap="square" lIns="0" tIns="0" rIns="0" bIns="0" rtlCol="0" anchor="ctr"/>
-          <a:lstStyle/>
-          <a:p>
-            <a:pPr algn="r" indent="0" marL="0">
-              <a:buNone/>
-            </a:pPr>
-            <a:r>
-              <a:rPr lang="en-US" sz="1100" dirty="0">
-                <a:solidFill>
-                  <a:srgbClr val="3FBF5A"/>
-                </a:solidFill>
-                <a:latin typeface="Courier New" pitchFamily="34" charset="0"/>
-                <a:ea typeface="Courier New" pitchFamily="34" charset="-122"/>
-                <a:cs typeface="Courier New" pitchFamily="34" charset="-120"/>
-              </a:rPr>
-              <a:t>R$ 0 por câmera</a:t>
-            </a:r>
-            <a:endParaRPr lang="en-US" sz="1100" dirty="0"/>
-          </a:p>
-        </p:txBody>
-      </p:sp>
-      <p:sp>
-        <p:nvSpPr>
-          <p:cNvPr id="15" name="Shape 13"/>
-          <p:cNvSpPr/>
-          <p:nvPr/>
-        </p:nvSpPr>
-        <p:spPr>
-          <a:xfrm>
-            <a:off x="685800" y="5129784"/>
-            <a:ext cx="5120640" cy="0"/>
-          </a:xfrm>
-          <a:prstGeom prst="line">
-            <a:avLst/>
-          </a:prstGeom>
-          <a:noFill/>
-          <a:ln w="12700">
-            <a:solidFill>
-              <a:srgbClr val="24322B"/>
-            </a:solidFill>
-            <a:prstDash val="solid"/>
-          </a:ln>
-        </p:spPr>
-      </p:sp>
-      <p:sp>
-        <p:nvSpPr>
-          <p:cNvPr id="16" name="Text 14"/>
-          <p:cNvSpPr txBox="1"/>
-          <p:nvPr/>
-        </p:nvSpPr>
-        <p:spPr>
-          <a:xfrm>
-            <a:off x="685800" y="5212080"/>
-            <a:ext cx="3017520" cy="320040"/>
-          </a:xfrm>
-          <a:prstGeom prst="rect">
-            <a:avLst/>
-          </a:prstGeom>
-          <a:noFill/>
-          <a:ln/>
-        </p:spPr>
-        <p:txBody>
-          <a:bodyPr wrap="square" lIns="0" tIns="0" rIns="0" bIns="0" rtlCol="0" anchor="ctr"/>
-          <a:lstStyle/>
-          <a:p>
-            <a:pPr indent="0" marL="0">
-              <a:buNone/>
-            </a:pPr>
-            <a:r>
-              <a:rPr lang="en-US" sz="1300" b="1" dirty="0">
-                <a:solidFill>
-                  <a:srgbClr val="EDF3EF"/>
-                </a:solidFill>
-                <a:latin typeface="Arial" pitchFamily="34" charset="0"/>
-                <a:ea typeface="Arial" pitchFamily="34" charset="-122"/>
-                <a:cs typeface="Arial" pitchFamily="34" charset="-120"/>
-              </a:rPr>
-              <a:t>Nuvem do alerta</a:t>
-            </a:r>
-            <a:endParaRPr lang="en-US" sz="1300" dirty="0"/>
-          </a:p>
-        </p:txBody>
-      </p:sp>
-      <p:sp>
-        <p:nvSpPr>
-          <p:cNvPr id="17" name="Text 15"/>
-          <p:cNvSpPr txBox="1"/>
-          <p:nvPr/>
-        </p:nvSpPr>
-        <p:spPr>
-          <a:xfrm>
-            <a:off x="3703320" y="5230368"/>
-            <a:ext cx="2103120" cy="292608"/>
-          </a:xfrm>
-          <a:prstGeom prst="rect">
-            <a:avLst/>
-          </a:prstGeom>
-          <a:noFill/>
-          <a:ln/>
-        </p:spPr>
-        <p:txBody>
-          <a:bodyPr wrap="square" lIns="0" tIns="0" rIns="0" bIns="0" rtlCol="0" anchor="ctr"/>
-          <a:lstStyle/>
-          <a:p>
-            <a:pPr algn="r" indent="0" marL="0">
-              <a:buNone/>
-            </a:pPr>
-            <a:r>
-              <a:rPr lang="en-US" sz="1100" dirty="0">
-                <a:solidFill>
-                  <a:srgbClr val="3FBF5A"/>
-                </a:solidFill>
-                <a:latin typeface="Courier New" pitchFamily="34" charset="0"/>
-                <a:ea typeface="Courier New" pitchFamily="34" charset="-122"/>
-                <a:cs typeface="Courier New" pitchFamily="34" charset="-120"/>
-              </a:rPr>
-              <a:t>centavos por mês</a:t>
-            </a:r>
-            <a:endParaRPr lang="en-US" sz="1100" dirty="0"/>
-          </a:p>
-        </p:txBody>
-      </p:sp>
-      <p:sp>
-        <p:nvSpPr>
-          <p:cNvPr id="18" name="Shape 16"/>
-          <p:cNvSpPr/>
-          <p:nvPr/>
-        </p:nvSpPr>
-        <p:spPr>
-          <a:xfrm>
-            <a:off x="685800" y="5605272"/>
-            <a:ext cx="5120640" cy="0"/>
-          </a:xfrm>
-          <a:prstGeom prst="line">
-            <a:avLst/>
-          </a:prstGeom>
-          <a:noFill/>
-          <a:ln w="12700">
-            <a:solidFill>
-              <a:srgbClr val="24322B"/>
-            </a:solidFill>
-            <a:prstDash val="solid"/>
-          </a:ln>
-        </p:spPr>
-      </p:sp>
-      <p:sp>
-        <p:nvSpPr>
-          <p:cNvPr id="19" name="Text 17"/>
-          <p:cNvSpPr txBox="1"/>
-          <p:nvPr/>
-        </p:nvSpPr>
-        <p:spPr>
-          <a:xfrm>
-            <a:off x="685800" y="5687568"/>
-            <a:ext cx="5120640" cy="365760"/>
-          </a:xfrm>
-          <a:prstGeom prst="rect">
-            <a:avLst/>
-          </a:prstGeom>
-          <a:noFill/>
-          <a:ln/>
-        </p:spPr>
-        <p:txBody>
-          <a:bodyPr wrap="square" lIns="0" tIns="0" rIns="0" bIns="0" rtlCol="0" anchor="ctr"/>
-          <a:lstStyle/>
-          <a:p>
-            <a:pPr indent="0" marL="0">
-              <a:lnSpc>
-                <a:spcPts val="1300"/>
-              </a:lnSpc>
-              <a:buNone/>
-            </a:pPr>
-            <a:r>
-              <a:rPr lang="en-US" sz="900" dirty="0">
-                <a:solidFill>
-                  <a:srgbClr val="6A7D74"/>
-                </a:solidFill>
-                <a:latin typeface="Courier New" pitchFamily="34" charset="0"/>
-                <a:ea typeface="Courier New" pitchFamily="34" charset="-122"/>
-                <a:cs typeface="Courier New" pitchFamily="34" charset="-120"/>
-              </a:rPr>
-              <a:t>sem placa de vídeo, sem custo por fluxo, sem mensalidade que cresce com a escola</a:t>
-            </a:r>
-            <a:endParaRPr lang="en-US" sz="900" dirty="0"/>
-          </a:p>
-        </p:txBody>
-      </p:sp>
-      <p:sp>
-        <p:nvSpPr>
-          <p:cNvPr id="20" name="Text 18"/>
-          <p:cNvSpPr txBox="1"/>
-          <p:nvPr/>
-        </p:nvSpPr>
-        <p:spPr>
-          <a:xfrm>
-            <a:off x="6492240" y="3246120"/>
-            <a:ext cx="5029200" cy="320040"/>
-          </a:xfrm>
-          <a:prstGeom prst="rect">
-            <a:avLst/>
-          </a:prstGeom>
-          <a:noFill/>
-          <a:ln/>
-        </p:spPr>
-        <p:txBody>
-          <a:bodyPr wrap="square" lIns="0" tIns="0" rIns="0" bIns="0" rtlCol="0" anchor="ctr"/>
-          <a:lstStyle/>
-          <a:p>
-            <a:pPr indent="0" marL="0">
-              <a:buNone/>
-            </a:pPr>
-            <a:r>
-              <a:rPr lang="en-US" sz="1800" b="1" dirty="0">
-                <a:solidFill>
-                  <a:srgbClr val="EDF3EF"/>
-                </a:solidFill>
-                <a:latin typeface="Arial" pitchFamily="34" charset="0"/>
-                <a:ea typeface="Arial" pitchFamily="34" charset="-122"/>
-                <a:cs typeface="Arial" pitchFamily="34" charset="-120"/>
-              </a:rPr>
-              <a:t>Como entra no mercado</a:t>
-            </a:r>
-            <a:endParaRPr lang="en-US" sz="1800" dirty="0"/>
-          </a:p>
-        </p:txBody>
-      </p:sp>
-      <p:sp>
-        <p:nvSpPr>
-          <p:cNvPr id="21" name="Shape 19"/>
-          <p:cNvSpPr/>
-          <p:nvPr/>
-        </p:nvSpPr>
-        <p:spPr>
-          <a:xfrm>
-            <a:off x="6492240" y="3721608"/>
-            <a:ext cx="292608" cy="292608"/>
-          </a:xfrm>
-          <a:prstGeom prst="ellipse">
-            <a:avLst/>
+            <a:off x="685800" y="3017520"/>
+            <a:ext cx="3410712" cy="2788920"/>
+          </a:xfrm>
+          <a:prstGeom prst="roundRect">
+            <a:avLst>
+              <a:gd name="adj" fmla="val 3279"/>
+            </a:avLst>
           </a:prstGeom>
           <a:solidFill>
-            <a:srgbClr val="0B100E"/>
+            <a:srgbClr val="17211C"/>
           </a:solidFill>
           <a:ln w="12700">
             <a:solidFill>
@@ -3906,30 +3637,30 @@
       </p:sp>
       <p:sp>
         <p:nvSpPr>
-          <p:cNvPr id="22" name="Text 20"/>
-          <p:cNvSpPr txBox="1"/>
-          <p:nvPr/>
-        </p:nvSpPr>
-        <p:spPr>
-          <a:xfrm>
-            <a:off x="6492240" y="3749040"/>
-            <a:ext cx="292608" cy="237744"/>
-          </a:xfrm>
-          <a:prstGeom prst="rect">
-            <a:avLst/>
-          </a:prstGeom>
-          <a:noFill/>
-          <a:ln/>
-        </p:spPr>
-        <p:txBody>
-          <a:bodyPr wrap="square" lIns="0" tIns="0" rIns="0" bIns="0" rtlCol="0" anchor="ctr"/>
-          <a:lstStyle/>
-          <a:p>
-            <a:pPr algn="ctr" indent="0" marL="0">
-              <a:buNone/>
-            </a:pPr>
-            <a:r>
-              <a:rPr lang="en-US" sz="1000" dirty="0">
+          <p:cNvPr id="5" name="Text 3"/>
+          <p:cNvSpPr txBox="1"/>
+          <p:nvPr/>
+        </p:nvSpPr>
+        <p:spPr>
+          <a:xfrm>
+            <a:off x="941832" y="3246120"/>
+            <a:ext cx="2926080" cy="228600"/>
+          </a:xfrm>
+          <a:prstGeom prst="rect">
+            <a:avLst/>
+          </a:prstGeom>
+          <a:noFill/>
+          <a:ln/>
+        </p:spPr>
+        <p:txBody>
+          <a:bodyPr wrap="square" lIns="0" tIns="0" rIns="0" bIns="0" rtlCol="0" anchor="ctr"/>
+          <a:lstStyle/>
+          <a:p>
+            <a:pPr indent="0" marL="0">
+              <a:buNone/>
+            </a:pPr>
+            <a:r>
+              <a:rPr lang="en-US" sz="950" spc="150" kern="0" dirty="0">
                 <a:solidFill>
                   <a:srgbClr val="3FBF5A"/>
                 </a:solidFill>
@@ -3937,38 +3668,41 @@
                 <a:ea typeface="Courier New" pitchFamily="34" charset="-122"/>
                 <a:cs typeface="Courier New" pitchFamily="34" charset="-120"/>
               </a:rPr>
-              <a:t>1</a:t>
-            </a:r>
-            <a:endParaRPr lang="en-US" sz="1000" dirty="0"/>
-          </a:p>
-        </p:txBody>
-      </p:sp>
-      <p:sp>
-        <p:nvSpPr>
-          <p:cNvPr id="23" name="Text 21"/>
-          <p:cNvSpPr txBox="1"/>
-          <p:nvPr/>
-        </p:nvSpPr>
-        <p:spPr>
-          <a:xfrm>
-            <a:off x="6949440" y="3703320"/>
-            <a:ext cx="4572000" cy="274320"/>
-          </a:xfrm>
-          <a:prstGeom prst="rect">
-            <a:avLst/>
-          </a:prstGeom>
-          <a:noFill/>
-          <a:ln/>
-        </p:spPr>
-        <p:txBody>
-          <a:bodyPr wrap="square" lIns="0" tIns="0" rIns="0" bIns="0" rtlCol="0" anchor="ctr"/>
-          <a:lstStyle/>
-          <a:p>
-            <a:pPr indent="0" marL="0">
-              <a:buNone/>
-            </a:pPr>
-            <a:r>
-              <a:rPr lang="en-US" sz="1400" b="1" dirty="0">
+              <a:t>O QUE FAZ ASSINAR</a:t>
+            </a:r>
+            <a:endParaRPr lang="en-US" sz="950" dirty="0"/>
+          </a:p>
+        </p:txBody>
+      </p:sp>
+      <p:sp>
+        <p:nvSpPr>
+          <p:cNvPr id="6" name="Text 4"/>
+          <p:cNvSpPr txBox="1"/>
+          <p:nvPr/>
+        </p:nvSpPr>
+        <p:spPr>
+          <a:xfrm>
+            <a:off x="941832" y="3520440"/>
+            <a:ext cx="2926080" cy="685800"/>
+          </a:xfrm>
+          <a:prstGeom prst="rect">
+            <a:avLst/>
+          </a:prstGeom>
+          <a:noFill/>
+          <a:ln/>
+        </p:spPr>
+        <p:txBody>
+          <a:bodyPr wrap="square" lIns="0" tIns="0" rIns="0" bIns="0" rtlCol="0" anchor="ctr"/>
+          <a:lstStyle/>
+          <a:p>
+            <a:pPr indent="0" marL="0">
+              <a:lnSpc>
+                <a:spcPts val="2100"/>
+              </a:lnSpc>
+              <a:buNone/>
+            </a:pPr>
+            <a:r>
+              <a:rPr lang="en-US" sz="1700" b="1" dirty="0">
                 <a:solidFill>
                   <a:srgbClr val="EDF3EF"/>
                 </a:solidFill>
@@ -3976,41 +3710,61 @@
                 <a:ea typeface="Arial" pitchFamily="34" charset="-122"/>
                 <a:cs typeface="Arial" pitchFamily="34" charset="-120"/>
               </a:rPr>
-              <a:t>Uma escola, de graça</a:t>
-            </a:r>
-            <a:endParaRPr lang="en-US" sz="1400" dirty="0"/>
-          </a:p>
-        </p:txBody>
-      </p:sp>
-      <p:sp>
-        <p:nvSpPr>
-          <p:cNvPr id="24" name="Text 22"/>
-          <p:cNvSpPr txBox="1"/>
-          <p:nvPr/>
-        </p:nvSpPr>
-        <p:spPr>
-          <a:xfrm>
-            <a:off x="6949440" y="3977640"/>
-            <a:ext cx="4572000" cy="502920"/>
-          </a:xfrm>
-          <a:prstGeom prst="rect">
-            <a:avLst/>
-          </a:prstGeom>
-          <a:noFill/>
-          <a:ln/>
-        </p:spPr>
-        <p:txBody>
-          <a:bodyPr wrap="square" lIns="0" tIns="0" rIns="0" bIns="0" rtlCol="0" anchor="ctr"/>
-          <a:lstStyle/>
+              <a:t>Risco jurídico,</a:t>
+            </a:r>
+            <a:endParaRPr lang="en-US" sz="1700" dirty="0"/>
+          </a:p>
           <a:p>
             <a:pPr indent="0" marL="0">
               <a:lnSpc>
-                <a:spcPts val="1400"/>
+                <a:spcPts val="2100"/>
               </a:lnSpc>
               <a:buNone/>
             </a:pPr>
             <a:r>
-              <a:rPr lang="en-US" sz="1150" dirty="0">
+              <a:rPr lang="en-US" sz="1700" b="1" dirty="0">
+                <a:solidFill>
+                  <a:srgbClr val="EDF3EF"/>
+                </a:solidFill>
+                <a:latin typeface="Arial" pitchFamily="34" charset="0"/>
+                <a:ea typeface="Arial" pitchFamily="34" charset="-122"/>
+                <a:cs typeface="Arial" pitchFamily="34" charset="-120"/>
+              </a:rPr>
+              <a:t>não segurança</a:t>
+            </a:r>
+            <a:endParaRPr lang="en-US" sz="1700" dirty="0"/>
+          </a:p>
+        </p:txBody>
+      </p:sp>
+      <p:sp>
+        <p:nvSpPr>
+          <p:cNvPr id="7" name="Text 5"/>
+          <p:cNvSpPr txBox="1"/>
+          <p:nvPr/>
+        </p:nvSpPr>
+        <p:spPr>
+          <a:xfrm>
+            <a:off x="941832" y="4279392"/>
+            <a:ext cx="2926080" cy="1234440"/>
+          </a:xfrm>
+          <a:prstGeom prst="rect">
+            <a:avLst/>
+          </a:prstGeom>
+          <a:noFill/>
+          <a:ln/>
+        </p:spPr>
+        <p:txBody>
+          <a:bodyPr wrap="square" lIns="0" tIns="0" rIns="0" bIns="0" rtlCol="0" anchor="ctr"/>
+          <a:lstStyle/>
+          <a:p>
+            <a:pPr indent="0" marL="0">
+              <a:lnSpc>
+                <a:spcPts val="1600"/>
+              </a:lnSpc>
+              <a:buNone/>
+            </a:pPr>
+            <a:r>
+              <a:rPr lang="en-US" sz="1200" dirty="0">
                 <a:solidFill>
                   <a:srgbClr val="9DB0A6"/>
                 </a:solidFill>
@@ -4018,28 +3772,69 @@
                 <a:ea typeface="Calibri" pitchFamily="34" charset="-122"/>
                 <a:cs typeface="Calibri" pitchFamily="34" charset="-120"/>
               </a:rPr>
-              <a:t>Em troca do dado que falta: quantos alertas por dia a coordenação aguenta, e quantos foram engano.</a:t>
-            </a:r>
-            <a:endParaRPr lang="en-US" sz="1150" dirty="0"/>
-          </a:p>
-        </p:txBody>
-      </p:sp>
-      <p:sp>
-        <p:nvSpPr>
-          <p:cNvPr id="25" name="Shape 23"/>
+              <a:t>O medo real de uma mantenedora não é perder uma queda. É o processo depois. Registro que denuncia adulteração, imagem com prazo, acesso rastreado e biometria com vencimento reduzem exposição.</a:t>
+            </a:r>
+            <a:endParaRPr lang="en-US" sz="1200" dirty="0"/>
+          </a:p>
+        </p:txBody>
+      </p:sp>
+      <p:sp>
+        <p:nvSpPr>
+          <p:cNvPr id="8" name="Text 6"/>
+          <p:cNvSpPr txBox="1"/>
+          <p:nvPr/>
+        </p:nvSpPr>
+        <p:spPr>
+          <a:xfrm>
+            <a:off x="941832" y="5440680"/>
+            <a:ext cx="2926080" cy="320040"/>
+          </a:xfrm>
+          <a:prstGeom prst="rect">
+            <a:avLst/>
+          </a:prstGeom>
+          <a:noFill/>
+          <a:ln/>
+        </p:spPr>
+        <p:txBody>
+          <a:bodyPr wrap="square" lIns="0" tIns="0" rIns="0" bIns="0" rtlCol="0" anchor="ctr"/>
+          <a:lstStyle/>
+          <a:p>
+            <a:pPr indent="0" marL="0">
+              <a:buNone/>
+            </a:pPr>
+            <a:r>
+              <a:rPr lang="en-US" sz="850" dirty="0">
+                <a:solidFill>
+                  <a:srgbClr val="6A7D74"/>
+                </a:solidFill>
+                <a:latin typeface="Courier New" pitchFamily="34" charset="0"/>
+                <a:ea typeface="Courier New" pitchFamily="34" charset="-122"/>
+                <a:cs typeface="Courier New" pitchFamily="34" charset="-120"/>
+              </a:rPr>
+              <a:t>LGPD, e a disputa judicial que vem depois</a:t>
+            </a:r>
+            <a:endParaRPr lang="en-US" sz="850" dirty="0"/>
+          </a:p>
+        </p:txBody>
+      </p:sp>
+      <p:sp>
+        <p:nvSpPr>
+          <p:cNvPr id="9" name="Shape 7"/>
           <p:cNvSpPr/>
           <p:nvPr/>
         </p:nvSpPr>
         <p:spPr>
           <a:xfrm>
-            <a:off x="6492240" y="4498848"/>
-            <a:ext cx="292608" cy="292608"/>
-          </a:xfrm>
-          <a:prstGeom prst="ellipse">
-            <a:avLst/>
+            <a:off x="4370832" y="3017520"/>
+            <a:ext cx="3410712" cy="2788920"/>
+          </a:xfrm>
+          <a:prstGeom prst="roundRect">
+            <a:avLst>
+              <a:gd name="adj" fmla="val 3279"/>
+            </a:avLst>
           </a:prstGeom>
           <a:solidFill>
-            <a:srgbClr val="0B100E"/>
+            <a:srgbClr val="17211C"/>
           </a:solidFill>
           <a:ln w="12700">
             <a:solidFill>
@@ -4051,30 +3846,30 @@
       </p:sp>
       <p:sp>
         <p:nvSpPr>
-          <p:cNvPr id="26" name="Text 24"/>
-          <p:cNvSpPr txBox="1"/>
-          <p:nvPr/>
-        </p:nvSpPr>
-        <p:spPr>
-          <a:xfrm>
-            <a:off x="6492240" y="4526280"/>
-            <a:ext cx="292608" cy="237744"/>
-          </a:xfrm>
-          <a:prstGeom prst="rect">
-            <a:avLst/>
-          </a:prstGeom>
-          <a:noFill/>
-          <a:ln/>
-        </p:spPr>
-        <p:txBody>
-          <a:bodyPr wrap="square" lIns="0" tIns="0" rIns="0" bIns="0" rtlCol="0" anchor="ctr"/>
-          <a:lstStyle/>
-          <a:p>
-            <a:pPr algn="ctr" indent="0" marL="0">
-              <a:buNone/>
-            </a:pPr>
-            <a:r>
-              <a:rPr lang="en-US" sz="1000" dirty="0">
+          <p:cNvPr id="10" name="Text 8"/>
+          <p:cNvSpPr txBox="1"/>
+          <p:nvPr/>
+        </p:nvSpPr>
+        <p:spPr>
+          <a:xfrm>
+            <a:off x="4626864" y="3246120"/>
+            <a:ext cx="2926080" cy="228600"/>
+          </a:xfrm>
+          <a:prstGeom prst="rect">
+            <a:avLst/>
+          </a:prstGeom>
+          <a:noFill/>
+          <a:ln/>
+        </p:spPr>
+        <p:txBody>
+          <a:bodyPr wrap="square" lIns="0" tIns="0" rIns="0" bIns="0" rtlCol="0" anchor="ctr"/>
+          <a:lstStyle/>
+          <a:p>
+            <a:pPr indent="0" marL="0">
+              <a:buNone/>
+            </a:pPr>
+            <a:r>
+              <a:rPr lang="en-US" sz="950" spc="150" kern="0" dirty="0">
                 <a:solidFill>
                   <a:srgbClr val="3FBF5A"/>
                 </a:solidFill>
@@ -4082,38 +3877,41 @@
                 <a:ea typeface="Courier New" pitchFamily="34" charset="-122"/>
                 <a:cs typeface="Courier New" pitchFamily="34" charset="-120"/>
               </a:rPr>
-              <a:t>2</a:t>
-            </a:r>
-            <a:endParaRPr lang="en-US" sz="1000" dirty="0"/>
-          </a:p>
-        </p:txBody>
-      </p:sp>
-      <p:sp>
-        <p:nvSpPr>
-          <p:cNvPr id="27" name="Text 25"/>
-          <p:cNvSpPr txBox="1"/>
-          <p:nvPr/>
-        </p:nvSpPr>
-        <p:spPr>
-          <a:xfrm>
-            <a:off x="6949440" y="4480560"/>
-            <a:ext cx="4572000" cy="274320"/>
-          </a:xfrm>
-          <a:prstGeom prst="rect">
-            <a:avLst/>
-          </a:prstGeom>
-          <a:noFill/>
-          <a:ln/>
-        </p:spPr>
-        <p:txBody>
-          <a:bodyPr wrap="square" lIns="0" tIns="0" rIns="0" bIns="0" rtlCol="0" anchor="ctr"/>
-          <a:lstStyle/>
-          <a:p>
-            <a:pPr indent="0" marL="0">
-              <a:buNone/>
-            </a:pPr>
-            <a:r>
-              <a:rPr lang="en-US" sz="1400" b="1" dirty="0">
+              <a:t>O QUE SALVA</a:t>
+            </a:r>
+            <a:endParaRPr lang="en-US" sz="950" dirty="0"/>
+          </a:p>
+        </p:txBody>
+      </p:sp>
+      <p:sp>
+        <p:nvSpPr>
+          <p:cNvPr id="11" name="Text 9"/>
+          <p:cNvSpPr txBox="1"/>
+          <p:nvPr/>
+        </p:nvSpPr>
+        <p:spPr>
+          <a:xfrm>
+            <a:off x="4626864" y="3520440"/>
+            <a:ext cx="2926080" cy="685800"/>
+          </a:xfrm>
+          <a:prstGeom prst="rect">
+            <a:avLst/>
+          </a:prstGeom>
+          <a:noFill/>
+          <a:ln/>
+        </p:spPr>
+        <p:txBody>
+          <a:bodyPr wrap="square" lIns="0" tIns="0" rIns="0" bIns="0" rtlCol="0" anchor="ctr"/>
+          <a:lstStyle/>
+          <a:p>
+            <a:pPr indent="0" marL="0">
+              <a:lnSpc>
+                <a:spcPts val="2100"/>
+              </a:lnSpc>
+              <a:buNone/>
+            </a:pPr>
+            <a:r>
+              <a:rPr lang="en-US" sz="1700" b="1" dirty="0">
                 <a:solidFill>
                   <a:srgbClr val="EDF3EF"/>
                 </a:solidFill>
@@ -4121,22 +3919,22 @@
                 <a:ea typeface="Arial" pitchFamily="34" charset="-122"/>
                 <a:cs typeface="Arial" pitchFamily="34" charset="-120"/>
               </a:rPr>
-              <a:t>O piloto vira carta</a:t>
-            </a:r>
-            <a:endParaRPr lang="en-US" sz="1400" dirty="0"/>
-          </a:p>
-        </p:txBody>
-      </p:sp>
-      <p:sp>
-        <p:nvSpPr>
-          <p:cNvPr id="28" name="Text 26"/>
-          <p:cNvSpPr txBox="1"/>
-          <p:nvPr/>
-        </p:nvSpPr>
-        <p:spPr>
-          <a:xfrm>
-            <a:off x="6949440" y="4754880"/>
-            <a:ext cx="4572000" cy="502920"/>
+              <a:t>Custo evitado</a:t>
+            </a:r>
+            <a:endParaRPr lang="en-US" sz="1700" dirty="0"/>
+          </a:p>
+        </p:txBody>
+      </p:sp>
+      <p:sp>
+        <p:nvSpPr>
+          <p:cNvPr id="12" name="Text 10"/>
+          <p:cNvSpPr txBox="1"/>
+          <p:nvPr/>
+        </p:nvSpPr>
+        <p:spPr>
+          <a:xfrm>
+            <a:off x="4626864" y="4279392"/>
+            <a:ext cx="2926080" cy="1234440"/>
           </a:xfrm>
           <a:prstGeom prst="rect">
             <a:avLst/>
@@ -4150,12 +3948,12 @@
           <a:p>
             <a:pPr indent="0" marL="0">
               <a:lnSpc>
-                <a:spcPts val="1400"/>
+                <a:spcPts val="1600"/>
               </a:lnSpc>
               <a:buNone/>
             </a:pPr>
             <a:r>
-              <a:rPr lang="en-US" sz="1150" dirty="0">
+              <a:rPr lang="en-US" sz="1200" dirty="0">
                 <a:solidFill>
                   <a:srgbClr val="9DB0A6"/>
                 </a:solidFill>
@@ -4163,28 +3961,69 @@
                 <a:ea typeface="Calibri" pitchFamily="34" charset="-122"/>
                 <a:cs typeface="Calibri" pitchFamily="34" charset="-120"/>
               </a:rPr>
-              <a:t>Um depoimento da coordenação abre a porta da segunda escola melhor que qualquer slide.</a:t>
-            </a:r>
-            <a:endParaRPr lang="en-US" sz="1150" dirty="0"/>
-          </a:p>
-        </p:txBody>
-      </p:sp>
-      <p:sp>
-        <p:nvSpPr>
-          <p:cNvPr id="29" name="Shape 27"/>
+              <a:t>Uma câmera comum só serve depois do fato. O valor está em chegar antes: socorro em segundos em vez de minutos, e uma queda vista no instante em que acontece.</a:t>
+            </a:r>
+            <a:endParaRPr lang="en-US" sz="1200" dirty="0"/>
+          </a:p>
+        </p:txBody>
+      </p:sp>
+      <p:sp>
+        <p:nvSpPr>
+          <p:cNvPr id="13" name="Text 11"/>
+          <p:cNvSpPr txBox="1"/>
+          <p:nvPr/>
+        </p:nvSpPr>
+        <p:spPr>
+          <a:xfrm>
+            <a:off x="4626864" y="5440680"/>
+            <a:ext cx="2926080" cy="320040"/>
+          </a:xfrm>
+          <a:prstGeom prst="rect">
+            <a:avLst/>
+          </a:prstGeom>
+          <a:noFill/>
+          <a:ln/>
+        </p:spPr>
+        <p:txBody>
+          <a:bodyPr wrap="square" lIns="0" tIns="0" rIns="0" bIns="0" rtlCol="0" anchor="ctr"/>
+          <a:lstStyle/>
+          <a:p>
+            <a:pPr indent="0" marL="0">
+              <a:buNone/>
+            </a:pPr>
+            <a:r>
+              <a:rPr lang="en-US" sz="850" dirty="0">
+                <a:solidFill>
+                  <a:srgbClr val="6A7D74"/>
+                </a:solidFill>
+                <a:latin typeface="Courier New" pitchFamily="34" charset="0"/>
+                <a:ea typeface="Courier New" pitchFamily="34" charset="-122"/>
+                <a:cs typeface="Courier New" pitchFamily="34" charset="-120"/>
+              </a:rPr>
+              <a:t>o alerta sai antes de alguém reclamar</a:t>
+            </a:r>
+            <a:endParaRPr lang="en-US" sz="850" dirty="0"/>
+          </a:p>
+        </p:txBody>
+      </p:sp>
+      <p:sp>
+        <p:nvSpPr>
+          <p:cNvPr id="14" name="Shape 12"/>
           <p:cNvSpPr/>
           <p:nvPr/>
         </p:nvSpPr>
         <p:spPr>
           <a:xfrm>
-            <a:off x="6492240" y="5276088"/>
-            <a:ext cx="292608" cy="292608"/>
-          </a:xfrm>
-          <a:prstGeom prst="ellipse">
-            <a:avLst/>
+            <a:off x="8055864" y="3017520"/>
+            <a:ext cx="3410712" cy="2788920"/>
+          </a:xfrm>
+          <a:prstGeom prst="roundRect">
+            <a:avLst>
+              <a:gd name="adj" fmla="val 3279"/>
+            </a:avLst>
           </a:prstGeom>
           <a:solidFill>
-            <a:srgbClr val="0B100E"/>
+            <a:srgbClr val="17211C"/>
           </a:solidFill>
           <a:ln w="12700">
             <a:solidFill>
@@ -4196,30 +4035,30 @@
       </p:sp>
       <p:sp>
         <p:nvSpPr>
-          <p:cNvPr id="30" name="Text 28"/>
-          <p:cNvSpPr txBox="1"/>
-          <p:nvPr/>
-        </p:nvSpPr>
-        <p:spPr>
-          <a:xfrm>
-            <a:off x="6492240" y="5303520"/>
-            <a:ext cx="292608" cy="237744"/>
-          </a:xfrm>
-          <a:prstGeom prst="rect">
-            <a:avLst/>
-          </a:prstGeom>
-          <a:noFill/>
-          <a:ln/>
-        </p:spPr>
-        <p:txBody>
-          <a:bodyPr wrap="square" lIns="0" tIns="0" rIns="0" bIns="0" rtlCol="0" anchor="ctr"/>
-          <a:lstStyle/>
-          <a:p>
-            <a:pPr algn="ctr" indent="0" marL="0">
-              <a:buNone/>
-            </a:pPr>
-            <a:r>
-              <a:rPr lang="en-US" sz="1000" dirty="0">
+          <p:cNvPr id="15" name="Text 13"/>
+          <p:cNvSpPr txBox="1"/>
+          <p:nvPr/>
+        </p:nvSpPr>
+        <p:spPr>
+          <a:xfrm>
+            <a:off x="8311896" y="3246120"/>
+            <a:ext cx="2926080" cy="228600"/>
+          </a:xfrm>
+          <a:prstGeom prst="rect">
+            <a:avLst/>
+          </a:prstGeom>
+          <a:noFill/>
+          <a:ln/>
+        </p:spPr>
+        <p:txBody>
+          <a:bodyPr wrap="square" lIns="0" tIns="0" rIns="0" bIns="0" rtlCol="0" anchor="ctr"/>
+          <a:lstStyle/>
+          <a:p>
+            <a:pPr indent="0" marL="0">
+              <a:buNone/>
+            </a:pPr>
+            <a:r>
+              <a:rPr lang="en-US" sz="950" spc="150" kern="0" dirty="0">
                 <a:solidFill>
                   <a:srgbClr val="3FBF5A"/>
                 </a:solidFill>
@@ -4227,38 +4066,41 @@
                 <a:ea typeface="Courier New" pitchFamily="34" charset="-122"/>
                 <a:cs typeface="Courier New" pitchFamily="34" charset="-120"/>
               </a:rPr>
-              <a:t>3</a:t>
-            </a:r>
-            <a:endParaRPr lang="en-US" sz="1000" dirty="0"/>
-          </a:p>
-        </p:txBody>
-      </p:sp>
-      <p:sp>
-        <p:nvSpPr>
-          <p:cNvPr id="31" name="Text 29"/>
-          <p:cNvSpPr txBox="1"/>
-          <p:nvPr/>
-        </p:nvSpPr>
-        <p:spPr>
-          <a:xfrm>
-            <a:off x="6949440" y="5257800"/>
-            <a:ext cx="4572000" cy="274320"/>
-          </a:xfrm>
-          <a:prstGeom prst="rect">
-            <a:avLst/>
-          </a:prstGeom>
-          <a:noFill/>
-          <a:ln/>
-        </p:spPr>
-        <p:txBody>
-          <a:bodyPr wrap="square" lIns="0" tIns="0" rIns="0" bIns="0" rtlCol="0" anchor="ctr"/>
-          <a:lstStyle/>
-          <a:p>
-            <a:pPr indent="0" marL="0">
-              <a:buNone/>
-            </a:pPr>
-            <a:r>
-              <a:rPr lang="en-US" sz="1400" b="1" dirty="0">
+              <a:t>O QUE SUBSTITUI</a:t>
+            </a:r>
+            <a:endParaRPr lang="en-US" sz="950" dirty="0"/>
+          </a:p>
+        </p:txBody>
+      </p:sp>
+      <p:sp>
+        <p:nvSpPr>
+          <p:cNvPr id="16" name="Text 14"/>
+          <p:cNvSpPr txBox="1"/>
+          <p:nvPr/>
+        </p:nvSpPr>
+        <p:spPr>
+          <a:xfrm>
+            <a:off x="8311896" y="3520440"/>
+            <a:ext cx="2926080" cy="685800"/>
+          </a:xfrm>
+          <a:prstGeom prst="rect">
+            <a:avLst/>
+          </a:prstGeom>
+          <a:noFill/>
+          <a:ln/>
+        </p:spPr>
+        <p:txBody>
+          <a:bodyPr wrap="square" lIns="0" tIns="0" rIns="0" bIns="0" rtlCol="0" anchor="ctr"/>
+          <a:lstStyle/>
+          <a:p>
+            <a:pPr indent="0" marL="0">
+              <a:lnSpc>
+                <a:spcPts val="2100"/>
+              </a:lnSpc>
+              <a:buNone/>
+            </a:pPr>
+            <a:r>
+              <a:rPr lang="en-US" sz="1700" b="1" dirty="0">
                 <a:solidFill>
                   <a:srgbClr val="EDF3EF"/>
                 </a:solidFill>
@@ -4266,22 +4108,22 @@
                 <a:ea typeface="Arial" pitchFamily="34" charset="-122"/>
                 <a:cs typeface="Arial" pitchFamily="34" charset="-120"/>
               </a:rPr>
-              <a:t>Vender para a rede</a:t>
-            </a:r>
-            <a:endParaRPr lang="en-US" sz="1400" dirty="0"/>
-          </a:p>
-        </p:txBody>
-      </p:sp>
-      <p:sp>
-        <p:nvSpPr>
-          <p:cNvPr id="32" name="Text 30"/>
-          <p:cNvSpPr txBox="1"/>
-          <p:nvPr/>
-        </p:nvSpPr>
-        <p:spPr>
-          <a:xfrm>
-            <a:off x="6949440" y="5532120"/>
-            <a:ext cx="4572000" cy="502920"/>
+              <a:t>Licença de nuvem</a:t>
+            </a:r>
+            <a:endParaRPr lang="en-US" sz="1700" dirty="0"/>
+          </a:p>
+        </p:txBody>
+      </p:sp>
+      <p:sp>
+        <p:nvSpPr>
+          <p:cNvPr id="17" name="Text 15"/>
+          <p:cNvSpPr txBox="1"/>
+          <p:nvPr/>
+        </p:nvSpPr>
+        <p:spPr>
+          <a:xfrm>
+            <a:off x="8311896" y="4279392"/>
+            <a:ext cx="2926080" cy="1234440"/>
           </a:xfrm>
           <a:prstGeom prst="rect">
             <a:avLst/>
@@ -4295,12 +4137,12 @@
           <a:p>
             <a:pPr indent="0" marL="0">
               <a:lnSpc>
-                <a:spcPts val="1400"/>
+                <a:spcPts val="1600"/>
               </a:lnSpc>
               <a:buNone/>
             </a:pPr>
             <a:r>
-              <a:rPr lang="en-US" sz="1150" dirty="0">
+              <a:rPr lang="en-US" sz="1200" dirty="0">
                 <a:solidFill>
                   <a:srgbClr val="9DB0A6"/>
                 </a:solidFill>
@@ -4308,41 +4150,38 @@
                 <a:ea typeface="Calibri" pitchFamily="34" charset="-122"/>
                 <a:cs typeface="Calibri" pitchFamily="34" charset="-120"/>
               </a:rPr>
-              <a:t>Grupo educacional tem dezenas de unidades e um decisor só. É para ele que custo marginal quase zero é irresistível.</a:t>
-            </a:r>
-            <a:endParaRPr lang="en-US" sz="1150" dirty="0"/>
-          </a:p>
-        </p:txBody>
-      </p:sp>
-      <p:sp>
-        <p:nvSpPr>
-          <p:cNvPr id="33" name="Text 31"/>
-          <p:cNvSpPr txBox="1"/>
-          <p:nvPr/>
-        </p:nvSpPr>
-        <p:spPr>
-          <a:xfrm>
-            <a:off x="6492240" y="5687568"/>
-            <a:ext cx="5029200" cy="365760"/>
-          </a:xfrm>
-          <a:prstGeom prst="rect">
-            <a:avLst/>
-          </a:prstGeom>
-          <a:noFill/>
-          <a:ln/>
-        </p:spPr>
-        <p:txBody>
-          <a:bodyPr wrap="square" lIns="0" tIns="0" rIns="0" bIns="0" rtlCol="0" anchor="ctr"/>
-          <a:lstStyle/>
-          <a:p>
-            <a:pPr indent="0" marL="0">
-              <a:lnSpc>
-                <a:spcPts val="1300"/>
-              </a:lnSpc>
-              <a:buNone/>
-            </a:pPr>
-            <a:r>
-              <a:rPr lang="en-US" sz="900" dirty="0">
+              <a:t>Se a escola já paga mensalidade por câmera para algum sistema de nuvem, o nosso número entra no lugar dele. E, ao contrário do dele, dá para conferir de onde sai.</a:t>
+            </a:r>
+            <a:endParaRPr lang="en-US" sz="1200" dirty="0"/>
+          </a:p>
+        </p:txBody>
+      </p:sp>
+      <p:sp>
+        <p:nvSpPr>
+          <p:cNvPr id="18" name="Text 16"/>
+          <p:cNvSpPr txBox="1"/>
+          <p:nvPr/>
+        </p:nvSpPr>
+        <p:spPr>
+          <a:xfrm>
+            <a:off x="8311896" y="5440680"/>
+            <a:ext cx="2926080" cy="320040"/>
+          </a:xfrm>
+          <a:prstGeom prst="rect">
+            <a:avLst/>
+          </a:prstGeom>
+          <a:noFill/>
+          <a:ln/>
+        </p:spPr>
+        <p:txBody>
+          <a:bodyPr wrap="square" lIns="0" tIns="0" rIns="0" bIns="0" rtlCol="0" anchor="ctr"/>
+          <a:lstStyle/>
+          <a:p>
+            <a:pPr indent="0" marL="0">
+              <a:buNone/>
+            </a:pPr>
+            <a:r>
+              <a:rPr lang="en-US" sz="850" dirty="0">
                 <a:solidFill>
                   <a:srgbClr val="6A7D74"/>
                 </a:solidFill>
@@ -4350,15 +4189,15 @@
                 <a:ea typeface="Courier New" pitchFamily="34" charset="-122"/>
                 <a:cs typeface="Courier New" pitchFamily="34" charset="-120"/>
               </a:rPr>
-              <a:t>Modelo: assinatura por escola, não por câmera. Expandir deixa de ser uma nova decisão de compra.</a:t>
-            </a:r>
-            <a:endParaRPr lang="en-US" sz="900" dirty="0"/>
-          </a:p>
-        </p:txBody>
-      </p:sp>
-      <p:sp>
-        <p:nvSpPr>
-          <p:cNvPr id="35" name="Text 32"/>
+              <a:t>comparável, e verificável linha a linha</a:t>
+            </a:r>
+            <a:endParaRPr lang="en-US" sz="850" dirty="0"/>
+          </a:p>
+        </p:txBody>
+      </p:sp>
+      <p:sp>
+        <p:nvSpPr>
+          <p:cNvPr id="20" name="Text 17"/>
           <p:cNvSpPr txBox="1"/>
           <p:nvPr/>
         </p:nvSpPr>
@@ -4397,7 +4236,7 @@
       </p:sp>
       <p:sp>
         <p:nvSpPr>
-          <p:cNvPr id="36" name="Text 33"/>
+          <p:cNvPr id="21" name="Text 18"/>
           <p:cNvSpPr txBox="1"/>
           <p:nvPr/>
         </p:nvSpPr>
@@ -4493,13 +4332,13 @@
             <a:r>
               <a:rPr lang="en-US" sz="1100" spc="200" kern="0" dirty="0">
                 <a:solidFill>
-                  <a:srgbClr val="E4572E"/>
+                  <a:srgbClr val="3FBF5A"/>
                 </a:solidFill>
                 <a:latin typeface="Courier New" pitchFamily="34" charset="0"/>
                 <a:ea typeface="Courier New" pitchFamily="34" charset="-122"/>
                 <a:cs typeface="Courier New" pitchFamily="34" charset="-120"/>
               </a:rPr>
-              <a:t>HONESTIDADE INTELECTUAL</a:t>
+              <a:t>VALOR ECONÔMICO E ENTRADA NO MERCADO</a:t>
             </a:r>
             <a:endParaRPr lang="en-US" sz="1100" dirty="0"/>
           </a:p>
@@ -4541,7 +4380,7 @@
                 <a:ea typeface="Arial" pitchFamily="34" charset="-122"/>
                 <a:cs typeface="Arial" pitchFamily="34" charset="-120"/>
               </a:rPr>
-              <a:t>O que ainda não medimos,</a:t>
+              <a:t>O custo de cobrir mais</a:t>
             </a:r>
             <a:endParaRPr lang="en-US" sz="3600" dirty="0"/>
           </a:p>
@@ -4561,7 +4400,7 @@
                 <a:ea typeface="Arial" pitchFamily="34" charset="-122"/>
                 <a:cs typeface="Arial" pitchFamily="34" charset="-120"/>
               </a:rPr>
-              <a:t>e não vamos inventar.</a:t>
+              <a:t>uma sala é uma câmera.</a:t>
             </a:r>
             <a:endParaRPr lang="en-US" sz="3600" dirty="0"/>
           </a:p>
@@ -4575,7 +4414,7 @@
         </p:nvSpPr>
         <p:spPr>
           <a:xfrm>
-            <a:off x="685800" y="2560320"/>
+            <a:off x="685800" y="2514600"/>
             <a:ext cx="10515600" cy="731520"/>
           </a:xfrm>
           <a:prstGeom prst="rect">
@@ -4603,7 +4442,7 @@
                 <a:ea typeface="Calibri" pitchFamily="34" charset="-122"/>
                 <a:cs typeface="Calibri" pitchFamily="34" charset="-120"/>
               </a:rPr>
-              <a:t>Três números que decidem se isto é negócio, e que nenhuma planilha nossa pode responder.</a:t>
+              <a:t>O concorrente cobra licença mensal POR CÂMERA, porque o vídeo dele roda na nuvem dele. O nosso roda na borda, e o que sobe para a nuvem é uma linha de texto.</a:t>
             </a:r>
             <a:endParaRPr lang="en-US" sz="1500" dirty="0"/>
           </a:p>
@@ -4611,19 +4450,564 @@
       </p:sp>
       <p:sp>
         <p:nvSpPr>
-          <p:cNvPr id="5" name="Shape 3"/>
+          <p:cNvPr id="5" name="Text 3"/>
+          <p:cNvSpPr txBox="1"/>
+          <p:nvPr/>
+        </p:nvSpPr>
+        <p:spPr>
+          <a:xfrm>
+            <a:off x="685800" y="3246120"/>
+            <a:ext cx="5120640" cy="320040"/>
+          </a:xfrm>
+          <a:prstGeom prst="rect">
+            <a:avLst/>
+          </a:prstGeom>
+          <a:noFill/>
+          <a:ln/>
+        </p:spPr>
+        <p:txBody>
+          <a:bodyPr wrap="square" lIns="0" tIns="0" rIns="0" bIns="0" rtlCol="0" anchor="ctr"/>
+          <a:lstStyle/>
+          <a:p>
+            <a:pPr indent="0" marL="0">
+              <a:buNone/>
+            </a:pPr>
+            <a:r>
+              <a:rPr lang="en-US" sz="1800" b="1" dirty="0">
+                <a:solidFill>
+                  <a:srgbClr val="EDF3EF"/>
+                </a:solidFill>
+                <a:latin typeface="Arial" pitchFamily="34" charset="0"/>
+                <a:ea typeface="Arial" pitchFamily="34" charset="-122"/>
+                <a:cs typeface="Arial" pitchFamily="34" charset="-120"/>
+              </a:rPr>
+              <a:t>O que custa</a:t>
+            </a:r>
+            <a:endParaRPr lang="en-US" sz="1800" dirty="0"/>
+          </a:p>
+        </p:txBody>
+      </p:sp>
+      <p:sp>
+        <p:nvSpPr>
+          <p:cNvPr id="6" name="Shape 4"/>
           <p:cNvSpPr/>
           <p:nvPr/>
         </p:nvSpPr>
         <p:spPr>
           <a:xfrm>
-            <a:off x="685800" y="3200400"/>
-            <a:ext cx="3410712" cy="1920240"/>
-          </a:xfrm>
-          <a:prstGeom prst="roundRect">
-            <a:avLst>
-              <a:gd name="adj" fmla="val 4762"/>
-            </a:avLst>
+            <a:off x="685800" y="3703320"/>
+            <a:ext cx="5120640" cy="0"/>
+          </a:xfrm>
+          <a:prstGeom prst="line">
+            <a:avLst/>
+          </a:prstGeom>
+          <a:noFill/>
+          <a:ln w="12700">
+            <a:solidFill>
+              <a:srgbClr val="24322B"/>
+            </a:solidFill>
+            <a:prstDash val="solid"/>
+          </a:ln>
+        </p:spPr>
+      </p:sp>
+      <p:sp>
+        <p:nvSpPr>
+          <p:cNvPr id="7" name="Text 5"/>
+          <p:cNvSpPr txBox="1"/>
+          <p:nvPr/>
+        </p:nvSpPr>
+        <p:spPr>
+          <a:xfrm>
+            <a:off x="685800" y="3785616"/>
+            <a:ext cx="3017520" cy="320040"/>
+          </a:xfrm>
+          <a:prstGeom prst="rect">
+            <a:avLst/>
+          </a:prstGeom>
+          <a:noFill/>
+          <a:ln/>
+        </p:spPr>
+        <p:txBody>
+          <a:bodyPr wrap="square" lIns="0" tIns="0" rIns="0" bIns="0" rtlCol="0" anchor="ctr"/>
+          <a:lstStyle/>
+          <a:p>
+            <a:pPr indent="0" marL="0">
+              <a:buNone/>
+            </a:pPr>
+            <a:r>
+              <a:rPr lang="en-US" sz="1300" b="1" dirty="0">
+                <a:solidFill>
+                  <a:srgbClr val="EDF3EF"/>
+                </a:solidFill>
+                <a:latin typeface="Arial" pitchFamily="34" charset="0"/>
+                <a:ea typeface="Arial" pitchFamily="34" charset="-122"/>
+                <a:cs typeface="Arial" pitchFamily="34" charset="-120"/>
+              </a:rPr>
+              <a:t>Câmera IP, por sala</a:t>
+            </a:r>
+            <a:endParaRPr lang="en-US" sz="1300" dirty="0"/>
+          </a:p>
+        </p:txBody>
+      </p:sp>
+      <p:sp>
+        <p:nvSpPr>
+          <p:cNvPr id="8" name="Text 6"/>
+          <p:cNvSpPr txBox="1"/>
+          <p:nvPr/>
+        </p:nvSpPr>
+        <p:spPr>
+          <a:xfrm>
+            <a:off x="3703320" y="3803904"/>
+            <a:ext cx="2103120" cy="292608"/>
+          </a:xfrm>
+          <a:prstGeom prst="rect">
+            <a:avLst/>
+          </a:prstGeom>
+          <a:noFill/>
+          <a:ln/>
+        </p:spPr>
+        <p:txBody>
+          <a:bodyPr wrap="square" lIns="0" tIns="0" rIns="0" bIns="0" rtlCol="0" anchor="ctr"/>
+          <a:lstStyle/>
+          <a:p>
+            <a:pPr algn="r" indent="0" marL="0">
+              <a:buNone/>
+            </a:pPr>
+            <a:r>
+              <a:rPr lang="en-US" sz="1100" dirty="0">
+                <a:solidFill>
+                  <a:srgbClr val="9DB0A6"/>
+                </a:solidFill>
+                <a:latin typeface="Courier New" pitchFamily="34" charset="0"/>
+                <a:ea typeface="Courier New" pitchFamily="34" charset="-122"/>
+                <a:cs typeface="Courier New" pitchFamily="34" charset="-120"/>
+              </a:rPr>
+              <a:t>R$ 200 a R$ 680</a:t>
+            </a:r>
+            <a:endParaRPr lang="en-US" sz="1100" dirty="0"/>
+          </a:p>
+        </p:txBody>
+      </p:sp>
+      <p:sp>
+        <p:nvSpPr>
+          <p:cNvPr id="9" name="Shape 7"/>
+          <p:cNvSpPr/>
+          <p:nvPr/>
+        </p:nvSpPr>
+        <p:spPr>
+          <a:xfrm>
+            <a:off x="685800" y="4178808"/>
+            <a:ext cx="5120640" cy="0"/>
+          </a:xfrm>
+          <a:prstGeom prst="line">
+            <a:avLst/>
+          </a:prstGeom>
+          <a:noFill/>
+          <a:ln w="12700">
+            <a:solidFill>
+              <a:srgbClr val="24322B"/>
+            </a:solidFill>
+            <a:prstDash val="solid"/>
+          </a:ln>
+        </p:spPr>
+      </p:sp>
+      <p:sp>
+        <p:nvSpPr>
+          <p:cNvPr id="10" name="Text 8"/>
+          <p:cNvSpPr txBox="1"/>
+          <p:nvPr/>
+        </p:nvSpPr>
+        <p:spPr>
+          <a:xfrm>
+            <a:off x="685800" y="4261104"/>
+            <a:ext cx="3017520" cy="320040"/>
+          </a:xfrm>
+          <a:prstGeom prst="rect">
+            <a:avLst/>
+          </a:prstGeom>
+          <a:noFill/>
+          <a:ln/>
+        </p:spPr>
+        <p:txBody>
+          <a:bodyPr wrap="square" lIns="0" tIns="0" rIns="0" bIns="0" rtlCol="0" anchor="ctr"/>
+          <a:lstStyle/>
+          <a:p>
+            <a:pPr indent="0" marL="0">
+              <a:buNone/>
+            </a:pPr>
+            <a:r>
+              <a:rPr lang="en-US" sz="1300" b="1" dirty="0">
+                <a:solidFill>
+                  <a:srgbClr val="EDF3EF"/>
+                </a:solidFill>
+                <a:latin typeface="Arial" pitchFamily="34" charset="0"/>
+                <a:ea typeface="Arial" pitchFamily="34" charset="-122"/>
+                <a:cs typeface="Arial" pitchFamily="34" charset="-120"/>
+              </a:rPr>
+              <a:t>Servidor</a:t>
+            </a:r>
+            <a:endParaRPr lang="en-US" sz="1300" dirty="0"/>
+          </a:p>
+        </p:txBody>
+      </p:sp>
+      <p:sp>
+        <p:nvSpPr>
+          <p:cNvPr id="11" name="Text 9"/>
+          <p:cNvSpPr txBox="1"/>
+          <p:nvPr/>
+        </p:nvSpPr>
+        <p:spPr>
+          <a:xfrm>
+            <a:off x="3703320" y="4279392"/>
+            <a:ext cx="2103120" cy="292608"/>
+          </a:xfrm>
+          <a:prstGeom prst="rect">
+            <a:avLst/>
+          </a:prstGeom>
+          <a:noFill/>
+          <a:ln/>
+        </p:spPr>
+        <p:txBody>
+          <a:bodyPr wrap="square" lIns="0" tIns="0" rIns="0" bIns="0" rtlCol="0" anchor="ctr"/>
+          <a:lstStyle/>
+          <a:p>
+            <a:pPr algn="r" indent="0" marL="0">
+              <a:buNone/>
+            </a:pPr>
+            <a:r>
+              <a:rPr lang="en-US" sz="1100" dirty="0">
+                <a:solidFill>
+                  <a:srgbClr val="9DB0A6"/>
+                </a:solidFill>
+                <a:latin typeface="Courier New" pitchFamily="34" charset="0"/>
+                <a:ea typeface="Courier New" pitchFamily="34" charset="-122"/>
+                <a:cs typeface="Courier New" pitchFamily="34" charset="-120"/>
+              </a:rPr>
+              <a:t>1 PC comum por escola</a:t>
+            </a:r>
+            <a:endParaRPr lang="en-US" sz="1100" dirty="0"/>
+          </a:p>
+        </p:txBody>
+      </p:sp>
+      <p:sp>
+        <p:nvSpPr>
+          <p:cNvPr id="12" name="Shape 10"/>
+          <p:cNvSpPr/>
+          <p:nvPr/>
+        </p:nvSpPr>
+        <p:spPr>
+          <a:xfrm>
+            <a:off x="685800" y="4654296"/>
+            <a:ext cx="5120640" cy="0"/>
+          </a:xfrm>
+          <a:prstGeom prst="line">
+            <a:avLst/>
+          </a:prstGeom>
+          <a:noFill/>
+          <a:ln w="12700">
+            <a:solidFill>
+              <a:srgbClr val="24322B"/>
+            </a:solidFill>
+            <a:prstDash val="solid"/>
+          </a:ln>
+        </p:spPr>
+      </p:sp>
+      <p:sp>
+        <p:nvSpPr>
+          <p:cNvPr id="13" name="Text 11"/>
+          <p:cNvSpPr txBox="1"/>
+          <p:nvPr/>
+        </p:nvSpPr>
+        <p:spPr>
+          <a:xfrm>
+            <a:off x="685800" y="4736592"/>
+            <a:ext cx="3017520" cy="320040"/>
+          </a:xfrm>
+          <a:prstGeom prst="rect">
+            <a:avLst/>
+          </a:prstGeom>
+          <a:noFill/>
+          <a:ln/>
+        </p:spPr>
+        <p:txBody>
+          <a:bodyPr wrap="square" lIns="0" tIns="0" rIns="0" bIns="0" rtlCol="0" anchor="ctr"/>
+          <a:lstStyle/>
+          <a:p>
+            <a:pPr indent="0" marL="0">
+              <a:buNone/>
+            </a:pPr>
+            <a:r>
+              <a:rPr lang="en-US" sz="1300" b="1" dirty="0">
+                <a:solidFill>
+                  <a:srgbClr val="EDF3EF"/>
+                </a:solidFill>
+                <a:latin typeface="Arial" pitchFamily="34" charset="0"/>
+                <a:ea typeface="Arial" pitchFamily="34" charset="-122"/>
+                <a:cs typeface="Arial" pitchFamily="34" charset="-120"/>
+              </a:rPr>
+              <a:t>Licença de software</a:t>
+            </a:r>
+            <a:endParaRPr lang="en-US" sz="1300" dirty="0"/>
+          </a:p>
+        </p:txBody>
+      </p:sp>
+      <p:sp>
+        <p:nvSpPr>
+          <p:cNvPr id="14" name="Text 12"/>
+          <p:cNvSpPr txBox="1"/>
+          <p:nvPr/>
+        </p:nvSpPr>
+        <p:spPr>
+          <a:xfrm>
+            <a:off x="3703320" y="4754880"/>
+            <a:ext cx="2103120" cy="292608"/>
+          </a:xfrm>
+          <a:prstGeom prst="rect">
+            <a:avLst/>
+          </a:prstGeom>
+          <a:noFill/>
+          <a:ln/>
+        </p:spPr>
+        <p:txBody>
+          <a:bodyPr wrap="square" lIns="0" tIns="0" rIns="0" bIns="0" rtlCol="0" anchor="ctr"/>
+          <a:lstStyle/>
+          <a:p>
+            <a:pPr algn="r" indent="0" marL="0">
+              <a:buNone/>
+            </a:pPr>
+            <a:r>
+              <a:rPr lang="en-US" sz="1100" dirty="0">
+                <a:solidFill>
+                  <a:srgbClr val="3FBF5A"/>
+                </a:solidFill>
+                <a:latin typeface="Courier New" pitchFamily="34" charset="0"/>
+                <a:ea typeface="Courier New" pitchFamily="34" charset="-122"/>
+                <a:cs typeface="Courier New" pitchFamily="34" charset="-120"/>
+              </a:rPr>
+              <a:t>R$ 0 por câmera</a:t>
+            </a:r>
+            <a:endParaRPr lang="en-US" sz="1100" dirty="0"/>
+          </a:p>
+        </p:txBody>
+      </p:sp>
+      <p:sp>
+        <p:nvSpPr>
+          <p:cNvPr id="15" name="Shape 13"/>
+          <p:cNvSpPr/>
+          <p:nvPr/>
+        </p:nvSpPr>
+        <p:spPr>
+          <a:xfrm>
+            <a:off x="685800" y="5129784"/>
+            <a:ext cx="5120640" cy="0"/>
+          </a:xfrm>
+          <a:prstGeom prst="line">
+            <a:avLst/>
+          </a:prstGeom>
+          <a:noFill/>
+          <a:ln w="12700">
+            <a:solidFill>
+              <a:srgbClr val="24322B"/>
+            </a:solidFill>
+            <a:prstDash val="solid"/>
+          </a:ln>
+        </p:spPr>
+      </p:sp>
+      <p:sp>
+        <p:nvSpPr>
+          <p:cNvPr id="16" name="Text 14"/>
+          <p:cNvSpPr txBox="1"/>
+          <p:nvPr/>
+        </p:nvSpPr>
+        <p:spPr>
+          <a:xfrm>
+            <a:off x="685800" y="5212080"/>
+            <a:ext cx="3017520" cy="320040"/>
+          </a:xfrm>
+          <a:prstGeom prst="rect">
+            <a:avLst/>
+          </a:prstGeom>
+          <a:noFill/>
+          <a:ln/>
+        </p:spPr>
+        <p:txBody>
+          <a:bodyPr wrap="square" lIns="0" tIns="0" rIns="0" bIns="0" rtlCol="0" anchor="ctr"/>
+          <a:lstStyle/>
+          <a:p>
+            <a:pPr indent="0" marL="0">
+              <a:buNone/>
+            </a:pPr>
+            <a:r>
+              <a:rPr lang="en-US" sz="1300" b="1" dirty="0">
+                <a:solidFill>
+                  <a:srgbClr val="EDF3EF"/>
+                </a:solidFill>
+                <a:latin typeface="Arial" pitchFamily="34" charset="0"/>
+                <a:ea typeface="Arial" pitchFamily="34" charset="-122"/>
+                <a:cs typeface="Arial" pitchFamily="34" charset="-120"/>
+              </a:rPr>
+              <a:t>Nuvem do alerta</a:t>
+            </a:r>
+            <a:endParaRPr lang="en-US" sz="1300" dirty="0"/>
+          </a:p>
+        </p:txBody>
+      </p:sp>
+      <p:sp>
+        <p:nvSpPr>
+          <p:cNvPr id="17" name="Text 15"/>
+          <p:cNvSpPr txBox="1"/>
+          <p:nvPr/>
+        </p:nvSpPr>
+        <p:spPr>
+          <a:xfrm>
+            <a:off x="3703320" y="5230368"/>
+            <a:ext cx="2103120" cy="292608"/>
+          </a:xfrm>
+          <a:prstGeom prst="rect">
+            <a:avLst/>
+          </a:prstGeom>
+          <a:noFill/>
+          <a:ln/>
+        </p:spPr>
+        <p:txBody>
+          <a:bodyPr wrap="square" lIns="0" tIns="0" rIns="0" bIns="0" rtlCol="0" anchor="ctr"/>
+          <a:lstStyle/>
+          <a:p>
+            <a:pPr algn="r" indent="0" marL="0">
+              <a:buNone/>
+            </a:pPr>
+            <a:r>
+              <a:rPr lang="en-US" sz="1100" dirty="0">
+                <a:solidFill>
+                  <a:srgbClr val="3FBF5A"/>
+                </a:solidFill>
+                <a:latin typeface="Courier New" pitchFamily="34" charset="0"/>
+                <a:ea typeface="Courier New" pitchFamily="34" charset="-122"/>
+                <a:cs typeface="Courier New" pitchFamily="34" charset="-120"/>
+              </a:rPr>
+              <a:t>centavos por mês</a:t>
+            </a:r>
+            <a:endParaRPr lang="en-US" sz="1100" dirty="0"/>
+          </a:p>
+        </p:txBody>
+      </p:sp>
+      <p:sp>
+        <p:nvSpPr>
+          <p:cNvPr id="18" name="Shape 16"/>
+          <p:cNvSpPr/>
+          <p:nvPr/>
+        </p:nvSpPr>
+        <p:spPr>
+          <a:xfrm>
+            <a:off x="685800" y="5605272"/>
+            <a:ext cx="5120640" cy="0"/>
+          </a:xfrm>
+          <a:prstGeom prst="line">
+            <a:avLst/>
+          </a:prstGeom>
+          <a:noFill/>
+          <a:ln w="12700">
+            <a:solidFill>
+              <a:srgbClr val="24322B"/>
+            </a:solidFill>
+            <a:prstDash val="solid"/>
+          </a:ln>
+        </p:spPr>
+      </p:sp>
+      <p:sp>
+        <p:nvSpPr>
+          <p:cNvPr id="19" name="Text 17"/>
+          <p:cNvSpPr txBox="1"/>
+          <p:nvPr/>
+        </p:nvSpPr>
+        <p:spPr>
+          <a:xfrm>
+            <a:off x="685800" y="5687568"/>
+            <a:ext cx="5120640" cy="365760"/>
+          </a:xfrm>
+          <a:prstGeom prst="rect">
+            <a:avLst/>
+          </a:prstGeom>
+          <a:noFill/>
+          <a:ln/>
+        </p:spPr>
+        <p:txBody>
+          <a:bodyPr wrap="square" lIns="0" tIns="0" rIns="0" bIns="0" rtlCol="0" anchor="ctr"/>
+          <a:lstStyle/>
+          <a:p>
+            <a:pPr indent="0" marL="0">
+              <a:lnSpc>
+                <a:spcPts val="1300"/>
+              </a:lnSpc>
+              <a:buNone/>
+            </a:pPr>
+            <a:r>
+              <a:rPr lang="en-US" sz="900" dirty="0">
+                <a:solidFill>
+                  <a:srgbClr val="6A7D74"/>
+                </a:solidFill>
+                <a:latin typeface="Courier New" pitchFamily="34" charset="0"/>
+                <a:ea typeface="Courier New" pitchFamily="34" charset="-122"/>
+                <a:cs typeface="Courier New" pitchFamily="34" charset="-120"/>
+              </a:rPr>
+              <a:t>sem placa de vídeo, sem custo por fluxo, sem mensalidade que cresce com a escola</a:t>
+            </a:r>
+            <a:endParaRPr lang="en-US" sz="900" dirty="0"/>
+          </a:p>
+        </p:txBody>
+      </p:sp>
+      <p:sp>
+        <p:nvSpPr>
+          <p:cNvPr id="20" name="Text 18"/>
+          <p:cNvSpPr txBox="1"/>
+          <p:nvPr/>
+        </p:nvSpPr>
+        <p:spPr>
+          <a:xfrm>
+            <a:off x="6492240" y="3246120"/>
+            <a:ext cx="5029200" cy="320040"/>
+          </a:xfrm>
+          <a:prstGeom prst="rect">
+            <a:avLst/>
+          </a:prstGeom>
+          <a:noFill/>
+          <a:ln/>
+        </p:spPr>
+        <p:txBody>
+          <a:bodyPr wrap="square" lIns="0" tIns="0" rIns="0" bIns="0" rtlCol="0" anchor="ctr"/>
+          <a:lstStyle/>
+          <a:p>
+            <a:pPr indent="0" marL="0">
+              <a:buNone/>
+            </a:pPr>
+            <a:r>
+              <a:rPr lang="en-US" sz="1800" b="1" dirty="0">
+                <a:solidFill>
+                  <a:srgbClr val="EDF3EF"/>
+                </a:solidFill>
+                <a:latin typeface="Arial" pitchFamily="34" charset="0"/>
+                <a:ea typeface="Arial" pitchFamily="34" charset="-122"/>
+                <a:cs typeface="Arial" pitchFamily="34" charset="-120"/>
+              </a:rPr>
+              <a:t>Como entra no mercado</a:t>
+            </a:r>
+            <a:endParaRPr lang="en-US" sz="1800" dirty="0"/>
+          </a:p>
+        </p:txBody>
+      </p:sp>
+      <p:sp>
+        <p:nvSpPr>
+          <p:cNvPr id="21" name="Shape 19"/>
+          <p:cNvSpPr/>
+          <p:nvPr/>
+        </p:nvSpPr>
+        <p:spPr>
+          <a:xfrm>
+            <a:off x="6492240" y="3721608"/>
+            <a:ext cx="292608" cy="292608"/>
+          </a:xfrm>
+          <a:prstGeom prst="ellipse">
+            <a:avLst/>
           </a:prstGeom>
           <a:solidFill>
             <a:srgbClr val="0B100E"/>
@@ -4632,39 +5016,75 @@
             <a:solidFill>
               <a:srgbClr val="24322B"/>
             </a:solidFill>
-            <a:prstDash val="dash"/>
+            <a:prstDash val="solid"/>
           </a:ln>
         </p:spPr>
       </p:sp>
       <p:sp>
         <p:nvSpPr>
-          <p:cNvPr id="6" name="Text 4"/>
-          <p:cNvSpPr txBox="1"/>
-          <p:nvPr/>
-        </p:nvSpPr>
-        <p:spPr>
-          <a:xfrm>
-            <a:off x="960120" y="3456432"/>
-            <a:ext cx="2880360" cy="548640"/>
-          </a:xfrm>
-          <a:prstGeom prst="rect">
-            <a:avLst/>
-          </a:prstGeom>
-          <a:noFill/>
-          <a:ln/>
-        </p:spPr>
-        <p:txBody>
-          <a:bodyPr wrap="square" lIns="0" tIns="0" rIns="0" bIns="0" rtlCol="0" anchor="ctr"/>
-          <a:lstStyle/>
-          <a:p>
-            <a:pPr indent="0" marL="0">
-              <a:lnSpc>
-                <a:spcPts val="1900"/>
-              </a:lnSpc>
-              <a:buNone/>
-            </a:pPr>
-            <a:r>
-              <a:rPr lang="en-US" sz="1500" b="1" dirty="0">
+          <p:cNvPr id="22" name="Text 20"/>
+          <p:cNvSpPr txBox="1"/>
+          <p:nvPr/>
+        </p:nvSpPr>
+        <p:spPr>
+          <a:xfrm>
+            <a:off x="6492240" y="3749040"/>
+            <a:ext cx="292608" cy="237744"/>
+          </a:xfrm>
+          <a:prstGeom prst="rect">
+            <a:avLst/>
+          </a:prstGeom>
+          <a:noFill/>
+          <a:ln/>
+        </p:spPr>
+        <p:txBody>
+          <a:bodyPr wrap="square" lIns="0" tIns="0" rIns="0" bIns="0" rtlCol="0" anchor="ctr"/>
+          <a:lstStyle/>
+          <a:p>
+            <a:pPr algn="ctr" indent="0" marL="0">
+              <a:buNone/>
+            </a:pPr>
+            <a:r>
+              <a:rPr lang="en-US" sz="1000" dirty="0">
+                <a:solidFill>
+                  <a:srgbClr val="3FBF5A"/>
+                </a:solidFill>
+                <a:latin typeface="Courier New" pitchFamily="34" charset="0"/>
+                <a:ea typeface="Courier New" pitchFamily="34" charset="-122"/>
+                <a:cs typeface="Courier New" pitchFamily="34" charset="-120"/>
+              </a:rPr>
+              <a:t>1</a:t>
+            </a:r>
+            <a:endParaRPr lang="en-US" sz="1000" dirty="0"/>
+          </a:p>
+        </p:txBody>
+      </p:sp>
+      <p:sp>
+        <p:nvSpPr>
+          <p:cNvPr id="23" name="Text 21"/>
+          <p:cNvSpPr txBox="1"/>
+          <p:nvPr/>
+        </p:nvSpPr>
+        <p:spPr>
+          <a:xfrm>
+            <a:off x="6949440" y="3703320"/>
+            <a:ext cx="4572000" cy="274320"/>
+          </a:xfrm>
+          <a:prstGeom prst="rect">
+            <a:avLst/>
+          </a:prstGeom>
+          <a:noFill/>
+          <a:ln/>
+        </p:spPr>
+        <p:txBody>
+          <a:bodyPr wrap="square" lIns="0" tIns="0" rIns="0" bIns="0" rtlCol="0" anchor="ctr"/>
+          <a:lstStyle/>
+          <a:p>
+            <a:pPr indent="0" marL="0">
+              <a:buNone/>
+            </a:pPr>
+            <a:r>
+              <a:rPr lang="en-US" sz="1400" b="1" dirty="0">
                 <a:solidFill>
                   <a:srgbClr val="EDF3EF"/>
                 </a:solidFill>
@@ -4672,38 +5092,41 @@
                 <a:ea typeface="Arial" pitchFamily="34" charset="-122"/>
                 <a:cs typeface="Arial" pitchFamily="34" charset="-120"/>
               </a:rPr>
-              <a:t>Quanto uma escola paga hoje</a:t>
-            </a:r>
-            <a:endParaRPr lang="en-US" sz="1500" dirty="0"/>
-          </a:p>
-        </p:txBody>
-      </p:sp>
-      <p:sp>
-        <p:nvSpPr>
-          <p:cNvPr id="7" name="Text 5"/>
-          <p:cNvSpPr txBox="1"/>
-          <p:nvPr/>
-        </p:nvSpPr>
-        <p:spPr>
-          <a:xfrm>
-            <a:off x="960120" y="4069080"/>
-            <a:ext cx="2880360" cy="320040"/>
-          </a:xfrm>
-          <a:prstGeom prst="rect">
-            <a:avLst/>
-          </a:prstGeom>
-          <a:noFill/>
-          <a:ln/>
-        </p:spPr>
-        <p:txBody>
-          <a:bodyPr wrap="square" lIns="0" tIns="0" rIns="0" bIns="0" rtlCol="0" anchor="ctr"/>
-          <a:lstStyle/>
-          <a:p>
-            <a:pPr indent="0" marL="0">
-              <a:buNone/>
-            </a:pPr>
-            <a:r>
-              <a:rPr lang="en-US" sz="1200" dirty="0">
+              <a:t>Uma escola, de graça</a:t>
+            </a:r>
+            <a:endParaRPr lang="en-US" sz="1400" dirty="0"/>
+          </a:p>
+        </p:txBody>
+      </p:sp>
+      <p:sp>
+        <p:nvSpPr>
+          <p:cNvPr id="24" name="Text 22"/>
+          <p:cNvSpPr txBox="1"/>
+          <p:nvPr/>
+        </p:nvSpPr>
+        <p:spPr>
+          <a:xfrm>
+            <a:off x="6949440" y="3977640"/>
+            <a:ext cx="4572000" cy="502920"/>
+          </a:xfrm>
+          <a:prstGeom prst="rect">
+            <a:avLst/>
+          </a:prstGeom>
+          <a:noFill/>
+          <a:ln/>
+        </p:spPr>
+        <p:txBody>
+          <a:bodyPr wrap="square" lIns="0" tIns="0" rIns="0" bIns="0" rtlCol="0" anchor="ctr"/>
+          <a:lstStyle/>
+          <a:p>
+            <a:pPr indent="0" marL="0">
+              <a:lnSpc>
+                <a:spcPts val="1400"/>
+              </a:lnSpc>
+              <a:buNone/>
+            </a:pPr>
+            <a:r>
+              <a:rPr lang="en-US" sz="1150" dirty="0">
                 <a:solidFill>
                   <a:srgbClr val="9DB0A6"/>
                 </a:solidFill>
@@ -4711,69 +5134,25 @@
                 <a:ea typeface="Calibri" pitchFamily="34" charset="-122"/>
                 <a:cs typeface="Calibri" pitchFamily="34" charset="-120"/>
               </a:rPr>
-              <a:t>por monitoramento eletrônico</a:t>
-            </a:r>
-            <a:endParaRPr lang="en-US" sz="1200" dirty="0"/>
-          </a:p>
-        </p:txBody>
-      </p:sp>
-      <p:sp>
-        <p:nvSpPr>
-          <p:cNvPr id="8" name="Text 6"/>
-          <p:cNvSpPr txBox="1"/>
-          <p:nvPr/>
-        </p:nvSpPr>
-        <p:spPr>
-          <a:xfrm>
-            <a:off x="960120" y="4526280"/>
-            <a:ext cx="2880360" cy="411480"/>
-          </a:xfrm>
-          <a:prstGeom prst="rect">
-            <a:avLst/>
-          </a:prstGeom>
-          <a:noFill/>
-          <a:ln/>
-        </p:spPr>
-        <p:txBody>
-          <a:bodyPr wrap="square" lIns="0" tIns="0" rIns="0" bIns="0" rtlCol="0" anchor="ctr"/>
-          <a:lstStyle/>
-          <a:p>
-            <a:pPr indent="0" marL="0">
-              <a:lnSpc>
-                <a:spcPts val="1200"/>
-              </a:lnSpc>
-              <a:buNone/>
-            </a:pPr>
-            <a:r>
-              <a:rPr lang="en-US" sz="900" dirty="0">
-                <a:solidFill>
-                  <a:srgbClr val="E4572E"/>
-                </a:solidFill>
-                <a:latin typeface="Courier New" pitchFamily="34" charset="0"/>
-                <a:ea typeface="Courier New" pitchFamily="34" charset="-122"/>
-                <a:cs typeface="Courier New" pitchFamily="34" charset="-120"/>
-              </a:rPr>
-              <a:t>fonte: ligar para três escolas</a:t>
-            </a:r>
-            <a:endParaRPr lang="en-US" sz="900" dirty="0"/>
-          </a:p>
-        </p:txBody>
-      </p:sp>
-      <p:sp>
-        <p:nvSpPr>
-          <p:cNvPr id="9" name="Shape 7"/>
+              <a:t>Em troca do dado que falta: quantos alertas por dia a coordenação aguenta, e quantos foram engano.</a:t>
+            </a:r>
+            <a:endParaRPr lang="en-US" sz="1150" dirty="0"/>
+          </a:p>
+        </p:txBody>
+      </p:sp>
+      <p:sp>
+        <p:nvSpPr>
+          <p:cNvPr id="25" name="Shape 23"/>
           <p:cNvSpPr/>
           <p:nvPr/>
         </p:nvSpPr>
         <p:spPr>
           <a:xfrm>
-            <a:off x="4370832" y="3200400"/>
-            <a:ext cx="3410712" cy="1920240"/>
-          </a:xfrm>
-          <a:prstGeom prst="roundRect">
-            <a:avLst>
-              <a:gd name="adj" fmla="val 4762"/>
-            </a:avLst>
+            <a:off x="6492240" y="4498848"/>
+            <a:ext cx="292608" cy="292608"/>
+          </a:xfrm>
+          <a:prstGeom prst="ellipse">
+            <a:avLst/>
           </a:prstGeom>
           <a:solidFill>
             <a:srgbClr val="0B100E"/>
@@ -4782,39 +5161,75 @@
             <a:solidFill>
               <a:srgbClr val="24322B"/>
             </a:solidFill>
-            <a:prstDash val="dash"/>
+            <a:prstDash val="solid"/>
           </a:ln>
         </p:spPr>
       </p:sp>
       <p:sp>
         <p:nvSpPr>
-          <p:cNvPr id="10" name="Text 8"/>
-          <p:cNvSpPr txBox="1"/>
-          <p:nvPr/>
-        </p:nvSpPr>
-        <p:spPr>
-          <a:xfrm>
-            <a:off x="4645152" y="3456432"/>
-            <a:ext cx="2880360" cy="548640"/>
-          </a:xfrm>
-          <a:prstGeom prst="rect">
-            <a:avLst/>
-          </a:prstGeom>
-          <a:noFill/>
-          <a:ln/>
-        </p:spPr>
-        <p:txBody>
-          <a:bodyPr wrap="square" lIns="0" tIns="0" rIns="0" bIns="0" rtlCol="0" anchor="ctr"/>
-          <a:lstStyle/>
-          <a:p>
-            <a:pPr indent="0" marL="0">
-              <a:lnSpc>
-                <a:spcPts val="1900"/>
-              </a:lnSpc>
-              <a:buNone/>
-            </a:pPr>
-            <a:r>
-              <a:rPr lang="en-US" sz="1500" b="1" dirty="0">
+          <p:cNvPr id="26" name="Text 24"/>
+          <p:cNvSpPr txBox="1"/>
+          <p:nvPr/>
+        </p:nvSpPr>
+        <p:spPr>
+          <a:xfrm>
+            <a:off x="6492240" y="4526280"/>
+            <a:ext cx="292608" cy="237744"/>
+          </a:xfrm>
+          <a:prstGeom prst="rect">
+            <a:avLst/>
+          </a:prstGeom>
+          <a:noFill/>
+          <a:ln/>
+        </p:spPr>
+        <p:txBody>
+          <a:bodyPr wrap="square" lIns="0" tIns="0" rIns="0" bIns="0" rtlCol="0" anchor="ctr"/>
+          <a:lstStyle/>
+          <a:p>
+            <a:pPr algn="ctr" indent="0" marL="0">
+              <a:buNone/>
+            </a:pPr>
+            <a:r>
+              <a:rPr lang="en-US" sz="1000" dirty="0">
+                <a:solidFill>
+                  <a:srgbClr val="3FBF5A"/>
+                </a:solidFill>
+                <a:latin typeface="Courier New" pitchFamily="34" charset="0"/>
+                <a:ea typeface="Courier New" pitchFamily="34" charset="-122"/>
+                <a:cs typeface="Courier New" pitchFamily="34" charset="-120"/>
+              </a:rPr>
+              <a:t>2</a:t>
+            </a:r>
+            <a:endParaRPr lang="en-US" sz="1000" dirty="0"/>
+          </a:p>
+        </p:txBody>
+      </p:sp>
+      <p:sp>
+        <p:nvSpPr>
+          <p:cNvPr id="27" name="Text 25"/>
+          <p:cNvSpPr txBox="1"/>
+          <p:nvPr/>
+        </p:nvSpPr>
+        <p:spPr>
+          <a:xfrm>
+            <a:off x="6949440" y="4480560"/>
+            <a:ext cx="4572000" cy="274320"/>
+          </a:xfrm>
+          <a:prstGeom prst="rect">
+            <a:avLst/>
+          </a:prstGeom>
+          <a:noFill/>
+          <a:ln/>
+        </p:spPr>
+        <p:txBody>
+          <a:bodyPr wrap="square" lIns="0" tIns="0" rIns="0" bIns="0" rtlCol="0" anchor="ctr"/>
+          <a:lstStyle/>
+          <a:p>
+            <a:pPr indent="0" marL="0">
+              <a:buNone/>
+            </a:pPr>
+            <a:r>
+              <a:rPr lang="en-US" sz="1400" b="1" dirty="0">
                 <a:solidFill>
                   <a:srgbClr val="EDF3EF"/>
                 </a:solidFill>
@@ -4822,38 +5237,41 @@
                 <a:ea typeface="Arial" pitchFamily="34" charset="-122"/>
                 <a:cs typeface="Arial" pitchFamily="34" charset="-120"/>
               </a:rPr>
-              <a:t>Quantas escolas no recorte</a:t>
-            </a:r>
-            <a:endParaRPr lang="en-US" sz="1500" dirty="0"/>
-          </a:p>
-        </p:txBody>
-      </p:sp>
-      <p:sp>
-        <p:nvSpPr>
-          <p:cNvPr id="11" name="Text 9"/>
-          <p:cNvSpPr txBox="1"/>
-          <p:nvPr/>
-        </p:nvSpPr>
-        <p:spPr>
-          <a:xfrm>
-            <a:off x="4645152" y="4069080"/>
-            <a:ext cx="2880360" cy="320040"/>
-          </a:xfrm>
-          <a:prstGeom prst="rect">
-            <a:avLst/>
-          </a:prstGeom>
-          <a:noFill/>
-          <a:ln/>
-        </p:spPr>
-        <p:txBody>
-          <a:bodyPr wrap="square" lIns="0" tIns="0" rIns="0" bIns="0" rtlCol="0" anchor="ctr"/>
-          <a:lstStyle/>
-          <a:p>
-            <a:pPr indent="0" marL="0">
-              <a:buNone/>
-            </a:pPr>
-            <a:r>
-              <a:rPr lang="en-US" sz="1200" dirty="0">
+              <a:t>O piloto vira carta</a:t>
+            </a:r>
+            <a:endParaRPr lang="en-US" sz="1400" dirty="0"/>
+          </a:p>
+        </p:txBody>
+      </p:sp>
+      <p:sp>
+        <p:nvSpPr>
+          <p:cNvPr id="28" name="Text 26"/>
+          <p:cNvSpPr txBox="1"/>
+          <p:nvPr/>
+        </p:nvSpPr>
+        <p:spPr>
+          <a:xfrm>
+            <a:off x="6949440" y="4754880"/>
+            <a:ext cx="4572000" cy="502920"/>
+          </a:xfrm>
+          <a:prstGeom prst="rect">
+            <a:avLst/>
+          </a:prstGeom>
+          <a:noFill/>
+          <a:ln/>
+        </p:spPr>
+        <p:txBody>
+          <a:bodyPr wrap="square" lIns="0" tIns="0" rIns="0" bIns="0" rtlCol="0" anchor="ctr"/>
+          <a:lstStyle/>
+          <a:p>
+            <a:pPr indent="0" marL="0">
+              <a:lnSpc>
+                <a:spcPts val="1400"/>
+              </a:lnSpc>
+              <a:buNone/>
+            </a:pPr>
+            <a:r>
+              <a:rPr lang="en-US" sz="1150" dirty="0">
                 <a:solidFill>
                   <a:srgbClr val="9DB0A6"/>
                 </a:solidFill>
@@ -4861,69 +5279,25 @@
                 <a:ea typeface="Calibri" pitchFamily="34" charset="-122"/>
                 <a:cs typeface="Calibri" pitchFamily="34" charset="-120"/>
               </a:rPr>
-              <a:t>rede, município ou grupo</a:t>
-            </a:r>
-            <a:endParaRPr lang="en-US" sz="1200" dirty="0"/>
-          </a:p>
-        </p:txBody>
-      </p:sp>
-      <p:sp>
-        <p:nvSpPr>
-          <p:cNvPr id="12" name="Text 10"/>
-          <p:cNvSpPr txBox="1"/>
-          <p:nvPr/>
-        </p:nvSpPr>
-        <p:spPr>
-          <a:xfrm>
-            <a:off x="4645152" y="4526280"/>
-            <a:ext cx="2880360" cy="411480"/>
-          </a:xfrm>
-          <a:prstGeom prst="rect">
-            <a:avLst/>
-          </a:prstGeom>
-          <a:noFill/>
-          <a:ln/>
-        </p:spPr>
-        <p:txBody>
-          <a:bodyPr wrap="square" lIns="0" tIns="0" rIns="0" bIns="0" rtlCol="0" anchor="ctr"/>
-          <a:lstStyle/>
-          <a:p>
-            <a:pPr indent="0" marL="0">
-              <a:lnSpc>
-                <a:spcPts val="1200"/>
-              </a:lnSpc>
-              <a:buNone/>
-            </a:pPr>
-            <a:r>
-              <a:rPr lang="en-US" sz="900" dirty="0">
-                <a:solidFill>
-                  <a:srgbClr val="E4572E"/>
-                </a:solidFill>
-                <a:latin typeface="Courier New" pitchFamily="34" charset="0"/>
-                <a:ea typeface="Courier New" pitchFamily="34" charset="-122"/>
-                <a:cs typeface="Courier New" pitchFamily="34" charset="-120"/>
-              </a:rPr>
-              <a:t>fonte: Censo Escolar, INEP</a:t>
-            </a:r>
-            <a:endParaRPr lang="en-US" sz="900" dirty="0"/>
-          </a:p>
-        </p:txBody>
-      </p:sp>
-      <p:sp>
-        <p:nvSpPr>
-          <p:cNvPr id="13" name="Shape 11"/>
+              <a:t>Um depoimento da coordenação abre a porta da segunda escola melhor que qualquer slide.</a:t>
+            </a:r>
+            <a:endParaRPr lang="en-US" sz="1150" dirty="0"/>
+          </a:p>
+        </p:txBody>
+      </p:sp>
+      <p:sp>
+        <p:nvSpPr>
+          <p:cNvPr id="29" name="Shape 27"/>
           <p:cNvSpPr/>
           <p:nvPr/>
         </p:nvSpPr>
         <p:spPr>
           <a:xfrm>
-            <a:off x="8055864" y="3200400"/>
-            <a:ext cx="3410712" cy="1920240"/>
-          </a:xfrm>
-          <a:prstGeom prst="roundRect">
-            <a:avLst>
-              <a:gd name="adj" fmla="val 4762"/>
-            </a:avLst>
+            <a:off x="6492240" y="5276088"/>
+            <a:ext cx="292608" cy="292608"/>
+          </a:xfrm>
+          <a:prstGeom prst="ellipse">
+            <a:avLst/>
           </a:prstGeom>
           <a:solidFill>
             <a:srgbClr val="0B100E"/>
@@ -4932,39 +5306,75 @@
             <a:solidFill>
               <a:srgbClr val="24322B"/>
             </a:solidFill>
-            <a:prstDash val="dash"/>
+            <a:prstDash val="solid"/>
           </a:ln>
         </p:spPr>
       </p:sp>
       <p:sp>
         <p:nvSpPr>
-          <p:cNvPr id="14" name="Text 12"/>
-          <p:cNvSpPr txBox="1"/>
-          <p:nvPr/>
-        </p:nvSpPr>
-        <p:spPr>
-          <a:xfrm>
-            <a:off x="8330184" y="3456432"/>
-            <a:ext cx="2880360" cy="548640"/>
-          </a:xfrm>
-          <a:prstGeom prst="rect">
-            <a:avLst/>
-          </a:prstGeom>
-          <a:noFill/>
-          <a:ln/>
-        </p:spPr>
-        <p:txBody>
-          <a:bodyPr wrap="square" lIns="0" tIns="0" rIns="0" bIns="0" rtlCol="0" anchor="ctr"/>
-          <a:lstStyle/>
-          <a:p>
-            <a:pPr indent="0" marL="0">
-              <a:lnSpc>
-                <a:spcPts val="1900"/>
-              </a:lnSpc>
-              <a:buNone/>
-            </a:pPr>
-            <a:r>
-              <a:rPr lang="en-US" sz="1500" b="1" dirty="0">
+          <p:cNvPr id="30" name="Text 28"/>
+          <p:cNvSpPr txBox="1"/>
+          <p:nvPr/>
+        </p:nvSpPr>
+        <p:spPr>
+          <a:xfrm>
+            <a:off x="6492240" y="5303520"/>
+            <a:ext cx="292608" cy="237744"/>
+          </a:xfrm>
+          <a:prstGeom prst="rect">
+            <a:avLst/>
+          </a:prstGeom>
+          <a:noFill/>
+          <a:ln/>
+        </p:spPr>
+        <p:txBody>
+          <a:bodyPr wrap="square" lIns="0" tIns="0" rIns="0" bIns="0" rtlCol="0" anchor="ctr"/>
+          <a:lstStyle/>
+          <a:p>
+            <a:pPr algn="ctr" indent="0" marL="0">
+              <a:buNone/>
+            </a:pPr>
+            <a:r>
+              <a:rPr lang="en-US" sz="1000" dirty="0">
+                <a:solidFill>
+                  <a:srgbClr val="3FBF5A"/>
+                </a:solidFill>
+                <a:latin typeface="Courier New" pitchFamily="34" charset="0"/>
+                <a:ea typeface="Courier New" pitchFamily="34" charset="-122"/>
+                <a:cs typeface="Courier New" pitchFamily="34" charset="-120"/>
+              </a:rPr>
+              <a:t>3</a:t>
+            </a:r>
+            <a:endParaRPr lang="en-US" sz="1000" dirty="0"/>
+          </a:p>
+        </p:txBody>
+      </p:sp>
+      <p:sp>
+        <p:nvSpPr>
+          <p:cNvPr id="31" name="Text 29"/>
+          <p:cNvSpPr txBox="1"/>
+          <p:nvPr/>
+        </p:nvSpPr>
+        <p:spPr>
+          <a:xfrm>
+            <a:off x="6949440" y="5257800"/>
+            <a:ext cx="4572000" cy="274320"/>
+          </a:xfrm>
+          <a:prstGeom prst="rect">
+            <a:avLst/>
+          </a:prstGeom>
+          <a:noFill/>
+          <a:ln/>
+        </p:spPr>
+        <p:txBody>
+          <a:bodyPr wrap="square" lIns="0" tIns="0" rIns="0" bIns="0" rtlCol="0" anchor="ctr"/>
+          <a:lstStyle/>
+          <a:p>
+            <a:pPr indent="0" marL="0">
+              <a:buNone/>
+            </a:pPr>
+            <a:r>
+              <a:rPr lang="en-US" sz="1400" b="1" dirty="0">
                 <a:solidFill>
                   <a:srgbClr val="EDF3EF"/>
                 </a:solidFill>
@@ -4972,38 +5382,41 @@
                 <a:ea typeface="Arial" pitchFamily="34" charset="-122"/>
                 <a:cs typeface="Arial" pitchFamily="34" charset="-120"/>
               </a:rPr>
-              <a:t>Alertas por dia que se aguenta</a:t>
-            </a:r>
-            <a:endParaRPr lang="en-US" sz="1500" dirty="0"/>
-          </a:p>
-        </p:txBody>
-      </p:sp>
-      <p:sp>
-        <p:nvSpPr>
-          <p:cNvPr id="15" name="Text 13"/>
-          <p:cNvSpPr txBox="1"/>
-          <p:nvPr/>
-        </p:nvSpPr>
-        <p:spPr>
-          <a:xfrm>
-            <a:off x="8330184" y="4069080"/>
-            <a:ext cx="2880360" cy="320040"/>
-          </a:xfrm>
-          <a:prstGeom prst="rect">
-            <a:avLst/>
-          </a:prstGeom>
-          <a:noFill/>
-          <a:ln/>
-        </p:spPr>
-        <p:txBody>
-          <a:bodyPr wrap="square" lIns="0" tIns="0" rIns="0" bIns="0" rtlCol="0" anchor="ctr"/>
-          <a:lstStyle/>
-          <a:p>
-            <a:pPr indent="0" marL="0">
-              <a:buNone/>
-            </a:pPr>
-            <a:r>
-              <a:rPr lang="en-US" sz="1200" dirty="0">
+              <a:t>Vender para a rede</a:t>
+            </a:r>
+            <a:endParaRPr lang="en-US" sz="1400" dirty="0"/>
+          </a:p>
+        </p:txBody>
+      </p:sp>
+      <p:sp>
+        <p:nvSpPr>
+          <p:cNvPr id="32" name="Text 30"/>
+          <p:cNvSpPr txBox="1"/>
+          <p:nvPr/>
+        </p:nvSpPr>
+        <p:spPr>
+          <a:xfrm>
+            <a:off x="6949440" y="5532120"/>
+            <a:ext cx="4572000" cy="502920"/>
+          </a:xfrm>
+          <a:prstGeom prst="rect">
+            <a:avLst/>
+          </a:prstGeom>
+          <a:noFill/>
+          <a:ln/>
+        </p:spPr>
+        <p:txBody>
+          <a:bodyPr wrap="square" lIns="0" tIns="0" rIns="0" bIns="0" rtlCol="0" anchor="ctr"/>
+          <a:lstStyle/>
+          <a:p>
+            <a:pPr indent="0" marL="0">
+              <a:lnSpc>
+                <a:spcPts val="1400"/>
+              </a:lnSpc>
+              <a:buNone/>
+            </a:pPr>
+            <a:r>
+              <a:rPr lang="en-US" sz="1150" dirty="0">
                 <a:solidFill>
                   <a:srgbClr val="9DB0A6"/>
                 </a:solidFill>
@@ -5011,22 +5424,22 @@
                 <a:ea typeface="Calibri" pitchFamily="34" charset="-122"/>
                 <a:cs typeface="Calibri" pitchFamily="34" charset="-120"/>
               </a:rPr>
-              <a:t>e quantos foram engano</a:t>
-            </a:r>
-            <a:endParaRPr lang="en-US" sz="1200" dirty="0"/>
-          </a:p>
-        </p:txBody>
-      </p:sp>
-      <p:sp>
-        <p:nvSpPr>
-          <p:cNvPr id="16" name="Text 14"/>
-          <p:cNvSpPr txBox="1"/>
-          <p:nvPr/>
-        </p:nvSpPr>
-        <p:spPr>
-          <a:xfrm>
-            <a:off x="8330184" y="4526280"/>
-            <a:ext cx="2880360" cy="411480"/>
+              <a:t>Grupo educacional tem dezenas de unidades e um decisor só. É para ele que custo marginal quase zero é irresistível.</a:t>
+            </a:r>
+            <a:endParaRPr lang="en-US" sz="1150" dirty="0"/>
+          </a:p>
+        </p:txBody>
+      </p:sp>
+      <p:sp>
+        <p:nvSpPr>
+          <p:cNvPr id="33" name="Text 31"/>
+          <p:cNvSpPr txBox="1"/>
+          <p:nvPr/>
+        </p:nvSpPr>
+        <p:spPr>
+          <a:xfrm>
+            <a:off x="6492240" y="5687568"/>
+            <a:ext cx="5029200" cy="365760"/>
           </a:xfrm>
           <a:prstGeom prst="rect">
             <a:avLst/>
@@ -5040,20 +5453,20 @@
           <a:p>
             <a:pPr indent="0" marL="0">
               <a:lnSpc>
-                <a:spcPts val="1200"/>
+                <a:spcPts val="1300"/>
               </a:lnSpc>
               <a:buNone/>
             </a:pPr>
             <a:r>
               <a:rPr lang="en-US" sz="900" dirty="0">
                 <a:solidFill>
-                  <a:srgbClr val="E4572E"/>
+                  <a:srgbClr val="6A7D74"/>
                 </a:solidFill>
                 <a:latin typeface="Courier New" pitchFamily="34" charset="0"/>
                 <a:ea typeface="Courier New" pitchFamily="34" charset="-122"/>
                 <a:cs typeface="Courier New" pitchFamily="34" charset="-120"/>
               </a:rPr>
-              <a:t>fonte: o piloto, e só ele</a:t>
+              <a:t>Modelo: assinatura por escola, não por câmera. Expandir deixa de ser uma nova decisão de compra.</a:t>
             </a:r>
             <a:endParaRPr lang="en-US" sz="900" dirty="0"/>
           </a:p>
@@ -5061,46 +5474,7 @@
       </p:sp>
       <p:sp>
         <p:nvSpPr>
-          <p:cNvPr id="17" name="Text 15"/>
-          <p:cNvSpPr txBox="1"/>
-          <p:nvPr/>
-        </p:nvSpPr>
-        <p:spPr>
-          <a:xfrm>
-            <a:off x="685800" y="5577840"/>
-            <a:ext cx="10515600" cy="411480"/>
-          </a:xfrm>
-          <a:prstGeom prst="rect">
-            <a:avLst/>
-          </a:prstGeom>
-          <a:noFill/>
-          <a:ln/>
-        </p:spPr>
-        <p:txBody>
-          <a:bodyPr wrap="square" lIns="0" tIns="0" rIns="0" bIns="0" rtlCol="0" anchor="ctr"/>
-          <a:lstStyle/>
-          <a:p>
-            <a:pPr indent="0" marL="0">
-              <a:buNone/>
-            </a:pPr>
-            <a:r>
-              <a:rPr lang="en-US" sz="1400" i="1" dirty="0">
-                <a:solidFill>
-                  <a:srgbClr val="9DB0A6"/>
-                </a:solidFill>
-                <a:latin typeface="Calibri" pitchFamily="34" charset="0"/>
-                <a:ea typeface="Calibri" pitchFamily="34" charset="-122"/>
-                <a:cs typeface="Calibri" pitchFamily="34" charset="-120"/>
-              </a:rPr>
-              <a:t>Uma banca pergunta a fonte. “Estimativa nossa” derruba o slide, e com ele o resto da apresentação.</a:t>
-            </a:r>
-            <a:endParaRPr lang="en-US" sz="1400" dirty="0"/>
-          </a:p>
-        </p:txBody>
-      </p:sp>
-      <p:sp>
-        <p:nvSpPr>
-          <p:cNvPr id="18" name="Text 16"/>
+          <p:cNvPr id="35" name="Text 32"/>
           <p:cNvSpPr txBox="1"/>
           <p:nvPr/>
         </p:nvSpPr>
@@ -5139,7 +5513,7 @@
       </p:sp>
       <p:sp>
         <p:nvSpPr>
-          <p:cNvPr id="19" name="Text 17"/>
+          <p:cNvPr id="36" name="Text 33"/>
           <p:cNvSpPr txBox="1"/>
           <p:nvPr/>
         </p:nvSpPr>
@@ -5235,6 +5609,910 @@
             <a:r>
               <a:rPr lang="en-US" sz="1100" spc="200" kern="0" dirty="0">
                 <a:solidFill>
+                  <a:srgbClr val="E4572E"/>
+                </a:solidFill>
+                <a:latin typeface="Courier New" pitchFamily="34" charset="0"/>
+                <a:ea typeface="Courier New" pitchFamily="34" charset="-122"/>
+                <a:cs typeface="Courier New" pitchFamily="34" charset="-120"/>
+              </a:rPr>
+              <a:t>HONESTIDADE INTELECTUAL</a:t>
+            </a:r>
+            <a:endParaRPr lang="en-US" sz="1100" dirty="0"/>
+          </a:p>
+        </p:txBody>
+      </p:sp>
+      <p:sp>
+        <p:nvSpPr>
+          <p:cNvPr id="3" name="Text 1"/>
+          <p:cNvSpPr txBox="1"/>
+          <p:nvPr/>
+        </p:nvSpPr>
+        <p:spPr>
+          <a:xfrm>
+            <a:off x="685800" y="749808"/>
+            <a:ext cx="10820095" cy="1417320"/>
+          </a:xfrm>
+          <a:prstGeom prst="rect">
+            <a:avLst/>
+          </a:prstGeom>
+          <a:noFill/>
+          <a:ln/>
+        </p:spPr>
+        <p:txBody>
+          <a:bodyPr wrap="square" lIns="0" tIns="0" rIns="0" bIns="0" rtlCol="0" anchor="ctr"/>
+          <a:lstStyle/>
+          <a:p>
+            <a:pPr indent="0" marL="0">
+              <a:lnSpc>
+                <a:spcPts val="3800"/>
+              </a:lnSpc>
+              <a:buNone/>
+            </a:pPr>
+            <a:r>
+              <a:rPr lang="en-US" sz="3600" b="1" dirty="0">
+                <a:solidFill>
+                  <a:srgbClr val="EDF3EF"/>
+                </a:solidFill>
+                <a:latin typeface="Arial" pitchFamily="34" charset="0"/>
+                <a:ea typeface="Arial" pitchFamily="34" charset="-122"/>
+                <a:cs typeface="Arial" pitchFamily="34" charset="-120"/>
+              </a:rPr>
+              <a:t>O que ainda não medimos,</a:t>
+            </a:r>
+            <a:endParaRPr lang="en-US" sz="3600" dirty="0"/>
+          </a:p>
+          <a:p>
+            <a:pPr indent="0" marL="0">
+              <a:lnSpc>
+                <a:spcPts val="3800"/>
+              </a:lnSpc>
+              <a:buNone/>
+            </a:pPr>
+            <a:r>
+              <a:rPr lang="en-US" sz="3600" b="1" dirty="0">
+                <a:solidFill>
+                  <a:srgbClr val="EDF3EF"/>
+                </a:solidFill>
+                <a:latin typeface="Arial" pitchFamily="34" charset="0"/>
+                <a:ea typeface="Arial" pitchFamily="34" charset="-122"/>
+                <a:cs typeface="Arial" pitchFamily="34" charset="-120"/>
+              </a:rPr>
+              <a:t>e não vamos inventar.</a:t>
+            </a:r>
+            <a:endParaRPr lang="en-US" sz="3600" dirty="0"/>
+          </a:p>
+        </p:txBody>
+      </p:sp>
+      <p:sp>
+        <p:nvSpPr>
+          <p:cNvPr id="4" name="Text 2"/>
+          <p:cNvSpPr txBox="1"/>
+          <p:nvPr/>
+        </p:nvSpPr>
+        <p:spPr>
+          <a:xfrm>
+            <a:off x="685800" y="2560320"/>
+            <a:ext cx="10515600" cy="731520"/>
+          </a:xfrm>
+          <a:prstGeom prst="rect">
+            <a:avLst/>
+          </a:prstGeom>
+          <a:noFill/>
+          <a:ln/>
+        </p:spPr>
+        <p:txBody>
+          <a:bodyPr wrap="square" lIns="0" tIns="0" rIns="0" bIns="0" rtlCol="0" anchor="ctr"/>
+          <a:lstStyle/>
+          <a:p>
+            <a:pPr indent="0" marL="0">
+              <a:lnSpc>
+                <a:spcPts val="2200"/>
+              </a:lnSpc>
+              <a:buNone/>
+            </a:pPr>
+            <a:r>
+              <a:rPr lang="en-US" sz="1500" dirty="0">
+                <a:solidFill>
+                  <a:srgbClr val="9DB0A6"/>
+                </a:solidFill>
+                <a:latin typeface="Calibri" pitchFamily="34" charset="0"/>
+                <a:ea typeface="Calibri" pitchFamily="34" charset="-122"/>
+                <a:cs typeface="Calibri" pitchFamily="34" charset="-120"/>
+              </a:rPr>
+              <a:t>Quatro coisas que decidem se isto é negócio e se a detecção se sustenta, e que nenhuma planilha nossa pode responder.</a:t>
+            </a:r>
+            <a:endParaRPr lang="en-US" sz="1500" dirty="0"/>
+          </a:p>
+        </p:txBody>
+      </p:sp>
+      <p:sp>
+        <p:nvSpPr>
+          <p:cNvPr id="5" name="Shape 3"/>
+          <p:cNvSpPr/>
+          <p:nvPr/>
+        </p:nvSpPr>
+        <p:spPr>
+          <a:xfrm>
+            <a:off x="685800" y="3200400"/>
+            <a:ext cx="2560320" cy="1920240"/>
+          </a:xfrm>
+          <a:prstGeom prst="roundRect">
+            <a:avLst>
+              <a:gd name="adj" fmla="val 4762"/>
+            </a:avLst>
+          </a:prstGeom>
+          <a:solidFill>
+            <a:srgbClr val="0B100E"/>
+          </a:solidFill>
+          <a:ln w="12700">
+            <a:solidFill>
+              <a:srgbClr val="24322B"/>
+            </a:solidFill>
+            <a:prstDash val="dash"/>
+          </a:ln>
+        </p:spPr>
+      </p:sp>
+      <p:sp>
+        <p:nvSpPr>
+          <p:cNvPr id="6" name="Text 4"/>
+          <p:cNvSpPr txBox="1"/>
+          <p:nvPr/>
+        </p:nvSpPr>
+        <p:spPr>
+          <a:xfrm>
+            <a:off x="905256" y="3438144"/>
+            <a:ext cx="2157984" cy="603504"/>
+          </a:xfrm>
+          <a:prstGeom prst="rect">
+            <a:avLst/>
+          </a:prstGeom>
+          <a:noFill/>
+          <a:ln/>
+        </p:spPr>
+        <p:txBody>
+          <a:bodyPr wrap="square" lIns="0" tIns="0" rIns="0" bIns="0" rtlCol="0" anchor="ctr"/>
+          <a:lstStyle/>
+          <a:p>
+            <a:pPr indent="0" marL="0">
+              <a:lnSpc>
+                <a:spcPts val="1700"/>
+              </a:lnSpc>
+              <a:buNone/>
+            </a:pPr>
+            <a:r>
+              <a:rPr lang="en-US" sz="1350" b="1" dirty="0">
+                <a:solidFill>
+                  <a:srgbClr val="EDF3EF"/>
+                </a:solidFill>
+                <a:latin typeface="Arial" pitchFamily="34" charset="0"/>
+                <a:ea typeface="Arial" pitchFamily="34" charset="-122"/>
+                <a:cs typeface="Arial" pitchFamily="34" charset="-120"/>
+              </a:rPr>
+              <a:t>Quanto uma escola paga hoje</a:t>
+            </a:r>
+            <a:endParaRPr lang="en-US" sz="1350" dirty="0"/>
+          </a:p>
+        </p:txBody>
+      </p:sp>
+      <p:sp>
+        <p:nvSpPr>
+          <p:cNvPr id="7" name="Text 5"/>
+          <p:cNvSpPr txBox="1"/>
+          <p:nvPr/>
+        </p:nvSpPr>
+        <p:spPr>
+          <a:xfrm>
+            <a:off x="905256" y="4096512"/>
+            <a:ext cx="2157984" cy="384048"/>
+          </a:xfrm>
+          <a:prstGeom prst="rect">
+            <a:avLst/>
+          </a:prstGeom>
+          <a:noFill/>
+          <a:ln/>
+        </p:spPr>
+        <p:txBody>
+          <a:bodyPr wrap="square" lIns="0" tIns="0" rIns="0" bIns="0" rtlCol="0" anchor="ctr"/>
+          <a:lstStyle/>
+          <a:p>
+            <a:pPr indent="0" marL="0">
+              <a:lnSpc>
+                <a:spcPts val="1400"/>
+              </a:lnSpc>
+              <a:buNone/>
+            </a:pPr>
+            <a:r>
+              <a:rPr lang="en-US" sz="1150" dirty="0">
+                <a:solidFill>
+                  <a:srgbClr val="9DB0A6"/>
+                </a:solidFill>
+                <a:latin typeface="Calibri" pitchFamily="34" charset="0"/>
+                <a:ea typeface="Calibri" pitchFamily="34" charset="-122"/>
+                <a:cs typeface="Calibri" pitchFamily="34" charset="-120"/>
+              </a:rPr>
+              <a:t>por monitoramento eletrônico</a:t>
+            </a:r>
+            <a:endParaRPr lang="en-US" sz="1150" dirty="0"/>
+          </a:p>
+        </p:txBody>
+      </p:sp>
+      <p:sp>
+        <p:nvSpPr>
+          <p:cNvPr id="8" name="Text 6"/>
+          <p:cNvSpPr txBox="1"/>
+          <p:nvPr/>
+        </p:nvSpPr>
+        <p:spPr>
+          <a:xfrm>
+            <a:off x="905256" y="4553712"/>
+            <a:ext cx="2157984" cy="411480"/>
+          </a:xfrm>
+          <a:prstGeom prst="rect">
+            <a:avLst/>
+          </a:prstGeom>
+          <a:noFill/>
+          <a:ln/>
+        </p:spPr>
+        <p:txBody>
+          <a:bodyPr wrap="square" lIns="0" tIns="0" rIns="0" bIns="0" rtlCol="0" anchor="ctr"/>
+          <a:lstStyle/>
+          <a:p>
+            <a:pPr indent="0" marL="0">
+              <a:lnSpc>
+                <a:spcPts val="1100"/>
+              </a:lnSpc>
+              <a:buNone/>
+            </a:pPr>
+            <a:r>
+              <a:rPr lang="en-US" sz="850" dirty="0">
+                <a:solidFill>
+                  <a:srgbClr val="E4572E"/>
+                </a:solidFill>
+                <a:latin typeface="Courier New" pitchFamily="34" charset="0"/>
+                <a:ea typeface="Courier New" pitchFamily="34" charset="-122"/>
+                <a:cs typeface="Courier New" pitchFamily="34" charset="-120"/>
+              </a:rPr>
+              <a:t>fonte: ligar para três escolas</a:t>
+            </a:r>
+            <a:endParaRPr lang="en-US" sz="850" dirty="0"/>
+          </a:p>
+        </p:txBody>
+      </p:sp>
+      <p:sp>
+        <p:nvSpPr>
+          <p:cNvPr id="9" name="Shape 7"/>
+          <p:cNvSpPr/>
+          <p:nvPr/>
+        </p:nvSpPr>
+        <p:spPr>
+          <a:xfrm>
+            <a:off x="3438144" y="3200400"/>
+            <a:ext cx="2560320" cy="1920240"/>
+          </a:xfrm>
+          <a:prstGeom prst="roundRect">
+            <a:avLst>
+              <a:gd name="adj" fmla="val 4762"/>
+            </a:avLst>
+          </a:prstGeom>
+          <a:solidFill>
+            <a:srgbClr val="0B100E"/>
+          </a:solidFill>
+          <a:ln w="12700">
+            <a:solidFill>
+              <a:srgbClr val="24322B"/>
+            </a:solidFill>
+            <a:prstDash val="dash"/>
+          </a:ln>
+        </p:spPr>
+      </p:sp>
+      <p:sp>
+        <p:nvSpPr>
+          <p:cNvPr id="10" name="Text 8"/>
+          <p:cNvSpPr txBox="1"/>
+          <p:nvPr/>
+        </p:nvSpPr>
+        <p:spPr>
+          <a:xfrm>
+            <a:off x="3657600" y="3438144"/>
+            <a:ext cx="2157984" cy="603504"/>
+          </a:xfrm>
+          <a:prstGeom prst="rect">
+            <a:avLst/>
+          </a:prstGeom>
+          <a:noFill/>
+          <a:ln/>
+        </p:spPr>
+        <p:txBody>
+          <a:bodyPr wrap="square" lIns="0" tIns="0" rIns="0" bIns="0" rtlCol="0" anchor="ctr"/>
+          <a:lstStyle/>
+          <a:p>
+            <a:pPr indent="0" marL="0">
+              <a:lnSpc>
+                <a:spcPts val="1700"/>
+              </a:lnSpc>
+              <a:buNone/>
+            </a:pPr>
+            <a:r>
+              <a:rPr lang="en-US" sz="1350" b="1" dirty="0">
+                <a:solidFill>
+                  <a:srgbClr val="EDF3EF"/>
+                </a:solidFill>
+                <a:latin typeface="Arial" pitchFamily="34" charset="0"/>
+                <a:ea typeface="Arial" pitchFamily="34" charset="-122"/>
+                <a:cs typeface="Arial" pitchFamily="34" charset="-120"/>
+              </a:rPr>
+              <a:t>Quantas escolas no recorte</a:t>
+            </a:r>
+            <a:endParaRPr lang="en-US" sz="1350" dirty="0"/>
+          </a:p>
+        </p:txBody>
+      </p:sp>
+      <p:sp>
+        <p:nvSpPr>
+          <p:cNvPr id="11" name="Text 9"/>
+          <p:cNvSpPr txBox="1"/>
+          <p:nvPr/>
+        </p:nvSpPr>
+        <p:spPr>
+          <a:xfrm>
+            <a:off x="3657600" y="4096512"/>
+            <a:ext cx="2157984" cy="384048"/>
+          </a:xfrm>
+          <a:prstGeom prst="rect">
+            <a:avLst/>
+          </a:prstGeom>
+          <a:noFill/>
+          <a:ln/>
+        </p:spPr>
+        <p:txBody>
+          <a:bodyPr wrap="square" lIns="0" tIns="0" rIns="0" bIns="0" rtlCol="0" anchor="ctr"/>
+          <a:lstStyle/>
+          <a:p>
+            <a:pPr indent="0" marL="0">
+              <a:lnSpc>
+                <a:spcPts val="1400"/>
+              </a:lnSpc>
+              <a:buNone/>
+            </a:pPr>
+            <a:r>
+              <a:rPr lang="en-US" sz="1150" dirty="0">
+                <a:solidFill>
+                  <a:srgbClr val="9DB0A6"/>
+                </a:solidFill>
+                <a:latin typeface="Calibri" pitchFamily="34" charset="0"/>
+                <a:ea typeface="Calibri" pitchFamily="34" charset="-122"/>
+                <a:cs typeface="Calibri" pitchFamily="34" charset="-120"/>
+              </a:rPr>
+              <a:t>rede, município ou grupo</a:t>
+            </a:r>
+            <a:endParaRPr lang="en-US" sz="1150" dirty="0"/>
+          </a:p>
+        </p:txBody>
+      </p:sp>
+      <p:sp>
+        <p:nvSpPr>
+          <p:cNvPr id="12" name="Text 10"/>
+          <p:cNvSpPr txBox="1"/>
+          <p:nvPr/>
+        </p:nvSpPr>
+        <p:spPr>
+          <a:xfrm>
+            <a:off x="3657600" y="4553712"/>
+            <a:ext cx="2157984" cy="411480"/>
+          </a:xfrm>
+          <a:prstGeom prst="rect">
+            <a:avLst/>
+          </a:prstGeom>
+          <a:noFill/>
+          <a:ln/>
+        </p:spPr>
+        <p:txBody>
+          <a:bodyPr wrap="square" lIns="0" tIns="0" rIns="0" bIns="0" rtlCol="0" anchor="ctr"/>
+          <a:lstStyle/>
+          <a:p>
+            <a:pPr indent="0" marL="0">
+              <a:lnSpc>
+                <a:spcPts val="1100"/>
+              </a:lnSpc>
+              <a:buNone/>
+            </a:pPr>
+            <a:r>
+              <a:rPr lang="en-US" sz="850" dirty="0">
+                <a:solidFill>
+                  <a:srgbClr val="E4572E"/>
+                </a:solidFill>
+                <a:latin typeface="Courier New" pitchFamily="34" charset="0"/>
+                <a:ea typeface="Courier New" pitchFamily="34" charset="-122"/>
+                <a:cs typeface="Courier New" pitchFamily="34" charset="-120"/>
+              </a:rPr>
+              <a:t>fonte: Censo Escolar, INEP</a:t>
+            </a:r>
+            <a:endParaRPr lang="en-US" sz="850" dirty="0"/>
+          </a:p>
+        </p:txBody>
+      </p:sp>
+      <p:sp>
+        <p:nvSpPr>
+          <p:cNvPr id="13" name="Shape 11"/>
+          <p:cNvSpPr/>
+          <p:nvPr/>
+        </p:nvSpPr>
+        <p:spPr>
+          <a:xfrm>
+            <a:off x="6190488" y="3200400"/>
+            <a:ext cx="2560320" cy="1920240"/>
+          </a:xfrm>
+          <a:prstGeom prst="roundRect">
+            <a:avLst>
+              <a:gd name="adj" fmla="val 4762"/>
+            </a:avLst>
+          </a:prstGeom>
+          <a:solidFill>
+            <a:srgbClr val="0B100E"/>
+          </a:solidFill>
+          <a:ln w="12700">
+            <a:solidFill>
+              <a:srgbClr val="24322B"/>
+            </a:solidFill>
+            <a:prstDash val="dash"/>
+          </a:ln>
+        </p:spPr>
+      </p:sp>
+      <p:sp>
+        <p:nvSpPr>
+          <p:cNvPr id="14" name="Text 12"/>
+          <p:cNvSpPr txBox="1"/>
+          <p:nvPr/>
+        </p:nvSpPr>
+        <p:spPr>
+          <a:xfrm>
+            <a:off x="6409944" y="3438144"/>
+            <a:ext cx="2157984" cy="603504"/>
+          </a:xfrm>
+          <a:prstGeom prst="rect">
+            <a:avLst/>
+          </a:prstGeom>
+          <a:noFill/>
+          <a:ln/>
+        </p:spPr>
+        <p:txBody>
+          <a:bodyPr wrap="square" lIns="0" tIns="0" rIns="0" bIns="0" rtlCol="0" anchor="ctr"/>
+          <a:lstStyle/>
+          <a:p>
+            <a:pPr indent="0" marL="0">
+              <a:lnSpc>
+                <a:spcPts val="1700"/>
+              </a:lnSpc>
+              <a:buNone/>
+            </a:pPr>
+            <a:r>
+              <a:rPr lang="en-US" sz="1350" b="1" dirty="0">
+                <a:solidFill>
+                  <a:srgbClr val="EDF3EF"/>
+                </a:solidFill>
+                <a:latin typeface="Arial" pitchFamily="34" charset="0"/>
+                <a:ea typeface="Arial" pitchFamily="34" charset="-122"/>
+                <a:cs typeface="Arial" pitchFamily="34" charset="-120"/>
+              </a:rPr>
+              <a:t>Alertas por dia que se aguenta</a:t>
+            </a:r>
+            <a:endParaRPr lang="en-US" sz="1350" dirty="0"/>
+          </a:p>
+        </p:txBody>
+      </p:sp>
+      <p:sp>
+        <p:nvSpPr>
+          <p:cNvPr id="15" name="Text 13"/>
+          <p:cNvSpPr txBox="1"/>
+          <p:nvPr/>
+        </p:nvSpPr>
+        <p:spPr>
+          <a:xfrm>
+            <a:off x="6409944" y="4096512"/>
+            <a:ext cx="2157984" cy="384048"/>
+          </a:xfrm>
+          <a:prstGeom prst="rect">
+            <a:avLst/>
+          </a:prstGeom>
+          <a:noFill/>
+          <a:ln/>
+        </p:spPr>
+        <p:txBody>
+          <a:bodyPr wrap="square" lIns="0" tIns="0" rIns="0" bIns="0" rtlCol="0" anchor="ctr"/>
+          <a:lstStyle/>
+          <a:p>
+            <a:pPr indent="0" marL="0">
+              <a:lnSpc>
+                <a:spcPts val="1400"/>
+              </a:lnSpc>
+              <a:buNone/>
+            </a:pPr>
+            <a:r>
+              <a:rPr lang="en-US" sz="1150" dirty="0">
+                <a:solidFill>
+                  <a:srgbClr val="9DB0A6"/>
+                </a:solidFill>
+                <a:latin typeface="Calibri" pitchFamily="34" charset="0"/>
+                <a:ea typeface="Calibri" pitchFamily="34" charset="-122"/>
+                <a:cs typeface="Calibri" pitchFamily="34" charset="-120"/>
+              </a:rPr>
+              <a:t>e quantos foram engano</a:t>
+            </a:r>
+            <a:endParaRPr lang="en-US" sz="1150" dirty="0"/>
+          </a:p>
+        </p:txBody>
+      </p:sp>
+      <p:sp>
+        <p:nvSpPr>
+          <p:cNvPr id="16" name="Text 14"/>
+          <p:cNvSpPr txBox="1"/>
+          <p:nvPr/>
+        </p:nvSpPr>
+        <p:spPr>
+          <a:xfrm>
+            <a:off x="6409944" y="4553712"/>
+            <a:ext cx="2157984" cy="411480"/>
+          </a:xfrm>
+          <a:prstGeom prst="rect">
+            <a:avLst/>
+          </a:prstGeom>
+          <a:noFill/>
+          <a:ln/>
+        </p:spPr>
+        <p:txBody>
+          <a:bodyPr wrap="square" lIns="0" tIns="0" rIns="0" bIns="0" rtlCol="0" anchor="ctr"/>
+          <a:lstStyle/>
+          <a:p>
+            <a:pPr indent="0" marL="0">
+              <a:lnSpc>
+                <a:spcPts val="1100"/>
+              </a:lnSpc>
+              <a:buNone/>
+            </a:pPr>
+            <a:r>
+              <a:rPr lang="en-US" sz="850" dirty="0">
+                <a:solidFill>
+                  <a:srgbClr val="E4572E"/>
+                </a:solidFill>
+                <a:latin typeface="Courier New" pitchFamily="34" charset="0"/>
+                <a:ea typeface="Courier New" pitchFamily="34" charset="-122"/>
+                <a:cs typeface="Courier New" pitchFamily="34" charset="-120"/>
+              </a:rPr>
+              <a:t>fonte: o piloto, e só ele</a:t>
+            </a:r>
+            <a:endParaRPr lang="en-US" sz="850" dirty="0"/>
+          </a:p>
+        </p:txBody>
+      </p:sp>
+      <p:sp>
+        <p:nvSpPr>
+          <p:cNvPr id="17" name="Shape 15"/>
+          <p:cNvSpPr/>
+          <p:nvPr/>
+        </p:nvSpPr>
+        <p:spPr>
+          <a:xfrm>
+            <a:off x="8942832" y="3200400"/>
+            <a:ext cx="2560320" cy="1920240"/>
+          </a:xfrm>
+          <a:prstGeom prst="roundRect">
+            <a:avLst>
+              <a:gd name="adj" fmla="val 4762"/>
+            </a:avLst>
+          </a:prstGeom>
+          <a:solidFill>
+            <a:srgbClr val="0B100E"/>
+          </a:solidFill>
+          <a:ln w="12700">
+            <a:solidFill>
+              <a:srgbClr val="24322B"/>
+            </a:solidFill>
+            <a:prstDash val="dash"/>
+          </a:ln>
+        </p:spPr>
+      </p:sp>
+      <p:sp>
+        <p:nvSpPr>
+          <p:cNvPr id="18" name="Text 16"/>
+          <p:cNvSpPr txBox="1"/>
+          <p:nvPr/>
+        </p:nvSpPr>
+        <p:spPr>
+          <a:xfrm>
+            <a:off x="9162288" y="3438144"/>
+            <a:ext cx="2157984" cy="603504"/>
+          </a:xfrm>
+          <a:prstGeom prst="rect">
+            <a:avLst/>
+          </a:prstGeom>
+          <a:noFill/>
+          <a:ln/>
+        </p:spPr>
+        <p:txBody>
+          <a:bodyPr wrap="square" lIns="0" tIns="0" rIns="0" bIns="0" rtlCol="0" anchor="ctr"/>
+          <a:lstStyle/>
+          <a:p>
+            <a:pPr indent="0" marL="0">
+              <a:lnSpc>
+                <a:spcPts val="1700"/>
+              </a:lnSpc>
+              <a:buNone/>
+            </a:pPr>
+            <a:r>
+              <a:rPr lang="en-US" sz="1350" b="1" dirty="0">
+                <a:solidFill>
+                  <a:srgbClr val="EDF3EF"/>
+                </a:solidFill>
+                <a:latin typeface="Arial" pitchFamily="34" charset="0"/>
+                <a:ea typeface="Arial" pitchFamily="34" charset="-122"/>
+                <a:cs typeface="Arial" pitchFamily="34" charset="-120"/>
+              </a:rPr>
+              <a:t>Acerto da briga em vídeo real</a:t>
+            </a:r>
+            <a:endParaRPr lang="en-US" sz="1350" dirty="0"/>
+          </a:p>
+        </p:txBody>
+      </p:sp>
+      <p:sp>
+        <p:nvSpPr>
+          <p:cNvPr id="19" name="Text 17"/>
+          <p:cNvSpPr txBox="1"/>
+          <p:nvPr/>
+        </p:nvSpPr>
+        <p:spPr>
+          <a:xfrm>
+            <a:off x="9162288" y="4096512"/>
+            <a:ext cx="2157984" cy="384048"/>
+          </a:xfrm>
+          <a:prstGeom prst="rect">
+            <a:avLst/>
+          </a:prstGeom>
+          <a:noFill/>
+          <a:ln/>
+        </p:spPr>
+        <p:txBody>
+          <a:bodyPr wrap="square" lIns="0" tIns="0" rIns="0" bIns="0" rtlCol="0" anchor="ctr"/>
+          <a:lstStyle/>
+          <a:p>
+            <a:pPr indent="0" marL="0">
+              <a:lnSpc>
+                <a:spcPts val="1400"/>
+              </a:lnSpc>
+              <a:buNone/>
+            </a:pPr>
+            <a:r>
+              <a:rPr lang="en-US" sz="1150" dirty="0">
+                <a:solidFill>
+                  <a:srgbClr val="9DB0A6"/>
+                </a:solidFill>
+                <a:latin typeface="Calibri" pitchFamily="34" charset="0"/>
+                <a:ea typeface="Calibri" pitchFamily="34" charset="-122"/>
+                <a:cs typeface="Calibri" pitchFamily="34" charset="-120"/>
+              </a:rPr>
+              <a:t>hoje é regra, não modelo treinado</a:t>
+            </a:r>
+            <a:endParaRPr lang="en-US" sz="1150" dirty="0"/>
+          </a:p>
+        </p:txBody>
+      </p:sp>
+      <p:sp>
+        <p:nvSpPr>
+          <p:cNvPr id="20" name="Text 18"/>
+          <p:cNvSpPr txBox="1"/>
+          <p:nvPr/>
+        </p:nvSpPr>
+        <p:spPr>
+          <a:xfrm>
+            <a:off x="9162288" y="4553712"/>
+            <a:ext cx="2157984" cy="411480"/>
+          </a:xfrm>
+          <a:prstGeom prst="rect">
+            <a:avLst/>
+          </a:prstGeom>
+          <a:noFill/>
+          <a:ln/>
+        </p:spPr>
+        <p:txBody>
+          <a:bodyPr wrap="square" lIns="0" tIns="0" rIns="0" bIns="0" rtlCol="0" anchor="ctr"/>
+          <a:lstStyle/>
+          <a:p>
+            <a:pPr indent="0" marL="0">
+              <a:lnSpc>
+                <a:spcPts val="1100"/>
+              </a:lnSpc>
+              <a:buNone/>
+            </a:pPr>
+            <a:r>
+              <a:rPr lang="en-US" sz="850" dirty="0">
+                <a:solidFill>
+                  <a:srgbClr val="E4572E"/>
+                </a:solidFill>
+                <a:latin typeface="Courier New" pitchFamily="34" charset="0"/>
+                <a:ea typeface="Courier New" pitchFamily="34" charset="-122"/>
+                <a:cs typeface="Courier New" pitchFamily="34" charset="-120"/>
+              </a:rPr>
+              <a:t>fonte: RWF-2000, 2.000 clipes</a:t>
+            </a:r>
+            <a:endParaRPr lang="en-US" sz="850" dirty="0"/>
+          </a:p>
+        </p:txBody>
+      </p:sp>
+      <p:sp>
+        <p:nvSpPr>
+          <p:cNvPr id="21" name="Text 19"/>
+          <p:cNvSpPr txBox="1"/>
+          <p:nvPr/>
+        </p:nvSpPr>
+        <p:spPr>
+          <a:xfrm>
+            <a:off x="685800" y="5577840"/>
+            <a:ext cx="10515600" cy="411480"/>
+          </a:xfrm>
+          <a:prstGeom prst="rect">
+            <a:avLst/>
+          </a:prstGeom>
+          <a:noFill/>
+          <a:ln/>
+        </p:spPr>
+        <p:txBody>
+          <a:bodyPr wrap="square" lIns="0" tIns="0" rIns="0" bIns="0" rtlCol="0" anchor="ctr"/>
+          <a:lstStyle/>
+          <a:p>
+            <a:pPr indent="0" marL="0">
+              <a:buNone/>
+            </a:pPr>
+            <a:r>
+              <a:rPr lang="en-US" sz="1400" i="1" dirty="0">
+                <a:solidFill>
+                  <a:srgbClr val="9DB0A6"/>
+                </a:solidFill>
+                <a:latin typeface="Calibri" pitchFamily="34" charset="0"/>
+                <a:ea typeface="Calibri" pitchFamily="34" charset="-122"/>
+                <a:cs typeface="Calibri" pitchFamily="34" charset="-120"/>
+              </a:rPr>
+              <a:t>Uma banca pergunta a fonte. “Estimativa nossa” derruba o slide, e com ele o resto da apresentação.</a:t>
+            </a:r>
+            <a:endParaRPr lang="en-US" sz="1400" dirty="0"/>
+          </a:p>
+        </p:txBody>
+      </p:sp>
+      <p:sp>
+        <p:nvSpPr>
+          <p:cNvPr id="22" name="Text 20"/>
+          <p:cNvSpPr txBox="1"/>
+          <p:nvPr/>
+        </p:nvSpPr>
+        <p:spPr>
+          <a:xfrm>
+            <a:off x="685800" y="6291072"/>
+            <a:ext cx="5486400" cy="274320"/>
+          </a:xfrm>
+          <a:prstGeom prst="rect">
+            <a:avLst/>
+          </a:prstGeom>
+          <a:noFill/>
+          <a:ln/>
+        </p:spPr>
+        <p:txBody>
+          <a:bodyPr wrap="square" lIns="0" tIns="0" rIns="0" bIns="0" rtlCol="0" anchor="ctr"/>
+          <a:lstStyle/>
+          <a:p>
+            <a:pPr indent="0" marL="0">
+              <a:buNone/>
+            </a:pPr>
+            <a:r>
+              <a:rPr lang="en-US" sz="900" dirty="0">
+                <a:solidFill>
+                  <a:srgbClr val="6A7D74"/>
+                </a:solidFill>
+                <a:latin typeface="Courier New" pitchFamily="34" charset="0"/>
+                <a:ea typeface="Courier New" pitchFamily="34" charset="-122"/>
+                <a:cs typeface="Courier New" pitchFamily="34" charset="-120"/>
+              </a:rPr>
+              <a:t>Auditix AI  ·  SVATech  ·  grupo 11</a:t>
+            </a:r>
+            <a:endParaRPr lang="en-US" sz="900" dirty="0"/>
+          </a:p>
+        </p:txBody>
+      </p:sp>
+      <p:sp>
+        <p:nvSpPr>
+          <p:cNvPr id="23" name="Text 21"/>
+          <p:cNvSpPr txBox="1"/>
+          <p:nvPr/>
+        </p:nvSpPr>
+        <p:spPr>
+          <a:xfrm>
+            <a:off x="10591495" y="6291072"/>
+            <a:ext cx="914400" cy="274320"/>
+          </a:xfrm>
+          <a:prstGeom prst="rect">
+            <a:avLst/>
+          </a:prstGeom>
+          <a:noFill/>
+          <a:ln/>
+        </p:spPr>
+        <p:txBody>
+          <a:bodyPr wrap="square" lIns="0" tIns="0" rIns="0" bIns="0" rtlCol="0" anchor="ctr"/>
+          <a:lstStyle/>
+          <a:p>
+            <a:pPr algn="r" indent="0" marL="0">
+              <a:buNone/>
+            </a:pPr>
+            <a:r>
+              <a:rPr lang="en-US" sz="900" dirty="0">
+                <a:solidFill>
+                  <a:srgbClr val="6A7D74"/>
+                </a:solidFill>
+                <a:latin typeface="Courier New" pitchFamily="34" charset="0"/>
+                <a:ea typeface="Courier New" pitchFamily="34" charset="-122"/>
+                <a:cs typeface="Courier New" pitchFamily="34" charset="-120"/>
+              </a:rPr>
+              <a:t>13</a:t>
+            </a:r>
+            <a:endParaRPr lang="en-US" sz="900" dirty="0"/>
+          </a:p>
+        </p:txBody>
+      </p:sp>
+    </p:spTree>
+  </p:cSld>
+  <p:clrMapOvr>
+    <a:masterClrMapping/>
+  </p:clrMapOvr>
+</p:sld>
+</file>
+
+<file path=ppt/slides/slide14.xml><?xml version="1.0" encoding="utf-8"?>
+<p:sld xmlns:a="http://schemas.openxmlformats.org/drawingml/2006/main" xmlns:r="http://schemas.openxmlformats.org/officeDocument/2006/relationships" xmlns:p="http://schemas.openxmlformats.org/presentationml/2006/main">
+  <p:cSld name="Slide 14">
+    <p:bg>
+      <p:bgPr>
+        <a:solidFill>
+          <a:srgbClr val="0B100E"/>
+        </a:solidFill>
+      </p:bgPr>
+    </p:bg>
+    <p:spTree>
+      <p:nvGrpSpPr>
+        <p:cNvPr id="1" name=""/>
+        <p:cNvGrpSpPr/>
+        <p:nvPr/>
+      </p:nvGrpSpPr>
+      <p:grpSpPr>
+        <a:xfrm>
+          <a:off x="0" y="0"/>
+          <a:ext cx="0" cy="0"/>
+          <a:chOff x="0" y="0"/>
+          <a:chExt cx="0" cy="0"/>
+        </a:xfrm>
+      </p:grpSpPr>
+      <p:sp>
+        <p:nvSpPr>
+          <p:cNvPr id="2" name="Text 0"/>
+          <p:cNvSpPr txBox="1"/>
+          <p:nvPr/>
+        </p:nvSpPr>
+        <p:spPr>
+          <a:xfrm>
+            <a:off x="685800" y="384048"/>
+            <a:ext cx="10820095" cy="274320"/>
+          </a:xfrm>
+          <a:prstGeom prst="rect">
+            <a:avLst/>
+          </a:prstGeom>
+          <a:noFill/>
+          <a:ln/>
+        </p:spPr>
+        <p:txBody>
+          <a:bodyPr wrap="square" lIns="0" tIns="0" rIns="0" bIns="0" rtlCol="0" anchor="ctr"/>
+          <a:lstStyle/>
+          <a:p>
+            <a:pPr indent="0" marL="0">
+              <a:buNone/>
+            </a:pPr>
+            <a:r>
+              <a:rPr lang="en-US" sz="1100" spc="200" kern="0" dirty="0">
+                <a:solidFill>
                   <a:srgbClr val="3FBF5A"/>
                 </a:solidFill>
                 <a:latin typeface="Courier New" pitchFamily="34" charset="0"/>
@@ -6868,7 +8146,7 @@
                 <a:ea typeface="Arial" pitchFamily="34" charset="-122"/>
                 <a:cs typeface="Arial" pitchFamily="34" charset="-120"/>
               </a:rPr>
-              <a:t>10</a:t>
+              <a:t>11</a:t>
             </a:r>
             <a:endParaRPr lang="en-US" sz="3600" dirty="0"/>
           </a:p>
@@ -6910,7 +8188,7 @@
                 <a:ea typeface="Calibri" pitchFamily="34" charset="-122"/>
                 <a:cs typeface="Calibri" pitchFamily="34" charset="-120"/>
               </a:rPr>
-              <a:t>testes automáticos, do detector ao e-mail</a:t>
+              <a:t>arquivos de teste automático, do detector ao e-mail</a:t>
             </a:r>
             <a:endParaRPr lang="en-US" sz="1200" dirty="0"/>
           </a:p>
@@ -6924,7 +8202,7 @@
         </p:nvSpPr>
         <p:spPr>
           <a:xfrm>
-            <a:off x="685800" y="4343400"/>
+            <a:off x="685800" y="4206240"/>
             <a:ext cx="10789920" cy="0"/>
           </a:xfrm>
           <a:prstGeom prst="line">
@@ -6947,24 +8225,24 @@
         </p:nvSpPr>
         <p:spPr>
           <a:xfrm>
-            <a:off x="685800" y="4416552"/>
-            <a:ext cx="2377440" cy="320040"/>
-          </a:xfrm>
-          <a:prstGeom prst="rect">
-            <a:avLst/>
-          </a:prstGeom>
-          <a:noFill/>
-          <a:ln/>
-        </p:spPr>
-        <p:txBody>
-          <a:bodyPr wrap="square" lIns="0" tIns="0" rIns="0" bIns="0" rtlCol="0" anchor="ctr"/>
-          <a:lstStyle/>
-          <a:p>
-            <a:pPr indent="0" marL="0">
-              <a:buNone/>
-            </a:pPr>
-            <a:r>
-              <a:rPr lang="en-US" sz="1300" b="1" dirty="0">
+            <a:off x="685800" y="4261104"/>
+            <a:ext cx="2377440" cy="292608"/>
+          </a:xfrm>
+          <a:prstGeom prst="rect">
+            <a:avLst/>
+          </a:prstGeom>
+          <a:noFill/>
+          <a:ln/>
+        </p:spPr>
+        <p:txBody>
+          <a:bodyPr wrap="square" lIns="0" tIns="0" rIns="0" bIns="0" rtlCol="0" anchor="ctr"/>
+          <a:lstStyle/>
+          <a:p>
+            <a:pPr indent="0" marL="0">
+              <a:buNone/>
+            </a:pPr>
+            <a:r>
+              <a:rPr lang="en-US" sz="1250" b="1" dirty="0">
                 <a:solidFill>
                   <a:srgbClr val="EDF3EF"/>
                 </a:solidFill>
@@ -6974,7 +8252,7 @@
               </a:rPr>
               <a:t>Sala auditada</a:t>
             </a:r>
-            <a:endParaRPr lang="en-US" sz="1300" dirty="0"/>
+            <a:endParaRPr lang="en-US" sz="1250" dirty="0"/>
           </a:p>
         </p:txBody>
       </p:sp>
@@ -6986,24 +8264,24 @@
         </p:nvSpPr>
         <p:spPr>
           <a:xfrm>
-            <a:off x="3200400" y="4416552"/>
-            <a:ext cx="8229600" cy="320040"/>
-          </a:xfrm>
-          <a:prstGeom prst="rect">
-            <a:avLst/>
-          </a:prstGeom>
-          <a:noFill/>
-          <a:ln/>
-        </p:spPr>
-        <p:txBody>
-          <a:bodyPr wrap="square" lIns="0" tIns="0" rIns="0" bIns="0" rtlCol="0" anchor="ctr"/>
-          <a:lstStyle/>
-          <a:p>
-            <a:pPr indent="0" marL="0">
-              <a:buNone/>
-            </a:pPr>
-            <a:r>
-              <a:rPr lang="en-US" sz="1250" dirty="0">
+            <a:off x="3200400" y="4261104"/>
+            <a:ext cx="8229600" cy="292608"/>
+          </a:xfrm>
+          <a:prstGeom prst="rect">
+            <a:avLst/>
+          </a:prstGeom>
+          <a:noFill/>
+          <a:ln/>
+        </p:spPr>
+        <p:txBody>
+          <a:bodyPr wrap="square" lIns="0" tIns="0" rIns="0" bIns="0" rtlCol="0" anchor="ctr"/>
+          <a:lstStyle/>
+          <a:p>
+            <a:pPr indent="0" marL="0">
+              <a:buNone/>
+            </a:pPr>
+            <a:r>
+              <a:rPr lang="en-US" sz="1200" dirty="0">
                 <a:solidFill>
                   <a:srgbClr val="9DB0A6"/>
                 </a:solidFill>
@@ -7011,9 +8289,9 @@
                 <a:ea typeface="Calibri" pitchFamily="34" charset="-122"/>
                 <a:cs typeface="Calibri" pitchFamily="34" charset="-120"/>
               </a:rPr>
-              <a:t>Pose de até 6 pessoas, linha do chão calibrável, e um alerta por queda, não dezenove.</a:t>
-            </a:r>
-            <a:endParaRPr lang="en-US" sz="1250" dirty="0"/>
+              <a:t>Pose de até 6 pessoas, linha do chão calibrável, e um alerta por episódio, não dezenove.</a:t>
+            </a:r>
+            <a:endParaRPr lang="en-US" sz="1200" dirty="0"/>
           </a:p>
         </p:txBody>
       </p:sp>
@@ -7025,7 +8303,7 @@
         </p:nvSpPr>
         <p:spPr>
           <a:xfrm>
-            <a:off x="685800" y="4818888"/>
+            <a:off x="685800" y="4590288"/>
             <a:ext cx="10789920" cy="0"/>
           </a:xfrm>
           <a:prstGeom prst="line">
@@ -7048,24 +8326,24 @@
         </p:nvSpPr>
         <p:spPr>
           <a:xfrm>
-            <a:off x="685800" y="4892040"/>
-            <a:ext cx="2377440" cy="320040"/>
-          </a:xfrm>
-          <a:prstGeom prst="rect">
-            <a:avLst/>
-          </a:prstGeom>
-          <a:noFill/>
-          <a:ln/>
-        </p:spPr>
-        <p:txBody>
-          <a:bodyPr wrap="square" lIns="0" tIns="0" rIns="0" bIns="0" rtlCol="0" anchor="ctr"/>
-          <a:lstStyle/>
-          <a:p>
-            <a:pPr indent="0" marL="0">
-              <a:buNone/>
-            </a:pPr>
-            <a:r>
-              <a:rPr lang="en-US" sz="1300" b="1" dirty="0">
+            <a:off x="685800" y="4645152"/>
+            <a:ext cx="2377440" cy="292608"/>
+          </a:xfrm>
+          <a:prstGeom prst="rect">
+            <a:avLst/>
+          </a:prstGeom>
+          <a:noFill/>
+          <a:ln/>
+        </p:spPr>
+        <p:txBody>
+          <a:bodyPr wrap="square" lIns="0" tIns="0" rIns="0" bIns="0" rtlCol="0" anchor="ctr"/>
+          <a:lstStyle/>
+          <a:p>
+            <a:pPr indent="0" marL="0">
+              <a:buNone/>
+            </a:pPr>
+            <a:r>
+              <a:rPr lang="en-US" sz="1250" b="1" dirty="0">
                 <a:solidFill>
                   <a:srgbClr val="EDF3EF"/>
                 </a:solidFill>
@@ -7073,9 +8351,9 @@
                 <a:ea typeface="Arial" pitchFamily="34" charset="-122"/>
                 <a:cs typeface="Arial" pitchFamily="34" charset="-120"/>
               </a:rPr>
-              <a:t>Câmera IP</a:t>
-            </a:r>
-            <a:endParaRPr lang="en-US" sz="1300" dirty="0"/>
+              <a:t>Três medidas</a:t>
+            </a:r>
+            <a:endParaRPr lang="en-US" sz="1250" dirty="0"/>
           </a:p>
         </p:txBody>
       </p:sp>
@@ -7087,24 +8365,24 @@
         </p:nvSpPr>
         <p:spPr>
           <a:xfrm>
-            <a:off x="3200400" y="4892040"/>
-            <a:ext cx="8229600" cy="320040"/>
-          </a:xfrm>
-          <a:prstGeom prst="rect">
-            <a:avLst/>
-          </a:prstGeom>
-          <a:noFill/>
-          <a:ln/>
-        </p:spPr>
-        <p:txBody>
-          <a:bodyPr wrap="square" lIns="0" tIns="0" rIns="0" bIns="0" rtlCol="0" anchor="ctr"/>
-          <a:lstStyle/>
-          <a:p>
-            <a:pPr indent="0" marL="0">
-              <a:buNone/>
-            </a:pPr>
-            <a:r>
-              <a:rPr lang="en-US" sz="1250" dirty="0">
+            <a:off x="3200400" y="4645152"/>
+            <a:ext cx="8229600" cy="292608"/>
+          </a:xfrm>
+          <a:prstGeom prst="rect">
+            <a:avLst/>
+          </a:prstGeom>
+          <a:noFill/>
+          <a:ln/>
+        </p:spPr>
+        <p:txBody>
+          <a:bodyPr wrap="square" lIns="0" tIns="0" rIns="0" bIns="0" rtlCol="0" anchor="ctr"/>
+          <a:lstStyle/>
+          <a:p>
+            <a:pPr indent="0" marL="0">
+              <a:buNone/>
+            </a:pPr>
+            <a:r>
+              <a:rPr lang="en-US" sz="1200" dirty="0">
                 <a:solidFill>
                   <a:srgbClr val="9DB0A6"/>
                 </a:solidFill>
@@ -7112,9 +8390,9 @@
                 <a:ea typeface="Calibri" pitchFamily="34" charset="-122"/>
                 <a:cs typeface="Calibri" pitchFamily="34" charset="-120"/>
               </a:rPr>
-              <a:t>RTSP para ponte local para WebRTC. Fração de segundo de atraso, e a imagem não sai da escola.</a:t>
-            </a:r>
-            <a:endParaRPr lang="en-US" sz="1250" dirty="0"/>
+              <a:t>Queda por rede treinada. Corrida e briga por regra, e a tela diz qual é qual.</a:t>
+            </a:r>
+            <a:endParaRPr lang="en-US" sz="1200" dirty="0"/>
           </a:p>
         </p:txBody>
       </p:sp>
@@ -7126,7 +8404,7 @@
         </p:nvSpPr>
         <p:spPr>
           <a:xfrm>
-            <a:off x="685800" y="5294376"/>
+            <a:off x="685800" y="4974336"/>
             <a:ext cx="10789920" cy="0"/>
           </a:xfrm>
           <a:prstGeom prst="line">
@@ -7149,24 +8427,24 @@
         </p:nvSpPr>
         <p:spPr>
           <a:xfrm>
-            <a:off x="685800" y="5367528"/>
-            <a:ext cx="2377440" cy="320040"/>
-          </a:xfrm>
-          <a:prstGeom prst="rect">
-            <a:avLst/>
-          </a:prstGeom>
-          <a:noFill/>
-          <a:ln/>
-        </p:spPr>
-        <p:txBody>
-          <a:bodyPr wrap="square" lIns="0" tIns="0" rIns="0" bIns="0" rtlCol="0" anchor="ctr"/>
-          <a:lstStyle/>
-          <a:p>
-            <a:pPr indent="0" marL="0">
-              <a:buNone/>
-            </a:pPr>
-            <a:r>
-              <a:rPr lang="en-US" sz="1300" b="1" dirty="0">
+            <a:off x="685800" y="5029200"/>
+            <a:ext cx="2377440" cy="292608"/>
+          </a:xfrm>
+          <a:prstGeom prst="rect">
+            <a:avLst/>
+          </a:prstGeom>
+          <a:noFill/>
+          <a:ln/>
+        </p:spPr>
+        <p:txBody>
+          <a:bodyPr wrap="square" lIns="0" tIns="0" rIns="0" bIns="0" rtlCol="0" anchor="ctr"/>
+          <a:lstStyle/>
+          <a:p>
+            <a:pPr indent="0" marL="0">
+              <a:buNone/>
+            </a:pPr>
+            <a:r>
+              <a:rPr lang="en-US" sz="1250" b="1" dirty="0">
                 <a:solidFill>
                   <a:srgbClr val="EDF3EF"/>
                 </a:solidFill>
@@ -7174,9 +8452,9 @@
                 <a:ea typeface="Arial" pitchFamily="34" charset="-122"/>
                 <a:cs typeface="Arial" pitchFamily="34" charset="-120"/>
               </a:rPr>
-              <a:t>Dashboard</a:t>
-            </a:r>
-            <a:endParaRPr lang="en-US" sz="1300" dirty="0"/>
+              <a:t>Câmera IP</a:t>
+            </a:r>
+            <a:endParaRPr lang="en-US" sz="1250" dirty="0"/>
           </a:p>
         </p:txBody>
       </p:sp>
@@ -7188,24 +8466,24 @@
         </p:nvSpPr>
         <p:spPr>
           <a:xfrm>
-            <a:off x="3200400" y="5367528"/>
-            <a:ext cx="8229600" cy="320040"/>
-          </a:xfrm>
-          <a:prstGeom prst="rect">
-            <a:avLst/>
-          </a:prstGeom>
-          <a:noFill/>
-          <a:ln/>
-        </p:spPr>
-        <p:txBody>
-          <a:bodyPr wrap="square" lIns="0" tIns="0" rIns="0" bIns="0" rtlCol="0" anchor="ctr"/>
-          <a:lstStyle/>
-          <a:p>
-            <a:pPr indent="0" marL="0">
-              <a:buNone/>
-            </a:pPr>
-            <a:r>
-              <a:rPr lang="en-US" sz="1250" dirty="0">
+            <a:off x="3200400" y="5029200"/>
+            <a:ext cx="8229600" cy="292608"/>
+          </a:xfrm>
+          <a:prstGeom prst="rect">
+            <a:avLst/>
+          </a:prstGeom>
+          <a:noFill/>
+          <a:ln/>
+        </p:spPr>
+        <p:txBody>
+          <a:bodyPr wrap="square" lIns="0" tIns="0" rIns="0" bIns="0" rtlCol="0" anchor="ctr"/>
+          <a:lstStyle/>
+          <a:p>
+            <a:pPr indent="0" marL="0">
+              <a:buNone/>
+            </a:pPr>
+            <a:r>
+              <a:rPr lang="en-US" sz="1200" dirty="0">
                 <a:solidFill>
                   <a:srgbClr val="9DB0A6"/>
                 </a:solidFill>
@@ -7213,9 +8491,9 @@
                 <a:ea typeface="Calibri" pitchFamily="34" charset="-122"/>
                 <a:cs typeface="Calibri" pitchFamily="34" charset="-120"/>
               </a:rPr>
-              <a:t>Integridade da cadeia, série por dia, mapa de ocupação e quem sumiu.</a:t>
-            </a:r>
-            <a:endParaRPr lang="en-US" sz="1250" dirty="0"/>
+              <a:t>RTSP para ponte local para WebRTC. Fração de segundo de atraso, e a imagem não sai da escola.</a:t>
+            </a:r>
+            <a:endParaRPr lang="en-US" sz="1200" dirty="0"/>
           </a:p>
         </p:txBody>
       </p:sp>
@@ -7227,7 +8505,7 @@
         </p:nvSpPr>
         <p:spPr>
           <a:xfrm>
-            <a:off x="685800" y="5769864"/>
+            <a:off x="685800" y="5358384"/>
             <a:ext cx="10789920" cy="0"/>
           </a:xfrm>
           <a:prstGeom prst="line">
@@ -7250,24 +8528,24 @@
         </p:nvSpPr>
         <p:spPr>
           <a:xfrm>
-            <a:off x="685800" y="5843016"/>
-            <a:ext cx="2377440" cy="320040"/>
-          </a:xfrm>
-          <a:prstGeom prst="rect">
-            <a:avLst/>
-          </a:prstGeom>
-          <a:noFill/>
-          <a:ln/>
-        </p:spPr>
-        <p:txBody>
-          <a:bodyPr wrap="square" lIns="0" tIns="0" rIns="0" bIns="0" rtlCol="0" anchor="ctr"/>
-          <a:lstStyle/>
-          <a:p>
-            <a:pPr indent="0" marL="0">
-              <a:buNone/>
-            </a:pPr>
-            <a:r>
-              <a:rPr lang="en-US" sz="1300" b="1" dirty="0">
+            <a:off x="685800" y="5413248"/>
+            <a:ext cx="2377440" cy="292608"/>
+          </a:xfrm>
+          <a:prstGeom prst="rect">
+            <a:avLst/>
+          </a:prstGeom>
+          <a:noFill/>
+          <a:ln/>
+        </p:spPr>
+        <p:txBody>
+          <a:bodyPr wrap="square" lIns="0" tIns="0" rIns="0" bIns="0" rtlCol="0" anchor="ctr"/>
+          <a:lstStyle/>
+          <a:p>
+            <a:pPr indent="0" marL="0">
+              <a:buNone/>
+            </a:pPr>
+            <a:r>
+              <a:rPr lang="en-US" sz="1250" b="1" dirty="0">
                 <a:solidFill>
                   <a:srgbClr val="EDF3EF"/>
                 </a:solidFill>
@@ -7275,9 +8553,9 @@
                 <a:ea typeface="Arial" pitchFamily="34" charset="-122"/>
                 <a:cs typeface="Arial" pitchFamily="34" charset="-120"/>
               </a:rPr>
-              <a:t>Aviso</a:t>
-            </a:r>
-            <a:endParaRPr lang="en-US" sz="1300" dirty="0"/>
+              <a:t>Dashboard</a:t>
+            </a:r>
+            <a:endParaRPr lang="en-US" sz="1250" dirty="0"/>
           </a:p>
         </p:txBody>
       </p:sp>
@@ -7289,24 +8567,24 @@
         </p:nvSpPr>
         <p:spPr>
           <a:xfrm>
-            <a:off x="3200400" y="5843016"/>
-            <a:ext cx="8229600" cy="320040"/>
-          </a:xfrm>
-          <a:prstGeom prst="rect">
-            <a:avLst/>
-          </a:prstGeom>
-          <a:noFill/>
-          <a:ln/>
-        </p:spPr>
-        <p:txBody>
-          <a:bodyPr wrap="square" lIns="0" tIns="0" rIns="0" bIns="0" rtlCol="0" anchor="ctr"/>
-          <a:lstStyle/>
-          <a:p>
-            <a:pPr indent="0" marL="0">
-              <a:buNone/>
-            </a:pPr>
-            <a:r>
-              <a:rPr lang="en-US" sz="1250" dirty="0">
+            <a:off x="3200400" y="5413248"/>
+            <a:ext cx="8229600" cy="292608"/>
+          </a:xfrm>
+          <a:prstGeom prst="rect">
+            <a:avLst/>
+          </a:prstGeom>
+          <a:noFill/>
+          <a:ln/>
+        </p:spPr>
+        <p:txBody>
+          <a:bodyPr wrap="square" lIns="0" tIns="0" rIns="0" bIns="0" rtlCol="0" anchor="ctr"/>
+          <a:lstStyle/>
+          <a:p>
+            <a:pPr indent="0" marL="0">
+              <a:buNone/>
+            </a:pPr>
+            <a:r>
+              <a:rPr lang="en-US" sz="1200" dirty="0">
                 <a:solidFill>
                   <a:srgbClr val="9DB0A6"/>
                 </a:solidFill>
@@ -7314,15 +8592,116 @@
                 <a:ea typeface="Calibri" pitchFamily="34" charset="-122"/>
                 <a:cs typeface="Calibri" pitchFamily="34" charset="-120"/>
               </a:rPr>
+              <a:t>Integridade da cadeia, série por dia, mapa de ocupação e quem sumiu.</a:t>
+            </a:r>
+            <a:endParaRPr lang="en-US" sz="1200" dirty="0"/>
+          </a:p>
+        </p:txBody>
+      </p:sp>
+      <p:sp>
+        <p:nvSpPr>
+          <p:cNvPr id="29" name="Shape 27"/>
+          <p:cNvSpPr/>
+          <p:nvPr/>
+        </p:nvSpPr>
+        <p:spPr>
+          <a:xfrm>
+            <a:off x="685800" y="5742432"/>
+            <a:ext cx="10789920" cy="0"/>
+          </a:xfrm>
+          <a:prstGeom prst="line">
+            <a:avLst/>
+          </a:prstGeom>
+          <a:noFill/>
+          <a:ln w="12700">
+            <a:solidFill>
+              <a:srgbClr val="24322B"/>
+            </a:solidFill>
+            <a:prstDash val="solid"/>
+          </a:ln>
+        </p:spPr>
+      </p:sp>
+      <p:sp>
+        <p:nvSpPr>
+          <p:cNvPr id="30" name="Text 28"/>
+          <p:cNvSpPr txBox="1"/>
+          <p:nvPr/>
+        </p:nvSpPr>
+        <p:spPr>
+          <a:xfrm>
+            <a:off x="685800" y="5797296"/>
+            <a:ext cx="2377440" cy="292608"/>
+          </a:xfrm>
+          <a:prstGeom prst="rect">
+            <a:avLst/>
+          </a:prstGeom>
+          <a:noFill/>
+          <a:ln/>
+        </p:spPr>
+        <p:txBody>
+          <a:bodyPr wrap="square" lIns="0" tIns="0" rIns="0" bIns="0" rtlCol="0" anchor="ctr"/>
+          <a:lstStyle/>
+          <a:p>
+            <a:pPr indent="0" marL="0">
+              <a:buNone/>
+            </a:pPr>
+            <a:r>
+              <a:rPr lang="en-US" sz="1250" b="1" dirty="0">
+                <a:solidFill>
+                  <a:srgbClr val="EDF3EF"/>
+                </a:solidFill>
+                <a:latin typeface="Arial" pitchFamily="34" charset="0"/>
+                <a:ea typeface="Arial" pitchFamily="34" charset="-122"/>
+                <a:cs typeface="Arial" pitchFamily="34" charset="-120"/>
+              </a:rPr>
+              <a:t>Aviso</a:t>
+            </a:r>
+            <a:endParaRPr lang="en-US" sz="1250" dirty="0"/>
+          </a:p>
+        </p:txBody>
+      </p:sp>
+      <p:sp>
+        <p:nvSpPr>
+          <p:cNvPr id="31" name="Text 29"/>
+          <p:cNvSpPr txBox="1"/>
+          <p:nvPr/>
+        </p:nvSpPr>
+        <p:spPr>
+          <a:xfrm>
+            <a:off x="3200400" y="5797296"/>
+            <a:ext cx="8229600" cy="292608"/>
+          </a:xfrm>
+          <a:prstGeom prst="rect">
+            <a:avLst/>
+          </a:prstGeom>
+          <a:noFill/>
+          <a:ln/>
+        </p:spPr>
+        <p:txBody>
+          <a:bodyPr wrap="square" lIns="0" tIns="0" rIns="0" bIns="0" rtlCol="0" anchor="ctr"/>
+          <a:lstStyle/>
+          <a:p>
+            <a:pPr indent="0" marL="0">
+              <a:buNone/>
+            </a:pPr>
+            <a:r>
+              <a:rPr lang="en-US" sz="1200" dirty="0">
+                <a:solidFill>
+                  <a:srgbClr val="9DB0A6"/>
+                </a:solidFill>
+                <a:latin typeface="Calibri" pitchFamily="34" charset="0"/>
+                <a:ea typeface="Calibri" pitchFamily="34" charset="-122"/>
+                <a:cs typeface="Calibri" pitchFamily="34" charset="-120"/>
+              </a:rPr>
               <a:t>E-mail em segundos, com espera mínima entre avisos para a caixa continuar sendo lida.</a:t>
             </a:r>
-            <a:endParaRPr lang="en-US" sz="1250" dirty="0"/>
-          </a:p>
-        </p:txBody>
-      </p:sp>
-      <p:sp>
-        <p:nvSpPr>
-          <p:cNvPr id="29" name="Text 27"/>
+            <a:endParaRPr lang="en-US" sz="1200" dirty="0"/>
+          </a:p>
+        </p:txBody>
+      </p:sp>
+      <p:sp>
+        <p:nvSpPr>
+          <p:cNvPr id="32" name="Text 30"/>
           <p:cNvSpPr txBox="1"/>
           <p:nvPr/>
         </p:nvSpPr>
@@ -7361,7 +8740,7 @@
       </p:sp>
       <p:sp>
         <p:nvSpPr>
-          <p:cNvPr id="30" name="Text 28"/>
+          <p:cNvPr id="33" name="Text 31"/>
           <p:cNvSpPr txBox="1"/>
           <p:nvPr/>
         </p:nvSpPr>
@@ -9916,13 +11295,13 @@
             <a:r>
               <a:rPr lang="en-US" sz="1100" spc="200" kern="0" dirty="0">
                 <a:solidFill>
-                  <a:srgbClr val="3FBF5A"/>
+                  <a:srgbClr val="E4572E"/>
                 </a:solidFill>
                 <a:latin typeface="Courier New" pitchFamily="34" charset="0"/>
                 <a:ea typeface="Courier New" pitchFamily="34" charset="-122"/>
                 <a:cs typeface="Courier New" pitchFamily="34" charset="-120"/>
               </a:rPr>
-              <a:t>DO CHÃO À CAIXA DE ENTRADA</a:t>
+              <a:t>AGOSTO DE 2026</a:t>
             </a:r>
             <a:endParaRPr lang="en-US" sz="1100" dirty="0"/>
           </a:p>
@@ -9964,31 +11343,167 @@
                 <a:ea typeface="Arial" pitchFamily="34" charset="-122"/>
                 <a:cs typeface="Arial" pitchFamily="34" charset="-120"/>
               </a:rPr>
-              <a:t>Segundos, não turnos.</a:t>
+              <a:t>A ANPD já suspendeu</a:t>
             </a:r>
             <a:endParaRPr lang="en-US" sz="3600" dirty="0"/>
           </a:p>
-        </p:txBody>
-      </p:sp>
-      <p:sp>
-        <p:nvSpPr>
-          <p:cNvPr id="4" name="Shape 2"/>
+          <a:p>
+            <a:pPr indent="0" marL="0">
+              <a:lnSpc>
+                <a:spcPts val="3800"/>
+              </a:lnSpc>
+              <a:buNone/>
+            </a:pPr>
+            <a:r>
+              <a:rPr lang="en-US" sz="3600" b="1" dirty="0">
+                <a:solidFill>
+                  <a:srgbClr val="EDF3EF"/>
+                </a:solidFill>
+                <a:latin typeface="Arial" pitchFamily="34" charset="0"/>
+                <a:ea typeface="Arial" pitchFamily="34" charset="-122"/>
+                <a:cs typeface="Arial" pitchFamily="34" charset="-120"/>
+              </a:rPr>
+              <a:t>o caminho que não seguimos.</a:t>
+            </a:r>
+            <a:endParaRPr lang="en-US" sz="3600" dirty="0"/>
+          </a:p>
+        </p:txBody>
+      </p:sp>
+      <p:sp>
+        <p:nvSpPr>
+          <p:cNvPr id="4" name="Text 2"/>
+          <p:cNvSpPr txBox="1"/>
+          <p:nvPr/>
+        </p:nvSpPr>
+        <p:spPr>
+          <a:xfrm>
+            <a:off x="685800" y="2212848"/>
+            <a:ext cx="10515600" cy="868680"/>
+          </a:xfrm>
+          <a:prstGeom prst="rect">
+            <a:avLst/>
+          </a:prstGeom>
+          <a:noFill/>
+          <a:ln/>
+        </p:spPr>
+        <p:txBody>
+          <a:bodyPr wrap="square" lIns="0" tIns="0" rIns="0" bIns="0" rtlCol="0" anchor="ctr"/>
+          <a:lstStyle/>
+          <a:p>
+            <a:pPr indent="0" marL="0">
+              <a:lnSpc>
+                <a:spcPts val="2200"/>
+              </a:lnSpc>
+              <a:buNone/>
+            </a:pPr>
+            <a:r>
+              <a:rPr lang="en-US" sz="1500" dirty="0">
+                <a:solidFill>
+                  <a:srgbClr val="9DB0A6"/>
+                </a:solidFill>
+                <a:latin typeface="Calibri" pitchFamily="34" charset="0"/>
+                <a:ea typeface="Calibri" pitchFamily="34" charset="-122"/>
+                <a:cs typeface="Calibri" pitchFamily="34" charset="-120"/>
+              </a:rPr>
+              <a:t>O maior sistema de IA em escola do Brasil, com mais de 1.700 escolas e cerca de 1 milhão de alunos por dia, foi suspenso por tratar biometria de criança. A agência classificou isso como atividade de alto risco. As cinco falhas apontadas são as cinco perguntas que o Auditix já responde.</a:t>
+            </a:r>
+            <a:endParaRPr lang="en-US" sz="1500" dirty="0"/>
+          </a:p>
+        </p:txBody>
+      </p:sp>
+      <p:sp>
+        <p:nvSpPr>
+          <p:cNvPr id="5" name="Text 3"/>
+          <p:cNvSpPr txBox="1"/>
+          <p:nvPr/>
+        </p:nvSpPr>
+        <p:spPr>
+          <a:xfrm>
+            <a:off x="685800" y="3200400"/>
+            <a:ext cx="4114800" cy="237744"/>
+          </a:xfrm>
+          <a:prstGeom prst="rect">
+            <a:avLst/>
+          </a:prstGeom>
+          <a:noFill/>
+          <a:ln/>
+        </p:spPr>
+        <p:txBody>
+          <a:bodyPr wrap="square" lIns="0" tIns="0" rIns="0" bIns="0" rtlCol="0" anchor="ctr"/>
+          <a:lstStyle/>
+          <a:p>
+            <a:pPr indent="0" marL="0">
+              <a:buNone/>
+            </a:pPr>
+            <a:r>
+              <a:rPr lang="en-US" sz="950" spc="150" kern="0" dirty="0">
+                <a:solidFill>
+                  <a:srgbClr val="6A7D74"/>
+                </a:solidFill>
+                <a:latin typeface="Courier New" pitchFamily="34" charset="0"/>
+                <a:ea typeface="Courier New" pitchFamily="34" charset="-122"/>
+                <a:cs typeface="Courier New" pitchFamily="34" charset="-120"/>
+              </a:rPr>
+              <a:t>O QUE A ANPD APONTOU</a:t>
+            </a:r>
+            <a:endParaRPr lang="en-US" sz="950" dirty="0"/>
+          </a:p>
+        </p:txBody>
+      </p:sp>
+      <p:sp>
+        <p:nvSpPr>
+          <p:cNvPr id="6" name="Text 4"/>
+          <p:cNvSpPr txBox="1"/>
+          <p:nvPr/>
+        </p:nvSpPr>
+        <p:spPr>
+          <a:xfrm>
+            <a:off x="5212080" y="3200400"/>
+            <a:ext cx="5943600" cy="237744"/>
+          </a:xfrm>
+          <a:prstGeom prst="rect">
+            <a:avLst/>
+          </a:prstGeom>
+          <a:noFill/>
+          <a:ln/>
+        </p:spPr>
+        <p:txBody>
+          <a:bodyPr wrap="square" lIns="0" tIns="0" rIns="0" bIns="0" rtlCol="0" anchor="ctr"/>
+          <a:lstStyle/>
+          <a:p>
+            <a:pPr indent="0" marL="0">
+              <a:buNone/>
+            </a:pPr>
+            <a:r>
+              <a:rPr lang="en-US" sz="950" spc="150" kern="0" dirty="0">
+                <a:solidFill>
+                  <a:srgbClr val="3FBF5A"/>
+                </a:solidFill>
+                <a:latin typeface="Courier New" pitchFamily="34" charset="0"/>
+                <a:ea typeface="Courier New" pitchFamily="34" charset="-122"/>
+                <a:cs typeface="Courier New" pitchFamily="34" charset="-120"/>
+              </a:rPr>
+              <a:t>O QUE O AUDITIX FAZ</a:t>
+            </a:r>
+            <a:endParaRPr lang="en-US" sz="950" dirty="0"/>
+          </a:p>
+        </p:txBody>
+      </p:sp>
+      <p:sp>
+        <p:nvSpPr>
+          <p:cNvPr id="7" name="Shape 5"/>
           <p:cNvSpPr/>
           <p:nvPr/>
         </p:nvSpPr>
         <p:spPr>
           <a:xfrm>
-            <a:off x="685800" y="2606040"/>
-            <a:ext cx="3410712" cy="2514600"/>
-          </a:xfrm>
-          <a:prstGeom prst="roundRect">
-            <a:avLst>
-              <a:gd name="adj" fmla="val 3636"/>
-            </a:avLst>
-          </a:prstGeom>
-          <a:solidFill>
-            <a:srgbClr val="17211C"/>
-          </a:solidFill>
+            <a:off x="685800" y="3511296"/>
+            <a:ext cx="10817352" cy="0"/>
+          </a:xfrm>
+          <a:prstGeom prst="line">
+            <a:avLst/>
+          </a:prstGeom>
+          <a:noFill/>
           <a:ln w="12700">
             <a:solidFill>
               <a:srgbClr val="24322B"/>
@@ -9999,92 +11514,14 @@
       </p:sp>
       <p:sp>
         <p:nvSpPr>
-          <p:cNvPr id="5" name="Text 3"/>
-          <p:cNvSpPr txBox="1"/>
-          <p:nvPr/>
-        </p:nvSpPr>
-        <p:spPr>
-          <a:xfrm>
-            <a:off x="941832" y="2816352"/>
-            <a:ext cx="2926080" cy="228600"/>
-          </a:xfrm>
-          <a:prstGeom prst="rect">
-            <a:avLst/>
-          </a:prstGeom>
-          <a:noFill/>
-          <a:ln/>
-        </p:spPr>
-        <p:txBody>
-          <a:bodyPr wrap="square" lIns="0" tIns="0" rIns="0" bIns="0" rtlCol="0" anchor="ctr"/>
-          <a:lstStyle/>
-          <a:p>
-            <a:pPr indent="0" marL="0">
-              <a:buNone/>
-            </a:pPr>
-            <a:r>
-              <a:rPr lang="en-US" sz="950" spc="150" kern="0" dirty="0">
-                <a:solidFill>
-                  <a:srgbClr val="3FBF5A"/>
-                </a:solidFill>
-                <a:latin typeface="Courier New" pitchFamily="34" charset="0"/>
-                <a:ea typeface="Courier New" pitchFamily="34" charset="-122"/>
-                <a:cs typeface="Courier New" pitchFamily="34" charset="-120"/>
-              </a:rPr>
-              <a:t>NA SALA</a:t>
-            </a:r>
-            <a:endParaRPr lang="en-US" sz="950" dirty="0"/>
-          </a:p>
-        </p:txBody>
-      </p:sp>
-      <p:sp>
-        <p:nvSpPr>
-          <p:cNvPr id="6" name="Text 4"/>
-          <p:cNvSpPr txBox="1"/>
-          <p:nvPr/>
-        </p:nvSpPr>
-        <p:spPr>
-          <a:xfrm>
-            <a:off x="941832" y="3090672"/>
-            <a:ext cx="2926080" cy="365760"/>
-          </a:xfrm>
-          <a:prstGeom prst="rect">
-            <a:avLst/>
-          </a:prstGeom>
-          <a:noFill/>
-          <a:ln/>
-        </p:spPr>
-        <p:txBody>
-          <a:bodyPr wrap="square" lIns="0" tIns="0" rIns="0" bIns="0" rtlCol="0" anchor="ctr"/>
-          <a:lstStyle/>
-          <a:p>
-            <a:pPr indent="0" marL="0">
-              <a:buNone/>
-            </a:pPr>
-            <a:r>
-              <a:rPr lang="en-US" sz="1600" b="1" dirty="0">
-                <a:solidFill>
-                  <a:srgbClr val="EDF3EF"/>
-                </a:solidFill>
-                <a:latin typeface="Arial" pitchFamily="34" charset="0"/>
-                <a:ea typeface="Arial" pitchFamily="34" charset="-122"/>
-                <a:cs typeface="Arial" pitchFamily="34" charset="-120"/>
-              </a:rPr>
-              <a:t>A queda vira evento</a:t>
-            </a:r>
-            <a:endParaRPr lang="en-US" sz="1600" dirty="0"/>
-          </a:p>
-        </p:txBody>
-      </p:sp>
-      <p:sp>
-        <p:nvSpPr>
-          <p:cNvPr id="7" name="Text 5"/>
-          <p:cNvSpPr txBox="1"/>
-          <p:nvPr/>
-        </p:nvSpPr>
-        <p:spPr>
-          <a:xfrm>
-            <a:off x="941832" y="3547872"/>
-            <a:ext cx="2926080" cy="914400"/>
+          <p:cNvPr id="8" name="Text 6"/>
+          <p:cNvSpPr txBox="1"/>
+          <p:nvPr/>
+        </p:nvSpPr>
+        <p:spPr>
+          <a:xfrm>
+            <a:off x="685800" y="3575304"/>
+            <a:ext cx="4297680" cy="420624"/>
           </a:xfrm>
           <a:prstGeom prst="rect">
             <a:avLst/>
@@ -10098,12 +11535,12 @@
           <a:p>
             <a:pPr indent="0" marL="0">
               <a:lnSpc>
-                <a:spcPts val="1600"/>
+                <a:spcPts val="1350"/>
               </a:lnSpc>
               <a:buNone/>
             </a:pPr>
             <a:r>
-              <a:rPr lang="en-US" sz="1200" dirty="0">
+              <a:rPr lang="en-US" sz="1150" dirty="0">
                 <a:solidFill>
                   <a:srgbClr val="9DB0A6"/>
                 </a:solidFill>
@@ -10111,22 +11548,22 @@
                 <a:ea typeface="Calibri" pitchFamily="34" charset="-122"/>
                 <a:cs typeface="Calibri" pitchFamily="34" charset="-120"/>
               </a:rPr>
-              <a:t>O evento entra na corrente antes de qualquer tentativa de avisar alguém.</a:t>
-            </a:r>
-            <a:endParaRPr lang="en-US" sz="1200" dirty="0"/>
-          </a:p>
-        </p:txBody>
-      </p:sp>
-      <p:sp>
-        <p:nvSpPr>
-          <p:cNvPr id="8" name="Text 6"/>
-          <p:cNvSpPr txBox="1"/>
-          <p:nvPr/>
-        </p:nvSpPr>
-        <p:spPr>
-          <a:xfrm>
-            <a:off x="941832" y="4480560"/>
-            <a:ext cx="2926080" cy="548640"/>
+              <a:t>Sem base legal do art. 11 para dado sensível</a:t>
+            </a:r>
+            <a:endParaRPr lang="en-US" sz="1150" dirty="0"/>
+          </a:p>
+        </p:txBody>
+      </p:sp>
+      <p:sp>
+        <p:nvSpPr>
+          <p:cNvPr id="9" name="Text 7"/>
+          <p:cNvSpPr txBox="1"/>
+          <p:nvPr/>
+        </p:nvSpPr>
+        <p:spPr>
+          <a:xfrm>
+            <a:off x="5212080" y="3575304"/>
+            <a:ext cx="6263640" cy="420624"/>
           </a:xfrm>
           <a:prstGeom prst="rect">
             <a:avLst/>
@@ -10140,44 +11577,40 @@
           <a:p>
             <a:pPr indent="0" marL="0">
               <a:lnSpc>
-                <a:spcPts val="1200"/>
+                <a:spcPts val="1350"/>
               </a:lnSpc>
               <a:buNone/>
             </a:pPr>
             <a:r>
-              <a:rPr lang="en-US" sz="850" dirty="0">
-                <a:solidFill>
-                  <a:srgbClr val="6A7D74"/>
-                </a:solidFill>
-                <a:latin typeface="Courier New" pitchFamily="34" charset="0"/>
-                <a:ea typeface="Courier New" pitchFamily="34" charset="-122"/>
-                <a:cs typeface="Courier New" pitchFamily="34" charset="-120"/>
-              </a:rPr>
-              <a:t>o registro nunca depende da nuvem estar de pé</a:t>
-            </a:r>
-            <a:endParaRPr lang="en-US" sz="850" dirty="0"/>
-          </a:p>
-        </p:txBody>
-      </p:sp>
-      <p:sp>
-        <p:nvSpPr>
-          <p:cNvPr id="9" name="Shape 7"/>
+              <a:rPr lang="en-US" sz="1150" dirty="0">
+                <a:solidFill>
+                  <a:srgbClr val="EDF3EF"/>
+                </a:solidFill>
+                <a:latin typeface="Calibri" pitchFamily="34" charset="0"/>
+                <a:ea typeface="Calibri" pitchFamily="34" charset="-122"/>
+                <a:cs typeface="Calibri" pitchFamily="34" charset="-120"/>
+              </a:rPr>
+              <a:t>Não coletamos biometria. O artigo 11 não chega a se aplicar.</a:t>
+            </a:r>
+            <a:endParaRPr lang="en-US" sz="1150" dirty="0"/>
+          </a:p>
+        </p:txBody>
+      </p:sp>
+      <p:sp>
+        <p:nvSpPr>
+          <p:cNvPr id="10" name="Shape 8"/>
           <p:cNvSpPr/>
           <p:nvPr/>
         </p:nvSpPr>
         <p:spPr>
           <a:xfrm>
-            <a:off x="4370832" y="2606040"/>
-            <a:ext cx="3410712" cy="2514600"/>
-          </a:xfrm>
-          <a:prstGeom prst="roundRect">
-            <a:avLst>
-              <a:gd name="adj" fmla="val 3636"/>
-            </a:avLst>
-          </a:prstGeom>
-          <a:solidFill>
-            <a:srgbClr val="17211C"/>
-          </a:solidFill>
+            <a:off x="685800" y="4041648"/>
+            <a:ext cx="10817352" cy="0"/>
+          </a:xfrm>
+          <a:prstGeom prst="line">
+            <a:avLst/>
+          </a:prstGeom>
+          <a:noFill/>
           <a:ln w="12700">
             <a:solidFill>
               <a:srgbClr val="24322B"/>
@@ -10188,92 +11621,14 @@
       </p:sp>
       <p:sp>
         <p:nvSpPr>
-          <p:cNvPr id="10" name="Text 8"/>
-          <p:cNvSpPr txBox="1"/>
-          <p:nvPr/>
-        </p:nvSpPr>
-        <p:spPr>
-          <a:xfrm>
-            <a:off x="4626864" y="2816352"/>
-            <a:ext cx="2926080" cy="228600"/>
-          </a:xfrm>
-          <a:prstGeom prst="rect">
-            <a:avLst/>
-          </a:prstGeom>
-          <a:noFill/>
-          <a:ln/>
-        </p:spPr>
-        <p:txBody>
-          <a:bodyPr wrap="square" lIns="0" tIns="0" rIns="0" bIns="0" rtlCol="0" anchor="ctr"/>
-          <a:lstStyle/>
-          <a:p>
-            <a:pPr indent="0" marL="0">
-              <a:buNone/>
-            </a:pPr>
-            <a:r>
-              <a:rPr lang="en-US" sz="950" spc="150" kern="0" dirty="0">
-                <a:solidFill>
-                  <a:srgbClr val="3FBF5A"/>
-                </a:solidFill>
-                <a:latin typeface="Courier New" pitchFamily="34" charset="0"/>
-                <a:ea typeface="Courier New" pitchFamily="34" charset="-122"/>
-                <a:cs typeface="Courier New" pitchFamily="34" charset="-120"/>
-              </a:rPr>
-              <a:t>NA NUVEM</a:t>
-            </a:r>
-            <a:endParaRPr lang="en-US" sz="950" dirty="0"/>
-          </a:p>
-        </p:txBody>
-      </p:sp>
-      <p:sp>
-        <p:nvSpPr>
           <p:cNvPr id="11" name="Text 9"/>
           <p:cNvSpPr txBox="1"/>
           <p:nvPr/>
         </p:nvSpPr>
         <p:spPr>
           <a:xfrm>
-            <a:off x="4626864" y="3090672"/>
-            <a:ext cx="2926080" cy="365760"/>
-          </a:xfrm>
-          <a:prstGeom prst="rect">
-            <a:avLst/>
-          </a:prstGeom>
-          <a:noFill/>
-          <a:ln/>
-        </p:spPr>
-        <p:txBody>
-          <a:bodyPr wrap="square" lIns="0" tIns="0" rIns="0" bIns="0" rtlCol="0" anchor="ctr"/>
-          <a:lstStyle/>
-          <a:p>
-            <a:pPr indent="0" marL="0">
-              <a:buNone/>
-            </a:pPr>
-            <a:r>
-              <a:rPr lang="en-US" sz="1600" b="1" dirty="0">
-                <a:solidFill>
-                  <a:srgbClr val="EDF3EF"/>
-                </a:solidFill>
-                <a:latin typeface="Arial" pitchFamily="34" charset="0"/>
-                <a:ea typeface="Arial" pitchFamily="34" charset="-122"/>
-                <a:cs typeface="Arial" pitchFamily="34" charset="-120"/>
-              </a:rPr>
-              <a:t>Uma função envia</a:t>
-            </a:r>
-            <a:endParaRPr lang="en-US" sz="1600" dirty="0"/>
-          </a:p>
-        </p:txBody>
-      </p:sp>
-      <p:sp>
-        <p:nvSpPr>
-          <p:cNvPr id="12" name="Text 10"/>
-          <p:cNvSpPr txBox="1"/>
-          <p:nvPr/>
-        </p:nvSpPr>
-        <p:spPr>
-          <a:xfrm>
-            <a:off x="4626864" y="3547872"/>
-            <a:ext cx="2926080" cy="914400"/>
+            <a:off x="685800" y="4105656"/>
+            <a:ext cx="4297680" cy="420624"/>
           </a:xfrm>
           <a:prstGeom prst="rect">
             <a:avLst/>
@@ -10287,12 +11642,12 @@
           <a:p>
             <a:pPr indent="0" marL="0">
               <a:lnSpc>
-                <a:spcPts val="1600"/>
+                <a:spcPts val="1350"/>
               </a:lnSpc>
               <a:buNone/>
             </a:pPr>
             <a:r>
-              <a:rPr lang="en-US" sz="1200" dirty="0">
+              <a:rPr lang="en-US" sz="1150" dirty="0">
                 <a:solidFill>
                   <a:srgbClr val="9DB0A6"/>
                 </a:solidFill>
@@ -10300,22 +11655,22 @@
                 <a:ea typeface="Calibri" pitchFamily="34" charset="-122"/>
                 <a:cs typeface="Calibri" pitchFamily="34" charset="-120"/>
               </a:rPr>
-              <a:t>A escola não guarda senha de e-mail nenhuma. A credencial não existe como arquivo.</a:t>
-            </a:r>
-            <a:endParaRPr lang="en-US" sz="1200" dirty="0"/>
-          </a:p>
-        </p:txBody>
-      </p:sp>
-      <p:sp>
-        <p:nvSpPr>
-          <p:cNvPr id="13" name="Text 11"/>
-          <p:cNvSpPr txBox="1"/>
-          <p:nvPr/>
-        </p:nvSpPr>
-        <p:spPr>
-          <a:xfrm>
-            <a:off x="4626864" y="4480560"/>
-            <a:ext cx="2926080" cy="548640"/>
+              <a:t>Desproporcional: não provaram que o menos invasivo não bastava</a:t>
+            </a:r>
+            <a:endParaRPr lang="en-US" sz="1150" dirty="0"/>
+          </a:p>
+        </p:txBody>
+      </p:sp>
+      <p:sp>
+        <p:nvSpPr>
+          <p:cNvPr id="12" name="Text 10"/>
+          <p:cNvSpPr txBox="1"/>
+          <p:nvPr/>
+        </p:nvSpPr>
+        <p:spPr>
+          <a:xfrm>
+            <a:off x="5212080" y="4105656"/>
+            <a:ext cx="6263640" cy="420624"/>
           </a:xfrm>
           <a:prstGeom prst="rect">
             <a:avLst/>
@@ -10329,44 +11684,40 @@
           <a:p>
             <a:pPr indent="0" marL="0">
               <a:lnSpc>
-                <a:spcPts val="1200"/>
+                <a:spcPts val="1350"/>
               </a:lnSpc>
               <a:buNone/>
             </a:pPr>
             <a:r>
-              <a:rPr lang="en-US" sz="850" dirty="0">
-                <a:solidFill>
-                  <a:srgbClr val="6A7D74"/>
-                </a:solidFill>
-                <a:latin typeface="Courier New" pitchFamily="34" charset="0"/>
-                <a:ea typeface="Courier New" pitchFamily="34" charset="-122"/>
-                <a:cs typeface="Courier New" pitchFamily="34" charset="-120"/>
-              </a:rPr>
-              <a:t>segredo compartilhado barra quem descobrir a URL</a:t>
-            </a:r>
-            <a:endParaRPr lang="en-US" sz="850" dirty="0"/>
-          </a:p>
-        </p:txBody>
-      </p:sp>
-      <p:sp>
-        <p:nvSpPr>
-          <p:cNvPr id="14" name="Shape 12"/>
+              <a:rPr lang="en-US" sz="1150" dirty="0">
+                <a:solidFill>
+                  <a:srgbClr val="EDF3EF"/>
+                </a:solidFill>
+                <a:latin typeface="Calibri" pitchFamily="34" charset="0"/>
+                <a:ea typeface="Calibri" pitchFamily="34" charset="-122"/>
+                <a:cs typeface="Calibri" pitchFamily="34" charset="-120"/>
+              </a:rPr>
+              <a:t>Rosto apagado antes de a imagem sair, e ela só existe em alerta grave.</a:t>
+            </a:r>
+            <a:endParaRPr lang="en-US" sz="1150" dirty="0"/>
+          </a:p>
+        </p:txBody>
+      </p:sp>
+      <p:sp>
+        <p:nvSpPr>
+          <p:cNvPr id="13" name="Shape 11"/>
           <p:cNvSpPr/>
           <p:nvPr/>
         </p:nvSpPr>
         <p:spPr>
           <a:xfrm>
-            <a:off x="8055864" y="2606040"/>
-            <a:ext cx="3410712" cy="2514600"/>
-          </a:xfrm>
-          <a:prstGeom prst="roundRect">
-            <a:avLst>
-              <a:gd name="adj" fmla="val 3636"/>
-            </a:avLst>
-          </a:prstGeom>
-          <a:solidFill>
-            <a:srgbClr val="17211C"/>
-          </a:solidFill>
+            <a:off x="685800" y="4572000"/>
+            <a:ext cx="10817352" cy="0"/>
+          </a:xfrm>
+          <a:prstGeom prst="line">
+            <a:avLst/>
+          </a:prstGeom>
+          <a:noFill/>
           <a:ln w="12700">
             <a:solidFill>
               <a:srgbClr val="24322B"/>
@@ -10377,153 +11728,367 @@
       </p:sp>
       <p:sp>
         <p:nvSpPr>
+          <p:cNvPr id="14" name="Text 12"/>
+          <p:cNvSpPr txBox="1"/>
+          <p:nvPr/>
+        </p:nvSpPr>
+        <p:spPr>
+          <a:xfrm>
+            <a:off x="685800" y="4636008"/>
+            <a:ext cx="4297680" cy="420624"/>
+          </a:xfrm>
+          <a:prstGeom prst="rect">
+            <a:avLst/>
+          </a:prstGeom>
+          <a:noFill/>
+          <a:ln/>
+        </p:spPr>
+        <p:txBody>
+          <a:bodyPr wrap="square" lIns="0" tIns="0" rIns="0" bIns="0" rtlCol="0" anchor="ctr"/>
+          <a:lstStyle/>
+          <a:p>
+            <a:pPr indent="0" marL="0">
+              <a:lnSpc>
+                <a:spcPts val="1350"/>
+              </a:lnSpc>
+              <a:buNone/>
+            </a:pPr>
+            <a:r>
+              <a:rPr lang="en-US" sz="1150" dirty="0">
+                <a:solidFill>
+                  <a:srgbClr val="9DB0A6"/>
+                </a:solidFill>
+                <a:latin typeface="Calibri" pitchFamily="34" charset="0"/>
+                <a:ea typeface="Calibri" pitchFamily="34" charset="-122"/>
+                <a:cs typeface="Calibri" pitchFamily="34" charset="-120"/>
+              </a:rPr>
+              <a:t>Segurança citada de forma genérica, sem monitoramento nem auditoria</a:t>
+            </a:r>
+            <a:endParaRPr lang="en-US" sz="1150" dirty="0"/>
+          </a:p>
+        </p:txBody>
+      </p:sp>
+      <p:sp>
+        <p:nvSpPr>
           <p:cNvPr id="15" name="Text 13"/>
           <p:cNvSpPr txBox="1"/>
           <p:nvPr/>
         </p:nvSpPr>
         <p:spPr>
           <a:xfrm>
-            <a:off x="8311896" y="2816352"/>
-            <a:ext cx="2926080" cy="228600"/>
-          </a:xfrm>
-          <a:prstGeom prst="rect">
-            <a:avLst/>
-          </a:prstGeom>
-          <a:noFill/>
-          <a:ln/>
-        </p:spPr>
-        <p:txBody>
-          <a:bodyPr wrap="square" lIns="0" tIns="0" rIns="0" bIns="0" rtlCol="0" anchor="ctr"/>
-          <a:lstStyle/>
-          <a:p>
-            <a:pPr indent="0" marL="0">
-              <a:buNone/>
-            </a:pPr>
-            <a:r>
-              <a:rPr lang="en-US" sz="950" spc="150" kern="0" dirty="0">
-                <a:solidFill>
-                  <a:srgbClr val="3FBF5A"/>
+            <a:off x="5212080" y="4636008"/>
+            <a:ext cx="6263640" cy="420624"/>
+          </a:xfrm>
+          <a:prstGeom prst="rect">
+            <a:avLst/>
+          </a:prstGeom>
+          <a:noFill/>
+          <a:ln/>
+        </p:spPr>
+        <p:txBody>
+          <a:bodyPr wrap="square" lIns="0" tIns="0" rIns="0" bIns="0" rtlCol="0" anchor="ctr"/>
+          <a:lstStyle/>
+          <a:p>
+            <a:pPr indent="0" marL="0">
+              <a:lnSpc>
+                <a:spcPts val="1350"/>
+              </a:lnSpc>
+              <a:buNone/>
+            </a:pPr>
+            <a:r>
+              <a:rPr lang="en-US" sz="1150" dirty="0">
+                <a:solidFill>
+                  <a:srgbClr val="EDF3EF"/>
+                </a:solidFill>
+                <a:latin typeface="Calibri" pitchFamily="34" charset="0"/>
+                <a:ea typeface="Calibri" pitchFamily="34" charset="-122"/>
+                <a:cs typeface="Calibri" pitchFamily="34" charset="-120"/>
+              </a:rPr>
+              <a:t>Cadeia de hash verificável, e cada abertura de imagem vira linha no banco.</a:t>
+            </a:r>
+            <a:endParaRPr lang="en-US" sz="1150" dirty="0"/>
+          </a:p>
+        </p:txBody>
+      </p:sp>
+      <p:sp>
+        <p:nvSpPr>
+          <p:cNvPr id="16" name="Shape 14"/>
+          <p:cNvSpPr/>
+          <p:nvPr/>
+        </p:nvSpPr>
+        <p:spPr>
+          <a:xfrm>
+            <a:off x="685800" y="5102352"/>
+            <a:ext cx="10817352" cy="0"/>
+          </a:xfrm>
+          <a:prstGeom prst="line">
+            <a:avLst/>
+          </a:prstGeom>
+          <a:noFill/>
+          <a:ln w="12700">
+            <a:solidFill>
+              <a:srgbClr val="24322B"/>
+            </a:solidFill>
+            <a:prstDash val="solid"/>
+          </a:ln>
+        </p:spPr>
+      </p:sp>
+      <p:sp>
+        <p:nvSpPr>
+          <p:cNvPr id="17" name="Text 15"/>
+          <p:cNvSpPr txBox="1"/>
+          <p:nvPr/>
+        </p:nvSpPr>
+        <p:spPr>
+          <a:xfrm>
+            <a:off x="685800" y="5166360"/>
+            <a:ext cx="4297680" cy="420624"/>
+          </a:xfrm>
+          <a:prstGeom prst="rect">
+            <a:avLst/>
+          </a:prstGeom>
+          <a:noFill/>
+          <a:ln/>
+        </p:spPr>
+        <p:txBody>
+          <a:bodyPr wrap="square" lIns="0" tIns="0" rIns="0" bIns="0" rtlCol="0" anchor="ctr"/>
+          <a:lstStyle/>
+          <a:p>
+            <a:pPr indent="0" marL="0">
+              <a:lnSpc>
+                <a:spcPts val="1350"/>
+              </a:lnSpc>
+              <a:buNone/>
+            </a:pPr>
+            <a:r>
+              <a:rPr lang="en-US" sz="1150" dirty="0">
+                <a:solidFill>
+                  <a:srgbClr val="9DB0A6"/>
+                </a:solidFill>
+                <a:latin typeface="Calibri" pitchFamily="34" charset="0"/>
+                <a:ea typeface="Calibri" pitchFamily="34" charset="-122"/>
+                <a:cs typeface="Calibri" pitchFamily="34" charset="-120"/>
+              </a:rPr>
+              <a:t>Melhor interesse da criança não demonstrado</a:t>
+            </a:r>
+            <a:endParaRPr lang="en-US" sz="1150" dirty="0"/>
+          </a:p>
+        </p:txBody>
+      </p:sp>
+      <p:sp>
+        <p:nvSpPr>
+          <p:cNvPr id="18" name="Text 16"/>
+          <p:cNvSpPr txBox="1"/>
+          <p:nvPr/>
+        </p:nvSpPr>
+        <p:spPr>
+          <a:xfrm>
+            <a:off x="5212080" y="5166360"/>
+            <a:ext cx="6263640" cy="420624"/>
+          </a:xfrm>
+          <a:prstGeom prst="rect">
+            <a:avLst/>
+          </a:prstGeom>
+          <a:noFill/>
+          <a:ln/>
+        </p:spPr>
+        <p:txBody>
+          <a:bodyPr wrap="square" lIns="0" tIns="0" rIns="0" bIns="0" rtlCol="0" anchor="ctr"/>
+          <a:lstStyle/>
+          <a:p>
+            <a:pPr indent="0" marL="0">
+              <a:lnSpc>
+                <a:spcPts val="1350"/>
+              </a:lnSpc>
+              <a:buNone/>
+            </a:pPr>
+            <a:r>
+              <a:rPr lang="en-US" sz="1150" dirty="0">
+                <a:solidFill>
+                  <a:srgbClr val="EDF3EF"/>
+                </a:solidFill>
+                <a:latin typeface="Calibri" pitchFamily="34" charset="0"/>
+                <a:ea typeface="Calibri" pitchFamily="34" charset="-122"/>
+                <a:cs typeface="Calibri" pitchFamily="34" charset="-120"/>
+              </a:rPr>
+              <a:t>A imagem se apaga sozinha em 7 dias. O registro do evento fica.</a:t>
+            </a:r>
+            <a:endParaRPr lang="en-US" sz="1150" dirty="0"/>
+          </a:p>
+        </p:txBody>
+      </p:sp>
+      <p:sp>
+        <p:nvSpPr>
+          <p:cNvPr id="19" name="Shape 17"/>
+          <p:cNvSpPr/>
+          <p:nvPr/>
+        </p:nvSpPr>
+        <p:spPr>
+          <a:xfrm>
+            <a:off x="685800" y="5632704"/>
+            <a:ext cx="10817352" cy="0"/>
+          </a:xfrm>
+          <a:prstGeom prst="line">
+            <a:avLst/>
+          </a:prstGeom>
+          <a:noFill/>
+          <a:ln w="12700">
+            <a:solidFill>
+              <a:srgbClr val="24322B"/>
+            </a:solidFill>
+            <a:prstDash val="solid"/>
+          </a:ln>
+        </p:spPr>
+      </p:sp>
+      <p:sp>
+        <p:nvSpPr>
+          <p:cNvPr id="20" name="Text 18"/>
+          <p:cNvSpPr txBox="1"/>
+          <p:nvPr/>
+        </p:nvSpPr>
+        <p:spPr>
+          <a:xfrm>
+            <a:off x="685800" y="5696712"/>
+            <a:ext cx="4297680" cy="420624"/>
+          </a:xfrm>
+          <a:prstGeom prst="rect">
+            <a:avLst/>
+          </a:prstGeom>
+          <a:noFill/>
+          <a:ln/>
+        </p:spPr>
+        <p:txBody>
+          <a:bodyPr wrap="square" lIns="0" tIns="0" rIns="0" bIns="0" rtlCol="0" anchor="ctr"/>
+          <a:lstStyle/>
+          <a:p>
+            <a:pPr indent="0" marL="0">
+              <a:lnSpc>
+                <a:spcPts val="1350"/>
+              </a:lnSpc>
+              <a:buNone/>
+            </a:pPr>
+            <a:r>
+              <a:rPr lang="en-US" sz="1150" dirty="0">
+                <a:solidFill>
+                  <a:srgbClr val="9DB0A6"/>
+                </a:solidFill>
+                <a:latin typeface="Calibri" pitchFamily="34" charset="0"/>
+                <a:ea typeface="Calibri" pitchFamily="34" charset="-122"/>
+                <a:cs typeface="Calibri" pitchFamily="34" charset="-120"/>
+              </a:rPr>
+              <a:t>Registro de Operações de Tratamento não entregue</a:t>
+            </a:r>
+            <a:endParaRPr lang="en-US" sz="1150" dirty="0"/>
+          </a:p>
+        </p:txBody>
+      </p:sp>
+      <p:sp>
+        <p:nvSpPr>
+          <p:cNvPr id="21" name="Text 19"/>
+          <p:cNvSpPr txBox="1"/>
+          <p:nvPr/>
+        </p:nvSpPr>
+        <p:spPr>
+          <a:xfrm>
+            <a:off x="5212080" y="5696712"/>
+            <a:ext cx="6263640" cy="420624"/>
+          </a:xfrm>
+          <a:prstGeom prst="rect">
+            <a:avLst/>
+          </a:prstGeom>
+          <a:noFill/>
+          <a:ln/>
+        </p:spPr>
+        <p:txBody>
+          <a:bodyPr wrap="square" lIns="0" tIns="0" rIns="0" bIns="0" rtlCol="0" anchor="ctr"/>
+          <a:lstStyle/>
+          <a:p>
+            <a:pPr indent="0" marL="0">
+              <a:lnSpc>
+                <a:spcPts val="1350"/>
+              </a:lnSpc>
+              <a:buNone/>
+            </a:pPr>
+            <a:r>
+              <a:rPr lang="en-US" sz="1150" dirty="0">
+                <a:solidFill>
+                  <a:srgbClr val="EDF3EF"/>
+                </a:solidFill>
+                <a:latin typeface="Calibri" pitchFamily="34" charset="0"/>
+                <a:ea typeface="Calibri" pitchFamily="34" charset="-122"/>
+                <a:cs typeface="Calibri" pitchFamily="34" charset="-120"/>
+              </a:rPr>
+              <a:t>O banco é o registro, linha a linha, e ele se confere sozinho.</a:t>
+            </a:r>
+            <a:endParaRPr lang="en-US" sz="1150" dirty="0"/>
+          </a:p>
+        </p:txBody>
+      </p:sp>
+      <p:sp>
+        <p:nvSpPr>
+          <p:cNvPr id="22" name="Text 20"/>
+          <p:cNvSpPr txBox="1"/>
+          <p:nvPr/>
+        </p:nvSpPr>
+        <p:spPr>
+          <a:xfrm>
+            <a:off x="685800" y="6236208"/>
+            <a:ext cx="6400800" cy="237744"/>
+          </a:xfrm>
+          <a:prstGeom prst="rect">
+            <a:avLst/>
+          </a:prstGeom>
+          <a:noFill/>
+          <a:ln/>
+        </p:spPr>
+        <p:txBody>
+          <a:bodyPr wrap="square" lIns="0" tIns="0" rIns="0" bIns="0" rtlCol="0" anchor="ctr"/>
+          <a:lstStyle/>
+          <a:p>
+            <a:pPr indent="0" marL="0">
+              <a:buNone/>
+            </a:pPr>
+            <a:r>
+              <a:rPr lang="en-US" sz="900" dirty="0">
+                <a:solidFill>
+                  <a:srgbClr val="6A7D74"/>
                 </a:solidFill>
                 <a:latin typeface="Courier New" pitchFamily="34" charset="0"/>
                 <a:ea typeface="Courier New" pitchFamily="34" charset="-122"/>
                 <a:cs typeface="Courier New" pitchFamily="34" charset="-120"/>
               </a:rPr>
-              <a:t>NA COORDENAÇÃO</a:t>
-            </a:r>
-            <a:endParaRPr lang="en-US" sz="950" dirty="0"/>
-          </a:p>
-        </p:txBody>
-      </p:sp>
-      <p:sp>
-        <p:nvSpPr>
-          <p:cNvPr id="16" name="Text 14"/>
-          <p:cNvSpPr txBox="1"/>
-          <p:nvPr/>
-        </p:nvSpPr>
-        <p:spPr>
-          <a:xfrm>
-            <a:off x="8311896" y="3090672"/>
-            <a:ext cx="2926080" cy="365760"/>
-          </a:xfrm>
-          <a:prstGeom prst="rect">
-            <a:avLst/>
-          </a:prstGeom>
-          <a:noFill/>
-          <a:ln/>
-        </p:spPr>
-        <p:txBody>
-          <a:bodyPr wrap="square" lIns="0" tIns="0" rIns="0" bIns="0" rtlCol="0" anchor="ctr"/>
-          <a:lstStyle/>
-          <a:p>
-            <a:pPr indent="0" marL="0">
-              <a:buNone/>
-            </a:pPr>
-            <a:r>
-              <a:rPr lang="en-US" sz="1600" b="1" dirty="0">
-                <a:solidFill>
-                  <a:srgbClr val="EDF3EF"/>
-                </a:solidFill>
-                <a:latin typeface="Arial" pitchFamily="34" charset="0"/>
-                <a:ea typeface="Arial" pitchFamily="34" charset="-122"/>
-                <a:cs typeface="Arial" pitchFamily="34" charset="-120"/>
-              </a:rPr>
-              <a:t>Um e-mail que se lê</a:t>
-            </a:r>
-            <a:endParaRPr lang="en-US" sz="1600" dirty="0"/>
-          </a:p>
-        </p:txBody>
-      </p:sp>
-      <p:sp>
-        <p:nvSpPr>
-          <p:cNvPr id="17" name="Text 15"/>
-          <p:cNvSpPr txBox="1"/>
-          <p:nvPr/>
-        </p:nvSpPr>
-        <p:spPr>
-          <a:xfrm>
-            <a:off x="8311896" y="3547872"/>
-            <a:ext cx="2926080" cy="914400"/>
-          </a:xfrm>
-          <a:prstGeom prst="rect">
-            <a:avLst/>
-          </a:prstGeom>
-          <a:noFill/>
-          <a:ln/>
-        </p:spPr>
-        <p:txBody>
-          <a:bodyPr wrap="square" lIns="0" tIns="0" rIns="0" bIns="0" rtlCol="0" anchor="ctr"/>
-          <a:lstStyle/>
-          <a:p>
-            <a:pPr indent="0" marL="0">
-              <a:lnSpc>
-                <a:spcPts val="1600"/>
-              </a:lnSpc>
-              <a:buNone/>
-            </a:pPr>
-            <a:r>
-              <a:rPr lang="en-US" sz="1200" dirty="0">
-                <a:solidFill>
-                  <a:srgbClr val="9DB0A6"/>
-                </a:solidFill>
-                <a:latin typeface="Calibri" pitchFamily="34" charset="0"/>
-                <a:ea typeface="Calibri" pitchFamily="34" charset="-122"/>
-                <a:cs typeface="Calibri" pitchFamily="34" charset="-120"/>
-              </a:rPr>
-              <a:t>O que houve, onde, quando, e que é um pedido de conferência.</a:t>
-            </a:r>
-            <a:endParaRPr lang="en-US" sz="1200" dirty="0"/>
-          </a:p>
-        </p:txBody>
-      </p:sp>
-      <p:sp>
-        <p:nvSpPr>
-          <p:cNvPr id="18" name="Text 16"/>
-          <p:cNvSpPr txBox="1"/>
-          <p:nvPr/>
-        </p:nvSpPr>
-        <p:spPr>
-          <a:xfrm>
-            <a:off x="8311896" y="4480560"/>
-            <a:ext cx="2926080" cy="548640"/>
-          </a:xfrm>
-          <a:prstGeom prst="rect">
-            <a:avLst/>
-          </a:prstGeom>
-          <a:noFill/>
-          <a:ln/>
-        </p:spPr>
-        <p:txBody>
-          <a:bodyPr wrap="square" lIns="0" tIns="0" rIns="0" bIns="0" rtlCol="0" anchor="ctr"/>
-          <a:lstStyle/>
-          <a:p>
-            <a:pPr indent="0" marL="0">
-              <a:lnSpc>
-                <a:spcPts val="1200"/>
-              </a:lnSpc>
-              <a:buNone/>
-            </a:pPr>
-            <a:r>
-              <a:rPr lang="en-US" sz="850" dirty="0">
+              <a:t>Leitura nossa da decisão pública da ANPD, não parecer jurídico.</a:t>
+            </a:r>
+            <a:endParaRPr lang="en-US" sz="900" dirty="0"/>
+          </a:p>
+        </p:txBody>
+      </p:sp>
+      <p:sp>
+        <p:nvSpPr>
+          <p:cNvPr id="24" name="Text 21"/>
+          <p:cNvSpPr txBox="1"/>
+          <p:nvPr/>
+        </p:nvSpPr>
+        <p:spPr>
+          <a:xfrm>
+            <a:off x="685800" y="6291072"/>
+            <a:ext cx="5486400" cy="274320"/>
+          </a:xfrm>
+          <a:prstGeom prst="rect">
+            <a:avLst/>
+          </a:prstGeom>
+          <a:noFill/>
+          <a:ln/>
+        </p:spPr>
+        <p:txBody>
+          <a:bodyPr wrap="square" lIns="0" tIns="0" rIns="0" bIns="0" rtlCol="0" anchor="ctr"/>
+          <a:lstStyle/>
+          <a:p>
+            <a:pPr indent="0" marL="0">
+              <a:buNone/>
+            </a:pPr>
+            <a:r>
+              <a:rPr lang="en-US" sz="900" dirty="0">
                 <a:solidFill>
                   <a:srgbClr val="6A7D74"/>
                 </a:solidFill>
@@ -10531,84 +12096,6 @@
                 <a:ea typeface="Courier New" pitchFamily="34" charset="-122"/>
                 <a:cs typeface="Courier New" pitchFamily="34" charset="-120"/>
               </a:rPr>
-              <a:t>um aviso a cada poucos segundos é um aviso que ninguém lê</a:t>
-            </a:r>
-            <a:endParaRPr lang="en-US" sz="850" dirty="0"/>
-          </a:p>
-        </p:txBody>
-      </p:sp>
-      <p:sp>
-        <p:nvSpPr>
-          <p:cNvPr id="19" name="Text 17"/>
-          <p:cNvSpPr txBox="1"/>
-          <p:nvPr/>
-        </p:nvSpPr>
-        <p:spPr>
-          <a:xfrm>
-            <a:off x="685800" y="5486400"/>
-            <a:ext cx="10515600" cy="457200"/>
-          </a:xfrm>
-          <a:prstGeom prst="rect">
-            <a:avLst/>
-          </a:prstGeom>
-          <a:noFill/>
-          <a:ln/>
-        </p:spPr>
-        <p:txBody>
-          <a:bodyPr wrap="square" lIns="0" tIns="0" rIns="0" bIns="0" rtlCol="0" anchor="ctr"/>
-          <a:lstStyle/>
-          <a:p>
-            <a:pPr indent="0" marL="0">
-              <a:buNone/>
-            </a:pPr>
-            <a:r>
-              <a:rPr lang="en-US" sz="1400" dirty="0">
-                <a:solidFill>
-                  <a:srgbClr val="9DB0A6"/>
-                </a:solidFill>
-                <a:latin typeface="Calibri" pitchFamily="34" charset="0"/>
-                <a:ea typeface="Calibri" pitchFamily="34" charset="-122"/>
-                <a:cs typeface="Calibri" pitchFamily="34" charset="-120"/>
-              </a:rPr>
-              <a:t>O caminho tem teste automático, inclusive o que custa caro quando falha: e-mail sem segredo e e-mail em rajada.</a:t>
-            </a:r>
-            <a:endParaRPr lang="en-US" sz="1400" dirty="0"/>
-          </a:p>
-        </p:txBody>
-      </p:sp>
-      <p:sp>
-        <p:nvSpPr>
-          <p:cNvPr id="20" name="Text 18"/>
-          <p:cNvSpPr txBox="1"/>
-          <p:nvPr/>
-        </p:nvSpPr>
-        <p:spPr>
-          <a:xfrm>
-            <a:off x="685800" y="6291072"/>
-            <a:ext cx="5486400" cy="274320"/>
-          </a:xfrm>
-          <a:prstGeom prst="rect">
-            <a:avLst/>
-          </a:prstGeom>
-          <a:noFill/>
-          <a:ln/>
-        </p:spPr>
-        <p:txBody>
-          <a:bodyPr wrap="square" lIns="0" tIns="0" rIns="0" bIns="0" rtlCol="0" anchor="ctr"/>
-          <a:lstStyle/>
-          <a:p>
-            <a:pPr indent="0" marL="0">
-              <a:buNone/>
-            </a:pPr>
-            <a:r>
-              <a:rPr lang="en-US" sz="900" dirty="0">
-                <a:solidFill>
-                  <a:srgbClr val="6A7D74"/>
-                </a:solidFill>
-                <a:latin typeface="Courier New" pitchFamily="34" charset="0"/>
-                <a:ea typeface="Courier New" pitchFamily="34" charset="-122"/>
-                <a:cs typeface="Courier New" pitchFamily="34" charset="-120"/>
-              </a:rPr>
               <a:t>Auditix AI  ·  SVATech  ·  grupo 11</a:t>
             </a:r>
             <a:endParaRPr lang="en-US" sz="900" dirty="0"/>
@@ -10617,7 +12104,7 @@
       </p:sp>
       <p:sp>
         <p:nvSpPr>
-          <p:cNvPr id="21" name="Text 19"/>
+          <p:cNvPr id="25" name="Text 22"/>
           <p:cNvSpPr txBox="1"/>
           <p:nvPr/>
         </p:nvSpPr>
@@ -10719,7 +12206,7 @@
                 <a:ea typeface="Courier New" pitchFamily="34" charset="-122"/>
                 <a:cs typeface="Courier New" pitchFamily="34" charset="-120"/>
               </a:rPr>
-              <a:t>DASHBOARD LIGADO AO BANCO POR API</a:t>
+              <a:t>DO CHÃO À CAIXA DE ENTRADA</a:t>
             </a:r>
             <a:endParaRPr lang="en-US" sz="1100" dirty="0"/>
           </a:p>
@@ -10761,19 +12248,104 @@
                 <a:ea typeface="Arial" pitchFamily="34" charset="-122"/>
                 <a:cs typeface="Arial" pitchFamily="34" charset="-120"/>
               </a:rPr>
-              <a:t>Um dashboard que lê o banco,</a:t>
+              <a:t>Segundos, não turnos.</a:t>
             </a:r>
             <a:endParaRPr lang="en-US" sz="3600" dirty="0"/>
           </a:p>
-          <a:p>
-            <a:pPr indent="0" marL="0">
-              <a:lnSpc>
-                <a:spcPts val="3800"/>
-              </a:lnSpc>
-              <a:buNone/>
-            </a:pPr>
-            <a:r>
-              <a:rPr lang="en-US" sz="3600" b="1" dirty="0">
+        </p:txBody>
+      </p:sp>
+      <p:sp>
+        <p:nvSpPr>
+          <p:cNvPr id="4" name="Shape 2"/>
+          <p:cNvSpPr/>
+          <p:nvPr/>
+        </p:nvSpPr>
+        <p:spPr>
+          <a:xfrm>
+            <a:off x="685800" y="2606040"/>
+            <a:ext cx="3410712" cy="2514600"/>
+          </a:xfrm>
+          <a:prstGeom prst="roundRect">
+            <a:avLst>
+              <a:gd name="adj" fmla="val 3636"/>
+            </a:avLst>
+          </a:prstGeom>
+          <a:solidFill>
+            <a:srgbClr val="17211C"/>
+          </a:solidFill>
+          <a:ln w="12700">
+            <a:solidFill>
+              <a:srgbClr val="24322B"/>
+            </a:solidFill>
+            <a:prstDash val="solid"/>
+          </a:ln>
+        </p:spPr>
+      </p:sp>
+      <p:sp>
+        <p:nvSpPr>
+          <p:cNvPr id="5" name="Text 3"/>
+          <p:cNvSpPr txBox="1"/>
+          <p:nvPr/>
+        </p:nvSpPr>
+        <p:spPr>
+          <a:xfrm>
+            <a:off x="941832" y="2816352"/>
+            <a:ext cx="2926080" cy="228600"/>
+          </a:xfrm>
+          <a:prstGeom prst="rect">
+            <a:avLst/>
+          </a:prstGeom>
+          <a:noFill/>
+          <a:ln/>
+        </p:spPr>
+        <p:txBody>
+          <a:bodyPr wrap="square" lIns="0" tIns="0" rIns="0" bIns="0" rtlCol="0" anchor="ctr"/>
+          <a:lstStyle/>
+          <a:p>
+            <a:pPr indent="0" marL="0">
+              <a:buNone/>
+            </a:pPr>
+            <a:r>
+              <a:rPr lang="en-US" sz="950" spc="150" kern="0" dirty="0">
+                <a:solidFill>
+                  <a:srgbClr val="3FBF5A"/>
+                </a:solidFill>
+                <a:latin typeface="Courier New" pitchFamily="34" charset="0"/>
+                <a:ea typeface="Courier New" pitchFamily="34" charset="-122"/>
+                <a:cs typeface="Courier New" pitchFamily="34" charset="-120"/>
+              </a:rPr>
+              <a:t>NA SALA</a:t>
+            </a:r>
+            <a:endParaRPr lang="en-US" sz="950" dirty="0"/>
+          </a:p>
+        </p:txBody>
+      </p:sp>
+      <p:sp>
+        <p:nvSpPr>
+          <p:cNvPr id="6" name="Text 4"/>
+          <p:cNvSpPr txBox="1"/>
+          <p:nvPr/>
+        </p:nvSpPr>
+        <p:spPr>
+          <a:xfrm>
+            <a:off x="941832" y="3090672"/>
+            <a:ext cx="2926080" cy="365760"/>
+          </a:xfrm>
+          <a:prstGeom prst="rect">
+            <a:avLst/>
+          </a:prstGeom>
+          <a:noFill/>
+          <a:ln/>
+        </p:spPr>
+        <p:txBody>
+          <a:bodyPr wrap="square" lIns="0" tIns="0" rIns="0" bIns="0" rtlCol="0" anchor="ctr"/>
+          <a:lstStyle/>
+          <a:p>
+            <a:pPr indent="0" marL="0">
+              <a:buNone/>
+            </a:pPr>
+            <a:r>
+              <a:rPr lang="en-US" sz="1600" b="1" dirty="0">
                 <a:solidFill>
                   <a:srgbClr val="EDF3EF"/>
                 </a:solidFill>
@@ -10781,38 +12353,41 @@
                 <a:ea typeface="Arial" pitchFamily="34" charset="-122"/>
                 <a:cs typeface="Arial" pitchFamily="34" charset="-120"/>
               </a:rPr>
-              <a:t>não um print de tela.</a:t>
-            </a:r>
-            <a:endParaRPr lang="en-US" sz="3600" dirty="0"/>
-          </a:p>
-        </p:txBody>
-      </p:sp>
-      <p:sp>
-        <p:nvSpPr>
-          <p:cNvPr id="4" name="Text 2"/>
-          <p:cNvSpPr txBox="1"/>
-          <p:nvPr/>
-        </p:nvSpPr>
-        <p:spPr>
-          <a:xfrm>
-            <a:off x="685800" y="2514600"/>
-            <a:ext cx="10515600" cy="365760"/>
-          </a:xfrm>
-          <a:prstGeom prst="rect">
-            <a:avLst/>
-          </a:prstGeom>
-          <a:noFill/>
-          <a:ln/>
-        </p:spPr>
-        <p:txBody>
-          <a:bodyPr wrap="square" lIns="0" tIns="0" rIns="0" bIns="0" rtlCol="0" anchor="ctr"/>
-          <a:lstStyle/>
-          <a:p>
-            <a:pPr indent="0" marL="0">
-              <a:buNone/>
-            </a:pPr>
-            <a:r>
-              <a:rPr lang="en-US" sz="1400" dirty="0">
+              <a:t>A queda vira evento</a:t>
+            </a:r>
+            <a:endParaRPr lang="en-US" sz="1600" dirty="0"/>
+          </a:p>
+        </p:txBody>
+      </p:sp>
+      <p:sp>
+        <p:nvSpPr>
+          <p:cNvPr id="7" name="Text 5"/>
+          <p:cNvSpPr txBox="1"/>
+          <p:nvPr/>
+        </p:nvSpPr>
+        <p:spPr>
+          <a:xfrm>
+            <a:off x="941832" y="3547872"/>
+            <a:ext cx="2926080" cy="914400"/>
+          </a:xfrm>
+          <a:prstGeom prst="rect">
+            <a:avLst/>
+          </a:prstGeom>
+          <a:noFill/>
+          <a:ln/>
+        </p:spPr>
+        <p:txBody>
+          <a:bodyPr wrap="square" lIns="0" tIns="0" rIns="0" bIns="0" rtlCol="0" anchor="ctr"/>
+          <a:lstStyle/>
+          <a:p>
+            <a:pPr indent="0" marL="0">
+              <a:lnSpc>
+                <a:spcPts val="1600"/>
+              </a:lnSpc>
+              <a:buNone/>
+            </a:pPr>
+            <a:r>
+              <a:rPr lang="en-US" sz="1200" dirty="0">
                 <a:solidFill>
                   <a:srgbClr val="9DB0A6"/>
                 </a:solidFill>
@@ -10820,76 +12395,335 @@
                 <a:ea typeface="Calibri" pitchFamily="34" charset="-122"/>
                 <a:cs typeface="Calibri" pitchFamily="34" charset="-120"/>
               </a:rPr>
-              <a:t>Sete rotas em FastAPI sobre o PostgreSQL. A única que escreve alguma coisa é a da imagem, e o que ela escreve é </a:t>
-            </a:r>
-            <a:pPr indent="0" marL="0">
-              <a:buNone/>
-            </a:pPr>
-            <a:r>
-              <a:rPr lang="en-US" sz="1400" b="1" dirty="0">
+              <a:t>O evento entra na corrente antes de qualquer tentativa de avisar alguém.</a:t>
+            </a:r>
+            <a:endParaRPr lang="en-US" sz="1200" dirty="0"/>
+          </a:p>
+        </p:txBody>
+      </p:sp>
+      <p:sp>
+        <p:nvSpPr>
+          <p:cNvPr id="8" name="Text 6"/>
+          <p:cNvSpPr txBox="1"/>
+          <p:nvPr/>
+        </p:nvSpPr>
+        <p:spPr>
+          <a:xfrm>
+            <a:off x="941832" y="4480560"/>
+            <a:ext cx="2926080" cy="548640"/>
+          </a:xfrm>
+          <a:prstGeom prst="rect">
+            <a:avLst/>
+          </a:prstGeom>
+          <a:noFill/>
+          <a:ln/>
+        </p:spPr>
+        <p:txBody>
+          <a:bodyPr wrap="square" lIns="0" tIns="0" rIns="0" bIns="0" rtlCol="0" anchor="ctr"/>
+          <a:lstStyle/>
+          <a:p>
+            <a:pPr indent="0" marL="0">
+              <a:lnSpc>
+                <a:spcPts val="1200"/>
+              </a:lnSpc>
+              <a:buNone/>
+            </a:pPr>
+            <a:r>
+              <a:rPr lang="en-US" sz="850" dirty="0">
+                <a:solidFill>
+                  <a:srgbClr val="6A7D74"/>
+                </a:solidFill>
+                <a:latin typeface="Courier New" pitchFamily="34" charset="0"/>
+                <a:ea typeface="Courier New" pitchFamily="34" charset="-122"/>
+                <a:cs typeface="Courier New" pitchFamily="34" charset="-120"/>
+              </a:rPr>
+              <a:t>o registro nunca depende da nuvem estar de pé</a:t>
+            </a:r>
+            <a:endParaRPr lang="en-US" sz="850" dirty="0"/>
+          </a:p>
+        </p:txBody>
+      </p:sp>
+      <p:sp>
+        <p:nvSpPr>
+          <p:cNvPr id="9" name="Shape 7"/>
+          <p:cNvSpPr/>
+          <p:nvPr/>
+        </p:nvSpPr>
+        <p:spPr>
+          <a:xfrm>
+            <a:off x="4370832" y="2606040"/>
+            <a:ext cx="3410712" cy="2514600"/>
+          </a:xfrm>
+          <a:prstGeom prst="roundRect">
+            <a:avLst>
+              <a:gd name="adj" fmla="val 3636"/>
+            </a:avLst>
+          </a:prstGeom>
+          <a:solidFill>
+            <a:srgbClr val="17211C"/>
+          </a:solidFill>
+          <a:ln w="12700">
+            <a:solidFill>
+              <a:srgbClr val="24322B"/>
+            </a:solidFill>
+            <a:prstDash val="solid"/>
+          </a:ln>
+        </p:spPr>
+      </p:sp>
+      <p:sp>
+        <p:nvSpPr>
+          <p:cNvPr id="10" name="Text 8"/>
+          <p:cNvSpPr txBox="1"/>
+          <p:nvPr/>
+        </p:nvSpPr>
+        <p:spPr>
+          <a:xfrm>
+            <a:off x="4626864" y="2816352"/>
+            <a:ext cx="2926080" cy="228600"/>
+          </a:xfrm>
+          <a:prstGeom prst="rect">
+            <a:avLst/>
+          </a:prstGeom>
+          <a:noFill/>
+          <a:ln/>
+        </p:spPr>
+        <p:txBody>
+          <a:bodyPr wrap="square" lIns="0" tIns="0" rIns="0" bIns="0" rtlCol="0" anchor="ctr"/>
+          <a:lstStyle/>
+          <a:p>
+            <a:pPr indent="0" marL="0">
+              <a:buNone/>
+            </a:pPr>
+            <a:r>
+              <a:rPr lang="en-US" sz="950" spc="150" kern="0" dirty="0">
+                <a:solidFill>
+                  <a:srgbClr val="3FBF5A"/>
+                </a:solidFill>
+                <a:latin typeface="Courier New" pitchFamily="34" charset="0"/>
+                <a:ea typeface="Courier New" pitchFamily="34" charset="-122"/>
+                <a:cs typeface="Courier New" pitchFamily="34" charset="-120"/>
+              </a:rPr>
+              <a:t>NA NUVEM</a:t>
+            </a:r>
+            <a:endParaRPr lang="en-US" sz="950" dirty="0"/>
+          </a:p>
+        </p:txBody>
+      </p:sp>
+      <p:sp>
+        <p:nvSpPr>
+          <p:cNvPr id="11" name="Text 9"/>
+          <p:cNvSpPr txBox="1"/>
+          <p:nvPr/>
+        </p:nvSpPr>
+        <p:spPr>
+          <a:xfrm>
+            <a:off x="4626864" y="3090672"/>
+            <a:ext cx="2926080" cy="365760"/>
+          </a:xfrm>
+          <a:prstGeom prst="rect">
+            <a:avLst/>
+          </a:prstGeom>
+          <a:noFill/>
+          <a:ln/>
+        </p:spPr>
+        <p:txBody>
+          <a:bodyPr wrap="square" lIns="0" tIns="0" rIns="0" bIns="0" rtlCol="0" anchor="ctr"/>
+          <a:lstStyle/>
+          <a:p>
+            <a:pPr indent="0" marL="0">
+              <a:buNone/>
+            </a:pPr>
+            <a:r>
+              <a:rPr lang="en-US" sz="1600" b="1" dirty="0">
                 <a:solidFill>
                   <a:srgbClr val="EDF3EF"/>
+                </a:solidFill>
+                <a:latin typeface="Arial" pitchFamily="34" charset="0"/>
+                <a:ea typeface="Arial" pitchFamily="34" charset="-122"/>
+                <a:cs typeface="Arial" pitchFamily="34" charset="-120"/>
+              </a:rPr>
+              <a:t>Uma função envia</a:t>
+            </a:r>
+            <a:endParaRPr lang="en-US" sz="1600" dirty="0"/>
+          </a:p>
+        </p:txBody>
+      </p:sp>
+      <p:sp>
+        <p:nvSpPr>
+          <p:cNvPr id="12" name="Text 10"/>
+          <p:cNvSpPr txBox="1"/>
+          <p:nvPr/>
+        </p:nvSpPr>
+        <p:spPr>
+          <a:xfrm>
+            <a:off x="4626864" y="3547872"/>
+            <a:ext cx="2926080" cy="914400"/>
+          </a:xfrm>
+          <a:prstGeom prst="rect">
+            <a:avLst/>
+          </a:prstGeom>
+          <a:noFill/>
+          <a:ln/>
+        </p:spPr>
+        <p:txBody>
+          <a:bodyPr wrap="square" lIns="0" tIns="0" rIns="0" bIns="0" rtlCol="0" anchor="ctr"/>
+          <a:lstStyle/>
+          <a:p>
+            <a:pPr indent="0" marL="0">
+              <a:lnSpc>
+                <a:spcPts val="1600"/>
+              </a:lnSpc>
+              <a:buNone/>
+            </a:pPr>
+            <a:r>
+              <a:rPr lang="en-US" sz="1200" dirty="0">
+                <a:solidFill>
+                  <a:srgbClr val="9DB0A6"/>
                 </a:solidFill>
                 <a:latin typeface="Calibri" pitchFamily="34" charset="0"/>
                 <a:ea typeface="Calibri" pitchFamily="34" charset="-122"/>
                 <a:cs typeface="Calibri" pitchFamily="34" charset="-120"/>
               </a:rPr>
-              <a:t>quem olhou.</a:t>
-            </a:r>
-            <a:endParaRPr lang="en-US" sz="1400" dirty="0"/>
-          </a:p>
-        </p:txBody>
-      </p:sp>
-      <p:pic>
-        <p:nvPicPr>
-          <p:cNvPr id="5" name="Image 0" descr="./ppt/calor.png">    </p:cNvPr>
-          <p:cNvPicPr>
-            <a:picLocks noChangeAspect="1"/>
-          </p:cNvPicPr>
-          <p:nvPr/>
-        </p:nvPicPr>
-        <p:blipFill>
-          <a:blip r:embed="rId1"/>
-          <a:stretch>
-            <a:fillRect/>
-          </a:stretch>
-        </p:blipFill>
-        <p:spPr>
-          <a:xfrm>
-            <a:off x="685800" y="3063240"/>
-            <a:ext cx="5120640" cy="3319272"/>
-          </a:xfrm>
-          <a:prstGeom prst="rect">
-            <a:avLst/>
-          </a:prstGeom>
-        </p:spPr>
-      </p:pic>
-      <p:sp>
-        <p:nvSpPr>
-          <p:cNvPr id="6" name="Text 3"/>
-          <p:cNvSpPr txBox="1"/>
-          <p:nvPr/>
-        </p:nvSpPr>
-        <p:spPr>
-          <a:xfrm>
-            <a:off x="6172200" y="3154680"/>
-            <a:ext cx="5394960" cy="274320"/>
-          </a:xfrm>
-          <a:prstGeom prst="rect">
-            <a:avLst/>
-          </a:prstGeom>
-          <a:noFill/>
-          <a:ln/>
-        </p:spPr>
-        <p:txBody>
-          <a:bodyPr wrap="square" lIns="0" tIns="0" rIns="0" bIns="0" rtlCol="0" anchor="ctr"/>
-          <a:lstStyle/>
-          <a:p>
-            <a:pPr indent="0" marL="0">
-              <a:buNone/>
-            </a:pPr>
-            <a:r>
-              <a:rPr lang="en-US" sz="1400" b="1" dirty="0">
+              <a:t>A escola não guarda senha de e-mail nenhuma. A credencial não existe como arquivo.</a:t>
+            </a:r>
+            <a:endParaRPr lang="en-US" sz="1200" dirty="0"/>
+          </a:p>
+        </p:txBody>
+      </p:sp>
+      <p:sp>
+        <p:nvSpPr>
+          <p:cNvPr id="13" name="Text 11"/>
+          <p:cNvSpPr txBox="1"/>
+          <p:nvPr/>
+        </p:nvSpPr>
+        <p:spPr>
+          <a:xfrm>
+            <a:off x="4626864" y="4480560"/>
+            <a:ext cx="2926080" cy="548640"/>
+          </a:xfrm>
+          <a:prstGeom prst="rect">
+            <a:avLst/>
+          </a:prstGeom>
+          <a:noFill/>
+          <a:ln/>
+        </p:spPr>
+        <p:txBody>
+          <a:bodyPr wrap="square" lIns="0" tIns="0" rIns="0" bIns="0" rtlCol="0" anchor="ctr"/>
+          <a:lstStyle/>
+          <a:p>
+            <a:pPr indent="0" marL="0">
+              <a:lnSpc>
+                <a:spcPts val="1200"/>
+              </a:lnSpc>
+              <a:buNone/>
+            </a:pPr>
+            <a:r>
+              <a:rPr lang="en-US" sz="850" dirty="0">
+                <a:solidFill>
+                  <a:srgbClr val="6A7D74"/>
+                </a:solidFill>
+                <a:latin typeface="Courier New" pitchFamily="34" charset="0"/>
+                <a:ea typeface="Courier New" pitchFamily="34" charset="-122"/>
+                <a:cs typeface="Courier New" pitchFamily="34" charset="-120"/>
+              </a:rPr>
+              <a:t>segredo compartilhado barra quem descobrir a URL</a:t>
+            </a:r>
+            <a:endParaRPr lang="en-US" sz="850" dirty="0"/>
+          </a:p>
+        </p:txBody>
+      </p:sp>
+      <p:sp>
+        <p:nvSpPr>
+          <p:cNvPr id="14" name="Shape 12"/>
+          <p:cNvSpPr/>
+          <p:nvPr/>
+        </p:nvSpPr>
+        <p:spPr>
+          <a:xfrm>
+            <a:off x="8055864" y="2606040"/>
+            <a:ext cx="3410712" cy="2514600"/>
+          </a:xfrm>
+          <a:prstGeom prst="roundRect">
+            <a:avLst>
+              <a:gd name="adj" fmla="val 3636"/>
+            </a:avLst>
+          </a:prstGeom>
+          <a:solidFill>
+            <a:srgbClr val="17211C"/>
+          </a:solidFill>
+          <a:ln w="12700">
+            <a:solidFill>
+              <a:srgbClr val="24322B"/>
+            </a:solidFill>
+            <a:prstDash val="solid"/>
+          </a:ln>
+        </p:spPr>
+      </p:sp>
+      <p:sp>
+        <p:nvSpPr>
+          <p:cNvPr id="15" name="Text 13"/>
+          <p:cNvSpPr txBox="1"/>
+          <p:nvPr/>
+        </p:nvSpPr>
+        <p:spPr>
+          <a:xfrm>
+            <a:off x="8311896" y="2816352"/>
+            <a:ext cx="2926080" cy="228600"/>
+          </a:xfrm>
+          <a:prstGeom prst="rect">
+            <a:avLst/>
+          </a:prstGeom>
+          <a:noFill/>
+          <a:ln/>
+        </p:spPr>
+        <p:txBody>
+          <a:bodyPr wrap="square" lIns="0" tIns="0" rIns="0" bIns="0" rtlCol="0" anchor="ctr"/>
+          <a:lstStyle/>
+          <a:p>
+            <a:pPr indent="0" marL="0">
+              <a:buNone/>
+            </a:pPr>
+            <a:r>
+              <a:rPr lang="en-US" sz="950" spc="150" kern="0" dirty="0">
+                <a:solidFill>
+                  <a:srgbClr val="3FBF5A"/>
+                </a:solidFill>
+                <a:latin typeface="Courier New" pitchFamily="34" charset="0"/>
+                <a:ea typeface="Courier New" pitchFamily="34" charset="-122"/>
+                <a:cs typeface="Courier New" pitchFamily="34" charset="-120"/>
+              </a:rPr>
+              <a:t>NA COORDENAÇÃO</a:t>
+            </a:r>
+            <a:endParaRPr lang="en-US" sz="950" dirty="0"/>
+          </a:p>
+        </p:txBody>
+      </p:sp>
+      <p:sp>
+        <p:nvSpPr>
+          <p:cNvPr id="16" name="Text 14"/>
+          <p:cNvSpPr txBox="1"/>
+          <p:nvPr/>
+        </p:nvSpPr>
+        <p:spPr>
+          <a:xfrm>
+            <a:off x="8311896" y="3090672"/>
+            <a:ext cx="2926080" cy="365760"/>
+          </a:xfrm>
+          <a:prstGeom prst="rect">
+            <a:avLst/>
+          </a:prstGeom>
+          <a:noFill/>
+          <a:ln/>
+        </p:spPr>
+        <p:txBody>
+          <a:bodyPr wrap="square" lIns="0" tIns="0" rIns="0" bIns="0" rtlCol="0" anchor="ctr"/>
+          <a:lstStyle/>
+          <a:p>
+            <a:pPr indent="0" marL="0">
+              <a:buNone/>
+            </a:pPr>
+            <a:r>
+              <a:rPr lang="en-US" sz="1600" b="1" dirty="0">
                 <a:solidFill>
                   <a:srgbClr val="EDF3EF"/>
                 </a:solidFill>
@@ -10897,77 +12731,122 @@
                 <a:ea typeface="Arial" pitchFamily="34" charset="-122"/>
                 <a:cs typeface="Arial" pitchFamily="34" charset="-120"/>
               </a:rPr>
-              <a:t>“Aconteceu alguma coisa?”</a:t>
-            </a:r>
-            <a:endParaRPr lang="en-US" sz="1400" dirty="0"/>
-          </a:p>
-        </p:txBody>
-      </p:sp>
-      <p:sp>
-        <p:nvSpPr>
-          <p:cNvPr id="7" name="Text 4"/>
-          <p:cNvSpPr txBox="1"/>
-          <p:nvPr/>
-        </p:nvSpPr>
-        <p:spPr>
-          <a:xfrm>
-            <a:off x="6172200" y="3410712"/>
-            <a:ext cx="2194560" cy="228600"/>
-          </a:xfrm>
-          <a:prstGeom prst="rect">
-            <a:avLst/>
-          </a:prstGeom>
-          <a:noFill/>
-          <a:ln/>
-        </p:spPr>
-        <p:txBody>
-          <a:bodyPr wrap="square" lIns="0" tIns="0" rIns="0" bIns="0" rtlCol="0" anchor="ctr"/>
-          <a:lstStyle/>
-          <a:p>
-            <a:pPr indent="0" marL="0">
-              <a:buNone/>
-            </a:pPr>
-            <a:r>
-              <a:rPr lang="en-US" sz="950" dirty="0">
-                <a:solidFill>
-                  <a:srgbClr val="3FBF5A"/>
+              <a:t>Um e-mail que se lê</a:t>
+            </a:r>
+            <a:endParaRPr lang="en-US" sz="1600" dirty="0"/>
+          </a:p>
+        </p:txBody>
+      </p:sp>
+      <p:sp>
+        <p:nvSpPr>
+          <p:cNvPr id="17" name="Text 15"/>
+          <p:cNvSpPr txBox="1"/>
+          <p:nvPr/>
+        </p:nvSpPr>
+        <p:spPr>
+          <a:xfrm>
+            <a:off x="8311896" y="3547872"/>
+            <a:ext cx="2926080" cy="914400"/>
+          </a:xfrm>
+          <a:prstGeom prst="rect">
+            <a:avLst/>
+          </a:prstGeom>
+          <a:noFill/>
+          <a:ln/>
+        </p:spPr>
+        <p:txBody>
+          <a:bodyPr wrap="square" lIns="0" tIns="0" rIns="0" bIns="0" rtlCol="0" anchor="ctr"/>
+          <a:lstStyle/>
+          <a:p>
+            <a:pPr indent="0" marL="0">
+              <a:lnSpc>
+                <a:spcPts val="1600"/>
+              </a:lnSpc>
+              <a:buNone/>
+            </a:pPr>
+            <a:r>
+              <a:rPr lang="en-US" sz="1200" dirty="0">
+                <a:solidFill>
+                  <a:srgbClr val="9DB0A6"/>
+                </a:solidFill>
+                <a:latin typeface="Calibri" pitchFamily="34" charset="0"/>
+                <a:ea typeface="Calibri" pitchFamily="34" charset="-122"/>
+                <a:cs typeface="Calibri" pitchFamily="34" charset="-120"/>
+              </a:rPr>
+              <a:t>O que houve, onde, quando, e que é um pedido de conferência.</a:t>
+            </a:r>
+            <a:endParaRPr lang="en-US" sz="1200" dirty="0"/>
+          </a:p>
+        </p:txBody>
+      </p:sp>
+      <p:sp>
+        <p:nvSpPr>
+          <p:cNvPr id="18" name="Text 16"/>
+          <p:cNvSpPr txBox="1"/>
+          <p:nvPr/>
+        </p:nvSpPr>
+        <p:spPr>
+          <a:xfrm>
+            <a:off x="8311896" y="4480560"/>
+            <a:ext cx="2926080" cy="548640"/>
+          </a:xfrm>
+          <a:prstGeom prst="rect">
+            <a:avLst/>
+          </a:prstGeom>
+          <a:noFill/>
+          <a:ln/>
+        </p:spPr>
+        <p:txBody>
+          <a:bodyPr wrap="square" lIns="0" tIns="0" rIns="0" bIns="0" rtlCol="0" anchor="ctr"/>
+          <a:lstStyle/>
+          <a:p>
+            <a:pPr indent="0" marL="0">
+              <a:lnSpc>
+                <a:spcPts val="1200"/>
+              </a:lnSpc>
+              <a:buNone/>
+            </a:pPr>
+            <a:r>
+              <a:rPr lang="en-US" sz="850" dirty="0">
+                <a:solidFill>
+                  <a:srgbClr val="6A7D74"/>
                 </a:solidFill>
                 <a:latin typeface="Courier New" pitchFamily="34" charset="0"/>
                 <a:ea typeface="Courier New" pitchFamily="34" charset="-122"/>
                 <a:cs typeface="Courier New" pitchFamily="34" charset="-120"/>
               </a:rPr>
-              <a:t>/api/painel</a:t>
-            </a:r>
-            <a:endParaRPr lang="en-US" sz="950" dirty="0"/>
-          </a:p>
-        </p:txBody>
-      </p:sp>
-      <p:sp>
-        <p:nvSpPr>
-          <p:cNvPr id="8" name="Text 5"/>
-          <p:cNvSpPr txBox="1"/>
-          <p:nvPr/>
-        </p:nvSpPr>
-        <p:spPr>
-          <a:xfrm>
-            <a:off x="6172200" y="3630168"/>
-            <a:ext cx="5394960" cy="274320"/>
-          </a:xfrm>
-          <a:prstGeom prst="rect">
-            <a:avLst/>
-          </a:prstGeom>
-          <a:noFill/>
-          <a:ln/>
-        </p:spPr>
-        <p:txBody>
-          <a:bodyPr wrap="square" lIns="0" tIns="0" rIns="0" bIns="0" rtlCol="0" anchor="ctr"/>
-          <a:lstStyle/>
-          <a:p>
-            <a:pPr indent="0" marL="0">
-              <a:buNone/>
-            </a:pPr>
-            <a:r>
-              <a:rPr lang="en-US" sz="1150" dirty="0">
+              <a:t>um aviso a cada poucos segundos é um aviso que ninguém lê</a:t>
+            </a:r>
+            <a:endParaRPr lang="en-US" sz="850" dirty="0"/>
+          </a:p>
+        </p:txBody>
+      </p:sp>
+      <p:sp>
+        <p:nvSpPr>
+          <p:cNvPr id="19" name="Text 17"/>
+          <p:cNvSpPr txBox="1"/>
+          <p:nvPr/>
+        </p:nvSpPr>
+        <p:spPr>
+          <a:xfrm>
+            <a:off x="685800" y="5486400"/>
+            <a:ext cx="10515600" cy="457200"/>
+          </a:xfrm>
+          <a:prstGeom prst="rect">
+            <a:avLst/>
+          </a:prstGeom>
+          <a:noFill/>
+          <a:ln/>
+        </p:spPr>
+        <p:txBody>
+          <a:bodyPr wrap="square" lIns="0" tIns="0" rIns="0" bIns="0" rtlCol="0" anchor="ctr"/>
+          <a:lstStyle/>
+          <a:p>
+            <a:pPr indent="0" marL="0">
+              <a:buNone/>
+            </a:pPr>
+            <a:r>
+              <a:rPr lang="en-US" sz="1400" dirty="0">
                 <a:solidFill>
                   <a:srgbClr val="9DB0A6"/>
                 </a:solidFill>
@@ -10975,46 +12854,7 @@
                 <a:ea typeface="Calibri" pitchFamily="34" charset="-122"/>
                 <a:cs typeface="Calibri" pitchFamily="34" charset="-120"/>
               </a:rPr>
-              <a:t>Último evento, onde, há quanto tempo. E a corrente em uma palavra.</a:t>
-            </a:r>
-            <a:endParaRPr lang="en-US" sz="1150" dirty="0"/>
-          </a:p>
-        </p:txBody>
-      </p:sp>
-      <p:sp>
-        <p:nvSpPr>
-          <p:cNvPr id="9" name="Text 6"/>
-          <p:cNvSpPr txBox="1"/>
-          <p:nvPr/>
-        </p:nvSpPr>
-        <p:spPr>
-          <a:xfrm>
-            <a:off x="6172200" y="3959352"/>
-            <a:ext cx="5394960" cy="274320"/>
-          </a:xfrm>
-          <a:prstGeom prst="rect">
-            <a:avLst/>
-          </a:prstGeom>
-          <a:noFill/>
-          <a:ln/>
-        </p:spPr>
-        <p:txBody>
-          <a:bodyPr wrap="square" lIns="0" tIns="0" rIns="0" bIns="0" rtlCol="0" anchor="ctr"/>
-          <a:lstStyle/>
-          <a:p>
-            <a:pPr indent="0" marL="0">
-              <a:buNone/>
-            </a:pPr>
-            <a:r>
-              <a:rPr lang="en-US" sz="1400" b="1" dirty="0">
-                <a:solidFill>
-                  <a:srgbClr val="EDF3EF"/>
-                </a:solidFill>
-                <a:latin typeface="Arial" pitchFamily="34" charset="0"/>
-                <a:ea typeface="Arial" pitchFamily="34" charset="-122"/>
-                <a:cs typeface="Arial" pitchFamily="34" charset="-120"/>
-              </a:rPr>
-              <a:t>“Onde a sala aperta?”</a:t>
+              <a:t>O caminho tem teste automático, inclusive o que custa caro quando falha: e-mail sem segredo e e-mail em rajada.</a:t>
             </a:r>
             <a:endParaRPr lang="en-US" sz="1400" dirty="0"/>
           </a:p>
@@ -11022,349 +12862,37 @@
       </p:sp>
       <p:sp>
         <p:nvSpPr>
-          <p:cNvPr id="10" name="Text 7"/>
-          <p:cNvSpPr txBox="1"/>
-          <p:nvPr/>
-        </p:nvSpPr>
-        <p:spPr>
-          <a:xfrm>
-            <a:off x="6172200" y="4215384"/>
-            <a:ext cx="2194560" cy="228600"/>
-          </a:xfrm>
-          <a:prstGeom prst="rect">
-            <a:avLst/>
-          </a:prstGeom>
-          <a:noFill/>
-          <a:ln/>
-        </p:spPr>
-        <p:txBody>
-          <a:bodyPr wrap="square" lIns="0" tIns="0" rIns="0" bIns="0" rtlCol="0" anchor="ctr"/>
-          <a:lstStyle/>
-          <a:p>
-            <a:pPr indent="0" marL="0">
-              <a:buNone/>
-            </a:pPr>
-            <a:r>
-              <a:rPr lang="en-US" sz="950" dirty="0">
-                <a:solidFill>
-                  <a:srgbClr val="3FBF5A"/>
+          <p:cNvPr id="20" name="Text 18"/>
+          <p:cNvSpPr txBox="1"/>
+          <p:nvPr/>
+        </p:nvSpPr>
+        <p:spPr>
+          <a:xfrm>
+            <a:off x="685800" y="6291072"/>
+            <a:ext cx="5486400" cy="274320"/>
+          </a:xfrm>
+          <a:prstGeom prst="rect">
+            <a:avLst/>
+          </a:prstGeom>
+          <a:noFill/>
+          <a:ln/>
+        </p:spPr>
+        <p:txBody>
+          <a:bodyPr wrap="square" lIns="0" tIns="0" rIns="0" bIns="0" rtlCol="0" anchor="ctr"/>
+          <a:lstStyle/>
+          <a:p>
+            <a:pPr indent="0" marL="0">
+              <a:buNone/>
+            </a:pPr>
+            <a:r>
+              <a:rPr lang="en-US" sz="900" dirty="0">
+                <a:solidFill>
+                  <a:srgbClr val="6A7D74"/>
                 </a:solidFill>
                 <a:latin typeface="Courier New" pitchFamily="34" charset="0"/>
                 <a:ea typeface="Courier New" pitchFamily="34" charset="-122"/>
                 <a:cs typeface="Courier New" pitchFamily="34" charset="-120"/>
               </a:rPr>
-              <a:t>/api/mapa</a:t>
-            </a:r>
-            <a:endParaRPr lang="en-US" sz="950" dirty="0"/>
-          </a:p>
-        </p:txBody>
-      </p:sp>
-      <p:sp>
-        <p:nvSpPr>
-          <p:cNvPr id="11" name="Text 8"/>
-          <p:cNvSpPr txBox="1"/>
-          <p:nvPr/>
-        </p:nvSpPr>
-        <p:spPr>
-          <a:xfrm>
-            <a:off x="6172200" y="4434840"/>
-            <a:ext cx="5394960" cy="274320"/>
-          </a:xfrm>
-          <a:prstGeom prst="rect">
-            <a:avLst/>
-          </a:prstGeom>
-          <a:noFill/>
-          <a:ln/>
-        </p:spPr>
-        <p:txBody>
-          <a:bodyPr wrap="square" lIns="0" tIns="0" rIns="0" bIns="0" rtlCol="0" anchor="ctr"/>
-          <a:lstStyle/>
-          <a:p>
-            <a:pPr indent="0" marL="0">
-              <a:buNone/>
-            </a:pPr>
-            <a:r>
-              <a:rPr lang="en-US" sz="1150" dirty="0">
-                <a:solidFill>
-                  <a:srgbClr val="9DB0A6"/>
-                </a:solidFill>
-                <a:latin typeface="Calibri" pitchFamily="34" charset="0"/>
-                <a:ea typeface="Calibri" pitchFamily="34" charset="-122"/>
-                <a:cs typeface="Calibri" pitchFamily="34" charset="-120"/>
-              </a:rPr>
-              <a:t>Mapa suavizado por vizinhança, com um anel em onde mais pararam.</a:t>
-            </a:r>
-            <a:endParaRPr lang="en-US" sz="1150" dirty="0"/>
-          </a:p>
-        </p:txBody>
-      </p:sp>
-      <p:sp>
-        <p:nvSpPr>
-          <p:cNvPr id="12" name="Text 9"/>
-          <p:cNvSpPr txBox="1"/>
-          <p:nvPr/>
-        </p:nvSpPr>
-        <p:spPr>
-          <a:xfrm>
-            <a:off x="6172200" y="4764024"/>
-            <a:ext cx="5394960" cy="274320"/>
-          </a:xfrm>
-          <a:prstGeom prst="rect">
-            <a:avLst/>
-          </a:prstGeom>
-          <a:noFill/>
-          <a:ln/>
-        </p:spPr>
-        <p:txBody>
-          <a:bodyPr wrap="square" lIns="0" tIns="0" rIns="0" bIns="0" rtlCol="0" anchor="ctr"/>
-          <a:lstStyle/>
-          <a:p>
-            <a:pPr indent="0" marL="0">
-              <a:buNone/>
-            </a:pPr>
-            <a:r>
-              <a:rPr lang="en-US" sz="1400" b="1" dirty="0">
-                <a:solidFill>
-                  <a:srgbClr val="EDF3EF"/>
-                </a:solidFill>
-                <a:latin typeface="Arial" pitchFamily="34" charset="0"/>
-                <a:ea typeface="Arial" pitchFamily="34" charset="-122"/>
-                <a:cs typeface="Arial" pitchFamily="34" charset="-120"/>
-              </a:rPr>
-              <a:t>“Fulano sumiu?”</a:t>
-            </a:r>
-            <a:endParaRPr lang="en-US" sz="1400" dirty="0"/>
-          </a:p>
-        </p:txBody>
-      </p:sp>
-      <p:sp>
-        <p:nvSpPr>
-          <p:cNvPr id="13" name="Text 10"/>
-          <p:cNvSpPr txBox="1"/>
-          <p:nvPr/>
-        </p:nvSpPr>
-        <p:spPr>
-          <a:xfrm>
-            <a:off x="6172200" y="5020056"/>
-            <a:ext cx="2194560" cy="228600"/>
-          </a:xfrm>
-          <a:prstGeom prst="rect">
-            <a:avLst/>
-          </a:prstGeom>
-          <a:noFill/>
-          <a:ln/>
-        </p:spPr>
-        <p:txBody>
-          <a:bodyPr wrap="square" lIns="0" tIns="0" rIns="0" bIns="0" rtlCol="0" anchor="ctr"/>
-          <a:lstStyle/>
-          <a:p>
-            <a:pPr indent="0" marL="0">
-              <a:buNone/>
-            </a:pPr>
-            <a:r>
-              <a:rPr lang="en-US" sz="950" dirty="0">
-                <a:solidFill>
-                  <a:srgbClr val="3FBF5A"/>
-                </a:solidFill>
-                <a:latin typeface="Courier New" pitchFamily="34" charset="0"/>
-                <a:ea typeface="Courier New" pitchFamily="34" charset="-122"/>
-                <a:cs typeface="Courier New" pitchFamily="34" charset="-120"/>
-              </a:rPr>
-              <a:t>/api/pessoas</a:t>
-            </a:r>
-            <a:endParaRPr lang="en-US" sz="950" dirty="0"/>
-          </a:p>
-        </p:txBody>
-      </p:sp>
-      <p:sp>
-        <p:nvSpPr>
-          <p:cNvPr id="14" name="Text 11"/>
-          <p:cNvSpPr txBox="1"/>
-          <p:nvPr/>
-        </p:nvSpPr>
-        <p:spPr>
-          <a:xfrm>
-            <a:off x="6172200" y="5239512"/>
-            <a:ext cx="5394960" cy="274320"/>
-          </a:xfrm>
-          <a:prstGeom prst="rect">
-            <a:avLst/>
-          </a:prstGeom>
-          <a:noFill/>
-          <a:ln/>
-        </p:spPr>
-        <p:txBody>
-          <a:bodyPr wrap="square" lIns="0" tIns="0" rIns="0" bIns="0" rtlCol="0" anchor="ctr"/>
-          <a:lstStyle/>
-          <a:p>
-            <a:pPr indent="0" marL="0">
-              <a:buNone/>
-            </a:pPr>
-            <a:r>
-              <a:rPr lang="en-US" sz="1150" dirty="0">
-                <a:solidFill>
-                  <a:srgbClr val="9DB0A6"/>
-                </a:solidFill>
-                <a:latin typeface="Calibri" pitchFamily="34" charset="0"/>
-                <a:ea typeface="Calibri" pitchFamily="34" charset="-122"/>
-                <a:cs typeface="Calibri" pitchFamily="34" charset="-120"/>
-              </a:rPr>
-              <a:t>Quem foi reconhecido e há quantos dias não aparece.</a:t>
-            </a:r>
-            <a:endParaRPr lang="en-US" sz="1150" dirty="0"/>
-          </a:p>
-        </p:txBody>
-      </p:sp>
-      <p:sp>
-        <p:nvSpPr>
-          <p:cNvPr id="15" name="Text 12"/>
-          <p:cNvSpPr txBox="1"/>
-          <p:nvPr/>
-        </p:nvSpPr>
-        <p:spPr>
-          <a:xfrm>
-            <a:off x="6172200" y="5568696"/>
-            <a:ext cx="5394960" cy="274320"/>
-          </a:xfrm>
-          <a:prstGeom prst="rect">
-            <a:avLst/>
-          </a:prstGeom>
-          <a:noFill/>
-          <a:ln/>
-        </p:spPr>
-        <p:txBody>
-          <a:bodyPr wrap="square" lIns="0" tIns="0" rIns="0" bIns="0" rtlCol="0" anchor="ctr"/>
-          <a:lstStyle/>
-          <a:p>
-            <a:pPr indent="0" marL="0">
-              <a:buNone/>
-            </a:pPr>
-            <a:r>
-              <a:rPr lang="en-US" sz="1400" b="1" dirty="0">
-                <a:solidFill>
-                  <a:srgbClr val="EDF3EF"/>
-                </a:solidFill>
-                <a:latin typeface="Arial" pitchFamily="34" charset="0"/>
-                <a:ea typeface="Arial" pitchFamily="34" charset="-122"/>
-                <a:cs typeface="Arial" pitchFamily="34" charset="-120"/>
-              </a:rPr>
-              <a:t>“Posso confiar nisto?”</a:t>
-            </a:r>
-            <a:endParaRPr lang="en-US" sz="1400" dirty="0"/>
-          </a:p>
-        </p:txBody>
-      </p:sp>
-      <p:sp>
-        <p:nvSpPr>
-          <p:cNvPr id="16" name="Text 13"/>
-          <p:cNvSpPr txBox="1"/>
-          <p:nvPr/>
-        </p:nvSpPr>
-        <p:spPr>
-          <a:xfrm>
-            <a:off x="6172200" y="5824728"/>
-            <a:ext cx="2194560" cy="228600"/>
-          </a:xfrm>
-          <a:prstGeom prst="rect">
-            <a:avLst/>
-          </a:prstGeom>
-          <a:noFill/>
-          <a:ln/>
-        </p:spPr>
-        <p:txBody>
-          <a:bodyPr wrap="square" lIns="0" tIns="0" rIns="0" bIns="0" rtlCol="0" anchor="ctr"/>
-          <a:lstStyle/>
-          <a:p>
-            <a:pPr indent="0" marL="0">
-              <a:buNone/>
-            </a:pPr>
-            <a:r>
-              <a:rPr lang="en-US" sz="950" dirty="0">
-                <a:solidFill>
-                  <a:srgbClr val="3FBF5A"/>
-                </a:solidFill>
-                <a:latin typeface="Courier New" pitchFamily="34" charset="0"/>
-                <a:ea typeface="Courier New" pitchFamily="34" charset="-122"/>
-                <a:cs typeface="Courier New" pitchFamily="34" charset="-120"/>
-              </a:rPr>
-              <a:t>/api/verificar</a:t>
-            </a:r>
-            <a:endParaRPr lang="en-US" sz="950" dirty="0"/>
-          </a:p>
-        </p:txBody>
-      </p:sp>
-      <p:sp>
-        <p:nvSpPr>
-          <p:cNvPr id="17" name="Text 14"/>
-          <p:cNvSpPr txBox="1"/>
-          <p:nvPr/>
-        </p:nvSpPr>
-        <p:spPr>
-          <a:xfrm>
-            <a:off x="6172200" y="6044184"/>
-            <a:ext cx="5394960" cy="274320"/>
-          </a:xfrm>
-          <a:prstGeom prst="rect">
-            <a:avLst/>
-          </a:prstGeom>
-          <a:noFill/>
-          <a:ln/>
-        </p:spPr>
-        <p:txBody>
-          <a:bodyPr wrap="square" lIns="0" tIns="0" rIns="0" bIns="0" rtlCol="0" anchor="ctr"/>
-          <a:lstStyle/>
-          <a:p>
-            <a:pPr indent="0" marL="0">
-              <a:buNone/>
-            </a:pPr>
-            <a:r>
-              <a:rPr lang="en-US" sz="1150" dirty="0">
-                <a:solidFill>
-                  <a:srgbClr val="9DB0A6"/>
-                </a:solidFill>
-                <a:latin typeface="Calibri" pitchFamily="34" charset="0"/>
-                <a:ea typeface="Calibri" pitchFamily="34" charset="-122"/>
-                <a:cs typeface="Calibri" pitchFamily="34" charset="-120"/>
-              </a:rPr>
-              <a:t>Recalcula a corrente desde a gênese, contra o hash recalculado.</a:t>
-            </a:r>
-            <a:endParaRPr lang="en-US" sz="1150" dirty="0"/>
-          </a:p>
-        </p:txBody>
-      </p:sp>
-      <p:sp>
-        <p:nvSpPr>
-          <p:cNvPr id="18" name="Text 15"/>
-          <p:cNvSpPr txBox="1"/>
-          <p:nvPr/>
-        </p:nvSpPr>
-        <p:spPr>
-          <a:xfrm>
-            <a:off x="685800" y="6291072"/>
-            <a:ext cx="5486400" cy="274320"/>
-          </a:xfrm>
-          <a:prstGeom prst="rect">
-            <a:avLst/>
-          </a:prstGeom>
-          <a:noFill/>
-          <a:ln/>
-        </p:spPr>
-        <p:txBody>
-          <a:bodyPr wrap="square" lIns="0" tIns="0" rIns="0" bIns="0" rtlCol="0" anchor="ctr"/>
-          <a:lstStyle/>
-          <a:p>
-            <a:pPr indent="0" marL="0">
-              <a:buNone/>
-            </a:pPr>
-            <a:r>
-              <a:rPr lang="en-US" sz="900" dirty="0">
-                <a:solidFill>
-                  <a:srgbClr val="6A7D74"/>
-                </a:solidFill>
-                <a:latin typeface="Courier New" pitchFamily="34" charset="0"/>
-                <a:ea typeface="Courier New" pitchFamily="34" charset="-122"/>
-                <a:cs typeface="Courier New" pitchFamily="34" charset="-120"/>
-              </a:rPr>
               <a:t>Auditix AI  ·  SVATech  ·  grupo 11</a:t>
             </a:r>
             <a:endParaRPr lang="en-US" sz="900" dirty="0"/>
@@ -11373,7 +12901,7 @@
       </p:sp>
       <p:sp>
         <p:nvSpPr>
-          <p:cNvPr id="19" name="Text 16"/>
+          <p:cNvPr id="21" name="Text 19"/>
           <p:cNvSpPr txBox="1"/>
           <p:nvPr/>
         </p:nvSpPr>
@@ -11475,7 +13003,7 @@
                 <a:ea typeface="Courier New" pitchFamily="34" charset="-122"/>
                 <a:cs typeface="Courier New" pitchFamily="34" charset="-120"/>
               </a:rPr>
-              <a:t>ONDE ISTO VAI DAR</a:t>
+              <a:t>DASHBOARD LIGADO AO BANCO POR API</a:t>
             </a:r>
             <a:endParaRPr lang="en-US" sz="1100" dirty="0"/>
           </a:p>
@@ -11517,61 +13045,174 @@
                 <a:ea typeface="Arial" pitchFamily="34" charset="-122"/>
                 <a:cs typeface="Arial" pitchFamily="34" charset="-120"/>
               </a:rPr>
-              <a:t>De uma sala para a rede inteira.</a:t>
+              <a:t>Um dashboard que lê o banco,</a:t>
             </a:r>
             <a:endParaRPr lang="en-US" sz="3600" dirty="0"/>
           </a:p>
-        </p:txBody>
-      </p:sp>
-      <p:sp>
-        <p:nvSpPr>
-          <p:cNvPr id="4" name="Shape 2"/>
-          <p:cNvSpPr/>
-          <p:nvPr/>
-        </p:nvSpPr>
-        <p:spPr>
-          <a:xfrm>
-            <a:off x="685800" y="2331720"/>
-            <a:ext cx="10789920" cy="0"/>
-          </a:xfrm>
-          <a:prstGeom prst="line">
-            <a:avLst/>
-          </a:prstGeom>
-          <a:noFill/>
-          <a:ln w="12700">
-            <a:solidFill>
-              <a:srgbClr val="24322B"/>
-            </a:solidFill>
-            <a:prstDash val="solid"/>
-          </a:ln>
-        </p:spPr>
-      </p:sp>
-      <p:sp>
-        <p:nvSpPr>
-          <p:cNvPr id="5" name="Text 3"/>
-          <p:cNvSpPr txBox="1"/>
-          <p:nvPr/>
-        </p:nvSpPr>
-        <p:spPr>
-          <a:xfrm>
-            <a:off x="685800" y="2496312"/>
-            <a:ext cx="1645920" cy="274320"/>
-          </a:xfrm>
-          <a:prstGeom prst="rect">
-            <a:avLst/>
-          </a:prstGeom>
-          <a:noFill/>
-          <a:ln/>
-        </p:spPr>
-        <p:txBody>
-          <a:bodyPr wrap="square" lIns="0" tIns="0" rIns="0" bIns="0" rtlCol="0" anchor="ctr"/>
-          <a:lstStyle/>
-          <a:p>
-            <a:pPr indent="0" marL="0">
-              <a:buNone/>
-            </a:pPr>
-            <a:r>
-              <a:rPr lang="en-US" sz="1000" spc="150" kern="0" dirty="0">
+          <a:p>
+            <a:pPr indent="0" marL="0">
+              <a:lnSpc>
+                <a:spcPts val="3800"/>
+              </a:lnSpc>
+              <a:buNone/>
+            </a:pPr>
+            <a:r>
+              <a:rPr lang="en-US" sz="3600" b="1" dirty="0">
+                <a:solidFill>
+                  <a:srgbClr val="EDF3EF"/>
+                </a:solidFill>
+                <a:latin typeface="Arial" pitchFamily="34" charset="0"/>
+                <a:ea typeface="Arial" pitchFamily="34" charset="-122"/>
+                <a:cs typeface="Arial" pitchFamily="34" charset="-120"/>
+              </a:rPr>
+              <a:t>não um print de tela.</a:t>
+            </a:r>
+            <a:endParaRPr lang="en-US" sz="3600" dirty="0"/>
+          </a:p>
+        </p:txBody>
+      </p:sp>
+      <p:sp>
+        <p:nvSpPr>
+          <p:cNvPr id="4" name="Text 2"/>
+          <p:cNvSpPr txBox="1"/>
+          <p:nvPr/>
+        </p:nvSpPr>
+        <p:spPr>
+          <a:xfrm>
+            <a:off x="685800" y="2514600"/>
+            <a:ext cx="10515600" cy="502920"/>
+          </a:xfrm>
+          <a:prstGeom prst="rect">
+            <a:avLst/>
+          </a:prstGeom>
+          <a:noFill/>
+          <a:ln/>
+        </p:spPr>
+        <p:txBody>
+          <a:bodyPr wrap="square" lIns="0" tIns="0" rIns="0" bIns="0" rtlCol="0" anchor="ctr"/>
+          <a:lstStyle/>
+          <a:p>
+            <a:pPr indent="0" marL="0">
+              <a:buNone/>
+            </a:pPr>
+            <a:r>
+              <a:rPr lang="en-US" sz="1400" dirty="0">
+                <a:solidFill>
+                  <a:srgbClr val="9DB0A6"/>
+                </a:solidFill>
+                <a:latin typeface="Calibri" pitchFamily="34" charset="0"/>
+                <a:ea typeface="Calibri" pitchFamily="34" charset="-122"/>
+                <a:cs typeface="Calibri" pitchFamily="34" charset="-120"/>
+              </a:rPr>
+              <a:t>Sete rotas em FastAPI sobre o PostgreSQL. A única que escreve alguma coisa é a da imagem, e o que ela escreve é </a:t>
+            </a:r>
+            <a:pPr indent="0" marL="0">
+              <a:buNone/>
+            </a:pPr>
+            <a:r>
+              <a:rPr lang="en-US" sz="1400" b="1" dirty="0">
+                <a:solidFill>
+                  <a:srgbClr val="EDF3EF"/>
+                </a:solidFill>
+                <a:latin typeface="Calibri" pitchFamily="34" charset="0"/>
+                <a:ea typeface="Calibri" pitchFamily="34" charset="-122"/>
+                <a:cs typeface="Calibri" pitchFamily="34" charset="-120"/>
+              </a:rPr>
+              <a:t>quem olhou.</a:t>
+            </a:r>
+            <a:endParaRPr lang="en-US" sz="1400" dirty="0"/>
+          </a:p>
+        </p:txBody>
+      </p:sp>
+      <p:pic>
+        <p:nvPicPr>
+          <p:cNvPr id="5" name="Image 0" descr="./ppt/calor.png">    </p:cNvPr>
+          <p:cNvPicPr>
+            <a:picLocks noChangeAspect="1"/>
+          </p:cNvPicPr>
+          <p:nvPr/>
+        </p:nvPicPr>
+        <p:blipFill>
+          <a:blip r:embed="rId1"/>
+          <a:stretch>
+            <a:fillRect/>
+          </a:stretch>
+        </p:blipFill>
+        <p:spPr>
+          <a:xfrm>
+            <a:off x="685800" y="3063240"/>
+            <a:ext cx="5120640" cy="3319272"/>
+          </a:xfrm>
+          <a:prstGeom prst="rect">
+            <a:avLst/>
+          </a:prstGeom>
+        </p:spPr>
+      </p:pic>
+      <p:sp>
+        <p:nvSpPr>
+          <p:cNvPr id="6" name="Text 3"/>
+          <p:cNvSpPr txBox="1"/>
+          <p:nvPr/>
+        </p:nvSpPr>
+        <p:spPr>
+          <a:xfrm>
+            <a:off x="6172200" y="3154680"/>
+            <a:ext cx="5394960" cy="274320"/>
+          </a:xfrm>
+          <a:prstGeom prst="rect">
+            <a:avLst/>
+          </a:prstGeom>
+          <a:noFill/>
+          <a:ln/>
+        </p:spPr>
+        <p:txBody>
+          <a:bodyPr wrap="square" lIns="0" tIns="0" rIns="0" bIns="0" rtlCol="0" anchor="ctr"/>
+          <a:lstStyle/>
+          <a:p>
+            <a:pPr indent="0" marL="0">
+              <a:buNone/>
+            </a:pPr>
+            <a:r>
+              <a:rPr lang="en-US" sz="1400" b="1" dirty="0">
+                <a:solidFill>
+                  <a:srgbClr val="EDF3EF"/>
+                </a:solidFill>
+                <a:latin typeface="Arial" pitchFamily="34" charset="0"/>
+                <a:ea typeface="Arial" pitchFamily="34" charset="-122"/>
+                <a:cs typeface="Arial" pitchFamily="34" charset="-120"/>
+              </a:rPr>
+              <a:t>“Aconteceu alguma coisa?”</a:t>
+            </a:r>
+            <a:endParaRPr lang="en-US" sz="1400" dirty="0"/>
+          </a:p>
+        </p:txBody>
+      </p:sp>
+      <p:sp>
+        <p:nvSpPr>
+          <p:cNvPr id="7" name="Text 4"/>
+          <p:cNvSpPr txBox="1"/>
+          <p:nvPr/>
+        </p:nvSpPr>
+        <p:spPr>
+          <a:xfrm>
+            <a:off x="6172200" y="3410712"/>
+            <a:ext cx="2194560" cy="228600"/>
+          </a:xfrm>
+          <a:prstGeom prst="rect">
+            <a:avLst/>
+          </a:prstGeom>
+          <a:noFill/>
+          <a:ln/>
+        </p:spPr>
+        <p:txBody>
+          <a:bodyPr wrap="square" lIns="0" tIns="0" rIns="0" bIns="0" rtlCol="0" anchor="ctr"/>
+          <a:lstStyle/>
+          <a:p>
+            <a:pPr indent="0" marL="0">
+              <a:buNone/>
+            </a:pPr>
+            <a:r>
+              <a:rPr lang="en-US" sz="950" dirty="0">
                 <a:solidFill>
                   <a:srgbClr val="3FBF5A"/>
                 </a:solidFill>
@@ -11579,38 +13220,77 @@
                 <a:ea typeface="Courier New" pitchFamily="34" charset="-122"/>
                 <a:cs typeface="Courier New" pitchFamily="34" charset="-120"/>
               </a:rPr>
-              <a:t>HOJE</a:t>
-            </a:r>
-            <a:endParaRPr lang="en-US" sz="1000" dirty="0"/>
-          </a:p>
-        </p:txBody>
-      </p:sp>
-      <p:sp>
-        <p:nvSpPr>
-          <p:cNvPr id="6" name="Text 4"/>
-          <p:cNvSpPr txBox="1"/>
-          <p:nvPr/>
-        </p:nvSpPr>
-        <p:spPr>
-          <a:xfrm>
-            <a:off x="2514600" y="2441448"/>
-            <a:ext cx="5669280" cy="347472"/>
-          </a:xfrm>
-          <a:prstGeom prst="rect">
-            <a:avLst/>
-          </a:prstGeom>
-          <a:noFill/>
-          <a:ln/>
-        </p:spPr>
-        <p:txBody>
-          <a:bodyPr wrap="square" lIns="0" tIns="0" rIns="0" bIns="0" rtlCol="0" anchor="ctr"/>
-          <a:lstStyle/>
-          <a:p>
-            <a:pPr indent="0" marL="0">
-              <a:buNone/>
-            </a:pPr>
-            <a:r>
-              <a:rPr lang="en-US" sz="1700" b="1" dirty="0">
+              <a:t>/api/painel</a:t>
+            </a:r>
+            <a:endParaRPr lang="en-US" sz="950" dirty="0"/>
+          </a:p>
+        </p:txBody>
+      </p:sp>
+      <p:sp>
+        <p:nvSpPr>
+          <p:cNvPr id="8" name="Text 5"/>
+          <p:cNvSpPr txBox="1"/>
+          <p:nvPr/>
+        </p:nvSpPr>
+        <p:spPr>
+          <a:xfrm>
+            <a:off x="6172200" y="3630168"/>
+            <a:ext cx="5394960" cy="274320"/>
+          </a:xfrm>
+          <a:prstGeom prst="rect">
+            <a:avLst/>
+          </a:prstGeom>
+          <a:noFill/>
+          <a:ln/>
+        </p:spPr>
+        <p:txBody>
+          <a:bodyPr wrap="square" lIns="0" tIns="0" rIns="0" bIns="0" rtlCol="0" anchor="ctr"/>
+          <a:lstStyle/>
+          <a:p>
+            <a:pPr indent="0" marL="0">
+              <a:buNone/>
+            </a:pPr>
+            <a:r>
+              <a:rPr lang="en-US" sz="1150" dirty="0">
+                <a:solidFill>
+                  <a:srgbClr val="9DB0A6"/>
+                </a:solidFill>
+                <a:latin typeface="Calibri" pitchFamily="34" charset="0"/>
+                <a:ea typeface="Calibri" pitchFamily="34" charset="-122"/>
+                <a:cs typeface="Calibri" pitchFamily="34" charset="-120"/>
+              </a:rPr>
+              <a:t>Último evento, onde, há quanto tempo. E a corrente em uma palavra.</a:t>
+            </a:r>
+            <a:endParaRPr lang="en-US" sz="1150" dirty="0"/>
+          </a:p>
+        </p:txBody>
+      </p:sp>
+      <p:sp>
+        <p:nvSpPr>
+          <p:cNvPr id="9" name="Text 6"/>
+          <p:cNvSpPr txBox="1"/>
+          <p:nvPr/>
+        </p:nvSpPr>
+        <p:spPr>
+          <a:xfrm>
+            <a:off x="6172200" y="3959352"/>
+            <a:ext cx="5394960" cy="274320"/>
+          </a:xfrm>
+          <a:prstGeom prst="rect">
+            <a:avLst/>
+          </a:prstGeom>
+          <a:noFill/>
+          <a:ln/>
+        </p:spPr>
+        <p:txBody>
+          <a:bodyPr wrap="square" lIns="0" tIns="0" rIns="0" bIns="0" rtlCol="0" anchor="ctr"/>
+          <a:lstStyle/>
+          <a:p>
+            <a:pPr indent="0" marL="0">
+              <a:buNone/>
+            </a:pPr>
+            <a:r>
+              <a:rPr lang="en-US" sz="1400" b="1" dirty="0">
                 <a:solidFill>
                   <a:srgbClr val="EDF3EF"/>
                 </a:solidFill>
@@ -11618,65 +13298,38 @@
                 <a:ea typeface="Arial" pitchFamily="34" charset="-122"/>
                 <a:cs typeface="Arial" pitchFamily="34" charset="-120"/>
               </a:rPr>
-              <a:t>Uma sala, uma câmera, um alerta</a:t>
-            </a:r>
-            <a:endParaRPr lang="en-US" sz="1700" dirty="0"/>
-          </a:p>
-        </p:txBody>
-      </p:sp>
-      <p:sp>
-        <p:nvSpPr>
-          <p:cNvPr id="7" name="Shape 5"/>
-          <p:cNvSpPr/>
-          <p:nvPr/>
-        </p:nvSpPr>
-        <p:spPr>
-          <a:xfrm>
-            <a:off x="8321040" y="2468880"/>
-            <a:ext cx="1600200" cy="292608"/>
-          </a:xfrm>
-          <a:prstGeom prst="roundRect">
-            <a:avLst>
-              <a:gd name="adj" fmla="val 50000"/>
-            </a:avLst>
-          </a:prstGeom>
-          <a:solidFill>
-            <a:srgbClr val="0B100E"/>
-          </a:solidFill>
-          <a:ln w="12700">
-            <a:solidFill>
-              <a:srgbClr val="3FBF5A"/>
-            </a:solidFill>
-            <a:prstDash val="solid"/>
-          </a:ln>
-        </p:spPr>
-      </p:sp>
-      <p:sp>
-        <p:nvSpPr>
-          <p:cNvPr id="8" name="Text 6"/>
-          <p:cNvSpPr txBox="1"/>
-          <p:nvPr/>
-        </p:nvSpPr>
-        <p:spPr>
-          <a:xfrm>
-            <a:off x="8321040" y="2487168"/>
-            <a:ext cx="1600200" cy="256032"/>
-          </a:xfrm>
-          <a:prstGeom prst="rect">
-            <a:avLst/>
-          </a:prstGeom>
-          <a:noFill/>
-          <a:ln/>
-        </p:spPr>
-        <p:txBody>
-          <a:bodyPr wrap="square" lIns="0" tIns="0" rIns="0" bIns="0" rtlCol="0" anchor="ctr"/>
-          <a:lstStyle/>
-          <a:p>
-            <a:pPr algn="ctr" indent="0" marL="0">
-              <a:buNone/>
-            </a:pPr>
-            <a:r>
-              <a:rPr lang="en-US" sz="850" dirty="0">
+              <a:t>“Onde a sala aperta?”</a:t>
+            </a:r>
+            <a:endParaRPr lang="en-US" sz="1400" dirty="0"/>
+          </a:p>
+        </p:txBody>
+      </p:sp>
+      <p:sp>
+        <p:nvSpPr>
+          <p:cNvPr id="10" name="Text 7"/>
+          <p:cNvSpPr txBox="1"/>
+          <p:nvPr/>
+        </p:nvSpPr>
+        <p:spPr>
+          <a:xfrm>
+            <a:off x="6172200" y="4215384"/>
+            <a:ext cx="2194560" cy="228600"/>
+          </a:xfrm>
+          <a:prstGeom prst="rect">
+            <a:avLst/>
+          </a:prstGeom>
+          <a:noFill/>
+          <a:ln/>
+        </p:spPr>
+        <p:txBody>
+          <a:bodyPr wrap="square" lIns="0" tIns="0" rIns="0" bIns="0" rtlCol="0" anchor="ctr"/>
+          <a:lstStyle/>
+          <a:p>
+            <a:pPr indent="0" marL="0">
+              <a:buNone/>
+            </a:pPr>
+            <a:r>
+              <a:rPr lang="en-US" sz="950" dirty="0">
                 <a:solidFill>
                   <a:srgbClr val="3FBF5A"/>
                 </a:solidFill>
@@ -11684,41 +13337,38 @@
                 <a:ea typeface="Courier New" pitchFamily="34" charset="-122"/>
                 <a:cs typeface="Courier New" pitchFamily="34" charset="-120"/>
               </a:rPr>
-              <a:t>DE PÉ</a:t>
-            </a:r>
-            <a:endParaRPr lang="en-US" sz="850" dirty="0"/>
-          </a:p>
-        </p:txBody>
-      </p:sp>
-      <p:sp>
-        <p:nvSpPr>
-          <p:cNvPr id="9" name="Text 7"/>
-          <p:cNvSpPr txBox="1"/>
-          <p:nvPr/>
-        </p:nvSpPr>
-        <p:spPr>
-          <a:xfrm>
-            <a:off x="2514600" y="2834640"/>
-            <a:ext cx="8686800" cy="457200"/>
-          </a:xfrm>
-          <a:prstGeom prst="rect">
-            <a:avLst/>
-          </a:prstGeom>
-          <a:noFill/>
-          <a:ln/>
-        </p:spPr>
-        <p:txBody>
-          <a:bodyPr wrap="square" lIns="0" tIns="0" rIns="0" bIns="0" rtlCol="0" anchor="ctr"/>
-          <a:lstStyle/>
-          <a:p>
-            <a:pPr indent="0" marL="0">
-              <a:lnSpc>
-                <a:spcPts val="1600"/>
-              </a:lnSpc>
-              <a:buNone/>
-            </a:pPr>
-            <a:r>
-              <a:rPr lang="en-US" sz="1200" dirty="0">
+              <a:t>/api/mapa</a:t>
+            </a:r>
+            <a:endParaRPr lang="en-US" sz="950" dirty="0"/>
+          </a:p>
+        </p:txBody>
+      </p:sp>
+      <p:sp>
+        <p:nvSpPr>
+          <p:cNvPr id="11" name="Text 8"/>
+          <p:cNvSpPr txBox="1"/>
+          <p:nvPr/>
+        </p:nvSpPr>
+        <p:spPr>
+          <a:xfrm>
+            <a:off x="6172200" y="4434840"/>
+            <a:ext cx="5394960" cy="274320"/>
+          </a:xfrm>
+          <a:prstGeom prst="rect">
+            <a:avLst/>
+          </a:prstGeom>
+          <a:noFill/>
+          <a:ln/>
+        </p:spPr>
+        <p:txBody>
+          <a:bodyPr wrap="square" lIns="0" tIns="0" rIns="0" bIns="0" rtlCol="0" anchor="ctr"/>
+          <a:lstStyle/>
+          <a:p>
+            <a:pPr indent="0" marL="0">
+              <a:buNone/>
+            </a:pPr>
+            <a:r>
+              <a:rPr lang="en-US" sz="1150" dirty="0">
                 <a:solidFill>
                   <a:srgbClr val="9DB0A6"/>
                 </a:solidFill>
@@ -11726,100 +13376,155 @@
                 <a:ea typeface="Calibri" pitchFamily="34" charset="-122"/>
                 <a:cs typeface="Calibri" pitchFamily="34" charset="-120"/>
               </a:rPr>
-              <a:t>Queda ao vivo, evento na corrente, e-mail na coordenação, imagem com rosto apagado. Roda sem internet, numa máquina comum.</a:t>
-            </a:r>
-            <a:endParaRPr lang="en-US" sz="1200" dirty="0"/>
-          </a:p>
-        </p:txBody>
-      </p:sp>
-      <p:sp>
-        <p:nvSpPr>
-          <p:cNvPr id="10" name="Shape 8"/>
-          <p:cNvSpPr/>
-          <p:nvPr/>
-        </p:nvSpPr>
-        <p:spPr>
-          <a:xfrm>
-            <a:off x="685800" y="3355848"/>
-            <a:ext cx="10789920" cy="0"/>
-          </a:xfrm>
-          <a:prstGeom prst="line">
-            <a:avLst/>
-          </a:prstGeom>
-          <a:noFill/>
-          <a:ln w="12700">
-            <a:solidFill>
-              <a:srgbClr val="24322B"/>
-            </a:solidFill>
-            <a:prstDash val="solid"/>
-          </a:ln>
-        </p:spPr>
-      </p:sp>
-      <p:sp>
-        <p:nvSpPr>
-          <p:cNvPr id="11" name="Text 9"/>
-          <p:cNvSpPr txBox="1"/>
-          <p:nvPr/>
-        </p:nvSpPr>
-        <p:spPr>
-          <a:xfrm>
-            <a:off x="685800" y="3520440"/>
-            <a:ext cx="1645920" cy="274320"/>
-          </a:xfrm>
-          <a:prstGeom prst="rect">
-            <a:avLst/>
-          </a:prstGeom>
-          <a:noFill/>
-          <a:ln/>
-        </p:spPr>
-        <p:txBody>
-          <a:bodyPr wrap="square" lIns="0" tIns="0" rIns="0" bIns="0" rtlCol="0" anchor="ctr"/>
-          <a:lstStyle/>
-          <a:p>
-            <a:pPr indent="0" marL="0">
-              <a:buNone/>
-            </a:pPr>
-            <a:r>
-              <a:rPr lang="en-US" sz="1000" spc="150" kern="0" dirty="0">
-                <a:solidFill>
-                  <a:srgbClr val="6A7D74"/>
+              <a:t>Mapa suavizado por vizinhança, com um anel em onde mais pararam.</a:t>
+            </a:r>
+            <a:endParaRPr lang="en-US" sz="1150" dirty="0"/>
+          </a:p>
+        </p:txBody>
+      </p:sp>
+      <p:sp>
+        <p:nvSpPr>
+          <p:cNvPr id="12" name="Text 9"/>
+          <p:cNvSpPr txBox="1"/>
+          <p:nvPr/>
+        </p:nvSpPr>
+        <p:spPr>
+          <a:xfrm>
+            <a:off x="6172200" y="4764024"/>
+            <a:ext cx="5394960" cy="274320"/>
+          </a:xfrm>
+          <a:prstGeom prst="rect">
+            <a:avLst/>
+          </a:prstGeom>
+          <a:noFill/>
+          <a:ln/>
+        </p:spPr>
+        <p:txBody>
+          <a:bodyPr wrap="square" lIns="0" tIns="0" rIns="0" bIns="0" rtlCol="0" anchor="ctr"/>
+          <a:lstStyle/>
+          <a:p>
+            <a:pPr indent="0" marL="0">
+              <a:buNone/>
+            </a:pPr>
+            <a:r>
+              <a:rPr lang="en-US" sz="1400" b="1" dirty="0">
+                <a:solidFill>
+                  <a:srgbClr val="EDF3EF"/>
+                </a:solidFill>
+                <a:latin typeface="Arial" pitchFamily="34" charset="0"/>
+                <a:ea typeface="Arial" pitchFamily="34" charset="-122"/>
+                <a:cs typeface="Arial" pitchFamily="34" charset="-120"/>
+              </a:rPr>
+              <a:t>“Fulano sumiu?”</a:t>
+            </a:r>
+            <a:endParaRPr lang="en-US" sz="1400" dirty="0"/>
+          </a:p>
+        </p:txBody>
+      </p:sp>
+      <p:sp>
+        <p:nvSpPr>
+          <p:cNvPr id="13" name="Text 10"/>
+          <p:cNvSpPr txBox="1"/>
+          <p:nvPr/>
+        </p:nvSpPr>
+        <p:spPr>
+          <a:xfrm>
+            <a:off x="6172200" y="5020056"/>
+            <a:ext cx="2194560" cy="228600"/>
+          </a:xfrm>
+          <a:prstGeom prst="rect">
+            <a:avLst/>
+          </a:prstGeom>
+          <a:noFill/>
+          <a:ln/>
+        </p:spPr>
+        <p:txBody>
+          <a:bodyPr wrap="square" lIns="0" tIns="0" rIns="0" bIns="0" rtlCol="0" anchor="ctr"/>
+          <a:lstStyle/>
+          <a:p>
+            <a:pPr indent="0" marL="0">
+              <a:buNone/>
+            </a:pPr>
+            <a:r>
+              <a:rPr lang="en-US" sz="950" dirty="0">
+                <a:solidFill>
+                  <a:srgbClr val="3FBF5A"/>
                 </a:solidFill>
                 <a:latin typeface="Courier New" pitchFamily="34" charset="0"/>
                 <a:ea typeface="Courier New" pitchFamily="34" charset="-122"/>
                 <a:cs typeface="Courier New" pitchFamily="34" charset="-120"/>
               </a:rPr>
-              <a:t>PRÓXIMO</a:t>
-            </a:r>
-            <a:endParaRPr lang="en-US" sz="1000" dirty="0"/>
-          </a:p>
-        </p:txBody>
-      </p:sp>
-      <p:sp>
-        <p:nvSpPr>
-          <p:cNvPr id="12" name="Text 10"/>
-          <p:cNvSpPr txBox="1"/>
-          <p:nvPr/>
-        </p:nvSpPr>
-        <p:spPr>
-          <a:xfrm>
-            <a:off x="2514600" y="3465576"/>
-            <a:ext cx="5669280" cy="347472"/>
-          </a:xfrm>
-          <a:prstGeom prst="rect">
-            <a:avLst/>
-          </a:prstGeom>
-          <a:noFill/>
-          <a:ln/>
-        </p:spPr>
-        <p:txBody>
-          <a:bodyPr wrap="square" lIns="0" tIns="0" rIns="0" bIns="0" rtlCol="0" anchor="ctr"/>
-          <a:lstStyle/>
-          <a:p>
-            <a:pPr indent="0" marL="0">
-              <a:buNone/>
-            </a:pPr>
-            <a:r>
-              <a:rPr lang="en-US" sz="1700" b="1" dirty="0">
+              <a:t>/api/pessoas</a:t>
+            </a:r>
+            <a:endParaRPr lang="en-US" sz="950" dirty="0"/>
+          </a:p>
+        </p:txBody>
+      </p:sp>
+      <p:sp>
+        <p:nvSpPr>
+          <p:cNvPr id="14" name="Text 11"/>
+          <p:cNvSpPr txBox="1"/>
+          <p:nvPr/>
+        </p:nvSpPr>
+        <p:spPr>
+          <a:xfrm>
+            <a:off x="6172200" y="5239512"/>
+            <a:ext cx="5394960" cy="274320"/>
+          </a:xfrm>
+          <a:prstGeom prst="rect">
+            <a:avLst/>
+          </a:prstGeom>
+          <a:noFill/>
+          <a:ln/>
+        </p:spPr>
+        <p:txBody>
+          <a:bodyPr wrap="square" lIns="0" tIns="0" rIns="0" bIns="0" rtlCol="0" anchor="ctr"/>
+          <a:lstStyle/>
+          <a:p>
+            <a:pPr indent="0" marL="0">
+              <a:buNone/>
+            </a:pPr>
+            <a:r>
+              <a:rPr lang="en-US" sz="1150" dirty="0">
+                <a:solidFill>
+                  <a:srgbClr val="9DB0A6"/>
+                </a:solidFill>
+                <a:latin typeface="Calibri" pitchFamily="34" charset="0"/>
+                <a:ea typeface="Calibri" pitchFamily="34" charset="-122"/>
+                <a:cs typeface="Calibri" pitchFamily="34" charset="-120"/>
+              </a:rPr>
+              <a:t>Quem foi reconhecido e há quantos dias não aparece.</a:t>
+            </a:r>
+            <a:endParaRPr lang="en-US" sz="1150" dirty="0"/>
+          </a:p>
+        </p:txBody>
+      </p:sp>
+      <p:sp>
+        <p:nvSpPr>
+          <p:cNvPr id="15" name="Text 12"/>
+          <p:cNvSpPr txBox="1"/>
+          <p:nvPr/>
+        </p:nvSpPr>
+        <p:spPr>
+          <a:xfrm>
+            <a:off x="6172200" y="5568696"/>
+            <a:ext cx="5394960" cy="274320"/>
+          </a:xfrm>
+          <a:prstGeom prst="rect">
+            <a:avLst/>
+          </a:prstGeom>
+          <a:noFill/>
+          <a:ln/>
+        </p:spPr>
+        <p:txBody>
+          <a:bodyPr wrap="square" lIns="0" tIns="0" rIns="0" bIns="0" rtlCol="0" anchor="ctr"/>
+          <a:lstStyle/>
+          <a:p>
+            <a:pPr indent="0" marL="0">
+              <a:buNone/>
+            </a:pPr>
+            <a:r>
+              <a:rPr lang="en-US" sz="1400" b="1" dirty="0">
                 <a:solidFill>
                   <a:srgbClr val="EDF3EF"/>
                 </a:solidFill>
@@ -11827,107 +13532,77 @@
                 <a:ea typeface="Arial" pitchFamily="34" charset="-122"/>
                 <a:cs typeface="Arial" pitchFamily="34" charset="-120"/>
               </a:rPr>
-              <a:t>Escola-piloto</a:t>
-            </a:r>
-            <a:endParaRPr lang="en-US" sz="1700" dirty="0"/>
-          </a:p>
-        </p:txBody>
-      </p:sp>
-      <p:sp>
-        <p:nvSpPr>
-          <p:cNvPr id="13" name="Shape 11"/>
-          <p:cNvSpPr/>
-          <p:nvPr/>
-        </p:nvSpPr>
-        <p:spPr>
-          <a:xfrm>
-            <a:off x="8321040" y="3493008"/>
-            <a:ext cx="1600200" cy="292608"/>
-          </a:xfrm>
-          <a:prstGeom prst="roundRect">
-            <a:avLst>
-              <a:gd name="adj" fmla="val 50000"/>
-            </a:avLst>
-          </a:prstGeom>
-          <a:solidFill>
-            <a:srgbClr val="0B100E"/>
-          </a:solidFill>
-          <a:ln w="12700">
-            <a:solidFill>
-              <a:srgbClr val="24322B"/>
-            </a:solidFill>
-            <a:prstDash val="solid"/>
-          </a:ln>
-        </p:spPr>
-      </p:sp>
-      <p:sp>
-        <p:nvSpPr>
-          <p:cNvPr id="14" name="Text 12"/>
-          <p:cNvSpPr txBox="1"/>
-          <p:nvPr/>
-        </p:nvSpPr>
-        <p:spPr>
-          <a:xfrm>
-            <a:off x="8321040" y="3511296"/>
-            <a:ext cx="1600200" cy="256032"/>
-          </a:xfrm>
-          <a:prstGeom prst="rect">
-            <a:avLst/>
-          </a:prstGeom>
-          <a:noFill/>
-          <a:ln/>
-        </p:spPr>
-        <p:txBody>
-          <a:bodyPr wrap="square" lIns="0" tIns="0" rIns="0" bIns="0" rtlCol="0" anchor="ctr"/>
-          <a:lstStyle/>
-          <a:p>
-            <a:pPr algn="ctr" indent="0" marL="0">
-              <a:buNone/>
-            </a:pPr>
-            <a:r>
-              <a:rPr lang="en-US" sz="850" dirty="0">
-                <a:solidFill>
-                  <a:srgbClr val="6A7D74"/>
+              <a:t>“Posso confiar nisto?”</a:t>
+            </a:r>
+            <a:endParaRPr lang="en-US" sz="1400" dirty="0"/>
+          </a:p>
+        </p:txBody>
+      </p:sp>
+      <p:sp>
+        <p:nvSpPr>
+          <p:cNvPr id="16" name="Text 13"/>
+          <p:cNvSpPr txBox="1"/>
+          <p:nvPr/>
+        </p:nvSpPr>
+        <p:spPr>
+          <a:xfrm>
+            <a:off x="6172200" y="5824728"/>
+            <a:ext cx="2194560" cy="228600"/>
+          </a:xfrm>
+          <a:prstGeom prst="rect">
+            <a:avLst/>
+          </a:prstGeom>
+          <a:noFill/>
+          <a:ln/>
+        </p:spPr>
+        <p:txBody>
+          <a:bodyPr wrap="square" lIns="0" tIns="0" rIns="0" bIns="0" rtlCol="0" anchor="ctr"/>
+          <a:lstStyle/>
+          <a:p>
+            <a:pPr indent="0" marL="0">
+              <a:buNone/>
+            </a:pPr>
+            <a:r>
+              <a:rPr lang="en-US" sz="950" dirty="0">
+                <a:solidFill>
+                  <a:srgbClr val="3FBF5A"/>
                 </a:solidFill>
                 <a:latin typeface="Courier New" pitchFamily="34" charset="0"/>
                 <a:ea typeface="Courier New" pitchFamily="34" charset="-122"/>
                 <a:cs typeface="Courier New" pitchFamily="34" charset="-120"/>
               </a:rPr>
-              <a:t>A VALIDAR</a:t>
-            </a:r>
-            <a:endParaRPr lang="en-US" sz="850" dirty="0"/>
-          </a:p>
-        </p:txBody>
-      </p:sp>
-      <p:sp>
-        <p:nvSpPr>
-          <p:cNvPr id="15" name="Text 13"/>
-          <p:cNvSpPr txBox="1"/>
-          <p:nvPr/>
-        </p:nvSpPr>
-        <p:spPr>
-          <a:xfrm>
-            <a:off x="2514600" y="3858768"/>
-            <a:ext cx="8686800" cy="457200"/>
-          </a:xfrm>
-          <a:prstGeom prst="rect">
-            <a:avLst/>
-          </a:prstGeom>
-          <a:noFill/>
-          <a:ln/>
-        </p:spPr>
-        <p:txBody>
-          <a:bodyPr wrap="square" lIns="0" tIns="0" rIns="0" bIns="0" rtlCol="0" anchor="ctr"/>
-          <a:lstStyle/>
-          <a:p>
-            <a:pPr indent="0" marL="0">
-              <a:lnSpc>
-                <a:spcPts val="1600"/>
-              </a:lnSpc>
-              <a:buNone/>
-            </a:pPr>
-            <a:r>
-              <a:rPr lang="en-US" sz="1200" dirty="0">
+              <a:t>/api/verificar</a:t>
+            </a:r>
+            <a:endParaRPr lang="en-US" sz="950" dirty="0"/>
+          </a:p>
+        </p:txBody>
+      </p:sp>
+      <p:sp>
+        <p:nvSpPr>
+          <p:cNvPr id="17" name="Text 14"/>
+          <p:cNvSpPr txBox="1"/>
+          <p:nvPr/>
+        </p:nvSpPr>
+        <p:spPr>
+          <a:xfrm>
+            <a:off x="6172200" y="6044184"/>
+            <a:ext cx="5394960" cy="274320"/>
+          </a:xfrm>
+          <a:prstGeom prst="rect">
+            <a:avLst/>
+          </a:prstGeom>
+          <a:noFill/>
+          <a:ln/>
+        </p:spPr>
+        <p:txBody>
+          <a:bodyPr wrap="square" lIns="0" tIns="0" rIns="0" bIns="0" rtlCol="0" anchor="ctr"/>
+          <a:lstStyle/>
+          <a:p>
+            <a:pPr indent="0" marL="0">
+              <a:buNone/>
+            </a:pPr>
+            <a:r>
+              <a:rPr lang="en-US" sz="1150" dirty="0">
                 <a:solidFill>
                   <a:srgbClr val="9DB0A6"/>
                 </a:solidFill>
@@ -11935,61 +13610,38 @@
                 <a:ea typeface="Calibri" pitchFamily="34" charset="-122"/>
                 <a:cs typeface="Calibri" pitchFamily="34" charset="-120"/>
               </a:rPr>
-              <a:t>A medida que ainda não temos: quantos alertas por dia a coordenação aguenta. É esse número, e não a revocação, que decide se é usável.</a:t>
-            </a:r>
-            <a:endParaRPr lang="en-US" sz="1200" dirty="0"/>
-          </a:p>
-        </p:txBody>
-      </p:sp>
-      <p:sp>
-        <p:nvSpPr>
-          <p:cNvPr id="16" name="Shape 14"/>
-          <p:cNvSpPr/>
-          <p:nvPr/>
-        </p:nvSpPr>
-        <p:spPr>
-          <a:xfrm>
-            <a:off x="685800" y="4379976"/>
-            <a:ext cx="10789920" cy="0"/>
-          </a:xfrm>
-          <a:prstGeom prst="line">
-            <a:avLst/>
-          </a:prstGeom>
-          <a:noFill/>
-          <a:ln w="12700">
-            <a:solidFill>
-              <a:srgbClr val="24322B"/>
-            </a:solidFill>
-            <a:prstDash val="solid"/>
-          </a:ln>
-        </p:spPr>
-      </p:sp>
-      <p:sp>
-        <p:nvSpPr>
-          <p:cNvPr id="17" name="Text 15"/>
-          <p:cNvSpPr txBox="1"/>
-          <p:nvPr/>
-        </p:nvSpPr>
-        <p:spPr>
-          <a:xfrm>
-            <a:off x="685800" y="4544568"/>
-            <a:ext cx="1645920" cy="274320"/>
-          </a:xfrm>
-          <a:prstGeom prst="rect">
-            <a:avLst/>
-          </a:prstGeom>
-          <a:noFill/>
-          <a:ln/>
-        </p:spPr>
-        <p:txBody>
-          <a:bodyPr wrap="square" lIns="0" tIns="0" rIns="0" bIns="0" rtlCol="0" anchor="ctr"/>
-          <a:lstStyle/>
-          <a:p>
-            <a:pPr indent="0" marL="0">
-              <a:buNone/>
-            </a:pPr>
-            <a:r>
-              <a:rPr lang="en-US" sz="1000" spc="150" kern="0" dirty="0">
+              <a:t>Recalcula a corrente desde a gênese, contra o hash recalculado.</a:t>
+            </a:r>
+            <a:endParaRPr lang="en-US" sz="1150" dirty="0"/>
+          </a:p>
+        </p:txBody>
+      </p:sp>
+      <p:sp>
+        <p:nvSpPr>
+          <p:cNvPr id="18" name="Text 15"/>
+          <p:cNvSpPr txBox="1"/>
+          <p:nvPr/>
+        </p:nvSpPr>
+        <p:spPr>
+          <a:xfrm>
+            <a:off x="685800" y="6291072"/>
+            <a:ext cx="5486400" cy="274320"/>
+          </a:xfrm>
+          <a:prstGeom prst="rect">
+            <a:avLst/>
+          </a:prstGeom>
+          <a:noFill/>
+          <a:ln/>
+        </p:spPr>
+        <p:txBody>
+          <a:bodyPr wrap="square" lIns="0" tIns="0" rIns="0" bIns="0" rtlCol="0" anchor="ctr"/>
+          <a:lstStyle/>
+          <a:p>
+            <a:pPr indent="0" marL="0">
+              <a:buNone/>
+            </a:pPr>
+            <a:r>
+              <a:rPr lang="en-US" sz="900" dirty="0">
                 <a:solidFill>
                   <a:srgbClr val="6A7D74"/>
                 </a:solidFill>
@@ -11997,401 +13649,6 @@
                 <a:ea typeface="Courier New" pitchFamily="34" charset="-122"/>
                 <a:cs typeface="Courier New" pitchFamily="34" charset="-120"/>
               </a:rPr>
-              <a:t>DEPOIS</a:t>
-            </a:r>
-            <a:endParaRPr lang="en-US" sz="1000" dirty="0"/>
-          </a:p>
-        </p:txBody>
-      </p:sp>
-      <p:sp>
-        <p:nvSpPr>
-          <p:cNvPr id="18" name="Text 16"/>
-          <p:cNvSpPr txBox="1"/>
-          <p:nvPr/>
-        </p:nvSpPr>
-        <p:spPr>
-          <a:xfrm>
-            <a:off x="2514600" y="4489704"/>
-            <a:ext cx="5669280" cy="347472"/>
-          </a:xfrm>
-          <a:prstGeom prst="rect">
-            <a:avLst/>
-          </a:prstGeom>
-          <a:noFill/>
-          <a:ln/>
-        </p:spPr>
-        <p:txBody>
-          <a:bodyPr wrap="square" lIns="0" tIns="0" rIns="0" bIns="0" rtlCol="0" anchor="ctr"/>
-          <a:lstStyle/>
-          <a:p>
-            <a:pPr indent="0" marL="0">
-              <a:buNone/>
-            </a:pPr>
-            <a:r>
-              <a:rPr lang="en-US" sz="1700" b="1" dirty="0">
-                <a:solidFill>
-                  <a:srgbClr val="EDF3EF"/>
-                </a:solidFill>
-                <a:latin typeface="Arial" pitchFamily="34" charset="0"/>
-                <a:ea typeface="Arial" pitchFamily="34" charset="-122"/>
-                <a:cs typeface="Arial" pitchFamily="34" charset="-120"/>
-              </a:rPr>
-              <a:t>Várias câmeras, uma corrente só</a:t>
-            </a:r>
-            <a:endParaRPr lang="en-US" sz="1700" dirty="0"/>
-          </a:p>
-        </p:txBody>
-      </p:sp>
-      <p:sp>
-        <p:nvSpPr>
-          <p:cNvPr id="19" name="Shape 17"/>
-          <p:cNvSpPr/>
-          <p:nvPr/>
-        </p:nvSpPr>
-        <p:spPr>
-          <a:xfrm>
-            <a:off x="8321040" y="4517136"/>
-            <a:ext cx="1600200" cy="292608"/>
-          </a:xfrm>
-          <a:prstGeom prst="roundRect">
-            <a:avLst>
-              <a:gd name="adj" fmla="val 50000"/>
-            </a:avLst>
-          </a:prstGeom>
-          <a:solidFill>
-            <a:srgbClr val="0B100E"/>
-          </a:solidFill>
-          <a:ln w="12700">
-            <a:solidFill>
-              <a:srgbClr val="24322B"/>
-            </a:solidFill>
-            <a:prstDash val="solid"/>
-          </a:ln>
-        </p:spPr>
-      </p:sp>
-      <p:sp>
-        <p:nvSpPr>
-          <p:cNvPr id="20" name="Text 18"/>
-          <p:cNvSpPr txBox="1"/>
-          <p:nvPr/>
-        </p:nvSpPr>
-        <p:spPr>
-          <a:xfrm>
-            <a:off x="8321040" y="4535424"/>
-            <a:ext cx="1600200" cy="256032"/>
-          </a:xfrm>
-          <a:prstGeom prst="rect">
-            <a:avLst/>
-          </a:prstGeom>
-          <a:noFill/>
-          <a:ln/>
-        </p:spPr>
-        <p:txBody>
-          <a:bodyPr wrap="square" lIns="0" tIns="0" rIns="0" bIns="0" rtlCol="0" anchor="ctr"/>
-          <a:lstStyle/>
-          <a:p>
-            <a:pPr algn="ctr" indent="0" marL="0">
-              <a:buNone/>
-            </a:pPr>
-            <a:r>
-              <a:rPr lang="en-US" sz="850" dirty="0">
-                <a:solidFill>
-                  <a:srgbClr val="6A7D74"/>
-                </a:solidFill>
-                <a:latin typeface="Courier New" pitchFamily="34" charset="0"/>
-                <a:ea typeface="Courier New" pitchFamily="34" charset="-122"/>
-                <a:cs typeface="Courier New" pitchFamily="34" charset="-120"/>
-              </a:rPr>
-              <a:t>A CONSTRUIR</a:t>
-            </a:r>
-            <a:endParaRPr lang="en-US" sz="850" dirty="0"/>
-          </a:p>
-        </p:txBody>
-      </p:sp>
-      <p:sp>
-        <p:nvSpPr>
-          <p:cNvPr id="21" name="Text 19"/>
-          <p:cNvSpPr txBox="1"/>
-          <p:nvPr/>
-        </p:nvSpPr>
-        <p:spPr>
-          <a:xfrm>
-            <a:off x="2514600" y="4882896"/>
-            <a:ext cx="8686800" cy="457200"/>
-          </a:xfrm>
-          <a:prstGeom prst="rect">
-            <a:avLst/>
-          </a:prstGeom>
-          <a:noFill/>
-          <a:ln/>
-        </p:spPr>
-        <p:txBody>
-          <a:bodyPr wrap="square" lIns="0" tIns="0" rIns="0" bIns="0" rtlCol="0" anchor="ctr"/>
-          <a:lstStyle/>
-          <a:p>
-            <a:pPr indent="0" marL="0">
-              <a:lnSpc>
-                <a:spcPts val="1600"/>
-              </a:lnSpc>
-              <a:buNone/>
-            </a:pPr>
-            <a:r>
-              <a:rPr lang="en-US" sz="1200" dirty="0">
-                <a:solidFill>
-                  <a:srgbClr val="9DB0A6"/>
-                </a:solidFill>
-                <a:latin typeface="Calibri" pitchFamily="34" charset="0"/>
-                <a:ea typeface="Calibri" pitchFamily="34" charset="-122"/>
-                <a:cs typeface="Calibri" pitchFamily="34" charset="-120"/>
-              </a:rPr>
-              <a:t>Cada sala com seu detector na borda, todas na mesma trilha auditável.</a:t>
-            </a:r>
-            <a:endParaRPr lang="en-US" sz="1200" dirty="0"/>
-          </a:p>
-        </p:txBody>
-      </p:sp>
-      <p:sp>
-        <p:nvSpPr>
-          <p:cNvPr id="22" name="Shape 20"/>
-          <p:cNvSpPr/>
-          <p:nvPr/>
-        </p:nvSpPr>
-        <p:spPr>
-          <a:xfrm>
-            <a:off x="685800" y="5404104"/>
-            <a:ext cx="10789920" cy="0"/>
-          </a:xfrm>
-          <a:prstGeom prst="line">
-            <a:avLst/>
-          </a:prstGeom>
-          <a:noFill/>
-          <a:ln w="12700">
-            <a:solidFill>
-              <a:srgbClr val="24322B"/>
-            </a:solidFill>
-            <a:prstDash val="solid"/>
-          </a:ln>
-        </p:spPr>
-      </p:sp>
-      <p:sp>
-        <p:nvSpPr>
-          <p:cNvPr id="23" name="Text 21"/>
-          <p:cNvSpPr txBox="1"/>
-          <p:nvPr/>
-        </p:nvSpPr>
-        <p:spPr>
-          <a:xfrm>
-            <a:off x="685800" y="5568696"/>
-            <a:ext cx="1645920" cy="274320"/>
-          </a:xfrm>
-          <a:prstGeom prst="rect">
-            <a:avLst/>
-          </a:prstGeom>
-          <a:noFill/>
-          <a:ln/>
-        </p:spPr>
-        <p:txBody>
-          <a:bodyPr wrap="square" lIns="0" tIns="0" rIns="0" bIns="0" rtlCol="0" anchor="ctr"/>
-          <a:lstStyle/>
-          <a:p>
-            <a:pPr indent="0" marL="0">
-              <a:buNone/>
-            </a:pPr>
-            <a:r>
-              <a:rPr lang="en-US" sz="1000" spc="150" kern="0" dirty="0">
-                <a:solidFill>
-                  <a:srgbClr val="6A7D74"/>
-                </a:solidFill>
-                <a:latin typeface="Courier New" pitchFamily="34" charset="0"/>
-                <a:ea typeface="Courier New" pitchFamily="34" charset="-122"/>
-                <a:cs typeface="Courier New" pitchFamily="34" charset="-120"/>
-              </a:rPr>
-              <a:t>A TESE</a:t>
-            </a:r>
-            <a:endParaRPr lang="en-US" sz="1000" dirty="0"/>
-          </a:p>
-        </p:txBody>
-      </p:sp>
-      <p:sp>
-        <p:nvSpPr>
-          <p:cNvPr id="24" name="Text 22"/>
-          <p:cNvSpPr txBox="1"/>
-          <p:nvPr/>
-        </p:nvSpPr>
-        <p:spPr>
-          <a:xfrm>
-            <a:off x="2514600" y="5513832"/>
-            <a:ext cx="5669280" cy="347472"/>
-          </a:xfrm>
-          <a:prstGeom prst="rect">
-            <a:avLst/>
-          </a:prstGeom>
-          <a:noFill/>
-          <a:ln/>
-        </p:spPr>
-        <p:txBody>
-          <a:bodyPr wrap="square" lIns="0" tIns="0" rIns="0" bIns="0" rtlCol="0" anchor="ctr"/>
-          <a:lstStyle/>
-          <a:p>
-            <a:pPr indent="0" marL="0">
-              <a:buNone/>
-            </a:pPr>
-            <a:r>
-              <a:rPr lang="en-US" sz="1700" b="1" dirty="0">
-                <a:solidFill>
-                  <a:srgbClr val="EDF3EF"/>
-                </a:solidFill>
-                <a:latin typeface="Arial" pitchFamily="34" charset="0"/>
-                <a:ea typeface="Arial" pitchFamily="34" charset="-122"/>
-                <a:cs typeface="Arial" pitchFamily="34" charset="-120"/>
-              </a:rPr>
-              <a:t>A mesma base, outros lugares</a:t>
-            </a:r>
-            <a:endParaRPr lang="en-US" sz="1700" dirty="0"/>
-          </a:p>
-        </p:txBody>
-      </p:sp>
-      <p:sp>
-        <p:nvSpPr>
-          <p:cNvPr id="25" name="Shape 23"/>
-          <p:cNvSpPr/>
-          <p:nvPr/>
-        </p:nvSpPr>
-        <p:spPr>
-          <a:xfrm>
-            <a:off x="8321040" y="5541264"/>
-            <a:ext cx="1600200" cy="292608"/>
-          </a:xfrm>
-          <a:prstGeom prst="roundRect">
-            <a:avLst>
-              <a:gd name="adj" fmla="val 50000"/>
-            </a:avLst>
-          </a:prstGeom>
-          <a:solidFill>
-            <a:srgbClr val="0B100E"/>
-          </a:solidFill>
-          <a:ln w="12700">
-            <a:solidFill>
-              <a:srgbClr val="24322B"/>
-            </a:solidFill>
-            <a:prstDash val="solid"/>
-          </a:ln>
-        </p:spPr>
-      </p:sp>
-      <p:sp>
-        <p:nvSpPr>
-          <p:cNvPr id="26" name="Text 24"/>
-          <p:cNvSpPr txBox="1"/>
-          <p:nvPr/>
-        </p:nvSpPr>
-        <p:spPr>
-          <a:xfrm>
-            <a:off x="8321040" y="5559552"/>
-            <a:ext cx="1600200" cy="256032"/>
-          </a:xfrm>
-          <a:prstGeom prst="rect">
-            <a:avLst/>
-          </a:prstGeom>
-          <a:noFill/>
-          <a:ln/>
-        </p:spPr>
-        <p:txBody>
-          <a:bodyPr wrap="square" lIns="0" tIns="0" rIns="0" bIns="0" rtlCol="0" anchor="ctr"/>
-          <a:lstStyle/>
-          <a:p>
-            <a:pPr algn="ctr" indent="0" marL="0">
-              <a:buNone/>
-            </a:pPr>
-            <a:r>
-              <a:rPr lang="en-US" sz="850" dirty="0">
-                <a:solidFill>
-                  <a:srgbClr val="6A7D74"/>
-                </a:solidFill>
-                <a:latin typeface="Courier New" pitchFamily="34" charset="0"/>
-                <a:ea typeface="Courier New" pitchFamily="34" charset="-122"/>
-                <a:cs typeface="Courier New" pitchFamily="34" charset="-120"/>
-              </a:rPr>
-              <a:t>EM ESTUDO</a:t>
-            </a:r>
-            <a:endParaRPr lang="en-US" sz="850" dirty="0"/>
-          </a:p>
-        </p:txBody>
-      </p:sp>
-      <p:sp>
-        <p:nvSpPr>
-          <p:cNvPr id="27" name="Text 25"/>
-          <p:cNvSpPr txBox="1"/>
-          <p:nvPr/>
-        </p:nvSpPr>
-        <p:spPr>
-          <a:xfrm>
-            <a:off x="2514600" y="5907024"/>
-            <a:ext cx="8686800" cy="457200"/>
-          </a:xfrm>
-          <a:prstGeom prst="rect">
-            <a:avLst/>
-          </a:prstGeom>
-          <a:noFill/>
-          <a:ln/>
-        </p:spPr>
-        <p:txBody>
-          <a:bodyPr wrap="square" lIns="0" tIns="0" rIns="0" bIns="0" rtlCol="0" anchor="ctr"/>
-          <a:lstStyle/>
-          <a:p>
-            <a:pPr indent="0" marL="0">
-              <a:lnSpc>
-                <a:spcPts val="1600"/>
-              </a:lnSpc>
-              <a:buNone/>
-            </a:pPr>
-            <a:r>
-              <a:rPr lang="en-US" sz="1200" dirty="0">
-                <a:solidFill>
-                  <a:srgbClr val="9DB0A6"/>
-                </a:solidFill>
-                <a:latin typeface="Calibri" pitchFamily="34" charset="0"/>
-                <a:ea typeface="Calibri" pitchFamily="34" charset="-122"/>
-                <a:cs typeface="Calibri" pitchFamily="34" charset="-120"/>
-              </a:rPr>
-              <a:t>Borda que decide mais prova que não se altera: portaria com consentimento, e o SVATech Health.</a:t>
-            </a:r>
-            <a:endParaRPr lang="en-US" sz="1200" dirty="0"/>
-          </a:p>
-        </p:txBody>
-      </p:sp>
-      <p:sp>
-        <p:nvSpPr>
-          <p:cNvPr id="28" name="Text 26"/>
-          <p:cNvSpPr txBox="1"/>
-          <p:nvPr/>
-        </p:nvSpPr>
-        <p:spPr>
-          <a:xfrm>
-            <a:off x="685800" y="6291072"/>
-            <a:ext cx="5486400" cy="274320"/>
-          </a:xfrm>
-          <a:prstGeom prst="rect">
-            <a:avLst/>
-          </a:prstGeom>
-          <a:noFill/>
-          <a:ln/>
-        </p:spPr>
-        <p:txBody>
-          <a:bodyPr wrap="square" lIns="0" tIns="0" rIns="0" bIns="0" rtlCol="0" anchor="ctr"/>
-          <a:lstStyle/>
-          <a:p>
-            <a:pPr indent="0" marL="0">
-              <a:buNone/>
-            </a:pPr>
-            <a:r>
-              <a:rPr lang="en-US" sz="900" dirty="0">
-                <a:solidFill>
-                  <a:srgbClr val="6A7D74"/>
-                </a:solidFill>
-                <a:latin typeface="Courier New" pitchFamily="34" charset="0"/>
-                <a:ea typeface="Courier New" pitchFamily="34" charset="-122"/>
-                <a:cs typeface="Courier New" pitchFamily="34" charset="-120"/>
-              </a:rPr>
               <a:t>Auditix AI  ·  SVATech  ·  grupo 11</a:t>
             </a:r>
             <a:endParaRPr lang="en-US" sz="900" dirty="0"/>
@@ -12400,7 +13657,7 @@
       </p:sp>
       <p:sp>
         <p:nvSpPr>
-          <p:cNvPr id="29" name="Text 27"/>
+          <p:cNvPr id="19" name="Text 16"/>
           <p:cNvSpPr txBox="1"/>
           <p:nvPr/>
         </p:nvSpPr>

--- a/Auditix-slides.pptx
+++ b/Auditix-slides.pptx
@@ -18,10 +18,9 @@
     <p:sldId id="266" r:id="rId12"/>
     <p:sldId id="267" r:id="rId13"/>
     <p:sldId id="268" r:id="rId14"/>
-    <p:sldId id="269" r:id="rId15"/>
   </p:sldIdLst>
   <p:notesMasterIdLst>
-    <p:notesMasterId r:id="rId16"/>
+    <p:notesMasterId r:id="rId15"/>
   </p:notesMasterIdLst>
   <p:sldSz cx="12192000" cy="6858000"/>
   <p:notesSz cx="6858000" cy="12192000"/>
@@ -603,7 +602,7 @@
           <a:p>
             <a:r>
               <a:rPr lang="en-US" dirty="0"/>
-              <a:t/>
+              <a:t>A primeira é a que fecha a venda. Segurança comove; risco jurídico faz a diretoria assinar.</a:t>
             </a:r>
             <a:endParaRPr lang="en-US" dirty="0"/>
           </a:p>
@@ -691,7 +690,7 @@
           <a:p>
             <a:r>
               <a:rPr lang="en-US" dirty="0"/>
-              <a:t>A primeira é a que fecha a venda. Segurança comove; risco jurídico faz a diretoria assinar.</a:t>
+              <a:t>Se perguntarem tamanho de mercado: dizer que o dado vem do Censo Escolar do INEP e que o preço praticado sai de conversa com escolas, e que nenhum dos dois foi estimado por nós.</a:t>
             </a:r>
             <a:endParaRPr lang="en-US" dirty="0"/>
           </a:p>
@@ -779,7 +778,7 @@
           <a:p>
             <a:r>
               <a:rPr lang="en-US" dirty="0"/>
-              <a:t>Se perguntarem tamanho de mercado: dizer que o dado vem do Censo Escolar do INEP e que o preço praticado sai de conversa com escolas, e que nenhum dos dois foi estimado por nós.</a:t>
+              <a:t/>
             </a:r>
             <a:endParaRPr lang="en-US" dirty="0"/>
           </a:p>
@@ -909,94 +908,6 @@
 </p:notes>
 </file>
 
-<file path=ppt/notesSlides/notesSlide14.xml><?xml version="1.0" encoding="utf-8"?>
-<p:notes xmlns:a="http://schemas.openxmlformats.org/drawingml/2006/main" xmlns:r="http://schemas.openxmlformats.org/officeDocument/2006/relationships" xmlns:p="http://schemas.openxmlformats.org/presentationml/2006/main">
-  <p:cSld>
-    <p:spTree>
-      <p:nvGrpSpPr>
-        <p:cNvPr id="1" name=""/>
-        <p:cNvGrpSpPr/>
-        <p:nvPr/>
-      </p:nvGrpSpPr>
-      <p:grpSpPr>
-        <a:xfrm>
-          <a:off x="0" y="0"/>
-          <a:ext cx="0" cy="0"/>
-          <a:chOff x="0" y="0"/>
-          <a:chExt cx="0" cy="0"/>
-        </a:xfrm>
-      </p:grpSpPr>
-      <p:sp>
-        <p:nvSpPr>
-          <p:cNvPr id="2" name="Slide Image Placeholder 1"/>
-          <p:cNvSpPr>
-            <a:spLocks noGrp="1" noRot="1" noChangeAspect="1"/>
-          </p:cNvSpPr>
-          <p:nvPr>
-            <p:ph type="sldImg"/>
-          </p:nvPr>
-        </p:nvSpPr>
-        <p:spPr/>
-      </p:sp>
-      <p:sp>
-        <p:nvSpPr>
-          <p:cNvPr id="3" name="Notes Placeholder 2"/>
-          <p:cNvSpPr>
-            <a:spLocks noGrp="1"/>
-          </p:cNvSpPr>
-          <p:nvPr>
-            <p:ph type="body" idx="1"/>
-          </p:nvPr>
-        </p:nvSpPr>
-        <p:spPr/>
-        <p:txBody>
-          <a:bodyPr/>
-          <a:lstStyle/>
-          <a:p>
-            <a:r>
-              <a:rPr lang="en-US" dirty="0"/>
-              <a:t/>
-            </a:r>
-            <a:endParaRPr lang="en-US" dirty="0"/>
-          </a:p>
-        </p:txBody>
-      </p:sp>
-      <p:sp>
-        <p:nvSpPr>
-          <p:cNvPr id="4" name="Slide Number Placeholder 3"/>
-          <p:cNvSpPr>
-            <a:spLocks noGrp="1"/>
-          </p:cNvSpPr>
-          <p:nvPr>
-            <p:ph type="sldNum" sz="quarter" idx="10"/>
-          </p:nvPr>
-        </p:nvSpPr>
-        <p:spPr/>
-        <p:txBody>
-          <a:bodyPr/>
-          <a:lstStyle/>
-          <a:p>
-            <a:fld id="{F7021451-1387-4CA6-816F-3879F97B5CBC}" type="slidenum">
-              <a:rPr lang="en-US"/>
-              <a:t>14</a:t>
-            </a:fld>
-            <a:endParaRPr lang="en-US"/>
-          </a:p>
-        </p:txBody>
-      </p:sp>
-    </p:spTree>
-    <p:extLst>
-      <p:ext uri="{BB962C8B-B14F-4D97-AF65-F5344CB8AC3E}">
-        <p14:creationId xmlns:p14="http://schemas.microsoft.com/office/powerpoint/2010/main" val="1024086991"/>
-      </p:ext>
-    </p:extLst>
-  </p:cSld>
-  <p:clrMapOvr>
-    <a:masterClrMapping/>
-  </p:clrMapOvr>
-</p:notes>
-</file>
-
 <file path=ppt/notesSlides/notesSlide2.xml><?xml version="1.0" encoding="utf-8"?>
 <p:notes xmlns:a="http://schemas.openxmlformats.org/drawingml/2006/main" xmlns:r="http://schemas.openxmlformats.org/officeDocument/2006/relationships" xmlns:p="http://schemas.openxmlformats.org/presentationml/2006/main">
   <p:cSld>
@@ -1483,7 +1394,7 @@
           <a:p>
             <a:r>
               <a:rPr lang="en-US" dirty="0"/>
-              <a:t>Esta é a resposta para "por que vocês não reconhecem os alunos?". A resposta não é "não deu tempo": a gente consegue e escolheu não fazer, e um mês atrás a ANPD deu razão a essa escolha. Não afirmar conformidade jurídica: dizer que é a nossa leitura da decisão.</a:t>
+              <a:t/>
             </a:r>
             <a:endParaRPr lang="en-US" dirty="0"/>
           </a:p>
@@ -2065,7 +1976,7 @@
                 <a:ea typeface="Courier New" pitchFamily="34" charset="-122"/>
                 <a:cs typeface="Courier New" pitchFamily="34" charset="-120"/>
               </a:rPr>
-              <a:t>SVATECH</a:t>
+              <a:t>AUDITIX IA</a:t>
             </a:r>
             <a:pPr indent="0" marL="0">
               <a:buNone/>
@@ -2079,7 +1990,7 @@
                 <a:ea typeface="Courier New" pitchFamily="34" charset="-122"/>
                 <a:cs typeface="Courier New" pitchFamily="34" charset="-120"/>
               </a:rPr>
-              <a:t>  ·  AUDITIX AI  ·  GRUPO 11</a:t>
+              <a:t>  ·  GRUPO 11  ·  2ECR</a:t>
             </a:r>
             <a:endParaRPr lang="en-US" sz="1100" dirty="0"/>
           </a:p>
@@ -2403,7 +2314,7 @@
                 <a:ea typeface="Courier New" pitchFamily="34" charset="-122"/>
                 <a:cs typeface="Courier New" pitchFamily="34" charset="-120"/>
               </a:rPr>
-              <a:t>Auditix AI  ·  SVATech  ·  grupo 11</a:t>
+              <a:t>Auditix IA  ·  grupo 11</a:t>
             </a:r>
             <a:endParaRPr lang="en-US" sz="900" dirty="0"/>
           </a:p>
@@ -2513,7 +2424,7 @@
                 <a:ea typeface="Courier New" pitchFamily="34" charset="-122"/>
                 <a:cs typeface="Courier New" pitchFamily="34" charset="-120"/>
               </a:rPr>
-              <a:t>ONDE ISTO VAI DAR</a:t>
+              <a:t>ONDE ESTÁ O VALOR PARA QUEM COMPRA</a:t>
             </a:r>
             <a:endParaRPr lang="en-US" sz="1100" dirty="0"/>
           </a:p>
@@ -2555,100 +2466,19 @@
                 <a:ea typeface="Arial" pitchFamily="34" charset="-122"/>
                 <a:cs typeface="Arial" pitchFamily="34" charset="-120"/>
               </a:rPr>
-              <a:t>De uma sala para a rede inteira.</a:t>
+              <a:t>Três frentes, em ordem de</a:t>
             </a:r>
             <a:endParaRPr lang="en-US" sz="3600" dirty="0"/>
           </a:p>
-        </p:txBody>
-      </p:sp>
-      <p:sp>
-        <p:nvSpPr>
-          <p:cNvPr id="4" name="Shape 2"/>
-          <p:cNvSpPr/>
-          <p:nvPr/>
-        </p:nvSpPr>
-        <p:spPr>
-          <a:xfrm>
-            <a:off x="685800" y="2331720"/>
-            <a:ext cx="10789920" cy="0"/>
-          </a:xfrm>
-          <a:prstGeom prst="line">
-            <a:avLst/>
-          </a:prstGeom>
-          <a:noFill/>
-          <a:ln w="12700">
-            <a:solidFill>
-              <a:srgbClr val="24322B"/>
-            </a:solidFill>
-            <a:prstDash val="solid"/>
-          </a:ln>
-        </p:spPr>
-      </p:sp>
-      <p:sp>
-        <p:nvSpPr>
-          <p:cNvPr id="5" name="Text 3"/>
-          <p:cNvSpPr txBox="1"/>
-          <p:nvPr/>
-        </p:nvSpPr>
-        <p:spPr>
-          <a:xfrm>
-            <a:off x="685800" y="2496312"/>
-            <a:ext cx="1645920" cy="274320"/>
-          </a:xfrm>
-          <a:prstGeom prst="rect">
-            <a:avLst/>
-          </a:prstGeom>
-          <a:noFill/>
-          <a:ln/>
-        </p:spPr>
-        <p:txBody>
-          <a:bodyPr wrap="square" lIns="0" tIns="0" rIns="0" bIns="0" rtlCol="0" anchor="ctr"/>
-          <a:lstStyle/>
-          <a:p>
-            <a:pPr indent="0" marL="0">
-              <a:buNone/>
-            </a:pPr>
-            <a:r>
-              <a:rPr lang="en-US" sz="1000" spc="150" kern="0" dirty="0">
-                <a:solidFill>
-                  <a:srgbClr val="3FBF5A"/>
-                </a:solidFill>
-                <a:latin typeface="Courier New" pitchFamily="34" charset="0"/>
-                <a:ea typeface="Courier New" pitchFamily="34" charset="-122"/>
-                <a:cs typeface="Courier New" pitchFamily="34" charset="-120"/>
-              </a:rPr>
-              <a:t>HOJE</a:t>
-            </a:r>
-            <a:endParaRPr lang="en-US" sz="1000" dirty="0"/>
-          </a:p>
-        </p:txBody>
-      </p:sp>
-      <p:sp>
-        <p:nvSpPr>
-          <p:cNvPr id="6" name="Text 4"/>
-          <p:cNvSpPr txBox="1"/>
-          <p:nvPr/>
-        </p:nvSpPr>
-        <p:spPr>
-          <a:xfrm>
-            <a:off x="2514600" y="2441448"/>
-            <a:ext cx="5669280" cy="347472"/>
-          </a:xfrm>
-          <a:prstGeom prst="rect">
-            <a:avLst/>
-          </a:prstGeom>
-          <a:noFill/>
-          <a:ln/>
-        </p:spPr>
-        <p:txBody>
-          <a:bodyPr wrap="square" lIns="0" tIns="0" rIns="0" bIns="0" rtlCol="0" anchor="ctr"/>
-          <a:lstStyle/>
-          <a:p>
-            <a:pPr indent="0" marL="0">
-              <a:buNone/>
-            </a:pPr>
-            <a:r>
-              <a:rPr lang="en-US" sz="1700" b="1" dirty="0">
+          <a:p>
+            <a:pPr indent="0" marL="0">
+              <a:lnSpc>
+                <a:spcPts val="3800"/>
+              </a:lnSpc>
+              <a:buNone/>
+            </a:pPr>
+            <a:r>
+              <a:rPr lang="en-US" sz="3600" b="1" dirty="0">
                 <a:solidFill>
                   <a:srgbClr val="EDF3EF"/>
                 </a:solidFill>
@@ -2656,239 +2486,30 @@
                 <a:ea typeface="Arial" pitchFamily="34" charset="-122"/>
                 <a:cs typeface="Arial" pitchFamily="34" charset="-120"/>
               </a:rPr>
-              <a:t>Uma sala, uma câmera, um alerta</a:t>
-            </a:r>
-            <a:endParaRPr lang="en-US" sz="1700" dirty="0"/>
-          </a:p>
-        </p:txBody>
-      </p:sp>
-      <p:sp>
-        <p:nvSpPr>
-          <p:cNvPr id="7" name="Shape 5"/>
+              <a:t>força para uma escola.</a:t>
+            </a:r>
+            <a:endParaRPr lang="en-US" sz="3600" dirty="0"/>
+          </a:p>
+        </p:txBody>
+      </p:sp>
+      <p:sp>
+        <p:nvSpPr>
+          <p:cNvPr id="4" name="Shape 2"/>
           <p:cNvSpPr/>
           <p:nvPr/>
         </p:nvSpPr>
         <p:spPr>
           <a:xfrm>
-            <a:off x="8321040" y="2468880"/>
-            <a:ext cx="1600200" cy="292608"/>
+            <a:off x="685800" y="3017520"/>
+            <a:ext cx="3410712" cy="2788920"/>
           </a:xfrm>
           <a:prstGeom prst="roundRect">
             <a:avLst>
-              <a:gd name="adj" fmla="val 50000"/>
+              <a:gd name="adj" fmla="val 3279"/>
             </a:avLst>
           </a:prstGeom>
           <a:solidFill>
-            <a:srgbClr val="0B100E"/>
-          </a:solidFill>
-          <a:ln w="12700">
-            <a:solidFill>
-              <a:srgbClr val="3FBF5A"/>
-            </a:solidFill>
-            <a:prstDash val="solid"/>
-          </a:ln>
-        </p:spPr>
-      </p:sp>
-      <p:sp>
-        <p:nvSpPr>
-          <p:cNvPr id="8" name="Text 6"/>
-          <p:cNvSpPr txBox="1"/>
-          <p:nvPr/>
-        </p:nvSpPr>
-        <p:spPr>
-          <a:xfrm>
-            <a:off x="8321040" y="2487168"/>
-            <a:ext cx="1600200" cy="256032"/>
-          </a:xfrm>
-          <a:prstGeom prst="rect">
-            <a:avLst/>
-          </a:prstGeom>
-          <a:noFill/>
-          <a:ln/>
-        </p:spPr>
-        <p:txBody>
-          <a:bodyPr wrap="square" lIns="0" tIns="0" rIns="0" bIns="0" rtlCol="0" anchor="ctr"/>
-          <a:lstStyle/>
-          <a:p>
-            <a:pPr algn="ctr" indent="0" marL="0">
-              <a:buNone/>
-            </a:pPr>
-            <a:r>
-              <a:rPr lang="en-US" sz="850" dirty="0">
-                <a:solidFill>
-                  <a:srgbClr val="3FBF5A"/>
-                </a:solidFill>
-                <a:latin typeface="Courier New" pitchFamily="34" charset="0"/>
-                <a:ea typeface="Courier New" pitchFamily="34" charset="-122"/>
-                <a:cs typeface="Courier New" pitchFamily="34" charset="-120"/>
-              </a:rPr>
-              <a:t>DE PÉ</a:t>
-            </a:r>
-            <a:endParaRPr lang="en-US" sz="850" dirty="0"/>
-          </a:p>
-        </p:txBody>
-      </p:sp>
-      <p:sp>
-        <p:nvSpPr>
-          <p:cNvPr id="9" name="Text 7"/>
-          <p:cNvSpPr txBox="1"/>
-          <p:nvPr/>
-        </p:nvSpPr>
-        <p:spPr>
-          <a:xfrm>
-            <a:off x="2514600" y="2834640"/>
-            <a:ext cx="8686800" cy="457200"/>
-          </a:xfrm>
-          <a:prstGeom prst="rect">
-            <a:avLst/>
-          </a:prstGeom>
-          <a:noFill/>
-          <a:ln/>
-        </p:spPr>
-        <p:txBody>
-          <a:bodyPr wrap="square" lIns="0" tIns="0" rIns="0" bIns="0" rtlCol="0" anchor="ctr"/>
-          <a:lstStyle/>
-          <a:p>
-            <a:pPr indent="0" marL="0">
-              <a:lnSpc>
-                <a:spcPts val="1600"/>
-              </a:lnSpc>
-              <a:buNone/>
-            </a:pPr>
-            <a:r>
-              <a:rPr lang="en-US" sz="1200" dirty="0">
-                <a:solidFill>
-                  <a:srgbClr val="9DB0A6"/>
-                </a:solidFill>
-                <a:latin typeface="Calibri" pitchFamily="34" charset="0"/>
-                <a:ea typeface="Calibri" pitchFamily="34" charset="-122"/>
-                <a:cs typeface="Calibri" pitchFamily="34" charset="-120"/>
-              </a:rPr>
-              <a:t>Queda ao vivo, evento na corrente, e-mail na coordenação, imagem com rosto apagado. Roda sem internet, numa máquina comum.</a:t>
-            </a:r>
-            <a:endParaRPr lang="en-US" sz="1200" dirty="0"/>
-          </a:p>
-        </p:txBody>
-      </p:sp>
-      <p:sp>
-        <p:nvSpPr>
-          <p:cNvPr id="10" name="Shape 8"/>
-          <p:cNvSpPr/>
-          <p:nvPr/>
-        </p:nvSpPr>
-        <p:spPr>
-          <a:xfrm>
-            <a:off x="685800" y="3355848"/>
-            <a:ext cx="10789920" cy="0"/>
-          </a:xfrm>
-          <a:prstGeom prst="line">
-            <a:avLst/>
-          </a:prstGeom>
-          <a:noFill/>
-          <a:ln w="12700">
-            <a:solidFill>
-              <a:srgbClr val="24322B"/>
-            </a:solidFill>
-            <a:prstDash val="solid"/>
-          </a:ln>
-        </p:spPr>
-      </p:sp>
-      <p:sp>
-        <p:nvSpPr>
-          <p:cNvPr id="11" name="Text 9"/>
-          <p:cNvSpPr txBox="1"/>
-          <p:nvPr/>
-        </p:nvSpPr>
-        <p:spPr>
-          <a:xfrm>
-            <a:off x="685800" y="3520440"/>
-            <a:ext cx="1645920" cy="274320"/>
-          </a:xfrm>
-          <a:prstGeom prst="rect">
-            <a:avLst/>
-          </a:prstGeom>
-          <a:noFill/>
-          <a:ln/>
-        </p:spPr>
-        <p:txBody>
-          <a:bodyPr wrap="square" lIns="0" tIns="0" rIns="0" bIns="0" rtlCol="0" anchor="ctr"/>
-          <a:lstStyle/>
-          <a:p>
-            <a:pPr indent="0" marL="0">
-              <a:buNone/>
-            </a:pPr>
-            <a:r>
-              <a:rPr lang="en-US" sz="1000" spc="150" kern="0" dirty="0">
-                <a:solidFill>
-                  <a:srgbClr val="6A7D74"/>
-                </a:solidFill>
-                <a:latin typeface="Courier New" pitchFamily="34" charset="0"/>
-                <a:ea typeface="Courier New" pitchFamily="34" charset="-122"/>
-                <a:cs typeface="Courier New" pitchFamily="34" charset="-120"/>
-              </a:rPr>
-              <a:t>PRÓXIMO</a:t>
-            </a:r>
-            <a:endParaRPr lang="en-US" sz="1000" dirty="0"/>
-          </a:p>
-        </p:txBody>
-      </p:sp>
-      <p:sp>
-        <p:nvSpPr>
-          <p:cNvPr id="12" name="Text 10"/>
-          <p:cNvSpPr txBox="1"/>
-          <p:nvPr/>
-        </p:nvSpPr>
-        <p:spPr>
-          <a:xfrm>
-            <a:off x="2514600" y="3465576"/>
-            <a:ext cx="5669280" cy="347472"/>
-          </a:xfrm>
-          <a:prstGeom prst="rect">
-            <a:avLst/>
-          </a:prstGeom>
-          <a:noFill/>
-          <a:ln/>
-        </p:spPr>
-        <p:txBody>
-          <a:bodyPr wrap="square" lIns="0" tIns="0" rIns="0" bIns="0" rtlCol="0" anchor="ctr"/>
-          <a:lstStyle/>
-          <a:p>
-            <a:pPr indent="0" marL="0">
-              <a:buNone/>
-            </a:pPr>
-            <a:r>
-              <a:rPr lang="en-US" sz="1700" b="1" dirty="0">
-                <a:solidFill>
-                  <a:srgbClr val="EDF3EF"/>
-                </a:solidFill>
-                <a:latin typeface="Arial" pitchFamily="34" charset="0"/>
-                <a:ea typeface="Arial" pitchFamily="34" charset="-122"/>
-                <a:cs typeface="Arial" pitchFamily="34" charset="-120"/>
-              </a:rPr>
-              <a:t>Escola-piloto</a:t>
-            </a:r>
-            <a:endParaRPr lang="en-US" sz="1700" dirty="0"/>
-          </a:p>
-        </p:txBody>
-      </p:sp>
-      <p:sp>
-        <p:nvSpPr>
-          <p:cNvPr id="13" name="Shape 11"/>
-          <p:cNvSpPr/>
-          <p:nvPr/>
-        </p:nvSpPr>
-        <p:spPr>
-          <a:xfrm>
-            <a:off x="8321040" y="3493008"/>
-            <a:ext cx="1600200" cy="292608"/>
-          </a:xfrm>
-          <a:prstGeom prst="roundRect">
-            <a:avLst>
-              <a:gd name="adj" fmla="val 50000"/>
-            </a:avLst>
-          </a:prstGeom>
-          <a:solidFill>
-            <a:srgbClr val="0B100E"/>
+            <a:srgbClr val="17211C"/>
           </a:solidFill>
           <a:ln w="12700">
             <a:solidFill>
@@ -2900,53 +2521,115 @@
       </p:sp>
       <p:sp>
         <p:nvSpPr>
-          <p:cNvPr id="14" name="Text 12"/>
-          <p:cNvSpPr txBox="1"/>
-          <p:nvPr/>
-        </p:nvSpPr>
-        <p:spPr>
-          <a:xfrm>
-            <a:off x="8321040" y="3511296"/>
-            <a:ext cx="1600200" cy="256032"/>
-          </a:xfrm>
-          <a:prstGeom prst="rect">
-            <a:avLst/>
-          </a:prstGeom>
-          <a:noFill/>
-          <a:ln/>
-        </p:spPr>
-        <p:txBody>
-          <a:bodyPr wrap="square" lIns="0" tIns="0" rIns="0" bIns="0" rtlCol="0" anchor="ctr"/>
-          <a:lstStyle/>
-          <a:p>
-            <a:pPr algn="ctr" indent="0" marL="0">
-              <a:buNone/>
-            </a:pPr>
-            <a:r>
-              <a:rPr lang="en-US" sz="850" dirty="0">
-                <a:solidFill>
-                  <a:srgbClr val="6A7D74"/>
+          <p:cNvPr id="5" name="Text 3"/>
+          <p:cNvSpPr txBox="1"/>
+          <p:nvPr/>
+        </p:nvSpPr>
+        <p:spPr>
+          <a:xfrm>
+            <a:off x="941832" y="3246120"/>
+            <a:ext cx="2926080" cy="228600"/>
+          </a:xfrm>
+          <a:prstGeom prst="rect">
+            <a:avLst/>
+          </a:prstGeom>
+          <a:noFill/>
+          <a:ln/>
+        </p:spPr>
+        <p:txBody>
+          <a:bodyPr wrap="square" lIns="0" tIns="0" rIns="0" bIns="0" rtlCol="0" anchor="ctr"/>
+          <a:lstStyle/>
+          <a:p>
+            <a:pPr indent="0" marL="0">
+              <a:buNone/>
+            </a:pPr>
+            <a:r>
+              <a:rPr lang="en-US" sz="950" spc="150" kern="0" dirty="0">
+                <a:solidFill>
+                  <a:srgbClr val="3FBF5A"/>
                 </a:solidFill>
                 <a:latin typeface="Courier New" pitchFamily="34" charset="0"/>
                 <a:ea typeface="Courier New" pitchFamily="34" charset="-122"/>
                 <a:cs typeface="Courier New" pitchFamily="34" charset="-120"/>
               </a:rPr>
-              <a:t>A VALIDAR</a:t>
-            </a:r>
-            <a:endParaRPr lang="en-US" sz="850" dirty="0"/>
-          </a:p>
-        </p:txBody>
-      </p:sp>
-      <p:sp>
-        <p:nvSpPr>
-          <p:cNvPr id="15" name="Text 13"/>
-          <p:cNvSpPr txBox="1"/>
-          <p:nvPr/>
-        </p:nvSpPr>
-        <p:spPr>
-          <a:xfrm>
-            <a:off x="2514600" y="3858768"/>
-            <a:ext cx="8686800" cy="457200"/>
+              <a:t>O QUE FAZ ASSINAR</a:t>
+            </a:r>
+            <a:endParaRPr lang="en-US" sz="950" dirty="0"/>
+          </a:p>
+        </p:txBody>
+      </p:sp>
+      <p:sp>
+        <p:nvSpPr>
+          <p:cNvPr id="6" name="Text 4"/>
+          <p:cNvSpPr txBox="1"/>
+          <p:nvPr/>
+        </p:nvSpPr>
+        <p:spPr>
+          <a:xfrm>
+            <a:off x="941832" y="3520440"/>
+            <a:ext cx="2926080" cy="685800"/>
+          </a:xfrm>
+          <a:prstGeom prst="rect">
+            <a:avLst/>
+          </a:prstGeom>
+          <a:noFill/>
+          <a:ln/>
+        </p:spPr>
+        <p:txBody>
+          <a:bodyPr wrap="square" lIns="0" tIns="0" rIns="0" bIns="0" rtlCol="0" anchor="ctr"/>
+          <a:lstStyle/>
+          <a:p>
+            <a:pPr indent="0" marL="0">
+              <a:lnSpc>
+                <a:spcPts val="2100"/>
+              </a:lnSpc>
+              <a:buNone/>
+            </a:pPr>
+            <a:r>
+              <a:rPr lang="en-US" sz="1700" b="1" dirty="0">
+                <a:solidFill>
+                  <a:srgbClr val="EDF3EF"/>
+                </a:solidFill>
+                <a:latin typeface="Arial" pitchFamily="34" charset="0"/>
+                <a:ea typeface="Arial" pitchFamily="34" charset="-122"/>
+                <a:cs typeface="Arial" pitchFamily="34" charset="-120"/>
+              </a:rPr>
+              <a:t>Risco jurídico,</a:t>
+            </a:r>
+            <a:endParaRPr lang="en-US" sz="1700" dirty="0"/>
+          </a:p>
+          <a:p>
+            <a:pPr indent="0" marL="0">
+              <a:lnSpc>
+                <a:spcPts val="2100"/>
+              </a:lnSpc>
+              <a:buNone/>
+            </a:pPr>
+            <a:r>
+              <a:rPr lang="en-US" sz="1700" b="1" dirty="0">
+                <a:solidFill>
+                  <a:srgbClr val="EDF3EF"/>
+                </a:solidFill>
+                <a:latin typeface="Arial" pitchFamily="34" charset="0"/>
+                <a:ea typeface="Arial" pitchFamily="34" charset="-122"/>
+                <a:cs typeface="Arial" pitchFamily="34" charset="-120"/>
+              </a:rPr>
+              <a:t>não segurança</a:t>
+            </a:r>
+            <a:endParaRPr lang="en-US" sz="1700" dirty="0"/>
+          </a:p>
+        </p:txBody>
+      </p:sp>
+      <p:sp>
+        <p:nvSpPr>
+          <p:cNvPr id="7" name="Text 5"/>
+          <p:cNvSpPr txBox="1"/>
+          <p:nvPr/>
+        </p:nvSpPr>
+        <p:spPr>
+          <a:xfrm>
+            <a:off x="941832" y="4279392"/>
+            <a:ext cx="2926080" cy="1234440"/>
           </a:xfrm>
           <a:prstGeom prst="rect">
             <a:avLst/>
@@ -2973,7 +2656,7 @@
                 <a:ea typeface="Calibri" pitchFamily="34" charset="-122"/>
                 <a:cs typeface="Calibri" pitchFamily="34" charset="-120"/>
               </a:rPr>
-              <a:t>A medida que ainda não temos: quantos alertas por dia a coordenação aguenta. É esse número, e não a revocação, que decide se é usável.</a:t>
+              <a:t>O medo real de uma mantenedora não é perder uma queda. É o processo depois. Registro que denuncia adulteração, imagem com prazo, acesso rastreado e biometria com vencimento reduzem exposição.</a:t>
             </a:r>
             <a:endParaRPr lang="en-US" sz="1200" dirty="0"/>
           </a:p>
@@ -2981,53 +2664,30 @@
       </p:sp>
       <p:sp>
         <p:nvSpPr>
-          <p:cNvPr id="16" name="Shape 14"/>
-          <p:cNvSpPr/>
-          <p:nvPr/>
-        </p:nvSpPr>
-        <p:spPr>
-          <a:xfrm>
-            <a:off x="685800" y="4379976"/>
-            <a:ext cx="10789920" cy="0"/>
-          </a:xfrm>
-          <a:prstGeom prst="line">
-            <a:avLst/>
-          </a:prstGeom>
-          <a:noFill/>
-          <a:ln w="12700">
-            <a:solidFill>
-              <a:srgbClr val="24322B"/>
-            </a:solidFill>
-            <a:prstDash val="solid"/>
-          </a:ln>
-        </p:spPr>
-      </p:sp>
-      <p:sp>
-        <p:nvSpPr>
-          <p:cNvPr id="17" name="Text 15"/>
-          <p:cNvSpPr txBox="1"/>
-          <p:nvPr/>
-        </p:nvSpPr>
-        <p:spPr>
-          <a:xfrm>
-            <a:off x="685800" y="4544568"/>
-            <a:ext cx="1645920" cy="274320"/>
-          </a:xfrm>
-          <a:prstGeom prst="rect">
-            <a:avLst/>
-          </a:prstGeom>
-          <a:noFill/>
-          <a:ln/>
-        </p:spPr>
-        <p:txBody>
-          <a:bodyPr wrap="square" lIns="0" tIns="0" rIns="0" bIns="0" rtlCol="0" anchor="ctr"/>
-          <a:lstStyle/>
-          <a:p>
-            <a:pPr indent="0" marL="0">
-              <a:buNone/>
-            </a:pPr>
-            <a:r>
-              <a:rPr lang="en-US" sz="1000" spc="150" kern="0" dirty="0">
+          <p:cNvPr id="8" name="Text 6"/>
+          <p:cNvSpPr txBox="1"/>
+          <p:nvPr/>
+        </p:nvSpPr>
+        <p:spPr>
+          <a:xfrm>
+            <a:off x="941832" y="5440680"/>
+            <a:ext cx="2926080" cy="320040"/>
+          </a:xfrm>
+          <a:prstGeom prst="rect">
+            <a:avLst/>
+          </a:prstGeom>
+          <a:noFill/>
+          <a:ln/>
+        </p:spPr>
+        <p:txBody>
+          <a:bodyPr wrap="square" lIns="0" tIns="0" rIns="0" bIns="0" rtlCol="0" anchor="ctr"/>
+          <a:lstStyle/>
+          <a:p>
+            <a:pPr indent="0" marL="0">
+              <a:buNone/>
+            </a:pPr>
+            <a:r>
+              <a:rPr lang="en-US" sz="850" dirty="0">
                 <a:solidFill>
                   <a:srgbClr val="6A7D74"/>
                 </a:solidFill>
@@ -3035,69 +2695,30 @@
                 <a:ea typeface="Courier New" pitchFamily="34" charset="-122"/>
                 <a:cs typeface="Courier New" pitchFamily="34" charset="-120"/>
               </a:rPr>
-              <a:t>DEPOIS</a:t>
-            </a:r>
-            <a:endParaRPr lang="en-US" sz="1000" dirty="0"/>
-          </a:p>
-        </p:txBody>
-      </p:sp>
-      <p:sp>
-        <p:nvSpPr>
-          <p:cNvPr id="18" name="Text 16"/>
-          <p:cNvSpPr txBox="1"/>
-          <p:nvPr/>
-        </p:nvSpPr>
-        <p:spPr>
-          <a:xfrm>
-            <a:off x="2514600" y="4489704"/>
-            <a:ext cx="5669280" cy="347472"/>
-          </a:xfrm>
-          <a:prstGeom prst="rect">
-            <a:avLst/>
-          </a:prstGeom>
-          <a:noFill/>
-          <a:ln/>
-        </p:spPr>
-        <p:txBody>
-          <a:bodyPr wrap="square" lIns="0" tIns="0" rIns="0" bIns="0" rtlCol="0" anchor="ctr"/>
-          <a:lstStyle/>
-          <a:p>
-            <a:pPr indent="0" marL="0">
-              <a:buNone/>
-            </a:pPr>
-            <a:r>
-              <a:rPr lang="en-US" sz="1700" b="1" dirty="0">
-                <a:solidFill>
-                  <a:srgbClr val="EDF3EF"/>
-                </a:solidFill>
-                <a:latin typeface="Arial" pitchFamily="34" charset="0"/>
-                <a:ea typeface="Arial" pitchFamily="34" charset="-122"/>
-                <a:cs typeface="Arial" pitchFamily="34" charset="-120"/>
-              </a:rPr>
-              <a:t>Várias câmeras, uma corrente só</a:t>
-            </a:r>
-            <a:endParaRPr lang="en-US" sz="1700" dirty="0"/>
-          </a:p>
-        </p:txBody>
-      </p:sp>
-      <p:sp>
-        <p:nvSpPr>
-          <p:cNvPr id="19" name="Shape 17"/>
+              <a:t>LGPD, e a disputa judicial que vem depois</a:t>
+            </a:r>
+            <a:endParaRPr lang="en-US" sz="850" dirty="0"/>
+          </a:p>
+        </p:txBody>
+      </p:sp>
+      <p:sp>
+        <p:nvSpPr>
+          <p:cNvPr id="9" name="Shape 7"/>
           <p:cNvSpPr/>
           <p:nvPr/>
         </p:nvSpPr>
         <p:spPr>
           <a:xfrm>
-            <a:off x="8321040" y="4517136"/>
-            <a:ext cx="1600200" cy="292608"/>
+            <a:off x="4370832" y="3017520"/>
+            <a:ext cx="3410712" cy="2788920"/>
           </a:xfrm>
           <a:prstGeom prst="roundRect">
             <a:avLst>
-              <a:gd name="adj" fmla="val 50000"/>
+              <a:gd name="adj" fmla="val 3279"/>
             </a:avLst>
           </a:prstGeom>
           <a:solidFill>
-            <a:srgbClr val="0B100E"/>
+            <a:srgbClr val="17211C"/>
           </a:solidFill>
           <a:ln w="12700">
             <a:solidFill>
@@ -3109,53 +2730,95 @@
       </p:sp>
       <p:sp>
         <p:nvSpPr>
-          <p:cNvPr id="20" name="Text 18"/>
-          <p:cNvSpPr txBox="1"/>
-          <p:nvPr/>
-        </p:nvSpPr>
-        <p:spPr>
-          <a:xfrm>
-            <a:off x="8321040" y="4535424"/>
-            <a:ext cx="1600200" cy="256032"/>
-          </a:xfrm>
-          <a:prstGeom prst="rect">
-            <a:avLst/>
-          </a:prstGeom>
-          <a:noFill/>
-          <a:ln/>
-        </p:spPr>
-        <p:txBody>
-          <a:bodyPr wrap="square" lIns="0" tIns="0" rIns="0" bIns="0" rtlCol="0" anchor="ctr"/>
-          <a:lstStyle/>
-          <a:p>
-            <a:pPr algn="ctr" indent="0" marL="0">
-              <a:buNone/>
-            </a:pPr>
-            <a:r>
-              <a:rPr lang="en-US" sz="850" dirty="0">
-                <a:solidFill>
-                  <a:srgbClr val="6A7D74"/>
+          <p:cNvPr id="10" name="Text 8"/>
+          <p:cNvSpPr txBox="1"/>
+          <p:nvPr/>
+        </p:nvSpPr>
+        <p:spPr>
+          <a:xfrm>
+            <a:off x="4626864" y="3246120"/>
+            <a:ext cx="2926080" cy="228600"/>
+          </a:xfrm>
+          <a:prstGeom prst="rect">
+            <a:avLst/>
+          </a:prstGeom>
+          <a:noFill/>
+          <a:ln/>
+        </p:spPr>
+        <p:txBody>
+          <a:bodyPr wrap="square" lIns="0" tIns="0" rIns="0" bIns="0" rtlCol="0" anchor="ctr"/>
+          <a:lstStyle/>
+          <a:p>
+            <a:pPr indent="0" marL="0">
+              <a:buNone/>
+            </a:pPr>
+            <a:r>
+              <a:rPr lang="en-US" sz="950" spc="150" kern="0" dirty="0">
+                <a:solidFill>
+                  <a:srgbClr val="3FBF5A"/>
                 </a:solidFill>
                 <a:latin typeface="Courier New" pitchFamily="34" charset="0"/>
                 <a:ea typeface="Courier New" pitchFamily="34" charset="-122"/>
                 <a:cs typeface="Courier New" pitchFamily="34" charset="-120"/>
               </a:rPr>
-              <a:t>A CONSTRUIR</a:t>
-            </a:r>
-            <a:endParaRPr lang="en-US" sz="850" dirty="0"/>
-          </a:p>
-        </p:txBody>
-      </p:sp>
-      <p:sp>
-        <p:nvSpPr>
-          <p:cNvPr id="21" name="Text 19"/>
-          <p:cNvSpPr txBox="1"/>
-          <p:nvPr/>
-        </p:nvSpPr>
-        <p:spPr>
-          <a:xfrm>
-            <a:off x="2514600" y="4882896"/>
-            <a:ext cx="8686800" cy="457200"/>
+              <a:t>O QUE SALVA</a:t>
+            </a:r>
+            <a:endParaRPr lang="en-US" sz="950" dirty="0"/>
+          </a:p>
+        </p:txBody>
+      </p:sp>
+      <p:sp>
+        <p:nvSpPr>
+          <p:cNvPr id="11" name="Text 9"/>
+          <p:cNvSpPr txBox="1"/>
+          <p:nvPr/>
+        </p:nvSpPr>
+        <p:spPr>
+          <a:xfrm>
+            <a:off x="4626864" y="3520440"/>
+            <a:ext cx="2926080" cy="685800"/>
+          </a:xfrm>
+          <a:prstGeom prst="rect">
+            <a:avLst/>
+          </a:prstGeom>
+          <a:noFill/>
+          <a:ln/>
+        </p:spPr>
+        <p:txBody>
+          <a:bodyPr wrap="square" lIns="0" tIns="0" rIns="0" bIns="0" rtlCol="0" anchor="ctr"/>
+          <a:lstStyle/>
+          <a:p>
+            <a:pPr indent="0" marL="0">
+              <a:lnSpc>
+                <a:spcPts val="2100"/>
+              </a:lnSpc>
+              <a:buNone/>
+            </a:pPr>
+            <a:r>
+              <a:rPr lang="en-US" sz="1700" b="1" dirty="0">
+                <a:solidFill>
+                  <a:srgbClr val="EDF3EF"/>
+                </a:solidFill>
+                <a:latin typeface="Arial" pitchFamily="34" charset="0"/>
+                <a:ea typeface="Arial" pitchFamily="34" charset="-122"/>
+                <a:cs typeface="Arial" pitchFamily="34" charset="-120"/>
+              </a:rPr>
+              <a:t>Custo evitado</a:t>
+            </a:r>
+            <a:endParaRPr lang="en-US" sz="1700" dirty="0"/>
+          </a:p>
+        </p:txBody>
+      </p:sp>
+      <p:sp>
+        <p:nvSpPr>
+          <p:cNvPr id="12" name="Text 10"/>
+          <p:cNvSpPr txBox="1"/>
+          <p:nvPr/>
+        </p:nvSpPr>
+        <p:spPr>
+          <a:xfrm>
+            <a:off x="4626864" y="4279392"/>
+            <a:ext cx="2926080" cy="1234440"/>
           </a:xfrm>
           <a:prstGeom prst="rect">
             <a:avLst/>
@@ -3182,7 +2845,7 @@
                 <a:ea typeface="Calibri" pitchFamily="34" charset="-122"/>
                 <a:cs typeface="Calibri" pitchFamily="34" charset="-120"/>
               </a:rPr>
-              <a:t>Cada sala com seu detector na borda, todas na mesma trilha auditável.</a:t>
+              <a:t>Uma câmera comum só serve depois do fato. O valor está em chegar antes: socorro em segundos em vez de minutos, e uma queda vista no instante em que acontece.</a:t>
             </a:r>
             <a:endParaRPr lang="en-US" sz="1200" dirty="0"/>
           </a:p>
@@ -3190,53 +2853,30 @@
       </p:sp>
       <p:sp>
         <p:nvSpPr>
-          <p:cNvPr id="22" name="Shape 20"/>
-          <p:cNvSpPr/>
-          <p:nvPr/>
-        </p:nvSpPr>
-        <p:spPr>
-          <a:xfrm>
-            <a:off x="685800" y="5404104"/>
-            <a:ext cx="10789920" cy="0"/>
-          </a:xfrm>
-          <a:prstGeom prst="line">
-            <a:avLst/>
-          </a:prstGeom>
-          <a:noFill/>
-          <a:ln w="12700">
-            <a:solidFill>
-              <a:srgbClr val="24322B"/>
-            </a:solidFill>
-            <a:prstDash val="solid"/>
-          </a:ln>
-        </p:spPr>
-      </p:sp>
-      <p:sp>
-        <p:nvSpPr>
-          <p:cNvPr id="23" name="Text 21"/>
-          <p:cNvSpPr txBox="1"/>
-          <p:nvPr/>
-        </p:nvSpPr>
-        <p:spPr>
-          <a:xfrm>
-            <a:off x="685800" y="5568696"/>
-            <a:ext cx="1645920" cy="274320"/>
-          </a:xfrm>
-          <a:prstGeom prst="rect">
-            <a:avLst/>
-          </a:prstGeom>
-          <a:noFill/>
-          <a:ln/>
-        </p:spPr>
-        <p:txBody>
-          <a:bodyPr wrap="square" lIns="0" tIns="0" rIns="0" bIns="0" rtlCol="0" anchor="ctr"/>
-          <a:lstStyle/>
-          <a:p>
-            <a:pPr indent="0" marL="0">
-              <a:buNone/>
-            </a:pPr>
-            <a:r>
-              <a:rPr lang="en-US" sz="1000" spc="150" kern="0" dirty="0">
+          <p:cNvPr id="13" name="Text 11"/>
+          <p:cNvSpPr txBox="1"/>
+          <p:nvPr/>
+        </p:nvSpPr>
+        <p:spPr>
+          <a:xfrm>
+            <a:off x="4626864" y="5440680"/>
+            <a:ext cx="2926080" cy="320040"/>
+          </a:xfrm>
+          <a:prstGeom prst="rect">
+            <a:avLst/>
+          </a:prstGeom>
+          <a:noFill/>
+          <a:ln/>
+        </p:spPr>
+        <p:txBody>
+          <a:bodyPr wrap="square" lIns="0" tIns="0" rIns="0" bIns="0" rtlCol="0" anchor="ctr"/>
+          <a:lstStyle/>
+          <a:p>
+            <a:pPr indent="0" marL="0">
+              <a:buNone/>
+            </a:pPr>
+            <a:r>
+              <a:rPr lang="en-US" sz="850" dirty="0">
                 <a:solidFill>
                   <a:srgbClr val="6A7D74"/>
                 </a:solidFill>
@@ -3244,69 +2884,30 @@
                 <a:ea typeface="Courier New" pitchFamily="34" charset="-122"/>
                 <a:cs typeface="Courier New" pitchFamily="34" charset="-120"/>
               </a:rPr>
-              <a:t>A TESE</a:t>
-            </a:r>
-            <a:endParaRPr lang="en-US" sz="1000" dirty="0"/>
-          </a:p>
-        </p:txBody>
-      </p:sp>
-      <p:sp>
-        <p:nvSpPr>
-          <p:cNvPr id="24" name="Text 22"/>
-          <p:cNvSpPr txBox="1"/>
-          <p:nvPr/>
-        </p:nvSpPr>
-        <p:spPr>
-          <a:xfrm>
-            <a:off x="2514600" y="5513832"/>
-            <a:ext cx="5669280" cy="347472"/>
-          </a:xfrm>
-          <a:prstGeom prst="rect">
-            <a:avLst/>
-          </a:prstGeom>
-          <a:noFill/>
-          <a:ln/>
-        </p:spPr>
-        <p:txBody>
-          <a:bodyPr wrap="square" lIns="0" tIns="0" rIns="0" bIns="0" rtlCol="0" anchor="ctr"/>
-          <a:lstStyle/>
-          <a:p>
-            <a:pPr indent="0" marL="0">
-              <a:buNone/>
-            </a:pPr>
-            <a:r>
-              <a:rPr lang="en-US" sz="1700" b="1" dirty="0">
-                <a:solidFill>
-                  <a:srgbClr val="EDF3EF"/>
-                </a:solidFill>
-                <a:latin typeface="Arial" pitchFamily="34" charset="0"/>
-                <a:ea typeface="Arial" pitchFamily="34" charset="-122"/>
-                <a:cs typeface="Arial" pitchFamily="34" charset="-120"/>
-              </a:rPr>
-              <a:t>A mesma base, outros lugares</a:t>
-            </a:r>
-            <a:endParaRPr lang="en-US" sz="1700" dirty="0"/>
-          </a:p>
-        </p:txBody>
-      </p:sp>
-      <p:sp>
-        <p:nvSpPr>
-          <p:cNvPr id="25" name="Shape 23"/>
+              <a:t>o alerta sai antes de alguém reclamar</a:t>
+            </a:r>
+            <a:endParaRPr lang="en-US" sz="850" dirty="0"/>
+          </a:p>
+        </p:txBody>
+      </p:sp>
+      <p:sp>
+        <p:nvSpPr>
+          <p:cNvPr id="14" name="Shape 12"/>
           <p:cNvSpPr/>
           <p:nvPr/>
         </p:nvSpPr>
         <p:spPr>
           <a:xfrm>
-            <a:off x="8321040" y="5541264"/>
-            <a:ext cx="1600200" cy="292608"/>
+            <a:off x="8055864" y="3017520"/>
+            <a:ext cx="3410712" cy="2788920"/>
           </a:xfrm>
           <a:prstGeom prst="roundRect">
             <a:avLst>
-              <a:gd name="adj" fmla="val 50000"/>
+              <a:gd name="adj" fmla="val 3279"/>
             </a:avLst>
           </a:prstGeom>
           <a:solidFill>
-            <a:srgbClr val="0B100E"/>
+            <a:srgbClr val="17211C"/>
           </a:solidFill>
           <a:ln w="12700">
             <a:solidFill>
@@ -3318,53 +2919,95 @@
       </p:sp>
       <p:sp>
         <p:nvSpPr>
-          <p:cNvPr id="26" name="Text 24"/>
-          <p:cNvSpPr txBox="1"/>
-          <p:nvPr/>
-        </p:nvSpPr>
-        <p:spPr>
-          <a:xfrm>
-            <a:off x="8321040" y="5559552"/>
-            <a:ext cx="1600200" cy="256032"/>
-          </a:xfrm>
-          <a:prstGeom prst="rect">
-            <a:avLst/>
-          </a:prstGeom>
-          <a:noFill/>
-          <a:ln/>
-        </p:spPr>
-        <p:txBody>
-          <a:bodyPr wrap="square" lIns="0" tIns="0" rIns="0" bIns="0" rtlCol="0" anchor="ctr"/>
-          <a:lstStyle/>
-          <a:p>
-            <a:pPr algn="ctr" indent="0" marL="0">
-              <a:buNone/>
-            </a:pPr>
-            <a:r>
-              <a:rPr lang="en-US" sz="850" dirty="0">
-                <a:solidFill>
-                  <a:srgbClr val="6A7D74"/>
+          <p:cNvPr id="15" name="Text 13"/>
+          <p:cNvSpPr txBox="1"/>
+          <p:nvPr/>
+        </p:nvSpPr>
+        <p:spPr>
+          <a:xfrm>
+            <a:off x="8311896" y="3246120"/>
+            <a:ext cx="2926080" cy="228600"/>
+          </a:xfrm>
+          <a:prstGeom prst="rect">
+            <a:avLst/>
+          </a:prstGeom>
+          <a:noFill/>
+          <a:ln/>
+        </p:spPr>
+        <p:txBody>
+          <a:bodyPr wrap="square" lIns="0" tIns="0" rIns="0" bIns="0" rtlCol="0" anchor="ctr"/>
+          <a:lstStyle/>
+          <a:p>
+            <a:pPr indent="0" marL="0">
+              <a:buNone/>
+            </a:pPr>
+            <a:r>
+              <a:rPr lang="en-US" sz="950" spc="150" kern="0" dirty="0">
+                <a:solidFill>
+                  <a:srgbClr val="3FBF5A"/>
                 </a:solidFill>
                 <a:latin typeface="Courier New" pitchFamily="34" charset="0"/>
                 <a:ea typeface="Courier New" pitchFamily="34" charset="-122"/>
                 <a:cs typeface="Courier New" pitchFamily="34" charset="-120"/>
               </a:rPr>
-              <a:t>EM ESTUDO</a:t>
-            </a:r>
-            <a:endParaRPr lang="en-US" sz="850" dirty="0"/>
-          </a:p>
-        </p:txBody>
-      </p:sp>
-      <p:sp>
-        <p:nvSpPr>
-          <p:cNvPr id="27" name="Text 25"/>
-          <p:cNvSpPr txBox="1"/>
-          <p:nvPr/>
-        </p:nvSpPr>
-        <p:spPr>
-          <a:xfrm>
-            <a:off x="2514600" y="5907024"/>
-            <a:ext cx="8686800" cy="457200"/>
+              <a:t>O QUE SUBSTITUI</a:t>
+            </a:r>
+            <a:endParaRPr lang="en-US" sz="950" dirty="0"/>
+          </a:p>
+        </p:txBody>
+      </p:sp>
+      <p:sp>
+        <p:nvSpPr>
+          <p:cNvPr id="16" name="Text 14"/>
+          <p:cNvSpPr txBox="1"/>
+          <p:nvPr/>
+        </p:nvSpPr>
+        <p:spPr>
+          <a:xfrm>
+            <a:off x="8311896" y="3520440"/>
+            <a:ext cx="2926080" cy="685800"/>
+          </a:xfrm>
+          <a:prstGeom prst="rect">
+            <a:avLst/>
+          </a:prstGeom>
+          <a:noFill/>
+          <a:ln/>
+        </p:spPr>
+        <p:txBody>
+          <a:bodyPr wrap="square" lIns="0" tIns="0" rIns="0" bIns="0" rtlCol="0" anchor="ctr"/>
+          <a:lstStyle/>
+          <a:p>
+            <a:pPr indent="0" marL="0">
+              <a:lnSpc>
+                <a:spcPts val="2100"/>
+              </a:lnSpc>
+              <a:buNone/>
+            </a:pPr>
+            <a:r>
+              <a:rPr lang="en-US" sz="1700" b="1" dirty="0">
+                <a:solidFill>
+                  <a:srgbClr val="EDF3EF"/>
+                </a:solidFill>
+                <a:latin typeface="Arial" pitchFamily="34" charset="0"/>
+                <a:ea typeface="Arial" pitchFamily="34" charset="-122"/>
+                <a:cs typeface="Arial" pitchFamily="34" charset="-120"/>
+              </a:rPr>
+              <a:t>Licença de nuvem</a:t>
+            </a:r>
+            <a:endParaRPr lang="en-US" sz="1700" dirty="0"/>
+          </a:p>
+        </p:txBody>
+      </p:sp>
+      <p:sp>
+        <p:nvSpPr>
+          <p:cNvPr id="17" name="Text 15"/>
+          <p:cNvSpPr txBox="1"/>
+          <p:nvPr/>
+        </p:nvSpPr>
+        <p:spPr>
+          <a:xfrm>
+            <a:off x="8311896" y="4279392"/>
+            <a:ext cx="2926080" cy="1234440"/>
           </a:xfrm>
           <a:prstGeom prst="rect">
             <a:avLst/>
@@ -3391,7 +3034,7 @@
                 <a:ea typeface="Calibri" pitchFamily="34" charset="-122"/>
                 <a:cs typeface="Calibri" pitchFamily="34" charset="-120"/>
               </a:rPr>
-              <a:t>Borda que decide mais prova que não se altera: portaria com consentimento, e o SVATech Health.</a:t>
+              <a:t>Se a escola já paga mensalidade por câmera para algum sistema de nuvem, o nosso número entra no lugar dele. E, ao contrário do dele, dá para conferir de onde sai.</a:t>
             </a:r>
             <a:endParaRPr lang="en-US" sz="1200" dirty="0"/>
           </a:p>
@@ -3399,30 +3042,30 @@
       </p:sp>
       <p:sp>
         <p:nvSpPr>
-          <p:cNvPr id="28" name="Text 26"/>
-          <p:cNvSpPr txBox="1"/>
-          <p:nvPr/>
-        </p:nvSpPr>
-        <p:spPr>
-          <a:xfrm>
-            <a:off x="685800" y="6291072"/>
-            <a:ext cx="5486400" cy="274320"/>
-          </a:xfrm>
-          <a:prstGeom prst="rect">
-            <a:avLst/>
-          </a:prstGeom>
-          <a:noFill/>
-          <a:ln/>
-        </p:spPr>
-        <p:txBody>
-          <a:bodyPr wrap="square" lIns="0" tIns="0" rIns="0" bIns="0" rtlCol="0" anchor="ctr"/>
-          <a:lstStyle/>
-          <a:p>
-            <a:pPr indent="0" marL="0">
-              <a:buNone/>
-            </a:pPr>
-            <a:r>
-              <a:rPr lang="en-US" sz="900" dirty="0">
+          <p:cNvPr id="18" name="Text 16"/>
+          <p:cNvSpPr txBox="1"/>
+          <p:nvPr/>
+        </p:nvSpPr>
+        <p:spPr>
+          <a:xfrm>
+            <a:off x="8311896" y="5440680"/>
+            <a:ext cx="2926080" cy="320040"/>
+          </a:xfrm>
+          <a:prstGeom prst="rect">
+            <a:avLst/>
+          </a:prstGeom>
+          <a:noFill/>
+          <a:ln/>
+        </p:spPr>
+        <p:txBody>
+          <a:bodyPr wrap="square" lIns="0" tIns="0" rIns="0" bIns="0" rtlCol="0" anchor="ctr"/>
+          <a:lstStyle/>
+          <a:p>
+            <a:pPr indent="0" marL="0">
+              <a:buNone/>
+            </a:pPr>
+            <a:r>
+              <a:rPr lang="en-US" sz="850" dirty="0">
                 <a:solidFill>
                   <a:srgbClr val="6A7D74"/>
                 </a:solidFill>
@@ -3430,7 +3073,46 @@
                 <a:ea typeface="Courier New" pitchFamily="34" charset="-122"/>
                 <a:cs typeface="Courier New" pitchFamily="34" charset="-120"/>
               </a:rPr>
-              <a:t>Auditix AI  ·  SVATech  ·  grupo 11</a:t>
+              <a:t>comparável, e verificável linha a linha</a:t>
+            </a:r>
+            <a:endParaRPr lang="en-US" sz="850" dirty="0"/>
+          </a:p>
+        </p:txBody>
+      </p:sp>
+      <p:sp>
+        <p:nvSpPr>
+          <p:cNvPr id="20" name="Text 17"/>
+          <p:cNvSpPr txBox="1"/>
+          <p:nvPr/>
+        </p:nvSpPr>
+        <p:spPr>
+          <a:xfrm>
+            <a:off x="685800" y="6291072"/>
+            <a:ext cx="5486400" cy="274320"/>
+          </a:xfrm>
+          <a:prstGeom prst="rect">
+            <a:avLst/>
+          </a:prstGeom>
+          <a:noFill/>
+          <a:ln/>
+        </p:spPr>
+        <p:txBody>
+          <a:bodyPr wrap="square" lIns="0" tIns="0" rIns="0" bIns="0" rtlCol="0" anchor="ctr"/>
+          <a:lstStyle/>
+          <a:p>
+            <a:pPr indent="0" marL="0">
+              <a:buNone/>
+            </a:pPr>
+            <a:r>
+              <a:rPr lang="en-US" sz="900" dirty="0">
+                <a:solidFill>
+                  <a:srgbClr val="6A7D74"/>
+                </a:solidFill>
+                <a:latin typeface="Courier New" pitchFamily="34" charset="0"/>
+                <a:ea typeface="Courier New" pitchFamily="34" charset="-122"/>
+                <a:cs typeface="Courier New" pitchFamily="34" charset="-120"/>
+              </a:rPr>
+              <a:t>Auditix IA  ·  grupo 11</a:t>
             </a:r>
             <a:endParaRPr lang="en-US" sz="900" dirty="0"/>
           </a:p>
@@ -3438,7 +3120,7 @@
       </p:sp>
       <p:sp>
         <p:nvSpPr>
-          <p:cNvPr id="29" name="Text 27"/>
+          <p:cNvPr id="21" name="Text 18"/>
           <p:cNvSpPr txBox="1"/>
           <p:nvPr/>
         </p:nvSpPr>
@@ -3540,7 +3222,7 @@
                 <a:ea typeface="Courier New" pitchFamily="34" charset="-122"/>
                 <a:cs typeface="Courier New" pitchFamily="34" charset="-120"/>
               </a:rPr>
-              <a:t>ONDE ESTÁ O VALOR PARA QUEM COMPRA</a:t>
+              <a:t>VALOR ECONÔMICO E ENTRADA NO MERCADO</a:t>
             </a:r>
             <a:endParaRPr lang="en-US" sz="1100" dirty="0"/>
           </a:p>
@@ -3582,7 +3264,7 @@
                 <a:ea typeface="Arial" pitchFamily="34" charset="-122"/>
                 <a:cs typeface="Arial" pitchFamily="34" charset="-120"/>
               </a:rPr>
-              <a:t>Três frentes, em ordem de</a:t>
+              <a:t>O custo de cobrir mais</a:t>
             </a:r>
             <a:endParaRPr lang="en-US" sz="3600" dirty="0"/>
           </a:p>
@@ -3602,7 +3284,7 @@
                 <a:ea typeface="Arial" pitchFamily="34" charset="-122"/>
                 <a:cs typeface="Arial" pitchFamily="34" charset="-120"/>
               </a:rPr>
-              <a:t>força para uma escola.</a:t>
+              <a:t>uma sala é uma câmera.</a:t>
             </a:r>
             <a:endParaRPr lang="en-US" sz="3600" dirty="0"/>
           </a:p>
@@ -3610,22 +3292,609 @@
       </p:sp>
       <p:sp>
         <p:nvSpPr>
-          <p:cNvPr id="4" name="Shape 2"/>
+          <p:cNvPr id="4" name="Text 2"/>
+          <p:cNvSpPr txBox="1"/>
+          <p:nvPr/>
+        </p:nvSpPr>
+        <p:spPr>
+          <a:xfrm>
+            <a:off x="685800" y="2514600"/>
+            <a:ext cx="10515600" cy="731520"/>
+          </a:xfrm>
+          <a:prstGeom prst="rect">
+            <a:avLst/>
+          </a:prstGeom>
+          <a:noFill/>
+          <a:ln/>
+        </p:spPr>
+        <p:txBody>
+          <a:bodyPr wrap="square" lIns="0" tIns="0" rIns="0" bIns="0" rtlCol="0" anchor="ctr"/>
+          <a:lstStyle/>
+          <a:p>
+            <a:pPr indent="0" marL="0">
+              <a:lnSpc>
+                <a:spcPts val="2200"/>
+              </a:lnSpc>
+              <a:buNone/>
+            </a:pPr>
+            <a:r>
+              <a:rPr lang="en-US" sz="1500" dirty="0">
+                <a:solidFill>
+                  <a:srgbClr val="9DB0A6"/>
+                </a:solidFill>
+                <a:latin typeface="Calibri" pitchFamily="34" charset="0"/>
+                <a:ea typeface="Calibri" pitchFamily="34" charset="-122"/>
+                <a:cs typeface="Calibri" pitchFamily="34" charset="-120"/>
+              </a:rPr>
+              <a:t>O concorrente cobra licença mensal POR CÂMERA, porque o vídeo dele roda na nuvem dele. O nosso roda na borda, e o que sobe para a nuvem é uma linha de texto.</a:t>
+            </a:r>
+            <a:endParaRPr lang="en-US" sz="1500" dirty="0"/>
+          </a:p>
+        </p:txBody>
+      </p:sp>
+      <p:sp>
+        <p:nvSpPr>
+          <p:cNvPr id="5" name="Text 3"/>
+          <p:cNvSpPr txBox="1"/>
+          <p:nvPr/>
+        </p:nvSpPr>
+        <p:spPr>
+          <a:xfrm>
+            <a:off x="685800" y="3246120"/>
+            <a:ext cx="5120640" cy="320040"/>
+          </a:xfrm>
+          <a:prstGeom prst="rect">
+            <a:avLst/>
+          </a:prstGeom>
+          <a:noFill/>
+          <a:ln/>
+        </p:spPr>
+        <p:txBody>
+          <a:bodyPr wrap="square" lIns="0" tIns="0" rIns="0" bIns="0" rtlCol="0" anchor="ctr"/>
+          <a:lstStyle/>
+          <a:p>
+            <a:pPr indent="0" marL="0">
+              <a:buNone/>
+            </a:pPr>
+            <a:r>
+              <a:rPr lang="en-US" sz="1800" b="1" dirty="0">
+                <a:solidFill>
+                  <a:srgbClr val="EDF3EF"/>
+                </a:solidFill>
+                <a:latin typeface="Arial" pitchFamily="34" charset="0"/>
+                <a:ea typeface="Arial" pitchFamily="34" charset="-122"/>
+                <a:cs typeface="Arial" pitchFamily="34" charset="-120"/>
+              </a:rPr>
+              <a:t>O que custa</a:t>
+            </a:r>
+            <a:endParaRPr lang="en-US" sz="1800" dirty="0"/>
+          </a:p>
+        </p:txBody>
+      </p:sp>
+      <p:sp>
+        <p:nvSpPr>
+          <p:cNvPr id="6" name="Shape 4"/>
           <p:cNvSpPr/>
           <p:nvPr/>
         </p:nvSpPr>
         <p:spPr>
           <a:xfrm>
-            <a:off x="685800" y="3017520"/>
-            <a:ext cx="3410712" cy="2788920"/>
-          </a:xfrm>
-          <a:prstGeom prst="roundRect">
-            <a:avLst>
-              <a:gd name="adj" fmla="val 3279"/>
-            </a:avLst>
+            <a:off x="685800" y="3703320"/>
+            <a:ext cx="5120640" cy="0"/>
+          </a:xfrm>
+          <a:prstGeom prst="line">
+            <a:avLst/>
+          </a:prstGeom>
+          <a:noFill/>
+          <a:ln w="12700">
+            <a:solidFill>
+              <a:srgbClr val="24322B"/>
+            </a:solidFill>
+            <a:prstDash val="solid"/>
+          </a:ln>
+        </p:spPr>
+      </p:sp>
+      <p:sp>
+        <p:nvSpPr>
+          <p:cNvPr id="7" name="Text 5"/>
+          <p:cNvSpPr txBox="1"/>
+          <p:nvPr/>
+        </p:nvSpPr>
+        <p:spPr>
+          <a:xfrm>
+            <a:off x="685800" y="3785616"/>
+            <a:ext cx="3017520" cy="320040"/>
+          </a:xfrm>
+          <a:prstGeom prst="rect">
+            <a:avLst/>
+          </a:prstGeom>
+          <a:noFill/>
+          <a:ln/>
+        </p:spPr>
+        <p:txBody>
+          <a:bodyPr wrap="square" lIns="0" tIns="0" rIns="0" bIns="0" rtlCol="0" anchor="ctr"/>
+          <a:lstStyle/>
+          <a:p>
+            <a:pPr indent="0" marL="0">
+              <a:buNone/>
+            </a:pPr>
+            <a:r>
+              <a:rPr lang="en-US" sz="1300" b="1" dirty="0">
+                <a:solidFill>
+                  <a:srgbClr val="EDF3EF"/>
+                </a:solidFill>
+                <a:latin typeface="Arial" pitchFamily="34" charset="0"/>
+                <a:ea typeface="Arial" pitchFamily="34" charset="-122"/>
+                <a:cs typeface="Arial" pitchFamily="34" charset="-120"/>
+              </a:rPr>
+              <a:t>Câmera IP, por sala</a:t>
+            </a:r>
+            <a:endParaRPr lang="en-US" sz="1300" dirty="0"/>
+          </a:p>
+        </p:txBody>
+      </p:sp>
+      <p:sp>
+        <p:nvSpPr>
+          <p:cNvPr id="8" name="Text 6"/>
+          <p:cNvSpPr txBox="1"/>
+          <p:nvPr/>
+        </p:nvSpPr>
+        <p:spPr>
+          <a:xfrm>
+            <a:off x="3703320" y="3803904"/>
+            <a:ext cx="2103120" cy="292608"/>
+          </a:xfrm>
+          <a:prstGeom prst="rect">
+            <a:avLst/>
+          </a:prstGeom>
+          <a:noFill/>
+          <a:ln/>
+        </p:spPr>
+        <p:txBody>
+          <a:bodyPr wrap="square" lIns="0" tIns="0" rIns="0" bIns="0" rtlCol="0" anchor="ctr"/>
+          <a:lstStyle/>
+          <a:p>
+            <a:pPr algn="r" indent="0" marL="0">
+              <a:buNone/>
+            </a:pPr>
+            <a:r>
+              <a:rPr lang="en-US" sz="1100" dirty="0">
+                <a:solidFill>
+                  <a:srgbClr val="9DB0A6"/>
+                </a:solidFill>
+                <a:latin typeface="Courier New" pitchFamily="34" charset="0"/>
+                <a:ea typeface="Courier New" pitchFamily="34" charset="-122"/>
+                <a:cs typeface="Courier New" pitchFamily="34" charset="-120"/>
+              </a:rPr>
+              <a:t>R$ 200 a R$ 680</a:t>
+            </a:r>
+            <a:endParaRPr lang="en-US" sz="1100" dirty="0"/>
+          </a:p>
+        </p:txBody>
+      </p:sp>
+      <p:sp>
+        <p:nvSpPr>
+          <p:cNvPr id="9" name="Shape 7"/>
+          <p:cNvSpPr/>
+          <p:nvPr/>
+        </p:nvSpPr>
+        <p:spPr>
+          <a:xfrm>
+            <a:off x="685800" y="4178808"/>
+            <a:ext cx="5120640" cy="0"/>
+          </a:xfrm>
+          <a:prstGeom prst="line">
+            <a:avLst/>
+          </a:prstGeom>
+          <a:noFill/>
+          <a:ln w="12700">
+            <a:solidFill>
+              <a:srgbClr val="24322B"/>
+            </a:solidFill>
+            <a:prstDash val="solid"/>
+          </a:ln>
+        </p:spPr>
+      </p:sp>
+      <p:sp>
+        <p:nvSpPr>
+          <p:cNvPr id="10" name="Text 8"/>
+          <p:cNvSpPr txBox="1"/>
+          <p:nvPr/>
+        </p:nvSpPr>
+        <p:spPr>
+          <a:xfrm>
+            <a:off x="685800" y="4261104"/>
+            <a:ext cx="3017520" cy="320040"/>
+          </a:xfrm>
+          <a:prstGeom prst="rect">
+            <a:avLst/>
+          </a:prstGeom>
+          <a:noFill/>
+          <a:ln/>
+        </p:spPr>
+        <p:txBody>
+          <a:bodyPr wrap="square" lIns="0" tIns="0" rIns="0" bIns="0" rtlCol="0" anchor="ctr"/>
+          <a:lstStyle/>
+          <a:p>
+            <a:pPr indent="0" marL="0">
+              <a:buNone/>
+            </a:pPr>
+            <a:r>
+              <a:rPr lang="en-US" sz="1300" b="1" dirty="0">
+                <a:solidFill>
+                  <a:srgbClr val="EDF3EF"/>
+                </a:solidFill>
+                <a:latin typeface="Arial" pitchFamily="34" charset="0"/>
+                <a:ea typeface="Arial" pitchFamily="34" charset="-122"/>
+                <a:cs typeface="Arial" pitchFamily="34" charset="-120"/>
+              </a:rPr>
+              <a:t>Servidor</a:t>
+            </a:r>
+            <a:endParaRPr lang="en-US" sz="1300" dirty="0"/>
+          </a:p>
+        </p:txBody>
+      </p:sp>
+      <p:sp>
+        <p:nvSpPr>
+          <p:cNvPr id="11" name="Text 9"/>
+          <p:cNvSpPr txBox="1"/>
+          <p:nvPr/>
+        </p:nvSpPr>
+        <p:spPr>
+          <a:xfrm>
+            <a:off x="3703320" y="4279392"/>
+            <a:ext cx="2103120" cy="292608"/>
+          </a:xfrm>
+          <a:prstGeom prst="rect">
+            <a:avLst/>
+          </a:prstGeom>
+          <a:noFill/>
+          <a:ln/>
+        </p:spPr>
+        <p:txBody>
+          <a:bodyPr wrap="square" lIns="0" tIns="0" rIns="0" bIns="0" rtlCol="0" anchor="ctr"/>
+          <a:lstStyle/>
+          <a:p>
+            <a:pPr algn="r" indent="0" marL="0">
+              <a:buNone/>
+            </a:pPr>
+            <a:r>
+              <a:rPr lang="en-US" sz="1100" dirty="0">
+                <a:solidFill>
+                  <a:srgbClr val="9DB0A6"/>
+                </a:solidFill>
+                <a:latin typeface="Courier New" pitchFamily="34" charset="0"/>
+                <a:ea typeface="Courier New" pitchFamily="34" charset="-122"/>
+                <a:cs typeface="Courier New" pitchFamily="34" charset="-120"/>
+              </a:rPr>
+              <a:t>1 PC comum por escola</a:t>
+            </a:r>
+            <a:endParaRPr lang="en-US" sz="1100" dirty="0"/>
+          </a:p>
+        </p:txBody>
+      </p:sp>
+      <p:sp>
+        <p:nvSpPr>
+          <p:cNvPr id="12" name="Shape 10"/>
+          <p:cNvSpPr/>
+          <p:nvPr/>
+        </p:nvSpPr>
+        <p:spPr>
+          <a:xfrm>
+            <a:off x="685800" y="4654296"/>
+            <a:ext cx="5120640" cy="0"/>
+          </a:xfrm>
+          <a:prstGeom prst="line">
+            <a:avLst/>
+          </a:prstGeom>
+          <a:noFill/>
+          <a:ln w="12700">
+            <a:solidFill>
+              <a:srgbClr val="24322B"/>
+            </a:solidFill>
+            <a:prstDash val="solid"/>
+          </a:ln>
+        </p:spPr>
+      </p:sp>
+      <p:sp>
+        <p:nvSpPr>
+          <p:cNvPr id="13" name="Text 11"/>
+          <p:cNvSpPr txBox="1"/>
+          <p:nvPr/>
+        </p:nvSpPr>
+        <p:spPr>
+          <a:xfrm>
+            <a:off x="685800" y="4736592"/>
+            <a:ext cx="3017520" cy="320040"/>
+          </a:xfrm>
+          <a:prstGeom prst="rect">
+            <a:avLst/>
+          </a:prstGeom>
+          <a:noFill/>
+          <a:ln/>
+        </p:spPr>
+        <p:txBody>
+          <a:bodyPr wrap="square" lIns="0" tIns="0" rIns="0" bIns="0" rtlCol="0" anchor="ctr"/>
+          <a:lstStyle/>
+          <a:p>
+            <a:pPr indent="0" marL="0">
+              <a:buNone/>
+            </a:pPr>
+            <a:r>
+              <a:rPr lang="en-US" sz="1300" b="1" dirty="0">
+                <a:solidFill>
+                  <a:srgbClr val="EDF3EF"/>
+                </a:solidFill>
+                <a:latin typeface="Arial" pitchFamily="34" charset="0"/>
+                <a:ea typeface="Arial" pitchFamily="34" charset="-122"/>
+                <a:cs typeface="Arial" pitchFamily="34" charset="-120"/>
+              </a:rPr>
+              <a:t>Licença de software</a:t>
+            </a:r>
+            <a:endParaRPr lang="en-US" sz="1300" dirty="0"/>
+          </a:p>
+        </p:txBody>
+      </p:sp>
+      <p:sp>
+        <p:nvSpPr>
+          <p:cNvPr id="14" name="Text 12"/>
+          <p:cNvSpPr txBox="1"/>
+          <p:nvPr/>
+        </p:nvSpPr>
+        <p:spPr>
+          <a:xfrm>
+            <a:off x="3703320" y="4754880"/>
+            <a:ext cx="2103120" cy="292608"/>
+          </a:xfrm>
+          <a:prstGeom prst="rect">
+            <a:avLst/>
+          </a:prstGeom>
+          <a:noFill/>
+          <a:ln/>
+        </p:spPr>
+        <p:txBody>
+          <a:bodyPr wrap="square" lIns="0" tIns="0" rIns="0" bIns="0" rtlCol="0" anchor="ctr"/>
+          <a:lstStyle/>
+          <a:p>
+            <a:pPr algn="r" indent="0" marL="0">
+              <a:buNone/>
+            </a:pPr>
+            <a:r>
+              <a:rPr lang="en-US" sz="1100" dirty="0">
+                <a:solidFill>
+                  <a:srgbClr val="3FBF5A"/>
+                </a:solidFill>
+                <a:latin typeface="Courier New" pitchFamily="34" charset="0"/>
+                <a:ea typeface="Courier New" pitchFamily="34" charset="-122"/>
+                <a:cs typeface="Courier New" pitchFamily="34" charset="-120"/>
+              </a:rPr>
+              <a:t>R$ 0 por câmera</a:t>
+            </a:r>
+            <a:endParaRPr lang="en-US" sz="1100" dirty="0"/>
+          </a:p>
+        </p:txBody>
+      </p:sp>
+      <p:sp>
+        <p:nvSpPr>
+          <p:cNvPr id="15" name="Shape 13"/>
+          <p:cNvSpPr/>
+          <p:nvPr/>
+        </p:nvSpPr>
+        <p:spPr>
+          <a:xfrm>
+            <a:off x="685800" y="5129784"/>
+            <a:ext cx="5120640" cy="0"/>
+          </a:xfrm>
+          <a:prstGeom prst="line">
+            <a:avLst/>
+          </a:prstGeom>
+          <a:noFill/>
+          <a:ln w="12700">
+            <a:solidFill>
+              <a:srgbClr val="24322B"/>
+            </a:solidFill>
+            <a:prstDash val="solid"/>
+          </a:ln>
+        </p:spPr>
+      </p:sp>
+      <p:sp>
+        <p:nvSpPr>
+          <p:cNvPr id="16" name="Text 14"/>
+          <p:cNvSpPr txBox="1"/>
+          <p:nvPr/>
+        </p:nvSpPr>
+        <p:spPr>
+          <a:xfrm>
+            <a:off x="685800" y="5212080"/>
+            <a:ext cx="3017520" cy="320040"/>
+          </a:xfrm>
+          <a:prstGeom prst="rect">
+            <a:avLst/>
+          </a:prstGeom>
+          <a:noFill/>
+          <a:ln/>
+        </p:spPr>
+        <p:txBody>
+          <a:bodyPr wrap="square" lIns="0" tIns="0" rIns="0" bIns="0" rtlCol="0" anchor="ctr"/>
+          <a:lstStyle/>
+          <a:p>
+            <a:pPr indent="0" marL="0">
+              <a:buNone/>
+            </a:pPr>
+            <a:r>
+              <a:rPr lang="en-US" sz="1300" b="1" dirty="0">
+                <a:solidFill>
+                  <a:srgbClr val="EDF3EF"/>
+                </a:solidFill>
+                <a:latin typeface="Arial" pitchFamily="34" charset="0"/>
+                <a:ea typeface="Arial" pitchFamily="34" charset="-122"/>
+                <a:cs typeface="Arial" pitchFamily="34" charset="-120"/>
+              </a:rPr>
+              <a:t>Nuvem do alerta</a:t>
+            </a:r>
+            <a:endParaRPr lang="en-US" sz="1300" dirty="0"/>
+          </a:p>
+        </p:txBody>
+      </p:sp>
+      <p:sp>
+        <p:nvSpPr>
+          <p:cNvPr id="17" name="Text 15"/>
+          <p:cNvSpPr txBox="1"/>
+          <p:nvPr/>
+        </p:nvSpPr>
+        <p:spPr>
+          <a:xfrm>
+            <a:off x="3703320" y="5230368"/>
+            <a:ext cx="2103120" cy="292608"/>
+          </a:xfrm>
+          <a:prstGeom prst="rect">
+            <a:avLst/>
+          </a:prstGeom>
+          <a:noFill/>
+          <a:ln/>
+        </p:spPr>
+        <p:txBody>
+          <a:bodyPr wrap="square" lIns="0" tIns="0" rIns="0" bIns="0" rtlCol="0" anchor="ctr"/>
+          <a:lstStyle/>
+          <a:p>
+            <a:pPr algn="r" indent="0" marL="0">
+              <a:buNone/>
+            </a:pPr>
+            <a:r>
+              <a:rPr lang="en-US" sz="1100" dirty="0">
+                <a:solidFill>
+                  <a:srgbClr val="3FBF5A"/>
+                </a:solidFill>
+                <a:latin typeface="Courier New" pitchFamily="34" charset="0"/>
+                <a:ea typeface="Courier New" pitchFamily="34" charset="-122"/>
+                <a:cs typeface="Courier New" pitchFamily="34" charset="-120"/>
+              </a:rPr>
+              <a:t>centavos por mês</a:t>
+            </a:r>
+            <a:endParaRPr lang="en-US" sz="1100" dirty="0"/>
+          </a:p>
+        </p:txBody>
+      </p:sp>
+      <p:sp>
+        <p:nvSpPr>
+          <p:cNvPr id="18" name="Shape 16"/>
+          <p:cNvSpPr/>
+          <p:nvPr/>
+        </p:nvSpPr>
+        <p:spPr>
+          <a:xfrm>
+            <a:off x="685800" y="5605272"/>
+            <a:ext cx="5120640" cy="0"/>
+          </a:xfrm>
+          <a:prstGeom prst="line">
+            <a:avLst/>
+          </a:prstGeom>
+          <a:noFill/>
+          <a:ln w="12700">
+            <a:solidFill>
+              <a:srgbClr val="24322B"/>
+            </a:solidFill>
+            <a:prstDash val="solid"/>
+          </a:ln>
+        </p:spPr>
+      </p:sp>
+      <p:sp>
+        <p:nvSpPr>
+          <p:cNvPr id="19" name="Text 17"/>
+          <p:cNvSpPr txBox="1"/>
+          <p:nvPr/>
+        </p:nvSpPr>
+        <p:spPr>
+          <a:xfrm>
+            <a:off x="685800" y="5687568"/>
+            <a:ext cx="5120640" cy="365760"/>
+          </a:xfrm>
+          <a:prstGeom prst="rect">
+            <a:avLst/>
+          </a:prstGeom>
+          <a:noFill/>
+          <a:ln/>
+        </p:spPr>
+        <p:txBody>
+          <a:bodyPr wrap="square" lIns="0" tIns="0" rIns="0" bIns="0" rtlCol="0" anchor="ctr"/>
+          <a:lstStyle/>
+          <a:p>
+            <a:pPr indent="0" marL="0">
+              <a:lnSpc>
+                <a:spcPts val="1300"/>
+              </a:lnSpc>
+              <a:buNone/>
+            </a:pPr>
+            <a:r>
+              <a:rPr lang="en-US" sz="900" dirty="0">
+                <a:solidFill>
+                  <a:srgbClr val="6A7D74"/>
+                </a:solidFill>
+                <a:latin typeface="Courier New" pitchFamily="34" charset="0"/>
+                <a:ea typeface="Courier New" pitchFamily="34" charset="-122"/>
+                <a:cs typeface="Courier New" pitchFamily="34" charset="-120"/>
+              </a:rPr>
+              <a:t>sem placa de vídeo, sem custo por fluxo, sem mensalidade que cresce com a escola</a:t>
+            </a:r>
+            <a:endParaRPr lang="en-US" sz="900" dirty="0"/>
+          </a:p>
+        </p:txBody>
+      </p:sp>
+      <p:sp>
+        <p:nvSpPr>
+          <p:cNvPr id="20" name="Text 18"/>
+          <p:cNvSpPr txBox="1"/>
+          <p:nvPr/>
+        </p:nvSpPr>
+        <p:spPr>
+          <a:xfrm>
+            <a:off x="6492240" y="3246120"/>
+            <a:ext cx="5029200" cy="320040"/>
+          </a:xfrm>
+          <a:prstGeom prst="rect">
+            <a:avLst/>
+          </a:prstGeom>
+          <a:noFill/>
+          <a:ln/>
+        </p:spPr>
+        <p:txBody>
+          <a:bodyPr wrap="square" lIns="0" tIns="0" rIns="0" bIns="0" rtlCol="0" anchor="ctr"/>
+          <a:lstStyle/>
+          <a:p>
+            <a:pPr indent="0" marL="0">
+              <a:buNone/>
+            </a:pPr>
+            <a:r>
+              <a:rPr lang="en-US" sz="1800" b="1" dirty="0">
+                <a:solidFill>
+                  <a:srgbClr val="EDF3EF"/>
+                </a:solidFill>
+                <a:latin typeface="Arial" pitchFamily="34" charset="0"/>
+                <a:ea typeface="Arial" pitchFamily="34" charset="-122"/>
+                <a:cs typeface="Arial" pitchFamily="34" charset="-120"/>
+              </a:rPr>
+              <a:t>Como entra no mercado</a:t>
+            </a:r>
+            <a:endParaRPr lang="en-US" sz="1800" dirty="0"/>
+          </a:p>
+        </p:txBody>
+      </p:sp>
+      <p:sp>
+        <p:nvSpPr>
+          <p:cNvPr id="21" name="Shape 19"/>
+          <p:cNvSpPr/>
+          <p:nvPr/>
+        </p:nvSpPr>
+        <p:spPr>
+          <a:xfrm>
+            <a:off x="6492240" y="3721608"/>
+            <a:ext cx="292608" cy="292608"/>
+          </a:xfrm>
+          <a:prstGeom prst="ellipse">
+            <a:avLst/>
           </a:prstGeom>
           <a:solidFill>
-            <a:srgbClr val="17211C"/>
+            <a:srgbClr val="0B100E"/>
           </a:solidFill>
           <a:ln w="12700">
             <a:solidFill>
@@ -3637,30 +3906,30 @@
       </p:sp>
       <p:sp>
         <p:nvSpPr>
-          <p:cNvPr id="5" name="Text 3"/>
-          <p:cNvSpPr txBox="1"/>
-          <p:nvPr/>
-        </p:nvSpPr>
-        <p:spPr>
-          <a:xfrm>
-            <a:off x="941832" y="3246120"/>
-            <a:ext cx="2926080" cy="228600"/>
-          </a:xfrm>
-          <a:prstGeom prst="rect">
-            <a:avLst/>
-          </a:prstGeom>
-          <a:noFill/>
-          <a:ln/>
-        </p:spPr>
-        <p:txBody>
-          <a:bodyPr wrap="square" lIns="0" tIns="0" rIns="0" bIns="0" rtlCol="0" anchor="ctr"/>
-          <a:lstStyle/>
-          <a:p>
-            <a:pPr indent="0" marL="0">
-              <a:buNone/>
-            </a:pPr>
-            <a:r>
-              <a:rPr lang="en-US" sz="950" spc="150" kern="0" dirty="0">
+          <p:cNvPr id="22" name="Text 20"/>
+          <p:cNvSpPr txBox="1"/>
+          <p:nvPr/>
+        </p:nvSpPr>
+        <p:spPr>
+          <a:xfrm>
+            <a:off x="6492240" y="3749040"/>
+            <a:ext cx="292608" cy="237744"/>
+          </a:xfrm>
+          <a:prstGeom prst="rect">
+            <a:avLst/>
+          </a:prstGeom>
+          <a:noFill/>
+          <a:ln/>
+        </p:spPr>
+        <p:txBody>
+          <a:bodyPr wrap="square" lIns="0" tIns="0" rIns="0" bIns="0" rtlCol="0" anchor="ctr"/>
+          <a:lstStyle/>
+          <a:p>
+            <a:pPr algn="ctr" indent="0" marL="0">
+              <a:buNone/>
+            </a:pPr>
+            <a:r>
+              <a:rPr lang="en-US" sz="1000" dirty="0">
                 <a:solidFill>
                   <a:srgbClr val="3FBF5A"/>
                 </a:solidFill>
@@ -3668,41 +3937,38 @@
                 <a:ea typeface="Courier New" pitchFamily="34" charset="-122"/>
                 <a:cs typeface="Courier New" pitchFamily="34" charset="-120"/>
               </a:rPr>
-              <a:t>O QUE FAZ ASSINAR</a:t>
-            </a:r>
-            <a:endParaRPr lang="en-US" sz="950" dirty="0"/>
-          </a:p>
-        </p:txBody>
-      </p:sp>
-      <p:sp>
-        <p:nvSpPr>
-          <p:cNvPr id="6" name="Text 4"/>
-          <p:cNvSpPr txBox="1"/>
-          <p:nvPr/>
-        </p:nvSpPr>
-        <p:spPr>
-          <a:xfrm>
-            <a:off x="941832" y="3520440"/>
-            <a:ext cx="2926080" cy="685800"/>
-          </a:xfrm>
-          <a:prstGeom prst="rect">
-            <a:avLst/>
-          </a:prstGeom>
-          <a:noFill/>
-          <a:ln/>
-        </p:spPr>
-        <p:txBody>
-          <a:bodyPr wrap="square" lIns="0" tIns="0" rIns="0" bIns="0" rtlCol="0" anchor="ctr"/>
-          <a:lstStyle/>
-          <a:p>
-            <a:pPr indent="0" marL="0">
-              <a:lnSpc>
-                <a:spcPts val="2100"/>
-              </a:lnSpc>
-              <a:buNone/>
-            </a:pPr>
-            <a:r>
-              <a:rPr lang="en-US" sz="1700" b="1" dirty="0">
+              <a:t>1</a:t>
+            </a:r>
+            <a:endParaRPr lang="en-US" sz="1000" dirty="0"/>
+          </a:p>
+        </p:txBody>
+      </p:sp>
+      <p:sp>
+        <p:nvSpPr>
+          <p:cNvPr id="23" name="Text 21"/>
+          <p:cNvSpPr txBox="1"/>
+          <p:nvPr/>
+        </p:nvSpPr>
+        <p:spPr>
+          <a:xfrm>
+            <a:off x="6949440" y="3703320"/>
+            <a:ext cx="4572000" cy="274320"/>
+          </a:xfrm>
+          <a:prstGeom prst="rect">
+            <a:avLst/>
+          </a:prstGeom>
+          <a:noFill/>
+          <a:ln/>
+        </p:spPr>
+        <p:txBody>
+          <a:bodyPr wrap="square" lIns="0" tIns="0" rIns="0" bIns="0" rtlCol="0" anchor="ctr"/>
+          <a:lstStyle/>
+          <a:p>
+            <a:pPr indent="0" marL="0">
+              <a:buNone/>
+            </a:pPr>
+            <a:r>
+              <a:rPr lang="en-US" sz="1400" b="1" dirty="0">
                 <a:solidFill>
                   <a:srgbClr val="EDF3EF"/>
                 </a:solidFill>
@@ -3710,61 +3976,41 @@
                 <a:ea typeface="Arial" pitchFamily="34" charset="-122"/>
                 <a:cs typeface="Arial" pitchFamily="34" charset="-120"/>
               </a:rPr>
-              <a:t>Risco jurídico,</a:t>
-            </a:r>
-            <a:endParaRPr lang="en-US" sz="1700" dirty="0"/>
-          </a:p>
+              <a:t>Uma escola, de graça</a:t>
+            </a:r>
+            <a:endParaRPr lang="en-US" sz="1400" dirty="0"/>
+          </a:p>
+        </p:txBody>
+      </p:sp>
+      <p:sp>
+        <p:nvSpPr>
+          <p:cNvPr id="24" name="Text 22"/>
+          <p:cNvSpPr txBox="1"/>
+          <p:nvPr/>
+        </p:nvSpPr>
+        <p:spPr>
+          <a:xfrm>
+            <a:off x="6949440" y="3977640"/>
+            <a:ext cx="4572000" cy="502920"/>
+          </a:xfrm>
+          <a:prstGeom prst="rect">
+            <a:avLst/>
+          </a:prstGeom>
+          <a:noFill/>
+          <a:ln/>
+        </p:spPr>
+        <p:txBody>
+          <a:bodyPr wrap="square" lIns="0" tIns="0" rIns="0" bIns="0" rtlCol="0" anchor="ctr"/>
+          <a:lstStyle/>
           <a:p>
             <a:pPr indent="0" marL="0">
               <a:lnSpc>
-                <a:spcPts val="2100"/>
+                <a:spcPts val="1400"/>
               </a:lnSpc>
               <a:buNone/>
             </a:pPr>
             <a:r>
-              <a:rPr lang="en-US" sz="1700" b="1" dirty="0">
-                <a:solidFill>
-                  <a:srgbClr val="EDF3EF"/>
-                </a:solidFill>
-                <a:latin typeface="Arial" pitchFamily="34" charset="0"/>
-                <a:ea typeface="Arial" pitchFamily="34" charset="-122"/>
-                <a:cs typeface="Arial" pitchFamily="34" charset="-120"/>
-              </a:rPr>
-              <a:t>não segurança</a:t>
-            </a:r>
-            <a:endParaRPr lang="en-US" sz="1700" dirty="0"/>
-          </a:p>
-        </p:txBody>
-      </p:sp>
-      <p:sp>
-        <p:nvSpPr>
-          <p:cNvPr id="7" name="Text 5"/>
-          <p:cNvSpPr txBox="1"/>
-          <p:nvPr/>
-        </p:nvSpPr>
-        <p:spPr>
-          <a:xfrm>
-            <a:off x="941832" y="4279392"/>
-            <a:ext cx="2926080" cy="1234440"/>
-          </a:xfrm>
-          <a:prstGeom prst="rect">
-            <a:avLst/>
-          </a:prstGeom>
-          <a:noFill/>
-          <a:ln/>
-        </p:spPr>
-        <p:txBody>
-          <a:bodyPr wrap="square" lIns="0" tIns="0" rIns="0" bIns="0" rtlCol="0" anchor="ctr"/>
-          <a:lstStyle/>
-          <a:p>
-            <a:pPr indent="0" marL="0">
-              <a:lnSpc>
-                <a:spcPts val="1600"/>
-              </a:lnSpc>
-              <a:buNone/>
-            </a:pPr>
-            <a:r>
-              <a:rPr lang="en-US" sz="1200" dirty="0">
+              <a:rPr lang="en-US" sz="1150" dirty="0">
                 <a:solidFill>
                   <a:srgbClr val="9DB0A6"/>
                 </a:solidFill>
@@ -3772,69 +4018,28 @@
                 <a:ea typeface="Calibri" pitchFamily="34" charset="-122"/>
                 <a:cs typeface="Calibri" pitchFamily="34" charset="-120"/>
               </a:rPr>
-              <a:t>O medo real de uma mantenedora não é perder uma queda. É o processo depois. Registro que denuncia adulteração, imagem com prazo, acesso rastreado e biometria com vencimento reduzem exposição.</a:t>
-            </a:r>
-            <a:endParaRPr lang="en-US" sz="1200" dirty="0"/>
-          </a:p>
-        </p:txBody>
-      </p:sp>
-      <p:sp>
-        <p:nvSpPr>
-          <p:cNvPr id="8" name="Text 6"/>
-          <p:cNvSpPr txBox="1"/>
-          <p:nvPr/>
-        </p:nvSpPr>
-        <p:spPr>
-          <a:xfrm>
-            <a:off x="941832" y="5440680"/>
-            <a:ext cx="2926080" cy="320040"/>
-          </a:xfrm>
-          <a:prstGeom prst="rect">
-            <a:avLst/>
-          </a:prstGeom>
-          <a:noFill/>
-          <a:ln/>
-        </p:spPr>
-        <p:txBody>
-          <a:bodyPr wrap="square" lIns="0" tIns="0" rIns="0" bIns="0" rtlCol="0" anchor="ctr"/>
-          <a:lstStyle/>
-          <a:p>
-            <a:pPr indent="0" marL="0">
-              <a:buNone/>
-            </a:pPr>
-            <a:r>
-              <a:rPr lang="en-US" sz="850" dirty="0">
-                <a:solidFill>
-                  <a:srgbClr val="6A7D74"/>
-                </a:solidFill>
-                <a:latin typeface="Courier New" pitchFamily="34" charset="0"/>
-                <a:ea typeface="Courier New" pitchFamily="34" charset="-122"/>
-                <a:cs typeface="Courier New" pitchFamily="34" charset="-120"/>
-              </a:rPr>
-              <a:t>LGPD, e a disputa judicial que vem depois</a:t>
-            </a:r>
-            <a:endParaRPr lang="en-US" sz="850" dirty="0"/>
-          </a:p>
-        </p:txBody>
-      </p:sp>
-      <p:sp>
-        <p:nvSpPr>
-          <p:cNvPr id="9" name="Shape 7"/>
+              <a:t>Em troca do dado que falta: quantos alertas por dia a coordenação aguenta, e quantos foram engano.</a:t>
+            </a:r>
+            <a:endParaRPr lang="en-US" sz="1150" dirty="0"/>
+          </a:p>
+        </p:txBody>
+      </p:sp>
+      <p:sp>
+        <p:nvSpPr>
+          <p:cNvPr id="25" name="Shape 23"/>
           <p:cNvSpPr/>
           <p:nvPr/>
         </p:nvSpPr>
         <p:spPr>
           <a:xfrm>
-            <a:off x="4370832" y="3017520"/>
-            <a:ext cx="3410712" cy="2788920"/>
-          </a:xfrm>
-          <a:prstGeom prst="roundRect">
-            <a:avLst>
-              <a:gd name="adj" fmla="val 3279"/>
-            </a:avLst>
+            <a:off x="6492240" y="4498848"/>
+            <a:ext cx="292608" cy="292608"/>
+          </a:xfrm>
+          <a:prstGeom prst="ellipse">
+            <a:avLst/>
           </a:prstGeom>
           <a:solidFill>
-            <a:srgbClr val="17211C"/>
+            <a:srgbClr val="0B100E"/>
           </a:solidFill>
           <a:ln w="12700">
             <a:solidFill>
@@ -3846,30 +4051,30 @@
       </p:sp>
       <p:sp>
         <p:nvSpPr>
-          <p:cNvPr id="10" name="Text 8"/>
-          <p:cNvSpPr txBox="1"/>
-          <p:nvPr/>
-        </p:nvSpPr>
-        <p:spPr>
-          <a:xfrm>
-            <a:off x="4626864" y="3246120"/>
-            <a:ext cx="2926080" cy="228600"/>
-          </a:xfrm>
-          <a:prstGeom prst="rect">
-            <a:avLst/>
-          </a:prstGeom>
-          <a:noFill/>
-          <a:ln/>
-        </p:spPr>
-        <p:txBody>
-          <a:bodyPr wrap="square" lIns="0" tIns="0" rIns="0" bIns="0" rtlCol="0" anchor="ctr"/>
-          <a:lstStyle/>
-          <a:p>
-            <a:pPr indent="0" marL="0">
-              <a:buNone/>
-            </a:pPr>
-            <a:r>
-              <a:rPr lang="en-US" sz="950" spc="150" kern="0" dirty="0">
+          <p:cNvPr id="26" name="Text 24"/>
+          <p:cNvSpPr txBox="1"/>
+          <p:nvPr/>
+        </p:nvSpPr>
+        <p:spPr>
+          <a:xfrm>
+            <a:off x="6492240" y="4526280"/>
+            <a:ext cx="292608" cy="237744"/>
+          </a:xfrm>
+          <a:prstGeom prst="rect">
+            <a:avLst/>
+          </a:prstGeom>
+          <a:noFill/>
+          <a:ln/>
+        </p:spPr>
+        <p:txBody>
+          <a:bodyPr wrap="square" lIns="0" tIns="0" rIns="0" bIns="0" rtlCol="0" anchor="ctr"/>
+          <a:lstStyle/>
+          <a:p>
+            <a:pPr algn="ctr" indent="0" marL="0">
+              <a:buNone/>
+            </a:pPr>
+            <a:r>
+              <a:rPr lang="en-US" sz="1000" dirty="0">
                 <a:solidFill>
                   <a:srgbClr val="3FBF5A"/>
                 </a:solidFill>
@@ -3877,41 +4082,38 @@
                 <a:ea typeface="Courier New" pitchFamily="34" charset="-122"/>
                 <a:cs typeface="Courier New" pitchFamily="34" charset="-120"/>
               </a:rPr>
-              <a:t>O QUE SALVA</a:t>
-            </a:r>
-            <a:endParaRPr lang="en-US" sz="950" dirty="0"/>
-          </a:p>
-        </p:txBody>
-      </p:sp>
-      <p:sp>
-        <p:nvSpPr>
-          <p:cNvPr id="11" name="Text 9"/>
-          <p:cNvSpPr txBox="1"/>
-          <p:nvPr/>
-        </p:nvSpPr>
-        <p:spPr>
-          <a:xfrm>
-            <a:off x="4626864" y="3520440"/>
-            <a:ext cx="2926080" cy="685800"/>
-          </a:xfrm>
-          <a:prstGeom prst="rect">
-            <a:avLst/>
-          </a:prstGeom>
-          <a:noFill/>
-          <a:ln/>
-        </p:spPr>
-        <p:txBody>
-          <a:bodyPr wrap="square" lIns="0" tIns="0" rIns="0" bIns="0" rtlCol="0" anchor="ctr"/>
-          <a:lstStyle/>
-          <a:p>
-            <a:pPr indent="0" marL="0">
-              <a:lnSpc>
-                <a:spcPts val="2100"/>
-              </a:lnSpc>
-              <a:buNone/>
-            </a:pPr>
-            <a:r>
-              <a:rPr lang="en-US" sz="1700" b="1" dirty="0">
+              <a:t>2</a:t>
+            </a:r>
+            <a:endParaRPr lang="en-US" sz="1000" dirty="0"/>
+          </a:p>
+        </p:txBody>
+      </p:sp>
+      <p:sp>
+        <p:nvSpPr>
+          <p:cNvPr id="27" name="Text 25"/>
+          <p:cNvSpPr txBox="1"/>
+          <p:nvPr/>
+        </p:nvSpPr>
+        <p:spPr>
+          <a:xfrm>
+            <a:off x="6949440" y="4480560"/>
+            <a:ext cx="4572000" cy="274320"/>
+          </a:xfrm>
+          <a:prstGeom prst="rect">
+            <a:avLst/>
+          </a:prstGeom>
+          <a:noFill/>
+          <a:ln/>
+        </p:spPr>
+        <p:txBody>
+          <a:bodyPr wrap="square" lIns="0" tIns="0" rIns="0" bIns="0" rtlCol="0" anchor="ctr"/>
+          <a:lstStyle/>
+          <a:p>
+            <a:pPr indent="0" marL="0">
+              <a:buNone/>
+            </a:pPr>
+            <a:r>
+              <a:rPr lang="en-US" sz="1400" b="1" dirty="0">
                 <a:solidFill>
                   <a:srgbClr val="EDF3EF"/>
                 </a:solidFill>
@@ -3919,22 +4121,22 @@
                 <a:ea typeface="Arial" pitchFamily="34" charset="-122"/>
                 <a:cs typeface="Arial" pitchFamily="34" charset="-120"/>
               </a:rPr>
-              <a:t>Custo evitado</a:t>
-            </a:r>
-            <a:endParaRPr lang="en-US" sz="1700" dirty="0"/>
-          </a:p>
-        </p:txBody>
-      </p:sp>
-      <p:sp>
-        <p:nvSpPr>
-          <p:cNvPr id="12" name="Text 10"/>
-          <p:cNvSpPr txBox="1"/>
-          <p:nvPr/>
-        </p:nvSpPr>
-        <p:spPr>
-          <a:xfrm>
-            <a:off x="4626864" y="4279392"/>
-            <a:ext cx="2926080" cy="1234440"/>
+              <a:t>O piloto vira carta</a:t>
+            </a:r>
+            <a:endParaRPr lang="en-US" sz="1400" dirty="0"/>
+          </a:p>
+        </p:txBody>
+      </p:sp>
+      <p:sp>
+        <p:nvSpPr>
+          <p:cNvPr id="28" name="Text 26"/>
+          <p:cNvSpPr txBox="1"/>
+          <p:nvPr/>
+        </p:nvSpPr>
+        <p:spPr>
+          <a:xfrm>
+            <a:off x="6949440" y="4754880"/>
+            <a:ext cx="4572000" cy="502920"/>
           </a:xfrm>
           <a:prstGeom prst="rect">
             <a:avLst/>
@@ -3948,12 +4150,12 @@
           <a:p>
             <a:pPr indent="0" marL="0">
               <a:lnSpc>
-                <a:spcPts val="1600"/>
+                <a:spcPts val="1400"/>
               </a:lnSpc>
               <a:buNone/>
             </a:pPr>
             <a:r>
-              <a:rPr lang="en-US" sz="1200" dirty="0">
+              <a:rPr lang="en-US" sz="1150" dirty="0">
                 <a:solidFill>
                   <a:srgbClr val="9DB0A6"/>
                 </a:solidFill>
@@ -3961,69 +4163,28 @@
                 <a:ea typeface="Calibri" pitchFamily="34" charset="-122"/>
                 <a:cs typeface="Calibri" pitchFamily="34" charset="-120"/>
               </a:rPr>
-              <a:t>Uma câmera comum só serve depois do fato. O valor está em chegar antes: socorro em segundos em vez de minutos, e uma queda vista no instante em que acontece.</a:t>
-            </a:r>
-            <a:endParaRPr lang="en-US" sz="1200" dirty="0"/>
-          </a:p>
-        </p:txBody>
-      </p:sp>
-      <p:sp>
-        <p:nvSpPr>
-          <p:cNvPr id="13" name="Text 11"/>
-          <p:cNvSpPr txBox="1"/>
-          <p:nvPr/>
-        </p:nvSpPr>
-        <p:spPr>
-          <a:xfrm>
-            <a:off x="4626864" y="5440680"/>
-            <a:ext cx="2926080" cy="320040"/>
-          </a:xfrm>
-          <a:prstGeom prst="rect">
-            <a:avLst/>
-          </a:prstGeom>
-          <a:noFill/>
-          <a:ln/>
-        </p:spPr>
-        <p:txBody>
-          <a:bodyPr wrap="square" lIns="0" tIns="0" rIns="0" bIns="0" rtlCol="0" anchor="ctr"/>
-          <a:lstStyle/>
-          <a:p>
-            <a:pPr indent="0" marL="0">
-              <a:buNone/>
-            </a:pPr>
-            <a:r>
-              <a:rPr lang="en-US" sz="850" dirty="0">
-                <a:solidFill>
-                  <a:srgbClr val="6A7D74"/>
-                </a:solidFill>
-                <a:latin typeface="Courier New" pitchFamily="34" charset="0"/>
-                <a:ea typeface="Courier New" pitchFamily="34" charset="-122"/>
-                <a:cs typeface="Courier New" pitchFamily="34" charset="-120"/>
-              </a:rPr>
-              <a:t>o alerta sai antes de alguém reclamar</a:t>
-            </a:r>
-            <a:endParaRPr lang="en-US" sz="850" dirty="0"/>
-          </a:p>
-        </p:txBody>
-      </p:sp>
-      <p:sp>
-        <p:nvSpPr>
-          <p:cNvPr id="14" name="Shape 12"/>
+              <a:t>Um depoimento da coordenação abre a porta da segunda escola melhor que qualquer slide.</a:t>
+            </a:r>
+            <a:endParaRPr lang="en-US" sz="1150" dirty="0"/>
+          </a:p>
+        </p:txBody>
+      </p:sp>
+      <p:sp>
+        <p:nvSpPr>
+          <p:cNvPr id="29" name="Shape 27"/>
           <p:cNvSpPr/>
           <p:nvPr/>
         </p:nvSpPr>
         <p:spPr>
           <a:xfrm>
-            <a:off x="8055864" y="3017520"/>
-            <a:ext cx="3410712" cy="2788920"/>
-          </a:xfrm>
-          <a:prstGeom prst="roundRect">
-            <a:avLst>
-              <a:gd name="adj" fmla="val 3279"/>
-            </a:avLst>
+            <a:off x="6492240" y="5276088"/>
+            <a:ext cx="292608" cy="292608"/>
+          </a:xfrm>
+          <a:prstGeom prst="ellipse">
+            <a:avLst/>
           </a:prstGeom>
           <a:solidFill>
-            <a:srgbClr val="17211C"/>
+            <a:srgbClr val="0B100E"/>
           </a:solidFill>
           <a:ln w="12700">
             <a:solidFill>
@@ -4035,30 +4196,30 @@
       </p:sp>
       <p:sp>
         <p:nvSpPr>
-          <p:cNvPr id="15" name="Text 13"/>
-          <p:cNvSpPr txBox="1"/>
-          <p:nvPr/>
-        </p:nvSpPr>
-        <p:spPr>
-          <a:xfrm>
-            <a:off x="8311896" y="3246120"/>
-            <a:ext cx="2926080" cy="228600"/>
-          </a:xfrm>
-          <a:prstGeom prst="rect">
-            <a:avLst/>
-          </a:prstGeom>
-          <a:noFill/>
-          <a:ln/>
-        </p:spPr>
-        <p:txBody>
-          <a:bodyPr wrap="square" lIns="0" tIns="0" rIns="0" bIns="0" rtlCol="0" anchor="ctr"/>
-          <a:lstStyle/>
-          <a:p>
-            <a:pPr indent="0" marL="0">
-              <a:buNone/>
-            </a:pPr>
-            <a:r>
-              <a:rPr lang="en-US" sz="950" spc="150" kern="0" dirty="0">
+          <p:cNvPr id="30" name="Text 28"/>
+          <p:cNvSpPr txBox="1"/>
+          <p:nvPr/>
+        </p:nvSpPr>
+        <p:spPr>
+          <a:xfrm>
+            <a:off x="6492240" y="5303520"/>
+            <a:ext cx="292608" cy="237744"/>
+          </a:xfrm>
+          <a:prstGeom prst="rect">
+            <a:avLst/>
+          </a:prstGeom>
+          <a:noFill/>
+          <a:ln/>
+        </p:spPr>
+        <p:txBody>
+          <a:bodyPr wrap="square" lIns="0" tIns="0" rIns="0" bIns="0" rtlCol="0" anchor="ctr"/>
+          <a:lstStyle/>
+          <a:p>
+            <a:pPr algn="ctr" indent="0" marL="0">
+              <a:buNone/>
+            </a:pPr>
+            <a:r>
+              <a:rPr lang="en-US" sz="1000" dirty="0">
                 <a:solidFill>
                   <a:srgbClr val="3FBF5A"/>
                 </a:solidFill>
@@ -4066,41 +4227,38 @@
                 <a:ea typeface="Courier New" pitchFamily="34" charset="-122"/>
                 <a:cs typeface="Courier New" pitchFamily="34" charset="-120"/>
               </a:rPr>
-              <a:t>O QUE SUBSTITUI</a:t>
-            </a:r>
-            <a:endParaRPr lang="en-US" sz="950" dirty="0"/>
-          </a:p>
-        </p:txBody>
-      </p:sp>
-      <p:sp>
-        <p:nvSpPr>
-          <p:cNvPr id="16" name="Text 14"/>
-          <p:cNvSpPr txBox="1"/>
-          <p:nvPr/>
-        </p:nvSpPr>
-        <p:spPr>
-          <a:xfrm>
-            <a:off x="8311896" y="3520440"/>
-            <a:ext cx="2926080" cy="685800"/>
-          </a:xfrm>
-          <a:prstGeom prst="rect">
-            <a:avLst/>
-          </a:prstGeom>
-          <a:noFill/>
-          <a:ln/>
-        </p:spPr>
-        <p:txBody>
-          <a:bodyPr wrap="square" lIns="0" tIns="0" rIns="0" bIns="0" rtlCol="0" anchor="ctr"/>
-          <a:lstStyle/>
-          <a:p>
-            <a:pPr indent="0" marL="0">
-              <a:lnSpc>
-                <a:spcPts val="2100"/>
-              </a:lnSpc>
-              <a:buNone/>
-            </a:pPr>
-            <a:r>
-              <a:rPr lang="en-US" sz="1700" b="1" dirty="0">
+              <a:t>3</a:t>
+            </a:r>
+            <a:endParaRPr lang="en-US" sz="1000" dirty="0"/>
+          </a:p>
+        </p:txBody>
+      </p:sp>
+      <p:sp>
+        <p:nvSpPr>
+          <p:cNvPr id="31" name="Text 29"/>
+          <p:cNvSpPr txBox="1"/>
+          <p:nvPr/>
+        </p:nvSpPr>
+        <p:spPr>
+          <a:xfrm>
+            <a:off x="6949440" y="5257800"/>
+            <a:ext cx="4572000" cy="274320"/>
+          </a:xfrm>
+          <a:prstGeom prst="rect">
+            <a:avLst/>
+          </a:prstGeom>
+          <a:noFill/>
+          <a:ln/>
+        </p:spPr>
+        <p:txBody>
+          <a:bodyPr wrap="square" lIns="0" tIns="0" rIns="0" bIns="0" rtlCol="0" anchor="ctr"/>
+          <a:lstStyle/>
+          <a:p>
+            <a:pPr indent="0" marL="0">
+              <a:buNone/>
+            </a:pPr>
+            <a:r>
+              <a:rPr lang="en-US" sz="1400" b="1" dirty="0">
                 <a:solidFill>
                   <a:srgbClr val="EDF3EF"/>
                 </a:solidFill>
@@ -4108,22 +4266,22 @@
                 <a:ea typeface="Arial" pitchFamily="34" charset="-122"/>
                 <a:cs typeface="Arial" pitchFamily="34" charset="-120"/>
               </a:rPr>
-              <a:t>Licença de nuvem</a:t>
-            </a:r>
-            <a:endParaRPr lang="en-US" sz="1700" dirty="0"/>
-          </a:p>
-        </p:txBody>
-      </p:sp>
-      <p:sp>
-        <p:nvSpPr>
-          <p:cNvPr id="17" name="Text 15"/>
-          <p:cNvSpPr txBox="1"/>
-          <p:nvPr/>
-        </p:nvSpPr>
-        <p:spPr>
-          <a:xfrm>
-            <a:off x="8311896" y="4279392"/>
-            <a:ext cx="2926080" cy="1234440"/>
+              <a:t>Vender para a rede</a:t>
+            </a:r>
+            <a:endParaRPr lang="en-US" sz="1400" dirty="0"/>
+          </a:p>
+        </p:txBody>
+      </p:sp>
+      <p:sp>
+        <p:nvSpPr>
+          <p:cNvPr id="32" name="Text 30"/>
+          <p:cNvSpPr txBox="1"/>
+          <p:nvPr/>
+        </p:nvSpPr>
+        <p:spPr>
+          <a:xfrm>
+            <a:off x="6949440" y="5532120"/>
+            <a:ext cx="4572000" cy="502920"/>
           </a:xfrm>
           <a:prstGeom prst="rect">
             <a:avLst/>
@@ -4137,12 +4295,12 @@
           <a:p>
             <a:pPr indent="0" marL="0">
               <a:lnSpc>
-                <a:spcPts val="1600"/>
+                <a:spcPts val="1400"/>
               </a:lnSpc>
               <a:buNone/>
             </a:pPr>
             <a:r>
-              <a:rPr lang="en-US" sz="1200" dirty="0">
+              <a:rPr lang="en-US" sz="1150" dirty="0">
                 <a:solidFill>
                   <a:srgbClr val="9DB0A6"/>
                 </a:solidFill>
@@ -4150,38 +4308,41 @@
                 <a:ea typeface="Calibri" pitchFamily="34" charset="-122"/>
                 <a:cs typeface="Calibri" pitchFamily="34" charset="-120"/>
               </a:rPr>
-              <a:t>Se a escola já paga mensalidade por câmera para algum sistema de nuvem, o nosso número entra no lugar dele. E, ao contrário do dele, dá para conferir de onde sai.</a:t>
-            </a:r>
-            <a:endParaRPr lang="en-US" sz="1200" dirty="0"/>
-          </a:p>
-        </p:txBody>
-      </p:sp>
-      <p:sp>
-        <p:nvSpPr>
-          <p:cNvPr id="18" name="Text 16"/>
-          <p:cNvSpPr txBox="1"/>
-          <p:nvPr/>
-        </p:nvSpPr>
-        <p:spPr>
-          <a:xfrm>
-            <a:off x="8311896" y="5440680"/>
-            <a:ext cx="2926080" cy="320040"/>
-          </a:xfrm>
-          <a:prstGeom prst="rect">
-            <a:avLst/>
-          </a:prstGeom>
-          <a:noFill/>
-          <a:ln/>
-        </p:spPr>
-        <p:txBody>
-          <a:bodyPr wrap="square" lIns="0" tIns="0" rIns="0" bIns="0" rtlCol="0" anchor="ctr"/>
-          <a:lstStyle/>
-          <a:p>
-            <a:pPr indent="0" marL="0">
-              <a:buNone/>
-            </a:pPr>
-            <a:r>
-              <a:rPr lang="en-US" sz="850" dirty="0">
+              <a:t>Grupo educacional tem dezenas de unidades e um decisor só. É para ele que custo marginal quase zero é irresistível.</a:t>
+            </a:r>
+            <a:endParaRPr lang="en-US" sz="1150" dirty="0"/>
+          </a:p>
+        </p:txBody>
+      </p:sp>
+      <p:sp>
+        <p:nvSpPr>
+          <p:cNvPr id="33" name="Text 31"/>
+          <p:cNvSpPr txBox="1"/>
+          <p:nvPr/>
+        </p:nvSpPr>
+        <p:spPr>
+          <a:xfrm>
+            <a:off x="6492240" y="5687568"/>
+            <a:ext cx="5029200" cy="365760"/>
+          </a:xfrm>
+          <a:prstGeom prst="rect">
+            <a:avLst/>
+          </a:prstGeom>
+          <a:noFill/>
+          <a:ln/>
+        </p:spPr>
+        <p:txBody>
+          <a:bodyPr wrap="square" lIns="0" tIns="0" rIns="0" bIns="0" rtlCol="0" anchor="ctr"/>
+          <a:lstStyle/>
+          <a:p>
+            <a:pPr indent="0" marL="0">
+              <a:lnSpc>
+                <a:spcPts val="1300"/>
+              </a:lnSpc>
+              <a:buNone/>
+            </a:pPr>
+            <a:r>
+              <a:rPr lang="en-US" sz="900" dirty="0">
                 <a:solidFill>
                   <a:srgbClr val="6A7D74"/>
                 </a:solidFill>
@@ -4189,15 +4350,15 @@
                 <a:ea typeface="Courier New" pitchFamily="34" charset="-122"/>
                 <a:cs typeface="Courier New" pitchFamily="34" charset="-120"/>
               </a:rPr>
-              <a:t>comparável, e verificável linha a linha</a:t>
-            </a:r>
-            <a:endParaRPr lang="en-US" sz="850" dirty="0"/>
-          </a:p>
-        </p:txBody>
-      </p:sp>
-      <p:sp>
-        <p:nvSpPr>
-          <p:cNvPr id="20" name="Text 17"/>
+              <a:t>Modelo: assinatura por escola, não por câmera. Expandir deixa de ser uma nova decisão de compra.</a:t>
+            </a:r>
+            <a:endParaRPr lang="en-US" sz="900" dirty="0"/>
+          </a:p>
+        </p:txBody>
+      </p:sp>
+      <p:sp>
+        <p:nvSpPr>
+          <p:cNvPr id="35" name="Text 32"/>
           <p:cNvSpPr txBox="1"/>
           <p:nvPr/>
         </p:nvSpPr>
@@ -4228,7 +4389,7 @@
                 <a:ea typeface="Courier New" pitchFamily="34" charset="-122"/>
                 <a:cs typeface="Courier New" pitchFamily="34" charset="-120"/>
               </a:rPr>
-              <a:t>Auditix AI  ·  SVATech  ·  grupo 11</a:t>
+              <a:t>Auditix IA  ·  grupo 11</a:t>
             </a:r>
             <a:endParaRPr lang="en-US" sz="900" dirty="0"/>
           </a:p>
@@ -4236,7 +4397,7 @@
       </p:sp>
       <p:sp>
         <p:nvSpPr>
-          <p:cNvPr id="21" name="Text 18"/>
+          <p:cNvPr id="36" name="Text 33"/>
           <p:cNvSpPr txBox="1"/>
           <p:nvPr/>
         </p:nvSpPr>
@@ -4332,13 +4493,13 @@
             <a:r>
               <a:rPr lang="en-US" sz="1100" spc="200" kern="0" dirty="0">
                 <a:solidFill>
-                  <a:srgbClr val="3FBF5A"/>
+                  <a:srgbClr val="E4572E"/>
                 </a:solidFill>
                 <a:latin typeface="Courier New" pitchFamily="34" charset="0"/>
                 <a:ea typeface="Courier New" pitchFamily="34" charset="-122"/>
                 <a:cs typeface="Courier New" pitchFamily="34" charset="-120"/>
               </a:rPr>
-              <a:t>VALOR ECONÔMICO E ENTRADA NO MERCADO</a:t>
+              <a:t>HONESTIDADE INTELECTUAL</a:t>
             </a:r>
             <a:endParaRPr lang="en-US" sz="1100" dirty="0"/>
           </a:p>
@@ -4380,7 +4541,7 @@
                 <a:ea typeface="Arial" pitchFamily="34" charset="-122"/>
                 <a:cs typeface="Arial" pitchFamily="34" charset="-120"/>
               </a:rPr>
-              <a:t>O custo de cobrir mais</a:t>
+              <a:t>O que ainda não medimos,</a:t>
             </a:r>
             <a:endParaRPr lang="en-US" sz="3600" dirty="0"/>
           </a:p>
@@ -4400,7 +4561,7 @@
                 <a:ea typeface="Arial" pitchFamily="34" charset="-122"/>
                 <a:cs typeface="Arial" pitchFamily="34" charset="-120"/>
               </a:rPr>
-              <a:t>uma sala é uma câmera.</a:t>
+              <a:t>e não vamos inventar.</a:t>
             </a:r>
             <a:endParaRPr lang="en-US" sz="3600" dirty="0"/>
           </a:p>
@@ -4414,7 +4575,7 @@
         </p:nvSpPr>
         <p:spPr>
           <a:xfrm>
-            <a:off x="685800" y="2514600"/>
+            <a:off x="685800" y="2560320"/>
             <a:ext cx="10515600" cy="731520"/>
           </a:xfrm>
           <a:prstGeom prst="rect">
@@ -4442,7 +4603,7 @@
                 <a:ea typeface="Calibri" pitchFamily="34" charset="-122"/>
                 <a:cs typeface="Calibri" pitchFamily="34" charset="-120"/>
               </a:rPr>
-              <a:t>O concorrente cobra licença mensal POR CÂMERA, porque o vídeo dele roda na nuvem dele. O nosso roda na borda, e o que sobe para a nuvem é uma linha de texto.</a:t>
+              <a:t>Quatro coisas que decidem se isto é negócio e se a detecção se sustenta, e que nenhuma planilha nossa pode responder.</a:t>
             </a:r>
             <a:endParaRPr lang="en-US" sz="1500" dirty="0"/>
           </a:p>
@@ -4450,564 +4611,19 @@
       </p:sp>
       <p:sp>
         <p:nvSpPr>
-          <p:cNvPr id="5" name="Text 3"/>
-          <p:cNvSpPr txBox="1"/>
-          <p:nvPr/>
-        </p:nvSpPr>
-        <p:spPr>
-          <a:xfrm>
-            <a:off x="685800" y="3246120"/>
-            <a:ext cx="5120640" cy="320040"/>
-          </a:xfrm>
-          <a:prstGeom prst="rect">
-            <a:avLst/>
-          </a:prstGeom>
-          <a:noFill/>
-          <a:ln/>
-        </p:spPr>
-        <p:txBody>
-          <a:bodyPr wrap="square" lIns="0" tIns="0" rIns="0" bIns="0" rtlCol="0" anchor="ctr"/>
-          <a:lstStyle/>
-          <a:p>
-            <a:pPr indent="0" marL="0">
-              <a:buNone/>
-            </a:pPr>
-            <a:r>
-              <a:rPr lang="en-US" sz="1800" b="1" dirty="0">
-                <a:solidFill>
-                  <a:srgbClr val="EDF3EF"/>
-                </a:solidFill>
-                <a:latin typeface="Arial" pitchFamily="34" charset="0"/>
-                <a:ea typeface="Arial" pitchFamily="34" charset="-122"/>
-                <a:cs typeface="Arial" pitchFamily="34" charset="-120"/>
-              </a:rPr>
-              <a:t>O que custa</a:t>
-            </a:r>
-            <a:endParaRPr lang="en-US" sz="1800" dirty="0"/>
-          </a:p>
-        </p:txBody>
-      </p:sp>
-      <p:sp>
-        <p:nvSpPr>
-          <p:cNvPr id="6" name="Shape 4"/>
+          <p:cNvPr id="5" name="Shape 3"/>
           <p:cNvSpPr/>
           <p:nvPr/>
         </p:nvSpPr>
         <p:spPr>
           <a:xfrm>
-            <a:off x="685800" y="3703320"/>
-            <a:ext cx="5120640" cy="0"/>
-          </a:xfrm>
-          <a:prstGeom prst="line">
-            <a:avLst/>
-          </a:prstGeom>
-          <a:noFill/>
-          <a:ln w="12700">
-            <a:solidFill>
-              <a:srgbClr val="24322B"/>
-            </a:solidFill>
-            <a:prstDash val="solid"/>
-          </a:ln>
-        </p:spPr>
-      </p:sp>
-      <p:sp>
-        <p:nvSpPr>
-          <p:cNvPr id="7" name="Text 5"/>
-          <p:cNvSpPr txBox="1"/>
-          <p:nvPr/>
-        </p:nvSpPr>
-        <p:spPr>
-          <a:xfrm>
-            <a:off x="685800" y="3785616"/>
-            <a:ext cx="3017520" cy="320040"/>
-          </a:xfrm>
-          <a:prstGeom prst="rect">
-            <a:avLst/>
-          </a:prstGeom>
-          <a:noFill/>
-          <a:ln/>
-        </p:spPr>
-        <p:txBody>
-          <a:bodyPr wrap="square" lIns="0" tIns="0" rIns="0" bIns="0" rtlCol="0" anchor="ctr"/>
-          <a:lstStyle/>
-          <a:p>
-            <a:pPr indent="0" marL="0">
-              <a:buNone/>
-            </a:pPr>
-            <a:r>
-              <a:rPr lang="en-US" sz="1300" b="1" dirty="0">
-                <a:solidFill>
-                  <a:srgbClr val="EDF3EF"/>
-                </a:solidFill>
-                <a:latin typeface="Arial" pitchFamily="34" charset="0"/>
-                <a:ea typeface="Arial" pitchFamily="34" charset="-122"/>
-                <a:cs typeface="Arial" pitchFamily="34" charset="-120"/>
-              </a:rPr>
-              <a:t>Câmera IP, por sala</a:t>
-            </a:r>
-            <a:endParaRPr lang="en-US" sz="1300" dirty="0"/>
-          </a:p>
-        </p:txBody>
-      </p:sp>
-      <p:sp>
-        <p:nvSpPr>
-          <p:cNvPr id="8" name="Text 6"/>
-          <p:cNvSpPr txBox="1"/>
-          <p:nvPr/>
-        </p:nvSpPr>
-        <p:spPr>
-          <a:xfrm>
-            <a:off x="3703320" y="3803904"/>
-            <a:ext cx="2103120" cy="292608"/>
-          </a:xfrm>
-          <a:prstGeom prst="rect">
-            <a:avLst/>
-          </a:prstGeom>
-          <a:noFill/>
-          <a:ln/>
-        </p:spPr>
-        <p:txBody>
-          <a:bodyPr wrap="square" lIns="0" tIns="0" rIns="0" bIns="0" rtlCol="0" anchor="ctr"/>
-          <a:lstStyle/>
-          <a:p>
-            <a:pPr algn="r" indent="0" marL="0">
-              <a:buNone/>
-            </a:pPr>
-            <a:r>
-              <a:rPr lang="en-US" sz="1100" dirty="0">
-                <a:solidFill>
-                  <a:srgbClr val="9DB0A6"/>
-                </a:solidFill>
-                <a:latin typeface="Courier New" pitchFamily="34" charset="0"/>
-                <a:ea typeface="Courier New" pitchFamily="34" charset="-122"/>
-                <a:cs typeface="Courier New" pitchFamily="34" charset="-120"/>
-              </a:rPr>
-              <a:t>R$ 200 a R$ 680</a:t>
-            </a:r>
-            <a:endParaRPr lang="en-US" sz="1100" dirty="0"/>
-          </a:p>
-        </p:txBody>
-      </p:sp>
-      <p:sp>
-        <p:nvSpPr>
-          <p:cNvPr id="9" name="Shape 7"/>
-          <p:cNvSpPr/>
-          <p:nvPr/>
-        </p:nvSpPr>
-        <p:spPr>
-          <a:xfrm>
-            <a:off x="685800" y="4178808"/>
-            <a:ext cx="5120640" cy="0"/>
-          </a:xfrm>
-          <a:prstGeom prst="line">
-            <a:avLst/>
-          </a:prstGeom>
-          <a:noFill/>
-          <a:ln w="12700">
-            <a:solidFill>
-              <a:srgbClr val="24322B"/>
-            </a:solidFill>
-            <a:prstDash val="solid"/>
-          </a:ln>
-        </p:spPr>
-      </p:sp>
-      <p:sp>
-        <p:nvSpPr>
-          <p:cNvPr id="10" name="Text 8"/>
-          <p:cNvSpPr txBox="1"/>
-          <p:nvPr/>
-        </p:nvSpPr>
-        <p:spPr>
-          <a:xfrm>
-            <a:off x="685800" y="4261104"/>
-            <a:ext cx="3017520" cy="320040"/>
-          </a:xfrm>
-          <a:prstGeom prst="rect">
-            <a:avLst/>
-          </a:prstGeom>
-          <a:noFill/>
-          <a:ln/>
-        </p:spPr>
-        <p:txBody>
-          <a:bodyPr wrap="square" lIns="0" tIns="0" rIns="0" bIns="0" rtlCol="0" anchor="ctr"/>
-          <a:lstStyle/>
-          <a:p>
-            <a:pPr indent="0" marL="0">
-              <a:buNone/>
-            </a:pPr>
-            <a:r>
-              <a:rPr lang="en-US" sz="1300" b="1" dirty="0">
-                <a:solidFill>
-                  <a:srgbClr val="EDF3EF"/>
-                </a:solidFill>
-                <a:latin typeface="Arial" pitchFamily="34" charset="0"/>
-                <a:ea typeface="Arial" pitchFamily="34" charset="-122"/>
-                <a:cs typeface="Arial" pitchFamily="34" charset="-120"/>
-              </a:rPr>
-              <a:t>Servidor</a:t>
-            </a:r>
-            <a:endParaRPr lang="en-US" sz="1300" dirty="0"/>
-          </a:p>
-        </p:txBody>
-      </p:sp>
-      <p:sp>
-        <p:nvSpPr>
-          <p:cNvPr id="11" name="Text 9"/>
-          <p:cNvSpPr txBox="1"/>
-          <p:nvPr/>
-        </p:nvSpPr>
-        <p:spPr>
-          <a:xfrm>
-            <a:off x="3703320" y="4279392"/>
-            <a:ext cx="2103120" cy="292608"/>
-          </a:xfrm>
-          <a:prstGeom prst="rect">
-            <a:avLst/>
-          </a:prstGeom>
-          <a:noFill/>
-          <a:ln/>
-        </p:spPr>
-        <p:txBody>
-          <a:bodyPr wrap="square" lIns="0" tIns="0" rIns="0" bIns="0" rtlCol="0" anchor="ctr"/>
-          <a:lstStyle/>
-          <a:p>
-            <a:pPr algn="r" indent="0" marL="0">
-              <a:buNone/>
-            </a:pPr>
-            <a:r>
-              <a:rPr lang="en-US" sz="1100" dirty="0">
-                <a:solidFill>
-                  <a:srgbClr val="9DB0A6"/>
-                </a:solidFill>
-                <a:latin typeface="Courier New" pitchFamily="34" charset="0"/>
-                <a:ea typeface="Courier New" pitchFamily="34" charset="-122"/>
-                <a:cs typeface="Courier New" pitchFamily="34" charset="-120"/>
-              </a:rPr>
-              <a:t>1 PC comum por escola</a:t>
-            </a:r>
-            <a:endParaRPr lang="en-US" sz="1100" dirty="0"/>
-          </a:p>
-        </p:txBody>
-      </p:sp>
-      <p:sp>
-        <p:nvSpPr>
-          <p:cNvPr id="12" name="Shape 10"/>
-          <p:cNvSpPr/>
-          <p:nvPr/>
-        </p:nvSpPr>
-        <p:spPr>
-          <a:xfrm>
-            <a:off x="685800" y="4654296"/>
-            <a:ext cx="5120640" cy="0"/>
-          </a:xfrm>
-          <a:prstGeom prst="line">
-            <a:avLst/>
-          </a:prstGeom>
-          <a:noFill/>
-          <a:ln w="12700">
-            <a:solidFill>
-              <a:srgbClr val="24322B"/>
-            </a:solidFill>
-            <a:prstDash val="solid"/>
-          </a:ln>
-        </p:spPr>
-      </p:sp>
-      <p:sp>
-        <p:nvSpPr>
-          <p:cNvPr id="13" name="Text 11"/>
-          <p:cNvSpPr txBox="1"/>
-          <p:nvPr/>
-        </p:nvSpPr>
-        <p:spPr>
-          <a:xfrm>
-            <a:off x="685800" y="4736592"/>
-            <a:ext cx="3017520" cy="320040"/>
-          </a:xfrm>
-          <a:prstGeom prst="rect">
-            <a:avLst/>
-          </a:prstGeom>
-          <a:noFill/>
-          <a:ln/>
-        </p:spPr>
-        <p:txBody>
-          <a:bodyPr wrap="square" lIns="0" tIns="0" rIns="0" bIns="0" rtlCol="0" anchor="ctr"/>
-          <a:lstStyle/>
-          <a:p>
-            <a:pPr indent="0" marL="0">
-              <a:buNone/>
-            </a:pPr>
-            <a:r>
-              <a:rPr lang="en-US" sz="1300" b="1" dirty="0">
-                <a:solidFill>
-                  <a:srgbClr val="EDF3EF"/>
-                </a:solidFill>
-                <a:latin typeface="Arial" pitchFamily="34" charset="0"/>
-                <a:ea typeface="Arial" pitchFamily="34" charset="-122"/>
-                <a:cs typeface="Arial" pitchFamily="34" charset="-120"/>
-              </a:rPr>
-              <a:t>Licença de software</a:t>
-            </a:r>
-            <a:endParaRPr lang="en-US" sz="1300" dirty="0"/>
-          </a:p>
-        </p:txBody>
-      </p:sp>
-      <p:sp>
-        <p:nvSpPr>
-          <p:cNvPr id="14" name="Text 12"/>
-          <p:cNvSpPr txBox="1"/>
-          <p:nvPr/>
-        </p:nvSpPr>
-        <p:spPr>
-          <a:xfrm>
-            <a:off x="3703320" y="4754880"/>
-            <a:ext cx="2103120" cy="292608"/>
-          </a:xfrm>
-          <a:prstGeom prst="rect">
-            <a:avLst/>
-          </a:prstGeom>
-          <a:noFill/>
-          <a:ln/>
-        </p:spPr>
-        <p:txBody>
-          <a:bodyPr wrap="square" lIns="0" tIns="0" rIns="0" bIns="0" rtlCol="0" anchor="ctr"/>
-          <a:lstStyle/>
-          <a:p>
-            <a:pPr algn="r" indent="0" marL="0">
-              <a:buNone/>
-            </a:pPr>
-            <a:r>
-              <a:rPr lang="en-US" sz="1100" dirty="0">
-                <a:solidFill>
-                  <a:srgbClr val="3FBF5A"/>
-                </a:solidFill>
-                <a:latin typeface="Courier New" pitchFamily="34" charset="0"/>
-                <a:ea typeface="Courier New" pitchFamily="34" charset="-122"/>
-                <a:cs typeface="Courier New" pitchFamily="34" charset="-120"/>
-              </a:rPr>
-              <a:t>R$ 0 por câmera</a:t>
-            </a:r>
-            <a:endParaRPr lang="en-US" sz="1100" dirty="0"/>
-          </a:p>
-        </p:txBody>
-      </p:sp>
-      <p:sp>
-        <p:nvSpPr>
-          <p:cNvPr id="15" name="Shape 13"/>
-          <p:cNvSpPr/>
-          <p:nvPr/>
-        </p:nvSpPr>
-        <p:spPr>
-          <a:xfrm>
-            <a:off x="685800" y="5129784"/>
-            <a:ext cx="5120640" cy="0"/>
-          </a:xfrm>
-          <a:prstGeom prst="line">
-            <a:avLst/>
-          </a:prstGeom>
-          <a:noFill/>
-          <a:ln w="12700">
-            <a:solidFill>
-              <a:srgbClr val="24322B"/>
-            </a:solidFill>
-            <a:prstDash val="solid"/>
-          </a:ln>
-        </p:spPr>
-      </p:sp>
-      <p:sp>
-        <p:nvSpPr>
-          <p:cNvPr id="16" name="Text 14"/>
-          <p:cNvSpPr txBox="1"/>
-          <p:nvPr/>
-        </p:nvSpPr>
-        <p:spPr>
-          <a:xfrm>
-            <a:off x="685800" y="5212080"/>
-            <a:ext cx="3017520" cy="320040"/>
-          </a:xfrm>
-          <a:prstGeom prst="rect">
-            <a:avLst/>
-          </a:prstGeom>
-          <a:noFill/>
-          <a:ln/>
-        </p:spPr>
-        <p:txBody>
-          <a:bodyPr wrap="square" lIns="0" tIns="0" rIns="0" bIns="0" rtlCol="0" anchor="ctr"/>
-          <a:lstStyle/>
-          <a:p>
-            <a:pPr indent="0" marL="0">
-              <a:buNone/>
-            </a:pPr>
-            <a:r>
-              <a:rPr lang="en-US" sz="1300" b="1" dirty="0">
-                <a:solidFill>
-                  <a:srgbClr val="EDF3EF"/>
-                </a:solidFill>
-                <a:latin typeface="Arial" pitchFamily="34" charset="0"/>
-                <a:ea typeface="Arial" pitchFamily="34" charset="-122"/>
-                <a:cs typeface="Arial" pitchFamily="34" charset="-120"/>
-              </a:rPr>
-              <a:t>Nuvem do alerta</a:t>
-            </a:r>
-            <a:endParaRPr lang="en-US" sz="1300" dirty="0"/>
-          </a:p>
-        </p:txBody>
-      </p:sp>
-      <p:sp>
-        <p:nvSpPr>
-          <p:cNvPr id="17" name="Text 15"/>
-          <p:cNvSpPr txBox="1"/>
-          <p:nvPr/>
-        </p:nvSpPr>
-        <p:spPr>
-          <a:xfrm>
-            <a:off x="3703320" y="5230368"/>
-            <a:ext cx="2103120" cy="292608"/>
-          </a:xfrm>
-          <a:prstGeom prst="rect">
-            <a:avLst/>
-          </a:prstGeom>
-          <a:noFill/>
-          <a:ln/>
-        </p:spPr>
-        <p:txBody>
-          <a:bodyPr wrap="square" lIns="0" tIns="0" rIns="0" bIns="0" rtlCol="0" anchor="ctr"/>
-          <a:lstStyle/>
-          <a:p>
-            <a:pPr algn="r" indent="0" marL="0">
-              <a:buNone/>
-            </a:pPr>
-            <a:r>
-              <a:rPr lang="en-US" sz="1100" dirty="0">
-                <a:solidFill>
-                  <a:srgbClr val="3FBF5A"/>
-                </a:solidFill>
-                <a:latin typeface="Courier New" pitchFamily="34" charset="0"/>
-                <a:ea typeface="Courier New" pitchFamily="34" charset="-122"/>
-                <a:cs typeface="Courier New" pitchFamily="34" charset="-120"/>
-              </a:rPr>
-              <a:t>centavos por mês</a:t>
-            </a:r>
-            <a:endParaRPr lang="en-US" sz="1100" dirty="0"/>
-          </a:p>
-        </p:txBody>
-      </p:sp>
-      <p:sp>
-        <p:nvSpPr>
-          <p:cNvPr id="18" name="Shape 16"/>
-          <p:cNvSpPr/>
-          <p:nvPr/>
-        </p:nvSpPr>
-        <p:spPr>
-          <a:xfrm>
-            <a:off x="685800" y="5605272"/>
-            <a:ext cx="5120640" cy="0"/>
-          </a:xfrm>
-          <a:prstGeom prst="line">
-            <a:avLst/>
-          </a:prstGeom>
-          <a:noFill/>
-          <a:ln w="12700">
-            <a:solidFill>
-              <a:srgbClr val="24322B"/>
-            </a:solidFill>
-            <a:prstDash val="solid"/>
-          </a:ln>
-        </p:spPr>
-      </p:sp>
-      <p:sp>
-        <p:nvSpPr>
-          <p:cNvPr id="19" name="Text 17"/>
-          <p:cNvSpPr txBox="1"/>
-          <p:nvPr/>
-        </p:nvSpPr>
-        <p:spPr>
-          <a:xfrm>
-            <a:off x="685800" y="5687568"/>
-            <a:ext cx="5120640" cy="365760"/>
-          </a:xfrm>
-          <a:prstGeom prst="rect">
-            <a:avLst/>
-          </a:prstGeom>
-          <a:noFill/>
-          <a:ln/>
-        </p:spPr>
-        <p:txBody>
-          <a:bodyPr wrap="square" lIns="0" tIns="0" rIns="0" bIns="0" rtlCol="0" anchor="ctr"/>
-          <a:lstStyle/>
-          <a:p>
-            <a:pPr indent="0" marL="0">
-              <a:lnSpc>
-                <a:spcPts val="1300"/>
-              </a:lnSpc>
-              <a:buNone/>
-            </a:pPr>
-            <a:r>
-              <a:rPr lang="en-US" sz="900" dirty="0">
-                <a:solidFill>
-                  <a:srgbClr val="6A7D74"/>
-                </a:solidFill>
-                <a:latin typeface="Courier New" pitchFamily="34" charset="0"/>
-                <a:ea typeface="Courier New" pitchFamily="34" charset="-122"/>
-                <a:cs typeface="Courier New" pitchFamily="34" charset="-120"/>
-              </a:rPr>
-              <a:t>sem placa de vídeo, sem custo por fluxo, sem mensalidade que cresce com a escola</a:t>
-            </a:r>
-            <a:endParaRPr lang="en-US" sz="900" dirty="0"/>
-          </a:p>
-        </p:txBody>
-      </p:sp>
-      <p:sp>
-        <p:nvSpPr>
-          <p:cNvPr id="20" name="Text 18"/>
-          <p:cNvSpPr txBox="1"/>
-          <p:nvPr/>
-        </p:nvSpPr>
-        <p:spPr>
-          <a:xfrm>
-            <a:off x="6492240" y="3246120"/>
-            <a:ext cx="5029200" cy="320040"/>
-          </a:xfrm>
-          <a:prstGeom prst="rect">
-            <a:avLst/>
-          </a:prstGeom>
-          <a:noFill/>
-          <a:ln/>
-        </p:spPr>
-        <p:txBody>
-          <a:bodyPr wrap="square" lIns="0" tIns="0" rIns="0" bIns="0" rtlCol="0" anchor="ctr"/>
-          <a:lstStyle/>
-          <a:p>
-            <a:pPr indent="0" marL="0">
-              <a:buNone/>
-            </a:pPr>
-            <a:r>
-              <a:rPr lang="en-US" sz="1800" b="1" dirty="0">
-                <a:solidFill>
-                  <a:srgbClr val="EDF3EF"/>
-                </a:solidFill>
-                <a:latin typeface="Arial" pitchFamily="34" charset="0"/>
-                <a:ea typeface="Arial" pitchFamily="34" charset="-122"/>
-                <a:cs typeface="Arial" pitchFamily="34" charset="-120"/>
-              </a:rPr>
-              <a:t>Como entra no mercado</a:t>
-            </a:r>
-            <a:endParaRPr lang="en-US" sz="1800" dirty="0"/>
-          </a:p>
-        </p:txBody>
-      </p:sp>
-      <p:sp>
-        <p:nvSpPr>
-          <p:cNvPr id="21" name="Shape 19"/>
-          <p:cNvSpPr/>
-          <p:nvPr/>
-        </p:nvSpPr>
-        <p:spPr>
-          <a:xfrm>
-            <a:off x="6492240" y="3721608"/>
-            <a:ext cx="292608" cy="292608"/>
-          </a:xfrm>
-          <a:prstGeom prst="ellipse">
-            <a:avLst/>
+            <a:off x="685800" y="3200400"/>
+            <a:ext cx="2560320" cy="1920240"/>
+          </a:xfrm>
+          <a:prstGeom prst="roundRect">
+            <a:avLst>
+              <a:gd name="adj" fmla="val 4762"/>
+            </a:avLst>
           </a:prstGeom>
           <a:solidFill>
             <a:srgbClr val="0B100E"/>
@@ -5016,143 +4632,151 @@
             <a:solidFill>
               <a:srgbClr val="24322B"/>
             </a:solidFill>
-            <a:prstDash val="solid"/>
+            <a:prstDash val="dash"/>
           </a:ln>
         </p:spPr>
       </p:sp>
       <p:sp>
         <p:nvSpPr>
-          <p:cNvPr id="22" name="Text 20"/>
-          <p:cNvSpPr txBox="1"/>
-          <p:nvPr/>
-        </p:nvSpPr>
-        <p:spPr>
-          <a:xfrm>
-            <a:off x="6492240" y="3749040"/>
-            <a:ext cx="292608" cy="237744"/>
-          </a:xfrm>
-          <a:prstGeom prst="rect">
-            <a:avLst/>
-          </a:prstGeom>
-          <a:noFill/>
-          <a:ln/>
-        </p:spPr>
-        <p:txBody>
-          <a:bodyPr wrap="square" lIns="0" tIns="0" rIns="0" bIns="0" rtlCol="0" anchor="ctr"/>
-          <a:lstStyle/>
-          <a:p>
-            <a:pPr algn="ctr" indent="0" marL="0">
-              <a:buNone/>
-            </a:pPr>
-            <a:r>
-              <a:rPr lang="en-US" sz="1000" dirty="0">
-                <a:solidFill>
-                  <a:srgbClr val="3FBF5A"/>
+          <p:cNvPr id="6" name="Text 4"/>
+          <p:cNvSpPr txBox="1"/>
+          <p:nvPr/>
+        </p:nvSpPr>
+        <p:spPr>
+          <a:xfrm>
+            <a:off x="905256" y="3438144"/>
+            <a:ext cx="2157984" cy="603504"/>
+          </a:xfrm>
+          <a:prstGeom prst="rect">
+            <a:avLst/>
+          </a:prstGeom>
+          <a:noFill/>
+          <a:ln/>
+        </p:spPr>
+        <p:txBody>
+          <a:bodyPr wrap="square" lIns="0" tIns="0" rIns="0" bIns="0" rtlCol="0" anchor="ctr"/>
+          <a:lstStyle/>
+          <a:p>
+            <a:pPr indent="0" marL="0">
+              <a:lnSpc>
+                <a:spcPts val="1700"/>
+              </a:lnSpc>
+              <a:buNone/>
+            </a:pPr>
+            <a:r>
+              <a:rPr lang="en-US" sz="1350" b="1" dirty="0">
+                <a:solidFill>
+                  <a:srgbClr val="EDF3EF"/>
+                </a:solidFill>
+                <a:latin typeface="Arial" pitchFamily="34" charset="0"/>
+                <a:ea typeface="Arial" pitchFamily="34" charset="-122"/>
+                <a:cs typeface="Arial" pitchFamily="34" charset="-120"/>
+              </a:rPr>
+              <a:t>Quanto uma escola paga hoje</a:t>
+            </a:r>
+            <a:endParaRPr lang="en-US" sz="1350" dirty="0"/>
+          </a:p>
+        </p:txBody>
+      </p:sp>
+      <p:sp>
+        <p:nvSpPr>
+          <p:cNvPr id="7" name="Text 5"/>
+          <p:cNvSpPr txBox="1"/>
+          <p:nvPr/>
+        </p:nvSpPr>
+        <p:spPr>
+          <a:xfrm>
+            <a:off x="905256" y="4096512"/>
+            <a:ext cx="2157984" cy="384048"/>
+          </a:xfrm>
+          <a:prstGeom prst="rect">
+            <a:avLst/>
+          </a:prstGeom>
+          <a:noFill/>
+          <a:ln/>
+        </p:spPr>
+        <p:txBody>
+          <a:bodyPr wrap="square" lIns="0" tIns="0" rIns="0" bIns="0" rtlCol="0" anchor="ctr"/>
+          <a:lstStyle/>
+          <a:p>
+            <a:pPr indent="0" marL="0">
+              <a:lnSpc>
+                <a:spcPts val="1400"/>
+              </a:lnSpc>
+              <a:buNone/>
+            </a:pPr>
+            <a:r>
+              <a:rPr lang="en-US" sz="1150" dirty="0">
+                <a:solidFill>
+                  <a:srgbClr val="9DB0A6"/>
+                </a:solidFill>
+                <a:latin typeface="Calibri" pitchFamily="34" charset="0"/>
+                <a:ea typeface="Calibri" pitchFamily="34" charset="-122"/>
+                <a:cs typeface="Calibri" pitchFamily="34" charset="-120"/>
+              </a:rPr>
+              <a:t>por monitoramento eletrônico</a:t>
+            </a:r>
+            <a:endParaRPr lang="en-US" sz="1150" dirty="0"/>
+          </a:p>
+        </p:txBody>
+      </p:sp>
+      <p:sp>
+        <p:nvSpPr>
+          <p:cNvPr id="8" name="Text 6"/>
+          <p:cNvSpPr txBox="1"/>
+          <p:nvPr/>
+        </p:nvSpPr>
+        <p:spPr>
+          <a:xfrm>
+            <a:off x="905256" y="4553712"/>
+            <a:ext cx="2157984" cy="411480"/>
+          </a:xfrm>
+          <a:prstGeom prst="rect">
+            <a:avLst/>
+          </a:prstGeom>
+          <a:noFill/>
+          <a:ln/>
+        </p:spPr>
+        <p:txBody>
+          <a:bodyPr wrap="square" lIns="0" tIns="0" rIns="0" bIns="0" rtlCol="0" anchor="ctr"/>
+          <a:lstStyle/>
+          <a:p>
+            <a:pPr indent="0" marL="0">
+              <a:lnSpc>
+                <a:spcPts val="1100"/>
+              </a:lnSpc>
+              <a:buNone/>
+            </a:pPr>
+            <a:r>
+              <a:rPr lang="en-US" sz="850" dirty="0">
+                <a:solidFill>
+                  <a:srgbClr val="E4572E"/>
                 </a:solidFill>
                 <a:latin typeface="Courier New" pitchFamily="34" charset="0"/>
                 <a:ea typeface="Courier New" pitchFamily="34" charset="-122"/>
                 <a:cs typeface="Courier New" pitchFamily="34" charset="-120"/>
               </a:rPr>
-              <a:t>1</a:t>
-            </a:r>
-            <a:endParaRPr lang="en-US" sz="1000" dirty="0"/>
-          </a:p>
-        </p:txBody>
-      </p:sp>
-      <p:sp>
-        <p:nvSpPr>
-          <p:cNvPr id="23" name="Text 21"/>
-          <p:cNvSpPr txBox="1"/>
-          <p:nvPr/>
-        </p:nvSpPr>
-        <p:spPr>
-          <a:xfrm>
-            <a:off x="6949440" y="3703320"/>
-            <a:ext cx="4572000" cy="274320"/>
-          </a:xfrm>
-          <a:prstGeom prst="rect">
-            <a:avLst/>
-          </a:prstGeom>
-          <a:noFill/>
-          <a:ln/>
-        </p:spPr>
-        <p:txBody>
-          <a:bodyPr wrap="square" lIns="0" tIns="0" rIns="0" bIns="0" rtlCol="0" anchor="ctr"/>
-          <a:lstStyle/>
-          <a:p>
-            <a:pPr indent="0" marL="0">
-              <a:buNone/>
-            </a:pPr>
-            <a:r>
-              <a:rPr lang="en-US" sz="1400" b="1" dirty="0">
-                <a:solidFill>
-                  <a:srgbClr val="EDF3EF"/>
-                </a:solidFill>
-                <a:latin typeface="Arial" pitchFamily="34" charset="0"/>
-                <a:ea typeface="Arial" pitchFamily="34" charset="-122"/>
-                <a:cs typeface="Arial" pitchFamily="34" charset="-120"/>
-              </a:rPr>
-              <a:t>Uma escola, de graça</a:t>
-            </a:r>
-            <a:endParaRPr lang="en-US" sz="1400" dirty="0"/>
-          </a:p>
-        </p:txBody>
-      </p:sp>
-      <p:sp>
-        <p:nvSpPr>
-          <p:cNvPr id="24" name="Text 22"/>
-          <p:cNvSpPr txBox="1"/>
-          <p:nvPr/>
-        </p:nvSpPr>
-        <p:spPr>
-          <a:xfrm>
-            <a:off x="6949440" y="3977640"/>
-            <a:ext cx="4572000" cy="502920"/>
-          </a:xfrm>
-          <a:prstGeom prst="rect">
-            <a:avLst/>
-          </a:prstGeom>
-          <a:noFill/>
-          <a:ln/>
-        </p:spPr>
-        <p:txBody>
-          <a:bodyPr wrap="square" lIns="0" tIns="0" rIns="0" bIns="0" rtlCol="0" anchor="ctr"/>
-          <a:lstStyle/>
-          <a:p>
-            <a:pPr indent="0" marL="0">
-              <a:lnSpc>
-                <a:spcPts val="1400"/>
-              </a:lnSpc>
-              <a:buNone/>
-            </a:pPr>
-            <a:r>
-              <a:rPr lang="en-US" sz="1150" dirty="0">
-                <a:solidFill>
-                  <a:srgbClr val="9DB0A6"/>
-                </a:solidFill>
-                <a:latin typeface="Calibri" pitchFamily="34" charset="0"/>
-                <a:ea typeface="Calibri" pitchFamily="34" charset="-122"/>
-                <a:cs typeface="Calibri" pitchFamily="34" charset="-120"/>
-              </a:rPr>
-              <a:t>Em troca do dado que falta: quantos alertas por dia a coordenação aguenta, e quantos foram engano.</a:t>
-            </a:r>
-            <a:endParaRPr lang="en-US" sz="1150" dirty="0"/>
-          </a:p>
-        </p:txBody>
-      </p:sp>
-      <p:sp>
-        <p:nvSpPr>
-          <p:cNvPr id="25" name="Shape 23"/>
+              <a:t>fonte: ligar para três escolas</a:t>
+            </a:r>
+            <a:endParaRPr lang="en-US" sz="850" dirty="0"/>
+          </a:p>
+        </p:txBody>
+      </p:sp>
+      <p:sp>
+        <p:nvSpPr>
+          <p:cNvPr id="9" name="Shape 7"/>
           <p:cNvSpPr/>
           <p:nvPr/>
         </p:nvSpPr>
         <p:spPr>
           <a:xfrm>
-            <a:off x="6492240" y="4498848"/>
-            <a:ext cx="292608" cy="292608"/>
-          </a:xfrm>
-          <a:prstGeom prst="ellipse">
-            <a:avLst/>
+            <a:off x="3438144" y="3200400"/>
+            <a:ext cx="2560320" cy="1920240"/>
+          </a:xfrm>
+          <a:prstGeom prst="roundRect">
+            <a:avLst>
+              <a:gd name="adj" fmla="val 4762"/>
+            </a:avLst>
           </a:prstGeom>
           <a:solidFill>
             <a:srgbClr val="0B100E"/>
@@ -5161,143 +4785,151 @@
             <a:solidFill>
               <a:srgbClr val="24322B"/>
             </a:solidFill>
-            <a:prstDash val="solid"/>
+            <a:prstDash val="dash"/>
           </a:ln>
         </p:spPr>
       </p:sp>
       <p:sp>
         <p:nvSpPr>
-          <p:cNvPr id="26" name="Text 24"/>
-          <p:cNvSpPr txBox="1"/>
-          <p:nvPr/>
-        </p:nvSpPr>
-        <p:spPr>
-          <a:xfrm>
-            <a:off x="6492240" y="4526280"/>
-            <a:ext cx="292608" cy="237744"/>
-          </a:xfrm>
-          <a:prstGeom prst="rect">
-            <a:avLst/>
-          </a:prstGeom>
-          <a:noFill/>
-          <a:ln/>
-        </p:spPr>
-        <p:txBody>
-          <a:bodyPr wrap="square" lIns="0" tIns="0" rIns="0" bIns="0" rtlCol="0" anchor="ctr"/>
-          <a:lstStyle/>
-          <a:p>
-            <a:pPr algn="ctr" indent="0" marL="0">
-              <a:buNone/>
-            </a:pPr>
-            <a:r>
-              <a:rPr lang="en-US" sz="1000" dirty="0">
-                <a:solidFill>
-                  <a:srgbClr val="3FBF5A"/>
+          <p:cNvPr id="10" name="Text 8"/>
+          <p:cNvSpPr txBox="1"/>
+          <p:nvPr/>
+        </p:nvSpPr>
+        <p:spPr>
+          <a:xfrm>
+            <a:off x="3657600" y="3438144"/>
+            <a:ext cx="2157984" cy="603504"/>
+          </a:xfrm>
+          <a:prstGeom prst="rect">
+            <a:avLst/>
+          </a:prstGeom>
+          <a:noFill/>
+          <a:ln/>
+        </p:spPr>
+        <p:txBody>
+          <a:bodyPr wrap="square" lIns="0" tIns="0" rIns="0" bIns="0" rtlCol="0" anchor="ctr"/>
+          <a:lstStyle/>
+          <a:p>
+            <a:pPr indent="0" marL="0">
+              <a:lnSpc>
+                <a:spcPts val="1700"/>
+              </a:lnSpc>
+              <a:buNone/>
+            </a:pPr>
+            <a:r>
+              <a:rPr lang="en-US" sz="1350" b="1" dirty="0">
+                <a:solidFill>
+                  <a:srgbClr val="EDF3EF"/>
+                </a:solidFill>
+                <a:latin typeface="Arial" pitchFamily="34" charset="0"/>
+                <a:ea typeface="Arial" pitchFamily="34" charset="-122"/>
+                <a:cs typeface="Arial" pitchFamily="34" charset="-120"/>
+              </a:rPr>
+              <a:t>Quantas escolas no recorte</a:t>
+            </a:r>
+            <a:endParaRPr lang="en-US" sz="1350" dirty="0"/>
+          </a:p>
+        </p:txBody>
+      </p:sp>
+      <p:sp>
+        <p:nvSpPr>
+          <p:cNvPr id="11" name="Text 9"/>
+          <p:cNvSpPr txBox="1"/>
+          <p:nvPr/>
+        </p:nvSpPr>
+        <p:spPr>
+          <a:xfrm>
+            <a:off x="3657600" y="4096512"/>
+            <a:ext cx="2157984" cy="384048"/>
+          </a:xfrm>
+          <a:prstGeom prst="rect">
+            <a:avLst/>
+          </a:prstGeom>
+          <a:noFill/>
+          <a:ln/>
+        </p:spPr>
+        <p:txBody>
+          <a:bodyPr wrap="square" lIns="0" tIns="0" rIns="0" bIns="0" rtlCol="0" anchor="ctr"/>
+          <a:lstStyle/>
+          <a:p>
+            <a:pPr indent="0" marL="0">
+              <a:lnSpc>
+                <a:spcPts val="1400"/>
+              </a:lnSpc>
+              <a:buNone/>
+            </a:pPr>
+            <a:r>
+              <a:rPr lang="en-US" sz="1150" dirty="0">
+                <a:solidFill>
+                  <a:srgbClr val="9DB0A6"/>
+                </a:solidFill>
+                <a:latin typeface="Calibri" pitchFamily="34" charset="0"/>
+                <a:ea typeface="Calibri" pitchFamily="34" charset="-122"/>
+                <a:cs typeface="Calibri" pitchFamily="34" charset="-120"/>
+              </a:rPr>
+              <a:t>rede, município ou grupo</a:t>
+            </a:r>
+            <a:endParaRPr lang="en-US" sz="1150" dirty="0"/>
+          </a:p>
+        </p:txBody>
+      </p:sp>
+      <p:sp>
+        <p:nvSpPr>
+          <p:cNvPr id="12" name="Text 10"/>
+          <p:cNvSpPr txBox="1"/>
+          <p:nvPr/>
+        </p:nvSpPr>
+        <p:spPr>
+          <a:xfrm>
+            <a:off x="3657600" y="4553712"/>
+            <a:ext cx="2157984" cy="411480"/>
+          </a:xfrm>
+          <a:prstGeom prst="rect">
+            <a:avLst/>
+          </a:prstGeom>
+          <a:noFill/>
+          <a:ln/>
+        </p:spPr>
+        <p:txBody>
+          <a:bodyPr wrap="square" lIns="0" tIns="0" rIns="0" bIns="0" rtlCol="0" anchor="ctr"/>
+          <a:lstStyle/>
+          <a:p>
+            <a:pPr indent="0" marL="0">
+              <a:lnSpc>
+                <a:spcPts val="1100"/>
+              </a:lnSpc>
+              <a:buNone/>
+            </a:pPr>
+            <a:r>
+              <a:rPr lang="en-US" sz="850" dirty="0">
+                <a:solidFill>
+                  <a:srgbClr val="E4572E"/>
                 </a:solidFill>
                 <a:latin typeface="Courier New" pitchFamily="34" charset="0"/>
                 <a:ea typeface="Courier New" pitchFamily="34" charset="-122"/>
                 <a:cs typeface="Courier New" pitchFamily="34" charset="-120"/>
               </a:rPr>
-              <a:t>2</a:t>
-            </a:r>
-            <a:endParaRPr lang="en-US" sz="1000" dirty="0"/>
-          </a:p>
-        </p:txBody>
-      </p:sp>
-      <p:sp>
-        <p:nvSpPr>
-          <p:cNvPr id="27" name="Text 25"/>
-          <p:cNvSpPr txBox="1"/>
-          <p:nvPr/>
-        </p:nvSpPr>
-        <p:spPr>
-          <a:xfrm>
-            <a:off x="6949440" y="4480560"/>
-            <a:ext cx="4572000" cy="274320"/>
-          </a:xfrm>
-          <a:prstGeom prst="rect">
-            <a:avLst/>
-          </a:prstGeom>
-          <a:noFill/>
-          <a:ln/>
-        </p:spPr>
-        <p:txBody>
-          <a:bodyPr wrap="square" lIns="0" tIns="0" rIns="0" bIns="0" rtlCol="0" anchor="ctr"/>
-          <a:lstStyle/>
-          <a:p>
-            <a:pPr indent="0" marL="0">
-              <a:buNone/>
-            </a:pPr>
-            <a:r>
-              <a:rPr lang="en-US" sz="1400" b="1" dirty="0">
-                <a:solidFill>
-                  <a:srgbClr val="EDF3EF"/>
-                </a:solidFill>
-                <a:latin typeface="Arial" pitchFamily="34" charset="0"/>
-                <a:ea typeface="Arial" pitchFamily="34" charset="-122"/>
-                <a:cs typeface="Arial" pitchFamily="34" charset="-120"/>
-              </a:rPr>
-              <a:t>O piloto vira carta</a:t>
-            </a:r>
-            <a:endParaRPr lang="en-US" sz="1400" dirty="0"/>
-          </a:p>
-        </p:txBody>
-      </p:sp>
-      <p:sp>
-        <p:nvSpPr>
-          <p:cNvPr id="28" name="Text 26"/>
-          <p:cNvSpPr txBox="1"/>
-          <p:nvPr/>
-        </p:nvSpPr>
-        <p:spPr>
-          <a:xfrm>
-            <a:off x="6949440" y="4754880"/>
-            <a:ext cx="4572000" cy="502920"/>
-          </a:xfrm>
-          <a:prstGeom prst="rect">
-            <a:avLst/>
-          </a:prstGeom>
-          <a:noFill/>
-          <a:ln/>
-        </p:spPr>
-        <p:txBody>
-          <a:bodyPr wrap="square" lIns="0" tIns="0" rIns="0" bIns="0" rtlCol="0" anchor="ctr"/>
-          <a:lstStyle/>
-          <a:p>
-            <a:pPr indent="0" marL="0">
-              <a:lnSpc>
-                <a:spcPts val="1400"/>
-              </a:lnSpc>
-              <a:buNone/>
-            </a:pPr>
-            <a:r>
-              <a:rPr lang="en-US" sz="1150" dirty="0">
-                <a:solidFill>
-                  <a:srgbClr val="9DB0A6"/>
-                </a:solidFill>
-                <a:latin typeface="Calibri" pitchFamily="34" charset="0"/>
-                <a:ea typeface="Calibri" pitchFamily="34" charset="-122"/>
-                <a:cs typeface="Calibri" pitchFamily="34" charset="-120"/>
-              </a:rPr>
-              <a:t>Um depoimento da coordenação abre a porta da segunda escola melhor que qualquer slide.</a:t>
-            </a:r>
-            <a:endParaRPr lang="en-US" sz="1150" dirty="0"/>
-          </a:p>
-        </p:txBody>
-      </p:sp>
-      <p:sp>
-        <p:nvSpPr>
-          <p:cNvPr id="29" name="Shape 27"/>
+              <a:t>fonte: Censo Escolar, INEP</a:t>
+            </a:r>
+            <a:endParaRPr lang="en-US" sz="850" dirty="0"/>
+          </a:p>
+        </p:txBody>
+      </p:sp>
+      <p:sp>
+        <p:nvSpPr>
+          <p:cNvPr id="13" name="Shape 11"/>
           <p:cNvSpPr/>
           <p:nvPr/>
         </p:nvSpPr>
         <p:spPr>
           <a:xfrm>
-            <a:off x="6492240" y="5276088"/>
-            <a:ext cx="292608" cy="292608"/>
-          </a:xfrm>
-          <a:prstGeom prst="ellipse">
-            <a:avLst/>
+            <a:off x="6190488" y="3200400"/>
+            <a:ext cx="2560320" cy="1920240"/>
+          </a:xfrm>
+          <a:prstGeom prst="roundRect">
+            <a:avLst>
+              <a:gd name="adj" fmla="val 4762"/>
+            </a:avLst>
           </a:prstGeom>
           <a:solidFill>
             <a:srgbClr val="0B100E"/>
@@ -5306,75 +4938,192 @@
             <a:solidFill>
               <a:srgbClr val="24322B"/>
             </a:solidFill>
-            <a:prstDash val="solid"/>
+            <a:prstDash val="dash"/>
           </a:ln>
         </p:spPr>
       </p:sp>
       <p:sp>
         <p:nvSpPr>
-          <p:cNvPr id="30" name="Text 28"/>
-          <p:cNvSpPr txBox="1"/>
-          <p:nvPr/>
-        </p:nvSpPr>
-        <p:spPr>
-          <a:xfrm>
-            <a:off x="6492240" y="5303520"/>
-            <a:ext cx="292608" cy="237744"/>
-          </a:xfrm>
-          <a:prstGeom prst="rect">
-            <a:avLst/>
-          </a:prstGeom>
-          <a:noFill/>
-          <a:ln/>
-        </p:spPr>
-        <p:txBody>
-          <a:bodyPr wrap="square" lIns="0" tIns="0" rIns="0" bIns="0" rtlCol="0" anchor="ctr"/>
-          <a:lstStyle/>
-          <a:p>
-            <a:pPr algn="ctr" indent="0" marL="0">
-              <a:buNone/>
-            </a:pPr>
-            <a:r>
-              <a:rPr lang="en-US" sz="1000" dirty="0">
-                <a:solidFill>
-                  <a:srgbClr val="3FBF5A"/>
+          <p:cNvPr id="14" name="Text 12"/>
+          <p:cNvSpPr txBox="1"/>
+          <p:nvPr/>
+        </p:nvSpPr>
+        <p:spPr>
+          <a:xfrm>
+            <a:off x="6409944" y="3438144"/>
+            <a:ext cx="2157984" cy="603504"/>
+          </a:xfrm>
+          <a:prstGeom prst="rect">
+            <a:avLst/>
+          </a:prstGeom>
+          <a:noFill/>
+          <a:ln/>
+        </p:spPr>
+        <p:txBody>
+          <a:bodyPr wrap="square" lIns="0" tIns="0" rIns="0" bIns="0" rtlCol="0" anchor="ctr"/>
+          <a:lstStyle/>
+          <a:p>
+            <a:pPr indent="0" marL="0">
+              <a:lnSpc>
+                <a:spcPts val="1700"/>
+              </a:lnSpc>
+              <a:buNone/>
+            </a:pPr>
+            <a:r>
+              <a:rPr lang="en-US" sz="1350" b="1" dirty="0">
+                <a:solidFill>
+                  <a:srgbClr val="EDF3EF"/>
+                </a:solidFill>
+                <a:latin typeface="Arial" pitchFamily="34" charset="0"/>
+                <a:ea typeface="Arial" pitchFamily="34" charset="-122"/>
+                <a:cs typeface="Arial" pitchFamily="34" charset="-120"/>
+              </a:rPr>
+              <a:t>Alertas por dia que se aguenta</a:t>
+            </a:r>
+            <a:endParaRPr lang="en-US" sz="1350" dirty="0"/>
+          </a:p>
+        </p:txBody>
+      </p:sp>
+      <p:sp>
+        <p:nvSpPr>
+          <p:cNvPr id="15" name="Text 13"/>
+          <p:cNvSpPr txBox="1"/>
+          <p:nvPr/>
+        </p:nvSpPr>
+        <p:spPr>
+          <a:xfrm>
+            <a:off x="6409944" y="4096512"/>
+            <a:ext cx="2157984" cy="384048"/>
+          </a:xfrm>
+          <a:prstGeom prst="rect">
+            <a:avLst/>
+          </a:prstGeom>
+          <a:noFill/>
+          <a:ln/>
+        </p:spPr>
+        <p:txBody>
+          <a:bodyPr wrap="square" lIns="0" tIns="0" rIns="0" bIns="0" rtlCol="0" anchor="ctr"/>
+          <a:lstStyle/>
+          <a:p>
+            <a:pPr indent="0" marL="0">
+              <a:lnSpc>
+                <a:spcPts val="1400"/>
+              </a:lnSpc>
+              <a:buNone/>
+            </a:pPr>
+            <a:r>
+              <a:rPr lang="en-US" sz="1150" dirty="0">
+                <a:solidFill>
+                  <a:srgbClr val="9DB0A6"/>
+                </a:solidFill>
+                <a:latin typeface="Calibri" pitchFamily="34" charset="0"/>
+                <a:ea typeface="Calibri" pitchFamily="34" charset="-122"/>
+                <a:cs typeface="Calibri" pitchFamily="34" charset="-120"/>
+              </a:rPr>
+              <a:t>e quantos foram engano</a:t>
+            </a:r>
+            <a:endParaRPr lang="en-US" sz="1150" dirty="0"/>
+          </a:p>
+        </p:txBody>
+      </p:sp>
+      <p:sp>
+        <p:nvSpPr>
+          <p:cNvPr id="16" name="Text 14"/>
+          <p:cNvSpPr txBox="1"/>
+          <p:nvPr/>
+        </p:nvSpPr>
+        <p:spPr>
+          <a:xfrm>
+            <a:off x="6409944" y="4553712"/>
+            <a:ext cx="2157984" cy="411480"/>
+          </a:xfrm>
+          <a:prstGeom prst="rect">
+            <a:avLst/>
+          </a:prstGeom>
+          <a:noFill/>
+          <a:ln/>
+        </p:spPr>
+        <p:txBody>
+          <a:bodyPr wrap="square" lIns="0" tIns="0" rIns="0" bIns="0" rtlCol="0" anchor="ctr"/>
+          <a:lstStyle/>
+          <a:p>
+            <a:pPr indent="0" marL="0">
+              <a:lnSpc>
+                <a:spcPts val="1100"/>
+              </a:lnSpc>
+              <a:buNone/>
+            </a:pPr>
+            <a:r>
+              <a:rPr lang="en-US" sz="850" dirty="0">
+                <a:solidFill>
+                  <a:srgbClr val="E4572E"/>
                 </a:solidFill>
                 <a:latin typeface="Courier New" pitchFamily="34" charset="0"/>
                 <a:ea typeface="Courier New" pitchFamily="34" charset="-122"/>
                 <a:cs typeface="Courier New" pitchFamily="34" charset="-120"/>
               </a:rPr>
-              <a:t>3</a:t>
-            </a:r>
-            <a:endParaRPr lang="en-US" sz="1000" dirty="0"/>
-          </a:p>
-        </p:txBody>
-      </p:sp>
-      <p:sp>
-        <p:nvSpPr>
-          <p:cNvPr id="31" name="Text 29"/>
-          <p:cNvSpPr txBox="1"/>
-          <p:nvPr/>
-        </p:nvSpPr>
-        <p:spPr>
-          <a:xfrm>
-            <a:off x="6949440" y="5257800"/>
-            <a:ext cx="4572000" cy="274320"/>
-          </a:xfrm>
-          <a:prstGeom prst="rect">
-            <a:avLst/>
-          </a:prstGeom>
-          <a:noFill/>
-          <a:ln/>
-        </p:spPr>
-        <p:txBody>
-          <a:bodyPr wrap="square" lIns="0" tIns="0" rIns="0" bIns="0" rtlCol="0" anchor="ctr"/>
-          <a:lstStyle/>
-          <a:p>
-            <a:pPr indent="0" marL="0">
-              <a:buNone/>
-            </a:pPr>
-            <a:r>
-              <a:rPr lang="en-US" sz="1400" b="1" dirty="0">
+              <a:t>fonte: o piloto, e só ele</a:t>
+            </a:r>
+            <a:endParaRPr lang="en-US" sz="850" dirty="0"/>
+          </a:p>
+        </p:txBody>
+      </p:sp>
+      <p:sp>
+        <p:nvSpPr>
+          <p:cNvPr id="17" name="Shape 15"/>
+          <p:cNvSpPr/>
+          <p:nvPr/>
+        </p:nvSpPr>
+        <p:spPr>
+          <a:xfrm>
+            <a:off x="8942832" y="3200400"/>
+            <a:ext cx="2560320" cy="1920240"/>
+          </a:xfrm>
+          <a:prstGeom prst="roundRect">
+            <a:avLst>
+              <a:gd name="adj" fmla="val 4762"/>
+            </a:avLst>
+          </a:prstGeom>
+          <a:solidFill>
+            <a:srgbClr val="0B100E"/>
+          </a:solidFill>
+          <a:ln w="12700">
+            <a:solidFill>
+              <a:srgbClr val="24322B"/>
+            </a:solidFill>
+            <a:prstDash val="dash"/>
+          </a:ln>
+        </p:spPr>
+      </p:sp>
+      <p:sp>
+        <p:nvSpPr>
+          <p:cNvPr id="18" name="Text 16"/>
+          <p:cNvSpPr txBox="1"/>
+          <p:nvPr/>
+        </p:nvSpPr>
+        <p:spPr>
+          <a:xfrm>
+            <a:off x="9162288" y="3438144"/>
+            <a:ext cx="2157984" cy="603504"/>
+          </a:xfrm>
+          <a:prstGeom prst="rect">
+            <a:avLst/>
+          </a:prstGeom>
+          <a:noFill/>
+          <a:ln/>
+        </p:spPr>
+        <p:txBody>
+          <a:bodyPr wrap="square" lIns="0" tIns="0" rIns="0" bIns="0" rtlCol="0" anchor="ctr"/>
+          <a:lstStyle/>
+          <a:p>
+            <a:pPr indent="0" marL="0">
+              <a:lnSpc>
+                <a:spcPts val="1700"/>
+              </a:lnSpc>
+              <a:buNone/>
+            </a:pPr>
+            <a:r>
+              <a:rPr lang="en-US" sz="1350" b="1" dirty="0">
                 <a:solidFill>
                   <a:srgbClr val="EDF3EF"/>
                 </a:solidFill>
@@ -5382,22 +5131,22 @@
                 <a:ea typeface="Arial" pitchFamily="34" charset="-122"/>
                 <a:cs typeface="Arial" pitchFamily="34" charset="-120"/>
               </a:rPr>
-              <a:t>Vender para a rede</a:t>
-            </a:r>
-            <a:endParaRPr lang="en-US" sz="1400" dirty="0"/>
-          </a:p>
-        </p:txBody>
-      </p:sp>
-      <p:sp>
-        <p:nvSpPr>
-          <p:cNvPr id="32" name="Text 30"/>
-          <p:cNvSpPr txBox="1"/>
-          <p:nvPr/>
-        </p:nvSpPr>
-        <p:spPr>
-          <a:xfrm>
-            <a:off x="6949440" y="5532120"/>
-            <a:ext cx="4572000" cy="502920"/>
+              <a:t>Acerto da briga em vídeo real</a:t>
+            </a:r>
+            <a:endParaRPr lang="en-US" sz="1350" dirty="0"/>
+          </a:p>
+        </p:txBody>
+      </p:sp>
+      <p:sp>
+        <p:nvSpPr>
+          <p:cNvPr id="19" name="Text 17"/>
+          <p:cNvSpPr txBox="1"/>
+          <p:nvPr/>
+        </p:nvSpPr>
+        <p:spPr>
+          <a:xfrm>
+            <a:off x="9162288" y="4096512"/>
+            <a:ext cx="2157984" cy="384048"/>
           </a:xfrm>
           <a:prstGeom prst="rect">
             <a:avLst/>
@@ -5424,7 +5173,7 @@
                 <a:ea typeface="Calibri" pitchFamily="34" charset="-122"/>
                 <a:cs typeface="Calibri" pitchFamily="34" charset="-120"/>
               </a:rPr>
-              <a:t>Grupo educacional tem dezenas de unidades e um decisor só. É para ele que custo marginal quase zero é irresistível.</a:t>
+              <a:t>hoje é regra, não modelo treinado</a:t>
             </a:r>
             <a:endParaRPr lang="en-US" sz="1150" dirty="0"/>
           </a:p>
@@ -5432,14 +5181,14 @@
       </p:sp>
       <p:sp>
         <p:nvSpPr>
-          <p:cNvPr id="33" name="Text 31"/>
-          <p:cNvSpPr txBox="1"/>
-          <p:nvPr/>
-        </p:nvSpPr>
-        <p:spPr>
-          <a:xfrm>
-            <a:off x="6492240" y="5687568"/>
-            <a:ext cx="5029200" cy="365760"/>
+          <p:cNvPr id="20" name="Text 18"/>
+          <p:cNvSpPr txBox="1"/>
+          <p:nvPr/>
+        </p:nvSpPr>
+        <p:spPr>
+          <a:xfrm>
+            <a:off x="9162288" y="4553712"/>
+            <a:ext cx="2157984" cy="411480"/>
           </a:xfrm>
           <a:prstGeom prst="rect">
             <a:avLst/>
@@ -5453,28 +5202,67 @@
           <a:p>
             <a:pPr indent="0" marL="0">
               <a:lnSpc>
-                <a:spcPts val="1300"/>
+                <a:spcPts val="1100"/>
               </a:lnSpc>
               <a:buNone/>
             </a:pPr>
             <a:r>
-              <a:rPr lang="en-US" sz="900" dirty="0">
-                <a:solidFill>
-                  <a:srgbClr val="6A7D74"/>
+              <a:rPr lang="en-US" sz="850" dirty="0">
+                <a:solidFill>
+                  <a:srgbClr val="E4572E"/>
                 </a:solidFill>
                 <a:latin typeface="Courier New" pitchFamily="34" charset="0"/>
                 <a:ea typeface="Courier New" pitchFamily="34" charset="-122"/>
                 <a:cs typeface="Courier New" pitchFamily="34" charset="-120"/>
               </a:rPr>
-              <a:t>Modelo: assinatura por escola, não por câmera. Expandir deixa de ser uma nova decisão de compra.</a:t>
-            </a:r>
-            <a:endParaRPr lang="en-US" sz="900" dirty="0"/>
-          </a:p>
-        </p:txBody>
-      </p:sp>
-      <p:sp>
-        <p:nvSpPr>
-          <p:cNvPr id="35" name="Text 32"/>
+              <a:t>fonte: RWF-2000, 2.000 clipes</a:t>
+            </a:r>
+            <a:endParaRPr lang="en-US" sz="850" dirty="0"/>
+          </a:p>
+        </p:txBody>
+      </p:sp>
+      <p:sp>
+        <p:nvSpPr>
+          <p:cNvPr id="21" name="Text 19"/>
+          <p:cNvSpPr txBox="1"/>
+          <p:nvPr/>
+        </p:nvSpPr>
+        <p:spPr>
+          <a:xfrm>
+            <a:off x="685800" y="5577840"/>
+            <a:ext cx="10515600" cy="411480"/>
+          </a:xfrm>
+          <a:prstGeom prst="rect">
+            <a:avLst/>
+          </a:prstGeom>
+          <a:noFill/>
+          <a:ln/>
+        </p:spPr>
+        <p:txBody>
+          <a:bodyPr wrap="square" lIns="0" tIns="0" rIns="0" bIns="0" rtlCol="0" anchor="ctr"/>
+          <a:lstStyle/>
+          <a:p>
+            <a:pPr indent="0" marL="0">
+              <a:buNone/>
+            </a:pPr>
+            <a:r>
+              <a:rPr lang="en-US" sz="1400" i="1" dirty="0">
+                <a:solidFill>
+                  <a:srgbClr val="9DB0A6"/>
+                </a:solidFill>
+                <a:latin typeface="Calibri" pitchFamily="34" charset="0"/>
+                <a:ea typeface="Calibri" pitchFamily="34" charset="-122"/>
+                <a:cs typeface="Calibri" pitchFamily="34" charset="-120"/>
+              </a:rPr>
+              <a:t>Uma banca pergunta a fonte. “Estimativa nossa” derruba o slide, e com ele o resto da apresentação.</a:t>
+            </a:r>
+            <a:endParaRPr lang="en-US" sz="1400" dirty="0"/>
+          </a:p>
+        </p:txBody>
+      </p:sp>
+      <p:sp>
+        <p:nvSpPr>
+          <p:cNvPr id="22" name="Text 20"/>
           <p:cNvSpPr txBox="1"/>
           <p:nvPr/>
         </p:nvSpPr>
@@ -5505,7 +5293,7 @@
                 <a:ea typeface="Courier New" pitchFamily="34" charset="-122"/>
                 <a:cs typeface="Courier New" pitchFamily="34" charset="-120"/>
               </a:rPr>
-              <a:t>Auditix AI  ·  SVATech  ·  grupo 11</a:t>
+              <a:t>Auditix IA  ·  grupo 11</a:t>
             </a:r>
             <a:endParaRPr lang="en-US" sz="900" dirty="0"/>
           </a:p>
@@ -5513,7 +5301,7 @@
       </p:sp>
       <p:sp>
         <p:nvSpPr>
-          <p:cNvPr id="36" name="Text 33"/>
+          <p:cNvPr id="23" name="Text 21"/>
           <p:cNvSpPr txBox="1"/>
           <p:nvPr/>
         </p:nvSpPr>
@@ -5609,13 +5397,13 @@
             <a:r>
               <a:rPr lang="en-US" sz="1100" spc="200" kern="0" dirty="0">
                 <a:solidFill>
-                  <a:srgbClr val="E4572E"/>
+                  <a:srgbClr val="3FBF5A"/>
                 </a:solidFill>
                 <a:latin typeface="Courier New" pitchFamily="34" charset="0"/>
                 <a:ea typeface="Courier New" pitchFamily="34" charset="-122"/>
                 <a:cs typeface="Courier New" pitchFamily="34" charset="-120"/>
               </a:rPr>
-              <a:t>HONESTIDADE INTELECTUAL</a:t>
+              <a:t>PARA FECHAR</a:t>
             </a:r>
             <a:endParaRPr lang="en-US" sz="1100" dirty="0"/>
           </a:p>
@@ -5629,8 +5417,8 @@
         </p:nvSpPr>
         <p:spPr>
           <a:xfrm>
-            <a:off x="685800" y="749808"/>
-            <a:ext cx="10820095" cy="1417320"/>
+            <a:off x="685800" y="1005840"/>
+            <a:ext cx="10515600" cy="1737360"/>
           </a:xfrm>
           <a:prstGeom prst="rect">
             <a:avLst/>
@@ -5644,12 +5432,12 @@
           <a:p>
             <a:pPr indent="0" marL="0">
               <a:lnSpc>
-                <a:spcPts val="3800"/>
+                <a:spcPts val="5200"/>
               </a:lnSpc>
               <a:buNone/>
             </a:pPr>
             <a:r>
-              <a:rPr lang="en-US" sz="3600" b="1" dirty="0">
+              <a:rPr lang="en-US" sz="4400" b="1" dirty="0">
                 <a:solidFill>
                   <a:srgbClr val="EDF3EF"/>
                 </a:solidFill>
@@ -5657,19 +5445,19 @@
                 <a:ea typeface="Arial" pitchFamily="34" charset="-122"/>
                 <a:cs typeface="Arial" pitchFamily="34" charset="-120"/>
               </a:rPr>
-              <a:t>O que ainda não medimos,</a:t>
-            </a:r>
-            <a:endParaRPr lang="en-US" sz="3600" dirty="0"/>
+              <a:t>Um sistema que avisa</a:t>
+            </a:r>
+            <a:endParaRPr lang="en-US" sz="4400" dirty="0"/>
           </a:p>
           <a:p>
             <a:pPr indent="0" marL="0">
               <a:lnSpc>
-                <a:spcPts val="3800"/>
+                <a:spcPts val="5200"/>
               </a:lnSpc>
               <a:buNone/>
             </a:pPr>
             <a:r>
-              <a:rPr lang="en-US" sz="3600" b="1" dirty="0">
+              <a:rPr lang="en-US" sz="4400" b="1" dirty="0">
                 <a:solidFill>
                   <a:srgbClr val="EDF3EF"/>
                 </a:solidFill>
@@ -5677,9 +5465,9 @@
                 <a:ea typeface="Arial" pitchFamily="34" charset="-122"/>
                 <a:cs typeface="Arial" pitchFamily="34" charset="-120"/>
               </a:rPr>
-              <a:t>e não vamos inventar.</a:t>
-            </a:r>
-            <a:endParaRPr lang="en-US" sz="3600" dirty="0"/>
+              <a:t>e responde pelo que disse.</a:t>
+            </a:r>
+            <a:endParaRPr lang="en-US" sz="4400" dirty="0"/>
           </a:p>
         </p:txBody>
       </p:sp>
@@ -5691,8 +5479,8 @@
         </p:nvSpPr>
         <p:spPr>
           <a:xfrm>
-            <a:off x="685800" y="2560320"/>
-            <a:ext cx="10515600" cy="731520"/>
+            <a:off x="685800" y="2971800"/>
+            <a:ext cx="10332720" cy="1188720"/>
           </a:xfrm>
           <a:prstGeom prst="rect">
             <a:avLst/>
@@ -5706,12 +5494,12 @@
           <a:p>
             <a:pPr indent="0" marL="0">
               <a:lnSpc>
-                <a:spcPts val="2200"/>
+                <a:spcPts val="2400"/>
               </a:lnSpc>
               <a:buNone/>
             </a:pPr>
             <a:r>
-              <a:rPr lang="en-US" sz="1500" dirty="0">
+              <a:rPr lang="en-US" sz="1600" dirty="0">
                 <a:solidFill>
                   <a:srgbClr val="9DB0A6"/>
                 </a:solidFill>
@@ -5719,9 +5507,145 @@
                 <a:ea typeface="Calibri" pitchFamily="34" charset="-122"/>
                 <a:cs typeface="Calibri" pitchFamily="34" charset="-120"/>
               </a:rPr>
-              <a:t>Quatro coisas que decidem se isto é negócio e se a detecção se sustenta, e que nenhuma planilha nossa pode responder.</a:t>
-            </a:r>
-            <a:endParaRPr lang="en-US" sz="1500" dirty="0"/>
+              <a:t>Detectar queda é a parte fácil. O que torna o Auditix defensável numa escola é o que vem junto: </a:t>
+            </a:r>
+            <a:pPr indent="0" marL="0">
+              <a:lnSpc>
+                <a:spcPts val="2400"/>
+              </a:lnSpc>
+              <a:buNone/>
+            </a:pPr>
+            <a:r>
+              <a:rPr lang="en-US" sz="1600" dirty="0">
+                <a:solidFill>
+                  <a:srgbClr val="EDF3EF"/>
+                </a:solidFill>
+                <a:latin typeface="Calibri" pitchFamily="34" charset="0"/>
+                <a:ea typeface="Calibri" pitchFamily="34" charset="-122"/>
+                <a:cs typeface="Calibri" pitchFamily="34" charset="-120"/>
+              </a:rPr>
+              <a:t>o registro que denuncia adulteração</a:t>
+            </a:r>
+            <a:pPr indent="0" marL="0">
+              <a:lnSpc>
+                <a:spcPts val="2400"/>
+              </a:lnSpc>
+              <a:buNone/>
+            </a:pPr>
+            <a:r>
+              <a:rPr lang="en-US" sz="1600" dirty="0">
+                <a:solidFill>
+                  <a:srgbClr val="9DB0A6"/>
+                </a:solidFill>
+                <a:latin typeface="Calibri" pitchFamily="34" charset="0"/>
+                <a:ea typeface="Calibri" pitchFamily="34" charset="-122"/>
+                <a:cs typeface="Calibri" pitchFamily="34" charset="-120"/>
+              </a:rPr>
+              <a:t>, </a:t>
+            </a:r>
+            <a:pPr indent="0" marL="0">
+              <a:lnSpc>
+                <a:spcPts val="2400"/>
+              </a:lnSpc>
+              <a:buNone/>
+            </a:pPr>
+            <a:r>
+              <a:rPr lang="en-US" sz="1600" dirty="0">
+                <a:solidFill>
+                  <a:srgbClr val="EDF3EF"/>
+                </a:solidFill>
+                <a:latin typeface="Calibri" pitchFamily="34" charset="0"/>
+                <a:ea typeface="Calibri" pitchFamily="34" charset="-122"/>
+                <a:cs typeface="Calibri" pitchFamily="34" charset="-120"/>
+              </a:rPr>
+              <a:t>a imagem que se apaga</a:t>
+            </a:r>
+            <a:pPr indent="0" marL="0">
+              <a:lnSpc>
+                <a:spcPts val="2400"/>
+              </a:lnSpc>
+              <a:buNone/>
+            </a:pPr>
+            <a:r>
+              <a:rPr lang="en-US" sz="1600" dirty="0">
+                <a:solidFill>
+                  <a:srgbClr val="9DB0A6"/>
+                </a:solidFill>
+                <a:latin typeface="Calibri" pitchFamily="34" charset="0"/>
+                <a:ea typeface="Calibri" pitchFamily="34" charset="-122"/>
+                <a:cs typeface="Calibri" pitchFamily="34" charset="-120"/>
+              </a:rPr>
+              <a:t>, </a:t>
+            </a:r>
+            <a:pPr indent="0" marL="0">
+              <a:lnSpc>
+                <a:spcPts val="2400"/>
+              </a:lnSpc>
+              <a:buNone/>
+            </a:pPr>
+            <a:r>
+              <a:rPr lang="en-US" sz="1600" dirty="0">
+                <a:solidFill>
+                  <a:srgbClr val="EDF3EF"/>
+                </a:solidFill>
+                <a:latin typeface="Calibri" pitchFamily="34" charset="0"/>
+                <a:ea typeface="Calibri" pitchFamily="34" charset="-122"/>
+                <a:cs typeface="Calibri" pitchFamily="34" charset="-120"/>
+              </a:rPr>
+              <a:t>o acesso que fica gravado</a:t>
+            </a:r>
+            <a:pPr indent="0" marL="0">
+              <a:lnSpc>
+                <a:spcPts val="2400"/>
+              </a:lnSpc>
+              <a:buNone/>
+            </a:pPr>
+            <a:r>
+              <a:rPr lang="en-US" sz="1600" dirty="0">
+                <a:solidFill>
+                  <a:srgbClr val="9DB0A6"/>
+                </a:solidFill>
+                <a:latin typeface="Calibri" pitchFamily="34" charset="0"/>
+                <a:ea typeface="Calibri" pitchFamily="34" charset="-122"/>
+                <a:cs typeface="Calibri" pitchFamily="34" charset="-120"/>
+              </a:rPr>
+              <a:t> e </a:t>
+            </a:r>
+            <a:pPr indent="0" marL="0">
+              <a:lnSpc>
+                <a:spcPts val="2400"/>
+              </a:lnSpc>
+              <a:buNone/>
+            </a:pPr>
+            <a:r>
+              <a:rPr lang="en-US" sz="1600" dirty="0">
+                <a:solidFill>
+                  <a:srgbClr val="EDF3EF"/>
+                </a:solidFill>
+                <a:latin typeface="Calibri" pitchFamily="34" charset="0"/>
+                <a:ea typeface="Calibri" pitchFamily="34" charset="-122"/>
+                <a:cs typeface="Calibri" pitchFamily="34" charset="-120"/>
+              </a:rPr>
+              <a:t>o alerta que pede conferência em vez de afirmar culpa</a:t>
+            </a:r>
+            <a:pPr indent="0" marL="0">
+              <a:lnSpc>
+                <a:spcPts val="2400"/>
+              </a:lnSpc>
+              <a:buNone/>
+            </a:pPr>
+            <a:r>
+              <a:rPr lang="en-US" sz="1600" dirty="0">
+                <a:solidFill>
+                  <a:srgbClr val="9DB0A6"/>
+                </a:solidFill>
+                <a:latin typeface="Calibri" pitchFamily="34" charset="0"/>
+                <a:ea typeface="Calibri" pitchFamily="34" charset="-122"/>
+                <a:cs typeface="Calibri" pitchFamily="34" charset="-120"/>
+              </a:rPr>
+              <a:t>.</a:t>
+            </a:r>
+            <a:endParaRPr lang="en-US" sz="1600" dirty="0"/>
           </a:p>
         </p:txBody>
       </p:sp>
@@ -5733,23 +5657,16 @@
         </p:nvSpPr>
         <p:spPr>
           <a:xfrm>
-            <a:off x="685800" y="3200400"/>
-            <a:ext cx="2560320" cy="1920240"/>
-          </a:xfrm>
-          <a:prstGeom prst="roundRect">
-            <a:avLst>
-              <a:gd name="adj" fmla="val 4762"/>
-            </a:avLst>
+            <a:off x="685800" y="4526280"/>
+            <a:ext cx="36576" cy="1005840"/>
+          </a:xfrm>
+          <a:prstGeom prst="rect">
+            <a:avLst/>
           </a:prstGeom>
           <a:solidFill>
-            <a:srgbClr val="0B100E"/>
+            <a:srgbClr val="3FBF5A"/>
           </a:solidFill>
-          <a:ln w="12700">
-            <a:solidFill>
-              <a:srgbClr val="24322B"/>
-            </a:solidFill>
-            <a:prstDash val="dash"/>
-          </a:ln>
+          <a:ln/>
         </p:spPr>
       </p:sp>
       <p:sp>
@@ -5760,27 +5677,24 @@
         </p:nvSpPr>
         <p:spPr>
           <a:xfrm>
-            <a:off x="905256" y="3438144"/>
-            <a:ext cx="2157984" cy="603504"/>
-          </a:xfrm>
-          <a:prstGeom prst="rect">
-            <a:avLst/>
-          </a:prstGeom>
-          <a:noFill/>
-          <a:ln/>
-        </p:spPr>
-        <p:txBody>
-          <a:bodyPr wrap="square" lIns="0" tIns="0" rIns="0" bIns="0" rtlCol="0" anchor="ctr"/>
-          <a:lstStyle/>
-          <a:p>
-            <a:pPr indent="0" marL="0">
-              <a:lnSpc>
-                <a:spcPts val="1700"/>
-              </a:lnSpc>
-              <a:buNone/>
-            </a:pPr>
-            <a:r>
-              <a:rPr lang="en-US" sz="1350" b="1" dirty="0">
+            <a:off x="914400" y="4526280"/>
+            <a:ext cx="8229600" cy="411480"/>
+          </a:xfrm>
+          <a:prstGeom prst="rect">
+            <a:avLst/>
+          </a:prstGeom>
+          <a:noFill/>
+          <a:ln/>
+        </p:spPr>
+        <p:txBody>
+          <a:bodyPr wrap="square" lIns="0" tIns="0" rIns="0" bIns="0" rtlCol="0" anchor="ctr"/>
+          <a:lstStyle/>
+          <a:p>
+            <a:pPr indent="0" marL="0">
+              <a:buNone/>
+            </a:pPr>
+            <a:r>
+              <a:rPr lang="en-US" sz="2400" b="1" dirty="0">
                 <a:solidFill>
                   <a:srgbClr val="EDF3EF"/>
                 </a:solidFill>
@@ -5788,9 +5702,9 @@
                 <a:ea typeface="Arial" pitchFamily="34" charset="-122"/>
                 <a:cs typeface="Arial" pitchFamily="34" charset="-120"/>
               </a:rPr>
-              <a:t>Quanto uma escola paga hoje</a:t>
-            </a:r>
-            <a:endParaRPr lang="en-US" sz="1350" dirty="0"/>
+              <a:t>Alerta não é acusação.</a:t>
+            </a:r>
+            <a:endParaRPr lang="en-US" sz="2400" dirty="0"/>
           </a:p>
         </p:txBody>
       </p:sp>
@@ -5802,27 +5716,24 @@
         </p:nvSpPr>
         <p:spPr>
           <a:xfrm>
-            <a:off x="905256" y="4096512"/>
-            <a:ext cx="2157984" cy="384048"/>
-          </a:xfrm>
-          <a:prstGeom prst="rect">
-            <a:avLst/>
-          </a:prstGeom>
-          <a:noFill/>
-          <a:ln/>
-        </p:spPr>
-        <p:txBody>
-          <a:bodyPr wrap="square" lIns="0" tIns="0" rIns="0" bIns="0" rtlCol="0" anchor="ctr"/>
-          <a:lstStyle/>
-          <a:p>
-            <a:pPr indent="0" marL="0">
-              <a:lnSpc>
-                <a:spcPts val="1400"/>
-              </a:lnSpc>
-              <a:buNone/>
-            </a:pPr>
-            <a:r>
-              <a:rPr lang="en-US" sz="1150" dirty="0">
+            <a:off x="914400" y="4983480"/>
+            <a:ext cx="8686800" cy="457200"/>
+          </a:xfrm>
+          <a:prstGeom prst="rect">
+            <a:avLst/>
+          </a:prstGeom>
+          <a:noFill/>
+          <a:ln/>
+        </p:spPr>
+        <p:txBody>
+          <a:bodyPr wrap="square" lIns="0" tIns="0" rIns="0" bIns="0" rtlCol="0" anchor="ctr"/>
+          <a:lstStyle/>
+          <a:p>
+            <a:pPr indent="0" marL="0">
+              <a:buNone/>
+            </a:pPr>
+            <a:r>
+              <a:rPr lang="en-US" sz="1400" dirty="0">
                 <a:solidFill>
                   <a:srgbClr val="9DB0A6"/>
                 </a:solidFill>
@@ -5830,9 +5741,9 @@
                 <a:ea typeface="Calibri" pitchFamily="34" charset="-122"/>
                 <a:cs typeface="Calibri" pitchFamily="34" charset="-120"/>
               </a:rPr>
-              <a:t>por monitoramento eletrônico</a:t>
-            </a:r>
-            <a:endParaRPr lang="en-US" sz="1150" dirty="0"/>
+              <a:t>É um pedido para alguém ir olhar, feito rápido o bastante para ainda valer a pena.</a:t>
+            </a:r>
+            <a:endParaRPr lang="en-US" sz="1400" dirty="0"/>
           </a:p>
         </p:txBody>
       </p:sp>
@@ -5844,1059 +5755,32 @@
         </p:nvSpPr>
         <p:spPr>
           <a:xfrm>
-            <a:off x="905256" y="4553712"/>
-            <a:ext cx="2157984" cy="411480"/>
-          </a:xfrm>
-          <a:prstGeom prst="rect">
-            <a:avLst/>
-          </a:prstGeom>
-          <a:noFill/>
-          <a:ln/>
-        </p:spPr>
-        <p:txBody>
-          <a:bodyPr wrap="square" lIns="0" tIns="0" rIns="0" bIns="0" rtlCol="0" anchor="ctr"/>
-          <a:lstStyle/>
-          <a:p>
-            <a:pPr indent="0" marL="0">
-              <a:lnSpc>
-                <a:spcPts val="1100"/>
-              </a:lnSpc>
-              <a:buNone/>
-            </a:pPr>
-            <a:r>
-              <a:rPr lang="en-US" sz="850" dirty="0">
-                <a:solidFill>
-                  <a:srgbClr val="E4572E"/>
+            <a:off x="685800" y="5943600"/>
+            <a:ext cx="10515600" cy="274320"/>
+          </a:xfrm>
+          <a:prstGeom prst="rect">
+            <a:avLst/>
+          </a:prstGeom>
+          <a:noFill/>
+          <a:ln/>
+        </p:spPr>
+        <p:txBody>
+          <a:bodyPr wrap="square" lIns="0" tIns="0" rIns="0" bIns="0" rtlCol="0" anchor="ctr"/>
+          <a:lstStyle/>
+          <a:p>
+            <a:pPr indent="0" marL="0">
+              <a:buNone/>
+            </a:pPr>
+            <a:r>
+              <a:rPr lang="en-US" sz="1000" dirty="0">
+                <a:solidFill>
+                  <a:srgbClr val="6A7D74"/>
                 </a:solidFill>
                 <a:latin typeface="Courier New" pitchFamily="34" charset="0"/>
                 <a:ea typeface="Courier New" pitchFamily="34" charset="-122"/>
                 <a:cs typeface="Courier New" pitchFamily="34" charset="-120"/>
               </a:rPr>
-              <a:t>fonte: ligar para três escolas</a:t>
-            </a:r>
-            <a:endParaRPr lang="en-US" sz="850" dirty="0"/>
-          </a:p>
-        </p:txBody>
-      </p:sp>
-      <p:sp>
-        <p:nvSpPr>
-          <p:cNvPr id="9" name="Shape 7"/>
-          <p:cNvSpPr/>
-          <p:nvPr/>
-        </p:nvSpPr>
-        <p:spPr>
-          <a:xfrm>
-            <a:off x="3438144" y="3200400"/>
-            <a:ext cx="2560320" cy="1920240"/>
-          </a:xfrm>
-          <a:prstGeom prst="roundRect">
-            <a:avLst>
-              <a:gd name="adj" fmla="val 4762"/>
-            </a:avLst>
-          </a:prstGeom>
-          <a:solidFill>
-            <a:srgbClr val="0B100E"/>
-          </a:solidFill>
-          <a:ln w="12700">
-            <a:solidFill>
-              <a:srgbClr val="24322B"/>
-            </a:solidFill>
-            <a:prstDash val="dash"/>
-          </a:ln>
-        </p:spPr>
-      </p:sp>
-      <p:sp>
-        <p:nvSpPr>
-          <p:cNvPr id="10" name="Text 8"/>
-          <p:cNvSpPr txBox="1"/>
-          <p:nvPr/>
-        </p:nvSpPr>
-        <p:spPr>
-          <a:xfrm>
-            <a:off x="3657600" y="3438144"/>
-            <a:ext cx="2157984" cy="603504"/>
-          </a:xfrm>
-          <a:prstGeom prst="rect">
-            <a:avLst/>
-          </a:prstGeom>
-          <a:noFill/>
-          <a:ln/>
-        </p:spPr>
-        <p:txBody>
-          <a:bodyPr wrap="square" lIns="0" tIns="0" rIns="0" bIns="0" rtlCol="0" anchor="ctr"/>
-          <a:lstStyle/>
-          <a:p>
-            <a:pPr indent="0" marL="0">
-              <a:lnSpc>
-                <a:spcPts val="1700"/>
-              </a:lnSpc>
-              <a:buNone/>
-            </a:pPr>
-            <a:r>
-              <a:rPr lang="en-US" sz="1350" b="1" dirty="0">
-                <a:solidFill>
-                  <a:srgbClr val="EDF3EF"/>
-                </a:solidFill>
-                <a:latin typeface="Arial" pitchFamily="34" charset="0"/>
-                <a:ea typeface="Arial" pitchFamily="34" charset="-122"/>
-                <a:cs typeface="Arial" pitchFamily="34" charset="-120"/>
-              </a:rPr>
-              <a:t>Quantas escolas no recorte</a:t>
-            </a:r>
-            <a:endParaRPr lang="en-US" sz="1350" dirty="0"/>
-          </a:p>
-        </p:txBody>
-      </p:sp>
-      <p:sp>
-        <p:nvSpPr>
-          <p:cNvPr id="11" name="Text 9"/>
-          <p:cNvSpPr txBox="1"/>
-          <p:nvPr/>
-        </p:nvSpPr>
-        <p:spPr>
-          <a:xfrm>
-            <a:off x="3657600" y="4096512"/>
-            <a:ext cx="2157984" cy="384048"/>
-          </a:xfrm>
-          <a:prstGeom prst="rect">
-            <a:avLst/>
-          </a:prstGeom>
-          <a:noFill/>
-          <a:ln/>
-        </p:spPr>
-        <p:txBody>
-          <a:bodyPr wrap="square" lIns="0" tIns="0" rIns="0" bIns="0" rtlCol="0" anchor="ctr"/>
-          <a:lstStyle/>
-          <a:p>
-            <a:pPr indent="0" marL="0">
-              <a:lnSpc>
-                <a:spcPts val="1400"/>
-              </a:lnSpc>
-              <a:buNone/>
-            </a:pPr>
-            <a:r>
-              <a:rPr lang="en-US" sz="1150" dirty="0">
-                <a:solidFill>
-                  <a:srgbClr val="9DB0A6"/>
-                </a:solidFill>
-                <a:latin typeface="Calibri" pitchFamily="34" charset="0"/>
-                <a:ea typeface="Calibri" pitchFamily="34" charset="-122"/>
-                <a:cs typeface="Calibri" pitchFamily="34" charset="-120"/>
-              </a:rPr>
-              <a:t>rede, município ou grupo</a:t>
-            </a:r>
-            <a:endParaRPr lang="en-US" sz="1150" dirty="0"/>
-          </a:p>
-        </p:txBody>
-      </p:sp>
-      <p:sp>
-        <p:nvSpPr>
-          <p:cNvPr id="12" name="Text 10"/>
-          <p:cNvSpPr txBox="1"/>
-          <p:nvPr/>
-        </p:nvSpPr>
-        <p:spPr>
-          <a:xfrm>
-            <a:off x="3657600" y="4553712"/>
-            <a:ext cx="2157984" cy="411480"/>
-          </a:xfrm>
-          <a:prstGeom prst="rect">
-            <a:avLst/>
-          </a:prstGeom>
-          <a:noFill/>
-          <a:ln/>
-        </p:spPr>
-        <p:txBody>
-          <a:bodyPr wrap="square" lIns="0" tIns="0" rIns="0" bIns="0" rtlCol="0" anchor="ctr"/>
-          <a:lstStyle/>
-          <a:p>
-            <a:pPr indent="0" marL="0">
-              <a:lnSpc>
-                <a:spcPts val="1100"/>
-              </a:lnSpc>
-              <a:buNone/>
-            </a:pPr>
-            <a:r>
-              <a:rPr lang="en-US" sz="850" dirty="0">
-                <a:solidFill>
-                  <a:srgbClr val="E4572E"/>
-                </a:solidFill>
-                <a:latin typeface="Courier New" pitchFamily="34" charset="0"/>
-                <a:ea typeface="Courier New" pitchFamily="34" charset="-122"/>
-                <a:cs typeface="Courier New" pitchFamily="34" charset="-120"/>
-              </a:rPr>
-              <a:t>fonte: Censo Escolar, INEP</a:t>
-            </a:r>
-            <a:endParaRPr lang="en-US" sz="850" dirty="0"/>
-          </a:p>
-        </p:txBody>
-      </p:sp>
-      <p:sp>
-        <p:nvSpPr>
-          <p:cNvPr id="13" name="Shape 11"/>
-          <p:cNvSpPr/>
-          <p:nvPr/>
-        </p:nvSpPr>
-        <p:spPr>
-          <a:xfrm>
-            <a:off x="6190488" y="3200400"/>
-            <a:ext cx="2560320" cy="1920240"/>
-          </a:xfrm>
-          <a:prstGeom prst="roundRect">
-            <a:avLst>
-              <a:gd name="adj" fmla="val 4762"/>
-            </a:avLst>
-          </a:prstGeom>
-          <a:solidFill>
-            <a:srgbClr val="0B100E"/>
-          </a:solidFill>
-          <a:ln w="12700">
-            <a:solidFill>
-              <a:srgbClr val="24322B"/>
-            </a:solidFill>
-            <a:prstDash val="dash"/>
-          </a:ln>
-        </p:spPr>
-      </p:sp>
-      <p:sp>
-        <p:nvSpPr>
-          <p:cNvPr id="14" name="Text 12"/>
-          <p:cNvSpPr txBox="1"/>
-          <p:nvPr/>
-        </p:nvSpPr>
-        <p:spPr>
-          <a:xfrm>
-            <a:off x="6409944" y="3438144"/>
-            <a:ext cx="2157984" cy="603504"/>
-          </a:xfrm>
-          <a:prstGeom prst="rect">
-            <a:avLst/>
-          </a:prstGeom>
-          <a:noFill/>
-          <a:ln/>
-        </p:spPr>
-        <p:txBody>
-          <a:bodyPr wrap="square" lIns="0" tIns="0" rIns="0" bIns="0" rtlCol="0" anchor="ctr"/>
-          <a:lstStyle/>
-          <a:p>
-            <a:pPr indent="0" marL="0">
-              <a:lnSpc>
-                <a:spcPts val="1700"/>
-              </a:lnSpc>
-              <a:buNone/>
-            </a:pPr>
-            <a:r>
-              <a:rPr lang="en-US" sz="1350" b="1" dirty="0">
-                <a:solidFill>
-                  <a:srgbClr val="EDF3EF"/>
-                </a:solidFill>
-                <a:latin typeface="Arial" pitchFamily="34" charset="0"/>
-                <a:ea typeface="Arial" pitchFamily="34" charset="-122"/>
-                <a:cs typeface="Arial" pitchFamily="34" charset="-120"/>
-              </a:rPr>
-              <a:t>Alertas por dia que se aguenta</a:t>
-            </a:r>
-            <a:endParaRPr lang="en-US" sz="1350" dirty="0"/>
-          </a:p>
-        </p:txBody>
-      </p:sp>
-      <p:sp>
-        <p:nvSpPr>
-          <p:cNvPr id="15" name="Text 13"/>
-          <p:cNvSpPr txBox="1"/>
-          <p:nvPr/>
-        </p:nvSpPr>
-        <p:spPr>
-          <a:xfrm>
-            <a:off x="6409944" y="4096512"/>
-            <a:ext cx="2157984" cy="384048"/>
-          </a:xfrm>
-          <a:prstGeom prst="rect">
-            <a:avLst/>
-          </a:prstGeom>
-          <a:noFill/>
-          <a:ln/>
-        </p:spPr>
-        <p:txBody>
-          <a:bodyPr wrap="square" lIns="0" tIns="0" rIns="0" bIns="0" rtlCol="0" anchor="ctr"/>
-          <a:lstStyle/>
-          <a:p>
-            <a:pPr indent="0" marL="0">
-              <a:lnSpc>
-                <a:spcPts val="1400"/>
-              </a:lnSpc>
-              <a:buNone/>
-            </a:pPr>
-            <a:r>
-              <a:rPr lang="en-US" sz="1150" dirty="0">
-                <a:solidFill>
-                  <a:srgbClr val="9DB0A6"/>
-                </a:solidFill>
-                <a:latin typeface="Calibri" pitchFamily="34" charset="0"/>
-                <a:ea typeface="Calibri" pitchFamily="34" charset="-122"/>
-                <a:cs typeface="Calibri" pitchFamily="34" charset="-120"/>
-              </a:rPr>
-              <a:t>e quantos foram engano</a:t>
-            </a:r>
-            <a:endParaRPr lang="en-US" sz="1150" dirty="0"/>
-          </a:p>
-        </p:txBody>
-      </p:sp>
-      <p:sp>
-        <p:nvSpPr>
-          <p:cNvPr id="16" name="Text 14"/>
-          <p:cNvSpPr txBox="1"/>
-          <p:nvPr/>
-        </p:nvSpPr>
-        <p:spPr>
-          <a:xfrm>
-            <a:off x="6409944" y="4553712"/>
-            <a:ext cx="2157984" cy="411480"/>
-          </a:xfrm>
-          <a:prstGeom prst="rect">
-            <a:avLst/>
-          </a:prstGeom>
-          <a:noFill/>
-          <a:ln/>
-        </p:spPr>
-        <p:txBody>
-          <a:bodyPr wrap="square" lIns="0" tIns="0" rIns="0" bIns="0" rtlCol="0" anchor="ctr"/>
-          <a:lstStyle/>
-          <a:p>
-            <a:pPr indent="0" marL="0">
-              <a:lnSpc>
-                <a:spcPts val="1100"/>
-              </a:lnSpc>
-              <a:buNone/>
-            </a:pPr>
-            <a:r>
-              <a:rPr lang="en-US" sz="850" dirty="0">
-                <a:solidFill>
-                  <a:srgbClr val="E4572E"/>
-                </a:solidFill>
-                <a:latin typeface="Courier New" pitchFamily="34" charset="0"/>
-                <a:ea typeface="Courier New" pitchFamily="34" charset="-122"/>
-                <a:cs typeface="Courier New" pitchFamily="34" charset="-120"/>
-              </a:rPr>
-              <a:t>fonte: o piloto, e só ele</a:t>
-            </a:r>
-            <a:endParaRPr lang="en-US" sz="850" dirty="0"/>
-          </a:p>
-        </p:txBody>
-      </p:sp>
-      <p:sp>
-        <p:nvSpPr>
-          <p:cNvPr id="17" name="Shape 15"/>
-          <p:cNvSpPr/>
-          <p:nvPr/>
-        </p:nvSpPr>
-        <p:spPr>
-          <a:xfrm>
-            <a:off x="8942832" y="3200400"/>
-            <a:ext cx="2560320" cy="1920240"/>
-          </a:xfrm>
-          <a:prstGeom prst="roundRect">
-            <a:avLst>
-              <a:gd name="adj" fmla="val 4762"/>
-            </a:avLst>
-          </a:prstGeom>
-          <a:solidFill>
-            <a:srgbClr val="0B100E"/>
-          </a:solidFill>
-          <a:ln w="12700">
-            <a:solidFill>
-              <a:srgbClr val="24322B"/>
-            </a:solidFill>
-            <a:prstDash val="dash"/>
-          </a:ln>
-        </p:spPr>
-      </p:sp>
-      <p:sp>
-        <p:nvSpPr>
-          <p:cNvPr id="18" name="Text 16"/>
-          <p:cNvSpPr txBox="1"/>
-          <p:nvPr/>
-        </p:nvSpPr>
-        <p:spPr>
-          <a:xfrm>
-            <a:off x="9162288" y="3438144"/>
-            <a:ext cx="2157984" cy="603504"/>
-          </a:xfrm>
-          <a:prstGeom prst="rect">
-            <a:avLst/>
-          </a:prstGeom>
-          <a:noFill/>
-          <a:ln/>
-        </p:spPr>
-        <p:txBody>
-          <a:bodyPr wrap="square" lIns="0" tIns="0" rIns="0" bIns="0" rtlCol="0" anchor="ctr"/>
-          <a:lstStyle/>
-          <a:p>
-            <a:pPr indent="0" marL="0">
-              <a:lnSpc>
-                <a:spcPts val="1700"/>
-              </a:lnSpc>
-              <a:buNone/>
-            </a:pPr>
-            <a:r>
-              <a:rPr lang="en-US" sz="1350" b="1" dirty="0">
-                <a:solidFill>
-                  <a:srgbClr val="EDF3EF"/>
-                </a:solidFill>
-                <a:latin typeface="Arial" pitchFamily="34" charset="0"/>
-                <a:ea typeface="Arial" pitchFamily="34" charset="-122"/>
-                <a:cs typeface="Arial" pitchFamily="34" charset="-120"/>
-              </a:rPr>
-              <a:t>Acerto da briga em vídeo real</a:t>
-            </a:r>
-            <a:endParaRPr lang="en-US" sz="1350" dirty="0"/>
-          </a:p>
-        </p:txBody>
-      </p:sp>
-      <p:sp>
-        <p:nvSpPr>
-          <p:cNvPr id="19" name="Text 17"/>
-          <p:cNvSpPr txBox="1"/>
-          <p:nvPr/>
-        </p:nvSpPr>
-        <p:spPr>
-          <a:xfrm>
-            <a:off x="9162288" y="4096512"/>
-            <a:ext cx="2157984" cy="384048"/>
-          </a:xfrm>
-          <a:prstGeom prst="rect">
-            <a:avLst/>
-          </a:prstGeom>
-          <a:noFill/>
-          <a:ln/>
-        </p:spPr>
-        <p:txBody>
-          <a:bodyPr wrap="square" lIns="0" tIns="0" rIns="0" bIns="0" rtlCol="0" anchor="ctr"/>
-          <a:lstStyle/>
-          <a:p>
-            <a:pPr indent="0" marL="0">
-              <a:lnSpc>
-                <a:spcPts val="1400"/>
-              </a:lnSpc>
-              <a:buNone/>
-            </a:pPr>
-            <a:r>
-              <a:rPr lang="en-US" sz="1150" dirty="0">
-                <a:solidFill>
-                  <a:srgbClr val="9DB0A6"/>
-                </a:solidFill>
-                <a:latin typeface="Calibri" pitchFamily="34" charset="0"/>
-                <a:ea typeface="Calibri" pitchFamily="34" charset="-122"/>
-                <a:cs typeface="Calibri" pitchFamily="34" charset="-120"/>
-              </a:rPr>
-              <a:t>hoje é regra, não modelo treinado</a:t>
-            </a:r>
-            <a:endParaRPr lang="en-US" sz="1150" dirty="0"/>
-          </a:p>
-        </p:txBody>
-      </p:sp>
-      <p:sp>
-        <p:nvSpPr>
-          <p:cNvPr id="20" name="Text 18"/>
-          <p:cNvSpPr txBox="1"/>
-          <p:nvPr/>
-        </p:nvSpPr>
-        <p:spPr>
-          <a:xfrm>
-            <a:off x="9162288" y="4553712"/>
-            <a:ext cx="2157984" cy="411480"/>
-          </a:xfrm>
-          <a:prstGeom prst="rect">
-            <a:avLst/>
-          </a:prstGeom>
-          <a:noFill/>
-          <a:ln/>
-        </p:spPr>
-        <p:txBody>
-          <a:bodyPr wrap="square" lIns="0" tIns="0" rIns="0" bIns="0" rtlCol="0" anchor="ctr"/>
-          <a:lstStyle/>
-          <a:p>
-            <a:pPr indent="0" marL="0">
-              <a:lnSpc>
-                <a:spcPts val="1100"/>
-              </a:lnSpc>
-              <a:buNone/>
-            </a:pPr>
-            <a:r>
-              <a:rPr lang="en-US" sz="850" dirty="0">
-                <a:solidFill>
-                  <a:srgbClr val="E4572E"/>
-                </a:solidFill>
-                <a:latin typeface="Courier New" pitchFamily="34" charset="0"/>
-                <a:ea typeface="Courier New" pitchFamily="34" charset="-122"/>
-                <a:cs typeface="Courier New" pitchFamily="34" charset="-120"/>
-              </a:rPr>
-              <a:t>fonte: RWF-2000, 2.000 clipes</a:t>
-            </a:r>
-            <a:endParaRPr lang="en-US" sz="850" dirty="0"/>
-          </a:p>
-        </p:txBody>
-      </p:sp>
-      <p:sp>
-        <p:nvSpPr>
-          <p:cNvPr id="21" name="Text 19"/>
-          <p:cNvSpPr txBox="1"/>
-          <p:nvPr/>
-        </p:nvSpPr>
-        <p:spPr>
-          <a:xfrm>
-            <a:off x="685800" y="5577840"/>
-            <a:ext cx="10515600" cy="411480"/>
-          </a:xfrm>
-          <a:prstGeom prst="rect">
-            <a:avLst/>
-          </a:prstGeom>
-          <a:noFill/>
-          <a:ln/>
-        </p:spPr>
-        <p:txBody>
-          <a:bodyPr wrap="square" lIns="0" tIns="0" rIns="0" bIns="0" rtlCol="0" anchor="ctr"/>
-          <a:lstStyle/>
-          <a:p>
-            <a:pPr indent="0" marL="0">
-              <a:buNone/>
-            </a:pPr>
-            <a:r>
-              <a:rPr lang="en-US" sz="1400" i="1" dirty="0">
-                <a:solidFill>
-                  <a:srgbClr val="9DB0A6"/>
-                </a:solidFill>
-                <a:latin typeface="Calibri" pitchFamily="34" charset="0"/>
-                <a:ea typeface="Calibri" pitchFamily="34" charset="-122"/>
-                <a:cs typeface="Calibri" pitchFamily="34" charset="-120"/>
-              </a:rPr>
-              <a:t>Uma banca pergunta a fonte. “Estimativa nossa” derruba o slide, e com ele o resto da apresentação.</a:t>
-            </a:r>
-            <a:endParaRPr lang="en-US" sz="1400" dirty="0"/>
-          </a:p>
-        </p:txBody>
-      </p:sp>
-      <p:sp>
-        <p:nvSpPr>
-          <p:cNvPr id="22" name="Text 20"/>
-          <p:cNvSpPr txBox="1"/>
-          <p:nvPr/>
-        </p:nvSpPr>
-        <p:spPr>
-          <a:xfrm>
-            <a:off x="685800" y="6291072"/>
-            <a:ext cx="5486400" cy="274320"/>
-          </a:xfrm>
-          <a:prstGeom prst="rect">
-            <a:avLst/>
-          </a:prstGeom>
-          <a:noFill/>
-          <a:ln/>
-        </p:spPr>
-        <p:txBody>
-          <a:bodyPr wrap="square" lIns="0" tIns="0" rIns="0" bIns="0" rtlCol="0" anchor="ctr"/>
-          <a:lstStyle/>
-          <a:p>
-            <a:pPr indent="0" marL="0">
-              <a:buNone/>
-            </a:pPr>
-            <a:r>
-              <a:rPr lang="en-US" sz="900" dirty="0">
-                <a:solidFill>
-                  <a:srgbClr val="6A7D74"/>
-                </a:solidFill>
-                <a:latin typeface="Courier New" pitchFamily="34" charset="0"/>
-                <a:ea typeface="Courier New" pitchFamily="34" charset="-122"/>
-                <a:cs typeface="Courier New" pitchFamily="34" charset="-120"/>
-              </a:rPr>
-              <a:t>Auditix AI  ·  SVATech  ·  grupo 11</a:t>
-            </a:r>
-            <a:endParaRPr lang="en-US" sz="900" dirty="0"/>
-          </a:p>
-        </p:txBody>
-      </p:sp>
-      <p:sp>
-        <p:nvSpPr>
-          <p:cNvPr id="23" name="Text 21"/>
-          <p:cNvSpPr txBox="1"/>
-          <p:nvPr/>
-        </p:nvSpPr>
-        <p:spPr>
-          <a:xfrm>
-            <a:off x="10591495" y="6291072"/>
-            <a:ext cx="914400" cy="274320"/>
-          </a:xfrm>
-          <a:prstGeom prst="rect">
-            <a:avLst/>
-          </a:prstGeom>
-          <a:noFill/>
-          <a:ln/>
-        </p:spPr>
-        <p:txBody>
-          <a:bodyPr wrap="square" lIns="0" tIns="0" rIns="0" bIns="0" rtlCol="0" anchor="ctr"/>
-          <a:lstStyle/>
-          <a:p>
-            <a:pPr algn="r" indent="0" marL="0">
-              <a:buNone/>
-            </a:pPr>
-            <a:r>
-              <a:rPr lang="en-US" sz="900" dirty="0">
-                <a:solidFill>
-                  <a:srgbClr val="6A7D74"/>
-                </a:solidFill>
-                <a:latin typeface="Courier New" pitchFamily="34" charset="0"/>
-                <a:ea typeface="Courier New" pitchFamily="34" charset="-122"/>
-                <a:cs typeface="Courier New" pitchFamily="34" charset="-120"/>
-              </a:rPr>
-              <a:t>13</a:t>
-            </a:r>
-            <a:endParaRPr lang="en-US" sz="900" dirty="0"/>
-          </a:p>
-        </p:txBody>
-      </p:sp>
-    </p:spTree>
-  </p:cSld>
-  <p:clrMapOvr>
-    <a:masterClrMapping/>
-  </p:clrMapOvr>
-</p:sld>
-</file>
-
-<file path=ppt/slides/slide14.xml><?xml version="1.0" encoding="utf-8"?>
-<p:sld xmlns:a="http://schemas.openxmlformats.org/drawingml/2006/main" xmlns:r="http://schemas.openxmlformats.org/officeDocument/2006/relationships" xmlns:p="http://schemas.openxmlformats.org/presentationml/2006/main">
-  <p:cSld name="Slide 14">
-    <p:bg>
-      <p:bgPr>
-        <a:solidFill>
-          <a:srgbClr val="0B100E"/>
-        </a:solidFill>
-      </p:bgPr>
-    </p:bg>
-    <p:spTree>
-      <p:nvGrpSpPr>
-        <p:cNvPr id="1" name=""/>
-        <p:cNvGrpSpPr/>
-        <p:nvPr/>
-      </p:nvGrpSpPr>
-      <p:grpSpPr>
-        <a:xfrm>
-          <a:off x="0" y="0"/>
-          <a:ext cx="0" cy="0"/>
-          <a:chOff x="0" y="0"/>
-          <a:chExt cx="0" cy="0"/>
-        </a:xfrm>
-      </p:grpSpPr>
-      <p:sp>
-        <p:nvSpPr>
-          <p:cNvPr id="2" name="Text 0"/>
-          <p:cNvSpPr txBox="1"/>
-          <p:nvPr/>
-        </p:nvSpPr>
-        <p:spPr>
-          <a:xfrm>
-            <a:off x="685800" y="384048"/>
-            <a:ext cx="10820095" cy="274320"/>
-          </a:xfrm>
-          <a:prstGeom prst="rect">
-            <a:avLst/>
-          </a:prstGeom>
-          <a:noFill/>
-          <a:ln/>
-        </p:spPr>
-        <p:txBody>
-          <a:bodyPr wrap="square" lIns="0" tIns="0" rIns="0" bIns="0" rtlCol="0" anchor="ctr"/>
-          <a:lstStyle/>
-          <a:p>
-            <a:pPr indent="0" marL="0">
-              <a:buNone/>
-            </a:pPr>
-            <a:r>
-              <a:rPr lang="en-US" sz="1100" spc="200" kern="0" dirty="0">
-                <a:solidFill>
-                  <a:srgbClr val="3FBF5A"/>
-                </a:solidFill>
-                <a:latin typeface="Courier New" pitchFamily="34" charset="0"/>
-                <a:ea typeface="Courier New" pitchFamily="34" charset="-122"/>
-                <a:cs typeface="Courier New" pitchFamily="34" charset="-120"/>
-              </a:rPr>
-              <a:t>PARA FECHAR</a:t>
-            </a:r>
-            <a:endParaRPr lang="en-US" sz="1100" dirty="0"/>
-          </a:p>
-        </p:txBody>
-      </p:sp>
-      <p:sp>
-        <p:nvSpPr>
-          <p:cNvPr id="3" name="Text 1"/>
-          <p:cNvSpPr txBox="1"/>
-          <p:nvPr/>
-        </p:nvSpPr>
-        <p:spPr>
-          <a:xfrm>
-            <a:off x="685800" y="1005840"/>
-            <a:ext cx="10515600" cy="1737360"/>
-          </a:xfrm>
-          <a:prstGeom prst="rect">
-            <a:avLst/>
-          </a:prstGeom>
-          <a:noFill/>
-          <a:ln/>
-        </p:spPr>
-        <p:txBody>
-          <a:bodyPr wrap="square" lIns="0" tIns="0" rIns="0" bIns="0" rtlCol="0" anchor="ctr"/>
-          <a:lstStyle/>
-          <a:p>
-            <a:pPr indent="0" marL="0">
-              <a:lnSpc>
-                <a:spcPts val="5200"/>
-              </a:lnSpc>
-              <a:buNone/>
-            </a:pPr>
-            <a:r>
-              <a:rPr lang="en-US" sz="4400" b="1" dirty="0">
-                <a:solidFill>
-                  <a:srgbClr val="EDF3EF"/>
-                </a:solidFill>
-                <a:latin typeface="Arial" pitchFamily="34" charset="0"/>
-                <a:ea typeface="Arial" pitchFamily="34" charset="-122"/>
-                <a:cs typeface="Arial" pitchFamily="34" charset="-120"/>
-              </a:rPr>
-              <a:t>Um sistema que avisa</a:t>
-            </a:r>
-            <a:endParaRPr lang="en-US" sz="4400" dirty="0"/>
-          </a:p>
-          <a:p>
-            <a:pPr indent="0" marL="0">
-              <a:lnSpc>
-                <a:spcPts val="5200"/>
-              </a:lnSpc>
-              <a:buNone/>
-            </a:pPr>
-            <a:r>
-              <a:rPr lang="en-US" sz="4400" b="1" dirty="0">
-                <a:solidFill>
-                  <a:srgbClr val="EDF3EF"/>
-                </a:solidFill>
-                <a:latin typeface="Arial" pitchFamily="34" charset="0"/>
-                <a:ea typeface="Arial" pitchFamily="34" charset="-122"/>
-                <a:cs typeface="Arial" pitchFamily="34" charset="-120"/>
-              </a:rPr>
-              <a:t>e responde pelo que disse.</a:t>
-            </a:r>
-            <a:endParaRPr lang="en-US" sz="4400" dirty="0"/>
-          </a:p>
-        </p:txBody>
-      </p:sp>
-      <p:sp>
-        <p:nvSpPr>
-          <p:cNvPr id="4" name="Text 2"/>
-          <p:cNvSpPr txBox="1"/>
-          <p:nvPr/>
-        </p:nvSpPr>
-        <p:spPr>
-          <a:xfrm>
-            <a:off x="685800" y="2971800"/>
-            <a:ext cx="10332720" cy="1188720"/>
-          </a:xfrm>
-          <a:prstGeom prst="rect">
-            <a:avLst/>
-          </a:prstGeom>
-          <a:noFill/>
-          <a:ln/>
-        </p:spPr>
-        <p:txBody>
-          <a:bodyPr wrap="square" lIns="0" tIns="0" rIns="0" bIns="0" rtlCol="0" anchor="ctr"/>
-          <a:lstStyle/>
-          <a:p>
-            <a:pPr indent="0" marL="0">
-              <a:lnSpc>
-                <a:spcPts val="2400"/>
-              </a:lnSpc>
-              <a:buNone/>
-            </a:pPr>
-            <a:r>
-              <a:rPr lang="en-US" sz="1600" dirty="0">
-                <a:solidFill>
-                  <a:srgbClr val="9DB0A6"/>
-                </a:solidFill>
-                <a:latin typeface="Calibri" pitchFamily="34" charset="0"/>
-                <a:ea typeface="Calibri" pitchFamily="34" charset="-122"/>
-                <a:cs typeface="Calibri" pitchFamily="34" charset="-120"/>
-              </a:rPr>
-              <a:t>Detectar queda é a parte fácil. O que torna o Auditix defensável numa escola é o que vem junto: </a:t>
-            </a:r>
-            <a:pPr indent="0" marL="0">
-              <a:lnSpc>
-                <a:spcPts val="2400"/>
-              </a:lnSpc>
-              <a:buNone/>
-            </a:pPr>
-            <a:r>
-              <a:rPr lang="en-US" sz="1600" dirty="0">
-                <a:solidFill>
-                  <a:srgbClr val="EDF3EF"/>
-                </a:solidFill>
-                <a:latin typeface="Calibri" pitchFamily="34" charset="0"/>
-                <a:ea typeface="Calibri" pitchFamily="34" charset="-122"/>
-                <a:cs typeface="Calibri" pitchFamily="34" charset="-120"/>
-              </a:rPr>
-              <a:t>o registro que denuncia adulteração</a:t>
-            </a:r>
-            <a:pPr indent="0" marL="0">
-              <a:lnSpc>
-                <a:spcPts val="2400"/>
-              </a:lnSpc>
-              <a:buNone/>
-            </a:pPr>
-            <a:r>
-              <a:rPr lang="en-US" sz="1600" dirty="0">
-                <a:solidFill>
-                  <a:srgbClr val="9DB0A6"/>
-                </a:solidFill>
-                <a:latin typeface="Calibri" pitchFamily="34" charset="0"/>
-                <a:ea typeface="Calibri" pitchFamily="34" charset="-122"/>
-                <a:cs typeface="Calibri" pitchFamily="34" charset="-120"/>
-              </a:rPr>
-              <a:t>, </a:t>
-            </a:r>
-            <a:pPr indent="0" marL="0">
-              <a:lnSpc>
-                <a:spcPts val="2400"/>
-              </a:lnSpc>
-              <a:buNone/>
-            </a:pPr>
-            <a:r>
-              <a:rPr lang="en-US" sz="1600" dirty="0">
-                <a:solidFill>
-                  <a:srgbClr val="EDF3EF"/>
-                </a:solidFill>
-                <a:latin typeface="Calibri" pitchFamily="34" charset="0"/>
-                <a:ea typeface="Calibri" pitchFamily="34" charset="-122"/>
-                <a:cs typeface="Calibri" pitchFamily="34" charset="-120"/>
-              </a:rPr>
-              <a:t>a imagem que se apaga</a:t>
-            </a:r>
-            <a:pPr indent="0" marL="0">
-              <a:lnSpc>
-                <a:spcPts val="2400"/>
-              </a:lnSpc>
-              <a:buNone/>
-            </a:pPr>
-            <a:r>
-              <a:rPr lang="en-US" sz="1600" dirty="0">
-                <a:solidFill>
-                  <a:srgbClr val="9DB0A6"/>
-                </a:solidFill>
-                <a:latin typeface="Calibri" pitchFamily="34" charset="0"/>
-                <a:ea typeface="Calibri" pitchFamily="34" charset="-122"/>
-                <a:cs typeface="Calibri" pitchFamily="34" charset="-120"/>
-              </a:rPr>
-              <a:t>, </a:t>
-            </a:r>
-            <a:pPr indent="0" marL="0">
-              <a:lnSpc>
-                <a:spcPts val="2400"/>
-              </a:lnSpc>
-              <a:buNone/>
-            </a:pPr>
-            <a:r>
-              <a:rPr lang="en-US" sz="1600" dirty="0">
-                <a:solidFill>
-                  <a:srgbClr val="EDF3EF"/>
-                </a:solidFill>
-                <a:latin typeface="Calibri" pitchFamily="34" charset="0"/>
-                <a:ea typeface="Calibri" pitchFamily="34" charset="-122"/>
-                <a:cs typeface="Calibri" pitchFamily="34" charset="-120"/>
-              </a:rPr>
-              <a:t>o acesso que fica gravado</a:t>
-            </a:r>
-            <a:pPr indent="0" marL="0">
-              <a:lnSpc>
-                <a:spcPts val="2400"/>
-              </a:lnSpc>
-              <a:buNone/>
-            </a:pPr>
-            <a:r>
-              <a:rPr lang="en-US" sz="1600" dirty="0">
-                <a:solidFill>
-                  <a:srgbClr val="9DB0A6"/>
-                </a:solidFill>
-                <a:latin typeface="Calibri" pitchFamily="34" charset="0"/>
-                <a:ea typeface="Calibri" pitchFamily="34" charset="-122"/>
-                <a:cs typeface="Calibri" pitchFamily="34" charset="-120"/>
-              </a:rPr>
-              <a:t> e </a:t>
-            </a:r>
-            <a:pPr indent="0" marL="0">
-              <a:lnSpc>
-                <a:spcPts val="2400"/>
-              </a:lnSpc>
-              <a:buNone/>
-            </a:pPr>
-            <a:r>
-              <a:rPr lang="en-US" sz="1600" dirty="0">
-                <a:solidFill>
-                  <a:srgbClr val="EDF3EF"/>
-                </a:solidFill>
-                <a:latin typeface="Calibri" pitchFamily="34" charset="0"/>
-                <a:ea typeface="Calibri" pitchFamily="34" charset="-122"/>
-                <a:cs typeface="Calibri" pitchFamily="34" charset="-120"/>
-              </a:rPr>
-              <a:t>o alerta que pede conferência em vez de afirmar culpa</a:t>
-            </a:r>
-            <a:pPr indent="0" marL="0">
-              <a:lnSpc>
-                <a:spcPts val="2400"/>
-              </a:lnSpc>
-              <a:buNone/>
-            </a:pPr>
-            <a:r>
-              <a:rPr lang="en-US" sz="1600" dirty="0">
-                <a:solidFill>
-                  <a:srgbClr val="9DB0A6"/>
-                </a:solidFill>
-                <a:latin typeface="Calibri" pitchFamily="34" charset="0"/>
-                <a:ea typeface="Calibri" pitchFamily="34" charset="-122"/>
-                <a:cs typeface="Calibri" pitchFamily="34" charset="-120"/>
-              </a:rPr>
-              <a:t>.</a:t>
-            </a:r>
-            <a:endParaRPr lang="en-US" sz="1600" dirty="0"/>
-          </a:p>
-        </p:txBody>
-      </p:sp>
-      <p:sp>
-        <p:nvSpPr>
-          <p:cNvPr id="5" name="Shape 3"/>
-          <p:cNvSpPr/>
-          <p:nvPr/>
-        </p:nvSpPr>
-        <p:spPr>
-          <a:xfrm>
-            <a:off x="685800" y="4526280"/>
-            <a:ext cx="36576" cy="1005840"/>
-          </a:xfrm>
-          <a:prstGeom prst="rect">
-            <a:avLst/>
-          </a:prstGeom>
-          <a:solidFill>
-            <a:srgbClr val="3FBF5A"/>
-          </a:solidFill>
-          <a:ln/>
-        </p:spPr>
-      </p:sp>
-      <p:sp>
-        <p:nvSpPr>
-          <p:cNvPr id="6" name="Text 4"/>
-          <p:cNvSpPr txBox="1"/>
-          <p:nvPr/>
-        </p:nvSpPr>
-        <p:spPr>
-          <a:xfrm>
-            <a:off x="914400" y="4526280"/>
-            <a:ext cx="8229600" cy="411480"/>
-          </a:xfrm>
-          <a:prstGeom prst="rect">
-            <a:avLst/>
-          </a:prstGeom>
-          <a:noFill/>
-          <a:ln/>
-        </p:spPr>
-        <p:txBody>
-          <a:bodyPr wrap="square" lIns="0" tIns="0" rIns="0" bIns="0" rtlCol="0" anchor="ctr"/>
-          <a:lstStyle/>
-          <a:p>
-            <a:pPr indent="0" marL="0">
-              <a:buNone/>
-            </a:pPr>
-            <a:r>
-              <a:rPr lang="en-US" sz="2400" b="1" dirty="0">
-                <a:solidFill>
-                  <a:srgbClr val="EDF3EF"/>
-                </a:solidFill>
-                <a:latin typeface="Arial" pitchFamily="34" charset="0"/>
-                <a:ea typeface="Arial" pitchFamily="34" charset="-122"/>
-                <a:cs typeface="Arial" pitchFamily="34" charset="-120"/>
-              </a:rPr>
-              <a:t>Alerta não é acusação.</a:t>
-            </a:r>
-            <a:endParaRPr lang="en-US" sz="2400" dirty="0"/>
-          </a:p>
-        </p:txBody>
-      </p:sp>
-      <p:sp>
-        <p:nvSpPr>
-          <p:cNvPr id="7" name="Text 5"/>
-          <p:cNvSpPr txBox="1"/>
-          <p:nvPr/>
-        </p:nvSpPr>
-        <p:spPr>
-          <a:xfrm>
-            <a:off x="914400" y="4983480"/>
-            <a:ext cx="8686800" cy="457200"/>
-          </a:xfrm>
-          <a:prstGeom prst="rect">
-            <a:avLst/>
-          </a:prstGeom>
-          <a:noFill/>
-          <a:ln/>
-        </p:spPr>
-        <p:txBody>
-          <a:bodyPr wrap="square" lIns="0" tIns="0" rIns="0" bIns="0" rtlCol="0" anchor="ctr"/>
-          <a:lstStyle/>
-          <a:p>
-            <a:pPr indent="0" marL="0">
-              <a:buNone/>
-            </a:pPr>
-            <a:r>
-              <a:rPr lang="en-US" sz="1400" dirty="0">
-                <a:solidFill>
-                  <a:srgbClr val="9DB0A6"/>
-                </a:solidFill>
-                <a:latin typeface="Calibri" pitchFamily="34" charset="0"/>
-                <a:ea typeface="Calibri" pitchFamily="34" charset="-122"/>
-                <a:cs typeface="Calibri" pitchFamily="34" charset="-120"/>
-              </a:rPr>
-              <a:t>É um pedido para alguém ir olhar, feito rápido o bastante para ainda valer a pena.</a:t>
-            </a:r>
-            <a:endParaRPr lang="en-US" sz="1400" dirty="0"/>
-          </a:p>
-        </p:txBody>
-      </p:sp>
-      <p:sp>
-        <p:nvSpPr>
-          <p:cNvPr id="8" name="Text 6"/>
-          <p:cNvSpPr txBox="1"/>
-          <p:nvPr/>
-        </p:nvSpPr>
-        <p:spPr>
-          <a:xfrm>
-            <a:off x="685800" y="5943600"/>
-            <a:ext cx="10515600" cy="274320"/>
-          </a:xfrm>
-          <a:prstGeom prst="rect">
-            <a:avLst/>
-          </a:prstGeom>
-          <a:noFill/>
-          <a:ln/>
-        </p:spPr>
-        <p:txBody>
-          <a:bodyPr wrap="square" lIns="0" tIns="0" rIns="0" bIns="0" rtlCol="0" anchor="ctr"/>
-          <a:lstStyle/>
-          <a:p>
-            <a:pPr indent="0" marL="0">
-              <a:buNone/>
-            </a:pPr>
-            <a:r>
-              <a:rPr lang="en-US" sz="1000" dirty="0">
-                <a:solidFill>
-                  <a:srgbClr val="6A7D74"/>
-                </a:solidFill>
-                <a:latin typeface="Courier New" pitchFamily="34" charset="0"/>
-                <a:ea typeface="Courier New" pitchFamily="34" charset="-122"/>
-                <a:cs typeface="Courier New" pitchFamily="34" charset="-120"/>
-              </a:rPr>
-              <a:t>SVATech  ·  Auditix AI  ·  grupo 11  ·  2ECR          Desafio DATEN x FIAP  ·  “Antes do NEXT”</a:t>
+              <a:t>Auditix IA  ·  grupo 11  ·  2ECR          Desafio DATEN x FIAP  ·  “Antes do NEXT”</a:t>
             </a:r>
             <a:endParaRPr lang="en-US" sz="1000" dirty="0"/>
           </a:p>
@@ -7590,7 +6474,7 @@
                 <a:ea typeface="Courier New" pitchFamily="34" charset="-122"/>
                 <a:cs typeface="Courier New" pitchFamily="34" charset="-120"/>
               </a:rPr>
-              <a:t>Auditix AI  ·  SVATech  ·  grupo 11</a:t>
+              <a:t>Auditix IA  ·  grupo 11</a:t>
             </a:r>
             <a:endParaRPr lang="en-US" sz="900" dirty="0"/>
           </a:p>
@@ -8732,7 +7616,7 @@
                 <a:ea typeface="Courier New" pitchFamily="34" charset="-122"/>
                 <a:cs typeface="Courier New" pitchFamily="34" charset="-120"/>
               </a:rPr>
-              <a:t>Auditix AI  ·  SVATech  ·  grupo 11</a:t>
+              <a:t>Auditix IA  ·  grupo 11</a:t>
             </a:r>
             <a:endParaRPr lang="en-US" sz="900" dirty="0"/>
           </a:p>
@@ -9792,7 +8676,7 @@
                 <a:ea typeface="Courier New" pitchFamily="34" charset="-122"/>
                 <a:cs typeface="Courier New" pitchFamily="34" charset="-120"/>
               </a:rPr>
-              <a:t>Auditix AI  ·  SVATech  ·  grupo 11</a:t>
+              <a:t>Auditix IA  ·  grupo 11</a:t>
             </a:r>
             <a:endParaRPr lang="en-US" sz="900" dirty="0"/>
           </a:p>
@@ -10290,7 +9174,7 @@
                 <a:ea typeface="Courier New" pitchFamily="34" charset="-122"/>
                 <a:cs typeface="Courier New" pitchFamily="34" charset="-120"/>
               </a:rPr>
-              <a:t>Auditix AI  ·  SVATech  ·  grupo 11</a:t>
+              <a:t>Auditix IA  ·  grupo 11</a:t>
             </a:r>
             <a:endParaRPr lang="en-US" sz="900" dirty="0"/>
           </a:p>
@@ -11191,7 +10075,7 @@
                 <a:ea typeface="Courier New" pitchFamily="34" charset="-122"/>
                 <a:cs typeface="Courier New" pitchFamily="34" charset="-120"/>
               </a:rPr>
-              <a:t>Auditix AI  ·  SVATech  ·  grupo 11</a:t>
+              <a:t>Auditix IA  ·  grupo 11</a:t>
             </a:r>
             <a:endParaRPr lang="en-US" sz="900" dirty="0"/>
           </a:p>
@@ -11295,13 +10179,13 @@
             <a:r>
               <a:rPr lang="en-US" sz="1100" spc="200" kern="0" dirty="0">
                 <a:solidFill>
-                  <a:srgbClr val="E4572E"/>
+                  <a:srgbClr val="3FBF5A"/>
                 </a:solidFill>
                 <a:latin typeface="Courier New" pitchFamily="34" charset="0"/>
                 <a:ea typeface="Courier New" pitchFamily="34" charset="-122"/>
                 <a:cs typeface="Courier New" pitchFamily="34" charset="-120"/>
               </a:rPr>
-              <a:t>AGOSTO DE 2026</a:t>
+              <a:t>DO CHÃO À CAIXA DE ENTRADA</a:t>
             </a:r>
             <a:endParaRPr lang="en-US" sz="1100" dirty="0"/>
           </a:p>
@@ -11343,167 +10227,31 @@
                 <a:ea typeface="Arial" pitchFamily="34" charset="-122"/>
                 <a:cs typeface="Arial" pitchFamily="34" charset="-120"/>
               </a:rPr>
-              <a:t>A ANPD já suspendeu</a:t>
+              <a:t>Segundos, não turnos.</a:t>
             </a:r>
             <a:endParaRPr lang="en-US" sz="3600" dirty="0"/>
           </a:p>
-          <a:p>
-            <a:pPr indent="0" marL="0">
-              <a:lnSpc>
-                <a:spcPts val="3800"/>
-              </a:lnSpc>
-              <a:buNone/>
-            </a:pPr>
-            <a:r>
-              <a:rPr lang="en-US" sz="3600" b="1" dirty="0">
-                <a:solidFill>
-                  <a:srgbClr val="EDF3EF"/>
-                </a:solidFill>
-                <a:latin typeface="Arial" pitchFamily="34" charset="0"/>
-                <a:ea typeface="Arial" pitchFamily="34" charset="-122"/>
-                <a:cs typeface="Arial" pitchFamily="34" charset="-120"/>
-              </a:rPr>
-              <a:t>o caminho que não seguimos.</a:t>
-            </a:r>
-            <a:endParaRPr lang="en-US" sz="3600" dirty="0"/>
-          </a:p>
-        </p:txBody>
-      </p:sp>
-      <p:sp>
-        <p:nvSpPr>
-          <p:cNvPr id="4" name="Text 2"/>
-          <p:cNvSpPr txBox="1"/>
-          <p:nvPr/>
-        </p:nvSpPr>
-        <p:spPr>
-          <a:xfrm>
-            <a:off x="685800" y="2212848"/>
-            <a:ext cx="10515600" cy="868680"/>
-          </a:xfrm>
-          <a:prstGeom prst="rect">
-            <a:avLst/>
-          </a:prstGeom>
-          <a:noFill/>
-          <a:ln/>
-        </p:spPr>
-        <p:txBody>
-          <a:bodyPr wrap="square" lIns="0" tIns="0" rIns="0" bIns="0" rtlCol="0" anchor="ctr"/>
-          <a:lstStyle/>
-          <a:p>
-            <a:pPr indent="0" marL="0">
-              <a:lnSpc>
-                <a:spcPts val="2200"/>
-              </a:lnSpc>
-              <a:buNone/>
-            </a:pPr>
-            <a:r>
-              <a:rPr lang="en-US" sz="1500" dirty="0">
-                <a:solidFill>
-                  <a:srgbClr val="9DB0A6"/>
-                </a:solidFill>
-                <a:latin typeface="Calibri" pitchFamily="34" charset="0"/>
-                <a:ea typeface="Calibri" pitchFamily="34" charset="-122"/>
-                <a:cs typeface="Calibri" pitchFamily="34" charset="-120"/>
-              </a:rPr>
-              <a:t>O maior sistema de IA em escola do Brasil, com mais de 1.700 escolas e cerca de 1 milhão de alunos por dia, foi suspenso por tratar biometria de criança. A agência classificou isso como atividade de alto risco. As cinco falhas apontadas são as cinco perguntas que o Auditix já responde.</a:t>
-            </a:r>
-            <a:endParaRPr lang="en-US" sz="1500" dirty="0"/>
-          </a:p>
-        </p:txBody>
-      </p:sp>
-      <p:sp>
-        <p:nvSpPr>
-          <p:cNvPr id="5" name="Text 3"/>
-          <p:cNvSpPr txBox="1"/>
-          <p:nvPr/>
-        </p:nvSpPr>
-        <p:spPr>
-          <a:xfrm>
-            <a:off x="685800" y="3200400"/>
-            <a:ext cx="4114800" cy="237744"/>
-          </a:xfrm>
-          <a:prstGeom prst="rect">
-            <a:avLst/>
-          </a:prstGeom>
-          <a:noFill/>
-          <a:ln/>
-        </p:spPr>
-        <p:txBody>
-          <a:bodyPr wrap="square" lIns="0" tIns="0" rIns="0" bIns="0" rtlCol="0" anchor="ctr"/>
-          <a:lstStyle/>
-          <a:p>
-            <a:pPr indent="0" marL="0">
-              <a:buNone/>
-            </a:pPr>
-            <a:r>
-              <a:rPr lang="en-US" sz="950" spc="150" kern="0" dirty="0">
-                <a:solidFill>
-                  <a:srgbClr val="6A7D74"/>
-                </a:solidFill>
-                <a:latin typeface="Courier New" pitchFamily="34" charset="0"/>
-                <a:ea typeface="Courier New" pitchFamily="34" charset="-122"/>
-                <a:cs typeface="Courier New" pitchFamily="34" charset="-120"/>
-              </a:rPr>
-              <a:t>O QUE A ANPD APONTOU</a:t>
-            </a:r>
-            <a:endParaRPr lang="en-US" sz="950" dirty="0"/>
-          </a:p>
-        </p:txBody>
-      </p:sp>
-      <p:sp>
-        <p:nvSpPr>
-          <p:cNvPr id="6" name="Text 4"/>
-          <p:cNvSpPr txBox="1"/>
-          <p:nvPr/>
-        </p:nvSpPr>
-        <p:spPr>
-          <a:xfrm>
-            <a:off x="5212080" y="3200400"/>
-            <a:ext cx="5943600" cy="237744"/>
-          </a:xfrm>
-          <a:prstGeom prst="rect">
-            <a:avLst/>
-          </a:prstGeom>
-          <a:noFill/>
-          <a:ln/>
-        </p:spPr>
-        <p:txBody>
-          <a:bodyPr wrap="square" lIns="0" tIns="0" rIns="0" bIns="0" rtlCol="0" anchor="ctr"/>
-          <a:lstStyle/>
-          <a:p>
-            <a:pPr indent="0" marL="0">
-              <a:buNone/>
-            </a:pPr>
-            <a:r>
-              <a:rPr lang="en-US" sz="950" spc="150" kern="0" dirty="0">
-                <a:solidFill>
-                  <a:srgbClr val="3FBF5A"/>
-                </a:solidFill>
-                <a:latin typeface="Courier New" pitchFamily="34" charset="0"/>
-                <a:ea typeface="Courier New" pitchFamily="34" charset="-122"/>
-                <a:cs typeface="Courier New" pitchFamily="34" charset="-120"/>
-              </a:rPr>
-              <a:t>O QUE O AUDITIX FAZ</a:t>
-            </a:r>
-            <a:endParaRPr lang="en-US" sz="950" dirty="0"/>
-          </a:p>
-        </p:txBody>
-      </p:sp>
-      <p:sp>
-        <p:nvSpPr>
-          <p:cNvPr id="7" name="Shape 5"/>
+        </p:txBody>
+      </p:sp>
+      <p:sp>
+        <p:nvSpPr>
+          <p:cNvPr id="4" name="Shape 2"/>
           <p:cNvSpPr/>
           <p:nvPr/>
         </p:nvSpPr>
         <p:spPr>
           <a:xfrm>
-            <a:off x="685800" y="3511296"/>
-            <a:ext cx="10817352" cy="0"/>
-          </a:xfrm>
-          <a:prstGeom prst="line">
-            <a:avLst/>
-          </a:prstGeom>
-          <a:noFill/>
+            <a:off x="685800" y="2606040"/>
+            <a:ext cx="3410712" cy="2514600"/>
+          </a:xfrm>
+          <a:prstGeom prst="roundRect">
+            <a:avLst>
+              <a:gd name="adj" fmla="val 3636"/>
+            </a:avLst>
+          </a:prstGeom>
+          <a:solidFill>
+            <a:srgbClr val="17211C"/>
+          </a:solidFill>
           <a:ln w="12700">
             <a:solidFill>
               <a:srgbClr val="24322B"/>
@@ -11514,14 +10262,92 @@
       </p:sp>
       <p:sp>
         <p:nvSpPr>
-          <p:cNvPr id="8" name="Text 6"/>
-          <p:cNvSpPr txBox="1"/>
-          <p:nvPr/>
-        </p:nvSpPr>
-        <p:spPr>
-          <a:xfrm>
-            <a:off x="685800" y="3575304"/>
-            <a:ext cx="4297680" cy="420624"/>
+          <p:cNvPr id="5" name="Text 3"/>
+          <p:cNvSpPr txBox="1"/>
+          <p:nvPr/>
+        </p:nvSpPr>
+        <p:spPr>
+          <a:xfrm>
+            <a:off x="941832" y="2816352"/>
+            <a:ext cx="2926080" cy="228600"/>
+          </a:xfrm>
+          <a:prstGeom prst="rect">
+            <a:avLst/>
+          </a:prstGeom>
+          <a:noFill/>
+          <a:ln/>
+        </p:spPr>
+        <p:txBody>
+          <a:bodyPr wrap="square" lIns="0" tIns="0" rIns="0" bIns="0" rtlCol="0" anchor="ctr"/>
+          <a:lstStyle/>
+          <a:p>
+            <a:pPr indent="0" marL="0">
+              <a:buNone/>
+            </a:pPr>
+            <a:r>
+              <a:rPr lang="en-US" sz="950" spc="150" kern="0" dirty="0">
+                <a:solidFill>
+                  <a:srgbClr val="3FBF5A"/>
+                </a:solidFill>
+                <a:latin typeface="Courier New" pitchFamily="34" charset="0"/>
+                <a:ea typeface="Courier New" pitchFamily="34" charset="-122"/>
+                <a:cs typeface="Courier New" pitchFamily="34" charset="-120"/>
+              </a:rPr>
+              <a:t>NA SALA</a:t>
+            </a:r>
+            <a:endParaRPr lang="en-US" sz="950" dirty="0"/>
+          </a:p>
+        </p:txBody>
+      </p:sp>
+      <p:sp>
+        <p:nvSpPr>
+          <p:cNvPr id="6" name="Text 4"/>
+          <p:cNvSpPr txBox="1"/>
+          <p:nvPr/>
+        </p:nvSpPr>
+        <p:spPr>
+          <a:xfrm>
+            <a:off x="941832" y="3090672"/>
+            <a:ext cx="2926080" cy="365760"/>
+          </a:xfrm>
+          <a:prstGeom prst="rect">
+            <a:avLst/>
+          </a:prstGeom>
+          <a:noFill/>
+          <a:ln/>
+        </p:spPr>
+        <p:txBody>
+          <a:bodyPr wrap="square" lIns="0" tIns="0" rIns="0" bIns="0" rtlCol="0" anchor="ctr"/>
+          <a:lstStyle/>
+          <a:p>
+            <a:pPr indent="0" marL="0">
+              <a:buNone/>
+            </a:pPr>
+            <a:r>
+              <a:rPr lang="en-US" sz="1600" b="1" dirty="0">
+                <a:solidFill>
+                  <a:srgbClr val="EDF3EF"/>
+                </a:solidFill>
+                <a:latin typeface="Arial" pitchFamily="34" charset="0"/>
+                <a:ea typeface="Arial" pitchFamily="34" charset="-122"/>
+                <a:cs typeface="Arial" pitchFamily="34" charset="-120"/>
+              </a:rPr>
+              <a:t>A queda vira evento</a:t>
+            </a:r>
+            <a:endParaRPr lang="en-US" sz="1600" dirty="0"/>
+          </a:p>
+        </p:txBody>
+      </p:sp>
+      <p:sp>
+        <p:nvSpPr>
+          <p:cNvPr id="7" name="Text 5"/>
+          <p:cNvSpPr txBox="1"/>
+          <p:nvPr/>
+        </p:nvSpPr>
+        <p:spPr>
+          <a:xfrm>
+            <a:off x="941832" y="3547872"/>
+            <a:ext cx="2926080" cy="914400"/>
           </a:xfrm>
           <a:prstGeom prst="rect">
             <a:avLst/>
@@ -11535,12 +10361,12 @@
           <a:p>
             <a:pPr indent="0" marL="0">
               <a:lnSpc>
-                <a:spcPts val="1350"/>
+                <a:spcPts val="1600"/>
               </a:lnSpc>
               <a:buNone/>
             </a:pPr>
             <a:r>
-              <a:rPr lang="en-US" sz="1150" dirty="0">
+              <a:rPr lang="en-US" sz="1200" dirty="0">
                 <a:solidFill>
                   <a:srgbClr val="9DB0A6"/>
                 </a:solidFill>
@@ -11548,22 +10374,22 @@
                 <a:ea typeface="Calibri" pitchFamily="34" charset="-122"/>
                 <a:cs typeface="Calibri" pitchFamily="34" charset="-120"/>
               </a:rPr>
-              <a:t>Sem base legal do art. 11 para dado sensível</a:t>
-            </a:r>
-            <a:endParaRPr lang="en-US" sz="1150" dirty="0"/>
-          </a:p>
-        </p:txBody>
-      </p:sp>
-      <p:sp>
-        <p:nvSpPr>
-          <p:cNvPr id="9" name="Text 7"/>
-          <p:cNvSpPr txBox="1"/>
-          <p:nvPr/>
-        </p:nvSpPr>
-        <p:spPr>
-          <a:xfrm>
-            <a:off x="5212080" y="3575304"/>
-            <a:ext cx="6263640" cy="420624"/>
+              <a:t>O evento entra na corrente antes de qualquer tentativa de avisar alguém.</a:t>
+            </a:r>
+            <a:endParaRPr lang="en-US" sz="1200" dirty="0"/>
+          </a:p>
+        </p:txBody>
+      </p:sp>
+      <p:sp>
+        <p:nvSpPr>
+          <p:cNvPr id="8" name="Text 6"/>
+          <p:cNvSpPr txBox="1"/>
+          <p:nvPr/>
+        </p:nvSpPr>
+        <p:spPr>
+          <a:xfrm>
+            <a:off x="941832" y="4480560"/>
+            <a:ext cx="2926080" cy="548640"/>
           </a:xfrm>
           <a:prstGeom prst="rect">
             <a:avLst/>
@@ -11577,40 +10403,44 @@
           <a:p>
             <a:pPr indent="0" marL="0">
               <a:lnSpc>
-                <a:spcPts val="1350"/>
+                <a:spcPts val="1200"/>
               </a:lnSpc>
               <a:buNone/>
             </a:pPr>
             <a:r>
-              <a:rPr lang="en-US" sz="1150" dirty="0">
-                <a:solidFill>
-                  <a:srgbClr val="EDF3EF"/>
-                </a:solidFill>
-                <a:latin typeface="Calibri" pitchFamily="34" charset="0"/>
-                <a:ea typeface="Calibri" pitchFamily="34" charset="-122"/>
-                <a:cs typeface="Calibri" pitchFamily="34" charset="-120"/>
-              </a:rPr>
-              <a:t>Não coletamos biometria. O artigo 11 não chega a se aplicar.</a:t>
-            </a:r>
-            <a:endParaRPr lang="en-US" sz="1150" dirty="0"/>
-          </a:p>
-        </p:txBody>
-      </p:sp>
-      <p:sp>
-        <p:nvSpPr>
-          <p:cNvPr id="10" name="Shape 8"/>
+              <a:rPr lang="en-US" sz="850" dirty="0">
+                <a:solidFill>
+                  <a:srgbClr val="6A7D74"/>
+                </a:solidFill>
+                <a:latin typeface="Courier New" pitchFamily="34" charset="0"/>
+                <a:ea typeface="Courier New" pitchFamily="34" charset="-122"/>
+                <a:cs typeface="Courier New" pitchFamily="34" charset="-120"/>
+              </a:rPr>
+              <a:t>o registro nunca depende da nuvem estar de pé</a:t>
+            </a:r>
+            <a:endParaRPr lang="en-US" sz="850" dirty="0"/>
+          </a:p>
+        </p:txBody>
+      </p:sp>
+      <p:sp>
+        <p:nvSpPr>
+          <p:cNvPr id="9" name="Shape 7"/>
           <p:cNvSpPr/>
           <p:nvPr/>
         </p:nvSpPr>
         <p:spPr>
           <a:xfrm>
-            <a:off x="685800" y="4041648"/>
-            <a:ext cx="10817352" cy="0"/>
-          </a:xfrm>
-          <a:prstGeom prst="line">
-            <a:avLst/>
-          </a:prstGeom>
-          <a:noFill/>
+            <a:off x="4370832" y="2606040"/>
+            <a:ext cx="3410712" cy="2514600"/>
+          </a:xfrm>
+          <a:prstGeom prst="roundRect">
+            <a:avLst>
+              <a:gd name="adj" fmla="val 3636"/>
+            </a:avLst>
+          </a:prstGeom>
+          <a:solidFill>
+            <a:srgbClr val="17211C"/>
+          </a:solidFill>
           <a:ln w="12700">
             <a:solidFill>
               <a:srgbClr val="24322B"/>
@@ -11621,14 +10451,92 @@
       </p:sp>
       <p:sp>
         <p:nvSpPr>
+          <p:cNvPr id="10" name="Text 8"/>
+          <p:cNvSpPr txBox="1"/>
+          <p:nvPr/>
+        </p:nvSpPr>
+        <p:spPr>
+          <a:xfrm>
+            <a:off x="4626864" y="2816352"/>
+            <a:ext cx="2926080" cy="228600"/>
+          </a:xfrm>
+          <a:prstGeom prst="rect">
+            <a:avLst/>
+          </a:prstGeom>
+          <a:noFill/>
+          <a:ln/>
+        </p:spPr>
+        <p:txBody>
+          <a:bodyPr wrap="square" lIns="0" tIns="0" rIns="0" bIns="0" rtlCol="0" anchor="ctr"/>
+          <a:lstStyle/>
+          <a:p>
+            <a:pPr indent="0" marL="0">
+              <a:buNone/>
+            </a:pPr>
+            <a:r>
+              <a:rPr lang="en-US" sz="950" spc="150" kern="0" dirty="0">
+                <a:solidFill>
+                  <a:srgbClr val="3FBF5A"/>
+                </a:solidFill>
+                <a:latin typeface="Courier New" pitchFamily="34" charset="0"/>
+                <a:ea typeface="Courier New" pitchFamily="34" charset="-122"/>
+                <a:cs typeface="Courier New" pitchFamily="34" charset="-120"/>
+              </a:rPr>
+              <a:t>NA NUVEM</a:t>
+            </a:r>
+            <a:endParaRPr lang="en-US" sz="950" dirty="0"/>
+          </a:p>
+        </p:txBody>
+      </p:sp>
+      <p:sp>
+        <p:nvSpPr>
           <p:cNvPr id="11" name="Text 9"/>
           <p:cNvSpPr txBox="1"/>
           <p:nvPr/>
         </p:nvSpPr>
         <p:spPr>
           <a:xfrm>
-            <a:off x="685800" y="4105656"/>
-            <a:ext cx="4297680" cy="420624"/>
+            <a:off x="4626864" y="3090672"/>
+            <a:ext cx="2926080" cy="365760"/>
+          </a:xfrm>
+          <a:prstGeom prst="rect">
+            <a:avLst/>
+          </a:prstGeom>
+          <a:noFill/>
+          <a:ln/>
+        </p:spPr>
+        <p:txBody>
+          <a:bodyPr wrap="square" lIns="0" tIns="0" rIns="0" bIns="0" rtlCol="0" anchor="ctr"/>
+          <a:lstStyle/>
+          <a:p>
+            <a:pPr indent="0" marL="0">
+              <a:buNone/>
+            </a:pPr>
+            <a:r>
+              <a:rPr lang="en-US" sz="1600" b="1" dirty="0">
+                <a:solidFill>
+                  <a:srgbClr val="EDF3EF"/>
+                </a:solidFill>
+                <a:latin typeface="Arial" pitchFamily="34" charset="0"/>
+                <a:ea typeface="Arial" pitchFamily="34" charset="-122"/>
+                <a:cs typeface="Arial" pitchFamily="34" charset="-120"/>
+              </a:rPr>
+              <a:t>Uma função envia</a:t>
+            </a:r>
+            <a:endParaRPr lang="en-US" sz="1600" dirty="0"/>
+          </a:p>
+        </p:txBody>
+      </p:sp>
+      <p:sp>
+        <p:nvSpPr>
+          <p:cNvPr id="12" name="Text 10"/>
+          <p:cNvSpPr txBox="1"/>
+          <p:nvPr/>
+        </p:nvSpPr>
+        <p:spPr>
+          <a:xfrm>
+            <a:off x="4626864" y="3547872"/>
+            <a:ext cx="2926080" cy="914400"/>
           </a:xfrm>
           <a:prstGeom prst="rect">
             <a:avLst/>
@@ -11642,12 +10550,12 @@
           <a:p>
             <a:pPr indent="0" marL="0">
               <a:lnSpc>
-                <a:spcPts val="1350"/>
+                <a:spcPts val="1600"/>
               </a:lnSpc>
               <a:buNone/>
             </a:pPr>
             <a:r>
-              <a:rPr lang="en-US" sz="1150" dirty="0">
+              <a:rPr lang="en-US" sz="1200" dirty="0">
                 <a:solidFill>
                   <a:srgbClr val="9DB0A6"/>
                 </a:solidFill>
@@ -11655,22 +10563,22 @@
                 <a:ea typeface="Calibri" pitchFamily="34" charset="-122"/>
                 <a:cs typeface="Calibri" pitchFamily="34" charset="-120"/>
               </a:rPr>
-              <a:t>Desproporcional: não provaram que o menos invasivo não bastava</a:t>
-            </a:r>
-            <a:endParaRPr lang="en-US" sz="1150" dirty="0"/>
-          </a:p>
-        </p:txBody>
-      </p:sp>
-      <p:sp>
-        <p:nvSpPr>
-          <p:cNvPr id="12" name="Text 10"/>
-          <p:cNvSpPr txBox="1"/>
-          <p:nvPr/>
-        </p:nvSpPr>
-        <p:spPr>
-          <a:xfrm>
-            <a:off x="5212080" y="4105656"/>
-            <a:ext cx="6263640" cy="420624"/>
+              <a:t>A escola não guarda senha de e-mail nenhuma. A credencial não existe como arquivo.</a:t>
+            </a:r>
+            <a:endParaRPr lang="en-US" sz="1200" dirty="0"/>
+          </a:p>
+        </p:txBody>
+      </p:sp>
+      <p:sp>
+        <p:nvSpPr>
+          <p:cNvPr id="13" name="Text 11"/>
+          <p:cNvSpPr txBox="1"/>
+          <p:nvPr/>
+        </p:nvSpPr>
+        <p:spPr>
+          <a:xfrm>
+            <a:off x="4626864" y="4480560"/>
+            <a:ext cx="2926080" cy="548640"/>
           </a:xfrm>
           <a:prstGeom prst="rect">
             <a:avLst/>
@@ -11684,40 +10592,44 @@
           <a:p>
             <a:pPr indent="0" marL="0">
               <a:lnSpc>
-                <a:spcPts val="1350"/>
+                <a:spcPts val="1200"/>
               </a:lnSpc>
               <a:buNone/>
             </a:pPr>
             <a:r>
-              <a:rPr lang="en-US" sz="1150" dirty="0">
-                <a:solidFill>
-                  <a:srgbClr val="EDF3EF"/>
-                </a:solidFill>
-                <a:latin typeface="Calibri" pitchFamily="34" charset="0"/>
-                <a:ea typeface="Calibri" pitchFamily="34" charset="-122"/>
-                <a:cs typeface="Calibri" pitchFamily="34" charset="-120"/>
-              </a:rPr>
-              <a:t>Rosto apagado antes de a imagem sair, e ela só existe em alerta grave.</a:t>
-            </a:r>
-            <a:endParaRPr lang="en-US" sz="1150" dirty="0"/>
-          </a:p>
-        </p:txBody>
-      </p:sp>
-      <p:sp>
-        <p:nvSpPr>
-          <p:cNvPr id="13" name="Shape 11"/>
+              <a:rPr lang="en-US" sz="850" dirty="0">
+                <a:solidFill>
+                  <a:srgbClr val="6A7D74"/>
+                </a:solidFill>
+                <a:latin typeface="Courier New" pitchFamily="34" charset="0"/>
+                <a:ea typeface="Courier New" pitchFamily="34" charset="-122"/>
+                <a:cs typeface="Courier New" pitchFamily="34" charset="-120"/>
+              </a:rPr>
+              <a:t>segredo compartilhado barra quem descobrir a URL</a:t>
+            </a:r>
+            <a:endParaRPr lang="en-US" sz="850" dirty="0"/>
+          </a:p>
+        </p:txBody>
+      </p:sp>
+      <p:sp>
+        <p:nvSpPr>
+          <p:cNvPr id="14" name="Shape 12"/>
           <p:cNvSpPr/>
           <p:nvPr/>
         </p:nvSpPr>
         <p:spPr>
           <a:xfrm>
-            <a:off x="685800" y="4572000"/>
-            <a:ext cx="10817352" cy="0"/>
-          </a:xfrm>
-          <a:prstGeom prst="line">
-            <a:avLst/>
-          </a:prstGeom>
-          <a:noFill/>
+            <a:off x="8055864" y="2606040"/>
+            <a:ext cx="3410712" cy="2514600"/>
+          </a:xfrm>
+          <a:prstGeom prst="roundRect">
+            <a:avLst>
+              <a:gd name="adj" fmla="val 3636"/>
+            </a:avLst>
+          </a:prstGeom>
+          <a:solidFill>
+            <a:srgbClr val="17211C"/>
+          </a:solidFill>
           <a:ln w="12700">
             <a:solidFill>
               <a:srgbClr val="24322B"/>
@@ -11728,14 +10640,92 @@
       </p:sp>
       <p:sp>
         <p:nvSpPr>
-          <p:cNvPr id="14" name="Text 12"/>
-          <p:cNvSpPr txBox="1"/>
-          <p:nvPr/>
-        </p:nvSpPr>
-        <p:spPr>
-          <a:xfrm>
-            <a:off x="685800" y="4636008"/>
-            <a:ext cx="4297680" cy="420624"/>
+          <p:cNvPr id="15" name="Text 13"/>
+          <p:cNvSpPr txBox="1"/>
+          <p:nvPr/>
+        </p:nvSpPr>
+        <p:spPr>
+          <a:xfrm>
+            <a:off x="8311896" y="2816352"/>
+            <a:ext cx="2926080" cy="228600"/>
+          </a:xfrm>
+          <a:prstGeom prst="rect">
+            <a:avLst/>
+          </a:prstGeom>
+          <a:noFill/>
+          <a:ln/>
+        </p:spPr>
+        <p:txBody>
+          <a:bodyPr wrap="square" lIns="0" tIns="0" rIns="0" bIns="0" rtlCol="0" anchor="ctr"/>
+          <a:lstStyle/>
+          <a:p>
+            <a:pPr indent="0" marL="0">
+              <a:buNone/>
+            </a:pPr>
+            <a:r>
+              <a:rPr lang="en-US" sz="950" spc="150" kern="0" dirty="0">
+                <a:solidFill>
+                  <a:srgbClr val="3FBF5A"/>
+                </a:solidFill>
+                <a:latin typeface="Courier New" pitchFamily="34" charset="0"/>
+                <a:ea typeface="Courier New" pitchFamily="34" charset="-122"/>
+                <a:cs typeface="Courier New" pitchFamily="34" charset="-120"/>
+              </a:rPr>
+              <a:t>NA COORDENAÇÃO</a:t>
+            </a:r>
+            <a:endParaRPr lang="en-US" sz="950" dirty="0"/>
+          </a:p>
+        </p:txBody>
+      </p:sp>
+      <p:sp>
+        <p:nvSpPr>
+          <p:cNvPr id="16" name="Text 14"/>
+          <p:cNvSpPr txBox="1"/>
+          <p:nvPr/>
+        </p:nvSpPr>
+        <p:spPr>
+          <a:xfrm>
+            <a:off x="8311896" y="3090672"/>
+            <a:ext cx="2926080" cy="365760"/>
+          </a:xfrm>
+          <a:prstGeom prst="rect">
+            <a:avLst/>
+          </a:prstGeom>
+          <a:noFill/>
+          <a:ln/>
+        </p:spPr>
+        <p:txBody>
+          <a:bodyPr wrap="square" lIns="0" tIns="0" rIns="0" bIns="0" rtlCol="0" anchor="ctr"/>
+          <a:lstStyle/>
+          <a:p>
+            <a:pPr indent="0" marL="0">
+              <a:buNone/>
+            </a:pPr>
+            <a:r>
+              <a:rPr lang="en-US" sz="1600" b="1" dirty="0">
+                <a:solidFill>
+                  <a:srgbClr val="EDF3EF"/>
+                </a:solidFill>
+                <a:latin typeface="Arial" pitchFamily="34" charset="0"/>
+                <a:ea typeface="Arial" pitchFamily="34" charset="-122"/>
+                <a:cs typeface="Arial" pitchFamily="34" charset="-120"/>
+              </a:rPr>
+              <a:t>Um e-mail que se lê</a:t>
+            </a:r>
+            <a:endParaRPr lang="en-US" sz="1600" dirty="0"/>
+          </a:p>
+        </p:txBody>
+      </p:sp>
+      <p:sp>
+        <p:nvSpPr>
+          <p:cNvPr id="17" name="Text 15"/>
+          <p:cNvSpPr txBox="1"/>
+          <p:nvPr/>
+        </p:nvSpPr>
+        <p:spPr>
+          <a:xfrm>
+            <a:off x="8311896" y="3547872"/>
+            <a:ext cx="2926080" cy="914400"/>
           </a:xfrm>
           <a:prstGeom prst="rect">
             <a:avLst/>
@@ -11749,12 +10739,12 @@
           <a:p>
             <a:pPr indent="0" marL="0">
               <a:lnSpc>
-                <a:spcPts val="1350"/>
+                <a:spcPts val="1600"/>
               </a:lnSpc>
               <a:buNone/>
             </a:pPr>
             <a:r>
-              <a:rPr lang="en-US" sz="1150" dirty="0">
+              <a:rPr lang="en-US" sz="1200" dirty="0">
                 <a:solidFill>
                   <a:srgbClr val="9DB0A6"/>
                 </a:solidFill>
@@ -11762,22 +10752,22 @@
                 <a:ea typeface="Calibri" pitchFamily="34" charset="-122"/>
                 <a:cs typeface="Calibri" pitchFamily="34" charset="-120"/>
               </a:rPr>
-              <a:t>Segurança citada de forma genérica, sem monitoramento nem auditoria</a:t>
-            </a:r>
-            <a:endParaRPr lang="en-US" sz="1150" dirty="0"/>
-          </a:p>
-        </p:txBody>
-      </p:sp>
-      <p:sp>
-        <p:nvSpPr>
-          <p:cNvPr id="15" name="Text 13"/>
-          <p:cNvSpPr txBox="1"/>
-          <p:nvPr/>
-        </p:nvSpPr>
-        <p:spPr>
-          <a:xfrm>
-            <a:off x="5212080" y="4636008"/>
-            <a:ext cx="6263640" cy="420624"/>
+              <a:t>O que houve, onde, quando, e que é um pedido de conferência.</a:t>
+            </a:r>
+            <a:endParaRPr lang="en-US" sz="1200" dirty="0"/>
+          </a:p>
+        </p:txBody>
+      </p:sp>
+      <p:sp>
+        <p:nvSpPr>
+          <p:cNvPr id="18" name="Text 16"/>
+          <p:cNvSpPr txBox="1"/>
+          <p:nvPr/>
+        </p:nvSpPr>
+        <p:spPr>
+          <a:xfrm>
+            <a:off x="8311896" y="4480560"/>
+            <a:ext cx="2926080" cy="548640"/>
           </a:xfrm>
           <a:prstGeom prst="rect">
             <a:avLst/>
@@ -11791,154 +10781,63 @@
           <a:p>
             <a:pPr indent="0" marL="0">
               <a:lnSpc>
-                <a:spcPts val="1350"/>
+                <a:spcPts val="1200"/>
               </a:lnSpc>
               <a:buNone/>
             </a:pPr>
             <a:r>
-              <a:rPr lang="en-US" sz="1150" dirty="0">
-                <a:solidFill>
-                  <a:srgbClr val="EDF3EF"/>
+              <a:rPr lang="en-US" sz="850" dirty="0">
+                <a:solidFill>
+                  <a:srgbClr val="6A7D74"/>
+                </a:solidFill>
+                <a:latin typeface="Courier New" pitchFamily="34" charset="0"/>
+                <a:ea typeface="Courier New" pitchFamily="34" charset="-122"/>
+                <a:cs typeface="Courier New" pitchFamily="34" charset="-120"/>
+              </a:rPr>
+              <a:t>um aviso a cada poucos segundos é um aviso que ninguém lê</a:t>
+            </a:r>
+            <a:endParaRPr lang="en-US" sz="850" dirty="0"/>
+          </a:p>
+        </p:txBody>
+      </p:sp>
+      <p:sp>
+        <p:nvSpPr>
+          <p:cNvPr id="19" name="Text 17"/>
+          <p:cNvSpPr txBox="1"/>
+          <p:nvPr/>
+        </p:nvSpPr>
+        <p:spPr>
+          <a:xfrm>
+            <a:off x="685800" y="5486400"/>
+            <a:ext cx="10515600" cy="457200"/>
+          </a:xfrm>
+          <a:prstGeom prst="rect">
+            <a:avLst/>
+          </a:prstGeom>
+          <a:noFill/>
+          <a:ln/>
+        </p:spPr>
+        <p:txBody>
+          <a:bodyPr wrap="square" lIns="0" tIns="0" rIns="0" bIns="0" rtlCol="0" anchor="ctr"/>
+          <a:lstStyle/>
+          <a:p>
+            <a:pPr indent="0" marL="0">
+              <a:buNone/>
+            </a:pPr>
+            <a:r>
+              <a:rPr lang="en-US" sz="1400" dirty="0">
+                <a:solidFill>
+                  <a:srgbClr val="9DB0A6"/>
                 </a:solidFill>
                 <a:latin typeface="Calibri" pitchFamily="34" charset="0"/>
                 <a:ea typeface="Calibri" pitchFamily="34" charset="-122"/>
                 <a:cs typeface="Calibri" pitchFamily="34" charset="-120"/>
               </a:rPr>
-              <a:t>Cadeia de hash verificável, e cada abertura de imagem vira linha no banco.</a:t>
-            </a:r>
-            <a:endParaRPr lang="en-US" sz="1150" dirty="0"/>
-          </a:p>
-        </p:txBody>
-      </p:sp>
-      <p:sp>
-        <p:nvSpPr>
-          <p:cNvPr id="16" name="Shape 14"/>
-          <p:cNvSpPr/>
-          <p:nvPr/>
-        </p:nvSpPr>
-        <p:spPr>
-          <a:xfrm>
-            <a:off x="685800" y="5102352"/>
-            <a:ext cx="10817352" cy="0"/>
-          </a:xfrm>
-          <a:prstGeom prst="line">
-            <a:avLst/>
-          </a:prstGeom>
-          <a:noFill/>
-          <a:ln w="12700">
-            <a:solidFill>
-              <a:srgbClr val="24322B"/>
-            </a:solidFill>
-            <a:prstDash val="solid"/>
-          </a:ln>
-        </p:spPr>
-      </p:sp>
-      <p:sp>
-        <p:nvSpPr>
-          <p:cNvPr id="17" name="Text 15"/>
-          <p:cNvSpPr txBox="1"/>
-          <p:nvPr/>
-        </p:nvSpPr>
-        <p:spPr>
-          <a:xfrm>
-            <a:off x="685800" y="5166360"/>
-            <a:ext cx="4297680" cy="420624"/>
-          </a:xfrm>
-          <a:prstGeom prst="rect">
-            <a:avLst/>
-          </a:prstGeom>
-          <a:noFill/>
-          <a:ln/>
-        </p:spPr>
-        <p:txBody>
-          <a:bodyPr wrap="square" lIns="0" tIns="0" rIns="0" bIns="0" rtlCol="0" anchor="ctr"/>
-          <a:lstStyle/>
-          <a:p>
-            <a:pPr indent="0" marL="0">
-              <a:lnSpc>
-                <a:spcPts val="1350"/>
-              </a:lnSpc>
-              <a:buNone/>
-            </a:pPr>
-            <a:r>
-              <a:rPr lang="en-US" sz="1150" dirty="0">
-                <a:solidFill>
-                  <a:srgbClr val="9DB0A6"/>
-                </a:solidFill>
-                <a:latin typeface="Calibri" pitchFamily="34" charset="0"/>
-                <a:ea typeface="Calibri" pitchFamily="34" charset="-122"/>
-                <a:cs typeface="Calibri" pitchFamily="34" charset="-120"/>
-              </a:rPr>
-              <a:t>Melhor interesse da criança não demonstrado</a:t>
-            </a:r>
-            <a:endParaRPr lang="en-US" sz="1150" dirty="0"/>
-          </a:p>
-        </p:txBody>
-      </p:sp>
-      <p:sp>
-        <p:nvSpPr>
-          <p:cNvPr id="18" name="Text 16"/>
-          <p:cNvSpPr txBox="1"/>
-          <p:nvPr/>
-        </p:nvSpPr>
-        <p:spPr>
-          <a:xfrm>
-            <a:off x="5212080" y="5166360"/>
-            <a:ext cx="6263640" cy="420624"/>
-          </a:xfrm>
-          <a:prstGeom prst="rect">
-            <a:avLst/>
-          </a:prstGeom>
-          <a:noFill/>
-          <a:ln/>
-        </p:spPr>
-        <p:txBody>
-          <a:bodyPr wrap="square" lIns="0" tIns="0" rIns="0" bIns="0" rtlCol="0" anchor="ctr"/>
-          <a:lstStyle/>
-          <a:p>
-            <a:pPr indent="0" marL="0">
-              <a:lnSpc>
-                <a:spcPts val="1350"/>
-              </a:lnSpc>
-              <a:buNone/>
-            </a:pPr>
-            <a:r>
-              <a:rPr lang="en-US" sz="1150" dirty="0">
-                <a:solidFill>
-                  <a:srgbClr val="EDF3EF"/>
-                </a:solidFill>
-                <a:latin typeface="Calibri" pitchFamily="34" charset="0"/>
-                <a:ea typeface="Calibri" pitchFamily="34" charset="-122"/>
-                <a:cs typeface="Calibri" pitchFamily="34" charset="-120"/>
-              </a:rPr>
-              <a:t>A imagem se apaga sozinha em 7 dias. O registro do evento fica.</a:t>
-            </a:r>
-            <a:endParaRPr lang="en-US" sz="1150" dirty="0"/>
-          </a:p>
-        </p:txBody>
-      </p:sp>
-      <p:sp>
-        <p:nvSpPr>
-          <p:cNvPr id="19" name="Shape 17"/>
-          <p:cNvSpPr/>
-          <p:nvPr/>
-        </p:nvSpPr>
-        <p:spPr>
-          <a:xfrm>
-            <a:off x="685800" y="5632704"/>
-            <a:ext cx="10817352" cy="0"/>
-          </a:xfrm>
-          <a:prstGeom prst="line">
-            <a:avLst/>
-          </a:prstGeom>
-          <a:noFill/>
-          <a:ln w="12700">
-            <a:solidFill>
-              <a:srgbClr val="24322B"/>
-            </a:solidFill>
-            <a:prstDash val="solid"/>
-          </a:ln>
-        </p:spPr>
+              <a:t>O caminho tem teste automático, inclusive o que custa caro quando falha: e-mail sem segredo e e-mail em rajada.</a:t>
+            </a:r>
+            <a:endParaRPr lang="en-US" sz="1400" dirty="0"/>
+          </a:p>
+        </p:txBody>
       </p:sp>
       <p:sp>
         <p:nvSpPr>
@@ -11948,92 +10847,8 @@
         </p:nvSpPr>
         <p:spPr>
           <a:xfrm>
-            <a:off x="685800" y="5696712"/>
-            <a:ext cx="4297680" cy="420624"/>
-          </a:xfrm>
-          <a:prstGeom prst="rect">
-            <a:avLst/>
-          </a:prstGeom>
-          <a:noFill/>
-          <a:ln/>
-        </p:spPr>
-        <p:txBody>
-          <a:bodyPr wrap="square" lIns="0" tIns="0" rIns="0" bIns="0" rtlCol="0" anchor="ctr"/>
-          <a:lstStyle/>
-          <a:p>
-            <a:pPr indent="0" marL="0">
-              <a:lnSpc>
-                <a:spcPts val="1350"/>
-              </a:lnSpc>
-              <a:buNone/>
-            </a:pPr>
-            <a:r>
-              <a:rPr lang="en-US" sz="1150" dirty="0">
-                <a:solidFill>
-                  <a:srgbClr val="9DB0A6"/>
-                </a:solidFill>
-                <a:latin typeface="Calibri" pitchFamily="34" charset="0"/>
-                <a:ea typeface="Calibri" pitchFamily="34" charset="-122"/>
-                <a:cs typeface="Calibri" pitchFamily="34" charset="-120"/>
-              </a:rPr>
-              <a:t>Registro de Operações de Tratamento não entregue</a:t>
-            </a:r>
-            <a:endParaRPr lang="en-US" sz="1150" dirty="0"/>
-          </a:p>
-        </p:txBody>
-      </p:sp>
-      <p:sp>
-        <p:nvSpPr>
-          <p:cNvPr id="21" name="Text 19"/>
-          <p:cNvSpPr txBox="1"/>
-          <p:nvPr/>
-        </p:nvSpPr>
-        <p:spPr>
-          <a:xfrm>
-            <a:off x="5212080" y="5696712"/>
-            <a:ext cx="6263640" cy="420624"/>
-          </a:xfrm>
-          <a:prstGeom prst="rect">
-            <a:avLst/>
-          </a:prstGeom>
-          <a:noFill/>
-          <a:ln/>
-        </p:spPr>
-        <p:txBody>
-          <a:bodyPr wrap="square" lIns="0" tIns="0" rIns="0" bIns="0" rtlCol="0" anchor="ctr"/>
-          <a:lstStyle/>
-          <a:p>
-            <a:pPr indent="0" marL="0">
-              <a:lnSpc>
-                <a:spcPts val="1350"/>
-              </a:lnSpc>
-              <a:buNone/>
-            </a:pPr>
-            <a:r>
-              <a:rPr lang="en-US" sz="1150" dirty="0">
-                <a:solidFill>
-                  <a:srgbClr val="EDF3EF"/>
-                </a:solidFill>
-                <a:latin typeface="Calibri" pitchFamily="34" charset="0"/>
-                <a:ea typeface="Calibri" pitchFamily="34" charset="-122"/>
-                <a:cs typeface="Calibri" pitchFamily="34" charset="-120"/>
-              </a:rPr>
-              <a:t>O banco é o registro, linha a linha, e ele se confere sozinho.</a:t>
-            </a:r>
-            <a:endParaRPr lang="en-US" sz="1150" dirty="0"/>
-          </a:p>
-        </p:txBody>
-      </p:sp>
-      <p:sp>
-        <p:nvSpPr>
-          <p:cNvPr id="22" name="Text 20"/>
-          <p:cNvSpPr txBox="1"/>
-          <p:nvPr/>
-        </p:nvSpPr>
-        <p:spPr>
-          <a:xfrm>
-            <a:off x="685800" y="6236208"/>
-            <a:ext cx="6400800" cy="237744"/>
+            <a:off x="685800" y="6291072"/>
+            <a:ext cx="5486400" cy="274320"/>
           </a:xfrm>
           <a:prstGeom prst="rect">
             <a:avLst/>
@@ -12057,7 +10872,7 @@
                 <a:ea typeface="Courier New" pitchFamily="34" charset="-122"/>
                 <a:cs typeface="Courier New" pitchFamily="34" charset="-120"/>
               </a:rPr>
-              <a:t>Leitura nossa da decisão pública da ANPD, não parecer jurídico.</a:t>
+              <a:t>Auditix IA  ·  grupo 11</a:t>
             </a:r>
             <a:endParaRPr lang="en-US" sz="900" dirty="0"/>
           </a:p>
@@ -12065,46 +10880,7 @@
       </p:sp>
       <p:sp>
         <p:nvSpPr>
-          <p:cNvPr id="24" name="Text 21"/>
-          <p:cNvSpPr txBox="1"/>
-          <p:nvPr/>
-        </p:nvSpPr>
-        <p:spPr>
-          <a:xfrm>
-            <a:off x="685800" y="6291072"/>
-            <a:ext cx="5486400" cy="274320"/>
-          </a:xfrm>
-          <a:prstGeom prst="rect">
-            <a:avLst/>
-          </a:prstGeom>
-          <a:noFill/>
-          <a:ln/>
-        </p:spPr>
-        <p:txBody>
-          <a:bodyPr wrap="square" lIns="0" tIns="0" rIns="0" bIns="0" rtlCol="0" anchor="ctr"/>
-          <a:lstStyle/>
-          <a:p>
-            <a:pPr indent="0" marL="0">
-              <a:buNone/>
-            </a:pPr>
-            <a:r>
-              <a:rPr lang="en-US" sz="900" dirty="0">
-                <a:solidFill>
-                  <a:srgbClr val="6A7D74"/>
-                </a:solidFill>
-                <a:latin typeface="Courier New" pitchFamily="34" charset="0"/>
-                <a:ea typeface="Courier New" pitchFamily="34" charset="-122"/>
-                <a:cs typeface="Courier New" pitchFamily="34" charset="-120"/>
-              </a:rPr>
-              <a:t>Auditix AI  ·  SVATech  ·  grupo 11</a:t>
-            </a:r>
-            <a:endParaRPr lang="en-US" sz="900" dirty="0"/>
-          </a:p>
-        </p:txBody>
-      </p:sp>
-      <p:sp>
-        <p:nvSpPr>
-          <p:cNvPr id="25" name="Text 22"/>
+          <p:cNvPr id="21" name="Text 19"/>
           <p:cNvSpPr txBox="1"/>
           <p:nvPr/>
         </p:nvSpPr>
@@ -12206,7 +10982,7 @@
                 <a:ea typeface="Courier New" pitchFamily="34" charset="-122"/>
                 <a:cs typeface="Courier New" pitchFamily="34" charset="-120"/>
               </a:rPr>
-              <a:t>DO CHÃO À CAIXA DE ENTRADA</a:t>
+              <a:t>DASHBOARD LIGADO AO BANCO POR API</a:t>
             </a:r>
             <a:endParaRPr lang="en-US" sz="1100" dirty="0"/>
           </a:p>
@@ -12248,65 +11024,174 @@
                 <a:ea typeface="Arial" pitchFamily="34" charset="-122"/>
                 <a:cs typeface="Arial" pitchFamily="34" charset="-120"/>
               </a:rPr>
-              <a:t>Segundos, não turnos.</a:t>
+              <a:t>Um dashboard que lê o banco,</a:t>
             </a:r>
             <a:endParaRPr lang="en-US" sz="3600" dirty="0"/>
           </a:p>
-        </p:txBody>
-      </p:sp>
-      <p:sp>
-        <p:nvSpPr>
-          <p:cNvPr id="4" name="Shape 2"/>
-          <p:cNvSpPr/>
-          <p:nvPr/>
-        </p:nvSpPr>
-        <p:spPr>
-          <a:xfrm>
-            <a:off x="685800" y="2606040"/>
-            <a:ext cx="3410712" cy="2514600"/>
-          </a:xfrm>
-          <a:prstGeom prst="roundRect">
-            <a:avLst>
-              <a:gd name="adj" fmla="val 3636"/>
-            </a:avLst>
-          </a:prstGeom>
-          <a:solidFill>
-            <a:srgbClr val="17211C"/>
-          </a:solidFill>
-          <a:ln w="12700">
-            <a:solidFill>
-              <a:srgbClr val="24322B"/>
-            </a:solidFill>
-            <a:prstDash val="solid"/>
-          </a:ln>
-        </p:spPr>
-      </p:sp>
-      <p:sp>
-        <p:nvSpPr>
-          <p:cNvPr id="5" name="Text 3"/>
-          <p:cNvSpPr txBox="1"/>
-          <p:nvPr/>
-        </p:nvSpPr>
-        <p:spPr>
-          <a:xfrm>
-            <a:off x="941832" y="2816352"/>
-            <a:ext cx="2926080" cy="228600"/>
-          </a:xfrm>
-          <a:prstGeom prst="rect">
-            <a:avLst/>
-          </a:prstGeom>
-          <a:noFill/>
-          <a:ln/>
-        </p:spPr>
-        <p:txBody>
-          <a:bodyPr wrap="square" lIns="0" tIns="0" rIns="0" bIns="0" rtlCol="0" anchor="ctr"/>
-          <a:lstStyle/>
-          <a:p>
-            <a:pPr indent="0" marL="0">
-              <a:buNone/>
-            </a:pPr>
-            <a:r>
-              <a:rPr lang="en-US" sz="950" spc="150" kern="0" dirty="0">
+          <a:p>
+            <a:pPr indent="0" marL="0">
+              <a:lnSpc>
+                <a:spcPts val="3800"/>
+              </a:lnSpc>
+              <a:buNone/>
+            </a:pPr>
+            <a:r>
+              <a:rPr lang="en-US" sz="3600" b="1" dirty="0">
+                <a:solidFill>
+                  <a:srgbClr val="EDF3EF"/>
+                </a:solidFill>
+                <a:latin typeface="Arial" pitchFamily="34" charset="0"/>
+                <a:ea typeface="Arial" pitchFamily="34" charset="-122"/>
+                <a:cs typeface="Arial" pitchFamily="34" charset="-120"/>
+              </a:rPr>
+              <a:t>não um print de tela.</a:t>
+            </a:r>
+            <a:endParaRPr lang="en-US" sz="3600" dirty="0"/>
+          </a:p>
+        </p:txBody>
+      </p:sp>
+      <p:sp>
+        <p:nvSpPr>
+          <p:cNvPr id="4" name="Text 2"/>
+          <p:cNvSpPr txBox="1"/>
+          <p:nvPr/>
+        </p:nvSpPr>
+        <p:spPr>
+          <a:xfrm>
+            <a:off x="685800" y="2514600"/>
+            <a:ext cx="10515600" cy="502920"/>
+          </a:xfrm>
+          <a:prstGeom prst="rect">
+            <a:avLst/>
+          </a:prstGeom>
+          <a:noFill/>
+          <a:ln/>
+        </p:spPr>
+        <p:txBody>
+          <a:bodyPr wrap="square" lIns="0" tIns="0" rIns="0" bIns="0" rtlCol="0" anchor="ctr"/>
+          <a:lstStyle/>
+          <a:p>
+            <a:pPr indent="0" marL="0">
+              <a:buNone/>
+            </a:pPr>
+            <a:r>
+              <a:rPr lang="en-US" sz="1400" dirty="0">
+                <a:solidFill>
+                  <a:srgbClr val="9DB0A6"/>
+                </a:solidFill>
+                <a:latin typeface="Calibri" pitchFamily="34" charset="0"/>
+                <a:ea typeface="Calibri" pitchFamily="34" charset="-122"/>
+                <a:cs typeface="Calibri" pitchFamily="34" charset="-120"/>
+              </a:rPr>
+              <a:t>Sete rotas em FastAPI sobre o PostgreSQL. A única que escreve alguma coisa é a da imagem, e o que ela escreve é </a:t>
+            </a:r>
+            <a:pPr indent="0" marL="0">
+              <a:buNone/>
+            </a:pPr>
+            <a:r>
+              <a:rPr lang="en-US" sz="1400" b="1" dirty="0">
+                <a:solidFill>
+                  <a:srgbClr val="EDF3EF"/>
+                </a:solidFill>
+                <a:latin typeface="Calibri" pitchFamily="34" charset="0"/>
+                <a:ea typeface="Calibri" pitchFamily="34" charset="-122"/>
+                <a:cs typeface="Calibri" pitchFamily="34" charset="-120"/>
+              </a:rPr>
+              <a:t>quem olhou.</a:t>
+            </a:r>
+            <a:endParaRPr lang="en-US" sz="1400" dirty="0"/>
+          </a:p>
+        </p:txBody>
+      </p:sp>
+      <p:pic>
+        <p:nvPicPr>
+          <p:cNvPr id="5" name="Image 0" descr="./ppt/calor.png">    </p:cNvPr>
+          <p:cNvPicPr>
+            <a:picLocks noChangeAspect="1"/>
+          </p:cNvPicPr>
+          <p:nvPr/>
+        </p:nvPicPr>
+        <p:blipFill>
+          <a:blip r:embed="rId1"/>
+          <a:stretch>
+            <a:fillRect/>
+          </a:stretch>
+        </p:blipFill>
+        <p:spPr>
+          <a:xfrm>
+            <a:off x="685800" y="3063240"/>
+            <a:ext cx="5120640" cy="3319272"/>
+          </a:xfrm>
+          <a:prstGeom prst="rect">
+            <a:avLst/>
+          </a:prstGeom>
+        </p:spPr>
+      </p:pic>
+      <p:sp>
+        <p:nvSpPr>
+          <p:cNvPr id="6" name="Text 3"/>
+          <p:cNvSpPr txBox="1"/>
+          <p:nvPr/>
+        </p:nvSpPr>
+        <p:spPr>
+          <a:xfrm>
+            <a:off x="6172200" y="3154680"/>
+            <a:ext cx="5394960" cy="274320"/>
+          </a:xfrm>
+          <a:prstGeom prst="rect">
+            <a:avLst/>
+          </a:prstGeom>
+          <a:noFill/>
+          <a:ln/>
+        </p:spPr>
+        <p:txBody>
+          <a:bodyPr wrap="square" lIns="0" tIns="0" rIns="0" bIns="0" rtlCol="0" anchor="ctr"/>
+          <a:lstStyle/>
+          <a:p>
+            <a:pPr indent="0" marL="0">
+              <a:buNone/>
+            </a:pPr>
+            <a:r>
+              <a:rPr lang="en-US" sz="1400" b="1" dirty="0">
+                <a:solidFill>
+                  <a:srgbClr val="EDF3EF"/>
+                </a:solidFill>
+                <a:latin typeface="Arial" pitchFamily="34" charset="0"/>
+                <a:ea typeface="Arial" pitchFamily="34" charset="-122"/>
+                <a:cs typeface="Arial" pitchFamily="34" charset="-120"/>
+              </a:rPr>
+              <a:t>“Aconteceu alguma coisa?”</a:t>
+            </a:r>
+            <a:endParaRPr lang="en-US" sz="1400" dirty="0"/>
+          </a:p>
+        </p:txBody>
+      </p:sp>
+      <p:sp>
+        <p:nvSpPr>
+          <p:cNvPr id="7" name="Text 4"/>
+          <p:cNvSpPr txBox="1"/>
+          <p:nvPr/>
+        </p:nvSpPr>
+        <p:spPr>
+          <a:xfrm>
+            <a:off x="6172200" y="3410712"/>
+            <a:ext cx="2194560" cy="228600"/>
+          </a:xfrm>
+          <a:prstGeom prst="rect">
+            <a:avLst/>
+          </a:prstGeom>
+          <a:noFill/>
+          <a:ln/>
+        </p:spPr>
+        <p:txBody>
+          <a:bodyPr wrap="square" lIns="0" tIns="0" rIns="0" bIns="0" rtlCol="0" anchor="ctr"/>
+          <a:lstStyle/>
+          <a:p>
+            <a:pPr indent="0" marL="0">
+              <a:buNone/>
+            </a:pPr>
+            <a:r>
+              <a:rPr lang="en-US" sz="950" dirty="0">
                 <a:solidFill>
                   <a:srgbClr val="3FBF5A"/>
                 </a:solidFill>
@@ -12314,7 +11199,7 @@
                 <a:ea typeface="Courier New" pitchFamily="34" charset="-122"/>
                 <a:cs typeface="Courier New" pitchFamily="34" charset="-120"/>
               </a:rPr>
-              <a:t>NA SALA</a:t>
+              <a:t>/api/painel</a:t>
             </a:r>
             <a:endParaRPr lang="en-US" sz="950" dirty="0"/>
           </a:p>
@@ -12322,30 +11207,69 @@
       </p:sp>
       <p:sp>
         <p:nvSpPr>
-          <p:cNvPr id="6" name="Text 4"/>
-          <p:cNvSpPr txBox="1"/>
-          <p:nvPr/>
-        </p:nvSpPr>
-        <p:spPr>
-          <a:xfrm>
-            <a:off x="941832" y="3090672"/>
-            <a:ext cx="2926080" cy="365760"/>
-          </a:xfrm>
-          <a:prstGeom prst="rect">
-            <a:avLst/>
-          </a:prstGeom>
-          <a:noFill/>
-          <a:ln/>
-        </p:spPr>
-        <p:txBody>
-          <a:bodyPr wrap="square" lIns="0" tIns="0" rIns="0" bIns="0" rtlCol="0" anchor="ctr"/>
-          <a:lstStyle/>
-          <a:p>
-            <a:pPr indent="0" marL="0">
-              <a:buNone/>
-            </a:pPr>
-            <a:r>
-              <a:rPr lang="en-US" sz="1600" b="1" dirty="0">
+          <p:cNvPr id="8" name="Text 5"/>
+          <p:cNvSpPr txBox="1"/>
+          <p:nvPr/>
+        </p:nvSpPr>
+        <p:spPr>
+          <a:xfrm>
+            <a:off x="6172200" y="3630168"/>
+            <a:ext cx="5394960" cy="274320"/>
+          </a:xfrm>
+          <a:prstGeom prst="rect">
+            <a:avLst/>
+          </a:prstGeom>
+          <a:noFill/>
+          <a:ln/>
+        </p:spPr>
+        <p:txBody>
+          <a:bodyPr wrap="square" lIns="0" tIns="0" rIns="0" bIns="0" rtlCol="0" anchor="ctr"/>
+          <a:lstStyle/>
+          <a:p>
+            <a:pPr indent="0" marL="0">
+              <a:buNone/>
+            </a:pPr>
+            <a:r>
+              <a:rPr lang="en-US" sz="1150" dirty="0">
+                <a:solidFill>
+                  <a:srgbClr val="9DB0A6"/>
+                </a:solidFill>
+                <a:latin typeface="Calibri" pitchFamily="34" charset="0"/>
+                <a:ea typeface="Calibri" pitchFamily="34" charset="-122"/>
+                <a:cs typeface="Calibri" pitchFamily="34" charset="-120"/>
+              </a:rPr>
+              <a:t>Último evento, onde, há quanto tempo. E a corrente em uma palavra.</a:t>
+            </a:r>
+            <a:endParaRPr lang="en-US" sz="1150" dirty="0"/>
+          </a:p>
+        </p:txBody>
+      </p:sp>
+      <p:sp>
+        <p:nvSpPr>
+          <p:cNvPr id="9" name="Text 6"/>
+          <p:cNvSpPr txBox="1"/>
+          <p:nvPr/>
+        </p:nvSpPr>
+        <p:spPr>
+          <a:xfrm>
+            <a:off x="6172200" y="3959352"/>
+            <a:ext cx="5394960" cy="274320"/>
+          </a:xfrm>
+          <a:prstGeom prst="rect">
+            <a:avLst/>
+          </a:prstGeom>
+          <a:noFill/>
+          <a:ln/>
+        </p:spPr>
+        <p:txBody>
+          <a:bodyPr wrap="square" lIns="0" tIns="0" rIns="0" bIns="0" rtlCol="0" anchor="ctr"/>
+          <a:lstStyle/>
+          <a:p>
+            <a:pPr indent="0" marL="0">
+              <a:buNone/>
+            </a:pPr>
+            <a:r>
+              <a:rPr lang="en-US" sz="1400" b="1" dirty="0">
                 <a:solidFill>
                   <a:srgbClr val="EDF3EF"/>
                 </a:solidFill>
@@ -12353,41 +11277,77 @@
                 <a:ea typeface="Arial" pitchFamily="34" charset="-122"/>
                 <a:cs typeface="Arial" pitchFamily="34" charset="-120"/>
               </a:rPr>
-              <a:t>A queda vira evento</a:t>
-            </a:r>
-            <a:endParaRPr lang="en-US" sz="1600" dirty="0"/>
-          </a:p>
-        </p:txBody>
-      </p:sp>
-      <p:sp>
-        <p:nvSpPr>
-          <p:cNvPr id="7" name="Text 5"/>
-          <p:cNvSpPr txBox="1"/>
-          <p:nvPr/>
-        </p:nvSpPr>
-        <p:spPr>
-          <a:xfrm>
-            <a:off x="941832" y="3547872"/>
-            <a:ext cx="2926080" cy="914400"/>
-          </a:xfrm>
-          <a:prstGeom prst="rect">
-            <a:avLst/>
-          </a:prstGeom>
-          <a:noFill/>
-          <a:ln/>
-        </p:spPr>
-        <p:txBody>
-          <a:bodyPr wrap="square" lIns="0" tIns="0" rIns="0" bIns="0" rtlCol="0" anchor="ctr"/>
-          <a:lstStyle/>
-          <a:p>
-            <a:pPr indent="0" marL="0">
-              <a:lnSpc>
-                <a:spcPts val="1600"/>
-              </a:lnSpc>
-              <a:buNone/>
-            </a:pPr>
-            <a:r>
-              <a:rPr lang="en-US" sz="1200" dirty="0">
+              <a:t>“Onde a sala aperta?”</a:t>
+            </a:r>
+            <a:endParaRPr lang="en-US" sz="1400" dirty="0"/>
+          </a:p>
+        </p:txBody>
+      </p:sp>
+      <p:sp>
+        <p:nvSpPr>
+          <p:cNvPr id="10" name="Text 7"/>
+          <p:cNvSpPr txBox="1"/>
+          <p:nvPr/>
+        </p:nvSpPr>
+        <p:spPr>
+          <a:xfrm>
+            <a:off x="6172200" y="4215384"/>
+            <a:ext cx="2194560" cy="228600"/>
+          </a:xfrm>
+          <a:prstGeom prst="rect">
+            <a:avLst/>
+          </a:prstGeom>
+          <a:noFill/>
+          <a:ln/>
+        </p:spPr>
+        <p:txBody>
+          <a:bodyPr wrap="square" lIns="0" tIns="0" rIns="0" bIns="0" rtlCol="0" anchor="ctr"/>
+          <a:lstStyle/>
+          <a:p>
+            <a:pPr indent="0" marL="0">
+              <a:buNone/>
+            </a:pPr>
+            <a:r>
+              <a:rPr lang="en-US" sz="950" dirty="0">
+                <a:solidFill>
+                  <a:srgbClr val="3FBF5A"/>
+                </a:solidFill>
+                <a:latin typeface="Courier New" pitchFamily="34" charset="0"/>
+                <a:ea typeface="Courier New" pitchFamily="34" charset="-122"/>
+                <a:cs typeface="Courier New" pitchFamily="34" charset="-120"/>
+              </a:rPr>
+              <a:t>/api/mapa</a:t>
+            </a:r>
+            <a:endParaRPr lang="en-US" sz="950" dirty="0"/>
+          </a:p>
+        </p:txBody>
+      </p:sp>
+      <p:sp>
+        <p:nvSpPr>
+          <p:cNvPr id="11" name="Text 8"/>
+          <p:cNvSpPr txBox="1"/>
+          <p:nvPr/>
+        </p:nvSpPr>
+        <p:spPr>
+          <a:xfrm>
+            <a:off x="6172200" y="4434840"/>
+            <a:ext cx="5394960" cy="274320"/>
+          </a:xfrm>
+          <a:prstGeom prst="rect">
+            <a:avLst/>
+          </a:prstGeom>
+          <a:noFill/>
+          <a:ln/>
+        </p:spPr>
+        <p:txBody>
+          <a:bodyPr wrap="square" lIns="0" tIns="0" rIns="0" bIns="0" rtlCol="0" anchor="ctr"/>
+          <a:lstStyle/>
+          <a:p>
+            <a:pPr indent="0" marL="0">
+              <a:buNone/>
+            </a:pPr>
+            <a:r>
+              <a:rPr lang="en-US" sz="1150" dirty="0">
                 <a:solidFill>
                   <a:srgbClr val="9DB0A6"/>
                 </a:solidFill>
@@ -12395,107 +11355,194 @@
                 <a:ea typeface="Calibri" pitchFamily="34" charset="-122"/>
                 <a:cs typeface="Calibri" pitchFamily="34" charset="-120"/>
               </a:rPr>
-              <a:t>O evento entra na corrente antes de qualquer tentativa de avisar alguém.</a:t>
-            </a:r>
-            <a:endParaRPr lang="en-US" sz="1200" dirty="0"/>
-          </a:p>
-        </p:txBody>
-      </p:sp>
-      <p:sp>
-        <p:nvSpPr>
-          <p:cNvPr id="8" name="Text 6"/>
-          <p:cNvSpPr txBox="1"/>
-          <p:nvPr/>
-        </p:nvSpPr>
-        <p:spPr>
-          <a:xfrm>
-            <a:off x="941832" y="4480560"/>
-            <a:ext cx="2926080" cy="548640"/>
-          </a:xfrm>
-          <a:prstGeom prst="rect">
-            <a:avLst/>
-          </a:prstGeom>
-          <a:noFill/>
-          <a:ln/>
-        </p:spPr>
-        <p:txBody>
-          <a:bodyPr wrap="square" lIns="0" tIns="0" rIns="0" bIns="0" rtlCol="0" anchor="ctr"/>
-          <a:lstStyle/>
-          <a:p>
-            <a:pPr indent="0" marL="0">
-              <a:lnSpc>
-                <a:spcPts val="1200"/>
-              </a:lnSpc>
-              <a:buNone/>
-            </a:pPr>
-            <a:r>
-              <a:rPr lang="en-US" sz="850" dirty="0">
-                <a:solidFill>
-                  <a:srgbClr val="6A7D74"/>
+              <a:t>Mapa suavizado por vizinhança, com um anel em onde mais pararam.</a:t>
+            </a:r>
+            <a:endParaRPr lang="en-US" sz="1150" dirty="0"/>
+          </a:p>
+        </p:txBody>
+      </p:sp>
+      <p:sp>
+        <p:nvSpPr>
+          <p:cNvPr id="12" name="Text 9"/>
+          <p:cNvSpPr txBox="1"/>
+          <p:nvPr/>
+        </p:nvSpPr>
+        <p:spPr>
+          <a:xfrm>
+            <a:off x="6172200" y="4764024"/>
+            <a:ext cx="5394960" cy="274320"/>
+          </a:xfrm>
+          <a:prstGeom prst="rect">
+            <a:avLst/>
+          </a:prstGeom>
+          <a:noFill/>
+          <a:ln/>
+        </p:spPr>
+        <p:txBody>
+          <a:bodyPr wrap="square" lIns="0" tIns="0" rIns="0" bIns="0" rtlCol="0" anchor="ctr"/>
+          <a:lstStyle/>
+          <a:p>
+            <a:pPr indent="0" marL="0">
+              <a:buNone/>
+            </a:pPr>
+            <a:r>
+              <a:rPr lang="en-US" sz="1400" b="1" dirty="0">
+                <a:solidFill>
+                  <a:srgbClr val="EDF3EF"/>
+                </a:solidFill>
+                <a:latin typeface="Arial" pitchFamily="34" charset="0"/>
+                <a:ea typeface="Arial" pitchFamily="34" charset="-122"/>
+                <a:cs typeface="Arial" pitchFamily="34" charset="-120"/>
+              </a:rPr>
+              <a:t>“Fulano sumiu?”</a:t>
+            </a:r>
+            <a:endParaRPr lang="en-US" sz="1400" dirty="0"/>
+          </a:p>
+        </p:txBody>
+      </p:sp>
+      <p:sp>
+        <p:nvSpPr>
+          <p:cNvPr id="13" name="Text 10"/>
+          <p:cNvSpPr txBox="1"/>
+          <p:nvPr/>
+        </p:nvSpPr>
+        <p:spPr>
+          <a:xfrm>
+            <a:off x="6172200" y="5020056"/>
+            <a:ext cx="2194560" cy="228600"/>
+          </a:xfrm>
+          <a:prstGeom prst="rect">
+            <a:avLst/>
+          </a:prstGeom>
+          <a:noFill/>
+          <a:ln/>
+        </p:spPr>
+        <p:txBody>
+          <a:bodyPr wrap="square" lIns="0" tIns="0" rIns="0" bIns="0" rtlCol="0" anchor="ctr"/>
+          <a:lstStyle/>
+          <a:p>
+            <a:pPr indent="0" marL="0">
+              <a:buNone/>
+            </a:pPr>
+            <a:r>
+              <a:rPr lang="en-US" sz="950" dirty="0">
+                <a:solidFill>
+                  <a:srgbClr val="3FBF5A"/>
                 </a:solidFill>
                 <a:latin typeface="Courier New" pitchFamily="34" charset="0"/>
                 <a:ea typeface="Courier New" pitchFamily="34" charset="-122"/>
                 <a:cs typeface="Courier New" pitchFamily="34" charset="-120"/>
               </a:rPr>
-              <a:t>o registro nunca depende da nuvem estar de pé</a:t>
-            </a:r>
-            <a:endParaRPr lang="en-US" sz="850" dirty="0"/>
-          </a:p>
-        </p:txBody>
-      </p:sp>
-      <p:sp>
-        <p:nvSpPr>
-          <p:cNvPr id="9" name="Shape 7"/>
-          <p:cNvSpPr/>
-          <p:nvPr/>
-        </p:nvSpPr>
-        <p:spPr>
-          <a:xfrm>
-            <a:off x="4370832" y="2606040"/>
-            <a:ext cx="3410712" cy="2514600"/>
-          </a:xfrm>
-          <a:prstGeom prst="roundRect">
-            <a:avLst>
-              <a:gd name="adj" fmla="val 3636"/>
-            </a:avLst>
-          </a:prstGeom>
-          <a:solidFill>
-            <a:srgbClr val="17211C"/>
-          </a:solidFill>
-          <a:ln w="12700">
-            <a:solidFill>
-              <a:srgbClr val="24322B"/>
-            </a:solidFill>
-            <a:prstDash val="solid"/>
-          </a:ln>
-        </p:spPr>
-      </p:sp>
-      <p:sp>
-        <p:nvSpPr>
-          <p:cNvPr id="10" name="Text 8"/>
-          <p:cNvSpPr txBox="1"/>
-          <p:nvPr/>
-        </p:nvSpPr>
-        <p:spPr>
-          <a:xfrm>
-            <a:off x="4626864" y="2816352"/>
-            <a:ext cx="2926080" cy="228600"/>
-          </a:xfrm>
-          <a:prstGeom prst="rect">
-            <a:avLst/>
-          </a:prstGeom>
-          <a:noFill/>
-          <a:ln/>
-        </p:spPr>
-        <p:txBody>
-          <a:bodyPr wrap="square" lIns="0" tIns="0" rIns="0" bIns="0" rtlCol="0" anchor="ctr"/>
-          <a:lstStyle/>
-          <a:p>
-            <a:pPr indent="0" marL="0">
-              <a:buNone/>
-            </a:pPr>
-            <a:r>
-              <a:rPr lang="en-US" sz="950" spc="150" kern="0" dirty="0">
+              <a:t>/api/pessoas</a:t>
+            </a:r>
+            <a:endParaRPr lang="en-US" sz="950" dirty="0"/>
+          </a:p>
+        </p:txBody>
+      </p:sp>
+      <p:sp>
+        <p:nvSpPr>
+          <p:cNvPr id="14" name="Text 11"/>
+          <p:cNvSpPr txBox="1"/>
+          <p:nvPr/>
+        </p:nvSpPr>
+        <p:spPr>
+          <a:xfrm>
+            <a:off x="6172200" y="5239512"/>
+            <a:ext cx="5394960" cy="274320"/>
+          </a:xfrm>
+          <a:prstGeom prst="rect">
+            <a:avLst/>
+          </a:prstGeom>
+          <a:noFill/>
+          <a:ln/>
+        </p:spPr>
+        <p:txBody>
+          <a:bodyPr wrap="square" lIns="0" tIns="0" rIns="0" bIns="0" rtlCol="0" anchor="ctr"/>
+          <a:lstStyle/>
+          <a:p>
+            <a:pPr indent="0" marL="0">
+              <a:buNone/>
+            </a:pPr>
+            <a:r>
+              <a:rPr lang="en-US" sz="1150" dirty="0">
+                <a:solidFill>
+                  <a:srgbClr val="9DB0A6"/>
+                </a:solidFill>
+                <a:latin typeface="Calibri" pitchFamily="34" charset="0"/>
+                <a:ea typeface="Calibri" pitchFamily="34" charset="-122"/>
+                <a:cs typeface="Calibri" pitchFamily="34" charset="-120"/>
+              </a:rPr>
+              <a:t>Quem foi reconhecido e há quantos dias não aparece.</a:t>
+            </a:r>
+            <a:endParaRPr lang="en-US" sz="1150" dirty="0"/>
+          </a:p>
+        </p:txBody>
+      </p:sp>
+      <p:sp>
+        <p:nvSpPr>
+          <p:cNvPr id="15" name="Text 12"/>
+          <p:cNvSpPr txBox="1"/>
+          <p:nvPr/>
+        </p:nvSpPr>
+        <p:spPr>
+          <a:xfrm>
+            <a:off x="6172200" y="5568696"/>
+            <a:ext cx="5394960" cy="274320"/>
+          </a:xfrm>
+          <a:prstGeom prst="rect">
+            <a:avLst/>
+          </a:prstGeom>
+          <a:noFill/>
+          <a:ln/>
+        </p:spPr>
+        <p:txBody>
+          <a:bodyPr wrap="square" lIns="0" tIns="0" rIns="0" bIns="0" rtlCol="0" anchor="ctr"/>
+          <a:lstStyle/>
+          <a:p>
+            <a:pPr indent="0" marL="0">
+              <a:buNone/>
+            </a:pPr>
+            <a:r>
+              <a:rPr lang="en-US" sz="1400" b="1" dirty="0">
+                <a:solidFill>
+                  <a:srgbClr val="EDF3EF"/>
+                </a:solidFill>
+                <a:latin typeface="Arial" pitchFamily="34" charset="0"/>
+                <a:ea typeface="Arial" pitchFamily="34" charset="-122"/>
+                <a:cs typeface="Arial" pitchFamily="34" charset="-120"/>
+              </a:rPr>
+              <a:t>“Posso confiar nisto?”</a:t>
+            </a:r>
+            <a:endParaRPr lang="en-US" sz="1400" dirty="0"/>
+          </a:p>
+        </p:txBody>
+      </p:sp>
+      <p:sp>
+        <p:nvSpPr>
+          <p:cNvPr id="16" name="Text 13"/>
+          <p:cNvSpPr txBox="1"/>
+          <p:nvPr/>
+        </p:nvSpPr>
+        <p:spPr>
+          <a:xfrm>
+            <a:off x="6172200" y="5824728"/>
+            <a:ext cx="2194560" cy="228600"/>
+          </a:xfrm>
+          <a:prstGeom prst="rect">
+            <a:avLst/>
+          </a:prstGeom>
+          <a:noFill/>
+          <a:ln/>
+        </p:spPr>
+        <p:txBody>
+          <a:bodyPr wrap="square" lIns="0" tIns="0" rIns="0" bIns="0" rtlCol="0" anchor="ctr"/>
+          <a:lstStyle/>
+          <a:p>
+            <a:pPr indent="0" marL="0">
+              <a:buNone/>
+            </a:pPr>
+            <a:r>
+              <a:rPr lang="en-US" sz="950" dirty="0">
                 <a:solidFill>
                   <a:srgbClr val="3FBF5A"/>
                 </a:solidFill>
@@ -12503,7 +11550,7 @@
                 <a:ea typeface="Courier New" pitchFamily="34" charset="-122"/>
                 <a:cs typeface="Courier New" pitchFamily="34" charset="-120"/>
               </a:rPr>
-              <a:t>NA NUVEM</a:t>
+              <a:t>/api/verificar</a:t>
             </a:r>
             <a:endParaRPr lang="en-US" sz="950" dirty="0"/>
           </a:p>
@@ -12511,72 +11558,30 @@
       </p:sp>
       <p:sp>
         <p:nvSpPr>
-          <p:cNvPr id="11" name="Text 9"/>
-          <p:cNvSpPr txBox="1"/>
-          <p:nvPr/>
-        </p:nvSpPr>
-        <p:spPr>
-          <a:xfrm>
-            <a:off x="4626864" y="3090672"/>
-            <a:ext cx="2926080" cy="365760"/>
-          </a:xfrm>
-          <a:prstGeom prst="rect">
-            <a:avLst/>
-          </a:prstGeom>
-          <a:noFill/>
-          <a:ln/>
-        </p:spPr>
-        <p:txBody>
-          <a:bodyPr wrap="square" lIns="0" tIns="0" rIns="0" bIns="0" rtlCol="0" anchor="ctr"/>
-          <a:lstStyle/>
-          <a:p>
-            <a:pPr indent="0" marL="0">
-              <a:buNone/>
-            </a:pPr>
-            <a:r>
-              <a:rPr lang="en-US" sz="1600" b="1" dirty="0">
-                <a:solidFill>
-                  <a:srgbClr val="EDF3EF"/>
-                </a:solidFill>
-                <a:latin typeface="Arial" pitchFamily="34" charset="0"/>
-                <a:ea typeface="Arial" pitchFamily="34" charset="-122"/>
-                <a:cs typeface="Arial" pitchFamily="34" charset="-120"/>
-              </a:rPr>
-              <a:t>Uma função envia</a:t>
-            </a:r>
-            <a:endParaRPr lang="en-US" sz="1600" dirty="0"/>
-          </a:p>
-        </p:txBody>
-      </p:sp>
-      <p:sp>
-        <p:nvSpPr>
-          <p:cNvPr id="12" name="Text 10"/>
-          <p:cNvSpPr txBox="1"/>
-          <p:nvPr/>
-        </p:nvSpPr>
-        <p:spPr>
-          <a:xfrm>
-            <a:off x="4626864" y="3547872"/>
-            <a:ext cx="2926080" cy="914400"/>
-          </a:xfrm>
-          <a:prstGeom prst="rect">
-            <a:avLst/>
-          </a:prstGeom>
-          <a:noFill/>
-          <a:ln/>
-        </p:spPr>
-        <p:txBody>
-          <a:bodyPr wrap="square" lIns="0" tIns="0" rIns="0" bIns="0" rtlCol="0" anchor="ctr"/>
-          <a:lstStyle/>
-          <a:p>
-            <a:pPr indent="0" marL="0">
-              <a:lnSpc>
-                <a:spcPts val="1600"/>
-              </a:lnSpc>
-              <a:buNone/>
-            </a:pPr>
-            <a:r>
-              <a:rPr lang="en-US" sz="1200" dirty="0">
+          <p:cNvPr id="17" name="Text 14"/>
+          <p:cNvSpPr txBox="1"/>
+          <p:nvPr/>
+        </p:nvSpPr>
+        <p:spPr>
+          <a:xfrm>
+            <a:off x="6172200" y="6044184"/>
+            <a:ext cx="5394960" cy="274320"/>
+          </a:xfrm>
+          <a:prstGeom prst="rect">
+            <a:avLst/>
+          </a:prstGeom>
+          <a:noFill/>
+          <a:ln/>
+        </p:spPr>
+        <p:txBody>
+          <a:bodyPr wrap="square" lIns="0" tIns="0" rIns="0" bIns="0" rtlCol="0" anchor="ctr"/>
+          <a:lstStyle/>
+          <a:p>
+            <a:pPr indent="0" marL="0">
+              <a:buNone/>
+            </a:pPr>
+            <a:r>
+              <a:rPr lang="en-US" sz="1150" dirty="0">
                 <a:solidFill>
                   <a:srgbClr val="9DB0A6"/>
                 </a:solidFill>
@@ -12584,41 +11589,38 @@
                 <a:ea typeface="Calibri" pitchFamily="34" charset="-122"/>
                 <a:cs typeface="Calibri" pitchFamily="34" charset="-120"/>
               </a:rPr>
-              <a:t>A escola não guarda senha de e-mail nenhuma. A credencial não existe como arquivo.</a:t>
-            </a:r>
-            <a:endParaRPr lang="en-US" sz="1200" dirty="0"/>
-          </a:p>
-        </p:txBody>
-      </p:sp>
-      <p:sp>
-        <p:nvSpPr>
-          <p:cNvPr id="13" name="Text 11"/>
-          <p:cNvSpPr txBox="1"/>
-          <p:nvPr/>
-        </p:nvSpPr>
-        <p:spPr>
-          <a:xfrm>
-            <a:off x="4626864" y="4480560"/>
-            <a:ext cx="2926080" cy="548640"/>
-          </a:xfrm>
-          <a:prstGeom prst="rect">
-            <a:avLst/>
-          </a:prstGeom>
-          <a:noFill/>
-          <a:ln/>
-        </p:spPr>
-        <p:txBody>
-          <a:bodyPr wrap="square" lIns="0" tIns="0" rIns="0" bIns="0" rtlCol="0" anchor="ctr"/>
-          <a:lstStyle/>
-          <a:p>
-            <a:pPr indent="0" marL="0">
-              <a:lnSpc>
-                <a:spcPts val="1200"/>
-              </a:lnSpc>
-              <a:buNone/>
-            </a:pPr>
-            <a:r>
-              <a:rPr lang="en-US" sz="850" dirty="0">
+              <a:t>Recalcula a corrente desde a gênese, contra o hash recalculado.</a:t>
+            </a:r>
+            <a:endParaRPr lang="en-US" sz="1150" dirty="0"/>
+          </a:p>
+        </p:txBody>
+      </p:sp>
+      <p:sp>
+        <p:nvSpPr>
+          <p:cNvPr id="18" name="Text 15"/>
+          <p:cNvSpPr txBox="1"/>
+          <p:nvPr/>
+        </p:nvSpPr>
+        <p:spPr>
+          <a:xfrm>
+            <a:off x="685800" y="6291072"/>
+            <a:ext cx="5486400" cy="274320"/>
+          </a:xfrm>
+          <a:prstGeom prst="rect">
+            <a:avLst/>
+          </a:prstGeom>
+          <a:noFill/>
+          <a:ln/>
+        </p:spPr>
+        <p:txBody>
+          <a:bodyPr wrap="square" lIns="0" tIns="0" rIns="0" bIns="0" rtlCol="0" anchor="ctr"/>
+          <a:lstStyle/>
+          <a:p>
+            <a:pPr indent="0" marL="0">
+              <a:buNone/>
+            </a:pPr>
+            <a:r>
+              <a:rPr lang="en-US" sz="900" dirty="0">
                 <a:solidFill>
                   <a:srgbClr val="6A7D74"/>
                 </a:solidFill>
@@ -12626,274 +11628,7 @@
                 <a:ea typeface="Courier New" pitchFamily="34" charset="-122"/>
                 <a:cs typeface="Courier New" pitchFamily="34" charset="-120"/>
               </a:rPr>
-              <a:t>segredo compartilhado barra quem descobrir a URL</a:t>
-            </a:r>
-            <a:endParaRPr lang="en-US" sz="850" dirty="0"/>
-          </a:p>
-        </p:txBody>
-      </p:sp>
-      <p:sp>
-        <p:nvSpPr>
-          <p:cNvPr id="14" name="Shape 12"/>
-          <p:cNvSpPr/>
-          <p:nvPr/>
-        </p:nvSpPr>
-        <p:spPr>
-          <a:xfrm>
-            <a:off x="8055864" y="2606040"/>
-            <a:ext cx="3410712" cy="2514600"/>
-          </a:xfrm>
-          <a:prstGeom prst="roundRect">
-            <a:avLst>
-              <a:gd name="adj" fmla="val 3636"/>
-            </a:avLst>
-          </a:prstGeom>
-          <a:solidFill>
-            <a:srgbClr val="17211C"/>
-          </a:solidFill>
-          <a:ln w="12700">
-            <a:solidFill>
-              <a:srgbClr val="24322B"/>
-            </a:solidFill>
-            <a:prstDash val="solid"/>
-          </a:ln>
-        </p:spPr>
-      </p:sp>
-      <p:sp>
-        <p:nvSpPr>
-          <p:cNvPr id="15" name="Text 13"/>
-          <p:cNvSpPr txBox="1"/>
-          <p:nvPr/>
-        </p:nvSpPr>
-        <p:spPr>
-          <a:xfrm>
-            <a:off x="8311896" y="2816352"/>
-            <a:ext cx="2926080" cy="228600"/>
-          </a:xfrm>
-          <a:prstGeom prst="rect">
-            <a:avLst/>
-          </a:prstGeom>
-          <a:noFill/>
-          <a:ln/>
-        </p:spPr>
-        <p:txBody>
-          <a:bodyPr wrap="square" lIns="0" tIns="0" rIns="0" bIns="0" rtlCol="0" anchor="ctr"/>
-          <a:lstStyle/>
-          <a:p>
-            <a:pPr indent="0" marL="0">
-              <a:buNone/>
-            </a:pPr>
-            <a:r>
-              <a:rPr lang="en-US" sz="950" spc="150" kern="0" dirty="0">
-                <a:solidFill>
-                  <a:srgbClr val="3FBF5A"/>
-                </a:solidFill>
-                <a:latin typeface="Courier New" pitchFamily="34" charset="0"/>
-                <a:ea typeface="Courier New" pitchFamily="34" charset="-122"/>
-                <a:cs typeface="Courier New" pitchFamily="34" charset="-120"/>
-              </a:rPr>
-              <a:t>NA COORDENAÇÃO</a:t>
-            </a:r>
-            <a:endParaRPr lang="en-US" sz="950" dirty="0"/>
-          </a:p>
-        </p:txBody>
-      </p:sp>
-      <p:sp>
-        <p:nvSpPr>
-          <p:cNvPr id="16" name="Text 14"/>
-          <p:cNvSpPr txBox="1"/>
-          <p:nvPr/>
-        </p:nvSpPr>
-        <p:spPr>
-          <a:xfrm>
-            <a:off x="8311896" y="3090672"/>
-            <a:ext cx="2926080" cy="365760"/>
-          </a:xfrm>
-          <a:prstGeom prst="rect">
-            <a:avLst/>
-          </a:prstGeom>
-          <a:noFill/>
-          <a:ln/>
-        </p:spPr>
-        <p:txBody>
-          <a:bodyPr wrap="square" lIns="0" tIns="0" rIns="0" bIns="0" rtlCol="0" anchor="ctr"/>
-          <a:lstStyle/>
-          <a:p>
-            <a:pPr indent="0" marL="0">
-              <a:buNone/>
-            </a:pPr>
-            <a:r>
-              <a:rPr lang="en-US" sz="1600" b="1" dirty="0">
-                <a:solidFill>
-                  <a:srgbClr val="EDF3EF"/>
-                </a:solidFill>
-                <a:latin typeface="Arial" pitchFamily="34" charset="0"/>
-                <a:ea typeface="Arial" pitchFamily="34" charset="-122"/>
-                <a:cs typeface="Arial" pitchFamily="34" charset="-120"/>
-              </a:rPr>
-              <a:t>Um e-mail que se lê</a:t>
-            </a:r>
-            <a:endParaRPr lang="en-US" sz="1600" dirty="0"/>
-          </a:p>
-        </p:txBody>
-      </p:sp>
-      <p:sp>
-        <p:nvSpPr>
-          <p:cNvPr id="17" name="Text 15"/>
-          <p:cNvSpPr txBox="1"/>
-          <p:nvPr/>
-        </p:nvSpPr>
-        <p:spPr>
-          <a:xfrm>
-            <a:off x="8311896" y="3547872"/>
-            <a:ext cx="2926080" cy="914400"/>
-          </a:xfrm>
-          <a:prstGeom prst="rect">
-            <a:avLst/>
-          </a:prstGeom>
-          <a:noFill/>
-          <a:ln/>
-        </p:spPr>
-        <p:txBody>
-          <a:bodyPr wrap="square" lIns="0" tIns="0" rIns="0" bIns="0" rtlCol="0" anchor="ctr"/>
-          <a:lstStyle/>
-          <a:p>
-            <a:pPr indent="0" marL="0">
-              <a:lnSpc>
-                <a:spcPts val="1600"/>
-              </a:lnSpc>
-              <a:buNone/>
-            </a:pPr>
-            <a:r>
-              <a:rPr lang="en-US" sz="1200" dirty="0">
-                <a:solidFill>
-                  <a:srgbClr val="9DB0A6"/>
-                </a:solidFill>
-                <a:latin typeface="Calibri" pitchFamily="34" charset="0"/>
-                <a:ea typeface="Calibri" pitchFamily="34" charset="-122"/>
-                <a:cs typeface="Calibri" pitchFamily="34" charset="-120"/>
-              </a:rPr>
-              <a:t>O que houve, onde, quando, e que é um pedido de conferência.</a:t>
-            </a:r>
-            <a:endParaRPr lang="en-US" sz="1200" dirty="0"/>
-          </a:p>
-        </p:txBody>
-      </p:sp>
-      <p:sp>
-        <p:nvSpPr>
-          <p:cNvPr id="18" name="Text 16"/>
-          <p:cNvSpPr txBox="1"/>
-          <p:nvPr/>
-        </p:nvSpPr>
-        <p:spPr>
-          <a:xfrm>
-            <a:off x="8311896" y="4480560"/>
-            <a:ext cx="2926080" cy="548640"/>
-          </a:xfrm>
-          <a:prstGeom prst="rect">
-            <a:avLst/>
-          </a:prstGeom>
-          <a:noFill/>
-          <a:ln/>
-        </p:spPr>
-        <p:txBody>
-          <a:bodyPr wrap="square" lIns="0" tIns="0" rIns="0" bIns="0" rtlCol="0" anchor="ctr"/>
-          <a:lstStyle/>
-          <a:p>
-            <a:pPr indent="0" marL="0">
-              <a:lnSpc>
-                <a:spcPts val="1200"/>
-              </a:lnSpc>
-              <a:buNone/>
-            </a:pPr>
-            <a:r>
-              <a:rPr lang="en-US" sz="850" dirty="0">
-                <a:solidFill>
-                  <a:srgbClr val="6A7D74"/>
-                </a:solidFill>
-                <a:latin typeface="Courier New" pitchFamily="34" charset="0"/>
-                <a:ea typeface="Courier New" pitchFamily="34" charset="-122"/>
-                <a:cs typeface="Courier New" pitchFamily="34" charset="-120"/>
-              </a:rPr>
-              <a:t>um aviso a cada poucos segundos é um aviso que ninguém lê</a:t>
-            </a:r>
-            <a:endParaRPr lang="en-US" sz="850" dirty="0"/>
-          </a:p>
-        </p:txBody>
-      </p:sp>
-      <p:sp>
-        <p:nvSpPr>
-          <p:cNvPr id="19" name="Text 17"/>
-          <p:cNvSpPr txBox="1"/>
-          <p:nvPr/>
-        </p:nvSpPr>
-        <p:spPr>
-          <a:xfrm>
-            <a:off x="685800" y="5486400"/>
-            <a:ext cx="10515600" cy="457200"/>
-          </a:xfrm>
-          <a:prstGeom prst="rect">
-            <a:avLst/>
-          </a:prstGeom>
-          <a:noFill/>
-          <a:ln/>
-        </p:spPr>
-        <p:txBody>
-          <a:bodyPr wrap="square" lIns="0" tIns="0" rIns="0" bIns="0" rtlCol="0" anchor="ctr"/>
-          <a:lstStyle/>
-          <a:p>
-            <a:pPr indent="0" marL="0">
-              <a:buNone/>
-            </a:pPr>
-            <a:r>
-              <a:rPr lang="en-US" sz="1400" dirty="0">
-                <a:solidFill>
-                  <a:srgbClr val="9DB0A6"/>
-                </a:solidFill>
-                <a:latin typeface="Calibri" pitchFamily="34" charset="0"/>
-                <a:ea typeface="Calibri" pitchFamily="34" charset="-122"/>
-                <a:cs typeface="Calibri" pitchFamily="34" charset="-120"/>
-              </a:rPr>
-              <a:t>O caminho tem teste automático, inclusive o que custa caro quando falha: e-mail sem segredo e e-mail em rajada.</a:t>
-            </a:r>
-            <a:endParaRPr lang="en-US" sz="1400" dirty="0"/>
-          </a:p>
-        </p:txBody>
-      </p:sp>
-      <p:sp>
-        <p:nvSpPr>
-          <p:cNvPr id="20" name="Text 18"/>
-          <p:cNvSpPr txBox="1"/>
-          <p:nvPr/>
-        </p:nvSpPr>
-        <p:spPr>
-          <a:xfrm>
-            <a:off x="685800" y="6291072"/>
-            <a:ext cx="5486400" cy="274320"/>
-          </a:xfrm>
-          <a:prstGeom prst="rect">
-            <a:avLst/>
-          </a:prstGeom>
-          <a:noFill/>
-          <a:ln/>
-        </p:spPr>
-        <p:txBody>
-          <a:bodyPr wrap="square" lIns="0" tIns="0" rIns="0" bIns="0" rtlCol="0" anchor="ctr"/>
-          <a:lstStyle/>
-          <a:p>
-            <a:pPr indent="0" marL="0">
-              <a:buNone/>
-            </a:pPr>
-            <a:r>
-              <a:rPr lang="en-US" sz="900" dirty="0">
-                <a:solidFill>
-                  <a:srgbClr val="6A7D74"/>
-                </a:solidFill>
-                <a:latin typeface="Courier New" pitchFamily="34" charset="0"/>
-                <a:ea typeface="Courier New" pitchFamily="34" charset="-122"/>
-                <a:cs typeface="Courier New" pitchFamily="34" charset="-120"/>
-              </a:rPr>
-              <a:t>Auditix AI  ·  SVATech  ·  grupo 11</a:t>
+              <a:t>Auditix IA  ·  grupo 11</a:t>
             </a:r>
             <a:endParaRPr lang="en-US" sz="900" dirty="0"/>
           </a:p>
@@ -12901,7 +11636,7 @@
       </p:sp>
       <p:sp>
         <p:nvSpPr>
-          <p:cNvPr id="21" name="Text 19"/>
+          <p:cNvPr id="19" name="Text 16"/>
           <p:cNvSpPr txBox="1"/>
           <p:nvPr/>
         </p:nvSpPr>
@@ -13003,7 +11738,7 @@
                 <a:ea typeface="Courier New" pitchFamily="34" charset="-122"/>
                 <a:cs typeface="Courier New" pitchFamily="34" charset="-120"/>
               </a:rPr>
-              <a:t>DASHBOARD LIGADO AO BANCO POR API</a:t>
+              <a:t>ONDE ISTO VAI DAR</a:t>
             </a:r>
             <a:endParaRPr lang="en-US" sz="1100" dirty="0"/>
           </a:p>
@@ -13045,19 +11780,100 @@
                 <a:ea typeface="Arial" pitchFamily="34" charset="-122"/>
                 <a:cs typeface="Arial" pitchFamily="34" charset="-120"/>
               </a:rPr>
-              <a:t>Um dashboard que lê o banco,</a:t>
+              <a:t>De uma sala para a rede inteira.</a:t>
             </a:r>
             <a:endParaRPr lang="en-US" sz="3600" dirty="0"/>
           </a:p>
-          <a:p>
-            <a:pPr indent="0" marL="0">
-              <a:lnSpc>
-                <a:spcPts val="3800"/>
-              </a:lnSpc>
-              <a:buNone/>
-            </a:pPr>
-            <a:r>
-              <a:rPr lang="en-US" sz="3600" b="1" dirty="0">
+        </p:txBody>
+      </p:sp>
+      <p:sp>
+        <p:nvSpPr>
+          <p:cNvPr id="4" name="Shape 2"/>
+          <p:cNvSpPr/>
+          <p:nvPr/>
+        </p:nvSpPr>
+        <p:spPr>
+          <a:xfrm>
+            <a:off x="685800" y="2331720"/>
+            <a:ext cx="10789920" cy="0"/>
+          </a:xfrm>
+          <a:prstGeom prst="line">
+            <a:avLst/>
+          </a:prstGeom>
+          <a:noFill/>
+          <a:ln w="12700">
+            <a:solidFill>
+              <a:srgbClr val="24322B"/>
+            </a:solidFill>
+            <a:prstDash val="solid"/>
+          </a:ln>
+        </p:spPr>
+      </p:sp>
+      <p:sp>
+        <p:nvSpPr>
+          <p:cNvPr id="5" name="Text 3"/>
+          <p:cNvSpPr txBox="1"/>
+          <p:nvPr/>
+        </p:nvSpPr>
+        <p:spPr>
+          <a:xfrm>
+            <a:off x="685800" y="2496312"/>
+            <a:ext cx="1645920" cy="274320"/>
+          </a:xfrm>
+          <a:prstGeom prst="rect">
+            <a:avLst/>
+          </a:prstGeom>
+          <a:noFill/>
+          <a:ln/>
+        </p:spPr>
+        <p:txBody>
+          <a:bodyPr wrap="square" lIns="0" tIns="0" rIns="0" bIns="0" rtlCol="0" anchor="ctr"/>
+          <a:lstStyle/>
+          <a:p>
+            <a:pPr indent="0" marL="0">
+              <a:buNone/>
+            </a:pPr>
+            <a:r>
+              <a:rPr lang="en-US" sz="1000" spc="150" kern="0" dirty="0">
+                <a:solidFill>
+                  <a:srgbClr val="3FBF5A"/>
+                </a:solidFill>
+                <a:latin typeface="Courier New" pitchFamily="34" charset="0"/>
+                <a:ea typeface="Courier New" pitchFamily="34" charset="-122"/>
+                <a:cs typeface="Courier New" pitchFamily="34" charset="-120"/>
+              </a:rPr>
+              <a:t>HOJE</a:t>
+            </a:r>
+            <a:endParaRPr lang="en-US" sz="1000" dirty="0"/>
+          </a:p>
+        </p:txBody>
+      </p:sp>
+      <p:sp>
+        <p:nvSpPr>
+          <p:cNvPr id="6" name="Text 4"/>
+          <p:cNvSpPr txBox="1"/>
+          <p:nvPr/>
+        </p:nvSpPr>
+        <p:spPr>
+          <a:xfrm>
+            <a:off x="2514600" y="2441448"/>
+            <a:ext cx="5669280" cy="347472"/>
+          </a:xfrm>
+          <a:prstGeom prst="rect">
+            <a:avLst/>
+          </a:prstGeom>
+          <a:noFill/>
+          <a:ln/>
+        </p:spPr>
+        <p:txBody>
+          <a:bodyPr wrap="square" lIns="0" tIns="0" rIns="0" bIns="0" rtlCol="0" anchor="ctr"/>
+          <a:lstStyle/>
+          <a:p>
+            <a:pPr indent="0" marL="0">
+              <a:buNone/>
+            </a:pPr>
+            <a:r>
+              <a:rPr lang="en-US" sz="1700" b="1" dirty="0">
                 <a:solidFill>
                   <a:srgbClr val="EDF3EF"/>
                 </a:solidFill>
@@ -13065,38 +11881,107 @@
                 <a:ea typeface="Arial" pitchFamily="34" charset="-122"/>
                 <a:cs typeface="Arial" pitchFamily="34" charset="-120"/>
               </a:rPr>
-              <a:t>não um print de tela.</a:t>
-            </a:r>
-            <a:endParaRPr lang="en-US" sz="3600" dirty="0"/>
-          </a:p>
-        </p:txBody>
-      </p:sp>
-      <p:sp>
-        <p:nvSpPr>
-          <p:cNvPr id="4" name="Text 2"/>
-          <p:cNvSpPr txBox="1"/>
-          <p:nvPr/>
-        </p:nvSpPr>
-        <p:spPr>
-          <a:xfrm>
-            <a:off x="685800" y="2514600"/>
-            <a:ext cx="10515600" cy="502920"/>
-          </a:xfrm>
-          <a:prstGeom prst="rect">
-            <a:avLst/>
-          </a:prstGeom>
-          <a:noFill/>
-          <a:ln/>
-        </p:spPr>
-        <p:txBody>
-          <a:bodyPr wrap="square" lIns="0" tIns="0" rIns="0" bIns="0" rtlCol="0" anchor="ctr"/>
-          <a:lstStyle/>
-          <a:p>
-            <a:pPr indent="0" marL="0">
-              <a:buNone/>
-            </a:pPr>
-            <a:r>
-              <a:rPr lang="en-US" sz="1400" dirty="0">
+              <a:t>Uma sala, uma câmera, um alerta</a:t>
+            </a:r>
+            <a:endParaRPr lang="en-US" sz="1700" dirty="0"/>
+          </a:p>
+        </p:txBody>
+      </p:sp>
+      <p:sp>
+        <p:nvSpPr>
+          <p:cNvPr id="7" name="Shape 5"/>
+          <p:cNvSpPr/>
+          <p:nvPr/>
+        </p:nvSpPr>
+        <p:spPr>
+          <a:xfrm>
+            <a:off x="8321040" y="2468880"/>
+            <a:ext cx="1600200" cy="292608"/>
+          </a:xfrm>
+          <a:prstGeom prst="roundRect">
+            <a:avLst>
+              <a:gd name="adj" fmla="val 50000"/>
+            </a:avLst>
+          </a:prstGeom>
+          <a:solidFill>
+            <a:srgbClr val="0B100E"/>
+          </a:solidFill>
+          <a:ln w="12700">
+            <a:solidFill>
+              <a:srgbClr val="3FBF5A"/>
+            </a:solidFill>
+            <a:prstDash val="solid"/>
+          </a:ln>
+        </p:spPr>
+      </p:sp>
+      <p:sp>
+        <p:nvSpPr>
+          <p:cNvPr id="8" name="Text 6"/>
+          <p:cNvSpPr txBox="1"/>
+          <p:nvPr/>
+        </p:nvSpPr>
+        <p:spPr>
+          <a:xfrm>
+            <a:off x="8321040" y="2487168"/>
+            <a:ext cx="1600200" cy="256032"/>
+          </a:xfrm>
+          <a:prstGeom prst="rect">
+            <a:avLst/>
+          </a:prstGeom>
+          <a:noFill/>
+          <a:ln/>
+        </p:spPr>
+        <p:txBody>
+          <a:bodyPr wrap="square" lIns="0" tIns="0" rIns="0" bIns="0" rtlCol="0" anchor="ctr"/>
+          <a:lstStyle/>
+          <a:p>
+            <a:pPr algn="ctr" indent="0" marL="0">
+              <a:buNone/>
+            </a:pPr>
+            <a:r>
+              <a:rPr lang="en-US" sz="850" dirty="0">
+                <a:solidFill>
+                  <a:srgbClr val="3FBF5A"/>
+                </a:solidFill>
+                <a:latin typeface="Courier New" pitchFamily="34" charset="0"/>
+                <a:ea typeface="Courier New" pitchFamily="34" charset="-122"/>
+                <a:cs typeface="Courier New" pitchFamily="34" charset="-120"/>
+              </a:rPr>
+              <a:t>DE PÉ</a:t>
+            </a:r>
+            <a:endParaRPr lang="en-US" sz="850" dirty="0"/>
+          </a:p>
+        </p:txBody>
+      </p:sp>
+      <p:sp>
+        <p:nvSpPr>
+          <p:cNvPr id="9" name="Text 7"/>
+          <p:cNvSpPr txBox="1"/>
+          <p:nvPr/>
+        </p:nvSpPr>
+        <p:spPr>
+          <a:xfrm>
+            <a:off x="2514600" y="2834640"/>
+            <a:ext cx="8686800" cy="457200"/>
+          </a:xfrm>
+          <a:prstGeom prst="rect">
+            <a:avLst/>
+          </a:prstGeom>
+          <a:noFill/>
+          <a:ln/>
+        </p:spPr>
+        <p:txBody>
+          <a:bodyPr wrap="square" lIns="0" tIns="0" rIns="0" bIns="0" rtlCol="0" anchor="ctr"/>
+          <a:lstStyle/>
+          <a:p>
+            <a:pPr indent="0" marL="0">
+              <a:lnSpc>
+                <a:spcPts val="1600"/>
+              </a:lnSpc>
+              <a:buNone/>
+            </a:pPr>
+            <a:r>
+              <a:rPr lang="en-US" sz="1200" dirty="0">
                 <a:solidFill>
                   <a:srgbClr val="9DB0A6"/>
                 </a:solidFill>
@@ -13104,76 +11989,309 @@
                 <a:ea typeface="Calibri" pitchFamily="34" charset="-122"/>
                 <a:cs typeface="Calibri" pitchFamily="34" charset="-120"/>
               </a:rPr>
-              <a:t>Sete rotas em FastAPI sobre o PostgreSQL. A única que escreve alguma coisa é a da imagem, e o que ela escreve é </a:t>
-            </a:r>
-            <a:pPr indent="0" marL="0">
-              <a:buNone/>
-            </a:pPr>
-            <a:r>
-              <a:rPr lang="en-US" sz="1400" b="1" dirty="0">
+              <a:t>Queda ao vivo, evento na corrente, e-mail na coordenação, imagem com rosto apagado. Roda sem internet, numa máquina comum.</a:t>
+            </a:r>
+            <a:endParaRPr lang="en-US" sz="1200" dirty="0"/>
+          </a:p>
+        </p:txBody>
+      </p:sp>
+      <p:sp>
+        <p:nvSpPr>
+          <p:cNvPr id="10" name="Shape 8"/>
+          <p:cNvSpPr/>
+          <p:nvPr/>
+        </p:nvSpPr>
+        <p:spPr>
+          <a:xfrm>
+            <a:off x="685800" y="3355848"/>
+            <a:ext cx="10789920" cy="0"/>
+          </a:xfrm>
+          <a:prstGeom prst="line">
+            <a:avLst/>
+          </a:prstGeom>
+          <a:noFill/>
+          <a:ln w="12700">
+            <a:solidFill>
+              <a:srgbClr val="24322B"/>
+            </a:solidFill>
+            <a:prstDash val="solid"/>
+          </a:ln>
+        </p:spPr>
+      </p:sp>
+      <p:sp>
+        <p:nvSpPr>
+          <p:cNvPr id="11" name="Text 9"/>
+          <p:cNvSpPr txBox="1"/>
+          <p:nvPr/>
+        </p:nvSpPr>
+        <p:spPr>
+          <a:xfrm>
+            <a:off x="685800" y="3520440"/>
+            <a:ext cx="1645920" cy="274320"/>
+          </a:xfrm>
+          <a:prstGeom prst="rect">
+            <a:avLst/>
+          </a:prstGeom>
+          <a:noFill/>
+          <a:ln/>
+        </p:spPr>
+        <p:txBody>
+          <a:bodyPr wrap="square" lIns="0" tIns="0" rIns="0" bIns="0" rtlCol="0" anchor="ctr"/>
+          <a:lstStyle/>
+          <a:p>
+            <a:pPr indent="0" marL="0">
+              <a:buNone/>
+            </a:pPr>
+            <a:r>
+              <a:rPr lang="en-US" sz="1000" spc="150" kern="0" dirty="0">
+                <a:solidFill>
+                  <a:srgbClr val="6A7D74"/>
+                </a:solidFill>
+                <a:latin typeface="Courier New" pitchFamily="34" charset="0"/>
+                <a:ea typeface="Courier New" pitchFamily="34" charset="-122"/>
+                <a:cs typeface="Courier New" pitchFamily="34" charset="-120"/>
+              </a:rPr>
+              <a:t>PRÓXIMO</a:t>
+            </a:r>
+            <a:endParaRPr lang="en-US" sz="1000" dirty="0"/>
+          </a:p>
+        </p:txBody>
+      </p:sp>
+      <p:sp>
+        <p:nvSpPr>
+          <p:cNvPr id="12" name="Text 10"/>
+          <p:cNvSpPr txBox="1"/>
+          <p:nvPr/>
+        </p:nvSpPr>
+        <p:spPr>
+          <a:xfrm>
+            <a:off x="2514600" y="3465576"/>
+            <a:ext cx="5669280" cy="347472"/>
+          </a:xfrm>
+          <a:prstGeom prst="rect">
+            <a:avLst/>
+          </a:prstGeom>
+          <a:noFill/>
+          <a:ln/>
+        </p:spPr>
+        <p:txBody>
+          <a:bodyPr wrap="square" lIns="0" tIns="0" rIns="0" bIns="0" rtlCol="0" anchor="ctr"/>
+          <a:lstStyle/>
+          <a:p>
+            <a:pPr indent="0" marL="0">
+              <a:buNone/>
+            </a:pPr>
+            <a:r>
+              <a:rPr lang="en-US" sz="1700" b="1" dirty="0">
                 <a:solidFill>
                   <a:srgbClr val="EDF3EF"/>
+                </a:solidFill>
+                <a:latin typeface="Arial" pitchFamily="34" charset="0"/>
+                <a:ea typeface="Arial" pitchFamily="34" charset="-122"/>
+                <a:cs typeface="Arial" pitchFamily="34" charset="-120"/>
+              </a:rPr>
+              <a:t>Escola-piloto</a:t>
+            </a:r>
+            <a:endParaRPr lang="en-US" sz="1700" dirty="0"/>
+          </a:p>
+        </p:txBody>
+      </p:sp>
+      <p:sp>
+        <p:nvSpPr>
+          <p:cNvPr id="13" name="Shape 11"/>
+          <p:cNvSpPr/>
+          <p:nvPr/>
+        </p:nvSpPr>
+        <p:spPr>
+          <a:xfrm>
+            <a:off x="8321040" y="3493008"/>
+            <a:ext cx="1600200" cy="292608"/>
+          </a:xfrm>
+          <a:prstGeom prst="roundRect">
+            <a:avLst>
+              <a:gd name="adj" fmla="val 50000"/>
+            </a:avLst>
+          </a:prstGeom>
+          <a:solidFill>
+            <a:srgbClr val="0B100E"/>
+          </a:solidFill>
+          <a:ln w="12700">
+            <a:solidFill>
+              <a:srgbClr val="24322B"/>
+            </a:solidFill>
+            <a:prstDash val="solid"/>
+          </a:ln>
+        </p:spPr>
+      </p:sp>
+      <p:sp>
+        <p:nvSpPr>
+          <p:cNvPr id="14" name="Text 12"/>
+          <p:cNvSpPr txBox="1"/>
+          <p:nvPr/>
+        </p:nvSpPr>
+        <p:spPr>
+          <a:xfrm>
+            <a:off x="8321040" y="3511296"/>
+            <a:ext cx="1600200" cy="256032"/>
+          </a:xfrm>
+          <a:prstGeom prst="rect">
+            <a:avLst/>
+          </a:prstGeom>
+          <a:noFill/>
+          <a:ln/>
+        </p:spPr>
+        <p:txBody>
+          <a:bodyPr wrap="square" lIns="0" tIns="0" rIns="0" bIns="0" rtlCol="0" anchor="ctr"/>
+          <a:lstStyle/>
+          <a:p>
+            <a:pPr algn="ctr" indent="0" marL="0">
+              <a:buNone/>
+            </a:pPr>
+            <a:r>
+              <a:rPr lang="en-US" sz="850" dirty="0">
+                <a:solidFill>
+                  <a:srgbClr val="6A7D74"/>
+                </a:solidFill>
+                <a:latin typeface="Courier New" pitchFamily="34" charset="0"/>
+                <a:ea typeface="Courier New" pitchFamily="34" charset="-122"/>
+                <a:cs typeface="Courier New" pitchFamily="34" charset="-120"/>
+              </a:rPr>
+              <a:t>A VALIDAR</a:t>
+            </a:r>
+            <a:endParaRPr lang="en-US" sz="850" dirty="0"/>
+          </a:p>
+        </p:txBody>
+      </p:sp>
+      <p:sp>
+        <p:nvSpPr>
+          <p:cNvPr id="15" name="Text 13"/>
+          <p:cNvSpPr txBox="1"/>
+          <p:nvPr/>
+        </p:nvSpPr>
+        <p:spPr>
+          <a:xfrm>
+            <a:off x="2514600" y="3858768"/>
+            <a:ext cx="8686800" cy="457200"/>
+          </a:xfrm>
+          <a:prstGeom prst="rect">
+            <a:avLst/>
+          </a:prstGeom>
+          <a:noFill/>
+          <a:ln/>
+        </p:spPr>
+        <p:txBody>
+          <a:bodyPr wrap="square" lIns="0" tIns="0" rIns="0" bIns="0" rtlCol="0" anchor="ctr"/>
+          <a:lstStyle/>
+          <a:p>
+            <a:pPr indent="0" marL="0">
+              <a:lnSpc>
+                <a:spcPts val="1600"/>
+              </a:lnSpc>
+              <a:buNone/>
+            </a:pPr>
+            <a:r>
+              <a:rPr lang="en-US" sz="1200" dirty="0">
+                <a:solidFill>
+                  <a:srgbClr val="9DB0A6"/>
                 </a:solidFill>
                 <a:latin typeface="Calibri" pitchFamily="34" charset="0"/>
                 <a:ea typeface="Calibri" pitchFamily="34" charset="-122"/>
                 <a:cs typeface="Calibri" pitchFamily="34" charset="-120"/>
               </a:rPr>
-              <a:t>quem olhou.</a:t>
-            </a:r>
-            <a:endParaRPr lang="en-US" sz="1400" dirty="0"/>
-          </a:p>
-        </p:txBody>
-      </p:sp>
-      <p:pic>
-        <p:nvPicPr>
-          <p:cNvPr id="5" name="Image 0" descr="./ppt/calor.png">    </p:cNvPr>
-          <p:cNvPicPr>
-            <a:picLocks noChangeAspect="1"/>
-          </p:cNvPicPr>
-          <p:nvPr/>
-        </p:nvPicPr>
-        <p:blipFill>
-          <a:blip r:embed="rId1"/>
-          <a:stretch>
-            <a:fillRect/>
-          </a:stretch>
-        </p:blipFill>
-        <p:spPr>
-          <a:xfrm>
-            <a:off x="685800" y="3063240"/>
-            <a:ext cx="5120640" cy="3319272"/>
-          </a:xfrm>
-          <a:prstGeom prst="rect">
-            <a:avLst/>
-          </a:prstGeom>
-        </p:spPr>
-      </p:pic>
-      <p:sp>
-        <p:nvSpPr>
-          <p:cNvPr id="6" name="Text 3"/>
-          <p:cNvSpPr txBox="1"/>
-          <p:nvPr/>
-        </p:nvSpPr>
-        <p:spPr>
-          <a:xfrm>
-            <a:off x="6172200" y="3154680"/>
-            <a:ext cx="5394960" cy="274320"/>
-          </a:xfrm>
-          <a:prstGeom prst="rect">
-            <a:avLst/>
-          </a:prstGeom>
-          <a:noFill/>
-          <a:ln/>
-        </p:spPr>
-        <p:txBody>
-          <a:bodyPr wrap="square" lIns="0" tIns="0" rIns="0" bIns="0" rtlCol="0" anchor="ctr"/>
-          <a:lstStyle/>
-          <a:p>
-            <a:pPr indent="0" marL="0">
-              <a:buNone/>
-            </a:pPr>
-            <a:r>
-              <a:rPr lang="en-US" sz="1400" b="1" dirty="0">
+              <a:t>A medida que ainda não temos: quantos alertas por dia a coordenação aguenta. É esse número, e não a revocação, que decide se é usável.</a:t>
+            </a:r>
+            <a:endParaRPr lang="en-US" sz="1200" dirty="0"/>
+          </a:p>
+        </p:txBody>
+      </p:sp>
+      <p:sp>
+        <p:nvSpPr>
+          <p:cNvPr id="16" name="Shape 14"/>
+          <p:cNvSpPr/>
+          <p:nvPr/>
+        </p:nvSpPr>
+        <p:spPr>
+          <a:xfrm>
+            <a:off x="685800" y="4379976"/>
+            <a:ext cx="10789920" cy="0"/>
+          </a:xfrm>
+          <a:prstGeom prst="line">
+            <a:avLst/>
+          </a:prstGeom>
+          <a:noFill/>
+          <a:ln w="12700">
+            <a:solidFill>
+              <a:srgbClr val="24322B"/>
+            </a:solidFill>
+            <a:prstDash val="solid"/>
+          </a:ln>
+        </p:spPr>
+      </p:sp>
+      <p:sp>
+        <p:nvSpPr>
+          <p:cNvPr id="17" name="Text 15"/>
+          <p:cNvSpPr txBox="1"/>
+          <p:nvPr/>
+        </p:nvSpPr>
+        <p:spPr>
+          <a:xfrm>
+            <a:off x="685800" y="4544568"/>
+            <a:ext cx="1645920" cy="274320"/>
+          </a:xfrm>
+          <a:prstGeom prst="rect">
+            <a:avLst/>
+          </a:prstGeom>
+          <a:noFill/>
+          <a:ln/>
+        </p:spPr>
+        <p:txBody>
+          <a:bodyPr wrap="square" lIns="0" tIns="0" rIns="0" bIns="0" rtlCol="0" anchor="ctr"/>
+          <a:lstStyle/>
+          <a:p>
+            <a:pPr indent="0" marL="0">
+              <a:buNone/>
+            </a:pPr>
+            <a:r>
+              <a:rPr lang="en-US" sz="1000" spc="150" kern="0" dirty="0">
+                <a:solidFill>
+                  <a:srgbClr val="6A7D74"/>
+                </a:solidFill>
+                <a:latin typeface="Courier New" pitchFamily="34" charset="0"/>
+                <a:ea typeface="Courier New" pitchFamily="34" charset="-122"/>
+                <a:cs typeface="Courier New" pitchFamily="34" charset="-120"/>
+              </a:rPr>
+              <a:t>DEPOIS</a:t>
+            </a:r>
+            <a:endParaRPr lang="en-US" sz="1000" dirty="0"/>
+          </a:p>
+        </p:txBody>
+      </p:sp>
+      <p:sp>
+        <p:nvSpPr>
+          <p:cNvPr id="18" name="Text 16"/>
+          <p:cNvSpPr txBox="1"/>
+          <p:nvPr/>
+        </p:nvSpPr>
+        <p:spPr>
+          <a:xfrm>
+            <a:off x="2514600" y="4489704"/>
+            <a:ext cx="5669280" cy="347472"/>
+          </a:xfrm>
+          <a:prstGeom prst="rect">
+            <a:avLst/>
+          </a:prstGeom>
+          <a:noFill/>
+          <a:ln/>
+        </p:spPr>
+        <p:txBody>
+          <a:bodyPr wrap="square" lIns="0" tIns="0" rIns="0" bIns="0" rtlCol="0" anchor="ctr"/>
+          <a:lstStyle/>
+          <a:p>
+            <a:pPr indent="0" marL="0">
+              <a:buNone/>
+            </a:pPr>
+            <a:r>
+              <a:rPr lang="en-US" sz="1700" b="1" dirty="0">
                 <a:solidFill>
                   <a:srgbClr val="EDF3EF"/>
                 </a:solidFill>
@@ -13181,77 +12299,107 @@
                 <a:ea typeface="Arial" pitchFamily="34" charset="-122"/>
                 <a:cs typeface="Arial" pitchFamily="34" charset="-120"/>
               </a:rPr>
-              <a:t>“Aconteceu alguma coisa?”</a:t>
-            </a:r>
-            <a:endParaRPr lang="en-US" sz="1400" dirty="0"/>
-          </a:p>
-        </p:txBody>
-      </p:sp>
-      <p:sp>
-        <p:nvSpPr>
-          <p:cNvPr id="7" name="Text 4"/>
-          <p:cNvSpPr txBox="1"/>
-          <p:nvPr/>
-        </p:nvSpPr>
-        <p:spPr>
-          <a:xfrm>
-            <a:off x="6172200" y="3410712"/>
-            <a:ext cx="2194560" cy="228600"/>
-          </a:xfrm>
-          <a:prstGeom prst="rect">
-            <a:avLst/>
-          </a:prstGeom>
-          <a:noFill/>
-          <a:ln/>
-        </p:spPr>
-        <p:txBody>
-          <a:bodyPr wrap="square" lIns="0" tIns="0" rIns="0" bIns="0" rtlCol="0" anchor="ctr"/>
-          <a:lstStyle/>
-          <a:p>
-            <a:pPr indent="0" marL="0">
-              <a:buNone/>
-            </a:pPr>
-            <a:r>
-              <a:rPr lang="en-US" sz="950" dirty="0">
-                <a:solidFill>
-                  <a:srgbClr val="3FBF5A"/>
+              <a:t>Várias câmeras, uma corrente só</a:t>
+            </a:r>
+            <a:endParaRPr lang="en-US" sz="1700" dirty="0"/>
+          </a:p>
+        </p:txBody>
+      </p:sp>
+      <p:sp>
+        <p:nvSpPr>
+          <p:cNvPr id="19" name="Shape 17"/>
+          <p:cNvSpPr/>
+          <p:nvPr/>
+        </p:nvSpPr>
+        <p:spPr>
+          <a:xfrm>
+            <a:off x="8321040" y="4517136"/>
+            <a:ext cx="1600200" cy="292608"/>
+          </a:xfrm>
+          <a:prstGeom prst="roundRect">
+            <a:avLst>
+              <a:gd name="adj" fmla="val 50000"/>
+            </a:avLst>
+          </a:prstGeom>
+          <a:solidFill>
+            <a:srgbClr val="0B100E"/>
+          </a:solidFill>
+          <a:ln w="12700">
+            <a:solidFill>
+              <a:srgbClr val="24322B"/>
+            </a:solidFill>
+            <a:prstDash val="solid"/>
+          </a:ln>
+        </p:spPr>
+      </p:sp>
+      <p:sp>
+        <p:nvSpPr>
+          <p:cNvPr id="20" name="Text 18"/>
+          <p:cNvSpPr txBox="1"/>
+          <p:nvPr/>
+        </p:nvSpPr>
+        <p:spPr>
+          <a:xfrm>
+            <a:off x="8321040" y="4535424"/>
+            <a:ext cx="1600200" cy="256032"/>
+          </a:xfrm>
+          <a:prstGeom prst="rect">
+            <a:avLst/>
+          </a:prstGeom>
+          <a:noFill/>
+          <a:ln/>
+        </p:spPr>
+        <p:txBody>
+          <a:bodyPr wrap="square" lIns="0" tIns="0" rIns="0" bIns="0" rtlCol="0" anchor="ctr"/>
+          <a:lstStyle/>
+          <a:p>
+            <a:pPr algn="ctr" indent="0" marL="0">
+              <a:buNone/>
+            </a:pPr>
+            <a:r>
+              <a:rPr lang="en-US" sz="850" dirty="0">
+                <a:solidFill>
+                  <a:srgbClr val="6A7D74"/>
                 </a:solidFill>
                 <a:latin typeface="Courier New" pitchFamily="34" charset="0"/>
                 <a:ea typeface="Courier New" pitchFamily="34" charset="-122"/>
                 <a:cs typeface="Courier New" pitchFamily="34" charset="-120"/>
               </a:rPr>
-              <a:t>/api/painel</a:t>
-            </a:r>
-            <a:endParaRPr lang="en-US" sz="950" dirty="0"/>
-          </a:p>
-        </p:txBody>
-      </p:sp>
-      <p:sp>
-        <p:nvSpPr>
-          <p:cNvPr id="8" name="Text 5"/>
-          <p:cNvSpPr txBox="1"/>
-          <p:nvPr/>
-        </p:nvSpPr>
-        <p:spPr>
-          <a:xfrm>
-            <a:off x="6172200" y="3630168"/>
-            <a:ext cx="5394960" cy="274320"/>
-          </a:xfrm>
-          <a:prstGeom prst="rect">
-            <a:avLst/>
-          </a:prstGeom>
-          <a:noFill/>
-          <a:ln/>
-        </p:spPr>
-        <p:txBody>
-          <a:bodyPr wrap="square" lIns="0" tIns="0" rIns="0" bIns="0" rtlCol="0" anchor="ctr"/>
-          <a:lstStyle/>
-          <a:p>
-            <a:pPr indent="0" marL="0">
-              <a:buNone/>
-            </a:pPr>
-            <a:r>
-              <a:rPr lang="en-US" sz="1150" dirty="0">
+              <a:t>A CONSTRUIR</a:t>
+            </a:r>
+            <a:endParaRPr lang="en-US" sz="850" dirty="0"/>
+          </a:p>
+        </p:txBody>
+      </p:sp>
+      <p:sp>
+        <p:nvSpPr>
+          <p:cNvPr id="21" name="Text 19"/>
+          <p:cNvSpPr txBox="1"/>
+          <p:nvPr/>
+        </p:nvSpPr>
+        <p:spPr>
+          <a:xfrm>
+            <a:off x="2514600" y="4882896"/>
+            <a:ext cx="8686800" cy="457200"/>
+          </a:xfrm>
+          <a:prstGeom prst="rect">
+            <a:avLst/>
+          </a:prstGeom>
+          <a:noFill/>
+          <a:ln/>
+        </p:spPr>
+        <p:txBody>
+          <a:bodyPr wrap="square" lIns="0" tIns="0" rIns="0" bIns="0" rtlCol="0" anchor="ctr"/>
+          <a:lstStyle/>
+          <a:p>
+            <a:pPr indent="0" marL="0">
+              <a:lnSpc>
+                <a:spcPts val="1600"/>
+              </a:lnSpc>
+              <a:buNone/>
+            </a:pPr>
+            <a:r>
+              <a:rPr lang="en-US" sz="1200" dirty="0">
                 <a:solidFill>
                   <a:srgbClr val="9DB0A6"/>
                 </a:solidFill>
@@ -13259,38 +12407,100 @@
                 <a:ea typeface="Calibri" pitchFamily="34" charset="-122"/>
                 <a:cs typeface="Calibri" pitchFamily="34" charset="-120"/>
               </a:rPr>
-              <a:t>Último evento, onde, há quanto tempo. E a corrente em uma palavra.</a:t>
-            </a:r>
-            <a:endParaRPr lang="en-US" sz="1150" dirty="0"/>
-          </a:p>
-        </p:txBody>
-      </p:sp>
-      <p:sp>
-        <p:nvSpPr>
-          <p:cNvPr id="9" name="Text 6"/>
-          <p:cNvSpPr txBox="1"/>
-          <p:nvPr/>
-        </p:nvSpPr>
-        <p:spPr>
-          <a:xfrm>
-            <a:off x="6172200" y="3959352"/>
-            <a:ext cx="5394960" cy="274320"/>
-          </a:xfrm>
-          <a:prstGeom prst="rect">
-            <a:avLst/>
-          </a:prstGeom>
-          <a:noFill/>
-          <a:ln/>
-        </p:spPr>
-        <p:txBody>
-          <a:bodyPr wrap="square" lIns="0" tIns="0" rIns="0" bIns="0" rtlCol="0" anchor="ctr"/>
-          <a:lstStyle/>
-          <a:p>
-            <a:pPr indent="0" marL="0">
-              <a:buNone/>
-            </a:pPr>
-            <a:r>
-              <a:rPr lang="en-US" sz="1400" b="1" dirty="0">
+              <a:t>Cada sala com seu detector na borda, todas na mesma trilha auditável.</a:t>
+            </a:r>
+            <a:endParaRPr lang="en-US" sz="1200" dirty="0"/>
+          </a:p>
+        </p:txBody>
+      </p:sp>
+      <p:sp>
+        <p:nvSpPr>
+          <p:cNvPr id="22" name="Shape 20"/>
+          <p:cNvSpPr/>
+          <p:nvPr/>
+        </p:nvSpPr>
+        <p:spPr>
+          <a:xfrm>
+            <a:off x="685800" y="5404104"/>
+            <a:ext cx="10789920" cy="0"/>
+          </a:xfrm>
+          <a:prstGeom prst="line">
+            <a:avLst/>
+          </a:prstGeom>
+          <a:noFill/>
+          <a:ln w="12700">
+            <a:solidFill>
+              <a:srgbClr val="24322B"/>
+            </a:solidFill>
+            <a:prstDash val="solid"/>
+          </a:ln>
+        </p:spPr>
+      </p:sp>
+      <p:sp>
+        <p:nvSpPr>
+          <p:cNvPr id="23" name="Text 21"/>
+          <p:cNvSpPr txBox="1"/>
+          <p:nvPr/>
+        </p:nvSpPr>
+        <p:spPr>
+          <a:xfrm>
+            <a:off x="685800" y="5568696"/>
+            <a:ext cx="1645920" cy="274320"/>
+          </a:xfrm>
+          <a:prstGeom prst="rect">
+            <a:avLst/>
+          </a:prstGeom>
+          <a:noFill/>
+          <a:ln/>
+        </p:spPr>
+        <p:txBody>
+          <a:bodyPr wrap="square" lIns="0" tIns="0" rIns="0" bIns="0" rtlCol="0" anchor="ctr"/>
+          <a:lstStyle/>
+          <a:p>
+            <a:pPr indent="0" marL="0">
+              <a:buNone/>
+            </a:pPr>
+            <a:r>
+              <a:rPr lang="en-US" sz="1000" spc="150" kern="0" dirty="0">
+                <a:solidFill>
+                  <a:srgbClr val="6A7D74"/>
+                </a:solidFill>
+                <a:latin typeface="Courier New" pitchFamily="34" charset="0"/>
+                <a:ea typeface="Courier New" pitchFamily="34" charset="-122"/>
+                <a:cs typeface="Courier New" pitchFamily="34" charset="-120"/>
+              </a:rPr>
+              <a:t>A TESE</a:t>
+            </a:r>
+            <a:endParaRPr lang="en-US" sz="1000" dirty="0"/>
+          </a:p>
+        </p:txBody>
+      </p:sp>
+      <p:sp>
+        <p:nvSpPr>
+          <p:cNvPr id="24" name="Text 22"/>
+          <p:cNvSpPr txBox="1"/>
+          <p:nvPr/>
+        </p:nvSpPr>
+        <p:spPr>
+          <a:xfrm>
+            <a:off x="2514600" y="5513832"/>
+            <a:ext cx="5669280" cy="347472"/>
+          </a:xfrm>
+          <a:prstGeom prst="rect">
+            <a:avLst/>
+          </a:prstGeom>
+          <a:noFill/>
+          <a:ln/>
+        </p:spPr>
+        <p:txBody>
+          <a:bodyPr wrap="square" lIns="0" tIns="0" rIns="0" bIns="0" rtlCol="0" anchor="ctr"/>
+          <a:lstStyle/>
+          <a:p>
+            <a:pPr indent="0" marL="0">
+              <a:buNone/>
+            </a:pPr>
+            <a:r>
+              <a:rPr lang="en-US" sz="1700" b="1" dirty="0">
                 <a:solidFill>
                   <a:srgbClr val="EDF3EF"/>
                 </a:solidFill>
@@ -13298,77 +12508,107 @@
                 <a:ea typeface="Arial" pitchFamily="34" charset="-122"/>
                 <a:cs typeface="Arial" pitchFamily="34" charset="-120"/>
               </a:rPr>
-              <a:t>“Onde a sala aperta?”</a:t>
-            </a:r>
-            <a:endParaRPr lang="en-US" sz="1400" dirty="0"/>
-          </a:p>
-        </p:txBody>
-      </p:sp>
-      <p:sp>
-        <p:nvSpPr>
-          <p:cNvPr id="10" name="Text 7"/>
-          <p:cNvSpPr txBox="1"/>
-          <p:nvPr/>
-        </p:nvSpPr>
-        <p:spPr>
-          <a:xfrm>
-            <a:off x="6172200" y="4215384"/>
-            <a:ext cx="2194560" cy="228600"/>
-          </a:xfrm>
-          <a:prstGeom prst="rect">
-            <a:avLst/>
-          </a:prstGeom>
-          <a:noFill/>
-          <a:ln/>
-        </p:spPr>
-        <p:txBody>
-          <a:bodyPr wrap="square" lIns="0" tIns="0" rIns="0" bIns="0" rtlCol="0" anchor="ctr"/>
-          <a:lstStyle/>
-          <a:p>
-            <a:pPr indent="0" marL="0">
-              <a:buNone/>
-            </a:pPr>
-            <a:r>
-              <a:rPr lang="en-US" sz="950" dirty="0">
-                <a:solidFill>
-                  <a:srgbClr val="3FBF5A"/>
+              <a:t>A mesma base, outros lugares</a:t>
+            </a:r>
+            <a:endParaRPr lang="en-US" sz="1700" dirty="0"/>
+          </a:p>
+        </p:txBody>
+      </p:sp>
+      <p:sp>
+        <p:nvSpPr>
+          <p:cNvPr id="25" name="Shape 23"/>
+          <p:cNvSpPr/>
+          <p:nvPr/>
+        </p:nvSpPr>
+        <p:spPr>
+          <a:xfrm>
+            <a:off x="8321040" y="5541264"/>
+            <a:ext cx="1600200" cy="292608"/>
+          </a:xfrm>
+          <a:prstGeom prst="roundRect">
+            <a:avLst>
+              <a:gd name="adj" fmla="val 50000"/>
+            </a:avLst>
+          </a:prstGeom>
+          <a:solidFill>
+            <a:srgbClr val="0B100E"/>
+          </a:solidFill>
+          <a:ln w="12700">
+            <a:solidFill>
+              <a:srgbClr val="24322B"/>
+            </a:solidFill>
+            <a:prstDash val="solid"/>
+          </a:ln>
+        </p:spPr>
+      </p:sp>
+      <p:sp>
+        <p:nvSpPr>
+          <p:cNvPr id="26" name="Text 24"/>
+          <p:cNvSpPr txBox="1"/>
+          <p:nvPr/>
+        </p:nvSpPr>
+        <p:spPr>
+          <a:xfrm>
+            <a:off x="8321040" y="5559552"/>
+            <a:ext cx="1600200" cy="256032"/>
+          </a:xfrm>
+          <a:prstGeom prst="rect">
+            <a:avLst/>
+          </a:prstGeom>
+          <a:noFill/>
+          <a:ln/>
+        </p:spPr>
+        <p:txBody>
+          <a:bodyPr wrap="square" lIns="0" tIns="0" rIns="0" bIns="0" rtlCol="0" anchor="ctr"/>
+          <a:lstStyle/>
+          <a:p>
+            <a:pPr algn="ctr" indent="0" marL="0">
+              <a:buNone/>
+            </a:pPr>
+            <a:r>
+              <a:rPr lang="en-US" sz="850" dirty="0">
+                <a:solidFill>
+                  <a:srgbClr val="6A7D74"/>
                 </a:solidFill>
                 <a:latin typeface="Courier New" pitchFamily="34" charset="0"/>
                 <a:ea typeface="Courier New" pitchFamily="34" charset="-122"/>
                 <a:cs typeface="Courier New" pitchFamily="34" charset="-120"/>
               </a:rPr>
-              <a:t>/api/mapa</a:t>
-            </a:r>
-            <a:endParaRPr lang="en-US" sz="950" dirty="0"/>
-          </a:p>
-        </p:txBody>
-      </p:sp>
-      <p:sp>
-        <p:nvSpPr>
-          <p:cNvPr id="11" name="Text 8"/>
-          <p:cNvSpPr txBox="1"/>
-          <p:nvPr/>
-        </p:nvSpPr>
-        <p:spPr>
-          <a:xfrm>
-            <a:off x="6172200" y="4434840"/>
-            <a:ext cx="5394960" cy="274320"/>
-          </a:xfrm>
-          <a:prstGeom prst="rect">
-            <a:avLst/>
-          </a:prstGeom>
-          <a:noFill/>
-          <a:ln/>
-        </p:spPr>
-        <p:txBody>
-          <a:bodyPr wrap="square" lIns="0" tIns="0" rIns="0" bIns="0" rtlCol="0" anchor="ctr"/>
-          <a:lstStyle/>
-          <a:p>
-            <a:pPr indent="0" marL="0">
-              <a:buNone/>
-            </a:pPr>
-            <a:r>
-              <a:rPr lang="en-US" sz="1150" dirty="0">
+              <a:t>EM ESTUDO</a:t>
+            </a:r>
+            <a:endParaRPr lang="en-US" sz="850" dirty="0"/>
+          </a:p>
+        </p:txBody>
+      </p:sp>
+      <p:sp>
+        <p:nvSpPr>
+          <p:cNvPr id="27" name="Text 25"/>
+          <p:cNvSpPr txBox="1"/>
+          <p:nvPr/>
+        </p:nvSpPr>
+        <p:spPr>
+          <a:xfrm>
+            <a:off x="2514600" y="5907024"/>
+            <a:ext cx="8686800" cy="457200"/>
+          </a:xfrm>
+          <a:prstGeom prst="rect">
+            <a:avLst/>
+          </a:prstGeom>
+          <a:noFill/>
+          <a:ln/>
+        </p:spPr>
+        <p:txBody>
+          <a:bodyPr wrap="square" lIns="0" tIns="0" rIns="0" bIns="0" rtlCol="0" anchor="ctr"/>
+          <a:lstStyle/>
+          <a:p>
+            <a:pPr indent="0" marL="0">
+              <a:lnSpc>
+                <a:spcPts val="1600"/>
+              </a:lnSpc>
+              <a:buNone/>
+            </a:pPr>
+            <a:r>
+              <a:rPr lang="en-US" sz="1200" dirty="0">
                 <a:solidFill>
                   <a:srgbClr val="9DB0A6"/>
                 </a:solidFill>
@@ -13376,280 +12616,46 @@
                 <a:ea typeface="Calibri" pitchFamily="34" charset="-122"/>
                 <a:cs typeface="Calibri" pitchFamily="34" charset="-120"/>
               </a:rPr>
-              <a:t>Mapa suavizado por vizinhança, com um anel em onde mais pararam.</a:t>
-            </a:r>
-            <a:endParaRPr lang="en-US" sz="1150" dirty="0"/>
-          </a:p>
-        </p:txBody>
-      </p:sp>
-      <p:sp>
-        <p:nvSpPr>
-          <p:cNvPr id="12" name="Text 9"/>
-          <p:cNvSpPr txBox="1"/>
-          <p:nvPr/>
-        </p:nvSpPr>
-        <p:spPr>
-          <a:xfrm>
-            <a:off x="6172200" y="4764024"/>
-            <a:ext cx="5394960" cy="274320"/>
-          </a:xfrm>
-          <a:prstGeom prst="rect">
-            <a:avLst/>
-          </a:prstGeom>
-          <a:noFill/>
-          <a:ln/>
-        </p:spPr>
-        <p:txBody>
-          <a:bodyPr wrap="square" lIns="0" tIns="0" rIns="0" bIns="0" rtlCol="0" anchor="ctr"/>
-          <a:lstStyle/>
-          <a:p>
-            <a:pPr indent="0" marL="0">
-              <a:buNone/>
-            </a:pPr>
-            <a:r>
-              <a:rPr lang="en-US" sz="1400" b="1" dirty="0">
-                <a:solidFill>
-                  <a:srgbClr val="EDF3EF"/>
-                </a:solidFill>
-                <a:latin typeface="Arial" pitchFamily="34" charset="0"/>
-                <a:ea typeface="Arial" pitchFamily="34" charset="-122"/>
-                <a:cs typeface="Arial" pitchFamily="34" charset="-120"/>
-              </a:rPr>
-              <a:t>“Fulano sumiu?”</a:t>
-            </a:r>
-            <a:endParaRPr lang="en-US" sz="1400" dirty="0"/>
-          </a:p>
-        </p:txBody>
-      </p:sp>
-      <p:sp>
-        <p:nvSpPr>
-          <p:cNvPr id="13" name="Text 10"/>
-          <p:cNvSpPr txBox="1"/>
-          <p:nvPr/>
-        </p:nvSpPr>
-        <p:spPr>
-          <a:xfrm>
-            <a:off x="6172200" y="5020056"/>
-            <a:ext cx="2194560" cy="228600"/>
-          </a:xfrm>
-          <a:prstGeom prst="rect">
-            <a:avLst/>
-          </a:prstGeom>
-          <a:noFill/>
-          <a:ln/>
-        </p:spPr>
-        <p:txBody>
-          <a:bodyPr wrap="square" lIns="0" tIns="0" rIns="0" bIns="0" rtlCol="0" anchor="ctr"/>
-          <a:lstStyle/>
-          <a:p>
-            <a:pPr indent="0" marL="0">
-              <a:buNone/>
-            </a:pPr>
-            <a:r>
-              <a:rPr lang="en-US" sz="950" dirty="0">
-                <a:solidFill>
-                  <a:srgbClr val="3FBF5A"/>
+              <a:t>Borda que decide mais prova que não se altera: portaria com consentimento, e a área da saúde.</a:t>
+            </a:r>
+            <a:endParaRPr lang="en-US" sz="1200" dirty="0"/>
+          </a:p>
+        </p:txBody>
+      </p:sp>
+      <p:sp>
+        <p:nvSpPr>
+          <p:cNvPr id="28" name="Text 26"/>
+          <p:cNvSpPr txBox="1"/>
+          <p:nvPr/>
+        </p:nvSpPr>
+        <p:spPr>
+          <a:xfrm>
+            <a:off x="685800" y="6291072"/>
+            <a:ext cx="5486400" cy="274320"/>
+          </a:xfrm>
+          <a:prstGeom prst="rect">
+            <a:avLst/>
+          </a:prstGeom>
+          <a:noFill/>
+          <a:ln/>
+        </p:spPr>
+        <p:txBody>
+          <a:bodyPr wrap="square" lIns="0" tIns="0" rIns="0" bIns="0" rtlCol="0" anchor="ctr"/>
+          <a:lstStyle/>
+          <a:p>
+            <a:pPr indent="0" marL="0">
+              <a:buNone/>
+            </a:pPr>
+            <a:r>
+              <a:rPr lang="en-US" sz="900" dirty="0">
+                <a:solidFill>
+                  <a:srgbClr val="6A7D74"/>
                 </a:solidFill>
                 <a:latin typeface="Courier New" pitchFamily="34" charset="0"/>
                 <a:ea typeface="Courier New" pitchFamily="34" charset="-122"/>
                 <a:cs typeface="Courier New" pitchFamily="34" charset="-120"/>
               </a:rPr>
-              <a:t>/api/pessoas</a:t>
-            </a:r>
-            <a:endParaRPr lang="en-US" sz="950" dirty="0"/>
-          </a:p>
-        </p:txBody>
-      </p:sp>
-      <p:sp>
-        <p:nvSpPr>
-          <p:cNvPr id="14" name="Text 11"/>
-          <p:cNvSpPr txBox="1"/>
-          <p:nvPr/>
-        </p:nvSpPr>
-        <p:spPr>
-          <a:xfrm>
-            <a:off x="6172200" y="5239512"/>
-            <a:ext cx="5394960" cy="274320"/>
-          </a:xfrm>
-          <a:prstGeom prst="rect">
-            <a:avLst/>
-          </a:prstGeom>
-          <a:noFill/>
-          <a:ln/>
-        </p:spPr>
-        <p:txBody>
-          <a:bodyPr wrap="square" lIns="0" tIns="0" rIns="0" bIns="0" rtlCol="0" anchor="ctr"/>
-          <a:lstStyle/>
-          <a:p>
-            <a:pPr indent="0" marL="0">
-              <a:buNone/>
-            </a:pPr>
-            <a:r>
-              <a:rPr lang="en-US" sz="1150" dirty="0">
-                <a:solidFill>
-                  <a:srgbClr val="9DB0A6"/>
-                </a:solidFill>
-                <a:latin typeface="Calibri" pitchFamily="34" charset="0"/>
-                <a:ea typeface="Calibri" pitchFamily="34" charset="-122"/>
-                <a:cs typeface="Calibri" pitchFamily="34" charset="-120"/>
-              </a:rPr>
-              <a:t>Quem foi reconhecido e há quantos dias não aparece.</a:t>
-            </a:r>
-            <a:endParaRPr lang="en-US" sz="1150" dirty="0"/>
-          </a:p>
-        </p:txBody>
-      </p:sp>
-      <p:sp>
-        <p:nvSpPr>
-          <p:cNvPr id="15" name="Text 12"/>
-          <p:cNvSpPr txBox="1"/>
-          <p:nvPr/>
-        </p:nvSpPr>
-        <p:spPr>
-          <a:xfrm>
-            <a:off x="6172200" y="5568696"/>
-            <a:ext cx="5394960" cy="274320"/>
-          </a:xfrm>
-          <a:prstGeom prst="rect">
-            <a:avLst/>
-          </a:prstGeom>
-          <a:noFill/>
-          <a:ln/>
-        </p:spPr>
-        <p:txBody>
-          <a:bodyPr wrap="square" lIns="0" tIns="0" rIns="0" bIns="0" rtlCol="0" anchor="ctr"/>
-          <a:lstStyle/>
-          <a:p>
-            <a:pPr indent="0" marL="0">
-              <a:buNone/>
-            </a:pPr>
-            <a:r>
-              <a:rPr lang="en-US" sz="1400" b="1" dirty="0">
-                <a:solidFill>
-                  <a:srgbClr val="EDF3EF"/>
-                </a:solidFill>
-                <a:latin typeface="Arial" pitchFamily="34" charset="0"/>
-                <a:ea typeface="Arial" pitchFamily="34" charset="-122"/>
-                <a:cs typeface="Arial" pitchFamily="34" charset="-120"/>
-              </a:rPr>
-              <a:t>“Posso confiar nisto?”</a:t>
-            </a:r>
-            <a:endParaRPr lang="en-US" sz="1400" dirty="0"/>
-          </a:p>
-        </p:txBody>
-      </p:sp>
-      <p:sp>
-        <p:nvSpPr>
-          <p:cNvPr id="16" name="Text 13"/>
-          <p:cNvSpPr txBox="1"/>
-          <p:nvPr/>
-        </p:nvSpPr>
-        <p:spPr>
-          <a:xfrm>
-            <a:off x="6172200" y="5824728"/>
-            <a:ext cx="2194560" cy="228600"/>
-          </a:xfrm>
-          <a:prstGeom prst="rect">
-            <a:avLst/>
-          </a:prstGeom>
-          <a:noFill/>
-          <a:ln/>
-        </p:spPr>
-        <p:txBody>
-          <a:bodyPr wrap="square" lIns="0" tIns="0" rIns="0" bIns="0" rtlCol="0" anchor="ctr"/>
-          <a:lstStyle/>
-          <a:p>
-            <a:pPr indent="0" marL="0">
-              <a:buNone/>
-            </a:pPr>
-            <a:r>
-              <a:rPr lang="en-US" sz="950" dirty="0">
-                <a:solidFill>
-                  <a:srgbClr val="3FBF5A"/>
-                </a:solidFill>
-                <a:latin typeface="Courier New" pitchFamily="34" charset="0"/>
-                <a:ea typeface="Courier New" pitchFamily="34" charset="-122"/>
-                <a:cs typeface="Courier New" pitchFamily="34" charset="-120"/>
-              </a:rPr>
-              <a:t>/api/verificar</a:t>
-            </a:r>
-            <a:endParaRPr lang="en-US" sz="950" dirty="0"/>
-          </a:p>
-        </p:txBody>
-      </p:sp>
-      <p:sp>
-        <p:nvSpPr>
-          <p:cNvPr id="17" name="Text 14"/>
-          <p:cNvSpPr txBox="1"/>
-          <p:nvPr/>
-        </p:nvSpPr>
-        <p:spPr>
-          <a:xfrm>
-            <a:off x="6172200" y="6044184"/>
-            <a:ext cx="5394960" cy="274320"/>
-          </a:xfrm>
-          <a:prstGeom prst="rect">
-            <a:avLst/>
-          </a:prstGeom>
-          <a:noFill/>
-          <a:ln/>
-        </p:spPr>
-        <p:txBody>
-          <a:bodyPr wrap="square" lIns="0" tIns="0" rIns="0" bIns="0" rtlCol="0" anchor="ctr"/>
-          <a:lstStyle/>
-          <a:p>
-            <a:pPr indent="0" marL="0">
-              <a:buNone/>
-            </a:pPr>
-            <a:r>
-              <a:rPr lang="en-US" sz="1150" dirty="0">
-                <a:solidFill>
-                  <a:srgbClr val="9DB0A6"/>
-                </a:solidFill>
-                <a:latin typeface="Calibri" pitchFamily="34" charset="0"/>
-                <a:ea typeface="Calibri" pitchFamily="34" charset="-122"/>
-                <a:cs typeface="Calibri" pitchFamily="34" charset="-120"/>
-              </a:rPr>
-              <a:t>Recalcula a corrente desde a gênese, contra o hash recalculado.</a:t>
-            </a:r>
-            <a:endParaRPr lang="en-US" sz="1150" dirty="0"/>
-          </a:p>
-        </p:txBody>
-      </p:sp>
-      <p:sp>
-        <p:nvSpPr>
-          <p:cNvPr id="18" name="Text 15"/>
-          <p:cNvSpPr txBox="1"/>
-          <p:nvPr/>
-        </p:nvSpPr>
-        <p:spPr>
-          <a:xfrm>
-            <a:off x="685800" y="6291072"/>
-            <a:ext cx="5486400" cy="274320"/>
-          </a:xfrm>
-          <a:prstGeom prst="rect">
-            <a:avLst/>
-          </a:prstGeom>
-          <a:noFill/>
-          <a:ln/>
-        </p:spPr>
-        <p:txBody>
-          <a:bodyPr wrap="square" lIns="0" tIns="0" rIns="0" bIns="0" rtlCol="0" anchor="ctr"/>
-          <a:lstStyle/>
-          <a:p>
-            <a:pPr indent="0" marL="0">
-              <a:buNone/>
-            </a:pPr>
-            <a:r>
-              <a:rPr lang="en-US" sz="900" dirty="0">
-                <a:solidFill>
-                  <a:srgbClr val="6A7D74"/>
-                </a:solidFill>
-                <a:latin typeface="Courier New" pitchFamily="34" charset="0"/>
-                <a:ea typeface="Courier New" pitchFamily="34" charset="-122"/>
-                <a:cs typeface="Courier New" pitchFamily="34" charset="-120"/>
-              </a:rPr>
-              <a:t>Auditix AI  ·  SVATech  ·  grupo 11</a:t>
+              <a:t>Auditix IA  ·  grupo 11</a:t>
             </a:r>
             <a:endParaRPr lang="en-US" sz="900" dirty="0"/>
           </a:p>
@@ -13657,7 +12663,7 @@
       </p:sp>
       <p:sp>
         <p:nvSpPr>
-          <p:cNvPr id="19" name="Text 16"/>
+          <p:cNvPr id="29" name="Text 27"/>
           <p:cNvSpPr txBox="1"/>
           <p:nvPr/>
         </p:nvSpPr>

--- a/Auditix-slides.pptx
+++ b/Auditix-slides.pptx
@@ -12616,7 +12616,7 @@
                 <a:ea typeface="Calibri" pitchFamily="34" charset="-122"/>
                 <a:cs typeface="Calibri" pitchFamily="34" charset="-120"/>
               </a:rPr>
-              <a:t>Borda que decide mais prova que não se altera: portaria com consentimento, e a área da saúde.</a:t>
+              <a:t>Borda que decide mais prova que não se altera: portaria com consentimento, e a segurança patrimonial.</a:t>
             </a:r>
             <a:endParaRPr lang="en-US" sz="1200" dirty="0"/>
           </a:p>
